--- a/docs/assets/FormulaBench-Hackathon-Deck.pptx
+++ b/docs/assets/FormulaBench-Hackathon-Deck.pptx
@@ -2,20 +2,20 @@
 <file path=ppt/presentation.xml><?xml version="1.0" encoding="utf-8"?>
 <p:presentation xmlns:p="http://schemas.openxmlformats.org/presentationml/2006/main">
   <p:sldMasterIdLst>
-    <p:sldMasterId xmlns:r="http://schemas.openxmlformats.org/officeDocument/2006/relationships" id="2147483648" r:id="R9fd72be0e2f34910"/>
+    <p:sldMasterId xmlns:r="http://schemas.openxmlformats.org/officeDocument/2006/relationships" id="2147483648" r:id="R8801c75695f94f03"/>
   </p:sldMasterIdLst>
   <p:notesMasterIdLst>
-    <p:notesMasterId xmlns:r="http://schemas.openxmlformats.org/officeDocument/2006/relationships" r:id="R9223448c2e444314"/>
+    <p:notesMasterId xmlns:r="http://schemas.openxmlformats.org/officeDocument/2006/relationships" r:id="R872e820f27594ab4"/>
   </p:notesMasterIdLst>
   <p:sldIdLst>
-    <p:sldId xmlns:r="http://schemas.openxmlformats.org/officeDocument/2006/relationships" id="256" r:id="Rb55a06d4e8f241bc"/>
-    <p:sldId xmlns:r="http://schemas.openxmlformats.org/officeDocument/2006/relationships" id="257" r:id="Re9154dacb32b46a1"/>
-    <p:sldId xmlns:r="http://schemas.openxmlformats.org/officeDocument/2006/relationships" id="258" r:id="R8a8a0b263f8744bd"/>
-    <p:sldId xmlns:r="http://schemas.openxmlformats.org/officeDocument/2006/relationships" id="259" r:id="R05c4f45d81d44bd8"/>
-    <p:sldId xmlns:r="http://schemas.openxmlformats.org/officeDocument/2006/relationships" id="260" r:id="R36c8c0fa356348cf"/>
-    <p:sldId xmlns:r="http://schemas.openxmlformats.org/officeDocument/2006/relationships" id="261" r:id="Re4221fb2741f4e77"/>
-    <p:sldId xmlns:r="http://schemas.openxmlformats.org/officeDocument/2006/relationships" id="262" r:id="R14c0065a2de74602"/>
-    <p:sldId xmlns:r="http://schemas.openxmlformats.org/officeDocument/2006/relationships" id="263" r:id="R048f529c53e24f88"/>
+    <p:sldId xmlns:r="http://schemas.openxmlformats.org/officeDocument/2006/relationships" id="256" r:id="Re93ae3687b80495c"/>
+    <p:sldId xmlns:r="http://schemas.openxmlformats.org/officeDocument/2006/relationships" id="257" r:id="R4c6d30c6d22c4f3d"/>
+    <p:sldId xmlns:r="http://schemas.openxmlformats.org/officeDocument/2006/relationships" id="258" r:id="Rf4903c6304be4764"/>
+    <p:sldId xmlns:r="http://schemas.openxmlformats.org/officeDocument/2006/relationships" id="259" r:id="R708608d061ab475b"/>
+    <p:sldId xmlns:r="http://schemas.openxmlformats.org/officeDocument/2006/relationships" id="260" r:id="R21ac3794744a4b9d"/>
+    <p:sldId xmlns:r="http://schemas.openxmlformats.org/officeDocument/2006/relationships" id="261" r:id="Rcc97828a411b4b84"/>
+    <p:sldId xmlns:r="http://schemas.openxmlformats.org/officeDocument/2006/relationships" id="262" r:id="R5343badcf1074f6d"/>
+    <p:sldId xmlns:r="http://schemas.openxmlformats.org/officeDocument/2006/relationships" id="263" r:id="R2b9f722ad50e490b"/>
   </p:sldIdLst>
   <p:sldSz cx="12192000" cy="6858000"/>
   <p:notesSz cx="6858000" cy="9144000"/>
@@ -544,12 +544,27 @@
           </a:p>
           <a:p xmlns:a="http://schemas.openxmlformats.org/drawingml/2006/main">
             <a:r>
-              <a:t>README.md sections Description and Features</a:t>
-            </a:r>
-          </a:p>
-          <a:p xmlns:a="http://schemas.openxmlformats.org/drawingml/2006/main">
-            <a:r>
-              <a:t>SUBMISSION.md section What we built and why</a:t>
+              <a:t>submissions/formulabench/results.json</a:t>
+            </a:r>
+          </a:p>
+          <a:p xmlns:a="http://schemas.openxmlformats.org/drawingml/2006/main">
+            <a:r>
+              <a:t>SHA-256 c1e6fb6b540bb7272f4c537773e2a4826dd649d882c9b7fb549df9bccc66be0d</a:t>
+            </a:r>
+          </a:p>
+          <a:p xmlns:a="http://schemas.openxmlformats.org/drawingml/2006/main">
+            <a:r>
+              <a:t>SUBMISSION.md section Our run on the 400</a:t>
+            </a:r>
+          </a:p>
+          <a:p xmlns:a="http://schemas.openxmlformats.org/drawingml/2006/main">
+            <a:r>
+              <a:t>Public self-evaluation totals: 400 evaluated tasks, 133 passes, 297,882 target cells, 120,824 correct cells, no missing tasks and no evaluator errors.</a:t>
+            </a:r>
+          </a:p>
+          <a:p xmlns:a="http://schemas.openxmlformats.org/drawingml/2006/main">
+            <a:r>
+              <a:t>FormulaBench produced this result locally with the organiser-supplied evaluator. The organisers have not certified the score.</a:t>
             </a:r>
           </a:p>
         </p:txBody>
@@ -624,32 +639,12 @@
           </a:p>
           <a:p xmlns:a="http://schemas.openxmlformats.org/drawingml/2006/main">
             <a:r>
-              <a:t>README.md Architecture Overview, Features and Tech Stack</a:t>
-            </a:r>
-          </a:p>
-          <a:p xmlns:a="http://schemas.openxmlformats.org/drawingml/2006/main">
-            <a:r>
-              <a:t>SUBMISSION.md What we built and why</a:t>
-            </a:r>
-          </a:p>
-          <a:p xmlns:a="http://schemas.openxmlformats.org/drawingml/2006/main">
-            <a:r>
-              <a:t>formulabench/context.py</a:t>
-            </a:r>
-          </a:p>
-          <a:p xmlns:a="http://schemas.openxmlformats.org/drawingml/2006/main">
-            <a:r>
-              <a:t>formulabench/provider.py</a:t>
-            </a:r>
-          </a:p>
-          <a:p xmlns:a="http://schemas.openxmlformats.org/drawingml/2006/main">
-            <a:r>
-              <a:t>formulabench/contract.py</a:t>
-            </a:r>
-          </a:p>
-          <a:p xmlns:a="http://schemas.openxmlformats.org/drawingml/2006/main">
-            <a:r>
-              <a:t>formulabench/artifacts.py</a:t>
+              <a:t>README.md sections Description and Features</a:t>
+            </a:r>
+          </a:p>
+          <a:p xmlns:a="http://schemas.openxmlformats.org/drawingml/2006/main">
+            <a:r>
+              <a:t>SUBMISSION.md section What we built and why</a:t>
             </a:r>
           </a:p>
         </p:txBody>
@@ -724,7 +719,7 @@
           </a:p>
           <a:p xmlns:a="http://schemas.openxmlformats.org/drawingml/2006/main">
             <a:r>
-              <a:t>README.md Features</a:t>
+              <a:t>README.md Architecture Overview, Features and Tech Stack</a:t>
             </a:r>
           </a:p>
           <a:p xmlns:a="http://schemas.openxmlformats.org/drawingml/2006/main">
@@ -734,17 +729,22 @@
           </a:p>
           <a:p xmlns:a="http://schemas.openxmlformats.org/drawingml/2006/main">
             <a:r>
+              <a:t>formulabench/context.py</a:t>
+            </a:r>
+          </a:p>
+          <a:p xmlns:a="http://schemas.openxmlformats.org/drawingml/2006/main">
+            <a:r>
+              <a:t>formulabench/provider.py</a:t>
+            </a:r>
+          </a:p>
+          <a:p xmlns:a="http://schemas.openxmlformats.org/drawingml/2006/main">
+            <a:r>
               <a:t>formulabench/contract.py</a:t>
             </a:r>
           </a:p>
           <a:p xmlns:a="http://schemas.openxmlformats.org/drawingml/2006/main">
             <a:r>
               <a:t>formulabench/artifacts.py</a:t>
-            </a:r>
-          </a:p>
-          <a:p xmlns:a="http://schemas.openxmlformats.org/drawingml/2006/main">
-            <a:r>
-              <a:t>experiments/public_benchmark_audit.json</a:t>
             </a:r>
           </a:p>
         </p:txBody>
@@ -819,27 +819,27 @@
           </a:p>
           <a:p xmlns:a="http://schemas.openxmlformats.org/drawingml/2006/main">
             <a:r>
-              <a:t>submissions/formulabench/results.json</a:t>
-            </a:r>
-          </a:p>
-          <a:p xmlns:a="http://schemas.openxmlformats.org/drawingml/2006/main">
-            <a:r>
-              <a:t>SHA-256 c1e6fb6b540bb7272f4c537773e2a4826dd649d882c9b7fb549df9bccc66be0d</a:t>
-            </a:r>
-          </a:p>
-          <a:p xmlns:a="http://schemas.openxmlformats.org/drawingml/2006/main">
-            <a:r>
-              <a:t>SUBMISSION.md section Our run on the 400</a:t>
-            </a:r>
-          </a:p>
-          <a:p xmlns:a="http://schemas.openxmlformats.org/drawingml/2006/main">
-            <a:r>
-              <a:t>Public self-evaluation totals: 400 evaluated tasks, 133 passes, 297,882 target cells, 120,824 correct cells, no missing tasks and no evaluator errors.</a:t>
-            </a:r>
-          </a:p>
-          <a:p xmlns:a="http://schemas.openxmlformats.org/drawingml/2006/main">
-            <a:r>
-              <a:t>FormulaBench produced this result locally with the organiser-supplied evaluator. The organisers have not certified the score.</a:t>
+              <a:t>README.md Features</a:t>
+            </a:r>
+          </a:p>
+          <a:p xmlns:a="http://schemas.openxmlformats.org/drawingml/2006/main">
+            <a:r>
+              <a:t>SUBMISSION.md What we built and why</a:t>
+            </a:r>
+          </a:p>
+          <a:p xmlns:a="http://schemas.openxmlformats.org/drawingml/2006/main">
+            <a:r>
+              <a:t>formulabench/contract.py</a:t>
+            </a:r>
+          </a:p>
+          <a:p xmlns:a="http://schemas.openxmlformats.org/drawingml/2006/main">
+            <a:r>
+              <a:t>formulabench/artifacts.py</a:t>
+            </a:r>
+          </a:p>
+          <a:p xmlns:a="http://schemas.openxmlformats.org/drawingml/2006/main">
+            <a:r>
+              <a:t>experiments/public_benchmark_audit.json</a:t>
             </a:r>
           </a:p>
         </p:txBody>
@@ -1129,7 +1129,7 @@
           </a:p>
           <a:p xmlns:a="http://schemas.openxmlformats.org/drawingml/2006/main">
             <a:r>
-              <a:t>The proposed operation executor is future work and is not part of the frozen public self-evaluation.</a:t>
+              <a:t>The proposed fixed-operation path is future work and is not part of the frozen public self-evaluation.</a:t>
             </a:r>
           </a:p>
           <a:p xmlns:a="http://schemas.openxmlformats.org/drawingml/2006/main">
@@ -1202,7 +1202,7 @@
   </p:cSld>
   <p:clrMap bg1="lt1" tx1="dk1" bg2="lt2" tx2="dk2" accent1="accent1" accent2="accent2" accent3="accent3" accent4="accent4" accent5="accent5" accent6="accent6" hlink="hlink" folHlink="folHlink"/>
   <p:sldLayoutIdLst>
-    <p:sldLayoutId xmlns:r="http://schemas.openxmlformats.org/officeDocument/2006/relationships" id="2147483649" r:id="Rf47a4e81ef1d43f0"/>
+    <p:sldLayoutId xmlns:r="http://schemas.openxmlformats.org/officeDocument/2006/relationships" id="2147483649" r:id="R21524589e09e4f6b"/>
   </p:sldLayoutIdLst>
   <p:txStyles>
     <p:titleStyle>
@@ -1767,41 +1767,26 @@
               </a:solidFill>
             </c:spPr>
           </c:dPt>
-          <c:dPt>
-            <c:idx val="2"/>
-            <c:invertIfNegative val="0"/>
-            <c:spPr>
-              <a:solidFill xmlns:a="http://schemas.openxmlformats.org/drawingml/2006/main">
-                <a:srgbClr val="D6DCE2"/>
-              </a:solidFill>
-            </c:spPr>
-          </c:dPt>
           <c:cat>
             <c:strLit>
-              <c:ptCount val="3"/>
+              <c:ptCount val="2"/>
               <c:pt idx="0">
                 <c:v>Task pass rate</c:v>
               </c:pt>
               <c:pt idx="1">
                 <c:v>Cell accuracy</c:v>
               </c:pt>
-              <c:pt idx="2">
-                <c:v>Full-scale reference</c:v>
-              </c:pt>
             </c:strLit>
           </c:cat>
           <c:val>
             <c:numLit>
               <c:formatCode>0.00%</c:formatCode>
-              <c:ptCount val="3"/>
+              <c:ptCount val="2"/>
               <c:pt idx="0">
                 <c:v>0.3325</c:v>
               </c:pt>
               <c:pt idx="1">
                 <c:v>0.4056</c:v>
-              </c:pt>
-              <c:pt idx="2">
-                <c:v>1</c:v>
               </c:pt>
             </c:numLit>
           </c:val>
@@ -1965,10 +1950,12 @@
             <c:strLit>
               <c:ptCount val="2"/>
               <c:pt idx="0">
-                <c:v>Contract-valid but wrong</c:v>
+                <c:v>Passed structural checks
+94.84%</c:v>
               </c:pt>
               <c:pt idx="1">
-                <c:v>Fail-closed fallback</c:v>
+                <c:v>Rejected responses
+5.16%</c:v>
               </c:pt>
             </c:strLit>
           </c:cat>
@@ -2006,7 +1993,7 @@
           <c:showVal val="0"/>
           <c:showCatName val="1"/>
           <c:showSerName val="0"/>
-          <c:showPercent val="1"/>
+          <c:showPercent val="0"/>
           <c:showBubbleSize val="0"/>
           <c:showLeaderLines val="1"/>
         </c:dLbls>
@@ -2056,10 +2043,10 @@
       </p:grpSpPr>
       <p:sp>
         <p:nvSpPr>
-          <p:cNvPr id="11" name="">
-            <a:extLst xmlns:a="http://schemas.openxmlformats.org/drawingml/2006/main">
-              <a:ext uri="{FF2B5EF4-FFF2-40B4-BE49-F238E27FC236}">
-                <a16:creationId xmlns:a16="http://schemas.microsoft.com/office/drawing/2014/main" id="{BC653032-58E1-453B-8CC1-3A7B5FB684EA}"/>
+          <p:cNvPr id="9" name="">
+            <a:extLst xmlns:a="http://schemas.openxmlformats.org/drawingml/2006/main">
+              <a:ext uri="{FF2B5EF4-FFF2-40B4-BE49-F238E27FC236}">
+                <a16:creationId xmlns:a16="http://schemas.microsoft.com/office/drawing/2014/main" id="{50C10181-1F51-4B1E-8C46-05502D297C1A}"/>
               </a:ext>
             </a:extLst>
           </p:cNvPr>
@@ -2120,7 +2107,7 @@
           <p:cNvPr id="2" name="">
             <a:extLst xmlns:a="http://schemas.openxmlformats.org/drawingml/2006/main">
               <a:ext uri="{FF2B5EF4-FFF2-40B4-BE49-F238E27FC236}">
-                <a16:creationId xmlns:a16="http://schemas.microsoft.com/office/drawing/2014/main" id="{884191D2-EE64-482F-86A4-FA10FE1EC955}"/>
+                <a16:creationId xmlns:a16="http://schemas.microsoft.com/office/drawing/2014/main" id="{76F0A433-1B5F-40C0-A848-711343C4D3F5}"/>
               </a:ext>
             </a:extLst>
           </p:cNvPr>
@@ -2181,7 +2168,7 @@
           <p:cNvPr id="3" name="">
             <a:extLst xmlns:a="http://schemas.openxmlformats.org/drawingml/2006/main">
               <a:ext uri="{FF2B5EF4-FFF2-40B4-BE49-F238E27FC236}">
-                <a16:creationId xmlns:a16="http://schemas.microsoft.com/office/drawing/2014/main" id="{30A84E1E-015F-4F28-98A4-EF454CF54581}"/>
+                <a16:creationId xmlns:a16="http://schemas.microsoft.com/office/drawing/2014/main" id="{431C5799-0BF4-427A-A11B-A2C30EE900C3}"/>
               </a:ext>
             </a:extLst>
           </p:cNvPr>
@@ -2242,7 +2229,7 @@
           <p:cNvPr id="4" name="">
             <a:extLst xmlns:a="http://schemas.openxmlformats.org/drawingml/2006/main">
               <a:ext uri="{FF2B5EF4-FFF2-40B4-BE49-F238E27FC236}">
-                <a16:creationId xmlns:a16="http://schemas.microsoft.com/office/drawing/2014/main" id="{76E89CA2-316E-4B58-B100-108064046370}"/>
+                <a16:creationId xmlns:a16="http://schemas.microsoft.com/office/drawing/2014/main" id="{91326E6C-B848-4446-AEE1-AF8CBE39B845}"/>
               </a:ext>
             </a:extLst>
           </p:cNvPr>
@@ -2273,7 +2260,7 @@
           <p:cNvPr id="5" name="">
             <a:extLst xmlns:a="http://schemas.openxmlformats.org/drawingml/2006/main">
               <a:ext uri="{FF2B5EF4-FFF2-40B4-BE49-F238E27FC236}">
-                <a16:creationId xmlns:a16="http://schemas.microsoft.com/office/drawing/2014/main" id="{91BC3E74-D71C-4E23-8877-E6012FE469F6}"/>
+                <a16:creationId xmlns:a16="http://schemas.microsoft.com/office/drawing/2014/main" id="{CC3FBA75-89A2-406C-9B56-1E0B88735BC7}"/>
               </a:ext>
             </a:extLst>
           </p:cNvPr>
@@ -2361,7 +2348,7 @@
           <p:cNvPr id="6" name="">
             <a:extLst xmlns:a="http://schemas.openxmlformats.org/drawingml/2006/main">
               <a:ext uri="{FF2B5EF4-FFF2-40B4-BE49-F238E27FC236}">
-                <a16:creationId xmlns:a16="http://schemas.microsoft.com/office/drawing/2014/main" id="{67B6263D-0647-4B30-B1CD-99946B3D8050}"/>
+                <a16:creationId xmlns:a16="http://schemas.microsoft.com/office/drawing/2014/main" id="{330907F1-1244-47A9-86A9-D0BCC5592C88}"/>
               </a:ext>
             </a:extLst>
           </p:cNvPr>
@@ -2530,7 +2517,7 @@
           <p:cNvPr id="7" name="">
             <a:extLst xmlns:a="http://schemas.openxmlformats.org/drawingml/2006/main">
               <a:ext uri="{FF2B5EF4-FFF2-40B4-BE49-F238E27FC236}">
-                <a16:creationId xmlns:a16="http://schemas.microsoft.com/office/drawing/2014/main" id="{3E543DAE-974D-41BC-B52F-AFAC98014FCC}"/>
+                <a16:creationId xmlns:a16="http://schemas.microsoft.com/office/drawing/2014/main" id="{F4088BC7-59A6-4E37-9AB3-2AE90CF8D688}"/>
               </a:ext>
             </a:extLst>
           </p:cNvPr>
@@ -2542,7 +2529,7 @@
         <p:spPr>
           <a:xfrm xmlns:a="http://schemas.openxmlformats.org/drawingml/2006/main">
             <a:off x="7372350" y="4514850"/>
-            <a:ext cx="1619250" cy="266700"/>
+            <a:ext cx="2476500" cy="266700"/>
           </a:xfrm>
           <a:prstGeom xmlns:a="http://schemas.openxmlformats.org/drawingml/2006/main" prst="rect">
             <a:avLst/>
@@ -2581,7 +2568,7 @@
                 <a:ea typeface="Arial"/>
                 <a:cs typeface="Arial"/>
               </a:rPr>
-              <a:t>INSPECTED</a:t>
+              <a:t>ILLUSTRATIVE FORMULA</a:t>
             </a:r>
           </a:p>
         </p:txBody>
@@ -2591,129 +2578,7 @@
           <p:cNvPr id="8" name="">
             <a:extLst xmlns:a="http://schemas.openxmlformats.org/drawingml/2006/main">
               <a:ext uri="{FF2B5EF4-FFF2-40B4-BE49-F238E27FC236}">
-                <a16:creationId xmlns:a16="http://schemas.microsoft.com/office/drawing/2014/main" id="{48ED6385-8ADE-4FFE-A4B5-25C1CF31FDEC}"/>
-              </a:ext>
-            </a:extLst>
-          </p:cNvPr>
-          <p:cNvSpPr>
-            <a:spLocks xmlns:a="http://schemas.openxmlformats.org/drawingml/2006/main" noGrp="1"/>
-          </p:cNvSpPr>
-          <p:nvPr/>
-        </p:nvSpPr>
-        <p:spPr>
-          <a:xfrm xmlns:a="http://schemas.openxmlformats.org/drawingml/2006/main">
-            <a:off x="7372350" y="4933950"/>
-            <a:ext cx="1619250" cy="266700"/>
-          </a:xfrm>
-          <a:prstGeom xmlns:a="http://schemas.openxmlformats.org/drawingml/2006/main" prst="rect">
-            <a:avLst/>
-          </a:prstGeom>
-          <a:noFill xmlns:a="http://schemas.openxmlformats.org/drawingml/2006/main"/>
-          <a:ln xmlns:a="http://schemas.openxmlformats.org/drawingml/2006/main" w="0">
-            <a:noFill/>
-          </a:ln>
-        </p:spPr>
-        <p:txBody>
-          <a:bodyPr xmlns:a="http://schemas.openxmlformats.org/drawingml/2006/main" wrap="square" lIns="0" tIns="0" rIns="0" bIns="0" anchor="t">
-            <a:normAutofit fontScale="100000"/>
-          </a:bodyPr>
-          <a:lstStyle xmlns:a="http://schemas.openxmlformats.org/drawingml/2006/main"/>
-          <a:p xmlns:a="http://schemas.openxmlformats.org/drawingml/2006/main">
-            <a:pPr algn="l">
-              <a:lnSpc>
-                <a:spcPct val="105000"/>
-              </a:lnSpc>
-              <a:buNone/>
-              <a:defRPr sz="1125" b="1" i="0">
-                <a:solidFill>
-                  <a:srgbClr val="35C47A"/>
-                </a:solidFill>
-                <a:latin typeface="Arial"/>
-                <a:ea typeface="Arial"/>
-                <a:cs typeface="Arial"/>
-              </a:defRPr>
-            </a:pPr>
-            <a:r>
-              <a:rPr sz="1125" b="1" i="0">
-                <a:solidFill>
-                  <a:srgbClr val="35C47A"/>
-                </a:solidFill>
-                <a:latin typeface="Arial"/>
-                <a:ea typeface="Arial"/>
-                <a:cs typeface="Arial"/>
-              </a:rPr>
-              <a:t>GENERATED</a:t>
-            </a:r>
-          </a:p>
-        </p:txBody>
-      </p:sp>
-      <p:sp>
-        <p:nvSpPr>
-          <p:cNvPr id="9" name="">
-            <a:extLst xmlns:a="http://schemas.openxmlformats.org/drawingml/2006/main">
-              <a:ext uri="{FF2B5EF4-FFF2-40B4-BE49-F238E27FC236}">
-                <a16:creationId xmlns:a16="http://schemas.microsoft.com/office/drawing/2014/main" id="{FF34EFAD-F849-4B79-887F-348D737A8192}"/>
-              </a:ext>
-            </a:extLst>
-          </p:cNvPr>
-          <p:cNvSpPr>
-            <a:spLocks xmlns:a="http://schemas.openxmlformats.org/drawingml/2006/main" noGrp="1"/>
-          </p:cNvSpPr>
-          <p:nvPr/>
-        </p:nvSpPr>
-        <p:spPr>
-          <a:xfrm xmlns:a="http://schemas.openxmlformats.org/drawingml/2006/main">
-            <a:off x="7372350" y="5353050"/>
-            <a:ext cx="1619250" cy="266700"/>
-          </a:xfrm>
-          <a:prstGeom xmlns:a="http://schemas.openxmlformats.org/drawingml/2006/main" prst="rect">
-            <a:avLst/>
-          </a:prstGeom>
-          <a:noFill xmlns:a="http://schemas.openxmlformats.org/drawingml/2006/main"/>
-          <a:ln xmlns:a="http://schemas.openxmlformats.org/drawingml/2006/main" w="0">
-            <a:noFill/>
-          </a:ln>
-        </p:spPr>
-        <p:txBody>
-          <a:bodyPr xmlns:a="http://schemas.openxmlformats.org/drawingml/2006/main" wrap="square" lIns="0" tIns="0" rIns="0" bIns="0" anchor="t">
-            <a:normAutofit fontScale="100000"/>
-          </a:bodyPr>
-          <a:lstStyle xmlns:a="http://schemas.openxmlformats.org/drawingml/2006/main"/>
-          <a:p xmlns:a="http://schemas.openxmlformats.org/drawingml/2006/main">
-            <a:pPr algn="l">
-              <a:lnSpc>
-                <a:spcPct val="105000"/>
-              </a:lnSpc>
-              <a:buNone/>
-              <a:defRPr sz="1125" b="1" i="0">
-                <a:solidFill>
-                  <a:srgbClr val="35C47A"/>
-                </a:solidFill>
-                <a:latin typeface="Arial"/>
-                <a:ea typeface="Arial"/>
-                <a:cs typeface="Arial"/>
-              </a:defRPr>
-            </a:pPr>
-            <a:r>
-              <a:rPr sz="1125" b="1" i="0">
-                <a:solidFill>
-                  <a:srgbClr val="35C47A"/>
-                </a:solidFill>
-                <a:latin typeface="Arial"/>
-                <a:ea typeface="Arial"/>
-                <a:cs typeface="Arial"/>
-              </a:rPr>
-              <a:t>VALIDATED</a:t>
-            </a:r>
-          </a:p>
-        </p:txBody>
-      </p:sp>
-      <p:sp>
-        <p:nvSpPr>
-          <p:cNvPr id="10" name="">
-            <a:extLst xmlns:a="http://schemas.openxmlformats.org/drawingml/2006/main">
-              <a:ext uri="{FF2B5EF4-FFF2-40B4-BE49-F238E27FC236}">
-                <a16:creationId xmlns:a16="http://schemas.microsoft.com/office/drawing/2014/main" id="{DF50E6E3-C49E-4965-93A3-9D70F82EB230}"/>
+                <a16:creationId xmlns:a16="http://schemas.microsoft.com/office/drawing/2014/main" id="{82617AB2-2FFF-4924-A0D3-C325E4FD293E}"/>
               </a:ext>
             </a:extLst>
           </p:cNvPr>
@@ -2725,7 +2590,7 @@
         <p:spPr>
           <a:xfrm xmlns:a="http://schemas.openxmlformats.org/drawingml/2006/main">
             <a:off x="628650" y="6115050"/>
-            <a:ext cx="6667500" cy="228600"/>
+            <a:ext cx="7810500" cy="228600"/>
           </a:xfrm>
           <a:prstGeom xmlns:a="http://schemas.openxmlformats.org/drawingml/2006/main" prst="rect">
             <a:avLst/>
@@ -2764,7 +2629,7 @@
                 <a:ea typeface="Arial"/>
                 <a:cs typeface="Arial"/>
               </a:rPr>
-              <a:t>400 public tasks · complete run · auditable artefacts</a:t>
+              <a:t>Complete public benchmark: all 400 tasks with retained traces and workbook artefacts</a:t>
             </a:r>
           </a:p>
         </p:txBody>
@@ -2772,7 +2637,7 @@
     </p:spTree>
     <p:extLst>
       <p:ext uri="{BB962C8B-B14F-4D97-AF65-F5344CB8AC3E}">
-        <p14:creationId xmlns:p14="http://schemas.microsoft.com/office/powerpoint/2010/main" val="1491547496"/>
+        <p14:creationId xmlns:p14="http://schemas.microsoft.com/office/powerpoint/2010/main" val="585923939"/>
       </p:ext>
     </p:extLst>
   </p:cSld>
@@ -2780,6 +2645,753 @@
 </file>
 
 <file path=ppt/slides/slide2.xml><?xml version="1.0" encoding="utf-8"?>
+<p:sld xmlns:p="http://schemas.openxmlformats.org/presentationml/2006/main">
+  <p:cSld>
+    <p:bg>
+      <p:bgPr>
+        <a:solidFill xmlns:a="http://schemas.openxmlformats.org/drawingml/2006/main">
+          <a:srgbClr val="FFFDF8"/>
+        </a:solidFill>
+      </p:bgPr>
+    </p:bg>
+    <p:spTree>
+      <p:nvGrpSpPr>
+        <p:cNvPr id="1" name=""/>
+        <p:cNvGrpSpPr/>
+        <p:nvPr/>
+      </p:nvGrpSpPr>
+      <p:grpSpPr>
+        <a:xfrm xmlns:a="http://schemas.openxmlformats.org/drawingml/2006/main"/>
+      </p:grpSpPr>
+      <p:sp>
+        <p:nvSpPr>
+          <p:cNvPr id="14" name="slide-title">
+            <a:extLst xmlns:a="http://schemas.openxmlformats.org/drawingml/2006/main">
+              <a:ext uri="{FF2B5EF4-FFF2-40B4-BE49-F238E27FC236}">
+                <a16:creationId xmlns:a16="http://schemas.microsoft.com/office/drawing/2014/main" id="{885EC345-FAA5-4F68-88ED-A6C32EFAF0B6}"/>
+              </a:ext>
+            </a:extLst>
+          </p:cNvPr>
+          <p:cNvSpPr>
+            <a:spLocks xmlns:a="http://schemas.openxmlformats.org/drawingml/2006/main" noGrp="1"/>
+          </p:cNvSpPr>
+          <p:nvPr/>
+        </p:nvSpPr>
+        <p:spPr>
+          <a:xfrm xmlns:a="http://schemas.openxmlformats.org/drawingml/2006/main">
+            <a:off x="609600" y="428625"/>
+            <a:ext cx="10972800" cy="590550"/>
+          </a:xfrm>
+          <a:prstGeom xmlns:a="http://schemas.openxmlformats.org/drawingml/2006/main" prst="rect">
+            <a:avLst/>
+          </a:prstGeom>
+          <a:noFill xmlns:a="http://schemas.openxmlformats.org/drawingml/2006/main"/>
+          <a:ln xmlns:a="http://schemas.openxmlformats.org/drawingml/2006/main" w="0">
+            <a:noFill/>
+          </a:ln>
+        </p:spPr>
+        <p:txBody>
+          <a:bodyPr xmlns:a="http://schemas.openxmlformats.org/drawingml/2006/main" wrap="square" lIns="0" tIns="0" rIns="0" bIns="0" anchor="t">
+            <a:normAutofit fontScale="100000"/>
+          </a:bodyPr>
+          <a:lstStyle xmlns:a="http://schemas.openxmlformats.org/drawingml/2006/main"/>
+          <a:p xmlns:a="http://schemas.openxmlformats.org/drawingml/2006/main">
+            <a:pPr algn="l">
+              <a:lnSpc>
+                <a:spcPct val="105000"/>
+              </a:lnSpc>
+              <a:buNone/>
+              <a:defRPr sz="3300" b="1" i="0">
+                <a:solidFill>
+                  <a:srgbClr val="122033"/>
+                </a:solidFill>
+                <a:latin typeface="Arial"/>
+                <a:ea typeface="Arial"/>
+                <a:cs typeface="Arial"/>
+              </a:defRPr>
+            </a:pPr>
+            <a:r>
+              <a:rPr sz="3300" b="1" i="0">
+                <a:solidFill>
+                  <a:srgbClr val="122033"/>
+                </a:solidFill>
+                <a:latin typeface="Arial"/>
+                <a:ea typeface="Arial"/>
+                <a:cs typeface="Arial"/>
+              </a:rPr>
+              <a:t>Public self-evaluation: 133 of 400 tasks passed</a:t>
+            </a:r>
+          </a:p>
+        </p:txBody>
+      </p:sp>
+      <p:sp>
+        <p:nvSpPr>
+          <p:cNvPr id="2" name="">
+            <a:extLst xmlns:a="http://schemas.openxmlformats.org/drawingml/2006/main">
+              <a:ext uri="{FF2B5EF4-FFF2-40B4-BE49-F238E27FC236}">
+                <a16:creationId xmlns:a16="http://schemas.microsoft.com/office/drawing/2014/main" id="{EEEE5744-0295-462D-88A0-C3E92D931C41}"/>
+              </a:ext>
+            </a:extLst>
+          </p:cNvPr>
+          <p:cNvSpPr>
+            <a:spLocks xmlns:a="http://schemas.openxmlformats.org/drawingml/2006/main" noGrp="1"/>
+          </p:cNvSpPr>
+          <p:nvPr/>
+        </p:nvSpPr>
+        <p:spPr>
+          <a:xfrm xmlns:a="http://schemas.openxmlformats.org/drawingml/2006/main">
+            <a:off x="609600" y="1028700"/>
+            <a:ext cx="10572750" cy="361950"/>
+          </a:xfrm>
+          <a:prstGeom xmlns:a="http://schemas.openxmlformats.org/drawingml/2006/main" prst="rect">
+            <a:avLst/>
+          </a:prstGeom>
+          <a:noFill xmlns:a="http://schemas.openxmlformats.org/drawingml/2006/main"/>
+          <a:ln xmlns:a="http://schemas.openxmlformats.org/drawingml/2006/main" w="0">
+            <a:noFill/>
+          </a:ln>
+        </p:spPr>
+        <p:txBody>
+          <a:bodyPr xmlns:a="http://schemas.openxmlformats.org/drawingml/2006/main" wrap="square" lIns="0" tIns="0" rIns="0" bIns="0" anchor="t">
+            <a:normAutofit fontScale="100000"/>
+          </a:bodyPr>
+          <a:lstStyle xmlns:a="http://schemas.openxmlformats.org/drawingml/2006/main"/>
+          <a:p xmlns:a="http://schemas.openxmlformats.org/drawingml/2006/main">
+            <a:pPr algn="l">
+              <a:lnSpc>
+                <a:spcPct val="105000"/>
+              </a:lnSpc>
+              <a:buNone/>
+              <a:defRPr sz="1725" b="0" i="0">
+                <a:solidFill>
+                  <a:srgbClr val="667487"/>
+                </a:solidFill>
+                <a:latin typeface="Arial"/>
+                <a:ea typeface="Arial"/>
+                <a:cs typeface="Arial"/>
+              </a:defRPr>
+            </a:pPr>
+            <a:r>
+              <a:rPr sz="1725" b="0" i="0">
+                <a:solidFill>
+                  <a:srgbClr val="667487"/>
+                </a:solidFill>
+                <a:latin typeface="Arial"/>
+                <a:ea typeface="Arial"/>
+                <a:cs typeface="Arial"/>
+              </a:rPr>
+              <a:t>The run recalculated every workbook in LibreOffice before using the organiser-supplied evaluator.</a:t>
+            </a:r>
+          </a:p>
+        </p:txBody>
+      </p:sp>
+      <p:sp>
+        <p:nvSpPr>
+          <p:cNvPr id="3" name="">
+            <a:extLst xmlns:a="http://schemas.openxmlformats.org/drawingml/2006/main">
+              <a:ext uri="{FF2B5EF4-FFF2-40B4-BE49-F238E27FC236}">
+                <a16:creationId xmlns:a16="http://schemas.microsoft.com/office/drawing/2014/main" id="{A5666C6F-B306-447F-A4D3-76DDF8322942}"/>
+              </a:ext>
+            </a:extLst>
+          </p:cNvPr>
+          <p:cNvSpPr>
+            <a:spLocks xmlns:a="http://schemas.openxmlformats.org/drawingml/2006/main" noGrp="1"/>
+          </p:cNvSpPr>
+          <p:nvPr/>
+        </p:nvSpPr>
+        <p:spPr>
+          <a:xfrm xmlns:a="http://schemas.openxmlformats.org/drawingml/2006/main">
+            <a:off x="609600" y="1638300"/>
+            <a:ext cx="3143250" cy="762000"/>
+          </a:xfrm>
+          <a:prstGeom xmlns:a="http://schemas.openxmlformats.org/drawingml/2006/main" prst="rect">
+            <a:avLst/>
+          </a:prstGeom>
+          <a:noFill xmlns:a="http://schemas.openxmlformats.org/drawingml/2006/main"/>
+          <a:ln xmlns:a="http://schemas.openxmlformats.org/drawingml/2006/main" w="0">
+            <a:noFill/>
+          </a:ln>
+        </p:spPr>
+        <p:txBody>
+          <a:bodyPr xmlns:a="http://schemas.openxmlformats.org/drawingml/2006/main" wrap="square" lIns="0" tIns="0" rIns="0" bIns="0" anchor="t">
+            <a:normAutofit fontScale="100000"/>
+          </a:bodyPr>
+          <a:lstStyle xmlns:a="http://schemas.openxmlformats.org/drawingml/2006/main"/>
+          <a:p xmlns:a="http://schemas.openxmlformats.org/drawingml/2006/main">
+            <a:pPr algn="l">
+              <a:lnSpc>
+                <a:spcPct val="105000"/>
+              </a:lnSpc>
+              <a:buNone/>
+              <a:defRPr sz="4500" b="1" i="0">
+                <a:solidFill>
+                  <a:srgbClr val="122033"/>
+                </a:solidFill>
+                <a:latin typeface="Arial"/>
+                <a:ea typeface="Arial"/>
+                <a:cs typeface="Arial"/>
+              </a:defRPr>
+            </a:pPr>
+            <a:r>
+              <a:rPr sz="4500" b="1" i="0">
+                <a:solidFill>
+                  <a:srgbClr val="122033"/>
+                </a:solidFill>
+                <a:latin typeface="Arial"/>
+                <a:ea typeface="Arial"/>
+                <a:cs typeface="Arial"/>
+              </a:rPr>
+              <a:t>33.25%</a:t>
+            </a:r>
+          </a:p>
+        </p:txBody>
+      </p:sp>
+      <p:sp>
+        <p:nvSpPr>
+          <p:cNvPr id="4" name="">
+            <a:extLst xmlns:a="http://schemas.openxmlformats.org/drawingml/2006/main">
+              <a:ext uri="{FF2B5EF4-FFF2-40B4-BE49-F238E27FC236}">
+                <a16:creationId xmlns:a16="http://schemas.microsoft.com/office/drawing/2014/main" id="{29972A5B-D5E9-4396-BBA4-3F2E751F452B}"/>
+              </a:ext>
+            </a:extLst>
+          </p:cNvPr>
+          <p:cNvSpPr>
+            <a:spLocks xmlns:a="http://schemas.openxmlformats.org/drawingml/2006/main" noGrp="1"/>
+          </p:cNvSpPr>
+          <p:nvPr/>
+        </p:nvSpPr>
+        <p:spPr>
+          <a:xfrm xmlns:a="http://schemas.openxmlformats.org/drawingml/2006/main">
+            <a:off x="647700" y="2362200"/>
+            <a:ext cx="2857500" cy="285750"/>
+          </a:xfrm>
+          <a:prstGeom xmlns:a="http://schemas.openxmlformats.org/drawingml/2006/main" prst="rect">
+            <a:avLst/>
+          </a:prstGeom>
+          <a:noFill xmlns:a="http://schemas.openxmlformats.org/drawingml/2006/main"/>
+          <a:ln xmlns:a="http://schemas.openxmlformats.org/drawingml/2006/main" w="0">
+            <a:noFill/>
+          </a:ln>
+        </p:spPr>
+        <p:txBody>
+          <a:bodyPr xmlns:a="http://schemas.openxmlformats.org/drawingml/2006/main" wrap="square" lIns="0" tIns="0" rIns="0" bIns="0" anchor="t">
+            <a:normAutofit fontScale="100000"/>
+          </a:bodyPr>
+          <a:lstStyle xmlns:a="http://schemas.openxmlformats.org/drawingml/2006/main"/>
+          <a:p xmlns:a="http://schemas.openxmlformats.org/drawingml/2006/main">
+            <a:pPr algn="l">
+              <a:lnSpc>
+                <a:spcPct val="105000"/>
+              </a:lnSpc>
+              <a:buNone/>
+              <a:defRPr sz="1350" b="1" i="0">
+                <a:solidFill>
+                  <a:srgbClr val="35C47A"/>
+                </a:solidFill>
+                <a:latin typeface="Arial"/>
+                <a:ea typeface="Arial"/>
+                <a:cs typeface="Arial"/>
+              </a:defRPr>
+            </a:pPr>
+            <a:r>
+              <a:rPr sz="1350" b="1" i="0">
+                <a:solidFill>
+                  <a:srgbClr val="35C47A"/>
+                </a:solidFill>
+                <a:latin typeface="Arial"/>
+                <a:ea typeface="Arial"/>
+                <a:cs typeface="Arial"/>
+              </a:rPr>
+              <a:t>task pass rate</a:t>
+            </a:r>
+          </a:p>
+        </p:txBody>
+      </p:sp>
+      <p:sp>
+        <p:nvSpPr>
+          <p:cNvPr id="5" name="">
+            <a:extLst xmlns:a="http://schemas.openxmlformats.org/drawingml/2006/main">
+              <a:ext uri="{FF2B5EF4-FFF2-40B4-BE49-F238E27FC236}">
+                <a16:creationId xmlns:a16="http://schemas.microsoft.com/office/drawing/2014/main" id="{0F751ACC-F284-470C-A7BB-585EB10F16C1}"/>
+              </a:ext>
+            </a:extLst>
+          </p:cNvPr>
+          <p:cNvSpPr>
+            <a:spLocks xmlns:a="http://schemas.openxmlformats.org/drawingml/2006/main" noGrp="1"/>
+          </p:cNvSpPr>
+          <p:nvPr/>
+        </p:nvSpPr>
+        <p:spPr>
+          <a:xfrm xmlns:a="http://schemas.openxmlformats.org/drawingml/2006/main">
+            <a:off x="4572000" y="1638300"/>
+            <a:ext cx="3143250" cy="762000"/>
+          </a:xfrm>
+          <a:prstGeom xmlns:a="http://schemas.openxmlformats.org/drawingml/2006/main" prst="rect">
+            <a:avLst/>
+          </a:prstGeom>
+          <a:noFill xmlns:a="http://schemas.openxmlformats.org/drawingml/2006/main"/>
+          <a:ln xmlns:a="http://schemas.openxmlformats.org/drawingml/2006/main" w="0">
+            <a:noFill/>
+          </a:ln>
+        </p:spPr>
+        <p:txBody>
+          <a:bodyPr xmlns:a="http://schemas.openxmlformats.org/drawingml/2006/main" wrap="square" lIns="0" tIns="0" rIns="0" bIns="0" anchor="t">
+            <a:normAutofit fontScale="100000"/>
+          </a:bodyPr>
+          <a:lstStyle xmlns:a="http://schemas.openxmlformats.org/drawingml/2006/main"/>
+          <a:p xmlns:a="http://schemas.openxmlformats.org/drawingml/2006/main">
+            <a:pPr algn="l">
+              <a:lnSpc>
+                <a:spcPct val="105000"/>
+              </a:lnSpc>
+              <a:buNone/>
+              <a:defRPr sz="4500" b="1" i="0">
+                <a:solidFill>
+                  <a:srgbClr val="122033"/>
+                </a:solidFill>
+                <a:latin typeface="Arial"/>
+                <a:ea typeface="Arial"/>
+                <a:cs typeface="Arial"/>
+              </a:defRPr>
+            </a:pPr>
+            <a:r>
+              <a:rPr sz="4500" b="1" i="0">
+                <a:solidFill>
+                  <a:srgbClr val="122033"/>
+                </a:solidFill>
+                <a:latin typeface="Arial"/>
+                <a:ea typeface="Arial"/>
+                <a:cs typeface="Arial"/>
+              </a:rPr>
+              <a:t>40.56%</a:t>
+            </a:r>
+          </a:p>
+        </p:txBody>
+      </p:sp>
+      <p:sp>
+        <p:nvSpPr>
+          <p:cNvPr id="6" name="">
+            <a:extLst xmlns:a="http://schemas.openxmlformats.org/drawingml/2006/main">
+              <a:ext uri="{FF2B5EF4-FFF2-40B4-BE49-F238E27FC236}">
+                <a16:creationId xmlns:a16="http://schemas.microsoft.com/office/drawing/2014/main" id="{0CB017B7-6EE4-4FCD-87D9-C4E2D291B440}"/>
+              </a:ext>
+            </a:extLst>
+          </p:cNvPr>
+          <p:cNvSpPr>
+            <a:spLocks xmlns:a="http://schemas.openxmlformats.org/drawingml/2006/main" noGrp="1"/>
+          </p:cNvSpPr>
+          <p:nvPr/>
+        </p:nvSpPr>
+        <p:spPr>
+          <a:xfrm xmlns:a="http://schemas.openxmlformats.org/drawingml/2006/main">
+            <a:off x="4610100" y="2362200"/>
+            <a:ext cx="2857500" cy="285750"/>
+          </a:xfrm>
+          <a:prstGeom xmlns:a="http://schemas.openxmlformats.org/drawingml/2006/main" prst="rect">
+            <a:avLst/>
+          </a:prstGeom>
+          <a:noFill xmlns:a="http://schemas.openxmlformats.org/drawingml/2006/main"/>
+          <a:ln xmlns:a="http://schemas.openxmlformats.org/drawingml/2006/main" w="0">
+            <a:noFill/>
+          </a:ln>
+        </p:spPr>
+        <p:txBody>
+          <a:bodyPr xmlns:a="http://schemas.openxmlformats.org/drawingml/2006/main" wrap="square" lIns="0" tIns="0" rIns="0" bIns="0" anchor="t">
+            <a:normAutofit fontScale="100000"/>
+          </a:bodyPr>
+          <a:lstStyle xmlns:a="http://schemas.openxmlformats.org/drawingml/2006/main"/>
+          <a:p xmlns:a="http://schemas.openxmlformats.org/drawingml/2006/main">
+            <a:pPr algn="l">
+              <a:lnSpc>
+                <a:spcPct val="105000"/>
+              </a:lnSpc>
+              <a:buNone/>
+              <a:defRPr sz="1350" b="1" i="0">
+                <a:solidFill>
+                  <a:srgbClr val="4A9BC2"/>
+                </a:solidFill>
+                <a:latin typeface="Arial"/>
+                <a:ea typeface="Arial"/>
+                <a:cs typeface="Arial"/>
+              </a:defRPr>
+            </a:pPr>
+            <a:r>
+              <a:rPr sz="1350" b="1" i="0">
+                <a:solidFill>
+                  <a:srgbClr val="4A9BC2"/>
+                </a:solidFill>
+                <a:latin typeface="Arial"/>
+                <a:ea typeface="Arial"/>
+                <a:cs typeface="Arial"/>
+              </a:rPr>
+              <a:t>cell accuracy</a:t>
+            </a:r>
+          </a:p>
+        </p:txBody>
+      </p:sp>
+      <p:sp>
+        <p:nvSpPr>
+          <p:cNvPr id="7" name="">
+            <a:extLst xmlns:a="http://schemas.openxmlformats.org/drawingml/2006/main">
+              <a:ext uri="{FF2B5EF4-FFF2-40B4-BE49-F238E27FC236}">
+                <a16:creationId xmlns:a16="http://schemas.microsoft.com/office/drawing/2014/main" id="{5C431A68-50B6-4630-B630-057B86E38B14}"/>
+              </a:ext>
+            </a:extLst>
+          </p:cNvPr>
+          <p:cNvSpPr>
+            <a:spLocks xmlns:a="http://schemas.openxmlformats.org/drawingml/2006/main" noGrp="1"/>
+          </p:cNvSpPr>
+          <p:nvPr/>
+        </p:nvSpPr>
+        <p:spPr>
+          <a:xfrm xmlns:a="http://schemas.openxmlformats.org/drawingml/2006/main">
+            <a:off x="8763000" y="1714500"/>
+            <a:ext cx="2381250" cy="571500"/>
+          </a:xfrm>
+          <a:prstGeom xmlns:a="http://schemas.openxmlformats.org/drawingml/2006/main" prst="rect">
+            <a:avLst/>
+          </a:prstGeom>
+          <a:noFill xmlns:a="http://schemas.openxmlformats.org/drawingml/2006/main"/>
+          <a:ln xmlns:a="http://schemas.openxmlformats.org/drawingml/2006/main" w="0">
+            <a:noFill/>
+          </a:ln>
+        </p:spPr>
+        <p:txBody>
+          <a:bodyPr xmlns:a="http://schemas.openxmlformats.org/drawingml/2006/main" wrap="square" lIns="0" tIns="0" rIns="0" bIns="0" anchor="t">
+            <a:normAutofit fontScale="100000"/>
+          </a:bodyPr>
+          <a:lstStyle xmlns:a="http://schemas.openxmlformats.org/drawingml/2006/main"/>
+          <a:p xmlns:a="http://schemas.openxmlformats.org/drawingml/2006/main">
+            <a:pPr algn="r">
+              <a:lnSpc>
+                <a:spcPct val="105000"/>
+              </a:lnSpc>
+              <a:buNone/>
+              <a:defRPr sz="3225" b="1" i="0">
+                <a:solidFill>
+                  <a:srgbClr val="122033"/>
+                </a:solidFill>
+                <a:latin typeface="Arial"/>
+                <a:ea typeface="Arial"/>
+                <a:cs typeface="Arial"/>
+              </a:defRPr>
+            </a:pPr>
+            <a:r>
+              <a:rPr sz="3225" b="1" i="0">
+                <a:solidFill>
+                  <a:srgbClr val="122033"/>
+                </a:solidFill>
+                <a:latin typeface="Arial"/>
+                <a:ea typeface="Arial"/>
+                <a:cs typeface="Arial"/>
+              </a:rPr>
+              <a:t>400/400</a:t>
+            </a:r>
+          </a:p>
+        </p:txBody>
+      </p:sp>
+      <p:sp>
+        <p:nvSpPr>
+          <p:cNvPr id="8" name="">
+            <a:extLst xmlns:a="http://schemas.openxmlformats.org/drawingml/2006/main">
+              <a:ext uri="{FF2B5EF4-FFF2-40B4-BE49-F238E27FC236}">
+                <a16:creationId xmlns:a16="http://schemas.microsoft.com/office/drawing/2014/main" id="{CDFBDA0D-8441-4BF5-9706-237FF25B5CBB}"/>
+              </a:ext>
+            </a:extLst>
+          </p:cNvPr>
+          <p:cNvSpPr>
+            <a:spLocks xmlns:a="http://schemas.openxmlformats.org/drawingml/2006/main" noGrp="1"/>
+          </p:cNvSpPr>
+          <p:nvPr/>
+        </p:nvSpPr>
+        <p:spPr>
+          <a:xfrm xmlns:a="http://schemas.openxmlformats.org/drawingml/2006/main">
+            <a:off x="7239000" y="2362200"/>
+            <a:ext cx="3905250" cy="285750"/>
+          </a:xfrm>
+          <a:prstGeom xmlns:a="http://schemas.openxmlformats.org/drawingml/2006/main" prst="rect">
+            <a:avLst/>
+          </a:prstGeom>
+          <a:noFill xmlns:a="http://schemas.openxmlformats.org/drawingml/2006/main"/>
+          <a:ln xmlns:a="http://schemas.openxmlformats.org/drawingml/2006/main" w="0">
+            <a:noFill/>
+          </a:ln>
+        </p:spPr>
+        <p:txBody>
+          <a:bodyPr xmlns:a="http://schemas.openxmlformats.org/drawingml/2006/main" wrap="square" lIns="0" tIns="0" rIns="0" bIns="0" anchor="t">
+            <a:normAutofit fontScale="88534"/>
+          </a:bodyPr>
+          <a:lstStyle xmlns:a="http://schemas.openxmlformats.org/drawingml/2006/main"/>
+          <a:p xmlns:a="http://schemas.openxmlformats.org/drawingml/2006/main">
+            <a:pPr algn="r">
+              <a:lnSpc>
+                <a:spcPct val="105000"/>
+              </a:lnSpc>
+              <a:buNone/>
+              <a:defRPr sz="1200" b="0" i="0">
+                <a:solidFill>
+                  <a:srgbClr val="667487"/>
+                </a:solidFill>
+                <a:latin typeface="Arial"/>
+                <a:ea typeface="Arial"/>
+                <a:cs typeface="Arial"/>
+              </a:defRPr>
+            </a:pPr>
+            <a:r>
+              <a:rPr sz="1200" b="0" i="0">
+                <a:solidFill>
+                  <a:srgbClr val="667487"/>
+                </a:solidFill>
+                <a:latin typeface="Arial"/>
+                <a:ea typeface="Arial"/>
+                <a:cs typeface="Arial"/>
+              </a:rPr>
+              <a:t>All 400 tasks evaluated, with no missing tasks or evaluator errors.</a:t>
+            </a:r>
+          </a:p>
+        </p:txBody>
+      </p:sp>
+      <p:graphicFrame>
+        <p:nvGraphicFramePr>
+          <p:cNvPr id="22" name="Chart"/>
+          <p:cNvGraphicFramePr/>
+          <p:nvPr/>
+        </p:nvGraphicFramePr>
+        <p:xfrm>
+          <a:off xmlns:a="http://schemas.openxmlformats.org/drawingml/2006/main" x="723900" y="3143250"/>
+          <a:ext xmlns:a="http://schemas.openxmlformats.org/drawingml/2006/main" cx="10668000" cy="2552700"/>
+        </p:xfrm>
+        <a:graphic xmlns:a="http://schemas.openxmlformats.org/drawingml/2006/main">
+          <a:graphicData uri="http://schemas.openxmlformats.org/drawingml/2006/chart">
+            <c:chart xmlns:r="http://schemas.openxmlformats.org/officeDocument/2006/relationships" xmlns:c="http://schemas.openxmlformats.org/drawingml/2006/chart" r:id="Rb31b5b8cc256491a"/>
+          </a:graphicData>
+        </a:graphic>
+      </p:graphicFrame>
+      <p:sp>
+        <p:nvSpPr>
+          <p:cNvPr id="10" name="">
+            <a:extLst xmlns:a="http://schemas.openxmlformats.org/drawingml/2006/main">
+              <a:ext uri="{FF2B5EF4-FFF2-40B4-BE49-F238E27FC236}">
+                <a16:creationId xmlns:a16="http://schemas.microsoft.com/office/drawing/2014/main" id="{9CE24B08-A9A7-4A6A-8727-60CD41D95D17}"/>
+              </a:ext>
+            </a:extLst>
+          </p:cNvPr>
+          <p:cNvSpPr>
+            <a:spLocks xmlns:a="http://schemas.openxmlformats.org/drawingml/2006/main" noGrp="1"/>
+          </p:cNvSpPr>
+          <p:nvPr/>
+        </p:nvSpPr>
+        <p:spPr>
+          <a:xfrm xmlns:a="http://schemas.openxmlformats.org/drawingml/2006/main">
+            <a:off x="742950" y="5905500"/>
+            <a:ext cx="7620000" cy="285750"/>
+          </a:xfrm>
+          <a:prstGeom xmlns:a="http://schemas.openxmlformats.org/drawingml/2006/main" prst="rect">
+            <a:avLst/>
+          </a:prstGeom>
+          <a:noFill xmlns:a="http://schemas.openxmlformats.org/drawingml/2006/main"/>
+          <a:ln xmlns:a="http://schemas.openxmlformats.org/drawingml/2006/main" w="0">
+            <a:noFill/>
+          </a:ln>
+        </p:spPr>
+        <p:txBody>
+          <a:bodyPr xmlns:a="http://schemas.openxmlformats.org/drawingml/2006/main" wrap="square" lIns="0" tIns="0" rIns="0" bIns="0" anchor="t">
+            <a:normAutofit fontScale="100000"/>
+          </a:bodyPr>
+          <a:lstStyle xmlns:a="http://schemas.openxmlformats.org/drawingml/2006/main"/>
+          <a:p xmlns:a="http://schemas.openxmlformats.org/drawingml/2006/main">
+            <a:pPr algn="l">
+              <a:lnSpc>
+                <a:spcPct val="105000"/>
+              </a:lnSpc>
+              <a:buNone/>
+              <a:defRPr sz="1350" b="0" i="0">
+                <a:solidFill>
+                  <a:srgbClr val="667487"/>
+                </a:solidFill>
+                <a:latin typeface="Arial"/>
+                <a:ea typeface="Arial"/>
+                <a:cs typeface="Arial"/>
+              </a:defRPr>
+            </a:pPr>
+            <a:r>
+              <a:rPr sz="1350" b="0" i="0">
+                <a:solidFill>
+                  <a:srgbClr val="667487"/>
+                </a:solidFill>
+                <a:latin typeface="Arial"/>
+                <a:ea typeface="Arial"/>
+                <a:cs typeface="Arial"/>
+              </a:rPr>
+              <a:t>120,824 of 297,882 target cells matched the reference workbook.</a:t>
+            </a:r>
+          </a:p>
+        </p:txBody>
+      </p:sp>
+      <p:sp>
+        <p:nvSpPr>
+          <p:cNvPr id="11" name="">
+            <a:extLst xmlns:a="http://schemas.openxmlformats.org/drawingml/2006/main">
+              <a:ext uri="{FF2B5EF4-FFF2-40B4-BE49-F238E27FC236}">
+                <a16:creationId xmlns:a16="http://schemas.microsoft.com/office/drawing/2014/main" id="{E38B42F7-6295-44B9-BE82-E9F2FC3BB36B}"/>
+              </a:ext>
+            </a:extLst>
+          </p:cNvPr>
+          <p:cNvSpPr>
+            <a:spLocks xmlns:a="http://schemas.openxmlformats.org/drawingml/2006/main" noGrp="1"/>
+          </p:cNvSpPr>
+          <p:nvPr/>
+        </p:nvSpPr>
+        <p:spPr>
+          <a:xfrm xmlns:a="http://schemas.openxmlformats.org/drawingml/2006/main">
+            <a:off x="609600" y="6429375"/>
+            <a:ext cx="10972800" cy="0"/>
+          </a:xfrm>
+          <a:prstGeom xmlns:a="http://schemas.openxmlformats.org/drawingml/2006/main" prst="line">
+            <a:avLst/>
+          </a:prstGeom>
+          <a:noFill xmlns:a="http://schemas.openxmlformats.org/drawingml/2006/main"/>
+          <a:ln xmlns:a="http://schemas.openxmlformats.org/drawingml/2006/main" w="9525">
+            <a:solidFill>
+              <a:srgbClr val="C9D1D9"/>
+            </a:solidFill>
+            <a:prstDash val="solid"/>
+          </a:ln>
+        </p:spPr>
+      </p:sp>
+      <p:sp>
+        <p:nvSpPr>
+          <p:cNvPr id="12" name="">
+            <a:extLst xmlns:a="http://schemas.openxmlformats.org/drawingml/2006/main">
+              <a:ext uri="{FF2B5EF4-FFF2-40B4-BE49-F238E27FC236}">
+                <a16:creationId xmlns:a16="http://schemas.microsoft.com/office/drawing/2014/main" id="{5874FED2-31A8-4653-A8E9-E5F49D60929D}"/>
+              </a:ext>
+            </a:extLst>
+          </p:cNvPr>
+          <p:cNvSpPr>
+            <a:spLocks xmlns:a="http://schemas.openxmlformats.org/drawingml/2006/main" noGrp="1"/>
+          </p:cNvSpPr>
+          <p:nvPr/>
+        </p:nvSpPr>
+        <p:spPr>
+          <a:xfrm xmlns:a="http://schemas.openxmlformats.org/drawingml/2006/main">
+            <a:off x="609600" y="6553200"/>
+            <a:ext cx="6191250" cy="171450"/>
+          </a:xfrm>
+          <a:prstGeom xmlns:a="http://schemas.openxmlformats.org/drawingml/2006/main" prst="rect">
+            <a:avLst/>
+          </a:prstGeom>
+          <a:noFill xmlns:a="http://schemas.openxmlformats.org/drawingml/2006/main"/>
+          <a:ln xmlns:a="http://schemas.openxmlformats.org/drawingml/2006/main" w="0">
+            <a:noFill/>
+          </a:ln>
+        </p:spPr>
+        <p:txBody>
+          <a:bodyPr xmlns:a="http://schemas.openxmlformats.org/drawingml/2006/main" wrap="square" lIns="0" tIns="0" rIns="0" bIns="0" anchor="ctr">
+            <a:normAutofit fontScale="100000"/>
+          </a:bodyPr>
+          <a:lstStyle xmlns:a="http://schemas.openxmlformats.org/drawingml/2006/main"/>
+          <a:p xmlns:a="http://schemas.openxmlformats.org/drawingml/2006/main">
+            <a:pPr algn="l">
+              <a:lnSpc>
+                <a:spcPct val="105000"/>
+              </a:lnSpc>
+              <a:buNone/>
+              <a:defRPr sz="900" b="1" i="0">
+                <a:solidFill>
+                  <a:srgbClr val="667487"/>
+                </a:solidFill>
+                <a:latin typeface="Arial"/>
+                <a:ea typeface="Arial"/>
+                <a:cs typeface="Arial"/>
+              </a:defRPr>
+            </a:pPr>
+            <a:r>
+              <a:rPr sz="900" b="1" i="0">
+                <a:solidFill>
+                  <a:srgbClr val="667487"/>
+                </a:solidFill>
+                <a:latin typeface="Arial"/>
+                <a:ea typeface="Arial"/>
+                <a:cs typeface="Arial"/>
+              </a:rPr>
+              <a:t>FORMULABENCH  ·  RESEARCH / TRACK 2</a:t>
+            </a:r>
+          </a:p>
+        </p:txBody>
+      </p:sp>
+      <p:sp>
+        <p:nvSpPr>
+          <p:cNvPr id="13" name="">
+            <a:extLst xmlns:a="http://schemas.openxmlformats.org/drawingml/2006/main">
+              <a:ext uri="{FF2B5EF4-FFF2-40B4-BE49-F238E27FC236}">
+                <a16:creationId xmlns:a16="http://schemas.microsoft.com/office/drawing/2014/main" id="{C18598F6-A6CD-4D79-828D-FBF48D9C9405}"/>
+              </a:ext>
+            </a:extLst>
+          </p:cNvPr>
+          <p:cNvSpPr>
+            <a:spLocks xmlns:a="http://schemas.openxmlformats.org/drawingml/2006/main" noGrp="1"/>
+          </p:cNvSpPr>
+          <p:nvPr/>
+        </p:nvSpPr>
+        <p:spPr>
+          <a:xfrm xmlns:a="http://schemas.openxmlformats.org/drawingml/2006/main">
+            <a:off x="11049000" y="6553200"/>
+            <a:ext cx="533400" cy="171450"/>
+          </a:xfrm>
+          <a:prstGeom xmlns:a="http://schemas.openxmlformats.org/drawingml/2006/main" prst="rect">
+            <a:avLst/>
+          </a:prstGeom>
+          <a:noFill xmlns:a="http://schemas.openxmlformats.org/drawingml/2006/main"/>
+          <a:ln xmlns:a="http://schemas.openxmlformats.org/drawingml/2006/main" w="0">
+            <a:noFill/>
+          </a:ln>
+        </p:spPr>
+        <p:txBody>
+          <a:bodyPr xmlns:a="http://schemas.openxmlformats.org/drawingml/2006/main" wrap="square" lIns="0" tIns="0" rIns="0" bIns="0" anchor="ctr">
+            <a:normAutofit fontScale="100000"/>
+          </a:bodyPr>
+          <a:lstStyle xmlns:a="http://schemas.openxmlformats.org/drawingml/2006/main"/>
+          <a:p xmlns:a="http://schemas.openxmlformats.org/drawingml/2006/main">
+            <a:pPr algn="r">
+              <a:lnSpc>
+                <a:spcPct val="105000"/>
+              </a:lnSpc>
+              <a:buNone/>
+              <a:defRPr sz="900" b="1" i="0">
+                <a:solidFill>
+                  <a:srgbClr val="667487"/>
+                </a:solidFill>
+                <a:latin typeface="Arial"/>
+                <a:ea typeface="Arial"/>
+                <a:cs typeface="Arial"/>
+              </a:defRPr>
+            </a:pPr>
+            <a:r>
+              <a:rPr sz="900" b="1" i="0">
+                <a:solidFill>
+                  <a:srgbClr val="667487"/>
+                </a:solidFill>
+                <a:latin typeface="Arial"/>
+                <a:ea typeface="Arial"/>
+                <a:cs typeface="Arial"/>
+              </a:rPr>
+              <a:t>02</a:t>
+            </a:r>
+          </a:p>
+        </p:txBody>
+      </p:sp>
+    </p:spTree>
+    <p:extLst>
+      <p:ext uri="{BB962C8B-B14F-4D97-AF65-F5344CB8AC3E}">
+        <p14:creationId xmlns:p14="http://schemas.microsoft.com/office/powerpoint/2010/main" val="327622992"/>
+      </p:ext>
+    </p:extLst>
+  </p:cSld>
+</p:sld>
+</file>
+
+<file path=ppt/slides/slide3.xml><?xml version="1.0" encoding="utf-8"?>
 <p:sld xmlns:p="http://schemas.openxmlformats.org/presentationml/2006/main">
   <p:cSld>
     <p:bg>
@@ -2803,7 +3415,7 @@
           <p:cNvPr id="23" name="slide-title">
             <a:extLst xmlns:a="http://schemas.openxmlformats.org/drawingml/2006/main">
               <a:ext uri="{FF2B5EF4-FFF2-40B4-BE49-F238E27FC236}">
-                <a16:creationId xmlns:a16="http://schemas.microsoft.com/office/drawing/2014/main" id="{285B8A3B-6E80-4192-AE2C-89AE3E06BF09}"/>
+                <a16:creationId xmlns:a16="http://schemas.microsoft.com/office/drawing/2014/main" id="{87D1FAE9-4A47-4688-9FB4-3817074D5BCA}"/>
               </a:ext>
             </a:extLst>
           </p:cNvPr>
@@ -2864,7 +3476,7 @@
           <p:cNvPr id="2" name="">
             <a:extLst xmlns:a="http://schemas.openxmlformats.org/drawingml/2006/main">
               <a:ext uri="{FF2B5EF4-FFF2-40B4-BE49-F238E27FC236}">
-                <a16:creationId xmlns:a16="http://schemas.microsoft.com/office/drawing/2014/main" id="{0590F60B-A710-4EF1-AC7C-7019D0423107}"/>
+                <a16:creationId xmlns:a16="http://schemas.microsoft.com/office/drawing/2014/main" id="{3126D8D7-E60B-46A1-B281-6ECD380DBFC8}"/>
               </a:ext>
             </a:extLst>
           </p:cNvPr>
@@ -2925,7 +3537,7 @@
           <p:cNvPr id="3" name="">
             <a:extLst xmlns:a="http://schemas.openxmlformats.org/drawingml/2006/main">
               <a:ext uri="{FF2B5EF4-FFF2-40B4-BE49-F238E27FC236}">
-                <a16:creationId xmlns:a16="http://schemas.microsoft.com/office/drawing/2014/main" id="{D14B6D1B-5CD8-44D4-BDAA-89EB6D625C53}"/>
+                <a16:creationId xmlns:a16="http://schemas.microsoft.com/office/drawing/2014/main" id="{42C4AB0F-DC93-4BD6-AB20-3819992659C8}"/>
               </a:ext>
             </a:extLst>
           </p:cNvPr>
@@ -2986,7 +3598,7 @@
           <p:cNvPr id="4" name="">
             <a:extLst xmlns:a="http://schemas.openxmlformats.org/drawingml/2006/main">
               <a:ext uri="{FF2B5EF4-FFF2-40B4-BE49-F238E27FC236}">
-                <a16:creationId xmlns:a16="http://schemas.microsoft.com/office/drawing/2014/main" id="{8A978A40-191D-4F72-92B3-E95D46AE5E03}"/>
+                <a16:creationId xmlns:a16="http://schemas.microsoft.com/office/drawing/2014/main" id="{DFC8F002-4E40-44DA-8575-F76EFE000A70}"/>
               </a:ext>
             </a:extLst>
           </p:cNvPr>
@@ -3047,7 +3659,7 @@
           <p:cNvPr id="5" name="">
             <a:extLst xmlns:a="http://schemas.openxmlformats.org/drawingml/2006/main">
               <a:ext uri="{FF2B5EF4-FFF2-40B4-BE49-F238E27FC236}">
-                <a16:creationId xmlns:a16="http://schemas.microsoft.com/office/drawing/2014/main" id="{5CFBC78B-CC92-45CA-AF1A-6F2DE1970E94}"/>
+                <a16:creationId xmlns:a16="http://schemas.microsoft.com/office/drawing/2014/main" id="{7E3BAFB4-F6F8-4602-8356-1226B86EE861}"/>
               </a:ext>
             </a:extLst>
           </p:cNvPr>
@@ -3108,7 +3720,7 @@
           <p:cNvPr id="6" name="">
             <a:extLst xmlns:a="http://schemas.openxmlformats.org/drawingml/2006/main">
               <a:ext uri="{FF2B5EF4-FFF2-40B4-BE49-F238E27FC236}">
-                <a16:creationId xmlns:a16="http://schemas.microsoft.com/office/drawing/2014/main" id="{92B9DA42-B626-4A51-A694-1C9FECAE702E}"/>
+                <a16:creationId xmlns:a16="http://schemas.microsoft.com/office/drawing/2014/main" id="{90F2CBF9-21D5-4636-A4CF-46F5A121D25C}"/>
               </a:ext>
             </a:extLst>
           </p:cNvPr>
@@ -3139,7 +3751,7 @@
           <p:cNvPr id="7" name="">
             <a:extLst xmlns:a="http://schemas.openxmlformats.org/drawingml/2006/main">
               <a:ext uri="{FF2B5EF4-FFF2-40B4-BE49-F238E27FC236}">
-                <a16:creationId xmlns:a16="http://schemas.microsoft.com/office/drawing/2014/main" id="{1AAF597D-9FD5-47B9-BA1A-D3962F973ECA}"/>
+                <a16:creationId xmlns:a16="http://schemas.microsoft.com/office/drawing/2014/main" id="{C6849A79-699D-40F8-BC13-369B2020AEFC}"/>
               </a:ext>
             </a:extLst>
           </p:cNvPr>
@@ -3200,7 +3812,7 @@
           <p:cNvPr id="8" name="">
             <a:extLst xmlns:a="http://schemas.openxmlformats.org/drawingml/2006/main">
               <a:ext uri="{FF2B5EF4-FFF2-40B4-BE49-F238E27FC236}">
-                <a16:creationId xmlns:a16="http://schemas.microsoft.com/office/drawing/2014/main" id="{0940E355-67A6-4B2E-B37B-F9F77BA1AC98}"/>
+                <a16:creationId xmlns:a16="http://schemas.microsoft.com/office/drawing/2014/main" id="{717B12E9-A573-46A6-A86F-6ED4652473FF}"/>
               </a:ext>
             </a:extLst>
           </p:cNvPr>
@@ -3261,7 +3873,7 @@
           <p:cNvPr id="9" name="">
             <a:extLst xmlns:a="http://schemas.openxmlformats.org/drawingml/2006/main">
               <a:ext uri="{FF2B5EF4-FFF2-40B4-BE49-F238E27FC236}">
-                <a16:creationId xmlns:a16="http://schemas.microsoft.com/office/drawing/2014/main" id="{F94A78B3-1510-44F0-B30B-C5F3E897AB0A}"/>
+                <a16:creationId xmlns:a16="http://schemas.microsoft.com/office/drawing/2014/main" id="{B519ED67-516C-4B5C-922D-2ABCB0D0848E}"/>
               </a:ext>
             </a:extLst>
           </p:cNvPr>
@@ -3312,7 +3924,7 @@
                 <a:ea typeface="Arial"/>
                 <a:cs typeface="Arial"/>
               </a:rPr>
-              <a:t>A response omits required cells, assigns one twice or writes outside the target.</a:t>
+              <a:t>A response misses required cells, writes to the same cell twice or changes cells outside the target.</a:t>
             </a:r>
           </a:p>
         </p:txBody>
@@ -3322,7 +3934,7 @@
           <p:cNvPr id="10" name="">
             <a:extLst xmlns:a="http://schemas.openxmlformats.org/drawingml/2006/main">
               <a:ext uri="{FF2B5EF4-FFF2-40B4-BE49-F238E27FC236}">
-                <a16:creationId xmlns:a16="http://schemas.microsoft.com/office/drawing/2014/main" id="{8DD814B9-2A61-4B7F-A2F6-601D4068D172}"/>
+                <a16:creationId xmlns:a16="http://schemas.microsoft.com/office/drawing/2014/main" id="{5D3AD0D4-FF25-4FEB-AE0B-2D3A4B79601A}"/>
               </a:ext>
             </a:extLst>
           </p:cNvPr>
@@ -3353,7 +3965,7 @@
           <p:cNvPr id="11" name="">
             <a:extLst xmlns:a="http://schemas.openxmlformats.org/drawingml/2006/main">
               <a:ext uri="{FF2B5EF4-FFF2-40B4-BE49-F238E27FC236}">
-                <a16:creationId xmlns:a16="http://schemas.microsoft.com/office/drawing/2014/main" id="{9CD5EF8A-23C0-436F-8C2C-F726D7B45A63}"/>
+                <a16:creationId xmlns:a16="http://schemas.microsoft.com/office/drawing/2014/main" id="{AB29D075-DC6E-495D-88B6-04C7852AD2C5}"/>
               </a:ext>
             </a:extLst>
           </p:cNvPr>
@@ -3414,7 +4026,7 @@
           <p:cNvPr id="12" name="">
             <a:extLst xmlns:a="http://schemas.openxmlformats.org/drawingml/2006/main">
               <a:ext uri="{FF2B5EF4-FFF2-40B4-BE49-F238E27FC236}">
-                <a16:creationId xmlns:a16="http://schemas.microsoft.com/office/drawing/2014/main" id="{6B8583A5-ECB4-4813-94D3-188C55A80D02}"/>
+                <a16:creationId xmlns:a16="http://schemas.microsoft.com/office/drawing/2014/main" id="{72B6B510-0088-4CA2-993B-1B5A8CD9E100}"/>
               </a:ext>
             </a:extLst>
           </p:cNvPr>
@@ -3475,7 +4087,7 @@
           <p:cNvPr id="13" name="">
             <a:extLst xmlns:a="http://schemas.openxmlformats.org/drawingml/2006/main">
               <a:ext uri="{FF2B5EF4-FFF2-40B4-BE49-F238E27FC236}">
-                <a16:creationId xmlns:a16="http://schemas.microsoft.com/office/drawing/2014/main" id="{0E8E857E-4338-40D8-8EFD-8D1D54C4974F}"/>
+                <a16:creationId xmlns:a16="http://schemas.microsoft.com/office/drawing/2014/main" id="{9525448F-083A-4329-B387-F75F5CBA1194}"/>
               </a:ext>
             </a:extLst>
           </p:cNvPr>
@@ -3536,7 +4148,7 @@
           <p:cNvPr id="14" name="">
             <a:extLst xmlns:a="http://schemas.openxmlformats.org/drawingml/2006/main">
               <a:ext uri="{FF2B5EF4-FFF2-40B4-BE49-F238E27FC236}">
-                <a16:creationId xmlns:a16="http://schemas.microsoft.com/office/drawing/2014/main" id="{527A8F12-2BB7-42BA-97A9-E431E8962A47}"/>
+                <a16:creationId xmlns:a16="http://schemas.microsoft.com/office/drawing/2014/main" id="{6A0B43C5-1454-495D-B285-A8E14F313CA5}"/>
               </a:ext>
             </a:extLst>
           </p:cNvPr>
@@ -3567,7 +4179,7 @@
           <p:cNvPr id="15" name="">
             <a:extLst xmlns:a="http://schemas.openxmlformats.org/drawingml/2006/main">
               <a:ext uri="{FF2B5EF4-FFF2-40B4-BE49-F238E27FC236}">
-                <a16:creationId xmlns:a16="http://schemas.microsoft.com/office/drawing/2014/main" id="{97911398-9677-47CC-946F-55C8CD9A2A41}"/>
+                <a16:creationId xmlns:a16="http://schemas.microsoft.com/office/drawing/2014/main" id="{B24F811E-C234-437C-A37E-72AF6A536AA6}"/>
               </a:ext>
             </a:extLst>
           </p:cNvPr>
@@ -3628,7 +4240,7 @@
           <p:cNvPr id="16" name="">
             <a:extLst xmlns:a="http://schemas.openxmlformats.org/drawingml/2006/main">
               <a:ext uri="{FF2B5EF4-FFF2-40B4-BE49-F238E27FC236}">
-                <a16:creationId xmlns:a16="http://schemas.microsoft.com/office/drawing/2014/main" id="{BDA66E5D-7EA0-4666-A28E-60D9D91210AC}"/>
+                <a16:creationId xmlns:a16="http://schemas.microsoft.com/office/drawing/2014/main" id="{52DE63ED-BF53-4AB9-9D0B-E6A4BC992080}"/>
               </a:ext>
             </a:extLst>
           </p:cNvPr>
@@ -3689,7 +4301,7 @@
           <p:cNvPr id="17" name="">
             <a:extLst xmlns:a="http://schemas.openxmlformats.org/drawingml/2006/main">
               <a:ext uri="{FF2B5EF4-FFF2-40B4-BE49-F238E27FC236}">
-                <a16:creationId xmlns:a16="http://schemas.microsoft.com/office/drawing/2014/main" id="{4AC00B82-178E-4E4E-9CC9-BF98B2CDE8BC}"/>
+                <a16:creationId xmlns:a16="http://schemas.microsoft.com/office/drawing/2014/main" id="{CD098F07-9CF1-43F9-AFEB-F3E0B5C2D89E}"/>
               </a:ext>
             </a:extLst>
           </p:cNvPr>
@@ -3740,7 +4352,7 @@
                 <a:ea typeface="Arial"/>
                 <a:cs typeface="Arial"/>
               </a:rPr>
-              <a:t>The formula executes, yet its logic or transformation still produces the wrong value.</a:t>
+              <a:t>The formula runs but returns the wrong value or applies the wrong transformation.</a:t>
             </a:r>
           </a:p>
         </p:txBody>
@@ -3750,7 +4362,7 @@
           <p:cNvPr id="18" name="">
             <a:extLst xmlns:a="http://schemas.openxmlformats.org/drawingml/2006/main">
               <a:ext uri="{FF2B5EF4-FFF2-40B4-BE49-F238E27FC236}">
-                <a16:creationId xmlns:a16="http://schemas.microsoft.com/office/drawing/2014/main" id="{1C9C7E29-8D1A-47B9-84EF-81E0C699C787}"/>
+                <a16:creationId xmlns:a16="http://schemas.microsoft.com/office/drawing/2014/main" id="{61C8B737-DF6B-4498-9085-836EB9BE5210}"/>
               </a:ext>
             </a:extLst>
           </p:cNvPr>
@@ -3780,7 +4392,7 @@
           <p:cNvPr id="19" name="">
             <a:extLst xmlns:a="http://schemas.openxmlformats.org/drawingml/2006/main">
               <a:ext uri="{FF2B5EF4-FFF2-40B4-BE49-F238E27FC236}">
-                <a16:creationId xmlns:a16="http://schemas.microsoft.com/office/drawing/2014/main" id="{7F81F5C9-1E2A-431A-BD53-046C5B9A0225}"/>
+                <a16:creationId xmlns:a16="http://schemas.microsoft.com/office/drawing/2014/main" id="{CD6EE083-AF59-47F1-8F9E-CF93EC33ED10}"/>
               </a:ext>
             </a:extLst>
           </p:cNvPr>
@@ -3841,7 +4453,7 @@
           <p:cNvPr id="20" name="">
             <a:extLst xmlns:a="http://schemas.openxmlformats.org/drawingml/2006/main">
               <a:ext uri="{FF2B5EF4-FFF2-40B4-BE49-F238E27FC236}">
-                <a16:creationId xmlns:a16="http://schemas.microsoft.com/office/drawing/2014/main" id="{82A1D872-91B1-4F27-9291-0DDD22E46448}"/>
+                <a16:creationId xmlns:a16="http://schemas.microsoft.com/office/drawing/2014/main" id="{5A3F0D77-BEA1-48C6-89B8-F26F8C89B942}"/>
               </a:ext>
             </a:extLst>
           </p:cNvPr>
@@ -3872,7 +4484,7 @@
           <p:cNvPr id="21" name="">
             <a:extLst xmlns:a="http://schemas.openxmlformats.org/drawingml/2006/main">
               <a:ext uri="{FF2B5EF4-FFF2-40B4-BE49-F238E27FC236}">
-                <a16:creationId xmlns:a16="http://schemas.microsoft.com/office/drawing/2014/main" id="{E34DB4E8-DE37-47EB-97BD-1B8E9FC60DAD}"/>
+                <a16:creationId xmlns:a16="http://schemas.microsoft.com/office/drawing/2014/main" id="{F00AAA7D-C612-474D-AE41-87EC44D2B2F4}"/>
               </a:ext>
             </a:extLst>
           </p:cNvPr>
@@ -3933,7 +4545,7 @@
           <p:cNvPr id="22" name="">
             <a:extLst xmlns:a="http://schemas.openxmlformats.org/drawingml/2006/main">
               <a:ext uri="{FF2B5EF4-FFF2-40B4-BE49-F238E27FC236}">
-                <a16:creationId xmlns:a16="http://schemas.microsoft.com/office/drawing/2014/main" id="{F2D4EB44-AE17-46A8-8DC8-B88FC41D551E}"/>
+                <a16:creationId xmlns:a16="http://schemas.microsoft.com/office/drawing/2014/main" id="{9FF06154-D016-4BA6-88F5-C20A6B72766A}"/>
               </a:ext>
             </a:extLst>
           </p:cNvPr>
@@ -3984,7 +4596,7 @@
                 <a:ea typeface="Arial"/>
                 <a:cs typeface="Arial"/>
               </a:rPr>
-              <a:t>02</a:t>
+              <a:t>03</a:t>
             </a:r>
           </a:p>
         </p:txBody>
@@ -3992,14 +4604,14 @@
     </p:spTree>
     <p:extLst>
       <p:ext uri="{BB962C8B-B14F-4D97-AF65-F5344CB8AC3E}">
-        <p14:creationId xmlns:p14="http://schemas.microsoft.com/office/powerpoint/2010/main" val="1087352681"/>
+        <p14:creationId xmlns:p14="http://schemas.microsoft.com/office/powerpoint/2010/main" val="1186433775"/>
       </p:ext>
     </p:extLst>
   </p:cSld>
 </p:sld>
 </file>
 
-<file path=ppt/slides/slide3.xml><?xml version="1.0" encoding="utf-8"?>
+<file path=ppt/slides/slide4.xml><?xml version="1.0" encoding="utf-8"?>
 <p:sld xmlns:p="http://schemas.openxmlformats.org/presentationml/2006/main">
   <p:cSld>
     <p:bg>
@@ -4020,10 +4632,10 @@
       </p:grpSpPr>
       <p:sp>
         <p:nvSpPr>
-          <p:cNvPr id="34" name="slide-title">
-            <a:extLst xmlns:a="http://schemas.openxmlformats.org/drawingml/2006/main">
-              <a:ext uri="{FF2B5EF4-FFF2-40B4-BE49-F238E27FC236}">
-                <a16:creationId xmlns:a16="http://schemas.microsoft.com/office/drawing/2014/main" id="{1683E649-5D41-44C7-97CB-BA81451F0A5A}"/>
+          <p:cNvPr id="38" name="slide-title">
+            <a:extLst xmlns:a="http://schemas.openxmlformats.org/drawingml/2006/main">
+              <a:ext uri="{FF2B5EF4-FFF2-40B4-BE49-F238E27FC236}">
+                <a16:creationId xmlns:a16="http://schemas.microsoft.com/office/drawing/2014/main" id="{A7314E9E-D8C4-4AC4-BF16-ADB16F73827F}"/>
               </a:ext>
             </a:extLst>
           </p:cNvPr>
@@ -4074,7 +4686,7 @@
                 <a:ea typeface="Arial"/>
                 <a:cs typeface="Arial"/>
               </a:rPr>
-              <a:t>FormulaBench system</a:t>
+              <a:t>Current FormulaBench workflow</a:t>
             </a:r>
           </a:p>
         </p:txBody>
@@ -4084,7 +4696,7 @@
           <p:cNvPr id="2" name="">
             <a:extLst xmlns:a="http://schemas.openxmlformats.org/drawingml/2006/main">
               <a:ext uri="{FF2B5EF4-FFF2-40B4-BE49-F238E27FC236}">
-                <a16:creationId xmlns:a16="http://schemas.microsoft.com/office/drawing/2014/main" id="{68E3D4E1-DFF1-41B9-B310-B255748BFEEA}"/>
+                <a16:creationId xmlns:a16="http://schemas.microsoft.com/office/drawing/2014/main" id="{C9446748-08D8-4A03-8133-D7736F905BC3}"/>
               </a:ext>
             </a:extLst>
           </p:cNvPr>
@@ -4096,7 +4708,7 @@
         <p:spPr>
           <a:xfrm xmlns:a="http://schemas.openxmlformats.org/drawingml/2006/main">
             <a:off x="609600" y="1028700"/>
-            <a:ext cx="9048750" cy="361950"/>
+            <a:ext cx="10287000" cy="361950"/>
           </a:xfrm>
           <a:prstGeom xmlns:a="http://schemas.openxmlformats.org/drawingml/2006/main" prst="rect">
             <a:avLst/>
@@ -4135,7 +4747,7 @@
                 <a:ea typeface="Arial"/>
                 <a:cs typeface="Arial"/>
               </a:rPr>
-              <a:t>One model response sits inside a deterministic workbook pipeline.</a:t>
+              <a:t>FormulaBench requests one logical model sample between deterministic preparation and validation.</a:t>
             </a:r>
           </a:p>
         </p:txBody>
@@ -4145,31 +4757,88 @@
           <p:cNvPr id="3" name="">
             <a:extLst xmlns:a="http://schemas.openxmlformats.org/drawingml/2006/main">
               <a:ext uri="{FF2B5EF4-FFF2-40B4-BE49-F238E27FC236}">
-                <a16:creationId xmlns:a16="http://schemas.microsoft.com/office/drawing/2014/main" id="{C5E94488-66A2-40D6-B5F0-A082C6593C99}"/>
-              </a:ext>
-            </a:extLst>
-          </p:cNvPr>
-          <p:cNvSpPr>
-            <a:spLocks xmlns:a="http://schemas.openxmlformats.org/drawingml/2006/main" noGrp="1"/>
-          </p:cNvSpPr>
-          <p:nvPr/>
-        </p:nvSpPr>
-        <p:spPr>
-          <a:xfrm xmlns:a="http://schemas.openxmlformats.org/drawingml/2006/main">
-            <a:off x="552450" y="2047875"/>
-            <a:ext cx="1619250" cy="1428750"/>
-          </a:xfrm>
-          <a:prstGeom xmlns:a="http://schemas.openxmlformats.org/drawingml/2006/main" prst="roundRect">
-            <a:avLst>
-              <a:gd name="adj" fmla="val 6667"/>
-            </a:avLst>
-          </a:prstGeom>
-          <a:solidFill xmlns:a="http://schemas.openxmlformats.org/drawingml/2006/main">
-            <a:srgbClr val="FFFDF8"/>
-          </a:solidFill>
-          <a:ln xmlns:a="http://schemas.openxmlformats.org/drawingml/2006/main" w="9525">
+                <a16:creationId xmlns:a16="http://schemas.microsoft.com/office/drawing/2014/main" id="{955F756F-D72E-4224-B0F7-77683A574E5E}"/>
+              </a:ext>
+            </a:extLst>
+          </p:cNvPr>
+          <p:cNvSpPr>
+            <a:spLocks xmlns:a="http://schemas.openxmlformats.org/drawingml/2006/main" noGrp="1"/>
+          </p:cNvSpPr>
+          <p:nvPr/>
+        </p:nvSpPr>
+        <p:spPr>
+          <a:xfrm xmlns:a="http://schemas.openxmlformats.org/drawingml/2006/main">
+            <a:off x="609600" y="1619250"/>
+            <a:ext cx="3429000" cy="228600"/>
+          </a:xfrm>
+          <a:prstGeom xmlns:a="http://schemas.openxmlformats.org/drawingml/2006/main" prst="rect">
+            <a:avLst/>
+          </a:prstGeom>
+          <a:noFill xmlns:a="http://schemas.openxmlformats.org/drawingml/2006/main"/>
+          <a:ln xmlns:a="http://schemas.openxmlformats.org/drawingml/2006/main" w="0">
+            <a:noFill/>
+          </a:ln>
+        </p:spPr>
+        <p:txBody>
+          <a:bodyPr xmlns:a="http://schemas.openxmlformats.org/drawingml/2006/main" wrap="square" lIns="0" tIns="0" rIns="0" bIns="0" anchor="t">
+            <a:normAutofit fontScale="100000"/>
+          </a:bodyPr>
+          <a:lstStyle xmlns:a="http://schemas.openxmlformats.org/drawingml/2006/main"/>
+          <a:p xmlns:a="http://schemas.openxmlformats.org/drawingml/2006/main">
+            <a:pPr algn="l">
+              <a:lnSpc>
+                <a:spcPct val="105000"/>
+              </a:lnSpc>
+              <a:buNone/>
+              <a:defRPr sz="1050" b="1" i="0">
+                <a:solidFill>
+                  <a:srgbClr val="35C47A"/>
+                </a:solidFill>
+                <a:latin typeface="Arial"/>
+                <a:ea typeface="Arial"/>
+                <a:cs typeface="Arial"/>
+              </a:defRPr>
+            </a:pPr>
+            <a:r>
+              <a:rPr sz="1050" b="1" i="0">
+                <a:solidFill>
+                  <a:srgbClr val="35C47A"/>
+                </a:solidFill>
+                <a:latin typeface="Arial"/>
+                <a:ea typeface="Arial"/>
+                <a:cs typeface="Arial"/>
+              </a:rPr>
+              <a:t>DETERMINISTIC PREPARATION</a:t>
+            </a:r>
+          </a:p>
+        </p:txBody>
+      </p:sp>
+      <p:sp>
+        <p:nvSpPr>
+          <p:cNvPr id="4" name="">
+            <a:extLst xmlns:a="http://schemas.openxmlformats.org/drawingml/2006/main">
+              <a:ext uri="{FF2B5EF4-FFF2-40B4-BE49-F238E27FC236}">
+                <a16:creationId xmlns:a16="http://schemas.microsoft.com/office/drawing/2014/main" id="{19261769-E965-4807-BE0A-D2E80001285A}"/>
+              </a:ext>
+            </a:extLst>
+          </p:cNvPr>
+          <p:cNvSpPr>
+            <a:spLocks xmlns:a="http://schemas.openxmlformats.org/drawingml/2006/main" noGrp="1"/>
+          </p:cNvSpPr>
+          <p:nvPr/>
+        </p:nvSpPr>
+        <p:spPr>
+          <a:xfrm xmlns:a="http://schemas.openxmlformats.org/drawingml/2006/main">
+            <a:off x="609600" y="1924050"/>
+            <a:ext cx="3429000" cy="0"/>
+          </a:xfrm>
+          <a:prstGeom xmlns:a="http://schemas.openxmlformats.org/drawingml/2006/main" prst="line">
+            <a:avLst/>
+          </a:prstGeom>
+          <a:noFill xmlns:a="http://schemas.openxmlformats.org/drawingml/2006/main"/>
+          <a:ln xmlns:a="http://schemas.openxmlformats.org/drawingml/2006/main" w="19050">
             <a:solidFill>
-              <a:srgbClr val="C9D1D9"/>
+              <a:srgbClr val="344257"/>
             </a:solidFill>
             <a:prstDash val="solid"/>
           </a:ln>
@@ -4177,22 +4846,22 @@
       </p:sp>
       <p:sp>
         <p:nvSpPr>
-          <p:cNvPr id="4" name="">
-            <a:extLst xmlns:a="http://schemas.openxmlformats.org/drawingml/2006/main">
-              <a:ext uri="{FF2B5EF4-FFF2-40B4-BE49-F238E27FC236}">
-                <a16:creationId xmlns:a16="http://schemas.microsoft.com/office/drawing/2014/main" id="{6A4D6B10-3663-4DF2-B8F9-4A032D9FD241}"/>
-              </a:ext>
-            </a:extLst>
-          </p:cNvPr>
-          <p:cNvSpPr>
-            <a:spLocks xmlns:a="http://schemas.openxmlformats.org/drawingml/2006/main" noGrp="1"/>
-          </p:cNvSpPr>
-          <p:nvPr/>
-        </p:nvSpPr>
-        <p:spPr>
-          <a:xfrm xmlns:a="http://schemas.openxmlformats.org/drawingml/2006/main">
-            <a:off x="704850" y="2305050"/>
-            <a:ext cx="1314450" cy="323850"/>
+          <p:cNvPr id="5" name="">
+            <a:extLst xmlns:a="http://schemas.openxmlformats.org/drawingml/2006/main">
+              <a:ext uri="{FF2B5EF4-FFF2-40B4-BE49-F238E27FC236}">
+                <a16:creationId xmlns:a16="http://schemas.microsoft.com/office/drawing/2014/main" id="{1B52BBE9-C174-4FF2-8C35-5B94E5C7CC36}"/>
+              </a:ext>
+            </a:extLst>
+          </p:cNvPr>
+          <p:cNvSpPr>
+            <a:spLocks xmlns:a="http://schemas.openxmlformats.org/drawingml/2006/main" noGrp="1"/>
+          </p:cNvSpPr>
+          <p:nvPr/>
+        </p:nvSpPr>
+        <p:spPr>
+          <a:xfrm xmlns:a="http://schemas.openxmlformats.org/drawingml/2006/main">
+            <a:off x="4648200" y="1619250"/>
+            <a:ext cx="1381125" cy="228600"/>
           </a:xfrm>
           <a:prstGeom xmlns:a="http://schemas.openxmlformats.org/drawingml/2006/main" prst="rect">
             <a:avLst/>
@@ -4213,19 +4882,234 @@
                 <a:spcPct val="105000"/>
               </a:lnSpc>
               <a:buNone/>
-              <a:defRPr sz="1725" b="1" i="0">
-                <a:solidFill>
-                  <a:srgbClr val="122033"/>
-                </a:solidFill>
-                <a:latin typeface="Arial"/>
-                <a:ea typeface="Arial"/>
-                <a:cs typeface="Arial"/>
-              </a:defRPr>
-            </a:pPr>
-            <a:r>
-              <a:rPr sz="1725" b="1" i="0">
-                <a:solidFill>
-                  <a:srgbClr val="122033"/>
+              <a:defRPr sz="1050" b="1" i="0">
+                <a:solidFill>
+                  <a:srgbClr val="35C47A"/>
+                </a:solidFill>
+                <a:latin typeface="Arial"/>
+                <a:ea typeface="Arial"/>
+                <a:cs typeface="Arial"/>
+              </a:defRPr>
+            </a:pPr>
+            <a:r>
+              <a:rPr sz="1050" b="1" i="0">
+                <a:solidFill>
+                  <a:srgbClr val="35C47A"/>
+                </a:solidFill>
+                <a:latin typeface="Arial"/>
+                <a:ea typeface="Arial"/>
+                <a:cs typeface="Arial"/>
+              </a:rPr>
+              <a:t>MODEL STEP</a:t>
+            </a:r>
+          </a:p>
+        </p:txBody>
+      </p:sp>
+      <p:sp>
+        <p:nvSpPr>
+          <p:cNvPr id="6" name="">
+            <a:extLst xmlns:a="http://schemas.openxmlformats.org/drawingml/2006/main">
+              <a:ext uri="{FF2B5EF4-FFF2-40B4-BE49-F238E27FC236}">
+                <a16:creationId xmlns:a16="http://schemas.microsoft.com/office/drawing/2014/main" id="{5089FE0B-1070-4FC4-B31A-7F7341CC0BDA}"/>
+              </a:ext>
+            </a:extLst>
+          </p:cNvPr>
+          <p:cNvSpPr>
+            <a:spLocks xmlns:a="http://schemas.openxmlformats.org/drawingml/2006/main" noGrp="1"/>
+          </p:cNvSpPr>
+          <p:nvPr/>
+        </p:nvSpPr>
+        <p:spPr>
+          <a:xfrm xmlns:a="http://schemas.openxmlformats.org/drawingml/2006/main">
+            <a:off x="4648200" y="1924050"/>
+            <a:ext cx="1381125" cy="0"/>
+          </a:xfrm>
+          <a:prstGeom xmlns:a="http://schemas.openxmlformats.org/drawingml/2006/main" prst="line">
+            <a:avLst/>
+          </a:prstGeom>
+          <a:noFill xmlns:a="http://schemas.openxmlformats.org/drawingml/2006/main"/>
+          <a:ln xmlns:a="http://schemas.openxmlformats.org/drawingml/2006/main" w="28575">
+            <a:solidFill>
+              <a:srgbClr val="35C47A"/>
+            </a:solidFill>
+            <a:prstDash val="solid"/>
+          </a:ln>
+        </p:spPr>
+      </p:sp>
+      <p:sp>
+        <p:nvSpPr>
+          <p:cNvPr id="7" name="">
+            <a:extLst xmlns:a="http://schemas.openxmlformats.org/drawingml/2006/main">
+              <a:ext uri="{FF2B5EF4-FFF2-40B4-BE49-F238E27FC236}">
+                <a16:creationId xmlns:a16="http://schemas.microsoft.com/office/drawing/2014/main" id="{157B428B-132B-43E0-95EB-A7D3C886750E}"/>
+              </a:ext>
+            </a:extLst>
+          </p:cNvPr>
+          <p:cNvSpPr>
+            <a:spLocks xmlns:a="http://schemas.openxmlformats.org/drawingml/2006/main" noGrp="1"/>
+          </p:cNvSpPr>
+          <p:nvPr/>
+        </p:nvSpPr>
+        <p:spPr>
+          <a:xfrm xmlns:a="http://schemas.openxmlformats.org/drawingml/2006/main">
+            <a:off x="6553200" y="1619250"/>
+            <a:ext cx="3714750" cy="228600"/>
+          </a:xfrm>
+          <a:prstGeom xmlns:a="http://schemas.openxmlformats.org/drawingml/2006/main" prst="rect">
+            <a:avLst/>
+          </a:prstGeom>
+          <a:noFill xmlns:a="http://schemas.openxmlformats.org/drawingml/2006/main"/>
+          <a:ln xmlns:a="http://schemas.openxmlformats.org/drawingml/2006/main" w="0">
+            <a:noFill/>
+          </a:ln>
+        </p:spPr>
+        <p:txBody>
+          <a:bodyPr xmlns:a="http://schemas.openxmlformats.org/drawingml/2006/main" wrap="square" lIns="0" tIns="0" rIns="0" bIns="0" anchor="t">
+            <a:normAutofit fontScale="100000"/>
+          </a:bodyPr>
+          <a:lstStyle xmlns:a="http://schemas.openxmlformats.org/drawingml/2006/main"/>
+          <a:p xmlns:a="http://schemas.openxmlformats.org/drawingml/2006/main">
+            <a:pPr algn="r">
+              <a:lnSpc>
+                <a:spcPct val="105000"/>
+              </a:lnSpc>
+              <a:buNone/>
+              <a:defRPr sz="1050" b="1" i="0">
+                <a:solidFill>
+                  <a:srgbClr val="35C47A"/>
+                </a:solidFill>
+                <a:latin typeface="Arial"/>
+                <a:ea typeface="Arial"/>
+                <a:cs typeface="Arial"/>
+              </a:defRPr>
+            </a:pPr>
+            <a:r>
+              <a:rPr sz="1050" b="1" i="0">
+                <a:solidFill>
+                  <a:srgbClr val="35C47A"/>
+                </a:solidFill>
+                <a:latin typeface="Arial"/>
+                <a:ea typeface="Arial"/>
+                <a:cs typeface="Arial"/>
+              </a:rPr>
+              <a:t>DETERMINISTIC VALIDATION</a:t>
+            </a:r>
+          </a:p>
+        </p:txBody>
+      </p:sp>
+      <p:sp>
+        <p:nvSpPr>
+          <p:cNvPr id="8" name="">
+            <a:extLst xmlns:a="http://schemas.openxmlformats.org/drawingml/2006/main">
+              <a:ext uri="{FF2B5EF4-FFF2-40B4-BE49-F238E27FC236}">
+                <a16:creationId xmlns:a16="http://schemas.microsoft.com/office/drawing/2014/main" id="{834207DD-5761-47F5-9955-F395748CFF7F}"/>
+              </a:ext>
+            </a:extLst>
+          </p:cNvPr>
+          <p:cNvSpPr>
+            <a:spLocks xmlns:a="http://schemas.openxmlformats.org/drawingml/2006/main" noGrp="1"/>
+          </p:cNvSpPr>
+          <p:nvPr/>
+        </p:nvSpPr>
+        <p:spPr>
+          <a:xfrm xmlns:a="http://schemas.openxmlformats.org/drawingml/2006/main">
+            <a:off x="6553200" y="1924050"/>
+            <a:ext cx="3714750" cy="0"/>
+          </a:xfrm>
+          <a:prstGeom xmlns:a="http://schemas.openxmlformats.org/drawingml/2006/main" prst="line">
+            <a:avLst/>
+          </a:prstGeom>
+          <a:noFill xmlns:a="http://schemas.openxmlformats.org/drawingml/2006/main"/>
+          <a:ln xmlns:a="http://schemas.openxmlformats.org/drawingml/2006/main" w="19050">
+            <a:solidFill>
+              <a:srgbClr val="344257"/>
+            </a:solidFill>
+            <a:prstDash val="solid"/>
+          </a:ln>
+        </p:spPr>
+      </p:sp>
+      <p:sp>
+        <p:nvSpPr>
+          <p:cNvPr id="9" name="">
+            <a:extLst xmlns:a="http://schemas.openxmlformats.org/drawingml/2006/main">
+              <a:ext uri="{FF2B5EF4-FFF2-40B4-BE49-F238E27FC236}">
+                <a16:creationId xmlns:a16="http://schemas.microsoft.com/office/drawing/2014/main" id="{5137A72A-4B3D-4629-8F8F-D8F78E40320A}"/>
+              </a:ext>
+            </a:extLst>
+          </p:cNvPr>
+          <p:cNvSpPr>
+            <a:spLocks xmlns:a="http://schemas.openxmlformats.org/drawingml/2006/main" noGrp="1"/>
+          </p:cNvSpPr>
+          <p:nvPr/>
+        </p:nvSpPr>
+        <p:spPr>
+          <a:xfrm xmlns:a="http://schemas.openxmlformats.org/drawingml/2006/main">
+            <a:off x="1066800" y="2647950"/>
+            <a:ext cx="8553450" cy="0"/>
+          </a:xfrm>
+          <a:prstGeom xmlns:a="http://schemas.openxmlformats.org/drawingml/2006/main" prst="line">
+            <a:avLst/>
+          </a:prstGeom>
+          <a:noFill xmlns:a="http://schemas.openxmlformats.org/drawingml/2006/main"/>
+          <a:ln xmlns:a="http://schemas.openxmlformats.org/drawingml/2006/main" w="19050">
+            <a:solidFill>
+              <a:srgbClr val="35C47A"/>
+            </a:solidFill>
+            <a:prstDash val="solid"/>
+          </a:ln>
+        </p:spPr>
+      </p:sp>
+      <p:sp>
+        <p:nvSpPr>
+          <p:cNvPr id="10" name="">
+            <a:extLst xmlns:a="http://schemas.openxmlformats.org/drawingml/2006/main">
+              <a:ext uri="{FF2B5EF4-FFF2-40B4-BE49-F238E27FC236}">
+                <a16:creationId xmlns:a16="http://schemas.microsoft.com/office/drawing/2014/main" id="{475A7DE2-6DBB-412F-BE73-1639339CE1BC}"/>
+              </a:ext>
+            </a:extLst>
+          </p:cNvPr>
+          <p:cNvSpPr>
+            <a:spLocks xmlns:a="http://schemas.openxmlformats.org/drawingml/2006/main" noGrp="1"/>
+          </p:cNvSpPr>
+          <p:nvPr/>
+        </p:nvSpPr>
+        <p:spPr>
+          <a:xfrm xmlns:a="http://schemas.openxmlformats.org/drawingml/2006/main">
+            <a:off x="352425" y="2095500"/>
+            <a:ext cx="1428750" cy="323850"/>
+          </a:xfrm>
+          <a:prstGeom xmlns:a="http://schemas.openxmlformats.org/drawingml/2006/main" prst="rect">
+            <a:avLst/>
+          </a:prstGeom>
+          <a:noFill xmlns:a="http://schemas.openxmlformats.org/drawingml/2006/main"/>
+          <a:ln xmlns:a="http://schemas.openxmlformats.org/drawingml/2006/main" w="0">
+            <a:noFill/>
+          </a:ln>
+        </p:spPr>
+        <p:txBody>
+          <a:bodyPr xmlns:a="http://schemas.openxmlformats.org/drawingml/2006/main" wrap="square" lIns="0" tIns="0" rIns="0" bIns="0" anchor="t">
+            <a:normAutofit fontScale="100000"/>
+          </a:bodyPr>
+          <a:lstStyle xmlns:a="http://schemas.openxmlformats.org/drawingml/2006/main"/>
+          <a:p xmlns:a="http://schemas.openxmlformats.org/drawingml/2006/main">
+            <a:pPr algn="ctr">
+              <a:lnSpc>
+                <a:spcPct val="105000"/>
+              </a:lnSpc>
+              <a:buNone/>
+              <a:defRPr sz="1650" b="1" i="0">
+                <a:solidFill>
+                  <a:srgbClr val="FFFFFF"/>
+                </a:solidFill>
+                <a:latin typeface="Arial"/>
+                <a:ea typeface="Arial"/>
+                <a:cs typeface="Arial"/>
+              </a:defRPr>
+            </a:pPr>
+            <a:r>
+              <a:rPr sz="1650" b="1" i="0">
+                <a:solidFill>
+                  <a:srgbClr val="FFFFFF"/>
                 </a:solidFill>
                 <a:latin typeface="Arial"/>
                 <a:ea typeface="Arial"/>
@@ -4238,22 +5122,55 @@
       </p:sp>
       <p:sp>
         <p:nvSpPr>
-          <p:cNvPr id="5" name="">
-            <a:extLst xmlns:a="http://schemas.openxmlformats.org/drawingml/2006/main">
-              <a:ext uri="{FF2B5EF4-FFF2-40B4-BE49-F238E27FC236}">
-                <a16:creationId xmlns:a16="http://schemas.microsoft.com/office/drawing/2014/main" id="{AF7EC6D8-0866-4DD4-AC66-AA53931E96BB}"/>
-              </a:ext>
-            </a:extLst>
-          </p:cNvPr>
-          <p:cNvSpPr>
-            <a:spLocks xmlns:a="http://schemas.openxmlformats.org/drawingml/2006/main" noGrp="1"/>
-          </p:cNvSpPr>
-          <p:nvPr/>
-        </p:nvSpPr>
-        <p:spPr>
-          <a:xfrm xmlns:a="http://schemas.openxmlformats.org/drawingml/2006/main">
-            <a:off x="685800" y="2752725"/>
-            <a:ext cx="1352550" cy="552450"/>
+          <p:cNvPr id="11" name="">
+            <a:extLst xmlns:a="http://schemas.openxmlformats.org/drawingml/2006/main">
+              <a:ext uri="{FF2B5EF4-FFF2-40B4-BE49-F238E27FC236}">
+                <a16:creationId xmlns:a16="http://schemas.microsoft.com/office/drawing/2014/main" id="{C2F03B69-EC27-44BD-8C22-33D49D157BE9}"/>
+              </a:ext>
+            </a:extLst>
+          </p:cNvPr>
+          <p:cNvSpPr>
+            <a:spLocks xmlns:a="http://schemas.openxmlformats.org/drawingml/2006/main" noGrp="1"/>
+          </p:cNvSpPr>
+          <p:nvPr/>
+        </p:nvSpPr>
+        <p:spPr>
+          <a:xfrm xmlns:a="http://schemas.openxmlformats.org/drawingml/2006/main">
+            <a:off x="981075" y="2562225"/>
+            <a:ext cx="171450" cy="171450"/>
+          </a:xfrm>
+          <a:prstGeom xmlns:a="http://schemas.openxmlformats.org/drawingml/2006/main" prst="ellipse">
+            <a:avLst/>
+          </a:prstGeom>
+          <a:solidFill xmlns:a="http://schemas.openxmlformats.org/drawingml/2006/main">
+            <a:srgbClr val="0B172A"/>
+          </a:solidFill>
+          <a:ln xmlns:a="http://schemas.openxmlformats.org/drawingml/2006/main" w="19050">
+            <a:solidFill>
+              <a:srgbClr val="35C47A"/>
+            </a:solidFill>
+            <a:prstDash val="solid"/>
+          </a:ln>
+        </p:spPr>
+      </p:sp>
+      <p:sp>
+        <p:nvSpPr>
+          <p:cNvPr id="12" name="">
+            <a:extLst xmlns:a="http://schemas.openxmlformats.org/drawingml/2006/main">
+              <a:ext uri="{FF2B5EF4-FFF2-40B4-BE49-F238E27FC236}">
+                <a16:creationId xmlns:a16="http://schemas.microsoft.com/office/drawing/2014/main" id="{CEF4F09D-7D16-4C02-A260-A77DEDCAC8A2}"/>
+              </a:ext>
+            </a:extLst>
+          </p:cNvPr>
+          <p:cNvSpPr>
+            <a:spLocks xmlns:a="http://schemas.openxmlformats.org/drawingml/2006/main" noGrp="1"/>
+          </p:cNvSpPr>
+          <p:nvPr/>
+        </p:nvSpPr>
+        <p:spPr>
+          <a:xfrm xmlns:a="http://schemas.openxmlformats.org/drawingml/2006/main">
+            <a:off x="352425" y="2933700"/>
+            <a:ext cx="1428750" cy="552450"/>
           </a:xfrm>
           <a:prstGeom xmlns:a="http://schemas.openxmlformats.org/drawingml/2006/main" prst="rect">
             <a:avLst/>
@@ -4276,7 +5193,7 @@
               <a:buNone/>
               <a:defRPr sz="1200" b="0" i="0">
                 <a:solidFill>
-                  <a:srgbClr val="667487"/>
+                  <a:srgbClr val="AAB6C5"/>
                 </a:solidFill>
                 <a:latin typeface="Arial"/>
                 <a:ea typeface="Arial"/>
@@ -4286,70 +5203,35 @@
             <a:r>
               <a:rPr sz="1200" b="0" i="0">
                 <a:solidFill>
-                  <a:srgbClr val="667487"/>
+                  <a:srgbClr val="AAB6C5"/>
                 </a:solidFill>
                 <a:latin typeface="Arial"/>
                 <a:ea typeface="Arial"/>
                 <a:cs typeface="Arial"/>
               </a:rPr>
-              <a:t>Workbook and target map</a:t>
-            </a:r>
-          </a:p>
-        </p:txBody>
-      </p:sp>
-      <p:sp>
-        <p:nvSpPr>
-          <p:cNvPr id="6" name="">
-            <a:extLst xmlns:a="http://schemas.openxmlformats.org/drawingml/2006/main">
-              <a:ext uri="{FF2B5EF4-FFF2-40B4-BE49-F238E27FC236}">
-                <a16:creationId xmlns:a16="http://schemas.microsoft.com/office/drawing/2014/main" id="{7AF61267-689D-4BC3-83AC-8BBBAD5457C3}"/>
-              </a:ext>
-            </a:extLst>
-          </p:cNvPr>
-          <p:cNvSpPr>
-            <a:spLocks xmlns:a="http://schemas.openxmlformats.org/drawingml/2006/main" noGrp="1"/>
-          </p:cNvSpPr>
-          <p:nvPr/>
-        </p:nvSpPr>
-        <p:spPr>
-          <a:xfrm xmlns:a="http://schemas.openxmlformats.org/drawingml/2006/main">
-            <a:off x="2533650" y="2047875"/>
-            <a:ext cx="1619250" cy="1428750"/>
-          </a:xfrm>
-          <a:prstGeom xmlns:a="http://schemas.openxmlformats.org/drawingml/2006/main" prst="roundRect">
-            <a:avLst>
-              <a:gd name="adj" fmla="val 6667"/>
-            </a:avLst>
-          </a:prstGeom>
-          <a:solidFill xmlns:a="http://schemas.openxmlformats.org/drawingml/2006/main">
-            <a:srgbClr val="FFFDF8"/>
-          </a:solidFill>
-          <a:ln xmlns:a="http://schemas.openxmlformats.org/drawingml/2006/main" w="9525">
-            <a:solidFill>
-              <a:srgbClr val="C9D1D9"/>
-            </a:solidFill>
-            <a:prstDash val="solid"/>
-          </a:ln>
-        </p:spPr>
-      </p:sp>
-      <p:sp>
-        <p:nvSpPr>
-          <p:cNvPr id="7" name="">
-            <a:extLst xmlns:a="http://schemas.openxmlformats.org/drawingml/2006/main">
-              <a:ext uri="{FF2B5EF4-FFF2-40B4-BE49-F238E27FC236}">
-                <a16:creationId xmlns:a16="http://schemas.microsoft.com/office/drawing/2014/main" id="{B27E686B-A618-41D1-A8CE-38887CFEA9B6}"/>
-              </a:ext>
-            </a:extLst>
-          </p:cNvPr>
-          <p:cNvSpPr>
-            <a:spLocks xmlns:a="http://schemas.openxmlformats.org/drawingml/2006/main" noGrp="1"/>
-          </p:cNvSpPr>
-          <p:nvPr/>
-        </p:nvSpPr>
-        <p:spPr>
-          <a:xfrm xmlns:a="http://schemas.openxmlformats.org/drawingml/2006/main">
-            <a:off x="2686050" y="2305050"/>
-            <a:ext cx="1314450" cy="323850"/>
+              <a:t>Workbook and target cells</a:t>
+            </a:r>
+          </a:p>
+        </p:txBody>
+      </p:sp>
+      <p:sp>
+        <p:nvSpPr>
+          <p:cNvPr id="13" name="">
+            <a:extLst xmlns:a="http://schemas.openxmlformats.org/drawingml/2006/main">
+              <a:ext uri="{FF2B5EF4-FFF2-40B4-BE49-F238E27FC236}">
+                <a16:creationId xmlns:a16="http://schemas.microsoft.com/office/drawing/2014/main" id="{0494D271-4820-4906-950C-441AAA2DA64E}"/>
+              </a:ext>
+            </a:extLst>
+          </p:cNvPr>
+          <p:cNvSpPr>
+            <a:spLocks xmlns:a="http://schemas.openxmlformats.org/drawingml/2006/main" noGrp="1"/>
+          </p:cNvSpPr>
+          <p:nvPr/>
+        </p:nvSpPr>
+        <p:spPr>
+          <a:xfrm xmlns:a="http://schemas.openxmlformats.org/drawingml/2006/main">
+            <a:off x="2238375" y="2095500"/>
+            <a:ext cx="1809750" cy="323850"/>
           </a:xfrm>
           <a:prstGeom xmlns:a="http://schemas.openxmlformats.org/drawingml/2006/main" prst="rect">
             <a:avLst/>
@@ -4370,47 +5252,80 @@
                 <a:spcPct val="105000"/>
               </a:lnSpc>
               <a:buNone/>
-              <a:defRPr sz="1725" b="1" i="0">
-                <a:solidFill>
-                  <a:srgbClr val="122033"/>
-                </a:solidFill>
-                <a:latin typeface="Arial"/>
-                <a:ea typeface="Arial"/>
-                <a:cs typeface="Arial"/>
-              </a:defRPr>
-            </a:pPr>
-            <a:r>
-              <a:rPr sz="1725" b="1" i="0">
-                <a:solidFill>
-                  <a:srgbClr val="122033"/>
+              <a:defRPr sz="1650" b="1" i="0">
+                <a:solidFill>
+                  <a:srgbClr val="FFFFFF"/>
+                </a:solidFill>
+                <a:latin typeface="Arial"/>
+                <a:ea typeface="Arial"/>
+                <a:cs typeface="Arial"/>
+              </a:defRPr>
+            </a:pPr>
+            <a:r>
+              <a:rPr sz="1650" b="1" i="0">
+                <a:solidFill>
+                  <a:srgbClr val="FFFFFF"/>
                 </a:solidFill>
                 <a:latin typeface="Arial"/>
                 <a:ea typeface="Arial"/>
                 <a:cs typeface="Arial"/>
               </a:rPr>
-              <a:t>Context</a:t>
-            </a:r>
-          </a:p>
-        </p:txBody>
-      </p:sp>
-      <p:sp>
-        <p:nvSpPr>
-          <p:cNvPr id="8" name="">
-            <a:extLst xmlns:a="http://schemas.openxmlformats.org/drawingml/2006/main">
-              <a:ext uri="{FF2B5EF4-FFF2-40B4-BE49-F238E27FC236}">
-                <a16:creationId xmlns:a16="http://schemas.microsoft.com/office/drawing/2014/main" id="{E74E5E56-F09F-472F-A301-E55D060F7101}"/>
-              </a:ext>
-            </a:extLst>
-          </p:cNvPr>
-          <p:cNvSpPr>
-            <a:spLocks xmlns:a="http://schemas.openxmlformats.org/drawingml/2006/main" noGrp="1"/>
-          </p:cNvSpPr>
-          <p:nvPr/>
-        </p:nvSpPr>
-        <p:spPr>
-          <a:xfrm xmlns:a="http://schemas.openxmlformats.org/drawingml/2006/main">
-            <a:off x="2667000" y="2752725"/>
-            <a:ext cx="1352550" cy="552450"/>
+              <a:t>Build context</a:t>
+            </a:r>
+          </a:p>
+        </p:txBody>
+      </p:sp>
+      <p:sp>
+        <p:nvSpPr>
+          <p:cNvPr id="14" name="">
+            <a:extLst xmlns:a="http://schemas.openxmlformats.org/drawingml/2006/main">
+              <a:ext uri="{FF2B5EF4-FFF2-40B4-BE49-F238E27FC236}">
+                <a16:creationId xmlns:a16="http://schemas.microsoft.com/office/drawing/2014/main" id="{CF26D163-AB05-4611-8591-84C36ED046A7}"/>
+              </a:ext>
+            </a:extLst>
+          </p:cNvPr>
+          <p:cNvSpPr>
+            <a:spLocks xmlns:a="http://schemas.openxmlformats.org/drawingml/2006/main" noGrp="1"/>
+          </p:cNvSpPr>
+          <p:nvPr/>
+        </p:nvSpPr>
+        <p:spPr>
+          <a:xfrm xmlns:a="http://schemas.openxmlformats.org/drawingml/2006/main">
+            <a:off x="3057525" y="2562225"/>
+            <a:ext cx="171450" cy="171450"/>
+          </a:xfrm>
+          <a:prstGeom xmlns:a="http://schemas.openxmlformats.org/drawingml/2006/main" prst="ellipse">
+            <a:avLst/>
+          </a:prstGeom>
+          <a:solidFill xmlns:a="http://schemas.openxmlformats.org/drawingml/2006/main">
+            <a:srgbClr val="0B172A"/>
+          </a:solidFill>
+          <a:ln xmlns:a="http://schemas.openxmlformats.org/drawingml/2006/main" w="19050">
+            <a:solidFill>
+              <a:srgbClr val="35C47A"/>
+            </a:solidFill>
+            <a:prstDash val="solid"/>
+          </a:ln>
+        </p:spPr>
+      </p:sp>
+      <p:sp>
+        <p:nvSpPr>
+          <p:cNvPr id="15" name="">
+            <a:extLst xmlns:a="http://schemas.openxmlformats.org/drawingml/2006/main">
+              <a:ext uri="{FF2B5EF4-FFF2-40B4-BE49-F238E27FC236}">
+                <a16:creationId xmlns:a16="http://schemas.microsoft.com/office/drawing/2014/main" id="{B2B33C41-B4D4-40FD-95D6-683716105BC8}"/>
+              </a:ext>
+            </a:extLst>
+          </p:cNvPr>
+          <p:cNvSpPr>
+            <a:spLocks xmlns:a="http://schemas.openxmlformats.org/drawingml/2006/main" noGrp="1"/>
+          </p:cNvSpPr>
+          <p:nvPr/>
+        </p:nvSpPr>
+        <p:spPr>
+          <a:xfrm xmlns:a="http://schemas.openxmlformats.org/drawingml/2006/main">
+            <a:off x="2238375" y="2933700"/>
+            <a:ext cx="1809750" cy="552450"/>
           </a:xfrm>
           <a:prstGeom xmlns:a="http://schemas.openxmlformats.org/drawingml/2006/main" prst="rect">
             <a:avLst/>
@@ -4433,7 +5348,7 @@
               <a:buNone/>
               <a:defRPr sz="1200" b="0" i="0">
                 <a:solidFill>
-                  <a:srgbClr val="667487"/>
+                  <a:srgbClr val="AAB6C5"/>
                 </a:solidFill>
                 <a:latin typeface="Arial"/>
                 <a:ea typeface="Arial"/>
@@ -4443,43 +5358,102 @@
             <a:r>
               <a:rPr sz="1200" b="0" i="0">
                 <a:solidFill>
-                  <a:srgbClr val="667487"/>
+                  <a:srgbClr val="AAB6C5"/>
                 </a:solidFill>
                 <a:latin typeface="Arial"/>
                 <a:ea typeface="Arial"/>
                 <a:cs typeface="Arial"/>
               </a:rPr>
-              <a:t>Formula and cached-value views</a:t>
-            </a:r>
-          </a:p>
-        </p:txBody>
-      </p:sp>
-      <p:sp>
-        <p:nvSpPr>
-          <p:cNvPr id="9" name="">
-            <a:extLst xmlns:a="http://schemas.openxmlformats.org/drawingml/2006/main">
-              <a:ext uri="{FF2B5EF4-FFF2-40B4-BE49-F238E27FC236}">
-                <a16:creationId xmlns:a16="http://schemas.microsoft.com/office/drawing/2014/main" id="{2DBBEF64-70F8-4C87-AC42-7BC25A7897F6}"/>
-              </a:ext>
-            </a:extLst>
-          </p:cNvPr>
-          <p:cNvSpPr>
-            <a:spLocks xmlns:a="http://schemas.openxmlformats.org/drawingml/2006/main" noGrp="1"/>
-          </p:cNvSpPr>
-          <p:nvPr/>
-        </p:nvSpPr>
-        <p:spPr>
-          <a:xfrm xmlns:a="http://schemas.openxmlformats.org/drawingml/2006/main">
-            <a:off x="4514850" y="2047875"/>
-            <a:ext cx="1619250" cy="1428750"/>
-          </a:xfrm>
-          <a:prstGeom xmlns:a="http://schemas.openxmlformats.org/drawingml/2006/main" prst="roundRect">
-            <a:avLst>
-              <a:gd name="adj" fmla="val 6667"/>
-            </a:avLst>
+              <a:t>Existing formulas and last calculated values</a:t>
+            </a:r>
+          </a:p>
+        </p:txBody>
+      </p:sp>
+      <p:sp>
+        <p:nvSpPr>
+          <p:cNvPr id="16" name="">
+            <a:extLst xmlns:a="http://schemas.openxmlformats.org/drawingml/2006/main">
+              <a:ext uri="{FF2B5EF4-FFF2-40B4-BE49-F238E27FC236}">
+                <a16:creationId xmlns:a16="http://schemas.microsoft.com/office/drawing/2014/main" id="{98E7ED3A-D4EB-4F79-AC02-95136325D446}"/>
+              </a:ext>
+            </a:extLst>
+          </p:cNvPr>
+          <p:cNvSpPr>
+            <a:spLocks xmlns:a="http://schemas.openxmlformats.org/drawingml/2006/main" noGrp="1"/>
+          </p:cNvSpPr>
+          <p:nvPr/>
+        </p:nvSpPr>
+        <p:spPr>
+          <a:xfrm xmlns:a="http://schemas.openxmlformats.org/drawingml/2006/main">
+            <a:off x="4572000" y="2095500"/>
+            <a:ext cx="1524000" cy="323850"/>
+          </a:xfrm>
+          <a:prstGeom xmlns:a="http://schemas.openxmlformats.org/drawingml/2006/main" prst="rect">
+            <a:avLst/>
+          </a:prstGeom>
+          <a:noFill xmlns:a="http://schemas.openxmlformats.org/drawingml/2006/main"/>
+          <a:ln xmlns:a="http://schemas.openxmlformats.org/drawingml/2006/main" w="0">
+            <a:noFill/>
+          </a:ln>
+        </p:spPr>
+        <p:txBody>
+          <a:bodyPr xmlns:a="http://schemas.openxmlformats.org/drawingml/2006/main" wrap="square" lIns="0" tIns="0" rIns="0" bIns="0" anchor="t">
+            <a:normAutofit fontScale="100000"/>
+          </a:bodyPr>
+          <a:lstStyle xmlns:a="http://schemas.openxmlformats.org/drawingml/2006/main"/>
+          <a:p xmlns:a="http://schemas.openxmlformats.org/drawingml/2006/main">
+            <a:pPr algn="ctr">
+              <a:lnSpc>
+                <a:spcPct val="105000"/>
+              </a:lnSpc>
+              <a:buNone/>
+              <a:defRPr sz="1650" b="1" i="0">
+                <a:solidFill>
+                  <a:srgbClr val="35C47A"/>
+                </a:solidFill>
+                <a:latin typeface="Arial"/>
+                <a:ea typeface="Arial"/>
+                <a:cs typeface="Arial"/>
+              </a:defRPr>
+            </a:pPr>
+            <a:r>
+              <a:rPr sz="1650" b="1" i="0">
+                <a:solidFill>
+                  <a:srgbClr val="35C47A"/>
+                </a:solidFill>
+                <a:latin typeface="Arial"/>
+                <a:ea typeface="Arial"/>
+                <a:cs typeface="Arial"/>
+              </a:rPr>
+              <a:t>Generate</a:t>
+            </a:r>
+          </a:p>
+        </p:txBody>
+      </p:sp>
+      <p:sp>
+        <p:nvSpPr>
+          <p:cNvPr id="17" name="">
+            <a:extLst xmlns:a="http://schemas.openxmlformats.org/drawingml/2006/main">
+              <a:ext uri="{FF2B5EF4-FFF2-40B4-BE49-F238E27FC236}">
+                <a16:creationId xmlns:a16="http://schemas.microsoft.com/office/drawing/2014/main" id="{0DB3EB40-F548-4192-B9D5-7A042AE900EF}"/>
+              </a:ext>
+            </a:extLst>
+          </p:cNvPr>
+          <p:cNvSpPr>
+            <a:spLocks xmlns:a="http://schemas.openxmlformats.org/drawingml/2006/main" noGrp="1"/>
+          </p:cNvSpPr>
+          <p:nvPr/>
+        </p:nvSpPr>
+        <p:spPr>
+          <a:xfrm xmlns:a="http://schemas.openxmlformats.org/drawingml/2006/main">
+            <a:off x="5210175" y="2524125"/>
+            <a:ext cx="247650" cy="247650"/>
+          </a:xfrm>
+          <a:prstGeom xmlns:a="http://schemas.openxmlformats.org/drawingml/2006/main" prst="ellipse">
+            <a:avLst/>
           </a:prstGeom>
           <a:solidFill xmlns:a="http://schemas.openxmlformats.org/drawingml/2006/main">
-            <a:srgbClr val="DDF6E8"/>
+            <a:srgbClr val="35C47A"/>
           </a:solidFill>
           <a:ln xmlns:a="http://schemas.openxmlformats.org/drawingml/2006/main" w="19050">
             <a:solidFill>
@@ -4491,83 +5465,22 @@
       </p:sp>
       <p:sp>
         <p:nvSpPr>
-          <p:cNvPr id="10" name="">
-            <a:extLst xmlns:a="http://schemas.openxmlformats.org/drawingml/2006/main">
-              <a:ext uri="{FF2B5EF4-FFF2-40B4-BE49-F238E27FC236}">
-                <a16:creationId xmlns:a16="http://schemas.microsoft.com/office/drawing/2014/main" id="{9EAA1A9E-DED3-4F91-8849-BDB1F0D11B2C}"/>
-              </a:ext>
-            </a:extLst>
-          </p:cNvPr>
-          <p:cNvSpPr>
-            <a:spLocks xmlns:a="http://schemas.openxmlformats.org/drawingml/2006/main" noGrp="1"/>
-          </p:cNvSpPr>
-          <p:nvPr/>
-        </p:nvSpPr>
-        <p:spPr>
-          <a:xfrm xmlns:a="http://schemas.openxmlformats.org/drawingml/2006/main">
-            <a:off x="4667250" y="2305050"/>
-            <a:ext cx="1314450" cy="323850"/>
-          </a:xfrm>
-          <a:prstGeom xmlns:a="http://schemas.openxmlformats.org/drawingml/2006/main" prst="rect">
-            <a:avLst/>
-          </a:prstGeom>
-          <a:noFill xmlns:a="http://schemas.openxmlformats.org/drawingml/2006/main"/>
-          <a:ln xmlns:a="http://schemas.openxmlformats.org/drawingml/2006/main" w="0">
-            <a:noFill/>
-          </a:ln>
-        </p:spPr>
-        <p:txBody>
-          <a:bodyPr xmlns:a="http://schemas.openxmlformats.org/drawingml/2006/main" wrap="square" lIns="0" tIns="0" rIns="0" bIns="0" anchor="t">
-            <a:normAutofit fontScale="100000"/>
-          </a:bodyPr>
-          <a:lstStyle xmlns:a="http://schemas.openxmlformats.org/drawingml/2006/main"/>
-          <a:p xmlns:a="http://schemas.openxmlformats.org/drawingml/2006/main">
-            <a:pPr algn="ctr">
-              <a:lnSpc>
-                <a:spcPct val="105000"/>
-              </a:lnSpc>
-              <a:buNone/>
-              <a:defRPr sz="1725" b="1" i="0">
-                <a:solidFill>
-                  <a:srgbClr val="122033"/>
-                </a:solidFill>
-                <a:latin typeface="Arial"/>
-                <a:ea typeface="Arial"/>
-                <a:cs typeface="Arial"/>
-              </a:defRPr>
-            </a:pPr>
-            <a:r>
-              <a:rPr sz="1725" b="1" i="0">
-                <a:solidFill>
-                  <a:srgbClr val="122033"/>
-                </a:solidFill>
-                <a:latin typeface="Arial"/>
-                <a:ea typeface="Arial"/>
-                <a:cs typeface="Arial"/>
-              </a:rPr>
-              <a:t>Generate</a:t>
-            </a:r>
-          </a:p>
-        </p:txBody>
-      </p:sp>
-      <p:sp>
-        <p:nvSpPr>
-          <p:cNvPr id="11" name="">
-            <a:extLst xmlns:a="http://schemas.openxmlformats.org/drawingml/2006/main">
-              <a:ext uri="{FF2B5EF4-FFF2-40B4-BE49-F238E27FC236}">
-                <a16:creationId xmlns:a16="http://schemas.microsoft.com/office/drawing/2014/main" id="{0F9AE421-8DFC-4265-8089-B311B40034B9}"/>
-              </a:ext>
-            </a:extLst>
-          </p:cNvPr>
-          <p:cNvSpPr>
-            <a:spLocks xmlns:a="http://schemas.openxmlformats.org/drawingml/2006/main" noGrp="1"/>
-          </p:cNvSpPr>
-          <p:nvPr/>
-        </p:nvSpPr>
-        <p:spPr>
-          <a:xfrm xmlns:a="http://schemas.openxmlformats.org/drawingml/2006/main">
-            <a:off x="4648200" y="2752725"/>
-            <a:ext cx="1352550" cy="552450"/>
+          <p:cNvPr id="18" name="">
+            <a:extLst xmlns:a="http://schemas.openxmlformats.org/drawingml/2006/main">
+              <a:ext uri="{FF2B5EF4-FFF2-40B4-BE49-F238E27FC236}">
+                <a16:creationId xmlns:a16="http://schemas.microsoft.com/office/drawing/2014/main" id="{AC8DF998-5B29-4844-AAD6-6189EA130882}"/>
+              </a:ext>
+            </a:extLst>
+          </p:cNvPr>
+          <p:cNvSpPr>
+            <a:spLocks xmlns:a="http://schemas.openxmlformats.org/drawingml/2006/main" noGrp="1"/>
+          </p:cNvSpPr>
+          <p:nvPr/>
+        </p:nvSpPr>
+        <p:spPr>
+          <a:xfrm xmlns:a="http://schemas.openxmlformats.org/drawingml/2006/main">
+            <a:off x="4572000" y="2933700"/>
+            <a:ext cx="1524000" cy="552450"/>
           </a:xfrm>
           <a:prstGeom xmlns:a="http://schemas.openxmlformats.org/drawingml/2006/main" prst="rect">
             <a:avLst/>
@@ -4590,7 +5503,7 @@
               <a:buNone/>
               <a:defRPr sz="1200" b="0" i="0">
                 <a:solidFill>
-                  <a:srgbClr val="667487"/>
+                  <a:srgbClr val="AAB6C5"/>
                 </a:solidFill>
                 <a:latin typeface="Arial"/>
                 <a:ea typeface="Arial"/>
@@ -4600,70 +5513,35 @@
             <a:r>
               <a:rPr sz="1200" b="0" i="0">
                 <a:solidFill>
-                  <a:srgbClr val="667487"/>
+                  <a:srgbClr val="AAB6C5"/>
                 </a:solidFill>
                 <a:latin typeface="Arial"/>
                 <a:ea typeface="Arial"/>
                 <a:cs typeface="Arial"/>
               </a:rPr>
-              <a:t>One Qwen3.8-27B sample</a:t>
-            </a:r>
-          </a:p>
-        </p:txBody>
-      </p:sp>
-      <p:sp>
-        <p:nvSpPr>
-          <p:cNvPr id="12" name="">
-            <a:extLst xmlns:a="http://schemas.openxmlformats.org/drawingml/2006/main">
-              <a:ext uri="{FF2B5EF4-FFF2-40B4-BE49-F238E27FC236}">
-                <a16:creationId xmlns:a16="http://schemas.microsoft.com/office/drawing/2014/main" id="{4E8C3B1F-0830-4C2E-976D-BD627E793EF8}"/>
-              </a:ext>
-            </a:extLst>
-          </p:cNvPr>
-          <p:cNvSpPr>
-            <a:spLocks xmlns:a="http://schemas.openxmlformats.org/drawingml/2006/main" noGrp="1"/>
-          </p:cNvSpPr>
-          <p:nvPr/>
-        </p:nvSpPr>
-        <p:spPr>
-          <a:xfrm xmlns:a="http://schemas.openxmlformats.org/drawingml/2006/main">
-            <a:off x="6496050" y="2047875"/>
-            <a:ext cx="1619250" cy="1428750"/>
-          </a:xfrm>
-          <a:prstGeom xmlns:a="http://schemas.openxmlformats.org/drawingml/2006/main" prst="roundRect">
-            <a:avLst>
-              <a:gd name="adj" fmla="val 6667"/>
-            </a:avLst>
-          </a:prstGeom>
-          <a:solidFill xmlns:a="http://schemas.openxmlformats.org/drawingml/2006/main">
-            <a:srgbClr val="FFFDF8"/>
-          </a:solidFill>
-          <a:ln xmlns:a="http://schemas.openxmlformats.org/drawingml/2006/main" w="9525">
-            <a:solidFill>
-              <a:srgbClr val="C9D1D9"/>
-            </a:solidFill>
-            <a:prstDash val="solid"/>
-          </a:ln>
-        </p:spPr>
-      </p:sp>
-      <p:sp>
-        <p:nvSpPr>
-          <p:cNvPr id="13" name="">
-            <a:extLst xmlns:a="http://schemas.openxmlformats.org/drawingml/2006/main">
-              <a:ext uri="{FF2B5EF4-FFF2-40B4-BE49-F238E27FC236}">
-                <a16:creationId xmlns:a16="http://schemas.microsoft.com/office/drawing/2014/main" id="{8A4BE1A7-404B-40F9-B6D4-8B8ABB6F2DBF}"/>
-              </a:ext>
-            </a:extLst>
-          </p:cNvPr>
-          <p:cNvSpPr>
-            <a:spLocks xmlns:a="http://schemas.openxmlformats.org/drawingml/2006/main" noGrp="1"/>
-          </p:cNvSpPr>
-          <p:nvPr/>
-        </p:nvSpPr>
-        <p:spPr>
-          <a:xfrm xmlns:a="http://schemas.openxmlformats.org/drawingml/2006/main">
-            <a:off x="6648450" y="2305050"/>
-            <a:ext cx="1314450" cy="323850"/>
+              <a:t>One Qwen3.8-27B response</a:t>
+            </a:r>
+          </a:p>
+        </p:txBody>
+      </p:sp>
+      <p:sp>
+        <p:nvSpPr>
+          <p:cNvPr id="19" name="">
+            <a:extLst xmlns:a="http://schemas.openxmlformats.org/drawingml/2006/main">
+              <a:ext uri="{FF2B5EF4-FFF2-40B4-BE49-F238E27FC236}">
+                <a16:creationId xmlns:a16="http://schemas.microsoft.com/office/drawing/2014/main" id="{330C9BCF-5E79-4EF9-B6A0-702DCC316C5F}"/>
+              </a:ext>
+            </a:extLst>
+          </p:cNvPr>
+          <p:cNvSpPr>
+            <a:spLocks xmlns:a="http://schemas.openxmlformats.org/drawingml/2006/main" noGrp="1"/>
+          </p:cNvSpPr>
+          <p:nvPr/>
+        </p:nvSpPr>
+        <p:spPr>
+          <a:xfrm xmlns:a="http://schemas.openxmlformats.org/drawingml/2006/main">
+            <a:off x="6619875" y="2095500"/>
+            <a:ext cx="1809750" cy="323850"/>
           </a:xfrm>
           <a:prstGeom xmlns:a="http://schemas.openxmlformats.org/drawingml/2006/main" prst="rect">
             <a:avLst/>
@@ -4684,19 +5562,19 @@
                 <a:spcPct val="105000"/>
               </a:lnSpc>
               <a:buNone/>
-              <a:defRPr sz="1725" b="1" i="0">
-                <a:solidFill>
-                  <a:srgbClr val="122033"/>
-                </a:solidFill>
-                <a:latin typeface="Arial"/>
-                <a:ea typeface="Arial"/>
-                <a:cs typeface="Arial"/>
-              </a:defRPr>
-            </a:pPr>
-            <a:r>
-              <a:rPr sz="1725" b="1" i="0">
-                <a:solidFill>
-                  <a:srgbClr val="122033"/>
+              <a:defRPr sz="1650" b="1" i="0">
+                <a:solidFill>
+                  <a:srgbClr val="FFFFFF"/>
+                </a:solidFill>
+                <a:latin typeface="Arial"/>
+                <a:ea typeface="Arial"/>
+                <a:cs typeface="Arial"/>
+              </a:defRPr>
+            </a:pPr>
+            <a:r>
+              <a:rPr sz="1650" b="1" i="0">
+                <a:solidFill>
+                  <a:srgbClr val="FFFFFF"/>
                 </a:solidFill>
                 <a:latin typeface="Arial"/>
                 <a:ea typeface="Arial"/>
@@ -4709,22 +5587,55 @@
       </p:sp>
       <p:sp>
         <p:nvSpPr>
-          <p:cNvPr id="14" name="">
-            <a:extLst xmlns:a="http://schemas.openxmlformats.org/drawingml/2006/main">
-              <a:ext uri="{FF2B5EF4-FFF2-40B4-BE49-F238E27FC236}">
-                <a16:creationId xmlns:a16="http://schemas.microsoft.com/office/drawing/2014/main" id="{9868E18D-183B-44AC-A943-7F7C080E511E}"/>
-              </a:ext>
-            </a:extLst>
-          </p:cNvPr>
-          <p:cNvSpPr>
-            <a:spLocks xmlns:a="http://schemas.openxmlformats.org/drawingml/2006/main" noGrp="1"/>
-          </p:cNvSpPr>
-          <p:nvPr/>
-        </p:nvSpPr>
-        <p:spPr>
-          <a:xfrm xmlns:a="http://schemas.openxmlformats.org/drawingml/2006/main">
-            <a:off x="6629400" y="2752725"/>
-            <a:ext cx="1352550" cy="552450"/>
+          <p:cNvPr id="20" name="">
+            <a:extLst xmlns:a="http://schemas.openxmlformats.org/drawingml/2006/main">
+              <a:ext uri="{FF2B5EF4-FFF2-40B4-BE49-F238E27FC236}">
+                <a16:creationId xmlns:a16="http://schemas.microsoft.com/office/drawing/2014/main" id="{A400861E-FDF5-4AB9-A836-51E51059BFD9}"/>
+              </a:ext>
+            </a:extLst>
+          </p:cNvPr>
+          <p:cNvSpPr>
+            <a:spLocks xmlns:a="http://schemas.openxmlformats.org/drawingml/2006/main" noGrp="1"/>
+          </p:cNvSpPr>
+          <p:nvPr/>
+        </p:nvSpPr>
+        <p:spPr>
+          <a:xfrm xmlns:a="http://schemas.openxmlformats.org/drawingml/2006/main">
+            <a:off x="7439025" y="2562225"/>
+            <a:ext cx="171450" cy="171450"/>
+          </a:xfrm>
+          <a:prstGeom xmlns:a="http://schemas.openxmlformats.org/drawingml/2006/main" prst="ellipse">
+            <a:avLst/>
+          </a:prstGeom>
+          <a:solidFill xmlns:a="http://schemas.openxmlformats.org/drawingml/2006/main">
+            <a:srgbClr val="0B172A"/>
+          </a:solidFill>
+          <a:ln xmlns:a="http://schemas.openxmlformats.org/drawingml/2006/main" w="19050">
+            <a:solidFill>
+              <a:srgbClr val="35C47A"/>
+            </a:solidFill>
+            <a:prstDash val="solid"/>
+          </a:ln>
+        </p:spPr>
+      </p:sp>
+      <p:sp>
+        <p:nvSpPr>
+          <p:cNvPr id="21" name="">
+            <a:extLst xmlns:a="http://schemas.openxmlformats.org/drawingml/2006/main">
+              <a:ext uri="{FF2B5EF4-FFF2-40B4-BE49-F238E27FC236}">
+                <a16:creationId xmlns:a16="http://schemas.microsoft.com/office/drawing/2014/main" id="{D9843D57-24CC-403C-B524-1AC35460E81D}"/>
+              </a:ext>
+            </a:extLst>
+          </p:cNvPr>
+          <p:cNvSpPr>
+            <a:spLocks xmlns:a="http://schemas.openxmlformats.org/drawingml/2006/main" noGrp="1"/>
+          </p:cNvSpPr>
+          <p:nvPr/>
+        </p:nvSpPr>
+        <p:spPr>
+          <a:xfrm xmlns:a="http://schemas.openxmlformats.org/drawingml/2006/main">
+            <a:off x="6619875" y="2933700"/>
+            <a:ext cx="1809750" cy="552450"/>
           </a:xfrm>
           <a:prstGeom xmlns:a="http://schemas.openxmlformats.org/drawingml/2006/main" prst="rect">
             <a:avLst/>
@@ -4747,7 +5658,7 @@
               <a:buNone/>
               <a:defRPr sz="1200" b="0" i="0">
                 <a:solidFill>
-                  <a:srgbClr val="667487"/>
+                  <a:srgbClr val="AAB6C5"/>
                 </a:solidFill>
                 <a:latin typeface="Arial"/>
                 <a:ea typeface="Arial"/>
@@ -4757,70 +5668,35 @@
             <a:r>
               <a:rPr sz="1200" b="0" i="0">
                 <a:solidFill>
-                  <a:srgbClr val="667487"/>
+                  <a:srgbClr val="AAB6C5"/>
                 </a:solidFill>
                 <a:latin typeface="Arial"/>
                 <a:ea typeface="Arial"/>
                 <a:cs typeface="Arial"/>
               </a:rPr>
-              <a:t>Coverage, schema and safety</a:t>
-            </a:r>
-          </a:p>
-        </p:txBody>
-      </p:sp>
-      <p:sp>
-        <p:nvSpPr>
-          <p:cNvPr id="15" name="">
-            <a:extLst xmlns:a="http://schemas.openxmlformats.org/drawingml/2006/main">
-              <a:ext uri="{FF2B5EF4-FFF2-40B4-BE49-F238E27FC236}">
-                <a16:creationId xmlns:a16="http://schemas.microsoft.com/office/drawing/2014/main" id="{180FEF01-20AD-4D1A-B323-431B18375B0A}"/>
-              </a:ext>
-            </a:extLst>
-          </p:cNvPr>
-          <p:cNvSpPr>
-            <a:spLocks xmlns:a="http://schemas.openxmlformats.org/drawingml/2006/main" noGrp="1"/>
-          </p:cNvSpPr>
-          <p:nvPr/>
-        </p:nvSpPr>
-        <p:spPr>
-          <a:xfrm xmlns:a="http://schemas.openxmlformats.org/drawingml/2006/main">
-            <a:off x="8477250" y="2047875"/>
-            <a:ext cx="1619250" cy="1428750"/>
-          </a:xfrm>
-          <a:prstGeom xmlns:a="http://schemas.openxmlformats.org/drawingml/2006/main" prst="roundRect">
-            <a:avLst>
-              <a:gd name="adj" fmla="val 6667"/>
-            </a:avLst>
-          </a:prstGeom>
-          <a:solidFill xmlns:a="http://schemas.openxmlformats.org/drawingml/2006/main">
-            <a:srgbClr val="FFFDF8"/>
-          </a:solidFill>
-          <a:ln xmlns:a="http://schemas.openxmlformats.org/drawingml/2006/main" w="9525">
-            <a:solidFill>
-              <a:srgbClr val="C9D1D9"/>
-            </a:solidFill>
-            <a:prstDash val="solid"/>
-          </a:ln>
-        </p:spPr>
-      </p:sp>
-      <p:sp>
-        <p:nvSpPr>
-          <p:cNvPr id="16" name="">
-            <a:extLst xmlns:a="http://schemas.openxmlformats.org/drawingml/2006/main">
-              <a:ext uri="{FF2B5EF4-FFF2-40B4-BE49-F238E27FC236}">
-                <a16:creationId xmlns:a16="http://schemas.microsoft.com/office/drawing/2014/main" id="{02E8E508-E077-4E1A-807D-A783AF996640}"/>
-              </a:ext>
-            </a:extLst>
-          </p:cNvPr>
-          <p:cNvSpPr>
-            <a:spLocks xmlns:a="http://schemas.openxmlformats.org/drawingml/2006/main" noGrp="1"/>
-          </p:cNvSpPr>
-          <p:nvPr/>
-        </p:nvSpPr>
-        <p:spPr>
-          <a:xfrm xmlns:a="http://schemas.openxmlformats.org/drawingml/2006/main">
-            <a:off x="8629650" y="2305050"/>
-            <a:ext cx="1314450" cy="323850"/>
+              <a:t>Target coverage, value types and formula safety</a:t>
+            </a:r>
+          </a:p>
+        </p:txBody>
+      </p:sp>
+      <p:sp>
+        <p:nvSpPr>
+          <p:cNvPr id="22" name="">
+            <a:extLst xmlns:a="http://schemas.openxmlformats.org/drawingml/2006/main">
+              <a:ext uri="{FF2B5EF4-FFF2-40B4-BE49-F238E27FC236}">
+                <a16:creationId xmlns:a16="http://schemas.microsoft.com/office/drawing/2014/main" id="{25C809A2-F244-421C-A6A8-098CFA1BDBE2}"/>
+              </a:ext>
+            </a:extLst>
+          </p:cNvPr>
+          <p:cNvSpPr>
+            <a:spLocks xmlns:a="http://schemas.openxmlformats.org/drawingml/2006/main" noGrp="1"/>
+          </p:cNvSpPr>
+          <p:nvPr/>
+        </p:nvSpPr>
+        <p:spPr>
+          <a:xfrm xmlns:a="http://schemas.openxmlformats.org/drawingml/2006/main">
+            <a:off x="8763000" y="2095500"/>
+            <a:ext cx="1714500" cy="323850"/>
           </a:xfrm>
           <a:prstGeom xmlns:a="http://schemas.openxmlformats.org/drawingml/2006/main" prst="rect">
             <a:avLst/>
@@ -4841,19 +5717,19 @@
                 <a:spcPct val="105000"/>
               </a:lnSpc>
               <a:buNone/>
-              <a:defRPr sz="1725" b="1" i="0">
-                <a:solidFill>
-                  <a:srgbClr val="122033"/>
-                </a:solidFill>
-                <a:latin typeface="Arial"/>
-                <a:ea typeface="Arial"/>
-                <a:cs typeface="Arial"/>
-              </a:defRPr>
-            </a:pPr>
-            <a:r>
-              <a:rPr sz="1725" b="1" i="0">
-                <a:solidFill>
-                  <a:srgbClr val="122033"/>
+              <a:defRPr sz="1650" b="1" i="0">
+                <a:solidFill>
+                  <a:srgbClr val="FFFFFF"/>
+                </a:solidFill>
+                <a:latin typeface="Arial"/>
+                <a:ea typeface="Arial"/>
+                <a:cs typeface="Arial"/>
+              </a:defRPr>
+            </a:pPr>
+            <a:r>
+              <a:rPr sz="1650" b="1" i="0">
+                <a:solidFill>
+                  <a:srgbClr val="FFFFFF"/>
                 </a:solidFill>
                 <a:latin typeface="Arial"/>
                 <a:ea typeface="Arial"/>
@@ -4866,22 +5742,55 @@
       </p:sp>
       <p:sp>
         <p:nvSpPr>
-          <p:cNvPr id="17" name="">
-            <a:extLst xmlns:a="http://schemas.openxmlformats.org/drawingml/2006/main">
-              <a:ext uri="{FF2B5EF4-FFF2-40B4-BE49-F238E27FC236}">
-                <a16:creationId xmlns:a16="http://schemas.microsoft.com/office/drawing/2014/main" id="{6BED56B4-3767-4C2D-B810-BECB380D73E2}"/>
-              </a:ext>
-            </a:extLst>
-          </p:cNvPr>
-          <p:cNvSpPr>
-            <a:spLocks xmlns:a="http://schemas.openxmlformats.org/drawingml/2006/main" noGrp="1"/>
-          </p:cNvSpPr>
-          <p:nvPr/>
-        </p:nvSpPr>
-        <p:spPr>
-          <a:xfrm xmlns:a="http://schemas.openxmlformats.org/drawingml/2006/main">
-            <a:off x="8610600" y="2752725"/>
-            <a:ext cx="1352550" cy="552450"/>
+          <p:cNvPr id="23" name="">
+            <a:extLst xmlns:a="http://schemas.openxmlformats.org/drawingml/2006/main">
+              <a:ext uri="{FF2B5EF4-FFF2-40B4-BE49-F238E27FC236}">
+                <a16:creationId xmlns:a16="http://schemas.microsoft.com/office/drawing/2014/main" id="{F9C67023-1D47-4AFF-8AFD-0C680912C50C}"/>
+              </a:ext>
+            </a:extLst>
+          </p:cNvPr>
+          <p:cNvSpPr>
+            <a:spLocks xmlns:a="http://schemas.openxmlformats.org/drawingml/2006/main" noGrp="1"/>
+          </p:cNvSpPr>
+          <p:nvPr/>
+        </p:nvSpPr>
+        <p:spPr>
+          <a:xfrm xmlns:a="http://schemas.openxmlformats.org/drawingml/2006/main">
+            <a:off x="9534525" y="2562225"/>
+            <a:ext cx="171450" cy="171450"/>
+          </a:xfrm>
+          <a:prstGeom xmlns:a="http://schemas.openxmlformats.org/drawingml/2006/main" prst="ellipse">
+            <a:avLst/>
+          </a:prstGeom>
+          <a:solidFill xmlns:a="http://schemas.openxmlformats.org/drawingml/2006/main">
+            <a:srgbClr val="0B172A"/>
+          </a:solidFill>
+          <a:ln xmlns:a="http://schemas.openxmlformats.org/drawingml/2006/main" w="19050">
+            <a:solidFill>
+              <a:srgbClr val="35C47A"/>
+            </a:solidFill>
+            <a:prstDash val="solid"/>
+          </a:ln>
+        </p:spPr>
+      </p:sp>
+      <p:sp>
+        <p:nvSpPr>
+          <p:cNvPr id="24" name="">
+            <a:extLst xmlns:a="http://schemas.openxmlformats.org/drawingml/2006/main">
+              <a:ext uri="{FF2B5EF4-FFF2-40B4-BE49-F238E27FC236}">
+                <a16:creationId xmlns:a16="http://schemas.microsoft.com/office/drawing/2014/main" id="{B042B9B0-DB18-4CEF-AB34-51FB9BF66E99}"/>
+              </a:ext>
+            </a:extLst>
+          </p:cNvPr>
+          <p:cNvSpPr>
+            <a:spLocks xmlns:a="http://schemas.openxmlformats.org/drawingml/2006/main" noGrp="1"/>
+          </p:cNvSpPr>
+          <p:nvPr/>
+        </p:nvSpPr>
+        <p:spPr>
+          <a:xfrm xmlns:a="http://schemas.openxmlformats.org/drawingml/2006/main">
+            <a:off x="9848850" y="2933700"/>
+            <a:ext cx="1714500" cy="552450"/>
           </a:xfrm>
           <a:prstGeom xmlns:a="http://schemas.openxmlformats.org/drawingml/2006/main" prst="rect">
             <a:avLst/>
@@ -4897,14 +5806,14 @@
           </a:bodyPr>
           <a:lstStyle xmlns:a="http://schemas.openxmlformats.org/drawingml/2006/main"/>
           <a:p xmlns:a="http://schemas.openxmlformats.org/drawingml/2006/main">
-            <a:pPr algn="ctr">
+            <a:pPr algn="l">
               <a:lnSpc>
                 <a:spcPct val="108000"/>
               </a:lnSpc>
               <a:buNone/>
               <a:defRPr sz="1200" b="0" i="0">
                 <a:solidFill>
-                  <a:srgbClr val="667487"/>
+                  <a:srgbClr val="AAB6C5"/>
                 </a:solidFill>
                 <a:latin typeface="Arial"/>
                 <a:ea typeface="Arial"/>
@@ -4914,47 +5823,290 @@
             <a:r>
               <a:rPr sz="1200" b="0" i="0">
                 <a:solidFill>
-                  <a:srgbClr val="667487"/>
+                  <a:srgbClr val="AAB6C5"/>
                 </a:solidFill>
                 <a:latin typeface="Arial"/>
                 <a:ea typeface="Arial"/>
                 <a:cs typeface="Arial"/>
               </a:rPr>
-              <a:t>Atomic write and reopen</a:t>
-            </a:r>
-          </a:p>
-        </p:txBody>
-      </p:sp>
-      <p:sp>
-        <p:nvSpPr>
-          <p:cNvPr id="18" name="">
-            <a:extLst xmlns:a="http://schemas.openxmlformats.org/drawingml/2006/main">
-              <a:ext uri="{FF2B5EF4-FFF2-40B4-BE49-F238E27FC236}">
-                <a16:creationId xmlns:a16="http://schemas.microsoft.com/office/drawing/2014/main" id="{0B892444-36ED-4FEC-B88A-A0A4887CB3B8}"/>
-              </a:ext>
-            </a:extLst>
-          </p:cNvPr>
-          <p:cNvSpPr>
-            <a:spLocks xmlns:a="http://schemas.openxmlformats.org/drawingml/2006/main" noGrp="1"/>
-          </p:cNvSpPr>
-          <p:nvPr/>
-        </p:nvSpPr>
-        <p:spPr>
-          <a:xfrm xmlns:a="http://schemas.openxmlformats.org/drawingml/2006/main">
-            <a:off x="10458450" y="2047875"/>
-            <a:ext cx="1619250" cy="1428750"/>
-          </a:xfrm>
-          <a:prstGeom xmlns:a="http://schemas.openxmlformats.org/drawingml/2006/main" prst="roundRect">
-            <a:avLst>
-              <a:gd name="adj" fmla="val 6667"/>
-            </a:avLst>
+              <a:t>Save a fresh copy and reopen it</a:t>
+            </a:r>
+          </a:p>
+        </p:txBody>
+      </p:sp>
+      <p:sp>
+        <p:nvSpPr>
+          <p:cNvPr id="25" name="">
+            <a:extLst xmlns:a="http://schemas.openxmlformats.org/drawingml/2006/main">
+              <a:ext uri="{FF2B5EF4-FFF2-40B4-BE49-F238E27FC236}">
+                <a16:creationId xmlns:a16="http://schemas.microsoft.com/office/drawing/2014/main" id="{5B36D55C-1662-451D-94F1-64AA8C48B051}"/>
+              </a:ext>
+            </a:extLst>
+          </p:cNvPr>
+          <p:cNvSpPr>
+            <a:spLocks xmlns:a="http://schemas.openxmlformats.org/drawingml/2006/main" noGrp="1"/>
+          </p:cNvSpPr>
+          <p:nvPr/>
+        </p:nvSpPr>
+        <p:spPr>
+          <a:xfrm xmlns:a="http://schemas.openxmlformats.org/drawingml/2006/main">
+            <a:off x="9620250" y="2733675"/>
+            <a:ext cx="0" cy="914400"/>
+          </a:xfrm>
+          <a:prstGeom xmlns:a="http://schemas.openxmlformats.org/drawingml/2006/main" prst="line">
+            <a:avLst/>
+          </a:prstGeom>
+          <a:noFill xmlns:a="http://schemas.openxmlformats.org/drawingml/2006/main"/>
+          <a:ln xmlns:a="http://schemas.openxmlformats.org/drawingml/2006/main" w="19050">
+            <a:solidFill>
+              <a:srgbClr val="35C47A"/>
+            </a:solidFill>
+            <a:prstDash val="solid"/>
+          </a:ln>
+        </p:spPr>
+      </p:sp>
+      <p:sp>
+        <p:nvSpPr>
+          <p:cNvPr id="26" name="">
+            <a:extLst xmlns:a="http://schemas.openxmlformats.org/drawingml/2006/main">
+              <a:ext uri="{FF2B5EF4-FFF2-40B4-BE49-F238E27FC236}">
+                <a16:creationId xmlns:a16="http://schemas.microsoft.com/office/drawing/2014/main" id="{893D33DD-F7BD-44C8-9ED2-E2BB0A890320}"/>
+              </a:ext>
+            </a:extLst>
+          </p:cNvPr>
+          <p:cNvSpPr>
+            <a:spLocks xmlns:a="http://schemas.openxmlformats.org/drawingml/2006/main" noGrp="1"/>
+          </p:cNvSpPr>
+          <p:nvPr/>
+        </p:nvSpPr>
+        <p:spPr>
+          <a:xfrm xmlns:a="http://schemas.openxmlformats.org/drawingml/2006/main">
+            <a:off x="9544050" y="3571875"/>
+            <a:ext cx="152400" cy="152400"/>
+          </a:xfrm>
+          <a:prstGeom xmlns:a="http://schemas.openxmlformats.org/drawingml/2006/main" prst="ellipse">
+            <a:avLst/>
           </a:prstGeom>
           <a:solidFill xmlns:a="http://schemas.openxmlformats.org/drawingml/2006/main">
-            <a:srgbClr val="FFFDF8"/>
+            <a:srgbClr val="0B172A"/>
           </a:solidFill>
+          <a:ln xmlns:a="http://schemas.openxmlformats.org/drawingml/2006/main" w="19050">
+            <a:solidFill>
+              <a:srgbClr val="35C47A"/>
+            </a:solidFill>
+            <a:prstDash val="solid"/>
+          </a:ln>
+        </p:spPr>
+      </p:sp>
+      <p:sp>
+        <p:nvSpPr>
+          <p:cNvPr id="27" name="">
+            <a:extLst xmlns:a="http://schemas.openxmlformats.org/drawingml/2006/main">
+              <a:ext uri="{FF2B5EF4-FFF2-40B4-BE49-F238E27FC236}">
+                <a16:creationId xmlns:a16="http://schemas.microsoft.com/office/drawing/2014/main" id="{1C0FE9A3-1266-41D2-9277-5B8CCC24F943}"/>
+              </a:ext>
+            </a:extLst>
+          </p:cNvPr>
+          <p:cNvSpPr>
+            <a:spLocks xmlns:a="http://schemas.openxmlformats.org/drawingml/2006/main" noGrp="1"/>
+          </p:cNvSpPr>
+          <p:nvPr/>
+        </p:nvSpPr>
+        <p:spPr>
+          <a:xfrm xmlns:a="http://schemas.openxmlformats.org/drawingml/2006/main">
+            <a:off x="9848850" y="3476625"/>
+            <a:ext cx="1714500" cy="228600"/>
+          </a:xfrm>
+          <a:prstGeom xmlns:a="http://schemas.openxmlformats.org/drawingml/2006/main" prst="rect">
+            <a:avLst/>
+          </a:prstGeom>
+          <a:noFill xmlns:a="http://schemas.openxmlformats.org/drawingml/2006/main"/>
+          <a:ln xmlns:a="http://schemas.openxmlformats.org/drawingml/2006/main" w="0">
+            <a:noFill/>
+          </a:ln>
+        </p:spPr>
+        <p:txBody>
+          <a:bodyPr xmlns:a="http://schemas.openxmlformats.org/drawingml/2006/main" wrap="square" lIns="0" tIns="0" rIns="0" bIns="0" anchor="t">
+            <a:normAutofit fontScale="100000"/>
+          </a:bodyPr>
+          <a:lstStyle xmlns:a="http://schemas.openxmlformats.org/drawingml/2006/main"/>
+          <a:p xmlns:a="http://schemas.openxmlformats.org/drawingml/2006/main">
+            <a:pPr algn="l">
+              <a:lnSpc>
+                <a:spcPct val="105000"/>
+              </a:lnSpc>
+              <a:buNone/>
+              <a:defRPr sz="975" b="1" i="0">
+                <a:solidFill>
+                  <a:srgbClr val="35C47A"/>
+                </a:solidFill>
+                <a:latin typeface="Arial"/>
+                <a:ea typeface="Arial"/>
+                <a:cs typeface="Arial"/>
+              </a:defRPr>
+            </a:pPr>
+            <a:r>
+              <a:rPr sz="975" b="1" i="0">
+                <a:solidFill>
+                  <a:srgbClr val="35C47A"/>
+                </a:solidFill>
+                <a:latin typeface="Arial"/>
+                <a:ea typeface="Arial"/>
+                <a:cs typeface="Arial"/>
+              </a:rPr>
+              <a:t>PUBLIC EVALUATION</a:t>
+            </a:r>
+          </a:p>
+        </p:txBody>
+      </p:sp>
+      <p:sp>
+        <p:nvSpPr>
+          <p:cNvPr id="28" name="">
+            <a:extLst xmlns:a="http://schemas.openxmlformats.org/drawingml/2006/main">
+              <a:ext uri="{FF2B5EF4-FFF2-40B4-BE49-F238E27FC236}">
+                <a16:creationId xmlns:a16="http://schemas.microsoft.com/office/drawing/2014/main" id="{C0EFF34C-1A99-4BC1-B08E-74BB63C63D99}"/>
+              </a:ext>
+            </a:extLst>
+          </p:cNvPr>
+          <p:cNvSpPr>
+            <a:spLocks xmlns:a="http://schemas.openxmlformats.org/drawingml/2006/main" noGrp="1"/>
+          </p:cNvSpPr>
+          <p:nvPr/>
+        </p:nvSpPr>
+        <p:spPr>
+          <a:xfrm xmlns:a="http://schemas.openxmlformats.org/drawingml/2006/main">
+            <a:off x="9848850" y="3781425"/>
+            <a:ext cx="1714500" cy="304800"/>
+          </a:xfrm>
+          <a:prstGeom xmlns:a="http://schemas.openxmlformats.org/drawingml/2006/main" prst="rect">
+            <a:avLst/>
+          </a:prstGeom>
+          <a:noFill xmlns:a="http://schemas.openxmlformats.org/drawingml/2006/main"/>
+          <a:ln xmlns:a="http://schemas.openxmlformats.org/drawingml/2006/main" w="0">
+            <a:noFill/>
+          </a:ln>
+        </p:spPr>
+        <p:txBody>
+          <a:bodyPr xmlns:a="http://schemas.openxmlformats.org/drawingml/2006/main" wrap="square" lIns="0" tIns="0" rIns="0" bIns="0" anchor="t">
+            <a:normAutofit fontScale="100000"/>
+          </a:bodyPr>
+          <a:lstStyle xmlns:a="http://schemas.openxmlformats.org/drawingml/2006/main"/>
+          <a:p xmlns:a="http://schemas.openxmlformats.org/drawingml/2006/main">
+            <a:pPr algn="l">
+              <a:lnSpc>
+                <a:spcPct val="105000"/>
+              </a:lnSpc>
+              <a:buNone/>
+              <a:defRPr sz="1650" b="1" i="0">
+                <a:solidFill>
+                  <a:srgbClr val="FFFFFF"/>
+                </a:solidFill>
+                <a:latin typeface="Arial"/>
+                <a:ea typeface="Arial"/>
+                <a:cs typeface="Arial"/>
+              </a:defRPr>
+            </a:pPr>
+            <a:r>
+              <a:rPr sz="1650" b="1" i="0">
+                <a:solidFill>
+                  <a:srgbClr val="FFFFFF"/>
+                </a:solidFill>
+                <a:latin typeface="Arial"/>
+                <a:ea typeface="Arial"/>
+                <a:cs typeface="Arial"/>
+              </a:rPr>
+              <a:t>Score</a:t>
+            </a:r>
+          </a:p>
+        </p:txBody>
+      </p:sp>
+      <p:sp>
+        <p:nvSpPr>
+          <p:cNvPr id="29" name="">
+            <a:extLst xmlns:a="http://schemas.openxmlformats.org/drawingml/2006/main">
+              <a:ext uri="{FF2B5EF4-FFF2-40B4-BE49-F238E27FC236}">
+                <a16:creationId xmlns:a16="http://schemas.microsoft.com/office/drawing/2014/main" id="{C841560A-8868-459B-ABD3-E6104DD29CA7}"/>
+              </a:ext>
+            </a:extLst>
+          </p:cNvPr>
+          <p:cNvSpPr>
+            <a:spLocks xmlns:a="http://schemas.openxmlformats.org/drawingml/2006/main" noGrp="1"/>
+          </p:cNvSpPr>
+          <p:nvPr/>
+        </p:nvSpPr>
+        <p:spPr>
+          <a:xfrm xmlns:a="http://schemas.openxmlformats.org/drawingml/2006/main">
+            <a:off x="9848850" y="4124325"/>
+            <a:ext cx="1714500" cy="342900"/>
+          </a:xfrm>
+          <a:prstGeom xmlns:a="http://schemas.openxmlformats.org/drawingml/2006/main" prst="rect">
+            <a:avLst/>
+          </a:prstGeom>
+          <a:noFill xmlns:a="http://schemas.openxmlformats.org/drawingml/2006/main"/>
+          <a:ln xmlns:a="http://schemas.openxmlformats.org/drawingml/2006/main" w="0">
+            <a:noFill/>
+          </a:ln>
+        </p:spPr>
+        <p:txBody>
+          <a:bodyPr xmlns:a="http://schemas.openxmlformats.org/drawingml/2006/main" wrap="square" lIns="0" tIns="0" rIns="0" bIns="0" anchor="t">
+            <a:normAutofit fontScale="95238"/>
+          </a:bodyPr>
+          <a:lstStyle xmlns:a="http://schemas.openxmlformats.org/drawingml/2006/main"/>
+          <a:p xmlns:a="http://schemas.openxmlformats.org/drawingml/2006/main">
+            <a:pPr algn="l">
+              <a:lnSpc>
+                <a:spcPct val="105000"/>
+              </a:lnSpc>
+              <a:buNone/>
+              <a:defRPr sz="1125" b="0" i="0">
+                <a:solidFill>
+                  <a:srgbClr val="AAB6C5"/>
+                </a:solidFill>
+                <a:latin typeface="Arial"/>
+                <a:ea typeface="Arial"/>
+                <a:cs typeface="Arial"/>
+              </a:defRPr>
+            </a:pPr>
+            <a:r>
+              <a:rPr sz="1125" b="0" i="0">
+                <a:solidFill>
+                  <a:srgbClr val="AAB6C5"/>
+                </a:solidFill>
+                <a:latin typeface="Arial"/>
+                <a:ea typeface="Arial"/>
+                <a:cs typeface="Arial"/>
+              </a:rPr>
+              <a:t>Organiser-supplied evaluator</a:t>
+            </a:r>
+          </a:p>
+        </p:txBody>
+      </p:sp>
+      <p:sp>
+        <p:nvSpPr>
+          <p:cNvPr id="30" name="">
+            <a:extLst xmlns:a="http://schemas.openxmlformats.org/drawingml/2006/main">
+              <a:ext uri="{FF2B5EF4-FFF2-40B4-BE49-F238E27FC236}">
+                <a16:creationId xmlns:a16="http://schemas.microsoft.com/office/drawing/2014/main" id="{B1D7E23B-6FCE-43FC-A728-A3E176CAF277}"/>
+              </a:ext>
+            </a:extLst>
+          </p:cNvPr>
+          <p:cNvSpPr>
+            <a:spLocks xmlns:a="http://schemas.openxmlformats.org/drawingml/2006/main" noGrp="1"/>
+          </p:cNvSpPr>
+          <p:nvPr/>
+        </p:nvSpPr>
+        <p:spPr>
+          <a:xfrm xmlns:a="http://schemas.openxmlformats.org/drawingml/2006/main">
+            <a:off x="609600" y="4514850"/>
+            <a:ext cx="10972800" cy="0"/>
+          </a:xfrm>
+          <a:prstGeom xmlns:a="http://schemas.openxmlformats.org/drawingml/2006/main" prst="line">
+            <a:avLst/>
+          </a:prstGeom>
+          <a:noFill xmlns:a="http://schemas.openxmlformats.org/drawingml/2006/main"/>
           <a:ln xmlns:a="http://schemas.openxmlformats.org/drawingml/2006/main" w="9525">
             <a:solidFill>
-              <a:srgbClr val="C9D1D9"/>
+              <a:srgbClr val="344257"/>
             </a:solidFill>
             <a:prstDash val="solid"/>
           </a:ln>
@@ -4962,22 +6114,22 @@
       </p:sp>
       <p:sp>
         <p:nvSpPr>
-          <p:cNvPr id="19" name="">
-            <a:extLst xmlns:a="http://schemas.openxmlformats.org/drawingml/2006/main">
-              <a:ext uri="{FF2B5EF4-FFF2-40B4-BE49-F238E27FC236}">
-                <a16:creationId xmlns:a16="http://schemas.microsoft.com/office/drawing/2014/main" id="{D24A8496-9C0E-4295-868B-796BBB71108B}"/>
-              </a:ext>
-            </a:extLst>
-          </p:cNvPr>
-          <p:cNvSpPr>
-            <a:spLocks xmlns:a="http://schemas.openxmlformats.org/drawingml/2006/main" noGrp="1"/>
-          </p:cNvSpPr>
-          <p:nvPr/>
-        </p:nvSpPr>
-        <p:spPr>
-          <a:xfrm xmlns:a="http://schemas.openxmlformats.org/drawingml/2006/main">
-            <a:off x="10610850" y="2305050"/>
-            <a:ext cx="1314450" cy="323850"/>
+          <p:cNvPr id="31" name="">
+            <a:extLst xmlns:a="http://schemas.openxmlformats.org/drawingml/2006/main">
+              <a:ext uri="{FF2B5EF4-FFF2-40B4-BE49-F238E27FC236}">
+                <a16:creationId xmlns:a16="http://schemas.microsoft.com/office/drawing/2014/main" id="{7EA8299D-6CB8-45FA-9143-0702BA5C978C}"/>
+              </a:ext>
+            </a:extLst>
+          </p:cNvPr>
+          <p:cNvSpPr>
+            <a:spLocks xmlns:a="http://schemas.openxmlformats.org/drawingml/2006/main" noGrp="1"/>
+          </p:cNvSpPr>
+          <p:nvPr/>
+        </p:nvSpPr>
+        <p:spPr>
+          <a:xfrm xmlns:a="http://schemas.openxmlformats.org/drawingml/2006/main">
+            <a:off x="3476625" y="4743450"/>
+            <a:ext cx="2476500" cy="247650"/>
           </a:xfrm>
           <a:prstGeom xmlns:a="http://schemas.openxmlformats.org/drawingml/2006/main" prst="rect">
             <a:avLst/>
@@ -4998,47 +6150,47 @@
                 <a:spcPct val="105000"/>
               </a:lnSpc>
               <a:buNone/>
-              <a:defRPr sz="1725" b="1" i="0">
-                <a:solidFill>
-                  <a:srgbClr val="122033"/>
-                </a:solidFill>
-                <a:latin typeface="Arial"/>
-                <a:ea typeface="Arial"/>
-                <a:cs typeface="Arial"/>
-              </a:defRPr>
-            </a:pPr>
-            <a:r>
-              <a:rPr sz="1725" b="1" i="0">
-                <a:solidFill>
-                  <a:srgbClr val="122033"/>
+              <a:defRPr sz="1050" b="1" i="0">
+                <a:solidFill>
+                  <a:srgbClr val="35C47A"/>
+                </a:solidFill>
+                <a:latin typeface="Arial"/>
+                <a:ea typeface="Arial"/>
+                <a:cs typeface="Arial"/>
+              </a:defRPr>
+            </a:pPr>
+            <a:r>
+              <a:rPr sz="1050" b="1" i="0">
+                <a:solidFill>
+                  <a:srgbClr val="35C47A"/>
                 </a:solidFill>
                 <a:latin typeface="Arial"/>
                 <a:ea typeface="Arial"/>
                 <a:cs typeface="Arial"/>
               </a:rPr>
-              <a:t>Score</a:t>
-            </a:r>
-          </a:p>
-        </p:txBody>
-      </p:sp>
-      <p:sp>
-        <p:nvSpPr>
-          <p:cNvPr id="20" name="">
-            <a:extLst xmlns:a="http://schemas.openxmlformats.org/drawingml/2006/main">
-              <a:ext uri="{FF2B5EF4-FFF2-40B4-BE49-F238E27FC236}">
-                <a16:creationId xmlns:a16="http://schemas.microsoft.com/office/drawing/2014/main" id="{72EB4731-03ED-4BCD-A5BA-B6664BC4C12F}"/>
-              </a:ext>
-            </a:extLst>
-          </p:cNvPr>
-          <p:cNvSpPr>
-            <a:spLocks xmlns:a="http://schemas.openxmlformats.org/drawingml/2006/main" noGrp="1"/>
-          </p:cNvSpPr>
-          <p:nvPr/>
-        </p:nvSpPr>
-        <p:spPr>
-          <a:xfrm xmlns:a="http://schemas.openxmlformats.org/drawingml/2006/main">
-            <a:off x="10591800" y="2752725"/>
-            <a:ext cx="1352550" cy="552450"/>
+              <a:t>MODEL SETTINGS</a:t>
+            </a:r>
+          </a:p>
+        </p:txBody>
+      </p:sp>
+      <p:sp>
+        <p:nvSpPr>
+          <p:cNvPr id="32" name="">
+            <a:extLst xmlns:a="http://schemas.openxmlformats.org/drawingml/2006/main">
+              <a:ext uri="{FF2B5EF4-FFF2-40B4-BE49-F238E27FC236}">
+                <a16:creationId xmlns:a16="http://schemas.microsoft.com/office/drawing/2014/main" id="{F12C4494-9CB7-4BB6-9A05-45D645CE9FD6}"/>
+              </a:ext>
+            </a:extLst>
+          </p:cNvPr>
+          <p:cNvSpPr>
+            <a:spLocks xmlns:a="http://schemas.openxmlformats.org/drawingml/2006/main" noGrp="1"/>
+          </p:cNvSpPr>
+          <p:nvPr/>
+        </p:nvSpPr>
+        <p:spPr>
+          <a:xfrm xmlns:a="http://schemas.openxmlformats.org/drawingml/2006/main">
+            <a:off x="2857500" y="5048250"/>
+            <a:ext cx="3714750" cy="685800"/>
           </a:xfrm>
           <a:prstGeom xmlns:a="http://schemas.openxmlformats.org/drawingml/2006/main" prst="rect">
             <a:avLst/>
@@ -5049,186 +6201,178 @@
           </a:ln>
         </p:spPr>
         <p:txBody>
-          <a:bodyPr xmlns:a="http://schemas.openxmlformats.org/drawingml/2006/main" wrap="square" lIns="0" tIns="0" rIns="0" bIns="0" anchor="ctr">
+          <a:bodyPr xmlns:a="http://schemas.openxmlformats.org/drawingml/2006/main" wrap="square" lIns="0" tIns="0" rIns="0" bIns="0" anchor="t">
+            <a:normAutofit fontScale="99206"/>
+          </a:bodyPr>
+          <a:lstStyle xmlns:a="http://schemas.openxmlformats.org/drawingml/2006/main"/>
+          <a:p xmlns:a="http://schemas.openxmlformats.org/drawingml/2006/main">
+            <a:pPr algn="ctr">
+              <a:lnSpc>
+                <a:spcPct val="112000"/>
+              </a:lnSpc>
+              <a:buNone/>
+              <a:defRPr sz="1350" b="0" i="0">
+                <a:solidFill>
+                  <a:srgbClr val="FFFFFF"/>
+                </a:solidFill>
+                <a:latin typeface="Arial"/>
+                <a:ea typeface="Arial"/>
+                <a:cs typeface="Arial"/>
+              </a:defRPr>
+            </a:pPr>
+            <a:r>
+              <a:rPr sz="1350" b="0" i="0">
+                <a:solidFill>
+                  <a:srgbClr val="FFFFFF"/>
+                </a:solidFill>
+                <a:latin typeface="Arial"/>
+                <a:ea typeface="Arial"/>
+                <a:cs typeface="Arial"/>
+              </a:rPr>
+              <a:t>The model runs at temperature 0 with thinking disabled. It returns one response and has no unrestricted tools.</a:t>
+            </a:r>
+          </a:p>
+        </p:txBody>
+      </p:sp>
+      <p:sp>
+        <p:nvSpPr>
+          <p:cNvPr id="33" name="">
+            <a:extLst xmlns:a="http://schemas.openxmlformats.org/drawingml/2006/main">
+              <a:ext uri="{FF2B5EF4-FFF2-40B4-BE49-F238E27FC236}">
+                <a16:creationId xmlns:a16="http://schemas.microsoft.com/office/drawing/2014/main" id="{8F157332-1AE6-4848-B4E2-8B6F641069AD}"/>
+              </a:ext>
+            </a:extLst>
+          </p:cNvPr>
+          <p:cNvSpPr>
+            <a:spLocks xmlns:a="http://schemas.openxmlformats.org/drawingml/2006/main" noGrp="1"/>
+          </p:cNvSpPr>
+          <p:nvPr/>
+        </p:nvSpPr>
+        <p:spPr>
+          <a:xfrm xmlns:a="http://schemas.openxmlformats.org/drawingml/2006/main">
+            <a:off x="7667625" y="4743450"/>
+            <a:ext cx="2952750" cy="247650"/>
+          </a:xfrm>
+          <a:prstGeom xmlns:a="http://schemas.openxmlformats.org/drawingml/2006/main" prst="rect">
+            <a:avLst/>
+          </a:prstGeom>
+          <a:noFill xmlns:a="http://schemas.openxmlformats.org/drawingml/2006/main"/>
+          <a:ln xmlns:a="http://schemas.openxmlformats.org/drawingml/2006/main" w="0">
+            <a:noFill/>
+          </a:ln>
+        </p:spPr>
+        <p:txBody>
+          <a:bodyPr xmlns:a="http://schemas.openxmlformats.org/drawingml/2006/main" wrap="square" lIns="0" tIns="0" rIns="0" bIns="0" anchor="t">
             <a:normAutofit fontScale="100000"/>
           </a:bodyPr>
           <a:lstStyle xmlns:a="http://schemas.openxmlformats.org/drawingml/2006/main"/>
           <a:p xmlns:a="http://schemas.openxmlformats.org/drawingml/2006/main">
             <a:pPr algn="ctr">
               <a:lnSpc>
-                <a:spcPct val="108000"/>
+                <a:spcPct val="105000"/>
               </a:lnSpc>
               <a:buNone/>
-              <a:defRPr sz="1200" b="0" i="0">
-                <a:solidFill>
-                  <a:srgbClr val="667487"/>
-                </a:solidFill>
-                <a:latin typeface="Arial"/>
-                <a:ea typeface="Arial"/>
-                <a:cs typeface="Arial"/>
-              </a:defRPr>
-            </a:pPr>
-            <a:r>
-              <a:rPr sz="1200" b="0" i="0">
-                <a:solidFill>
-                  <a:srgbClr val="667487"/>
+              <a:defRPr sz="1050" b="1" i="0">
+                <a:solidFill>
+                  <a:srgbClr val="35C47A"/>
+                </a:solidFill>
+                <a:latin typeface="Arial"/>
+                <a:ea typeface="Arial"/>
+                <a:cs typeface="Arial"/>
+              </a:defRPr>
+            </a:pPr>
+            <a:r>
+              <a:rPr sz="1050" b="1" i="0">
+                <a:solidFill>
+                  <a:srgbClr val="35C47A"/>
                 </a:solidFill>
                 <a:latin typeface="Arial"/>
                 <a:ea typeface="Arial"/>
                 <a:cs typeface="Arial"/>
               </a:rPr>
-              <a:t>Organiser-supplied evaluator</a:t>
-            </a:r>
-          </a:p>
-        </p:txBody>
-      </p:sp>
-      <p:cxnSp>
-        <p:nvCxnSpPr>
-          <p:cNvPr id="54" name=""/>
-          <p:cNvCxnSpPr>
-            <a:stCxn xmlns:a="http://schemas.openxmlformats.org/drawingml/2006/main" id="3" idx="3"/>
-            <a:endCxn xmlns:a="http://schemas.openxmlformats.org/drawingml/2006/main" id="6" idx="1"/>
-          </p:cNvCxnSpPr>
-          <p:nvPr/>
-        </p:nvCxnSpPr>
-        <p:spPr>
-          <a:xfrm xmlns:a="http://schemas.openxmlformats.org/drawingml/2006/main">
-            <a:off x="2171700" y="2762250"/>
-            <a:ext cx="361950" cy="0"/>
-          </a:xfrm>
-          <a:prstGeom xmlns:a="http://schemas.openxmlformats.org/drawingml/2006/main" prst="straightConnector1">
-            <a:avLst/>
-          </a:prstGeom>
-          <a:ln xmlns:a="http://schemas.openxmlformats.org/drawingml/2006/main" w="19050">
-            <a:solidFill>
-              <a:srgbClr val="35C47A"/>
-            </a:solidFill>
-            <a:prstDash val="solid"/>
-            <a:tailEnd type="triangle" w="sm" len="sm"/>
-          </a:ln>
-        </p:spPr>
-      </p:cxnSp>
-      <p:cxnSp>
-        <p:nvCxnSpPr>
-          <p:cNvPr id="55" name=""/>
-          <p:cNvCxnSpPr>
-            <a:stCxn xmlns:a="http://schemas.openxmlformats.org/drawingml/2006/main" id="6" idx="3"/>
-            <a:endCxn xmlns:a="http://schemas.openxmlformats.org/drawingml/2006/main" id="9" idx="1"/>
-          </p:cNvCxnSpPr>
-          <p:nvPr/>
-        </p:nvCxnSpPr>
-        <p:spPr>
-          <a:xfrm xmlns:a="http://schemas.openxmlformats.org/drawingml/2006/main">
-            <a:off x="4152900" y="2762250"/>
-            <a:ext cx="361950" cy="0"/>
-          </a:xfrm>
-          <a:prstGeom xmlns:a="http://schemas.openxmlformats.org/drawingml/2006/main" prst="straightConnector1">
-            <a:avLst/>
-          </a:prstGeom>
-          <a:ln xmlns:a="http://schemas.openxmlformats.org/drawingml/2006/main" w="19050">
-            <a:solidFill>
-              <a:srgbClr val="35C47A"/>
-            </a:solidFill>
-            <a:prstDash val="solid"/>
-            <a:tailEnd type="triangle" w="sm" len="sm"/>
-          </a:ln>
-        </p:spPr>
-      </p:cxnSp>
-      <p:cxnSp>
-        <p:nvCxnSpPr>
-          <p:cNvPr id="56" name=""/>
-          <p:cNvCxnSpPr>
-            <a:stCxn xmlns:a="http://schemas.openxmlformats.org/drawingml/2006/main" id="9" idx="3"/>
-            <a:endCxn xmlns:a="http://schemas.openxmlformats.org/drawingml/2006/main" id="12" idx="1"/>
-          </p:cNvCxnSpPr>
-          <p:nvPr/>
-        </p:nvCxnSpPr>
-        <p:spPr>
-          <a:xfrm xmlns:a="http://schemas.openxmlformats.org/drawingml/2006/main">
-            <a:off x="6134100" y="2762250"/>
-            <a:ext cx="361950" cy="0"/>
-          </a:xfrm>
-          <a:prstGeom xmlns:a="http://schemas.openxmlformats.org/drawingml/2006/main" prst="straightConnector1">
-            <a:avLst/>
-          </a:prstGeom>
-          <a:ln xmlns:a="http://schemas.openxmlformats.org/drawingml/2006/main" w="19050">
-            <a:solidFill>
-              <a:srgbClr val="35C47A"/>
-            </a:solidFill>
-            <a:prstDash val="solid"/>
-            <a:tailEnd type="triangle" w="sm" len="sm"/>
-          </a:ln>
-        </p:spPr>
-      </p:cxnSp>
-      <p:cxnSp>
-        <p:nvCxnSpPr>
-          <p:cNvPr id="57" name=""/>
-          <p:cNvCxnSpPr>
-            <a:stCxn xmlns:a="http://schemas.openxmlformats.org/drawingml/2006/main" id="12" idx="3"/>
-            <a:endCxn xmlns:a="http://schemas.openxmlformats.org/drawingml/2006/main" id="15" idx="1"/>
-          </p:cNvCxnSpPr>
-          <p:nvPr/>
-        </p:nvCxnSpPr>
-        <p:spPr>
-          <a:xfrm xmlns:a="http://schemas.openxmlformats.org/drawingml/2006/main">
-            <a:off x="8115300" y="2762250"/>
-            <a:ext cx="361950" cy="0"/>
-          </a:xfrm>
-          <a:prstGeom xmlns:a="http://schemas.openxmlformats.org/drawingml/2006/main" prst="straightConnector1">
-            <a:avLst/>
-          </a:prstGeom>
-          <a:ln xmlns:a="http://schemas.openxmlformats.org/drawingml/2006/main" w="19050">
-            <a:solidFill>
-              <a:srgbClr val="35C47A"/>
-            </a:solidFill>
-            <a:prstDash val="solid"/>
-            <a:tailEnd type="triangle" w="sm" len="sm"/>
-          </a:ln>
-        </p:spPr>
-      </p:cxnSp>
-      <p:cxnSp>
-        <p:nvCxnSpPr>
-          <p:cNvPr id="58" name=""/>
-          <p:cNvCxnSpPr>
-            <a:stCxn xmlns:a="http://schemas.openxmlformats.org/drawingml/2006/main" id="15" idx="3"/>
-            <a:endCxn xmlns:a="http://schemas.openxmlformats.org/drawingml/2006/main" id="18" idx="1"/>
-          </p:cNvCxnSpPr>
-          <p:nvPr/>
-        </p:nvCxnSpPr>
-        <p:spPr>
-          <a:xfrm xmlns:a="http://schemas.openxmlformats.org/drawingml/2006/main">
-            <a:off x="10096500" y="2762250"/>
-            <a:ext cx="361950" cy="0"/>
-          </a:xfrm>
-          <a:prstGeom xmlns:a="http://schemas.openxmlformats.org/drawingml/2006/main" prst="straightConnector1">
-            <a:avLst/>
-          </a:prstGeom>
-          <a:ln xmlns:a="http://schemas.openxmlformats.org/drawingml/2006/main" w="19050">
-            <a:solidFill>
-              <a:srgbClr val="35C47A"/>
-            </a:solidFill>
-            <a:prstDash val="solid"/>
-            <a:tailEnd type="triangle" w="sm" len="sm"/>
-          </a:ln>
-        </p:spPr>
-      </p:cxnSp>
-      <p:sp>
-        <p:nvSpPr>
-          <p:cNvPr id="26" name="">
-            <a:extLst xmlns:a="http://schemas.openxmlformats.org/drawingml/2006/main">
-              <a:ext uri="{FF2B5EF4-FFF2-40B4-BE49-F238E27FC236}">
-                <a16:creationId xmlns:a16="http://schemas.microsoft.com/office/drawing/2014/main" id="{24570940-AF9C-46DF-BB0D-F5DD66C87285}"/>
-              </a:ext>
-            </a:extLst>
-          </p:cNvPr>
-          <p:cNvSpPr>
-            <a:spLocks xmlns:a="http://schemas.openxmlformats.org/drawingml/2006/main" noGrp="1"/>
-          </p:cNvSpPr>
-          <p:nvPr/>
-        </p:nvSpPr>
-        <p:spPr>
-          <a:xfrm xmlns:a="http://schemas.openxmlformats.org/drawingml/2006/main">
-            <a:off x="609600" y="4343400"/>
+              <a:t>DETERMINISTIC CONTROLS</a:t>
+            </a:r>
+          </a:p>
+        </p:txBody>
+      </p:sp>
+      <p:sp>
+        <p:nvSpPr>
+          <p:cNvPr id="34" name="">
+            <a:extLst xmlns:a="http://schemas.openxmlformats.org/drawingml/2006/main">
+              <a:ext uri="{FF2B5EF4-FFF2-40B4-BE49-F238E27FC236}">
+                <a16:creationId xmlns:a16="http://schemas.microsoft.com/office/drawing/2014/main" id="{EAAD0B02-DDD7-4C6E-8A97-CEBB9187A440}"/>
+              </a:ext>
+            </a:extLst>
+          </p:cNvPr>
+          <p:cNvSpPr>
+            <a:spLocks xmlns:a="http://schemas.openxmlformats.org/drawingml/2006/main" noGrp="1"/>
+          </p:cNvSpPr>
+          <p:nvPr/>
+        </p:nvSpPr>
+        <p:spPr>
+          <a:xfrm xmlns:a="http://schemas.openxmlformats.org/drawingml/2006/main">
+            <a:off x="7334250" y="5048250"/>
+            <a:ext cx="3714750" cy="685800"/>
+          </a:xfrm>
+          <a:prstGeom xmlns:a="http://schemas.openxmlformats.org/drawingml/2006/main" prst="rect">
+            <a:avLst/>
+          </a:prstGeom>
+          <a:noFill xmlns:a="http://schemas.openxmlformats.org/drawingml/2006/main"/>
+          <a:ln xmlns:a="http://schemas.openxmlformats.org/drawingml/2006/main" w="0">
+            <a:noFill/>
+          </a:ln>
+        </p:spPr>
+        <p:txBody>
+          <a:bodyPr xmlns:a="http://schemas.openxmlformats.org/drawingml/2006/main" wrap="square" lIns="0" tIns="0" rIns="0" bIns="0" anchor="t">
+            <a:normAutofit fontScale="100000"/>
+          </a:bodyPr>
+          <a:lstStyle xmlns:a="http://schemas.openxmlformats.org/drawingml/2006/main"/>
+          <a:p xmlns:a="http://schemas.openxmlformats.org/drawingml/2006/main">
+            <a:pPr algn="ctr">
+              <a:lnSpc>
+                <a:spcPct val="112000"/>
+              </a:lnSpc>
+              <a:buNone/>
+              <a:defRPr sz="1350" b="0" i="0">
+                <a:solidFill>
+                  <a:srgbClr val="FFFFFF"/>
+                </a:solidFill>
+                <a:latin typeface="Arial"/>
+                <a:ea typeface="Arial"/>
+                <a:cs typeface="Arial"/>
+              </a:defRPr>
+            </a:pPr>
+            <a:r>
+              <a:rPr sz="1350" b="0" i="0">
+                <a:solidFill>
+                  <a:srgbClr val="FFFFFF"/>
+                </a:solidFill>
+                <a:latin typeface="Arial"/>
+                <a:ea typeface="Arial"/>
+                <a:cs typeface="Arial"/>
+              </a:rPr>
+              <a:t>Exact target coverage and workbook checks run before the edited copy is published.</a:t>
+            </a:r>
+          </a:p>
+        </p:txBody>
+      </p:sp>
+      <p:sp>
+        <p:nvSpPr>
+          <p:cNvPr id="35" name="">
+            <a:extLst xmlns:a="http://schemas.openxmlformats.org/drawingml/2006/main">
+              <a:ext uri="{FF2B5EF4-FFF2-40B4-BE49-F238E27FC236}">
+                <a16:creationId xmlns:a16="http://schemas.microsoft.com/office/drawing/2014/main" id="{FC60ED5D-7A3C-42BC-ABB2-C4D398F72D2A}"/>
+              </a:ext>
+            </a:extLst>
+          </p:cNvPr>
+          <p:cNvSpPr>
+            <a:spLocks xmlns:a="http://schemas.openxmlformats.org/drawingml/2006/main" noGrp="1"/>
+          </p:cNvSpPr>
+          <p:nvPr/>
+        </p:nvSpPr>
+        <p:spPr>
+          <a:xfrm xmlns:a="http://schemas.openxmlformats.org/drawingml/2006/main">
+            <a:off x="609600" y="6429375"/>
             <a:ext cx="10972800" cy="0"/>
           </a:xfrm>
           <a:prstGeom xmlns:a="http://schemas.openxmlformats.org/drawingml/2006/main" prst="line">
@@ -5245,285 +6389,10 @@
       </p:sp>
       <p:sp>
         <p:nvSpPr>
-          <p:cNvPr id="27" name="">
-            <a:extLst xmlns:a="http://schemas.openxmlformats.org/drawingml/2006/main">
-              <a:ext uri="{FF2B5EF4-FFF2-40B4-BE49-F238E27FC236}">
-                <a16:creationId xmlns:a16="http://schemas.microsoft.com/office/drawing/2014/main" id="{84AE103C-8560-4366-95B5-334C206EB433}"/>
-              </a:ext>
-            </a:extLst>
-          </p:cNvPr>
-          <p:cNvSpPr>
-            <a:spLocks xmlns:a="http://schemas.openxmlformats.org/drawingml/2006/main" noGrp="1"/>
-          </p:cNvSpPr>
-          <p:nvPr/>
-        </p:nvSpPr>
-        <p:spPr>
-          <a:xfrm xmlns:a="http://schemas.openxmlformats.org/drawingml/2006/main">
-            <a:off x="609600" y="4629150"/>
-            <a:ext cx="2190750" cy="247650"/>
-          </a:xfrm>
-          <a:prstGeom xmlns:a="http://schemas.openxmlformats.org/drawingml/2006/main" prst="rect">
-            <a:avLst/>
-          </a:prstGeom>
-          <a:noFill xmlns:a="http://schemas.openxmlformats.org/drawingml/2006/main"/>
-          <a:ln xmlns:a="http://schemas.openxmlformats.org/drawingml/2006/main" w="0">
-            <a:noFill/>
-          </a:ln>
-        </p:spPr>
-        <p:txBody>
-          <a:bodyPr xmlns:a="http://schemas.openxmlformats.org/drawingml/2006/main" wrap="square" lIns="0" tIns="0" rIns="0" bIns="0" anchor="t">
-            <a:normAutofit fontScale="100000"/>
-          </a:bodyPr>
-          <a:lstStyle xmlns:a="http://schemas.openxmlformats.org/drawingml/2006/main"/>
-          <a:p xmlns:a="http://schemas.openxmlformats.org/drawingml/2006/main">
-            <a:pPr algn="l">
-              <a:lnSpc>
-                <a:spcPct val="105000"/>
-              </a:lnSpc>
-              <a:buNone/>
-              <a:defRPr sz="1050" b="1" i="0">
-                <a:solidFill>
-                  <a:srgbClr val="35C47A"/>
-                </a:solidFill>
-                <a:latin typeface="Arial"/>
-                <a:ea typeface="Arial"/>
-                <a:cs typeface="Arial"/>
-              </a:defRPr>
-            </a:pPr>
-            <a:r>
-              <a:rPr sz="1050" b="1" i="0">
-                <a:solidFill>
-                  <a:srgbClr val="35C47A"/>
-                </a:solidFill>
-                <a:latin typeface="Arial"/>
-                <a:ea typeface="Arial"/>
-                <a:cs typeface="Arial"/>
-              </a:rPr>
-              <a:t>MODEL BOUNDARY</a:t>
-            </a:r>
-          </a:p>
-        </p:txBody>
-      </p:sp>
-      <p:sp>
-        <p:nvSpPr>
-          <p:cNvPr id="28" name="">
-            <a:extLst xmlns:a="http://schemas.openxmlformats.org/drawingml/2006/main">
-              <a:ext uri="{FF2B5EF4-FFF2-40B4-BE49-F238E27FC236}">
-                <a16:creationId xmlns:a16="http://schemas.microsoft.com/office/drawing/2014/main" id="{483761B8-F56E-4B77-8597-DEE21DF2F291}"/>
-              </a:ext>
-            </a:extLst>
-          </p:cNvPr>
-          <p:cNvSpPr>
-            <a:spLocks xmlns:a="http://schemas.openxmlformats.org/drawingml/2006/main" noGrp="1"/>
-          </p:cNvSpPr>
-          <p:nvPr/>
-        </p:nvSpPr>
-        <p:spPr>
-          <a:xfrm xmlns:a="http://schemas.openxmlformats.org/drawingml/2006/main">
-            <a:off x="609600" y="4953000"/>
-            <a:ext cx="4714875" cy="685800"/>
-          </a:xfrm>
-          <a:prstGeom xmlns:a="http://schemas.openxmlformats.org/drawingml/2006/main" prst="rect">
-            <a:avLst/>
-          </a:prstGeom>
-          <a:noFill xmlns:a="http://schemas.openxmlformats.org/drawingml/2006/main"/>
-          <a:ln xmlns:a="http://schemas.openxmlformats.org/drawingml/2006/main" w="0">
-            <a:noFill/>
-          </a:ln>
-        </p:spPr>
-        <p:txBody>
-          <a:bodyPr xmlns:a="http://schemas.openxmlformats.org/drawingml/2006/main" wrap="square" lIns="0" tIns="0" rIns="0" bIns="0" anchor="t">
-            <a:normAutofit fontScale="100000"/>
-          </a:bodyPr>
-          <a:lstStyle xmlns:a="http://schemas.openxmlformats.org/drawingml/2006/main"/>
-          <a:p xmlns:a="http://schemas.openxmlformats.org/drawingml/2006/main">
-            <a:pPr algn="l">
-              <a:lnSpc>
-                <a:spcPct val="112000"/>
-              </a:lnSpc>
-              <a:buNone/>
-              <a:defRPr sz="1500" b="0" i="0">
-                <a:solidFill>
-                  <a:srgbClr val="FFFFFF"/>
-                </a:solidFill>
-                <a:latin typeface="Arial"/>
-                <a:ea typeface="Arial"/>
-                <a:cs typeface="Arial"/>
-              </a:defRPr>
-            </a:pPr>
-            <a:r>
-              <a:rPr sz="1500" b="0" i="0">
-                <a:solidFill>
-                  <a:srgbClr val="FFFFFF"/>
-                </a:solidFill>
-                <a:latin typeface="Arial"/>
-                <a:ea typeface="Arial"/>
-                <a:cs typeface="Arial"/>
-              </a:rPr>
-              <a:t>Temperature 0 · thinking disabled · one response · no unrestricted tools</a:t>
-            </a:r>
-          </a:p>
-        </p:txBody>
-      </p:sp>
-      <p:sp>
-        <p:nvSpPr>
-          <p:cNvPr id="29" name="">
-            <a:extLst xmlns:a="http://schemas.openxmlformats.org/drawingml/2006/main">
-              <a:ext uri="{FF2B5EF4-FFF2-40B4-BE49-F238E27FC236}">
-                <a16:creationId xmlns:a16="http://schemas.microsoft.com/office/drawing/2014/main" id="{9D80DA11-CEC0-42B8-9A87-09B3F502467E}"/>
-              </a:ext>
-            </a:extLst>
-          </p:cNvPr>
-          <p:cNvSpPr>
-            <a:spLocks xmlns:a="http://schemas.openxmlformats.org/drawingml/2006/main" noGrp="1"/>
-          </p:cNvSpPr>
-          <p:nvPr/>
-        </p:nvSpPr>
-        <p:spPr>
-          <a:xfrm xmlns:a="http://schemas.openxmlformats.org/drawingml/2006/main">
-            <a:off x="6334125" y="4629150"/>
-            <a:ext cx="2857500" cy="247650"/>
-          </a:xfrm>
-          <a:prstGeom xmlns:a="http://schemas.openxmlformats.org/drawingml/2006/main" prst="rect">
-            <a:avLst/>
-          </a:prstGeom>
-          <a:noFill xmlns:a="http://schemas.openxmlformats.org/drawingml/2006/main"/>
-          <a:ln xmlns:a="http://schemas.openxmlformats.org/drawingml/2006/main" w="0">
-            <a:noFill/>
-          </a:ln>
-        </p:spPr>
-        <p:txBody>
-          <a:bodyPr xmlns:a="http://schemas.openxmlformats.org/drawingml/2006/main" wrap="square" lIns="0" tIns="0" rIns="0" bIns="0" anchor="t">
-            <a:normAutofit fontScale="100000"/>
-          </a:bodyPr>
-          <a:lstStyle xmlns:a="http://schemas.openxmlformats.org/drawingml/2006/main"/>
-          <a:p xmlns:a="http://schemas.openxmlformats.org/drawingml/2006/main">
-            <a:pPr algn="l">
-              <a:lnSpc>
-                <a:spcPct val="105000"/>
-              </a:lnSpc>
-              <a:buNone/>
-              <a:defRPr sz="1050" b="1" i="0">
-                <a:solidFill>
-                  <a:srgbClr val="35C47A"/>
-                </a:solidFill>
-                <a:latin typeface="Arial"/>
-                <a:ea typeface="Arial"/>
-                <a:cs typeface="Arial"/>
-              </a:defRPr>
-            </a:pPr>
-            <a:r>
-              <a:rPr sz="1050" b="1" i="0">
-                <a:solidFill>
-                  <a:srgbClr val="35C47A"/>
-                </a:solidFill>
-                <a:latin typeface="Arial"/>
-                <a:ea typeface="Arial"/>
-                <a:cs typeface="Arial"/>
-              </a:rPr>
-              <a:t>DETERMINISTIC BOUNDARY</a:t>
-            </a:r>
-          </a:p>
-        </p:txBody>
-      </p:sp>
-      <p:sp>
-        <p:nvSpPr>
-          <p:cNvPr id="30" name="">
-            <a:extLst xmlns:a="http://schemas.openxmlformats.org/drawingml/2006/main">
-              <a:ext uri="{FF2B5EF4-FFF2-40B4-BE49-F238E27FC236}">
-                <a16:creationId xmlns:a16="http://schemas.microsoft.com/office/drawing/2014/main" id="{BD727BB6-96A1-4E60-A15C-A074060636E6}"/>
-              </a:ext>
-            </a:extLst>
-          </p:cNvPr>
-          <p:cNvSpPr>
-            <a:spLocks xmlns:a="http://schemas.openxmlformats.org/drawingml/2006/main" noGrp="1"/>
-          </p:cNvSpPr>
-          <p:nvPr/>
-        </p:nvSpPr>
-        <p:spPr>
-          <a:xfrm xmlns:a="http://schemas.openxmlformats.org/drawingml/2006/main">
-            <a:off x="6334125" y="4953000"/>
-            <a:ext cx="4953000" cy="685800"/>
-          </a:xfrm>
-          <a:prstGeom xmlns:a="http://schemas.openxmlformats.org/drawingml/2006/main" prst="rect">
-            <a:avLst/>
-          </a:prstGeom>
-          <a:noFill xmlns:a="http://schemas.openxmlformats.org/drawingml/2006/main"/>
-          <a:ln xmlns:a="http://schemas.openxmlformats.org/drawingml/2006/main" w="0">
-            <a:noFill/>
-          </a:ln>
-        </p:spPr>
-        <p:txBody>
-          <a:bodyPr xmlns:a="http://schemas.openxmlformats.org/drawingml/2006/main" wrap="square" lIns="0" tIns="0" rIns="0" bIns="0" anchor="t">
-            <a:normAutofit fontScale="100000"/>
-          </a:bodyPr>
-          <a:lstStyle xmlns:a="http://schemas.openxmlformats.org/drawingml/2006/main"/>
-          <a:p xmlns:a="http://schemas.openxmlformats.org/drawingml/2006/main">
-            <a:pPr algn="l">
-              <a:lnSpc>
-                <a:spcPct val="112000"/>
-              </a:lnSpc>
-              <a:buNone/>
-              <a:defRPr sz="1500" b="0" i="0">
-                <a:solidFill>
-                  <a:srgbClr val="FFFFFF"/>
-                </a:solidFill>
-                <a:latin typeface="Arial"/>
-                <a:ea typeface="Arial"/>
-                <a:cs typeface="Arial"/>
-              </a:defRPr>
-            </a:pPr>
-            <a:r>
-              <a:rPr sz="1500" b="0" i="0">
-                <a:solidFill>
-                  <a:srgbClr val="FFFFFF"/>
-                </a:solidFill>
-                <a:latin typeface="Arial"/>
-                <a:ea typeface="Arial"/>
-                <a:cs typeface="Arial"/>
-              </a:rPr>
-              <a:t>Exact target coverage and workbook checks run before any proposed edit reaches the output.</a:t>
-            </a:r>
-          </a:p>
-        </p:txBody>
-      </p:sp>
-      <p:sp>
-        <p:nvSpPr>
-          <p:cNvPr id="31" name="">
-            <a:extLst xmlns:a="http://schemas.openxmlformats.org/drawingml/2006/main">
-              <a:ext uri="{FF2B5EF4-FFF2-40B4-BE49-F238E27FC236}">
-                <a16:creationId xmlns:a16="http://schemas.microsoft.com/office/drawing/2014/main" id="{DE6181F6-842E-48E2-91FB-682D3C303A98}"/>
-              </a:ext>
-            </a:extLst>
-          </p:cNvPr>
-          <p:cNvSpPr>
-            <a:spLocks xmlns:a="http://schemas.openxmlformats.org/drawingml/2006/main" noGrp="1"/>
-          </p:cNvSpPr>
-          <p:nvPr/>
-        </p:nvSpPr>
-        <p:spPr>
-          <a:xfrm xmlns:a="http://schemas.openxmlformats.org/drawingml/2006/main">
-            <a:off x="609600" y="6429375"/>
-            <a:ext cx="10972800" cy="0"/>
-          </a:xfrm>
-          <a:prstGeom xmlns:a="http://schemas.openxmlformats.org/drawingml/2006/main" prst="line">
-            <a:avLst/>
-          </a:prstGeom>
-          <a:noFill xmlns:a="http://schemas.openxmlformats.org/drawingml/2006/main"/>
-          <a:ln xmlns:a="http://schemas.openxmlformats.org/drawingml/2006/main" w="9525">
-            <a:solidFill>
-              <a:srgbClr val="344257"/>
-            </a:solidFill>
-            <a:prstDash val="solid"/>
-          </a:ln>
-        </p:spPr>
-      </p:sp>
-      <p:sp>
-        <p:nvSpPr>
-          <p:cNvPr id="32" name="">
-            <a:extLst xmlns:a="http://schemas.openxmlformats.org/drawingml/2006/main">
-              <a:ext uri="{FF2B5EF4-FFF2-40B4-BE49-F238E27FC236}">
-                <a16:creationId xmlns:a16="http://schemas.microsoft.com/office/drawing/2014/main" id="{541AFDF3-CBD9-4912-AF8F-C6E5062A8CDC}"/>
+          <p:cNvPr id="36" name="">
+            <a:extLst xmlns:a="http://schemas.openxmlformats.org/drawingml/2006/main">
+              <a:ext uri="{FF2B5EF4-FFF2-40B4-BE49-F238E27FC236}">
+                <a16:creationId xmlns:a16="http://schemas.microsoft.com/office/drawing/2014/main" id="{EF8903BD-6FB9-4085-86A1-22CEE37B452E}"/>
               </a:ext>
             </a:extLst>
           </p:cNvPr>
@@ -5581,10 +6450,10 @@
       </p:sp>
       <p:sp>
         <p:nvSpPr>
-          <p:cNvPr id="33" name="">
-            <a:extLst xmlns:a="http://schemas.openxmlformats.org/drawingml/2006/main">
-              <a:ext uri="{FF2B5EF4-FFF2-40B4-BE49-F238E27FC236}">
-                <a16:creationId xmlns:a16="http://schemas.microsoft.com/office/drawing/2014/main" id="{C80CA9D4-128E-42B5-B551-87394986863A}"/>
+          <p:cNvPr id="37" name="">
+            <a:extLst xmlns:a="http://schemas.openxmlformats.org/drawingml/2006/main">
+              <a:ext uri="{FF2B5EF4-FFF2-40B4-BE49-F238E27FC236}">
+                <a16:creationId xmlns:a16="http://schemas.microsoft.com/office/drawing/2014/main" id="{39664913-30EA-4553-9654-0230C96612B4}"/>
               </a:ext>
             </a:extLst>
           </p:cNvPr>
@@ -5635,7 +6504,7 @@
                 <a:ea typeface="Arial"/>
                 <a:cs typeface="Arial"/>
               </a:rPr>
-              <a:t>03</a:t>
+              <a:t>04</a:t>
             </a:r>
           </a:p>
         </p:txBody>
@@ -5643,14 +6512,14 @@
     </p:spTree>
     <p:extLst>
       <p:ext uri="{BB962C8B-B14F-4D97-AF65-F5344CB8AC3E}">
-        <p14:creationId xmlns:p14="http://schemas.microsoft.com/office/powerpoint/2010/main" val="49455925"/>
+        <p14:creationId xmlns:p14="http://schemas.microsoft.com/office/powerpoint/2010/main" val="1362314503"/>
       </p:ext>
     </p:extLst>
   </p:cSld>
 </p:sld>
 </file>
 
-<file path=ppt/slides/slide4.xml><?xml version="1.0" encoding="utf-8"?>
+<file path=ppt/slides/slide5.xml><?xml version="1.0" encoding="utf-8"?>
 <p:sld xmlns:p="http://schemas.openxmlformats.org/presentationml/2006/main">
   <p:cSld>
     <p:bg>
@@ -5674,7 +6543,7 @@
           <p:cNvPr id="8" name="slide-title">
             <a:extLst xmlns:a="http://schemas.openxmlformats.org/drawingml/2006/main">
               <a:ext uri="{FF2B5EF4-FFF2-40B4-BE49-F238E27FC236}">
-                <a16:creationId xmlns:a16="http://schemas.microsoft.com/office/drawing/2014/main" id="{81119359-2AA5-46B2-93A9-6B6BE2FB3377}"/>
+                <a16:creationId xmlns:a16="http://schemas.microsoft.com/office/drawing/2014/main" id="{05EACF2E-8CE8-4C61-8401-85A32F2174DC}"/>
               </a:ext>
             </a:extLst>
           </p:cNvPr>
@@ -5725,7 +6594,7 @@
                 <a:ea typeface="Arial"/>
                 <a:cs typeface="Arial"/>
               </a:rPr>
-              <a:t>The output contract blocks silent corruption</a:t>
+              <a:t>Workbook checks before publication</a:t>
             </a:r>
           </a:p>
         </p:txBody>
@@ -5735,7 +6604,7 @@
           <p:cNvPr id="2" name="">
             <a:extLst xmlns:a="http://schemas.openxmlformats.org/drawingml/2006/main">
               <a:ext uri="{FF2B5EF4-FFF2-40B4-BE49-F238E27FC236}">
-                <a16:creationId xmlns:a16="http://schemas.microsoft.com/office/drawing/2014/main" id="{B37968CF-D718-4F17-8083-18E9BE2A1993}"/>
+                <a16:creationId xmlns:a16="http://schemas.microsoft.com/office/drawing/2014/main" id="{7CE5D7BA-080F-4EA9-B3E3-01C0BAE89666}"/>
               </a:ext>
             </a:extLst>
           </p:cNvPr>
@@ -5786,7 +6655,7 @@
                 <a:ea typeface="Arial"/>
                 <a:cs typeface="Arial"/>
               </a:rPr>
-              <a:t>Every accepted response must satisfy the same workbook-level contract.</a:t>
+              <a:t>FormulaBench publishes an edited workbook only after every check passes.</a:t>
             </a:r>
           </a:p>
         </p:txBody>
@@ -6187,7 +7056,7 @@
                           <a:ea typeface="Arial"/>
                           <a:cs typeface="Arial"/>
                         </a:rPr>
-                        <a:t>Atomic reopen</a:t>
+                        <a:t>Save and reopen</a:t>
                       </a:r>
                     </a:p>
                   </a:txBody>
@@ -6207,7 +7076,7 @@
                           <a:ea typeface="Arial"/>
                           <a:cs typeface="Arial"/>
                         </a:rPr>
-                        <a:t>The writer saves a fresh copy, reopens it and verifies the intended cell state.</a:t>
+                        <a:t>The system saves a fresh copy, reopens it and verifies the target cells.</a:t>
                       </a:r>
                     </a:p>
                   </a:txBody>
@@ -6229,7 +7098,7 @@
                           <a:ea typeface="Arial"/>
                           <a:cs typeface="Arial"/>
                         </a:rPr>
-                        <a:t>Publish pristine fallback</a:t>
+                        <a:t>Return the untouched workbook</a:t>
                       </a:r>
                     </a:p>
                   </a:txBody>
@@ -6249,7 +7118,7 @@
           <p:cNvPr id="4" name="">
             <a:extLst xmlns:a="http://schemas.openxmlformats.org/drawingml/2006/main">
               <a:ext uri="{FF2B5EF4-FFF2-40B4-BE49-F238E27FC236}">
-                <a16:creationId xmlns:a16="http://schemas.microsoft.com/office/drawing/2014/main" id="{B1B9E0E9-21C7-4AE1-A9B1-EB55EFE6291C}"/>
+                <a16:creationId xmlns:a16="http://schemas.microsoft.com/office/drawing/2014/main" id="{9DF36416-CAE1-4B08-AD69-8DED034D2240}"/>
               </a:ext>
             </a:extLst>
           </p:cNvPr>
@@ -6310,7 +7179,7 @@
           <p:cNvPr id="5" name="">
             <a:extLst xmlns:a="http://schemas.openxmlformats.org/drawingml/2006/main">
               <a:ext uri="{FF2B5EF4-FFF2-40B4-BE49-F238E27FC236}">
-                <a16:creationId xmlns:a16="http://schemas.microsoft.com/office/drawing/2014/main" id="{86102070-D099-4305-8A1D-47DEAF39BC85}"/>
+                <a16:creationId xmlns:a16="http://schemas.microsoft.com/office/drawing/2014/main" id="{084CF18C-0618-4405-A1BD-5C49D9C318FB}"/>
               </a:ext>
             </a:extLst>
           </p:cNvPr>
@@ -6341,7 +7210,7 @@
           <p:cNvPr id="6" name="">
             <a:extLst xmlns:a="http://schemas.openxmlformats.org/drawingml/2006/main">
               <a:ext uri="{FF2B5EF4-FFF2-40B4-BE49-F238E27FC236}">
-                <a16:creationId xmlns:a16="http://schemas.microsoft.com/office/drawing/2014/main" id="{9682BA9B-C14F-4726-B7BC-D968CCFD0FA0}"/>
+                <a16:creationId xmlns:a16="http://schemas.microsoft.com/office/drawing/2014/main" id="{91B9C88E-8783-4EF5-8491-E504FFFB65B0}"/>
               </a:ext>
             </a:extLst>
           </p:cNvPr>
@@ -6402,7 +7271,7 @@
           <p:cNvPr id="7" name="">
             <a:extLst xmlns:a="http://schemas.openxmlformats.org/drawingml/2006/main">
               <a:ext uri="{FF2B5EF4-FFF2-40B4-BE49-F238E27FC236}">
-                <a16:creationId xmlns:a16="http://schemas.microsoft.com/office/drawing/2014/main" id="{DFB7FD4D-241E-4EF1-AB64-63A8F684E963}"/>
+                <a16:creationId xmlns:a16="http://schemas.microsoft.com/office/drawing/2014/main" id="{29093E58-55D0-4F69-ACFF-3BBD3B158314}"/>
               </a:ext>
             </a:extLst>
           </p:cNvPr>
@@ -6453,7 +7322,7 @@
                 <a:ea typeface="Arial"/>
                 <a:cs typeface="Arial"/>
               </a:rPr>
-              <a:t>04</a:t>
+              <a:t>05</a:t>
             </a:r>
           </a:p>
         </p:txBody>
@@ -6461,754 +7330,7 @@
     </p:spTree>
     <p:extLst>
       <p:ext uri="{BB962C8B-B14F-4D97-AF65-F5344CB8AC3E}">
-        <p14:creationId xmlns:p14="http://schemas.microsoft.com/office/powerpoint/2010/main" val="1444570919"/>
-      </p:ext>
-    </p:extLst>
-  </p:cSld>
-</p:sld>
-</file>
-
-<file path=ppt/slides/slide5.xml><?xml version="1.0" encoding="utf-8"?>
-<p:sld xmlns:p="http://schemas.openxmlformats.org/presentationml/2006/main">
-  <p:cSld>
-    <p:bg>
-      <p:bgPr>
-        <a:solidFill xmlns:a="http://schemas.openxmlformats.org/drawingml/2006/main">
-          <a:srgbClr val="FFFDF8"/>
-        </a:solidFill>
-      </p:bgPr>
-    </p:bg>
-    <p:spTree>
-      <p:nvGrpSpPr>
-        <p:cNvPr id="1" name=""/>
-        <p:cNvGrpSpPr/>
-        <p:nvPr/>
-      </p:nvGrpSpPr>
-      <p:grpSpPr>
-        <a:xfrm xmlns:a="http://schemas.openxmlformats.org/drawingml/2006/main"/>
-      </p:grpSpPr>
-      <p:sp>
-        <p:nvSpPr>
-          <p:cNvPr id="14" name="slide-title">
-            <a:extLst xmlns:a="http://schemas.openxmlformats.org/drawingml/2006/main">
-              <a:ext uri="{FF2B5EF4-FFF2-40B4-BE49-F238E27FC236}">
-                <a16:creationId xmlns:a16="http://schemas.microsoft.com/office/drawing/2014/main" id="{35B66285-2ABA-4398-B0AC-CE5853D0A7BE}"/>
-              </a:ext>
-            </a:extLst>
-          </p:cNvPr>
-          <p:cNvSpPr>
-            <a:spLocks xmlns:a="http://schemas.openxmlformats.org/drawingml/2006/main" noGrp="1"/>
-          </p:cNvSpPr>
-          <p:nvPr/>
-        </p:nvSpPr>
-        <p:spPr>
-          <a:xfrm xmlns:a="http://schemas.openxmlformats.org/drawingml/2006/main">
-            <a:off x="609600" y="428625"/>
-            <a:ext cx="10972800" cy="590550"/>
-          </a:xfrm>
-          <a:prstGeom xmlns:a="http://schemas.openxmlformats.org/drawingml/2006/main" prst="rect">
-            <a:avLst/>
-          </a:prstGeom>
-          <a:noFill xmlns:a="http://schemas.openxmlformats.org/drawingml/2006/main"/>
-          <a:ln xmlns:a="http://schemas.openxmlformats.org/drawingml/2006/main" w="0">
-            <a:noFill/>
-          </a:ln>
-        </p:spPr>
-        <p:txBody>
-          <a:bodyPr xmlns:a="http://schemas.openxmlformats.org/drawingml/2006/main" wrap="square" lIns="0" tIns="0" rIns="0" bIns="0" anchor="t">
-            <a:normAutofit fontScale="100000"/>
-          </a:bodyPr>
-          <a:lstStyle xmlns:a="http://schemas.openxmlformats.org/drawingml/2006/main"/>
-          <a:p xmlns:a="http://schemas.openxmlformats.org/drawingml/2006/main">
-            <a:pPr algn="l">
-              <a:lnSpc>
-                <a:spcPct val="105000"/>
-              </a:lnSpc>
-              <a:buNone/>
-              <a:defRPr sz="3300" b="1" i="0">
-                <a:solidFill>
-                  <a:srgbClr val="122033"/>
-                </a:solidFill>
-                <a:latin typeface="Arial"/>
-                <a:ea typeface="Arial"/>
-                <a:cs typeface="Arial"/>
-              </a:defRPr>
-            </a:pPr>
-            <a:r>
-              <a:rPr sz="3300" b="1" i="0">
-                <a:solidFill>
-                  <a:srgbClr val="122033"/>
-                </a:solidFill>
-                <a:latin typeface="Arial"/>
-                <a:ea typeface="Arial"/>
-                <a:cs typeface="Arial"/>
-              </a:rPr>
-              <a:t>Public self-evaluation: 133 of 400 tasks passed</a:t>
-            </a:r>
-          </a:p>
-        </p:txBody>
-      </p:sp>
-      <p:sp>
-        <p:nvSpPr>
-          <p:cNvPr id="2" name="">
-            <a:extLst xmlns:a="http://schemas.openxmlformats.org/drawingml/2006/main">
-              <a:ext uri="{FF2B5EF4-FFF2-40B4-BE49-F238E27FC236}">
-                <a16:creationId xmlns:a16="http://schemas.microsoft.com/office/drawing/2014/main" id="{4C06DB6F-C27D-4F5A-A5D1-CD75F5DB2BCE}"/>
-              </a:ext>
-            </a:extLst>
-          </p:cNvPr>
-          <p:cNvSpPr>
-            <a:spLocks xmlns:a="http://schemas.openxmlformats.org/drawingml/2006/main" noGrp="1"/>
-          </p:cNvSpPr>
-          <p:nvPr/>
-        </p:nvSpPr>
-        <p:spPr>
-          <a:xfrm xmlns:a="http://schemas.openxmlformats.org/drawingml/2006/main">
-            <a:off x="609600" y="1028700"/>
-            <a:ext cx="10572750" cy="361950"/>
-          </a:xfrm>
-          <a:prstGeom xmlns:a="http://schemas.openxmlformats.org/drawingml/2006/main" prst="rect">
-            <a:avLst/>
-          </a:prstGeom>
-          <a:noFill xmlns:a="http://schemas.openxmlformats.org/drawingml/2006/main"/>
-          <a:ln xmlns:a="http://schemas.openxmlformats.org/drawingml/2006/main" w="0">
-            <a:noFill/>
-          </a:ln>
-        </p:spPr>
-        <p:txBody>
-          <a:bodyPr xmlns:a="http://schemas.openxmlformats.org/drawingml/2006/main" wrap="square" lIns="0" tIns="0" rIns="0" bIns="0" anchor="t">
-            <a:normAutofit fontScale="100000"/>
-          </a:bodyPr>
-          <a:lstStyle xmlns:a="http://schemas.openxmlformats.org/drawingml/2006/main"/>
-          <a:p xmlns:a="http://schemas.openxmlformats.org/drawingml/2006/main">
-            <a:pPr algn="l">
-              <a:lnSpc>
-                <a:spcPct val="105000"/>
-              </a:lnSpc>
-              <a:buNone/>
-              <a:defRPr sz="1725" b="0" i="0">
-                <a:solidFill>
-                  <a:srgbClr val="667487"/>
-                </a:solidFill>
-                <a:latin typeface="Arial"/>
-                <a:ea typeface="Arial"/>
-                <a:cs typeface="Arial"/>
-              </a:defRPr>
-            </a:pPr>
-            <a:r>
-              <a:rPr sz="1725" b="0" i="0">
-                <a:solidFill>
-                  <a:srgbClr val="667487"/>
-                </a:solidFill>
-                <a:latin typeface="Arial"/>
-                <a:ea typeface="Arial"/>
-                <a:cs typeface="Arial"/>
-              </a:rPr>
-              <a:t>Complete public benchmark after LibreOffice recalculation using the organiser-supplied evaluator.</a:t>
-            </a:r>
-          </a:p>
-        </p:txBody>
-      </p:sp>
-      <p:sp>
-        <p:nvSpPr>
-          <p:cNvPr id="3" name="">
-            <a:extLst xmlns:a="http://schemas.openxmlformats.org/drawingml/2006/main">
-              <a:ext uri="{FF2B5EF4-FFF2-40B4-BE49-F238E27FC236}">
-                <a16:creationId xmlns:a16="http://schemas.microsoft.com/office/drawing/2014/main" id="{1350484D-F97C-4C8F-872B-481632370FA1}"/>
-              </a:ext>
-            </a:extLst>
-          </p:cNvPr>
-          <p:cNvSpPr>
-            <a:spLocks xmlns:a="http://schemas.openxmlformats.org/drawingml/2006/main" noGrp="1"/>
-          </p:cNvSpPr>
-          <p:nvPr/>
-        </p:nvSpPr>
-        <p:spPr>
-          <a:xfrm xmlns:a="http://schemas.openxmlformats.org/drawingml/2006/main">
-            <a:off x="609600" y="1638300"/>
-            <a:ext cx="3143250" cy="762000"/>
-          </a:xfrm>
-          <a:prstGeom xmlns:a="http://schemas.openxmlformats.org/drawingml/2006/main" prst="rect">
-            <a:avLst/>
-          </a:prstGeom>
-          <a:noFill xmlns:a="http://schemas.openxmlformats.org/drawingml/2006/main"/>
-          <a:ln xmlns:a="http://schemas.openxmlformats.org/drawingml/2006/main" w="0">
-            <a:noFill/>
-          </a:ln>
-        </p:spPr>
-        <p:txBody>
-          <a:bodyPr xmlns:a="http://schemas.openxmlformats.org/drawingml/2006/main" wrap="square" lIns="0" tIns="0" rIns="0" bIns="0" anchor="t">
-            <a:normAutofit fontScale="100000"/>
-          </a:bodyPr>
-          <a:lstStyle xmlns:a="http://schemas.openxmlformats.org/drawingml/2006/main"/>
-          <a:p xmlns:a="http://schemas.openxmlformats.org/drawingml/2006/main">
-            <a:pPr algn="l">
-              <a:lnSpc>
-                <a:spcPct val="105000"/>
-              </a:lnSpc>
-              <a:buNone/>
-              <a:defRPr sz="4500" b="1" i="0">
-                <a:solidFill>
-                  <a:srgbClr val="122033"/>
-                </a:solidFill>
-                <a:latin typeface="Arial"/>
-                <a:ea typeface="Arial"/>
-                <a:cs typeface="Arial"/>
-              </a:defRPr>
-            </a:pPr>
-            <a:r>
-              <a:rPr sz="4500" b="1" i="0">
-                <a:solidFill>
-                  <a:srgbClr val="122033"/>
-                </a:solidFill>
-                <a:latin typeface="Arial"/>
-                <a:ea typeface="Arial"/>
-                <a:cs typeface="Arial"/>
-              </a:rPr>
-              <a:t>33.25%</a:t>
-            </a:r>
-          </a:p>
-        </p:txBody>
-      </p:sp>
-      <p:sp>
-        <p:nvSpPr>
-          <p:cNvPr id="4" name="">
-            <a:extLst xmlns:a="http://schemas.openxmlformats.org/drawingml/2006/main">
-              <a:ext uri="{FF2B5EF4-FFF2-40B4-BE49-F238E27FC236}">
-                <a16:creationId xmlns:a16="http://schemas.microsoft.com/office/drawing/2014/main" id="{C4EDB417-AABE-4CF3-9F07-5586008599E7}"/>
-              </a:ext>
-            </a:extLst>
-          </p:cNvPr>
-          <p:cNvSpPr>
-            <a:spLocks xmlns:a="http://schemas.openxmlformats.org/drawingml/2006/main" noGrp="1"/>
-          </p:cNvSpPr>
-          <p:nvPr/>
-        </p:nvSpPr>
-        <p:spPr>
-          <a:xfrm xmlns:a="http://schemas.openxmlformats.org/drawingml/2006/main">
-            <a:off x="647700" y="2362200"/>
-            <a:ext cx="2857500" cy="285750"/>
-          </a:xfrm>
-          <a:prstGeom xmlns:a="http://schemas.openxmlformats.org/drawingml/2006/main" prst="rect">
-            <a:avLst/>
-          </a:prstGeom>
-          <a:noFill xmlns:a="http://schemas.openxmlformats.org/drawingml/2006/main"/>
-          <a:ln xmlns:a="http://schemas.openxmlformats.org/drawingml/2006/main" w="0">
-            <a:noFill/>
-          </a:ln>
-        </p:spPr>
-        <p:txBody>
-          <a:bodyPr xmlns:a="http://schemas.openxmlformats.org/drawingml/2006/main" wrap="square" lIns="0" tIns="0" rIns="0" bIns="0" anchor="t">
-            <a:normAutofit fontScale="100000"/>
-          </a:bodyPr>
-          <a:lstStyle xmlns:a="http://schemas.openxmlformats.org/drawingml/2006/main"/>
-          <a:p xmlns:a="http://schemas.openxmlformats.org/drawingml/2006/main">
-            <a:pPr algn="l">
-              <a:lnSpc>
-                <a:spcPct val="105000"/>
-              </a:lnSpc>
-              <a:buNone/>
-              <a:defRPr sz="1350" b="1" i="0">
-                <a:solidFill>
-                  <a:srgbClr val="35C47A"/>
-                </a:solidFill>
-                <a:latin typeface="Arial"/>
-                <a:ea typeface="Arial"/>
-                <a:cs typeface="Arial"/>
-              </a:defRPr>
-            </a:pPr>
-            <a:r>
-              <a:rPr sz="1350" b="1" i="0">
-                <a:solidFill>
-                  <a:srgbClr val="35C47A"/>
-                </a:solidFill>
-                <a:latin typeface="Arial"/>
-                <a:ea typeface="Arial"/>
-                <a:cs typeface="Arial"/>
-              </a:rPr>
-              <a:t>task pass rate</a:t>
-            </a:r>
-          </a:p>
-        </p:txBody>
-      </p:sp>
-      <p:sp>
-        <p:nvSpPr>
-          <p:cNvPr id="5" name="">
-            <a:extLst xmlns:a="http://schemas.openxmlformats.org/drawingml/2006/main">
-              <a:ext uri="{FF2B5EF4-FFF2-40B4-BE49-F238E27FC236}">
-                <a16:creationId xmlns:a16="http://schemas.microsoft.com/office/drawing/2014/main" id="{337F3CFB-B231-4E0B-95CC-FB0B3DBEFB3E}"/>
-              </a:ext>
-            </a:extLst>
-          </p:cNvPr>
-          <p:cNvSpPr>
-            <a:spLocks xmlns:a="http://schemas.openxmlformats.org/drawingml/2006/main" noGrp="1"/>
-          </p:cNvSpPr>
-          <p:nvPr/>
-        </p:nvSpPr>
-        <p:spPr>
-          <a:xfrm xmlns:a="http://schemas.openxmlformats.org/drawingml/2006/main">
-            <a:off x="4572000" y="1638300"/>
-            <a:ext cx="3143250" cy="762000"/>
-          </a:xfrm>
-          <a:prstGeom xmlns:a="http://schemas.openxmlformats.org/drawingml/2006/main" prst="rect">
-            <a:avLst/>
-          </a:prstGeom>
-          <a:noFill xmlns:a="http://schemas.openxmlformats.org/drawingml/2006/main"/>
-          <a:ln xmlns:a="http://schemas.openxmlformats.org/drawingml/2006/main" w="0">
-            <a:noFill/>
-          </a:ln>
-        </p:spPr>
-        <p:txBody>
-          <a:bodyPr xmlns:a="http://schemas.openxmlformats.org/drawingml/2006/main" wrap="square" lIns="0" tIns="0" rIns="0" bIns="0" anchor="t">
-            <a:normAutofit fontScale="100000"/>
-          </a:bodyPr>
-          <a:lstStyle xmlns:a="http://schemas.openxmlformats.org/drawingml/2006/main"/>
-          <a:p xmlns:a="http://schemas.openxmlformats.org/drawingml/2006/main">
-            <a:pPr algn="l">
-              <a:lnSpc>
-                <a:spcPct val="105000"/>
-              </a:lnSpc>
-              <a:buNone/>
-              <a:defRPr sz="4500" b="1" i="0">
-                <a:solidFill>
-                  <a:srgbClr val="122033"/>
-                </a:solidFill>
-                <a:latin typeface="Arial"/>
-                <a:ea typeface="Arial"/>
-                <a:cs typeface="Arial"/>
-              </a:defRPr>
-            </a:pPr>
-            <a:r>
-              <a:rPr sz="4500" b="1" i="0">
-                <a:solidFill>
-                  <a:srgbClr val="122033"/>
-                </a:solidFill>
-                <a:latin typeface="Arial"/>
-                <a:ea typeface="Arial"/>
-                <a:cs typeface="Arial"/>
-              </a:rPr>
-              <a:t>40.56%</a:t>
-            </a:r>
-          </a:p>
-        </p:txBody>
-      </p:sp>
-      <p:sp>
-        <p:nvSpPr>
-          <p:cNvPr id="6" name="">
-            <a:extLst xmlns:a="http://schemas.openxmlformats.org/drawingml/2006/main">
-              <a:ext uri="{FF2B5EF4-FFF2-40B4-BE49-F238E27FC236}">
-                <a16:creationId xmlns:a16="http://schemas.microsoft.com/office/drawing/2014/main" id="{47CF88BF-BF3B-4E55-AA07-C4A29303F0FF}"/>
-              </a:ext>
-            </a:extLst>
-          </p:cNvPr>
-          <p:cNvSpPr>
-            <a:spLocks xmlns:a="http://schemas.openxmlformats.org/drawingml/2006/main" noGrp="1"/>
-          </p:cNvSpPr>
-          <p:nvPr/>
-        </p:nvSpPr>
-        <p:spPr>
-          <a:xfrm xmlns:a="http://schemas.openxmlformats.org/drawingml/2006/main">
-            <a:off x="4610100" y="2362200"/>
-            <a:ext cx="2857500" cy="285750"/>
-          </a:xfrm>
-          <a:prstGeom xmlns:a="http://schemas.openxmlformats.org/drawingml/2006/main" prst="rect">
-            <a:avLst/>
-          </a:prstGeom>
-          <a:noFill xmlns:a="http://schemas.openxmlformats.org/drawingml/2006/main"/>
-          <a:ln xmlns:a="http://schemas.openxmlformats.org/drawingml/2006/main" w="0">
-            <a:noFill/>
-          </a:ln>
-        </p:spPr>
-        <p:txBody>
-          <a:bodyPr xmlns:a="http://schemas.openxmlformats.org/drawingml/2006/main" wrap="square" lIns="0" tIns="0" rIns="0" bIns="0" anchor="t">
-            <a:normAutofit fontScale="100000"/>
-          </a:bodyPr>
-          <a:lstStyle xmlns:a="http://schemas.openxmlformats.org/drawingml/2006/main"/>
-          <a:p xmlns:a="http://schemas.openxmlformats.org/drawingml/2006/main">
-            <a:pPr algn="l">
-              <a:lnSpc>
-                <a:spcPct val="105000"/>
-              </a:lnSpc>
-              <a:buNone/>
-              <a:defRPr sz="1350" b="1" i="0">
-                <a:solidFill>
-                  <a:srgbClr val="4A9BC2"/>
-                </a:solidFill>
-                <a:latin typeface="Arial"/>
-                <a:ea typeface="Arial"/>
-                <a:cs typeface="Arial"/>
-              </a:defRPr>
-            </a:pPr>
-            <a:r>
-              <a:rPr sz="1350" b="1" i="0">
-                <a:solidFill>
-                  <a:srgbClr val="4A9BC2"/>
-                </a:solidFill>
-                <a:latin typeface="Arial"/>
-                <a:ea typeface="Arial"/>
-                <a:cs typeface="Arial"/>
-              </a:rPr>
-              <a:t>cell accuracy</a:t>
-            </a:r>
-          </a:p>
-        </p:txBody>
-      </p:sp>
-      <p:sp>
-        <p:nvSpPr>
-          <p:cNvPr id="7" name="">
-            <a:extLst xmlns:a="http://schemas.openxmlformats.org/drawingml/2006/main">
-              <a:ext uri="{FF2B5EF4-FFF2-40B4-BE49-F238E27FC236}">
-                <a16:creationId xmlns:a16="http://schemas.microsoft.com/office/drawing/2014/main" id="{35BE0F9A-06EC-4FC3-9016-F9ECF407D78F}"/>
-              </a:ext>
-            </a:extLst>
-          </p:cNvPr>
-          <p:cNvSpPr>
-            <a:spLocks xmlns:a="http://schemas.openxmlformats.org/drawingml/2006/main" noGrp="1"/>
-          </p:cNvSpPr>
-          <p:nvPr/>
-        </p:nvSpPr>
-        <p:spPr>
-          <a:xfrm xmlns:a="http://schemas.openxmlformats.org/drawingml/2006/main">
-            <a:off x="8763000" y="1714500"/>
-            <a:ext cx="2381250" cy="571500"/>
-          </a:xfrm>
-          <a:prstGeom xmlns:a="http://schemas.openxmlformats.org/drawingml/2006/main" prst="rect">
-            <a:avLst/>
-          </a:prstGeom>
-          <a:noFill xmlns:a="http://schemas.openxmlformats.org/drawingml/2006/main"/>
-          <a:ln xmlns:a="http://schemas.openxmlformats.org/drawingml/2006/main" w="0">
-            <a:noFill/>
-          </a:ln>
-        </p:spPr>
-        <p:txBody>
-          <a:bodyPr xmlns:a="http://schemas.openxmlformats.org/drawingml/2006/main" wrap="square" lIns="0" tIns="0" rIns="0" bIns="0" anchor="t">
-            <a:normAutofit fontScale="100000"/>
-          </a:bodyPr>
-          <a:lstStyle xmlns:a="http://schemas.openxmlformats.org/drawingml/2006/main"/>
-          <a:p xmlns:a="http://schemas.openxmlformats.org/drawingml/2006/main">
-            <a:pPr algn="r">
-              <a:lnSpc>
-                <a:spcPct val="105000"/>
-              </a:lnSpc>
-              <a:buNone/>
-              <a:defRPr sz="3225" b="1" i="0">
-                <a:solidFill>
-                  <a:srgbClr val="122033"/>
-                </a:solidFill>
-                <a:latin typeface="Arial"/>
-                <a:ea typeface="Arial"/>
-                <a:cs typeface="Arial"/>
-              </a:defRPr>
-            </a:pPr>
-            <a:r>
-              <a:rPr sz="3225" b="1" i="0">
-                <a:solidFill>
-                  <a:srgbClr val="122033"/>
-                </a:solidFill>
-                <a:latin typeface="Arial"/>
-                <a:ea typeface="Arial"/>
-                <a:cs typeface="Arial"/>
-              </a:rPr>
-              <a:t>400/400</a:t>
-            </a:r>
-          </a:p>
-        </p:txBody>
-      </p:sp>
-      <p:sp>
-        <p:nvSpPr>
-          <p:cNvPr id="8" name="">
-            <a:extLst xmlns:a="http://schemas.openxmlformats.org/drawingml/2006/main">
-              <a:ext uri="{FF2B5EF4-FFF2-40B4-BE49-F238E27FC236}">
-                <a16:creationId xmlns:a16="http://schemas.microsoft.com/office/drawing/2014/main" id="{D90919D3-CB5C-497D-9FBF-D257E2FCB623}"/>
-              </a:ext>
-            </a:extLst>
-          </p:cNvPr>
-          <p:cNvSpPr>
-            <a:spLocks xmlns:a="http://schemas.openxmlformats.org/drawingml/2006/main" noGrp="1"/>
-          </p:cNvSpPr>
-          <p:nvPr/>
-        </p:nvSpPr>
-        <p:spPr>
-          <a:xfrm xmlns:a="http://schemas.openxmlformats.org/drawingml/2006/main">
-            <a:off x="7810500" y="2362200"/>
-            <a:ext cx="3333750" cy="285750"/>
-          </a:xfrm>
-          <a:prstGeom xmlns:a="http://schemas.openxmlformats.org/drawingml/2006/main" prst="rect">
-            <a:avLst/>
-          </a:prstGeom>
-          <a:noFill xmlns:a="http://schemas.openxmlformats.org/drawingml/2006/main"/>
-          <a:ln xmlns:a="http://schemas.openxmlformats.org/drawingml/2006/main" w="0">
-            <a:noFill/>
-          </a:ln>
-        </p:spPr>
-        <p:txBody>
-          <a:bodyPr xmlns:a="http://schemas.openxmlformats.org/drawingml/2006/main" wrap="square" lIns="0" tIns="0" rIns="0" bIns="0" anchor="t">
-            <a:normAutofit fontScale="100000"/>
-          </a:bodyPr>
-          <a:lstStyle xmlns:a="http://schemas.openxmlformats.org/drawingml/2006/main"/>
-          <a:p xmlns:a="http://schemas.openxmlformats.org/drawingml/2006/main">
-            <a:pPr algn="r">
-              <a:lnSpc>
-                <a:spcPct val="105000"/>
-              </a:lnSpc>
-              <a:buNone/>
-              <a:defRPr sz="1275" b="0" i="0">
-                <a:solidFill>
-                  <a:srgbClr val="667487"/>
-                </a:solidFill>
-                <a:latin typeface="Arial"/>
-                <a:ea typeface="Arial"/>
-                <a:cs typeface="Arial"/>
-              </a:defRPr>
-            </a:pPr>
-            <a:r>
-              <a:rPr sz="1275" b="0" i="0">
-                <a:solidFill>
-                  <a:srgbClr val="667487"/>
-                </a:solidFill>
-                <a:latin typeface="Arial"/>
-                <a:ea typeface="Arial"/>
-                <a:cs typeface="Arial"/>
-              </a:rPr>
-              <a:t>evaluated · 0 missing · 0 errors</a:t>
-            </a:r>
-          </a:p>
-        </p:txBody>
-      </p:sp>
-      <p:graphicFrame>
-        <p:nvGraphicFramePr>
-          <p:cNvPr id="22" name="Chart"/>
-          <p:cNvGraphicFramePr/>
-          <p:nvPr/>
-        </p:nvGraphicFramePr>
-        <p:xfrm>
-          <a:off xmlns:a="http://schemas.openxmlformats.org/drawingml/2006/main" x="723900" y="3143250"/>
-          <a:ext xmlns:a="http://schemas.openxmlformats.org/drawingml/2006/main" cx="10668000" cy="2552700"/>
-        </p:xfrm>
-        <a:graphic xmlns:a="http://schemas.openxmlformats.org/drawingml/2006/main">
-          <a:graphicData uri="http://schemas.openxmlformats.org/drawingml/2006/chart">
-            <c:chart xmlns:r="http://schemas.openxmlformats.org/officeDocument/2006/relationships" xmlns:c="http://schemas.openxmlformats.org/drawingml/2006/chart" r:id="Rffef5d04e878407b"/>
-          </a:graphicData>
-        </a:graphic>
-      </p:graphicFrame>
-      <p:sp>
-        <p:nvSpPr>
-          <p:cNvPr id="10" name="">
-            <a:extLst xmlns:a="http://schemas.openxmlformats.org/drawingml/2006/main">
-              <a:ext uri="{FF2B5EF4-FFF2-40B4-BE49-F238E27FC236}">
-                <a16:creationId xmlns:a16="http://schemas.microsoft.com/office/drawing/2014/main" id="{3D630D7C-D7A4-4FAF-9028-70264AB225A1}"/>
-              </a:ext>
-            </a:extLst>
-          </p:cNvPr>
-          <p:cNvSpPr>
-            <a:spLocks xmlns:a="http://schemas.openxmlformats.org/drawingml/2006/main" noGrp="1"/>
-          </p:cNvSpPr>
-          <p:nvPr/>
-        </p:nvSpPr>
-        <p:spPr>
-          <a:xfrm xmlns:a="http://schemas.openxmlformats.org/drawingml/2006/main">
-            <a:off x="742950" y="5905500"/>
-            <a:ext cx="7620000" cy="285750"/>
-          </a:xfrm>
-          <a:prstGeom xmlns:a="http://schemas.openxmlformats.org/drawingml/2006/main" prst="rect">
-            <a:avLst/>
-          </a:prstGeom>
-          <a:noFill xmlns:a="http://schemas.openxmlformats.org/drawingml/2006/main"/>
-          <a:ln xmlns:a="http://schemas.openxmlformats.org/drawingml/2006/main" w="0">
-            <a:noFill/>
-          </a:ln>
-        </p:spPr>
-        <p:txBody>
-          <a:bodyPr xmlns:a="http://schemas.openxmlformats.org/drawingml/2006/main" wrap="square" lIns="0" tIns="0" rIns="0" bIns="0" anchor="t">
-            <a:normAutofit fontScale="100000"/>
-          </a:bodyPr>
-          <a:lstStyle xmlns:a="http://schemas.openxmlformats.org/drawingml/2006/main"/>
-          <a:p xmlns:a="http://schemas.openxmlformats.org/drawingml/2006/main">
-            <a:pPr algn="l">
-              <a:lnSpc>
-                <a:spcPct val="105000"/>
-              </a:lnSpc>
-              <a:buNone/>
-              <a:defRPr sz="1350" b="0" i="0">
-                <a:solidFill>
-                  <a:srgbClr val="667487"/>
-                </a:solidFill>
-                <a:latin typeface="Arial"/>
-                <a:ea typeface="Arial"/>
-                <a:cs typeface="Arial"/>
-              </a:defRPr>
-            </a:pPr>
-            <a:r>
-              <a:rPr sz="1350" b="0" i="0">
-                <a:solidFill>
-                  <a:srgbClr val="667487"/>
-                </a:solidFill>
-                <a:latin typeface="Arial"/>
-                <a:ea typeface="Arial"/>
-                <a:cs typeface="Arial"/>
-              </a:rPr>
-              <a:t>120,824 of 297,882 target cells matched the golden workbook.</a:t>
-            </a:r>
-          </a:p>
-        </p:txBody>
-      </p:sp>
-      <p:sp>
-        <p:nvSpPr>
-          <p:cNvPr id="11" name="">
-            <a:extLst xmlns:a="http://schemas.openxmlformats.org/drawingml/2006/main">
-              <a:ext uri="{FF2B5EF4-FFF2-40B4-BE49-F238E27FC236}">
-                <a16:creationId xmlns:a16="http://schemas.microsoft.com/office/drawing/2014/main" id="{CA7ECA9F-33D9-47EF-84F1-0E80BCD906F4}"/>
-              </a:ext>
-            </a:extLst>
-          </p:cNvPr>
-          <p:cNvSpPr>
-            <a:spLocks xmlns:a="http://schemas.openxmlformats.org/drawingml/2006/main" noGrp="1"/>
-          </p:cNvSpPr>
-          <p:nvPr/>
-        </p:nvSpPr>
-        <p:spPr>
-          <a:xfrm xmlns:a="http://schemas.openxmlformats.org/drawingml/2006/main">
-            <a:off x="609600" y="6429375"/>
-            <a:ext cx="10972800" cy="0"/>
-          </a:xfrm>
-          <a:prstGeom xmlns:a="http://schemas.openxmlformats.org/drawingml/2006/main" prst="line">
-            <a:avLst/>
-          </a:prstGeom>
-          <a:noFill xmlns:a="http://schemas.openxmlformats.org/drawingml/2006/main"/>
-          <a:ln xmlns:a="http://schemas.openxmlformats.org/drawingml/2006/main" w="9525">
-            <a:solidFill>
-              <a:srgbClr val="C9D1D9"/>
-            </a:solidFill>
-            <a:prstDash val="solid"/>
-          </a:ln>
-        </p:spPr>
-      </p:sp>
-      <p:sp>
-        <p:nvSpPr>
-          <p:cNvPr id="12" name="">
-            <a:extLst xmlns:a="http://schemas.openxmlformats.org/drawingml/2006/main">
-              <a:ext uri="{FF2B5EF4-FFF2-40B4-BE49-F238E27FC236}">
-                <a16:creationId xmlns:a16="http://schemas.microsoft.com/office/drawing/2014/main" id="{D687846E-F2B1-4533-8C95-A22F35C5748B}"/>
-              </a:ext>
-            </a:extLst>
-          </p:cNvPr>
-          <p:cNvSpPr>
-            <a:spLocks xmlns:a="http://schemas.openxmlformats.org/drawingml/2006/main" noGrp="1"/>
-          </p:cNvSpPr>
-          <p:nvPr/>
-        </p:nvSpPr>
-        <p:spPr>
-          <a:xfrm xmlns:a="http://schemas.openxmlformats.org/drawingml/2006/main">
-            <a:off x="609600" y="6553200"/>
-            <a:ext cx="6191250" cy="171450"/>
-          </a:xfrm>
-          <a:prstGeom xmlns:a="http://schemas.openxmlformats.org/drawingml/2006/main" prst="rect">
-            <a:avLst/>
-          </a:prstGeom>
-          <a:noFill xmlns:a="http://schemas.openxmlformats.org/drawingml/2006/main"/>
-          <a:ln xmlns:a="http://schemas.openxmlformats.org/drawingml/2006/main" w="0">
-            <a:noFill/>
-          </a:ln>
-        </p:spPr>
-        <p:txBody>
-          <a:bodyPr xmlns:a="http://schemas.openxmlformats.org/drawingml/2006/main" wrap="square" lIns="0" tIns="0" rIns="0" bIns="0" anchor="ctr">
-            <a:normAutofit fontScale="100000"/>
-          </a:bodyPr>
-          <a:lstStyle xmlns:a="http://schemas.openxmlformats.org/drawingml/2006/main"/>
-          <a:p xmlns:a="http://schemas.openxmlformats.org/drawingml/2006/main">
-            <a:pPr algn="l">
-              <a:lnSpc>
-                <a:spcPct val="105000"/>
-              </a:lnSpc>
-              <a:buNone/>
-              <a:defRPr sz="900" b="1" i="0">
-                <a:solidFill>
-                  <a:srgbClr val="667487"/>
-                </a:solidFill>
-                <a:latin typeface="Arial"/>
-                <a:ea typeface="Arial"/>
-                <a:cs typeface="Arial"/>
-              </a:defRPr>
-            </a:pPr>
-            <a:r>
-              <a:rPr sz="900" b="1" i="0">
-                <a:solidFill>
-                  <a:srgbClr val="667487"/>
-                </a:solidFill>
-                <a:latin typeface="Arial"/>
-                <a:ea typeface="Arial"/>
-                <a:cs typeface="Arial"/>
-              </a:rPr>
-              <a:t>FORMULABENCH  ·  RESEARCH / TRACK 2</a:t>
-            </a:r>
-          </a:p>
-        </p:txBody>
-      </p:sp>
-      <p:sp>
-        <p:nvSpPr>
-          <p:cNvPr id="13" name="">
-            <a:extLst xmlns:a="http://schemas.openxmlformats.org/drawingml/2006/main">
-              <a:ext uri="{FF2B5EF4-FFF2-40B4-BE49-F238E27FC236}">
-                <a16:creationId xmlns:a16="http://schemas.microsoft.com/office/drawing/2014/main" id="{10AB08E1-E4D9-45B0-95FE-208AA018AB92}"/>
-              </a:ext>
-            </a:extLst>
-          </p:cNvPr>
-          <p:cNvSpPr>
-            <a:spLocks xmlns:a="http://schemas.openxmlformats.org/drawingml/2006/main" noGrp="1"/>
-          </p:cNvSpPr>
-          <p:nvPr/>
-        </p:nvSpPr>
-        <p:spPr>
-          <a:xfrm xmlns:a="http://schemas.openxmlformats.org/drawingml/2006/main">
-            <a:off x="11049000" y="6553200"/>
-            <a:ext cx="533400" cy="171450"/>
-          </a:xfrm>
-          <a:prstGeom xmlns:a="http://schemas.openxmlformats.org/drawingml/2006/main" prst="rect">
-            <a:avLst/>
-          </a:prstGeom>
-          <a:noFill xmlns:a="http://schemas.openxmlformats.org/drawingml/2006/main"/>
-          <a:ln xmlns:a="http://schemas.openxmlformats.org/drawingml/2006/main" w="0">
-            <a:noFill/>
-          </a:ln>
-        </p:spPr>
-        <p:txBody>
-          <a:bodyPr xmlns:a="http://schemas.openxmlformats.org/drawingml/2006/main" wrap="square" lIns="0" tIns="0" rIns="0" bIns="0" anchor="ctr">
-            <a:normAutofit fontScale="100000"/>
-          </a:bodyPr>
-          <a:lstStyle xmlns:a="http://schemas.openxmlformats.org/drawingml/2006/main"/>
-          <a:p xmlns:a="http://schemas.openxmlformats.org/drawingml/2006/main">
-            <a:pPr algn="r">
-              <a:lnSpc>
-                <a:spcPct val="105000"/>
-              </a:lnSpc>
-              <a:buNone/>
-              <a:defRPr sz="900" b="1" i="0">
-                <a:solidFill>
-                  <a:srgbClr val="667487"/>
-                </a:solidFill>
-                <a:latin typeface="Arial"/>
-                <a:ea typeface="Arial"/>
-                <a:cs typeface="Arial"/>
-              </a:defRPr>
-            </a:pPr>
-            <a:r>
-              <a:rPr sz="900" b="1" i="0">
-                <a:solidFill>
-                  <a:srgbClr val="667487"/>
-                </a:solidFill>
-                <a:latin typeface="Arial"/>
-                <a:ea typeface="Arial"/>
-                <a:cs typeface="Arial"/>
-              </a:rPr>
-              <a:t>05</a:t>
-            </a:r>
-          </a:p>
-        </p:txBody>
-      </p:sp>
-    </p:spTree>
-    <p:extLst>
-      <p:ext uri="{BB962C8B-B14F-4D97-AF65-F5344CB8AC3E}">
-        <p14:creationId xmlns:p14="http://schemas.microsoft.com/office/powerpoint/2010/main" val="877658817"/>
+        <p14:creationId xmlns:p14="http://schemas.microsoft.com/office/powerpoint/2010/main" val="1200794271"/>
       </p:ext>
     </p:extLst>
   </p:cSld>
@@ -7239,7 +7361,7 @@
           <p:cNvPr id="14" name="slide-title">
             <a:extLst xmlns:a="http://schemas.openxmlformats.org/drawingml/2006/main">
               <a:ext uri="{FF2B5EF4-FFF2-40B4-BE49-F238E27FC236}">
-                <a16:creationId xmlns:a16="http://schemas.microsoft.com/office/drawing/2014/main" id="{6399B9E7-74E3-4C98-B36F-F1FD3EE4B7EE}"/>
+                <a16:creationId xmlns:a16="http://schemas.microsoft.com/office/drawing/2014/main" id="{689BA516-2213-496F-9363-6208C6577F87}"/>
               </a:ext>
             </a:extLst>
           </p:cNvPr>
@@ -7272,7 +7394,7 @@
                 <a:spcPct val="105000"/>
               </a:lnSpc>
               <a:buNone/>
-              <a:defRPr sz="3300" b="1" i="0">
+              <a:defRPr sz="3150" b="1" i="0">
                 <a:solidFill>
                   <a:srgbClr val="122033"/>
                 </a:solidFill>
@@ -7282,7 +7404,7 @@
               </a:defRPr>
             </a:pPr>
             <a:r>
-              <a:rPr sz="3300" b="1" i="0">
+              <a:rPr sz="3150" b="1" i="0">
                 <a:solidFill>
                   <a:srgbClr val="122033"/>
                 </a:solidFill>
@@ -7290,7 +7412,7 @@
                 <a:ea typeface="Arial"/>
                 <a:cs typeface="Arial"/>
               </a:rPr>
-              <a:t>Most wrong cells came from accepted workbooks</a:t>
+              <a:t>Most wrong cells were in structurally valid responses</a:t>
             </a:r>
           </a:p>
         </p:txBody>
@@ -7300,7 +7422,7 @@
           <p:cNvPr id="2" name="">
             <a:extLst xmlns:a="http://schemas.openxmlformats.org/drawingml/2006/main">
               <a:ext uri="{FF2B5EF4-FFF2-40B4-BE49-F238E27FC236}">
-                <a16:creationId xmlns:a16="http://schemas.microsoft.com/office/drawing/2014/main" id="{CBB8B93F-8B31-43EB-B8D8-119B1D74C738}"/>
+                <a16:creationId xmlns:a16="http://schemas.microsoft.com/office/drawing/2014/main" id="{5FEECD80-0C79-4710-A7B5-811F4E849C0B}"/>
               </a:ext>
             </a:extLst>
           </p:cNvPr>
@@ -7312,7 +7434,7 @@
         <p:spPr>
           <a:xfrm xmlns:a="http://schemas.openxmlformats.org/drawingml/2006/main">
             <a:off x="609600" y="1028700"/>
-            <a:ext cx="10191750" cy="361950"/>
+            <a:ext cx="10668000" cy="533400"/>
           </a:xfrm>
           <a:prstGeom xmlns:a="http://schemas.openxmlformats.org/drawingml/2006/main" prst="rect">
             <a:avLst/>
@@ -7324,7 +7446,7 @@
         </p:spPr>
         <p:txBody>
           <a:bodyPr xmlns:a="http://schemas.openxmlformats.org/drawingml/2006/main" wrap="square" lIns="0" tIns="0" rIns="0" bIns="0" anchor="t">
-            <a:normAutofit fontScale="100000"/>
+            <a:normAutofit fontScale="97037"/>
           </a:bodyPr>
           <a:lstStyle xmlns:a="http://schemas.openxmlformats.org/drawingml/2006/main"/>
           <a:p xmlns:a="http://schemas.openxmlformats.org/drawingml/2006/main">
@@ -7351,7 +7473,7 @@
                 <a:ea typeface="Arial"/>
                 <a:cs typeface="Arial"/>
               </a:rPr>
-              <a:t>Strict rejection explains 5.16% of wrong cells. Semantic errors explain the rest.</a:t>
+              <a:t>Responses that passed structural checks contained 94.84% of wrong cells. Rejected responses contained 5.16%.</a:t>
             </a:r>
           </a:p>
         </p:txBody>
@@ -7368,7 +7490,7 @@
         </p:xfrm>
         <a:graphic xmlns:a="http://schemas.openxmlformats.org/drawingml/2006/main">
           <a:graphicData uri="http://schemas.openxmlformats.org/drawingml/2006/chart">
-            <c:chart xmlns:r="http://schemas.openxmlformats.org/officeDocument/2006/relationships" xmlns:c="http://schemas.openxmlformats.org/drawingml/2006/chart" r:id="Rbdd45ee25fe5465d"/>
+            <c:chart xmlns:r="http://schemas.openxmlformats.org/officeDocument/2006/relationships" xmlns:c="http://schemas.openxmlformats.org/drawingml/2006/chart" r:id="Ra6cd158e5f2c4ee8"/>
           </a:graphicData>
         </a:graphic>
       </p:graphicFrame>
@@ -7377,7 +7499,7 @@
           <p:cNvPr id="4" name="">
             <a:extLst xmlns:a="http://schemas.openxmlformats.org/drawingml/2006/main">
               <a:ext uri="{FF2B5EF4-FFF2-40B4-BE49-F238E27FC236}">
-                <a16:creationId xmlns:a16="http://schemas.microsoft.com/office/drawing/2014/main" id="{B575EA10-0749-43B8-A96F-516AE3D41E6B}"/>
+                <a16:creationId xmlns:a16="http://schemas.microsoft.com/office/drawing/2014/main" id="{209E82BD-043A-401B-B844-3F3965E39D1C}"/>
               </a:ext>
             </a:extLst>
           </p:cNvPr>
@@ -7438,7 +7560,7 @@
           <p:cNvPr id="5" name="">
             <a:extLst xmlns:a="http://schemas.openxmlformats.org/drawingml/2006/main">
               <a:ext uri="{FF2B5EF4-FFF2-40B4-BE49-F238E27FC236}">
-                <a16:creationId xmlns:a16="http://schemas.microsoft.com/office/drawing/2014/main" id="{12576BEA-E974-4694-9FB0-3E707B6B4C42}"/>
+                <a16:creationId xmlns:a16="http://schemas.microsoft.com/office/drawing/2014/main" id="{79E3E75A-695E-4952-83E2-8213916499E9}"/>
               </a:ext>
             </a:extLst>
           </p:cNvPr>
@@ -7489,7 +7611,7 @@
                 <a:ea typeface="Arial"/>
                 <a:cs typeface="Arial"/>
               </a:rPr>
-              <a:t>of wrong cells sit inside 221 responses that passed the structural contract.</a:t>
+              <a:t>221 structurally valid responses still contained incorrect cells.</a:t>
             </a:r>
           </a:p>
         </p:txBody>
@@ -7499,7 +7621,7 @@
           <p:cNvPr id="6" name="">
             <a:extLst xmlns:a="http://schemas.openxmlformats.org/drawingml/2006/main">
               <a:ext uri="{FF2B5EF4-FFF2-40B4-BE49-F238E27FC236}">
-                <a16:creationId xmlns:a16="http://schemas.microsoft.com/office/drawing/2014/main" id="{8661592D-E99E-4739-A10D-B46410294E26}"/>
+                <a16:creationId xmlns:a16="http://schemas.microsoft.com/office/drawing/2014/main" id="{8CC4E20E-CCB4-4B7A-9B3E-0CE4FE59CC3E}"/>
               </a:ext>
             </a:extLst>
           </p:cNvPr>
@@ -7530,7 +7652,7 @@
           <p:cNvPr id="7" name="">
             <a:extLst xmlns:a="http://schemas.openxmlformats.org/drawingml/2006/main">
               <a:ext uri="{FF2B5EF4-FFF2-40B4-BE49-F238E27FC236}">
-                <a16:creationId xmlns:a16="http://schemas.microsoft.com/office/drawing/2014/main" id="{ABEF54AA-517C-4D70-90D8-D4F85DBFD7AC}"/>
+                <a16:creationId xmlns:a16="http://schemas.microsoft.com/office/drawing/2014/main" id="{C5E53A0A-98C9-476B-B61A-54A9161B6503}"/>
               </a:ext>
             </a:extLst>
           </p:cNvPr>
@@ -7591,7 +7713,7 @@
           <p:cNvPr id="8" name="">
             <a:extLst xmlns:a="http://schemas.openxmlformats.org/drawingml/2006/main">
               <a:ext uri="{FF2B5EF4-FFF2-40B4-BE49-F238E27FC236}">
-                <a16:creationId xmlns:a16="http://schemas.microsoft.com/office/drawing/2014/main" id="{DC2307E1-12DF-44AB-B999-C3609A008398}"/>
+                <a16:creationId xmlns:a16="http://schemas.microsoft.com/office/drawing/2014/main" id="{336E72AD-7301-400F-B909-8F1E7119B12C}"/>
               </a:ext>
             </a:extLst>
           </p:cNvPr>
@@ -7642,7 +7764,7 @@
                 <a:ea typeface="Arial"/>
                 <a:cs typeface="Arial"/>
               </a:rPr>
-              <a:t>of all wrong cells came from the four transformations with more than 10,000 target cells.</a:t>
+              <a:t>of all wrong cells came from four transformations with more than 10,000 target cells.</a:t>
             </a:r>
           </a:p>
         </p:txBody>
@@ -7652,7 +7774,7 @@
           <p:cNvPr id="9" name="">
             <a:extLst xmlns:a="http://schemas.openxmlformats.org/drawingml/2006/main">
               <a:ext uri="{FF2B5EF4-FFF2-40B4-BE49-F238E27FC236}">
-                <a16:creationId xmlns:a16="http://schemas.microsoft.com/office/drawing/2014/main" id="{17CEC0D3-EBA6-433C-91EA-0D9DAEBC78CC}"/>
+                <a16:creationId xmlns:a16="http://schemas.microsoft.com/office/drawing/2014/main" id="{353405E8-1A0A-4D34-9682-3E07720C9A13}"/>
               </a:ext>
             </a:extLst>
           </p:cNvPr>
@@ -7703,7 +7825,7 @@
                 <a:ea typeface="Arial"/>
                 <a:cs typeface="Arial"/>
               </a:rPr>
-              <a:t>Context truncated: 24.10% passed</a:t>
+              <a:t>Context truncation pass rate: 24.10%</a:t>
             </a:r>
           </a:p>
           <a:p xmlns:a="http://schemas.openxmlformats.org/drawingml/2006/main">
@@ -7730,7 +7852,7 @@
                 <a:ea typeface="Arial"/>
                 <a:cs typeface="Arial"/>
               </a:rPr>
-              <a:t>Context not truncated: 41.95% passed</a:t>
+              <a:t>No truncation pass rate: 41.95%</a:t>
             </a:r>
           </a:p>
         </p:txBody>
@@ -7740,7 +7862,7 @@
           <p:cNvPr id="10" name="">
             <a:extLst xmlns:a="http://schemas.openxmlformats.org/drawingml/2006/main">
               <a:ext uri="{FF2B5EF4-FFF2-40B4-BE49-F238E27FC236}">
-                <a16:creationId xmlns:a16="http://schemas.microsoft.com/office/drawing/2014/main" id="{F5FEE235-E1FD-49AB-A901-E3BAC81A0209}"/>
+                <a16:creationId xmlns:a16="http://schemas.microsoft.com/office/drawing/2014/main" id="{41C2428C-7ECF-4E59-B891-DE23AFE30AE2}"/>
               </a:ext>
             </a:extLst>
           </p:cNvPr>
@@ -7801,7 +7923,7 @@
           <p:cNvPr id="11" name="">
             <a:extLst xmlns:a="http://schemas.openxmlformats.org/drawingml/2006/main">
               <a:ext uri="{FF2B5EF4-FFF2-40B4-BE49-F238E27FC236}">
-                <a16:creationId xmlns:a16="http://schemas.microsoft.com/office/drawing/2014/main" id="{948A4D04-AE46-4370-AB0B-79EFE431782D}"/>
+                <a16:creationId xmlns:a16="http://schemas.microsoft.com/office/drawing/2014/main" id="{29DE7052-49E5-4F2D-B3DE-25645D08F636}"/>
               </a:ext>
             </a:extLst>
           </p:cNvPr>
@@ -7832,7 +7954,7 @@
           <p:cNvPr id="12" name="">
             <a:extLst xmlns:a="http://schemas.openxmlformats.org/drawingml/2006/main">
               <a:ext uri="{FF2B5EF4-FFF2-40B4-BE49-F238E27FC236}">
-                <a16:creationId xmlns:a16="http://schemas.microsoft.com/office/drawing/2014/main" id="{5D73E238-E7E5-4726-AE14-307D91EEC8FF}"/>
+                <a16:creationId xmlns:a16="http://schemas.microsoft.com/office/drawing/2014/main" id="{73E31585-B7D1-481E-909C-B11A7142489A}"/>
               </a:ext>
             </a:extLst>
           </p:cNvPr>
@@ -7893,7 +8015,7 @@
           <p:cNvPr id="13" name="">
             <a:extLst xmlns:a="http://schemas.openxmlformats.org/drawingml/2006/main">
               <a:ext uri="{FF2B5EF4-FFF2-40B4-BE49-F238E27FC236}">
-                <a16:creationId xmlns:a16="http://schemas.microsoft.com/office/drawing/2014/main" id="{F81A3F46-A09A-4756-B42E-E4B2DABBB5FE}"/>
+                <a16:creationId xmlns:a16="http://schemas.microsoft.com/office/drawing/2014/main" id="{18DD0D77-DA2C-4FA4-890E-37A12C0A99A2}"/>
               </a:ext>
             </a:extLst>
           </p:cNvPr>
@@ -7952,7 +8074,7 @@
     </p:spTree>
     <p:extLst>
       <p:ext uri="{BB962C8B-B14F-4D97-AF65-F5344CB8AC3E}">
-        <p14:creationId xmlns:p14="http://schemas.microsoft.com/office/powerpoint/2010/main" val="1701044749"/>
+        <p14:creationId xmlns:p14="http://schemas.microsoft.com/office/powerpoint/2010/main" val="955302236"/>
       </p:ext>
     </p:extLst>
   </p:cSld>
@@ -7980,10 +8102,10 @@
       </p:grpSpPr>
       <p:sp>
         <p:nvSpPr>
-          <p:cNvPr id="14" name="slide-title">
-            <a:extLst xmlns:a="http://schemas.openxmlformats.org/drawingml/2006/main">
-              <a:ext uri="{FF2B5EF4-FFF2-40B4-BE49-F238E27FC236}">
-                <a16:creationId xmlns:a16="http://schemas.microsoft.com/office/drawing/2014/main" id="{71C7EF5A-4BD4-431E-8418-F5D6C1367FFC}"/>
+          <p:cNvPr id="12" name="slide-title">
+            <a:extLst xmlns:a="http://schemas.openxmlformats.org/drawingml/2006/main">
+              <a:ext uri="{FF2B5EF4-FFF2-40B4-BE49-F238E27FC236}">
+                <a16:creationId xmlns:a16="http://schemas.microsoft.com/office/drawing/2014/main" id="{597500CD-8E6F-4A7F-B92F-05E0B1D919B9}"/>
               </a:ext>
             </a:extLst>
           </p:cNvPr>
@@ -8007,7 +8129,7 @@
         </p:spPr>
         <p:txBody>
           <a:bodyPr xmlns:a="http://schemas.openxmlformats.org/drawingml/2006/main" wrap="square" lIns="0" tIns="0" rIns="0" bIns="0" anchor="t">
-            <a:normAutofit fontScale="83426"/>
+            <a:normAutofit fontScale="80599"/>
           </a:bodyPr>
           <a:lstStyle xmlns:a="http://schemas.openxmlformats.org/drawingml/2006/main"/>
           <a:p xmlns:a="http://schemas.openxmlformats.org/drawingml/2006/main">
@@ -8034,7 +8156,7 @@
                 <a:ea typeface="Arial"/>
                 <a:cs typeface="Arial"/>
               </a:rPr>
-              <a:t>The organiser reference and FormulaBench test different systems</a:t>
+              <a:t>Organiser reference and FormulaBench use different test conditions</a:t>
             </a:r>
           </a:p>
         </p:txBody>
@@ -8044,7 +8166,7 @@
           <p:cNvPr id="2" name="">
             <a:extLst xmlns:a="http://schemas.openxmlformats.org/drawingml/2006/main">
               <a:ext uri="{FF2B5EF4-FFF2-40B4-BE49-F238E27FC236}">
-                <a16:creationId xmlns:a16="http://schemas.microsoft.com/office/drawing/2014/main" id="{3610EA32-85E7-482D-BF76-D934D8C8F98F}"/>
+                <a16:creationId xmlns:a16="http://schemas.microsoft.com/office/drawing/2014/main" id="{E6F37C66-CB06-42D3-8EB0-C7A3A20567F3}"/>
               </a:ext>
             </a:extLst>
           </p:cNvPr>
@@ -8095,7 +8217,7 @@
                 <a:ea typeface="Arial"/>
                 <a:cs typeface="Arial"/>
               </a:rPr>
-              <a:t>The reported pass rates should not support a controlled causal comparison.</a:t>
+              <a:t>The base model is the same. The inference setup and requested output differ.</a:t>
             </a:r>
           </a:p>
         </p:txBody>
@@ -8105,7 +8227,7 @@
           <p:cNvPr id="3" name="">
             <a:extLst xmlns:a="http://schemas.openxmlformats.org/drawingml/2006/main">
               <a:ext uri="{FF2B5EF4-FFF2-40B4-BE49-F238E27FC236}">
-                <a16:creationId xmlns:a16="http://schemas.microsoft.com/office/drawing/2014/main" id="{1D1DD180-D4DE-46E0-A826-76438E0640DF}"/>
+                <a16:creationId xmlns:a16="http://schemas.microsoft.com/office/drawing/2014/main" id="{3B1420E9-843E-4DC4-9DAA-D64AA2BC0EAC}"/>
               </a:ext>
             </a:extLst>
           </p:cNvPr>
@@ -8166,7 +8288,7 @@
           <p:cNvPr id="4" name="">
             <a:extLst xmlns:a="http://schemas.openxmlformats.org/drawingml/2006/main">
               <a:ext uri="{FF2B5EF4-FFF2-40B4-BE49-F238E27FC236}">
-                <a16:creationId xmlns:a16="http://schemas.microsoft.com/office/drawing/2014/main" id="{73D92C36-1268-4211-B723-A58C67B3503B}"/>
+                <a16:creationId xmlns:a16="http://schemas.microsoft.com/office/drawing/2014/main" id="{FE3CA152-2CC8-4FAB-B233-25748452E51D}"/>
               </a:ext>
             </a:extLst>
           </p:cNvPr>
@@ -8227,18 +8349,18 @@
           <p:cNvPr id="5" name="">
             <a:extLst xmlns:a="http://schemas.openxmlformats.org/drawingml/2006/main">
               <a:ext uri="{FF2B5EF4-FFF2-40B4-BE49-F238E27FC236}">
-                <a16:creationId xmlns:a16="http://schemas.microsoft.com/office/drawing/2014/main" id="{A7381B3E-BA82-4B2D-944F-35E5794CA3CC}"/>
-              </a:ext>
-            </a:extLst>
-          </p:cNvPr>
-          <p:cNvSpPr>
-            <a:spLocks xmlns:a="http://schemas.openxmlformats.org/drawingml/2006/main" noGrp="1"/>
-          </p:cNvSpPr>
-          <p:nvPr/>
-        </p:nvSpPr>
-        <p:spPr>
-          <a:xfrm xmlns:a="http://schemas.openxmlformats.org/drawingml/2006/main">
-            <a:off x="4095750" y="1619250"/>
+                <a16:creationId xmlns:a16="http://schemas.microsoft.com/office/drawing/2014/main" id="{E3464BBE-47B7-44EA-988C-4CC771B51850}"/>
+              </a:ext>
+            </a:extLst>
+          </p:cNvPr>
+          <p:cNvSpPr>
+            <a:spLocks xmlns:a="http://schemas.openxmlformats.org/drawingml/2006/main" noGrp="1"/>
+          </p:cNvSpPr>
+          <p:nvPr/>
+        </p:nvSpPr>
+        <p:spPr>
+          <a:xfrm xmlns:a="http://schemas.openxmlformats.org/drawingml/2006/main">
+            <a:off x="6191250" y="1619250"/>
             <a:ext cx="2857500" cy="685800"/>
           </a:xfrm>
           <a:prstGeom xmlns:a="http://schemas.openxmlformats.org/drawingml/2006/main" prst="rect">
@@ -8288,18 +8410,18 @@
           <p:cNvPr id="6" name="">
             <a:extLst xmlns:a="http://schemas.openxmlformats.org/drawingml/2006/main">
               <a:ext uri="{FF2B5EF4-FFF2-40B4-BE49-F238E27FC236}">
-                <a16:creationId xmlns:a16="http://schemas.microsoft.com/office/drawing/2014/main" id="{67FA2103-ACA0-4F6D-AA9C-01FD20C3A261}"/>
-              </a:ext>
-            </a:extLst>
-          </p:cNvPr>
-          <p:cNvSpPr>
-            <a:spLocks xmlns:a="http://schemas.openxmlformats.org/drawingml/2006/main" noGrp="1"/>
-          </p:cNvSpPr>
-          <p:nvPr/>
-        </p:nvSpPr>
-        <p:spPr>
-          <a:xfrm xmlns:a="http://schemas.openxmlformats.org/drawingml/2006/main">
-            <a:off x="4133850" y="2286000"/>
+                <a16:creationId xmlns:a16="http://schemas.microsoft.com/office/drawing/2014/main" id="{872538B5-C26E-464E-904E-E2FE1BD1AEDB}"/>
+              </a:ext>
+            </a:extLst>
+          </p:cNvPr>
+          <p:cNvSpPr>
+            <a:spLocks xmlns:a="http://schemas.openxmlformats.org/drawingml/2006/main" noGrp="1"/>
+          </p:cNvSpPr>
+          <p:nvPr/>
+        </p:nvSpPr>
+        <p:spPr>
+          <a:xfrm xmlns:a="http://schemas.openxmlformats.org/drawingml/2006/main">
+            <a:off x="6229350" y="2286000"/>
             <a:ext cx="3429000" cy="285750"/>
           </a:xfrm>
           <a:prstGeom xmlns:a="http://schemas.openxmlformats.org/drawingml/2006/main" prst="rect">
@@ -8344,131 +8466,9 @@
           </a:p>
         </p:txBody>
       </p:sp>
-      <p:sp>
-        <p:nvSpPr>
-          <p:cNvPr id="7" name="">
-            <a:extLst xmlns:a="http://schemas.openxmlformats.org/drawingml/2006/main">
-              <a:ext uri="{FF2B5EF4-FFF2-40B4-BE49-F238E27FC236}">
-                <a16:creationId xmlns:a16="http://schemas.microsoft.com/office/drawing/2014/main" id="{851E9169-4031-46C7-B67A-EC4A1F571F36}"/>
-              </a:ext>
-            </a:extLst>
-          </p:cNvPr>
-          <p:cNvSpPr>
-            <a:spLocks xmlns:a="http://schemas.openxmlformats.org/drawingml/2006/main" noGrp="1"/>
-          </p:cNvSpPr>
-          <p:nvPr/>
-        </p:nvSpPr>
-        <p:spPr>
-          <a:xfrm xmlns:a="http://schemas.openxmlformats.org/drawingml/2006/main">
-            <a:off x="9096375" y="1781175"/>
-            <a:ext cx="2381250" cy="304800"/>
-          </a:xfrm>
-          <a:prstGeom xmlns:a="http://schemas.openxmlformats.org/drawingml/2006/main" prst="rect">
-            <a:avLst/>
-          </a:prstGeom>
-          <a:noFill xmlns:a="http://schemas.openxmlformats.org/drawingml/2006/main"/>
-          <a:ln xmlns:a="http://schemas.openxmlformats.org/drawingml/2006/main" w="0">
-            <a:noFill/>
-          </a:ln>
-        </p:spPr>
-        <p:txBody>
-          <a:bodyPr xmlns:a="http://schemas.openxmlformats.org/drawingml/2006/main" wrap="square" lIns="0" tIns="0" rIns="0" bIns="0" anchor="t">
-            <a:normAutofit fontScale="100000"/>
-          </a:bodyPr>
-          <a:lstStyle xmlns:a="http://schemas.openxmlformats.org/drawingml/2006/main"/>
-          <a:p xmlns:a="http://schemas.openxmlformats.org/drawingml/2006/main">
-            <a:pPr algn="r">
-              <a:lnSpc>
-                <a:spcPct val="105000"/>
-              </a:lnSpc>
-              <a:buNone/>
-              <a:defRPr sz="1650" b="1" i="0">
-                <a:solidFill>
-                  <a:srgbClr val="122033"/>
-                </a:solidFill>
-                <a:latin typeface="Arial"/>
-                <a:ea typeface="Arial"/>
-                <a:cs typeface="Arial"/>
-              </a:defRPr>
-            </a:pPr>
-            <a:r>
-              <a:rPr sz="1650" b="1" i="0">
-                <a:solidFill>
-                  <a:srgbClr val="122033"/>
-                </a:solidFill>
-                <a:latin typeface="Arial"/>
-                <a:ea typeface="Arial"/>
-                <a:cs typeface="Arial"/>
-              </a:rPr>
-              <a:t>Same base model</a:t>
-            </a:r>
-          </a:p>
-        </p:txBody>
-      </p:sp>
-      <p:sp>
-        <p:nvSpPr>
-          <p:cNvPr id="8" name="">
-            <a:extLst xmlns:a="http://schemas.openxmlformats.org/drawingml/2006/main">
-              <a:ext uri="{FF2B5EF4-FFF2-40B4-BE49-F238E27FC236}">
-                <a16:creationId xmlns:a16="http://schemas.microsoft.com/office/drawing/2014/main" id="{09AE9D08-6CFC-47FC-B410-D792FE94A408}"/>
-              </a:ext>
-            </a:extLst>
-          </p:cNvPr>
-          <p:cNvSpPr>
-            <a:spLocks xmlns:a="http://schemas.openxmlformats.org/drawingml/2006/main" noGrp="1"/>
-          </p:cNvSpPr>
-          <p:nvPr/>
-        </p:nvSpPr>
-        <p:spPr>
-          <a:xfrm xmlns:a="http://schemas.openxmlformats.org/drawingml/2006/main">
-            <a:off x="7858125" y="2162175"/>
-            <a:ext cx="3619500" cy="476250"/>
-          </a:xfrm>
-          <a:prstGeom xmlns:a="http://schemas.openxmlformats.org/drawingml/2006/main" prst="rect">
-            <a:avLst/>
-          </a:prstGeom>
-          <a:noFill xmlns:a="http://schemas.openxmlformats.org/drawingml/2006/main"/>
-          <a:ln xmlns:a="http://schemas.openxmlformats.org/drawingml/2006/main" w="0">
-            <a:noFill/>
-          </a:ln>
-        </p:spPr>
-        <p:txBody>
-          <a:bodyPr xmlns:a="http://schemas.openxmlformats.org/drawingml/2006/main" wrap="square" lIns="0" tIns="0" rIns="0" bIns="0" anchor="t">
-            <a:normAutofit fontScale="100000"/>
-          </a:bodyPr>
-          <a:lstStyle xmlns:a="http://schemas.openxmlformats.org/drawingml/2006/main"/>
-          <a:p xmlns:a="http://schemas.openxmlformats.org/drawingml/2006/main">
-            <a:pPr algn="r">
-              <a:lnSpc>
-                <a:spcPct val="105000"/>
-              </a:lnSpc>
-              <a:buNone/>
-              <a:defRPr sz="1350" b="0" i="0">
-                <a:solidFill>
-                  <a:srgbClr val="667487"/>
-                </a:solidFill>
-                <a:latin typeface="Arial"/>
-                <a:ea typeface="Arial"/>
-                <a:cs typeface="Arial"/>
-              </a:defRPr>
-            </a:pPr>
-            <a:r>
-              <a:rPr sz="1350" b="0" i="0">
-                <a:solidFill>
-                  <a:srgbClr val="667487"/>
-                </a:solidFill>
-                <a:latin typeface="Arial"/>
-                <a:ea typeface="Arial"/>
-                <a:cs typeface="Arial"/>
-              </a:rPr>
-              <a:t>Different inference and output contracts</a:t>
-            </a:r>
-          </a:p>
-        </p:txBody>
-      </p:sp>
       <p:graphicFrame>
         <p:nvGraphicFramePr>
-          <p:cNvPr id="22" name=""/>
+          <p:cNvPr id="18" name=""/>
           <p:cNvGraphicFramePr/>
           <p:nvPr/>
         </p:nvGraphicFramePr>
@@ -8729,7 +8729,7 @@
                           <a:ea typeface="Arial"/>
                           <a:cs typeface="Arial"/>
                         </a:rPr>
-                        <a:t>Thinking disabled, temperature 0, one native Tinker sample</a:t>
+                        <a:t>One native Tinker sample at temperature 0 with thinking disabled</a:t>
                       </a:r>
                     </a:p>
                   </a:txBody>
@@ -8793,7 +8793,7 @@
                           <a:ea typeface="Arial"/>
                           <a:cs typeface="Arial"/>
                         </a:rPr>
-                        <a:t>Organiser-supplied evaluator with exact coverage checks and full traces</a:t>
+                        <a:t>Organiser-supplied evaluator. Exact coverage checks and full traces are available</a:t>
                       </a:r>
                     </a:p>
                   </a:txBody>
@@ -8810,10 +8810,10 @@
       </p:graphicFrame>
       <p:sp>
         <p:nvSpPr>
-          <p:cNvPr id="10" name="">
-            <a:extLst xmlns:a="http://schemas.openxmlformats.org/drawingml/2006/main">
-              <a:ext uri="{FF2B5EF4-FFF2-40B4-BE49-F238E27FC236}">
-                <a16:creationId xmlns:a16="http://schemas.microsoft.com/office/drawing/2014/main" id="{0BF931EA-6149-46C4-B9C9-301820F695B9}"/>
+          <p:cNvPr id="8" name="">
+            <a:extLst xmlns:a="http://schemas.openxmlformats.org/drawingml/2006/main">
+              <a:ext uri="{FF2B5EF4-FFF2-40B4-BE49-F238E27FC236}">
+                <a16:creationId xmlns:a16="http://schemas.microsoft.com/office/drawing/2014/main" id="{5BB1125E-150E-4002-B3B6-A7BD582CE0F4}"/>
               </a:ext>
             </a:extLst>
           </p:cNvPr>
@@ -8864,17 +8864,17 @@
                 <a:ea typeface="Arial"/>
                 <a:cs typeface="Arial"/>
               </a:rPr>
-              <a:t>Direct attribution of the gap to one component would be misleading.</a:t>
-            </a:r>
-          </a:p>
-        </p:txBody>
-      </p:sp>
-      <p:sp>
-        <p:nvSpPr>
-          <p:cNvPr id="11" name="">
-            <a:extLst xmlns:a="http://schemas.openxmlformats.org/drawingml/2006/main">
-              <a:ext uri="{FF2B5EF4-FFF2-40B4-BE49-F238E27FC236}">
-                <a16:creationId xmlns:a16="http://schemas.microsoft.com/office/drawing/2014/main" id="{FA2CDD25-2AFA-47DE-A08C-EFE710A029EB}"/>
+              <a:t>The published evidence does not isolate the effect of any one component.</a:t>
+            </a:r>
+          </a:p>
+        </p:txBody>
+      </p:sp>
+      <p:sp>
+        <p:nvSpPr>
+          <p:cNvPr id="9" name="">
+            <a:extLst xmlns:a="http://schemas.openxmlformats.org/drawingml/2006/main">
+              <a:ext uri="{FF2B5EF4-FFF2-40B4-BE49-F238E27FC236}">
+                <a16:creationId xmlns:a16="http://schemas.microsoft.com/office/drawing/2014/main" id="{8BACCCC3-C59E-4036-A59C-8A16AA3D444E}"/>
               </a:ext>
             </a:extLst>
           </p:cNvPr>
@@ -8902,10 +8902,10 @@
       </p:sp>
       <p:sp>
         <p:nvSpPr>
-          <p:cNvPr id="12" name="">
-            <a:extLst xmlns:a="http://schemas.openxmlformats.org/drawingml/2006/main">
-              <a:ext uri="{FF2B5EF4-FFF2-40B4-BE49-F238E27FC236}">
-                <a16:creationId xmlns:a16="http://schemas.microsoft.com/office/drawing/2014/main" id="{455B185E-22CB-4EBF-B7C4-2209C166CA8E}"/>
+          <p:cNvPr id="10" name="">
+            <a:extLst xmlns:a="http://schemas.openxmlformats.org/drawingml/2006/main">
+              <a:ext uri="{FF2B5EF4-FFF2-40B4-BE49-F238E27FC236}">
+                <a16:creationId xmlns:a16="http://schemas.microsoft.com/office/drawing/2014/main" id="{FC3A2954-9920-4096-8475-AABA6C2C3833}"/>
               </a:ext>
             </a:extLst>
           </p:cNvPr>
@@ -8963,10 +8963,10 @@
       </p:sp>
       <p:sp>
         <p:nvSpPr>
-          <p:cNvPr id="13" name="">
-            <a:extLst xmlns:a="http://schemas.openxmlformats.org/drawingml/2006/main">
-              <a:ext uri="{FF2B5EF4-FFF2-40B4-BE49-F238E27FC236}">
-                <a16:creationId xmlns:a16="http://schemas.microsoft.com/office/drawing/2014/main" id="{D09E888F-1677-4746-8638-BC304CFEC4D3}"/>
+          <p:cNvPr id="11" name="">
+            <a:extLst xmlns:a="http://schemas.openxmlformats.org/drawingml/2006/main">
+              <a:ext uri="{FF2B5EF4-FFF2-40B4-BE49-F238E27FC236}">
+                <a16:creationId xmlns:a16="http://schemas.microsoft.com/office/drawing/2014/main" id="{E687D580-2801-43EE-8CA5-B529A61982EC}"/>
               </a:ext>
             </a:extLst>
           </p:cNvPr>
@@ -9025,7 +9025,7 @@
     </p:spTree>
     <p:extLst>
       <p:ext uri="{BB962C8B-B14F-4D97-AF65-F5344CB8AC3E}">
-        <p14:creationId xmlns:p14="http://schemas.microsoft.com/office/powerpoint/2010/main" val="482401691"/>
+        <p14:creationId xmlns:p14="http://schemas.microsoft.com/office/powerpoint/2010/main" val="711276457"/>
       </p:ext>
     </p:extLst>
   </p:cSld>
@@ -9056,7 +9056,7 @@
           <p:cNvPr id="19" name="slide-title">
             <a:extLst xmlns:a="http://schemas.openxmlformats.org/drawingml/2006/main">
               <a:ext uri="{FF2B5EF4-FFF2-40B4-BE49-F238E27FC236}">
-                <a16:creationId xmlns:a16="http://schemas.microsoft.com/office/drawing/2014/main" id="{2DB9FC1B-54F9-4328-9370-EF68155DEACA}"/>
+                <a16:creationId xmlns:a16="http://schemas.microsoft.com/office/drawing/2014/main" id="{8F379733-936C-4C7A-B21E-0F7E09899666}"/>
               </a:ext>
             </a:extLst>
           </p:cNvPr>
@@ -9080,7 +9080,7 @@
         </p:spPr>
         <p:txBody>
           <a:bodyPr xmlns:a="http://schemas.openxmlformats.org/drawingml/2006/main" wrap="square" lIns="0" tIns="0" rIns="0" bIns="0" anchor="t">
-            <a:normAutofit fontScale="94551"/>
+            <a:normAutofit fontScale="74317"/>
           </a:bodyPr>
           <a:lstStyle xmlns:a="http://schemas.openxmlformats.org/drawingml/2006/main"/>
           <a:p xmlns:a="http://schemas.openxmlformats.org/drawingml/2006/main">
@@ -9107,7 +9107,7 @@
                 <a:ea typeface="Arial"/>
                 <a:cs typeface="Arial"/>
               </a:rPr>
-              <a:t>Next version: choose the operation before producing cells</a:t>
+              <a:t>Next architecture: separate formula generation from large transformations</a:t>
             </a:r>
           </a:p>
         </p:txBody>
@@ -9117,7 +9117,7 @@
           <p:cNvPr id="2" name="">
             <a:extLst xmlns:a="http://schemas.openxmlformats.org/drawingml/2006/main">
               <a:ext uri="{FF2B5EF4-FFF2-40B4-BE49-F238E27FC236}">
-                <a16:creationId xmlns:a16="http://schemas.microsoft.com/office/drawing/2014/main" id="{9B0394A8-7CCD-42E4-81AA-214B220A0D14}"/>
+                <a16:creationId xmlns:a16="http://schemas.microsoft.com/office/drawing/2014/main" id="{030F87F3-D799-4653-BBA6-5B8FBC642992}"/>
               </a:ext>
             </a:extLst>
           </p:cNvPr>
@@ -9129,7 +9129,7 @@
         <p:spPr>
           <a:xfrm xmlns:a="http://schemas.openxmlformats.org/drawingml/2006/main">
             <a:off x="609600" y="1028700"/>
-            <a:ext cx="8572500" cy="361950"/>
+            <a:ext cx="9525000" cy="361950"/>
           </a:xfrm>
           <a:prstGeom xmlns:a="http://schemas.openxmlformats.org/drawingml/2006/main" prst="rect">
             <a:avLst/>
@@ -9168,7 +9168,7 @@
                 <a:ea typeface="Arial"/>
                 <a:cs typeface="Arial"/>
               </a:rPr>
-              <a:t>The failure analysis points to two execution paths.</a:t>
+              <a:t>Formula tasks use the model. Large transformations use fixed operations.</a:t>
             </a:r>
           </a:p>
         </p:txBody>
@@ -9178,7 +9178,7 @@
           <p:cNvPr id="3" name="">
             <a:extLst xmlns:a="http://schemas.openxmlformats.org/drawingml/2006/main">
               <a:ext uri="{FF2B5EF4-FFF2-40B4-BE49-F238E27FC236}">
-                <a16:creationId xmlns:a16="http://schemas.microsoft.com/office/drawing/2014/main" id="{6CF260A2-9657-4295-8E45-BAB8A0F84880}"/>
+                <a16:creationId xmlns:a16="http://schemas.microsoft.com/office/drawing/2014/main" id="{F49B6104-A240-41A3-BCE3-AA5E0AB1F0A4}"/>
               </a:ext>
             </a:extLst>
           </p:cNvPr>
@@ -9239,7 +9239,7 @@
           <p:cNvPr id="4" name="">
             <a:extLst xmlns:a="http://schemas.openxmlformats.org/drawingml/2006/main">
               <a:ext uri="{FF2B5EF4-FFF2-40B4-BE49-F238E27FC236}">
-                <a16:creationId xmlns:a16="http://schemas.microsoft.com/office/drawing/2014/main" id="{3C70487C-48D2-499D-B5BE-80FB7985CBFB}"/>
+                <a16:creationId xmlns:a16="http://schemas.microsoft.com/office/drawing/2014/main" id="{F2E19647-36B0-4F81-8918-8339A756DC80}"/>
               </a:ext>
             </a:extLst>
           </p:cNvPr>
@@ -9290,7 +9290,7 @@
                 <a:ea typeface="Arial"/>
                 <a:cs typeface="Arial"/>
               </a:rPr>
-              <a:t>Synthesize a formula</a:t>
+              <a:t>Generate a formula</a:t>
             </a:r>
           </a:p>
         </p:txBody>
@@ -9300,7 +9300,7 @@
           <p:cNvPr id="5" name="">
             <a:extLst xmlns:a="http://schemas.openxmlformats.org/drawingml/2006/main">
               <a:ext uri="{FF2B5EF4-FFF2-40B4-BE49-F238E27FC236}">
-                <a16:creationId xmlns:a16="http://schemas.microsoft.com/office/drawing/2014/main" id="{03F82A2C-14FE-40A5-9F9E-15FCD8EDB88A}"/>
+                <a16:creationId xmlns:a16="http://schemas.microsoft.com/office/drawing/2014/main" id="{E3B93FE1-1945-44E5-8931-0B83E9D50D23}"/>
               </a:ext>
             </a:extLst>
           </p:cNvPr>
@@ -9351,7 +9351,7 @@
                 <a:ea typeface="Arial"/>
                 <a:cs typeface="Arial"/>
               </a:rPr>
-              <a:t>Recalculate locally and test explicit invariants before publishing the workbook.</a:t>
+              <a:t>Recalculate locally and run task-specific checks before publishing the workbook.</a:t>
             </a:r>
           </a:p>
         </p:txBody>
@@ -9361,7 +9361,7 @@
           <p:cNvPr id="6" name="">
             <a:extLst xmlns:a="http://schemas.openxmlformats.org/drawingml/2006/main">
               <a:ext uri="{FF2B5EF4-FFF2-40B4-BE49-F238E27FC236}">
-                <a16:creationId xmlns:a16="http://schemas.microsoft.com/office/drawing/2014/main" id="{084ECD63-554E-4636-9285-6FAC5F46C3A5}"/>
+                <a16:creationId xmlns:a16="http://schemas.microsoft.com/office/drawing/2014/main" id="{059D2ACE-591E-481D-84E3-5651E4356D31}"/>
               </a:ext>
             </a:extLst>
           </p:cNvPr>
@@ -9422,7 +9422,7 @@
           <p:cNvPr id="7" name="">
             <a:extLst xmlns:a="http://schemas.openxmlformats.org/drawingml/2006/main">
               <a:ext uri="{FF2B5EF4-FFF2-40B4-BE49-F238E27FC236}">
-                <a16:creationId xmlns:a16="http://schemas.microsoft.com/office/drawing/2014/main" id="{414890A2-5F80-49C7-98A1-7DD193298FB5}"/>
+                <a16:creationId xmlns:a16="http://schemas.microsoft.com/office/drawing/2014/main" id="{C70D5C2F-3F89-46BB-9D6E-955EA5AC81E9}"/>
               </a:ext>
             </a:extLst>
           </p:cNvPr>
@@ -9473,7 +9473,7 @@
                 <a:ea typeface="Arial"/>
                 <a:cs typeface="Arial"/>
               </a:rPr>
-              <a:t>Select an operation</a:t>
+              <a:t>Apply a fixed operation</a:t>
             </a:r>
           </a:p>
         </p:txBody>
@@ -9483,7 +9483,7 @@
           <p:cNvPr id="8" name="">
             <a:extLst xmlns:a="http://schemas.openxmlformats.org/drawingml/2006/main">
               <a:ext uri="{FF2B5EF4-FFF2-40B4-BE49-F238E27FC236}">
-                <a16:creationId xmlns:a16="http://schemas.microsoft.com/office/drawing/2014/main" id="{7EE8486B-49CA-4F76-B6C3-0BB8FF984B2A}"/>
+                <a16:creationId xmlns:a16="http://schemas.microsoft.com/office/drawing/2014/main" id="{0051F5E8-BF56-424D-8354-EAB1697B7E4B}"/>
               </a:ext>
             </a:extLst>
           </p:cNvPr>
@@ -9534,7 +9534,7 @@
                 <a:ea typeface="Arial"/>
                 <a:cs typeface="Arial"/>
               </a:rPr>
-              <a:t>Let a deterministic executor handle filter, sort, append, group, deduplicate and clear operations.</a:t>
+              <a:t>Use rule-based code for filtering, sorting, appending, grouping, deduplicating and clearing.</a:t>
             </a:r>
           </a:p>
         </p:txBody>
@@ -9544,7 +9544,7 @@
           <p:cNvPr id="9" name="">
             <a:extLst xmlns:a="http://schemas.openxmlformats.org/drawingml/2006/main">
               <a:ext uri="{FF2B5EF4-FFF2-40B4-BE49-F238E27FC236}">
-                <a16:creationId xmlns:a16="http://schemas.microsoft.com/office/drawing/2014/main" id="{9CF967C8-3AA0-4BBB-9FEB-594EFD94FE92}"/>
+                <a16:creationId xmlns:a16="http://schemas.microsoft.com/office/drawing/2014/main" id="{20E36F81-BCFF-4112-B514-BB775E37D4F2}"/>
               </a:ext>
             </a:extLst>
           </p:cNvPr>
@@ -9575,7 +9575,7 @@
           <p:cNvPr id="10" name="">
             <a:extLst xmlns:a="http://schemas.openxmlformats.org/drawingml/2006/main">
               <a:ext uri="{FF2B5EF4-FFF2-40B4-BE49-F238E27FC236}">
-                <a16:creationId xmlns:a16="http://schemas.microsoft.com/office/drawing/2014/main" id="{3B21EA6F-4E9D-4EC9-BCE7-ED6ED8F4C006}"/>
+                <a16:creationId xmlns:a16="http://schemas.microsoft.com/office/drawing/2014/main" id="{2DF08957-8803-4C9B-8899-C74AC72A3157}"/>
               </a:ext>
             </a:extLst>
           </p:cNvPr>
@@ -9608,7 +9608,7 @@
           <p:cNvPr id="11" name="">
             <a:extLst xmlns:a="http://schemas.openxmlformats.org/drawingml/2006/main">
               <a:ext uri="{FF2B5EF4-FFF2-40B4-BE49-F238E27FC236}">
-                <a16:creationId xmlns:a16="http://schemas.microsoft.com/office/drawing/2014/main" id="{7FB36FF1-9D60-4EEF-A42E-8FAEC13E53E4}"/>
+                <a16:creationId xmlns:a16="http://schemas.microsoft.com/office/drawing/2014/main" id="{EA7807D1-FAAF-4CB6-BE5E-DCFD07414099}"/>
               </a:ext>
             </a:extLst>
           </p:cNvPr>
@@ -9669,7 +9669,7 @@
           <p:cNvPr id="12" name="">
             <a:extLst xmlns:a="http://schemas.openxmlformats.org/drawingml/2006/main">
               <a:ext uri="{FF2B5EF4-FFF2-40B4-BE49-F238E27FC236}">
-                <a16:creationId xmlns:a16="http://schemas.microsoft.com/office/drawing/2014/main" id="{4EAB342A-BEFF-4898-94BC-2716CFC49247}"/>
+                <a16:creationId xmlns:a16="http://schemas.microsoft.com/office/drawing/2014/main" id="{7D77B95C-22FC-487B-8029-11F0B78C8CEE}"/>
               </a:ext>
             </a:extLst>
           </p:cNvPr>
@@ -9719,7 +9719,7 @@
                 <a:latin typeface="Arial"/>
                 <a:ea typeface="Arial"/>
                 <a:cs typeface="Arial"/>
-                <a:hlinkClick xmlns:r="http://schemas.openxmlformats.org/officeDocument/2006/relationships" r:id="R1bd7e65cdd474b43"/>
+                <a:hlinkClick xmlns:r="http://schemas.openxmlformats.org/officeDocument/2006/relationships" r:id="R5e29216e7cd24a5e"/>
               </a:rPr>
               <a:t>masterasnackin.github.io/FormulaBench/</a:t>
             </a:r>
@@ -9731,7 +9731,7 @@
           <p:cNvPr id="13" name="">
             <a:extLst xmlns:a="http://schemas.openxmlformats.org/drawingml/2006/main">
               <a:ext uri="{FF2B5EF4-FFF2-40B4-BE49-F238E27FC236}">
-                <a16:creationId xmlns:a16="http://schemas.microsoft.com/office/drawing/2014/main" id="{7D00E2D2-3B1A-42A0-BE0E-B20E77ABC95E}"/>
+                <a16:creationId xmlns:a16="http://schemas.microsoft.com/office/drawing/2014/main" id="{FADD9EE3-DD2C-4BD7-B95A-FA90A8ADE9F5}"/>
               </a:ext>
             </a:extLst>
           </p:cNvPr>
@@ -9792,7 +9792,7 @@
           <p:cNvPr id="14" name="">
             <a:extLst xmlns:a="http://schemas.openxmlformats.org/drawingml/2006/main">
               <a:ext uri="{FF2B5EF4-FFF2-40B4-BE49-F238E27FC236}">
-                <a16:creationId xmlns:a16="http://schemas.microsoft.com/office/drawing/2014/main" id="{077BBAF8-BCED-4FFE-BB26-11EDFF41CFFC}"/>
+                <a16:creationId xmlns:a16="http://schemas.microsoft.com/office/drawing/2014/main" id="{ADC0AD02-F850-4C95-A5F3-FC47A8C5BD58}"/>
               </a:ext>
             </a:extLst>
           </p:cNvPr>
@@ -9842,7 +9842,7 @@
                 <a:latin typeface="Arial"/>
                 <a:ea typeface="Arial"/>
                 <a:cs typeface="Arial"/>
-                <a:hlinkClick xmlns:r="http://schemas.openxmlformats.org/officeDocument/2006/relationships" r:id="Rbac4753dd16340b7"/>
+                <a:hlinkClick xmlns:r="http://schemas.openxmlformats.org/officeDocument/2006/relationships" r:id="Redafb4700ee547f3"/>
               </a:rPr>
               <a:t>github.com/MasteraSnackin/FormulaBench</a:t>
             </a:r>
@@ -9854,7 +9854,7 @@
           <p:cNvPr id="15" name="">
             <a:extLst xmlns:a="http://schemas.openxmlformats.org/drawingml/2006/main">
               <a:ext uri="{FF2B5EF4-FFF2-40B4-BE49-F238E27FC236}">
-                <a16:creationId xmlns:a16="http://schemas.microsoft.com/office/drawing/2014/main" id="{3EE96D35-1E7B-4397-A7D0-0373169EDCBE}"/>
+                <a16:creationId xmlns:a16="http://schemas.microsoft.com/office/drawing/2014/main" id="{4C7A43E5-DFDC-4CEC-B65E-BF2F327C5A32}"/>
               </a:ext>
             </a:extLst>
           </p:cNvPr>
@@ -9905,7 +9905,7 @@
                 <a:ea typeface="Arial"/>
                 <a:cs typeface="Arial"/>
               </a:rPr>
-              <a:t>The organiser private benchmark remains the genuine unseen test.</a:t>
+              <a:t>The organiser's private benchmark is the unseen evaluation.</a:t>
             </a:r>
           </a:p>
         </p:txBody>
@@ -9915,7 +9915,7 @@
           <p:cNvPr id="16" name="">
             <a:extLst xmlns:a="http://schemas.openxmlformats.org/drawingml/2006/main">
               <a:ext uri="{FF2B5EF4-FFF2-40B4-BE49-F238E27FC236}">
-                <a16:creationId xmlns:a16="http://schemas.microsoft.com/office/drawing/2014/main" id="{1C764481-BF16-4037-AB44-E5C87E495D39}"/>
+                <a16:creationId xmlns:a16="http://schemas.microsoft.com/office/drawing/2014/main" id="{6FBE43A1-0EF5-48CB-AF53-B2F10700A415}"/>
               </a:ext>
             </a:extLst>
           </p:cNvPr>
@@ -9946,7 +9946,7 @@
           <p:cNvPr id="17" name="">
             <a:extLst xmlns:a="http://schemas.openxmlformats.org/drawingml/2006/main">
               <a:ext uri="{FF2B5EF4-FFF2-40B4-BE49-F238E27FC236}">
-                <a16:creationId xmlns:a16="http://schemas.microsoft.com/office/drawing/2014/main" id="{062EEB86-2A92-41A4-A001-295423F06162}"/>
+                <a16:creationId xmlns:a16="http://schemas.microsoft.com/office/drawing/2014/main" id="{B650E814-66AE-4CBD-980C-73FF1339D4F4}"/>
               </a:ext>
             </a:extLst>
           </p:cNvPr>
@@ -10007,7 +10007,7 @@
           <p:cNvPr id="18" name="">
             <a:extLst xmlns:a="http://schemas.openxmlformats.org/drawingml/2006/main">
               <a:ext uri="{FF2B5EF4-FFF2-40B4-BE49-F238E27FC236}">
-                <a16:creationId xmlns:a16="http://schemas.microsoft.com/office/drawing/2014/main" id="{1B962784-E0FD-4C14-9FC1-3955F2323549}"/>
+                <a16:creationId xmlns:a16="http://schemas.microsoft.com/office/drawing/2014/main" id="{70078E2A-1CFF-491E-BEEE-D7C1C9241062}"/>
               </a:ext>
             </a:extLst>
           </p:cNvPr>
@@ -10066,7 +10066,7 @@
     </p:spTree>
     <p:extLst>
       <p:ext uri="{BB962C8B-B14F-4D97-AF65-F5344CB8AC3E}">
-        <p14:creationId xmlns:p14="http://schemas.microsoft.com/office/powerpoint/2010/main" val="1821379369"/>
+        <p14:creationId xmlns:p14="http://schemas.microsoft.com/office/powerpoint/2010/main" val="1142395564"/>
       </p:ext>
     </p:extLst>
   </p:cSld>

--- a/docs/assets/FormulaBench-Hackathon-Deck.pptx
+++ b/docs/assets/FormulaBench-Hackathon-Deck.pptx
@@ -2,20 +2,20 @@
 <file path=ppt/presentation.xml><?xml version="1.0" encoding="utf-8"?>
 <p:presentation xmlns:p="http://schemas.openxmlformats.org/presentationml/2006/main">
   <p:sldMasterIdLst>
-    <p:sldMasterId xmlns:r="http://schemas.openxmlformats.org/officeDocument/2006/relationships" id="2147483648" r:id="R8801c75695f94f03"/>
+    <p:sldMasterId xmlns:r="http://schemas.openxmlformats.org/officeDocument/2006/relationships" id="2147483648" r:id="R471e2744b4d84d1d"/>
   </p:sldMasterIdLst>
   <p:notesMasterIdLst>
-    <p:notesMasterId xmlns:r="http://schemas.openxmlformats.org/officeDocument/2006/relationships" r:id="R872e820f27594ab4"/>
+    <p:notesMasterId xmlns:r="http://schemas.openxmlformats.org/officeDocument/2006/relationships" r:id="Rd3680a0bd82b4574"/>
   </p:notesMasterIdLst>
   <p:sldIdLst>
-    <p:sldId xmlns:r="http://schemas.openxmlformats.org/officeDocument/2006/relationships" id="256" r:id="Re93ae3687b80495c"/>
-    <p:sldId xmlns:r="http://schemas.openxmlformats.org/officeDocument/2006/relationships" id="257" r:id="R4c6d30c6d22c4f3d"/>
-    <p:sldId xmlns:r="http://schemas.openxmlformats.org/officeDocument/2006/relationships" id="258" r:id="Rf4903c6304be4764"/>
-    <p:sldId xmlns:r="http://schemas.openxmlformats.org/officeDocument/2006/relationships" id="259" r:id="R708608d061ab475b"/>
-    <p:sldId xmlns:r="http://schemas.openxmlformats.org/officeDocument/2006/relationships" id="260" r:id="R21ac3794744a4b9d"/>
-    <p:sldId xmlns:r="http://schemas.openxmlformats.org/officeDocument/2006/relationships" id="261" r:id="Rcc97828a411b4b84"/>
-    <p:sldId xmlns:r="http://schemas.openxmlformats.org/officeDocument/2006/relationships" id="262" r:id="R5343badcf1074f6d"/>
-    <p:sldId xmlns:r="http://schemas.openxmlformats.org/officeDocument/2006/relationships" id="263" r:id="R2b9f722ad50e490b"/>
+    <p:sldId xmlns:r="http://schemas.openxmlformats.org/officeDocument/2006/relationships" id="256" r:id="R447368ac096e453d"/>
+    <p:sldId xmlns:r="http://schemas.openxmlformats.org/officeDocument/2006/relationships" id="257" r:id="Rfa6453711fb544e2"/>
+    <p:sldId xmlns:r="http://schemas.openxmlformats.org/officeDocument/2006/relationships" id="258" r:id="R96502637e6b541a9"/>
+    <p:sldId xmlns:r="http://schemas.openxmlformats.org/officeDocument/2006/relationships" id="259" r:id="R6450c43eeef14111"/>
+    <p:sldId xmlns:r="http://schemas.openxmlformats.org/officeDocument/2006/relationships" id="260" r:id="R64a3ed262a254dde"/>
+    <p:sldId xmlns:r="http://schemas.openxmlformats.org/officeDocument/2006/relationships" id="261" r:id="Rc6fd4c1350994cc4"/>
+    <p:sldId xmlns:r="http://schemas.openxmlformats.org/officeDocument/2006/relationships" id="262" r:id="Rf113d718002e4e6d"/>
+    <p:sldId xmlns:r="http://schemas.openxmlformats.org/officeDocument/2006/relationships" id="263" r:id="Raa89fb6967bb4faf"/>
   </p:sldIdLst>
   <p:sldSz cx="12192000" cy="6858000"/>
   <p:notesSz cx="6858000" cy="9144000"/>
@@ -1202,7 +1202,7 @@
   </p:cSld>
   <p:clrMap bg1="lt1" tx1="dk1" bg2="lt2" tx2="dk2" accent1="accent1" accent2="accent2" accent3="accent3" accent4="accent4" accent5="accent5" accent6="accent6" hlink="hlink" folHlink="folHlink"/>
   <p:sldLayoutIdLst>
-    <p:sldLayoutId xmlns:r="http://schemas.openxmlformats.org/officeDocument/2006/relationships" id="2147483649" r:id="R21524589e09e4f6b"/>
+    <p:sldLayoutId xmlns:r="http://schemas.openxmlformats.org/officeDocument/2006/relationships" id="2147483649" r:id="Re9f51bc1e1e24617"/>
   </p:sldLayoutIdLst>
   <p:txStyles>
     <p:titleStyle>
@@ -2046,7 +2046,7 @@
           <p:cNvPr id="9" name="">
             <a:extLst xmlns:a="http://schemas.openxmlformats.org/drawingml/2006/main">
               <a:ext uri="{FF2B5EF4-FFF2-40B4-BE49-F238E27FC236}">
-                <a16:creationId xmlns:a16="http://schemas.microsoft.com/office/drawing/2014/main" id="{50C10181-1F51-4B1E-8C46-05502D297C1A}"/>
+                <a16:creationId xmlns:a16="http://schemas.microsoft.com/office/drawing/2014/main" id="{D39C05EF-3558-418F-961F-CCBDB1DB0094}"/>
               </a:ext>
             </a:extLst>
           </p:cNvPr>
@@ -2107,7 +2107,7 @@
           <p:cNvPr id="2" name="">
             <a:extLst xmlns:a="http://schemas.openxmlformats.org/drawingml/2006/main">
               <a:ext uri="{FF2B5EF4-FFF2-40B4-BE49-F238E27FC236}">
-                <a16:creationId xmlns:a16="http://schemas.microsoft.com/office/drawing/2014/main" id="{76F0A433-1B5F-40C0-A848-711343C4D3F5}"/>
+                <a16:creationId xmlns:a16="http://schemas.microsoft.com/office/drawing/2014/main" id="{5D684BFA-5DF8-4287-9353-CDB24724AA24}"/>
               </a:ext>
             </a:extLst>
           </p:cNvPr>
@@ -2168,7 +2168,7 @@
           <p:cNvPr id="3" name="">
             <a:extLst xmlns:a="http://schemas.openxmlformats.org/drawingml/2006/main">
               <a:ext uri="{FF2B5EF4-FFF2-40B4-BE49-F238E27FC236}">
-                <a16:creationId xmlns:a16="http://schemas.microsoft.com/office/drawing/2014/main" id="{431C5799-0BF4-427A-A11B-A2C30EE900C3}"/>
+                <a16:creationId xmlns:a16="http://schemas.microsoft.com/office/drawing/2014/main" id="{B1407B73-C460-4479-B307-142C5C4C6943}"/>
               </a:ext>
             </a:extLst>
           </p:cNvPr>
@@ -2229,7 +2229,7 @@
           <p:cNvPr id="4" name="">
             <a:extLst xmlns:a="http://schemas.openxmlformats.org/drawingml/2006/main">
               <a:ext uri="{FF2B5EF4-FFF2-40B4-BE49-F238E27FC236}">
-                <a16:creationId xmlns:a16="http://schemas.microsoft.com/office/drawing/2014/main" id="{91326E6C-B848-4446-AEE1-AF8CBE39B845}"/>
+                <a16:creationId xmlns:a16="http://schemas.microsoft.com/office/drawing/2014/main" id="{82734427-D76A-47EE-BC66-2E48B2F2B7AB}"/>
               </a:ext>
             </a:extLst>
           </p:cNvPr>
@@ -2260,7 +2260,7 @@
           <p:cNvPr id="5" name="">
             <a:extLst xmlns:a="http://schemas.openxmlformats.org/drawingml/2006/main">
               <a:ext uri="{FF2B5EF4-FFF2-40B4-BE49-F238E27FC236}">
-                <a16:creationId xmlns:a16="http://schemas.microsoft.com/office/drawing/2014/main" id="{CC3FBA75-89A2-406C-9B56-1E0B88735BC7}"/>
+                <a16:creationId xmlns:a16="http://schemas.microsoft.com/office/drawing/2014/main" id="{2F62FF7D-6CE4-4A2B-A7F1-399EFCBBDCD4}"/>
               </a:ext>
             </a:extLst>
           </p:cNvPr>
@@ -2311,7 +2311,7 @@
                 <a:ea typeface="Arial"/>
                 <a:cs typeface="Arial"/>
               </a:rPr>
-              <a:t>Research / Track 2</a:t>
+              <a:t>Research: Excel Formula Generation</a:t>
             </a:r>
           </a:p>
           <a:p xmlns:a="http://schemas.openxmlformats.org/drawingml/2006/main">
@@ -2348,7 +2348,7 @@
           <p:cNvPr id="6" name="">
             <a:extLst xmlns:a="http://schemas.openxmlformats.org/drawingml/2006/main">
               <a:ext uri="{FF2B5EF4-FFF2-40B4-BE49-F238E27FC236}">
-                <a16:creationId xmlns:a16="http://schemas.microsoft.com/office/drawing/2014/main" id="{330907F1-1244-47A9-86A9-D0BCC5592C88}"/>
+                <a16:creationId xmlns:a16="http://schemas.microsoft.com/office/drawing/2014/main" id="{6BB6B4BC-AF62-4DC0-A044-5205F39B589A}"/>
               </a:ext>
             </a:extLst>
           </p:cNvPr>
@@ -2517,7 +2517,7 @@
           <p:cNvPr id="7" name="">
             <a:extLst xmlns:a="http://schemas.openxmlformats.org/drawingml/2006/main">
               <a:ext uri="{FF2B5EF4-FFF2-40B4-BE49-F238E27FC236}">
-                <a16:creationId xmlns:a16="http://schemas.microsoft.com/office/drawing/2014/main" id="{F4088BC7-59A6-4E37-9AB3-2AE90CF8D688}"/>
+                <a16:creationId xmlns:a16="http://schemas.microsoft.com/office/drawing/2014/main" id="{74C44928-222D-4242-B52B-A15A3A02C839}"/>
               </a:ext>
             </a:extLst>
           </p:cNvPr>
@@ -2578,7 +2578,7 @@
           <p:cNvPr id="8" name="">
             <a:extLst xmlns:a="http://schemas.openxmlformats.org/drawingml/2006/main">
               <a:ext uri="{FF2B5EF4-FFF2-40B4-BE49-F238E27FC236}">
-                <a16:creationId xmlns:a16="http://schemas.microsoft.com/office/drawing/2014/main" id="{82617AB2-2FFF-4924-A0D3-C325E4FD293E}"/>
+                <a16:creationId xmlns:a16="http://schemas.microsoft.com/office/drawing/2014/main" id="{A317AD4D-4BF1-48E5-9F80-70485077EB32}"/>
               </a:ext>
             </a:extLst>
           </p:cNvPr>
@@ -2637,7 +2637,7 @@
     </p:spTree>
     <p:extLst>
       <p:ext uri="{BB962C8B-B14F-4D97-AF65-F5344CB8AC3E}">
-        <p14:creationId xmlns:p14="http://schemas.microsoft.com/office/powerpoint/2010/main" val="585923939"/>
+        <p14:creationId xmlns:p14="http://schemas.microsoft.com/office/powerpoint/2010/main" val="1282237158"/>
       </p:ext>
     </p:extLst>
   </p:cSld>
@@ -2668,7 +2668,7 @@
           <p:cNvPr id="14" name="slide-title">
             <a:extLst xmlns:a="http://schemas.openxmlformats.org/drawingml/2006/main">
               <a:ext uri="{FF2B5EF4-FFF2-40B4-BE49-F238E27FC236}">
-                <a16:creationId xmlns:a16="http://schemas.microsoft.com/office/drawing/2014/main" id="{885EC345-FAA5-4F68-88ED-A6C32EFAF0B6}"/>
+                <a16:creationId xmlns:a16="http://schemas.microsoft.com/office/drawing/2014/main" id="{C332DD45-E2B0-4B59-81B5-A2AD48DD0DAE}"/>
               </a:ext>
             </a:extLst>
           </p:cNvPr>
@@ -2729,7 +2729,7 @@
           <p:cNvPr id="2" name="">
             <a:extLst xmlns:a="http://schemas.openxmlformats.org/drawingml/2006/main">
               <a:ext uri="{FF2B5EF4-FFF2-40B4-BE49-F238E27FC236}">
-                <a16:creationId xmlns:a16="http://schemas.microsoft.com/office/drawing/2014/main" id="{EEEE5744-0295-462D-88A0-C3E92D931C41}"/>
+                <a16:creationId xmlns:a16="http://schemas.microsoft.com/office/drawing/2014/main" id="{B3A6B431-0514-4C88-BFB2-F1400C9436BA}"/>
               </a:ext>
             </a:extLst>
           </p:cNvPr>
@@ -2790,7 +2790,7 @@
           <p:cNvPr id="3" name="">
             <a:extLst xmlns:a="http://schemas.openxmlformats.org/drawingml/2006/main">
               <a:ext uri="{FF2B5EF4-FFF2-40B4-BE49-F238E27FC236}">
-                <a16:creationId xmlns:a16="http://schemas.microsoft.com/office/drawing/2014/main" id="{A5666C6F-B306-447F-A4D3-76DDF8322942}"/>
+                <a16:creationId xmlns:a16="http://schemas.microsoft.com/office/drawing/2014/main" id="{1D1514B2-C9B9-46CC-A57F-4960CE74B1D4}"/>
               </a:ext>
             </a:extLst>
           </p:cNvPr>
@@ -2851,7 +2851,7 @@
           <p:cNvPr id="4" name="">
             <a:extLst xmlns:a="http://schemas.openxmlformats.org/drawingml/2006/main">
               <a:ext uri="{FF2B5EF4-FFF2-40B4-BE49-F238E27FC236}">
-                <a16:creationId xmlns:a16="http://schemas.microsoft.com/office/drawing/2014/main" id="{29972A5B-D5E9-4396-BBA4-3F2E751F452B}"/>
+                <a16:creationId xmlns:a16="http://schemas.microsoft.com/office/drawing/2014/main" id="{F3C357DA-FE73-4B1A-9325-CEC7AF5BDA72}"/>
               </a:ext>
             </a:extLst>
           </p:cNvPr>
@@ -2912,7 +2912,7 @@
           <p:cNvPr id="5" name="">
             <a:extLst xmlns:a="http://schemas.openxmlformats.org/drawingml/2006/main">
               <a:ext uri="{FF2B5EF4-FFF2-40B4-BE49-F238E27FC236}">
-                <a16:creationId xmlns:a16="http://schemas.microsoft.com/office/drawing/2014/main" id="{0F751ACC-F284-470C-A7BB-585EB10F16C1}"/>
+                <a16:creationId xmlns:a16="http://schemas.microsoft.com/office/drawing/2014/main" id="{6621569C-42E7-4334-B269-E0F136F68BCD}"/>
               </a:ext>
             </a:extLst>
           </p:cNvPr>
@@ -2973,7 +2973,7 @@
           <p:cNvPr id="6" name="">
             <a:extLst xmlns:a="http://schemas.openxmlformats.org/drawingml/2006/main">
               <a:ext uri="{FF2B5EF4-FFF2-40B4-BE49-F238E27FC236}">
-                <a16:creationId xmlns:a16="http://schemas.microsoft.com/office/drawing/2014/main" id="{0CB017B7-6EE4-4FCD-87D9-C4E2D291B440}"/>
+                <a16:creationId xmlns:a16="http://schemas.microsoft.com/office/drawing/2014/main" id="{967ACCBF-8B54-453F-8DB8-F673738400EF}"/>
               </a:ext>
             </a:extLst>
           </p:cNvPr>
@@ -3034,7 +3034,7 @@
           <p:cNvPr id="7" name="">
             <a:extLst xmlns:a="http://schemas.openxmlformats.org/drawingml/2006/main">
               <a:ext uri="{FF2B5EF4-FFF2-40B4-BE49-F238E27FC236}">
-                <a16:creationId xmlns:a16="http://schemas.microsoft.com/office/drawing/2014/main" id="{5C431A68-50B6-4630-B630-057B86E38B14}"/>
+                <a16:creationId xmlns:a16="http://schemas.microsoft.com/office/drawing/2014/main" id="{76707E3F-92B4-48FB-A23B-662F67536CC3}"/>
               </a:ext>
             </a:extLst>
           </p:cNvPr>
@@ -3095,7 +3095,7 @@
           <p:cNvPr id="8" name="">
             <a:extLst xmlns:a="http://schemas.openxmlformats.org/drawingml/2006/main">
               <a:ext uri="{FF2B5EF4-FFF2-40B4-BE49-F238E27FC236}">
-                <a16:creationId xmlns:a16="http://schemas.microsoft.com/office/drawing/2014/main" id="{CDFBDA0D-8441-4BF5-9706-237FF25B5CBB}"/>
+                <a16:creationId xmlns:a16="http://schemas.microsoft.com/office/drawing/2014/main" id="{6F118762-3DA0-409F-83FF-0C01F13E0C66}"/>
               </a:ext>
             </a:extLst>
           </p:cNvPr>
@@ -3163,7 +3163,7 @@
         </p:xfrm>
         <a:graphic xmlns:a="http://schemas.openxmlformats.org/drawingml/2006/main">
           <a:graphicData uri="http://schemas.openxmlformats.org/drawingml/2006/chart">
-            <c:chart xmlns:r="http://schemas.openxmlformats.org/officeDocument/2006/relationships" xmlns:c="http://schemas.openxmlformats.org/drawingml/2006/chart" r:id="Rb31b5b8cc256491a"/>
+            <c:chart xmlns:r="http://schemas.openxmlformats.org/officeDocument/2006/relationships" xmlns:c="http://schemas.openxmlformats.org/drawingml/2006/chart" r:id="Ra3592e46faba462c"/>
           </a:graphicData>
         </a:graphic>
       </p:graphicFrame>
@@ -3172,7 +3172,7 @@
           <p:cNvPr id="10" name="">
             <a:extLst xmlns:a="http://schemas.openxmlformats.org/drawingml/2006/main">
               <a:ext uri="{FF2B5EF4-FFF2-40B4-BE49-F238E27FC236}">
-                <a16:creationId xmlns:a16="http://schemas.microsoft.com/office/drawing/2014/main" id="{9CE24B08-A9A7-4A6A-8727-60CD41D95D17}"/>
+                <a16:creationId xmlns:a16="http://schemas.microsoft.com/office/drawing/2014/main" id="{A9D35BEA-EAB5-42C7-94D3-AC9868F43BF6}"/>
               </a:ext>
             </a:extLst>
           </p:cNvPr>
@@ -3233,7 +3233,7 @@
           <p:cNvPr id="11" name="">
             <a:extLst xmlns:a="http://schemas.openxmlformats.org/drawingml/2006/main">
               <a:ext uri="{FF2B5EF4-FFF2-40B4-BE49-F238E27FC236}">
-                <a16:creationId xmlns:a16="http://schemas.microsoft.com/office/drawing/2014/main" id="{E38B42F7-6295-44B9-BE82-E9F2FC3BB36B}"/>
+                <a16:creationId xmlns:a16="http://schemas.microsoft.com/office/drawing/2014/main" id="{BAD4151B-AE70-4183-8EE9-0D11640FCBC5}"/>
               </a:ext>
             </a:extLst>
           </p:cNvPr>
@@ -3264,7 +3264,7 @@
           <p:cNvPr id="12" name="">
             <a:extLst xmlns:a="http://schemas.openxmlformats.org/drawingml/2006/main">
               <a:ext uri="{FF2B5EF4-FFF2-40B4-BE49-F238E27FC236}">
-                <a16:creationId xmlns:a16="http://schemas.microsoft.com/office/drawing/2014/main" id="{5874FED2-31A8-4653-A8E9-E5F49D60929D}"/>
+                <a16:creationId xmlns:a16="http://schemas.microsoft.com/office/drawing/2014/main" id="{7F14F7A6-5D50-44E3-81C0-5CC9B756A717}"/>
               </a:ext>
             </a:extLst>
           </p:cNvPr>
@@ -3315,7 +3315,7 @@
                 <a:ea typeface="Arial"/>
                 <a:cs typeface="Arial"/>
               </a:rPr>
-              <a:t>FORMULABENCH  ·  RESEARCH / TRACK 2</a:t>
+              <a:t>FORMULABENCH  ·  RESEARCH: EXCEL FORMULA GENERATION</a:t>
             </a:r>
           </a:p>
         </p:txBody>
@@ -3325,7 +3325,7 @@
           <p:cNvPr id="13" name="">
             <a:extLst xmlns:a="http://schemas.openxmlformats.org/drawingml/2006/main">
               <a:ext uri="{FF2B5EF4-FFF2-40B4-BE49-F238E27FC236}">
-                <a16:creationId xmlns:a16="http://schemas.microsoft.com/office/drawing/2014/main" id="{C18598F6-A6CD-4D79-828D-FBF48D9C9405}"/>
+                <a16:creationId xmlns:a16="http://schemas.microsoft.com/office/drawing/2014/main" id="{B06E1ED5-C5E5-4E6E-A9C3-9345293CC8C7}"/>
               </a:ext>
             </a:extLst>
           </p:cNvPr>
@@ -3384,7 +3384,7 @@
     </p:spTree>
     <p:extLst>
       <p:ext uri="{BB962C8B-B14F-4D97-AF65-F5344CB8AC3E}">
-        <p14:creationId xmlns:p14="http://schemas.microsoft.com/office/powerpoint/2010/main" val="327622992"/>
+        <p14:creationId xmlns:p14="http://schemas.microsoft.com/office/powerpoint/2010/main" val="1836066887"/>
       </p:ext>
     </p:extLst>
   </p:cSld>
@@ -3415,7 +3415,7 @@
           <p:cNvPr id="23" name="slide-title">
             <a:extLst xmlns:a="http://schemas.openxmlformats.org/drawingml/2006/main">
               <a:ext uri="{FF2B5EF4-FFF2-40B4-BE49-F238E27FC236}">
-                <a16:creationId xmlns:a16="http://schemas.microsoft.com/office/drawing/2014/main" id="{87D1FAE9-4A47-4688-9FB4-3817074D5BCA}"/>
+                <a16:creationId xmlns:a16="http://schemas.microsoft.com/office/drawing/2014/main" id="{97CA310F-D86A-49B1-89BF-9ACC6236BDAD}"/>
               </a:ext>
             </a:extLst>
           </p:cNvPr>
@@ -3476,7 +3476,7 @@
           <p:cNvPr id="2" name="">
             <a:extLst xmlns:a="http://schemas.openxmlformats.org/drawingml/2006/main">
               <a:ext uri="{FF2B5EF4-FFF2-40B4-BE49-F238E27FC236}">
-                <a16:creationId xmlns:a16="http://schemas.microsoft.com/office/drawing/2014/main" id="{3126D8D7-E60B-46A1-B281-6ECD380DBFC8}"/>
+                <a16:creationId xmlns:a16="http://schemas.microsoft.com/office/drawing/2014/main" id="{AF4C521C-D7B9-4C11-BD5B-BA691C346EEA}"/>
               </a:ext>
             </a:extLst>
           </p:cNvPr>
@@ -3537,7 +3537,7 @@
           <p:cNvPr id="3" name="">
             <a:extLst xmlns:a="http://schemas.openxmlformats.org/drawingml/2006/main">
               <a:ext uri="{FF2B5EF4-FFF2-40B4-BE49-F238E27FC236}">
-                <a16:creationId xmlns:a16="http://schemas.microsoft.com/office/drawing/2014/main" id="{42C4AB0F-DC93-4BD6-AB20-3819992659C8}"/>
+                <a16:creationId xmlns:a16="http://schemas.microsoft.com/office/drawing/2014/main" id="{E5D85DE6-C57D-4AFC-ADE3-210DC1B150B1}"/>
               </a:ext>
             </a:extLst>
           </p:cNvPr>
@@ -3598,7 +3598,7 @@
           <p:cNvPr id="4" name="">
             <a:extLst xmlns:a="http://schemas.openxmlformats.org/drawingml/2006/main">
               <a:ext uri="{FF2B5EF4-FFF2-40B4-BE49-F238E27FC236}">
-                <a16:creationId xmlns:a16="http://schemas.microsoft.com/office/drawing/2014/main" id="{DFC8F002-4E40-44DA-8575-F76EFE000A70}"/>
+                <a16:creationId xmlns:a16="http://schemas.microsoft.com/office/drawing/2014/main" id="{3C123DEB-300C-4DE7-8AF2-30B3FFB564DF}"/>
               </a:ext>
             </a:extLst>
           </p:cNvPr>
@@ -3659,7 +3659,7 @@
           <p:cNvPr id="5" name="">
             <a:extLst xmlns:a="http://schemas.openxmlformats.org/drawingml/2006/main">
               <a:ext uri="{FF2B5EF4-FFF2-40B4-BE49-F238E27FC236}">
-                <a16:creationId xmlns:a16="http://schemas.microsoft.com/office/drawing/2014/main" id="{7E3BAFB4-F6F8-4602-8356-1226B86EE861}"/>
+                <a16:creationId xmlns:a16="http://schemas.microsoft.com/office/drawing/2014/main" id="{572B070C-DD95-4DA6-B3D3-6D1A8E576143}"/>
               </a:ext>
             </a:extLst>
           </p:cNvPr>
@@ -3720,7 +3720,7 @@
           <p:cNvPr id="6" name="">
             <a:extLst xmlns:a="http://schemas.openxmlformats.org/drawingml/2006/main">
               <a:ext uri="{FF2B5EF4-FFF2-40B4-BE49-F238E27FC236}">
-                <a16:creationId xmlns:a16="http://schemas.microsoft.com/office/drawing/2014/main" id="{90F2CBF9-21D5-4636-A4CF-46F5A121D25C}"/>
+                <a16:creationId xmlns:a16="http://schemas.microsoft.com/office/drawing/2014/main" id="{7A77A824-6A1A-45A8-9F26-34C7BEF0EAC5}"/>
               </a:ext>
             </a:extLst>
           </p:cNvPr>
@@ -3751,7 +3751,7 @@
           <p:cNvPr id="7" name="">
             <a:extLst xmlns:a="http://schemas.openxmlformats.org/drawingml/2006/main">
               <a:ext uri="{FF2B5EF4-FFF2-40B4-BE49-F238E27FC236}">
-                <a16:creationId xmlns:a16="http://schemas.microsoft.com/office/drawing/2014/main" id="{C6849A79-699D-40F8-BC13-369B2020AEFC}"/>
+                <a16:creationId xmlns:a16="http://schemas.microsoft.com/office/drawing/2014/main" id="{CDFDDAB6-A8CF-4ED6-B995-CE42ED65D913}"/>
               </a:ext>
             </a:extLst>
           </p:cNvPr>
@@ -3812,7 +3812,7 @@
           <p:cNvPr id="8" name="">
             <a:extLst xmlns:a="http://schemas.openxmlformats.org/drawingml/2006/main">
               <a:ext uri="{FF2B5EF4-FFF2-40B4-BE49-F238E27FC236}">
-                <a16:creationId xmlns:a16="http://schemas.microsoft.com/office/drawing/2014/main" id="{717B12E9-A573-46A6-A86F-6ED4652473FF}"/>
+                <a16:creationId xmlns:a16="http://schemas.microsoft.com/office/drawing/2014/main" id="{74111B4A-8A88-4577-A93F-7DFA6EFA79CB}"/>
               </a:ext>
             </a:extLst>
           </p:cNvPr>
@@ -3873,7 +3873,7 @@
           <p:cNvPr id="9" name="">
             <a:extLst xmlns:a="http://schemas.openxmlformats.org/drawingml/2006/main">
               <a:ext uri="{FF2B5EF4-FFF2-40B4-BE49-F238E27FC236}">
-                <a16:creationId xmlns:a16="http://schemas.microsoft.com/office/drawing/2014/main" id="{B519ED67-516C-4B5C-922D-2ABCB0D0848E}"/>
+                <a16:creationId xmlns:a16="http://schemas.microsoft.com/office/drawing/2014/main" id="{95B92058-C0B7-4DAA-88ED-4BAF7D71BC73}"/>
               </a:ext>
             </a:extLst>
           </p:cNvPr>
@@ -3934,7 +3934,7 @@
           <p:cNvPr id="10" name="">
             <a:extLst xmlns:a="http://schemas.openxmlformats.org/drawingml/2006/main">
               <a:ext uri="{FF2B5EF4-FFF2-40B4-BE49-F238E27FC236}">
-                <a16:creationId xmlns:a16="http://schemas.microsoft.com/office/drawing/2014/main" id="{5D3AD0D4-FF25-4FEB-AE0B-2D3A4B79601A}"/>
+                <a16:creationId xmlns:a16="http://schemas.microsoft.com/office/drawing/2014/main" id="{A8FC0EF1-FD3D-4E89-AC6B-0A06797599DE}"/>
               </a:ext>
             </a:extLst>
           </p:cNvPr>
@@ -3965,7 +3965,7 @@
           <p:cNvPr id="11" name="">
             <a:extLst xmlns:a="http://schemas.openxmlformats.org/drawingml/2006/main">
               <a:ext uri="{FF2B5EF4-FFF2-40B4-BE49-F238E27FC236}">
-                <a16:creationId xmlns:a16="http://schemas.microsoft.com/office/drawing/2014/main" id="{AB29D075-DC6E-495D-88B6-04C7852AD2C5}"/>
+                <a16:creationId xmlns:a16="http://schemas.microsoft.com/office/drawing/2014/main" id="{0932F782-722C-4DC3-A6F1-4F6FAF6FAC50}"/>
               </a:ext>
             </a:extLst>
           </p:cNvPr>
@@ -4026,7 +4026,7 @@
           <p:cNvPr id="12" name="">
             <a:extLst xmlns:a="http://schemas.openxmlformats.org/drawingml/2006/main">
               <a:ext uri="{FF2B5EF4-FFF2-40B4-BE49-F238E27FC236}">
-                <a16:creationId xmlns:a16="http://schemas.microsoft.com/office/drawing/2014/main" id="{72B6B510-0088-4CA2-993B-1B5A8CD9E100}"/>
+                <a16:creationId xmlns:a16="http://schemas.microsoft.com/office/drawing/2014/main" id="{BDB391CF-D829-4AD9-8C1E-F650630D3FEE}"/>
               </a:ext>
             </a:extLst>
           </p:cNvPr>
@@ -4087,7 +4087,7 @@
           <p:cNvPr id="13" name="">
             <a:extLst xmlns:a="http://schemas.openxmlformats.org/drawingml/2006/main">
               <a:ext uri="{FF2B5EF4-FFF2-40B4-BE49-F238E27FC236}">
-                <a16:creationId xmlns:a16="http://schemas.microsoft.com/office/drawing/2014/main" id="{9525448F-083A-4329-B387-F75F5CBA1194}"/>
+                <a16:creationId xmlns:a16="http://schemas.microsoft.com/office/drawing/2014/main" id="{A5A28442-1A48-4B15-B249-77051951F192}"/>
               </a:ext>
             </a:extLst>
           </p:cNvPr>
@@ -4148,7 +4148,7 @@
           <p:cNvPr id="14" name="">
             <a:extLst xmlns:a="http://schemas.openxmlformats.org/drawingml/2006/main">
               <a:ext uri="{FF2B5EF4-FFF2-40B4-BE49-F238E27FC236}">
-                <a16:creationId xmlns:a16="http://schemas.microsoft.com/office/drawing/2014/main" id="{6A0B43C5-1454-495D-B285-A8E14F313CA5}"/>
+                <a16:creationId xmlns:a16="http://schemas.microsoft.com/office/drawing/2014/main" id="{4ADF4A8C-E2DE-4D3C-A54C-2A5E00C40974}"/>
               </a:ext>
             </a:extLst>
           </p:cNvPr>
@@ -4179,7 +4179,7 @@
           <p:cNvPr id="15" name="">
             <a:extLst xmlns:a="http://schemas.openxmlformats.org/drawingml/2006/main">
               <a:ext uri="{FF2B5EF4-FFF2-40B4-BE49-F238E27FC236}">
-                <a16:creationId xmlns:a16="http://schemas.microsoft.com/office/drawing/2014/main" id="{B24F811E-C234-437C-A37E-72AF6A536AA6}"/>
+                <a16:creationId xmlns:a16="http://schemas.microsoft.com/office/drawing/2014/main" id="{0867A4B3-B502-43DA-AF49-625E390EE3B5}"/>
               </a:ext>
             </a:extLst>
           </p:cNvPr>
@@ -4240,7 +4240,7 @@
           <p:cNvPr id="16" name="">
             <a:extLst xmlns:a="http://schemas.openxmlformats.org/drawingml/2006/main">
               <a:ext uri="{FF2B5EF4-FFF2-40B4-BE49-F238E27FC236}">
-                <a16:creationId xmlns:a16="http://schemas.microsoft.com/office/drawing/2014/main" id="{52DE63ED-BF53-4AB9-9D0B-E6A4BC992080}"/>
+                <a16:creationId xmlns:a16="http://schemas.microsoft.com/office/drawing/2014/main" id="{6B58B03C-40EF-4C1B-86D9-5989E4BF43B1}"/>
               </a:ext>
             </a:extLst>
           </p:cNvPr>
@@ -4301,7 +4301,7 @@
           <p:cNvPr id="17" name="">
             <a:extLst xmlns:a="http://schemas.openxmlformats.org/drawingml/2006/main">
               <a:ext uri="{FF2B5EF4-FFF2-40B4-BE49-F238E27FC236}">
-                <a16:creationId xmlns:a16="http://schemas.microsoft.com/office/drawing/2014/main" id="{CD098F07-9CF1-43F9-AFEB-F3E0B5C2D89E}"/>
+                <a16:creationId xmlns:a16="http://schemas.microsoft.com/office/drawing/2014/main" id="{3385CD1C-64A4-4CA7-BBB6-C9A8ACF98CF5}"/>
               </a:ext>
             </a:extLst>
           </p:cNvPr>
@@ -4362,7 +4362,7 @@
           <p:cNvPr id="18" name="">
             <a:extLst xmlns:a="http://schemas.openxmlformats.org/drawingml/2006/main">
               <a:ext uri="{FF2B5EF4-FFF2-40B4-BE49-F238E27FC236}">
-                <a16:creationId xmlns:a16="http://schemas.microsoft.com/office/drawing/2014/main" id="{61C8B737-DF6B-4498-9085-836EB9BE5210}"/>
+                <a16:creationId xmlns:a16="http://schemas.microsoft.com/office/drawing/2014/main" id="{33C08DA3-6ED6-435F-A416-53752EA30479}"/>
               </a:ext>
             </a:extLst>
           </p:cNvPr>
@@ -4392,7 +4392,7 @@
           <p:cNvPr id="19" name="">
             <a:extLst xmlns:a="http://schemas.openxmlformats.org/drawingml/2006/main">
               <a:ext uri="{FF2B5EF4-FFF2-40B4-BE49-F238E27FC236}">
-                <a16:creationId xmlns:a16="http://schemas.microsoft.com/office/drawing/2014/main" id="{CD6EE083-AF59-47F1-8F9E-CF93EC33ED10}"/>
+                <a16:creationId xmlns:a16="http://schemas.microsoft.com/office/drawing/2014/main" id="{CB03DD9F-261A-4AC0-8718-6A20A481F41B}"/>
               </a:ext>
             </a:extLst>
           </p:cNvPr>
@@ -4453,7 +4453,7 @@
           <p:cNvPr id="20" name="">
             <a:extLst xmlns:a="http://schemas.openxmlformats.org/drawingml/2006/main">
               <a:ext uri="{FF2B5EF4-FFF2-40B4-BE49-F238E27FC236}">
-                <a16:creationId xmlns:a16="http://schemas.microsoft.com/office/drawing/2014/main" id="{5A3F0D77-BEA1-48C6-89B8-F26F8C89B942}"/>
+                <a16:creationId xmlns:a16="http://schemas.microsoft.com/office/drawing/2014/main" id="{C5E2D4CF-CD78-4ED6-95B9-505070F9FF20}"/>
               </a:ext>
             </a:extLst>
           </p:cNvPr>
@@ -4484,7 +4484,7 @@
           <p:cNvPr id="21" name="">
             <a:extLst xmlns:a="http://schemas.openxmlformats.org/drawingml/2006/main">
               <a:ext uri="{FF2B5EF4-FFF2-40B4-BE49-F238E27FC236}">
-                <a16:creationId xmlns:a16="http://schemas.microsoft.com/office/drawing/2014/main" id="{F00AAA7D-C612-474D-AE41-87EC44D2B2F4}"/>
+                <a16:creationId xmlns:a16="http://schemas.microsoft.com/office/drawing/2014/main" id="{A9540AF3-BBF2-492B-A52E-A470D37111FC}"/>
               </a:ext>
             </a:extLst>
           </p:cNvPr>
@@ -4535,7 +4535,7 @@
                 <a:ea typeface="Arial"/>
                 <a:cs typeface="Arial"/>
               </a:rPr>
-              <a:t>FORMULABENCH  ·  RESEARCH / TRACK 2</a:t>
+              <a:t>FORMULABENCH  ·  RESEARCH: EXCEL FORMULA GENERATION</a:t>
             </a:r>
           </a:p>
         </p:txBody>
@@ -4545,7 +4545,7 @@
           <p:cNvPr id="22" name="">
             <a:extLst xmlns:a="http://schemas.openxmlformats.org/drawingml/2006/main">
               <a:ext uri="{FF2B5EF4-FFF2-40B4-BE49-F238E27FC236}">
-                <a16:creationId xmlns:a16="http://schemas.microsoft.com/office/drawing/2014/main" id="{9FF06154-D016-4BA6-88F5-C20A6B72766A}"/>
+                <a16:creationId xmlns:a16="http://schemas.microsoft.com/office/drawing/2014/main" id="{D835E5E5-6136-4CF1-AC2E-12D97193DA36}"/>
               </a:ext>
             </a:extLst>
           </p:cNvPr>
@@ -4604,7 +4604,7 @@
     </p:spTree>
     <p:extLst>
       <p:ext uri="{BB962C8B-B14F-4D97-AF65-F5344CB8AC3E}">
-        <p14:creationId xmlns:p14="http://schemas.microsoft.com/office/powerpoint/2010/main" val="1186433775"/>
+        <p14:creationId xmlns:p14="http://schemas.microsoft.com/office/powerpoint/2010/main" val="693287952"/>
       </p:ext>
     </p:extLst>
   </p:cSld>
@@ -4635,7 +4635,7 @@
           <p:cNvPr id="38" name="slide-title">
             <a:extLst xmlns:a="http://schemas.openxmlformats.org/drawingml/2006/main">
               <a:ext uri="{FF2B5EF4-FFF2-40B4-BE49-F238E27FC236}">
-                <a16:creationId xmlns:a16="http://schemas.microsoft.com/office/drawing/2014/main" id="{A7314E9E-D8C4-4AC4-BF16-ADB16F73827F}"/>
+                <a16:creationId xmlns:a16="http://schemas.microsoft.com/office/drawing/2014/main" id="{36D48C19-F651-434A-9ACA-DE3398088E3D}"/>
               </a:ext>
             </a:extLst>
           </p:cNvPr>
@@ -4696,7 +4696,7 @@
           <p:cNvPr id="2" name="">
             <a:extLst xmlns:a="http://schemas.openxmlformats.org/drawingml/2006/main">
               <a:ext uri="{FF2B5EF4-FFF2-40B4-BE49-F238E27FC236}">
-                <a16:creationId xmlns:a16="http://schemas.microsoft.com/office/drawing/2014/main" id="{C9446748-08D8-4A03-8133-D7736F905BC3}"/>
+                <a16:creationId xmlns:a16="http://schemas.microsoft.com/office/drawing/2014/main" id="{A75B172D-06CF-4C11-A5EC-C324DDB3CEA6}"/>
               </a:ext>
             </a:extLst>
           </p:cNvPr>
@@ -4757,7 +4757,7 @@
           <p:cNvPr id="3" name="">
             <a:extLst xmlns:a="http://schemas.openxmlformats.org/drawingml/2006/main">
               <a:ext uri="{FF2B5EF4-FFF2-40B4-BE49-F238E27FC236}">
-                <a16:creationId xmlns:a16="http://schemas.microsoft.com/office/drawing/2014/main" id="{955F756F-D72E-4224-B0F7-77683A574E5E}"/>
+                <a16:creationId xmlns:a16="http://schemas.microsoft.com/office/drawing/2014/main" id="{4C0F782E-2A74-4E90-945C-786A4A957DBF}"/>
               </a:ext>
             </a:extLst>
           </p:cNvPr>
@@ -4818,7 +4818,7 @@
           <p:cNvPr id="4" name="">
             <a:extLst xmlns:a="http://schemas.openxmlformats.org/drawingml/2006/main">
               <a:ext uri="{FF2B5EF4-FFF2-40B4-BE49-F238E27FC236}">
-                <a16:creationId xmlns:a16="http://schemas.microsoft.com/office/drawing/2014/main" id="{19261769-E965-4807-BE0A-D2E80001285A}"/>
+                <a16:creationId xmlns:a16="http://schemas.microsoft.com/office/drawing/2014/main" id="{29CD9124-735D-4D4B-B614-2CD9015D3DE3}"/>
               </a:ext>
             </a:extLst>
           </p:cNvPr>
@@ -4849,7 +4849,7 @@
           <p:cNvPr id="5" name="">
             <a:extLst xmlns:a="http://schemas.openxmlformats.org/drawingml/2006/main">
               <a:ext uri="{FF2B5EF4-FFF2-40B4-BE49-F238E27FC236}">
-                <a16:creationId xmlns:a16="http://schemas.microsoft.com/office/drawing/2014/main" id="{1B52BBE9-C174-4FF2-8C35-5B94E5C7CC36}"/>
+                <a16:creationId xmlns:a16="http://schemas.microsoft.com/office/drawing/2014/main" id="{1939C090-CCB8-4099-BCEB-FDADA38D8DF3}"/>
               </a:ext>
             </a:extLst>
           </p:cNvPr>
@@ -4910,7 +4910,7 @@
           <p:cNvPr id="6" name="">
             <a:extLst xmlns:a="http://schemas.openxmlformats.org/drawingml/2006/main">
               <a:ext uri="{FF2B5EF4-FFF2-40B4-BE49-F238E27FC236}">
-                <a16:creationId xmlns:a16="http://schemas.microsoft.com/office/drawing/2014/main" id="{5089FE0B-1070-4FC4-B31A-7F7341CC0BDA}"/>
+                <a16:creationId xmlns:a16="http://schemas.microsoft.com/office/drawing/2014/main" id="{1D8D54DB-AE53-495D-BE45-91DDB7F1C62A}"/>
               </a:ext>
             </a:extLst>
           </p:cNvPr>
@@ -4941,7 +4941,7 @@
           <p:cNvPr id="7" name="">
             <a:extLst xmlns:a="http://schemas.openxmlformats.org/drawingml/2006/main">
               <a:ext uri="{FF2B5EF4-FFF2-40B4-BE49-F238E27FC236}">
-                <a16:creationId xmlns:a16="http://schemas.microsoft.com/office/drawing/2014/main" id="{157B428B-132B-43E0-95EB-A7D3C886750E}"/>
+                <a16:creationId xmlns:a16="http://schemas.microsoft.com/office/drawing/2014/main" id="{0E0D8364-D03F-4634-917D-0E9FD060A08E}"/>
               </a:ext>
             </a:extLst>
           </p:cNvPr>
@@ -5002,7 +5002,7 @@
           <p:cNvPr id="8" name="">
             <a:extLst xmlns:a="http://schemas.openxmlformats.org/drawingml/2006/main">
               <a:ext uri="{FF2B5EF4-FFF2-40B4-BE49-F238E27FC236}">
-                <a16:creationId xmlns:a16="http://schemas.microsoft.com/office/drawing/2014/main" id="{834207DD-5761-47F5-9955-F395748CFF7F}"/>
+                <a16:creationId xmlns:a16="http://schemas.microsoft.com/office/drawing/2014/main" id="{A92FC325-A727-44B9-B846-2581FD948F7D}"/>
               </a:ext>
             </a:extLst>
           </p:cNvPr>
@@ -5033,7 +5033,7 @@
           <p:cNvPr id="9" name="">
             <a:extLst xmlns:a="http://schemas.openxmlformats.org/drawingml/2006/main">
               <a:ext uri="{FF2B5EF4-FFF2-40B4-BE49-F238E27FC236}">
-                <a16:creationId xmlns:a16="http://schemas.microsoft.com/office/drawing/2014/main" id="{5137A72A-4B3D-4629-8F8F-D8F78E40320A}"/>
+                <a16:creationId xmlns:a16="http://schemas.microsoft.com/office/drawing/2014/main" id="{7EB73320-A9A0-4341-BF12-44DC8419426C}"/>
               </a:ext>
             </a:extLst>
           </p:cNvPr>
@@ -5064,7 +5064,7 @@
           <p:cNvPr id="10" name="">
             <a:extLst xmlns:a="http://schemas.openxmlformats.org/drawingml/2006/main">
               <a:ext uri="{FF2B5EF4-FFF2-40B4-BE49-F238E27FC236}">
-                <a16:creationId xmlns:a16="http://schemas.microsoft.com/office/drawing/2014/main" id="{475A7DE2-6DBB-412F-BE73-1639339CE1BC}"/>
+                <a16:creationId xmlns:a16="http://schemas.microsoft.com/office/drawing/2014/main" id="{431542F5-FBF2-4D21-A322-95DDD55EECD8}"/>
               </a:ext>
             </a:extLst>
           </p:cNvPr>
@@ -5125,7 +5125,7 @@
           <p:cNvPr id="11" name="">
             <a:extLst xmlns:a="http://schemas.openxmlformats.org/drawingml/2006/main">
               <a:ext uri="{FF2B5EF4-FFF2-40B4-BE49-F238E27FC236}">
-                <a16:creationId xmlns:a16="http://schemas.microsoft.com/office/drawing/2014/main" id="{C2F03B69-EC27-44BD-8C22-33D49D157BE9}"/>
+                <a16:creationId xmlns:a16="http://schemas.microsoft.com/office/drawing/2014/main" id="{C9F449A7-0BE2-4BD7-B96D-8F5B3B42EF3D}"/>
               </a:ext>
             </a:extLst>
           </p:cNvPr>
@@ -5158,7 +5158,7 @@
           <p:cNvPr id="12" name="">
             <a:extLst xmlns:a="http://schemas.openxmlformats.org/drawingml/2006/main">
               <a:ext uri="{FF2B5EF4-FFF2-40B4-BE49-F238E27FC236}">
-                <a16:creationId xmlns:a16="http://schemas.microsoft.com/office/drawing/2014/main" id="{CEF4F09D-7D16-4C02-A260-A77DEDCAC8A2}"/>
+                <a16:creationId xmlns:a16="http://schemas.microsoft.com/office/drawing/2014/main" id="{60807C9F-DB7A-4F32-BB79-0699EE8D4104}"/>
               </a:ext>
             </a:extLst>
           </p:cNvPr>
@@ -5219,7 +5219,7 @@
           <p:cNvPr id="13" name="">
             <a:extLst xmlns:a="http://schemas.openxmlformats.org/drawingml/2006/main">
               <a:ext uri="{FF2B5EF4-FFF2-40B4-BE49-F238E27FC236}">
-                <a16:creationId xmlns:a16="http://schemas.microsoft.com/office/drawing/2014/main" id="{0494D271-4820-4906-950C-441AAA2DA64E}"/>
+                <a16:creationId xmlns:a16="http://schemas.microsoft.com/office/drawing/2014/main" id="{82DBEE2E-B345-4DC2-9A82-B80C4EB1CC4E}"/>
               </a:ext>
             </a:extLst>
           </p:cNvPr>
@@ -5280,7 +5280,7 @@
           <p:cNvPr id="14" name="">
             <a:extLst xmlns:a="http://schemas.openxmlformats.org/drawingml/2006/main">
               <a:ext uri="{FF2B5EF4-FFF2-40B4-BE49-F238E27FC236}">
-                <a16:creationId xmlns:a16="http://schemas.microsoft.com/office/drawing/2014/main" id="{CF26D163-AB05-4611-8591-84C36ED046A7}"/>
+                <a16:creationId xmlns:a16="http://schemas.microsoft.com/office/drawing/2014/main" id="{62BE1403-4709-45C0-BBB3-E70BD3302BB8}"/>
               </a:ext>
             </a:extLst>
           </p:cNvPr>
@@ -5313,7 +5313,7 @@
           <p:cNvPr id="15" name="">
             <a:extLst xmlns:a="http://schemas.openxmlformats.org/drawingml/2006/main">
               <a:ext uri="{FF2B5EF4-FFF2-40B4-BE49-F238E27FC236}">
-                <a16:creationId xmlns:a16="http://schemas.microsoft.com/office/drawing/2014/main" id="{B2B33C41-B4D4-40FD-95D6-683716105BC8}"/>
+                <a16:creationId xmlns:a16="http://schemas.microsoft.com/office/drawing/2014/main" id="{2360E56A-996E-4861-B65B-0B11986E83BA}"/>
               </a:ext>
             </a:extLst>
           </p:cNvPr>
@@ -5374,7 +5374,7 @@
           <p:cNvPr id="16" name="">
             <a:extLst xmlns:a="http://schemas.openxmlformats.org/drawingml/2006/main">
               <a:ext uri="{FF2B5EF4-FFF2-40B4-BE49-F238E27FC236}">
-                <a16:creationId xmlns:a16="http://schemas.microsoft.com/office/drawing/2014/main" id="{98E7ED3A-D4EB-4F79-AC02-95136325D446}"/>
+                <a16:creationId xmlns:a16="http://schemas.microsoft.com/office/drawing/2014/main" id="{CB5B2108-03D4-4C3E-A62B-803097C5CA40}"/>
               </a:ext>
             </a:extLst>
           </p:cNvPr>
@@ -5435,7 +5435,7 @@
           <p:cNvPr id="17" name="">
             <a:extLst xmlns:a="http://schemas.openxmlformats.org/drawingml/2006/main">
               <a:ext uri="{FF2B5EF4-FFF2-40B4-BE49-F238E27FC236}">
-                <a16:creationId xmlns:a16="http://schemas.microsoft.com/office/drawing/2014/main" id="{0DB3EB40-F548-4192-B9D5-7A042AE900EF}"/>
+                <a16:creationId xmlns:a16="http://schemas.microsoft.com/office/drawing/2014/main" id="{738F2C29-288F-4B27-888D-DEA78F273E82}"/>
               </a:ext>
             </a:extLst>
           </p:cNvPr>
@@ -5468,7 +5468,7 @@
           <p:cNvPr id="18" name="">
             <a:extLst xmlns:a="http://schemas.openxmlformats.org/drawingml/2006/main">
               <a:ext uri="{FF2B5EF4-FFF2-40B4-BE49-F238E27FC236}">
-                <a16:creationId xmlns:a16="http://schemas.microsoft.com/office/drawing/2014/main" id="{AC8DF998-5B29-4844-AAD6-6189EA130882}"/>
+                <a16:creationId xmlns:a16="http://schemas.microsoft.com/office/drawing/2014/main" id="{F62EFA87-1721-495C-82B1-5E282941E45F}"/>
               </a:ext>
             </a:extLst>
           </p:cNvPr>
@@ -5529,7 +5529,7 @@
           <p:cNvPr id="19" name="">
             <a:extLst xmlns:a="http://schemas.openxmlformats.org/drawingml/2006/main">
               <a:ext uri="{FF2B5EF4-FFF2-40B4-BE49-F238E27FC236}">
-                <a16:creationId xmlns:a16="http://schemas.microsoft.com/office/drawing/2014/main" id="{330C9BCF-5E79-4EF9-B6A0-702DCC316C5F}"/>
+                <a16:creationId xmlns:a16="http://schemas.microsoft.com/office/drawing/2014/main" id="{98C60C1B-7A43-4A61-AD10-069BDEE1A71C}"/>
               </a:ext>
             </a:extLst>
           </p:cNvPr>
@@ -5590,7 +5590,7 @@
           <p:cNvPr id="20" name="">
             <a:extLst xmlns:a="http://schemas.openxmlformats.org/drawingml/2006/main">
               <a:ext uri="{FF2B5EF4-FFF2-40B4-BE49-F238E27FC236}">
-                <a16:creationId xmlns:a16="http://schemas.microsoft.com/office/drawing/2014/main" id="{A400861E-FDF5-4AB9-A836-51E51059BFD9}"/>
+                <a16:creationId xmlns:a16="http://schemas.microsoft.com/office/drawing/2014/main" id="{2B5D404B-E837-4B1A-A024-FEA9819F5AF9}"/>
               </a:ext>
             </a:extLst>
           </p:cNvPr>
@@ -5623,7 +5623,7 @@
           <p:cNvPr id="21" name="">
             <a:extLst xmlns:a="http://schemas.openxmlformats.org/drawingml/2006/main">
               <a:ext uri="{FF2B5EF4-FFF2-40B4-BE49-F238E27FC236}">
-                <a16:creationId xmlns:a16="http://schemas.microsoft.com/office/drawing/2014/main" id="{D9843D57-24CC-403C-B524-1AC35460E81D}"/>
+                <a16:creationId xmlns:a16="http://schemas.microsoft.com/office/drawing/2014/main" id="{440E9091-F36E-449F-A066-473CE42B292D}"/>
               </a:ext>
             </a:extLst>
           </p:cNvPr>
@@ -5684,7 +5684,7 @@
           <p:cNvPr id="22" name="">
             <a:extLst xmlns:a="http://schemas.openxmlformats.org/drawingml/2006/main">
               <a:ext uri="{FF2B5EF4-FFF2-40B4-BE49-F238E27FC236}">
-                <a16:creationId xmlns:a16="http://schemas.microsoft.com/office/drawing/2014/main" id="{25C809A2-F244-421C-A6A8-098CFA1BDBE2}"/>
+                <a16:creationId xmlns:a16="http://schemas.microsoft.com/office/drawing/2014/main" id="{342E4C87-3994-4504-B2EB-AB8789F598AB}"/>
               </a:ext>
             </a:extLst>
           </p:cNvPr>
@@ -5745,7 +5745,7 @@
           <p:cNvPr id="23" name="">
             <a:extLst xmlns:a="http://schemas.openxmlformats.org/drawingml/2006/main">
               <a:ext uri="{FF2B5EF4-FFF2-40B4-BE49-F238E27FC236}">
-                <a16:creationId xmlns:a16="http://schemas.microsoft.com/office/drawing/2014/main" id="{F9C67023-1D47-4AFF-8AFD-0C680912C50C}"/>
+                <a16:creationId xmlns:a16="http://schemas.microsoft.com/office/drawing/2014/main" id="{24979EC6-3652-477D-B43D-475C17519262}"/>
               </a:ext>
             </a:extLst>
           </p:cNvPr>
@@ -5778,7 +5778,7 @@
           <p:cNvPr id="24" name="">
             <a:extLst xmlns:a="http://schemas.openxmlformats.org/drawingml/2006/main">
               <a:ext uri="{FF2B5EF4-FFF2-40B4-BE49-F238E27FC236}">
-                <a16:creationId xmlns:a16="http://schemas.microsoft.com/office/drawing/2014/main" id="{B042B9B0-DB18-4CEF-AB34-51FB9BF66E99}"/>
+                <a16:creationId xmlns:a16="http://schemas.microsoft.com/office/drawing/2014/main" id="{7DD418EE-2B8F-4C6E-9196-A4AAFA5FA57C}"/>
               </a:ext>
             </a:extLst>
           </p:cNvPr>
@@ -5839,7 +5839,7 @@
           <p:cNvPr id="25" name="">
             <a:extLst xmlns:a="http://schemas.openxmlformats.org/drawingml/2006/main">
               <a:ext uri="{FF2B5EF4-FFF2-40B4-BE49-F238E27FC236}">
-                <a16:creationId xmlns:a16="http://schemas.microsoft.com/office/drawing/2014/main" id="{5B36D55C-1662-451D-94F1-64AA8C48B051}"/>
+                <a16:creationId xmlns:a16="http://schemas.microsoft.com/office/drawing/2014/main" id="{CA6FD4D4-1AD5-4E6A-A41F-7320B1171EB4}"/>
               </a:ext>
             </a:extLst>
           </p:cNvPr>
@@ -5870,7 +5870,7 @@
           <p:cNvPr id="26" name="">
             <a:extLst xmlns:a="http://schemas.openxmlformats.org/drawingml/2006/main">
               <a:ext uri="{FF2B5EF4-FFF2-40B4-BE49-F238E27FC236}">
-                <a16:creationId xmlns:a16="http://schemas.microsoft.com/office/drawing/2014/main" id="{893D33DD-F7BD-44C8-9ED2-E2BB0A890320}"/>
+                <a16:creationId xmlns:a16="http://schemas.microsoft.com/office/drawing/2014/main" id="{8FE30956-287D-4473-9467-F58CD486F3DB}"/>
               </a:ext>
             </a:extLst>
           </p:cNvPr>
@@ -5903,7 +5903,7 @@
           <p:cNvPr id="27" name="">
             <a:extLst xmlns:a="http://schemas.openxmlformats.org/drawingml/2006/main">
               <a:ext uri="{FF2B5EF4-FFF2-40B4-BE49-F238E27FC236}">
-                <a16:creationId xmlns:a16="http://schemas.microsoft.com/office/drawing/2014/main" id="{1C0FE9A3-1266-41D2-9277-5B8CCC24F943}"/>
+                <a16:creationId xmlns:a16="http://schemas.microsoft.com/office/drawing/2014/main" id="{E96EA64F-ACFA-4453-9F48-6A2B21090821}"/>
               </a:ext>
             </a:extLst>
           </p:cNvPr>
@@ -5964,7 +5964,7 @@
           <p:cNvPr id="28" name="">
             <a:extLst xmlns:a="http://schemas.openxmlformats.org/drawingml/2006/main">
               <a:ext uri="{FF2B5EF4-FFF2-40B4-BE49-F238E27FC236}">
-                <a16:creationId xmlns:a16="http://schemas.microsoft.com/office/drawing/2014/main" id="{C0EFF34C-1A99-4BC1-B08E-74BB63C63D99}"/>
+                <a16:creationId xmlns:a16="http://schemas.microsoft.com/office/drawing/2014/main" id="{471710A1-64E1-4329-94C3-D79B370BAD18}"/>
               </a:ext>
             </a:extLst>
           </p:cNvPr>
@@ -6025,7 +6025,7 @@
           <p:cNvPr id="29" name="">
             <a:extLst xmlns:a="http://schemas.openxmlformats.org/drawingml/2006/main">
               <a:ext uri="{FF2B5EF4-FFF2-40B4-BE49-F238E27FC236}">
-                <a16:creationId xmlns:a16="http://schemas.microsoft.com/office/drawing/2014/main" id="{C841560A-8868-459B-ABD3-E6104DD29CA7}"/>
+                <a16:creationId xmlns:a16="http://schemas.microsoft.com/office/drawing/2014/main" id="{FEC30898-6455-4F51-9BF6-E7AB2967EAE9}"/>
               </a:ext>
             </a:extLst>
           </p:cNvPr>
@@ -6086,7 +6086,7 @@
           <p:cNvPr id="30" name="">
             <a:extLst xmlns:a="http://schemas.openxmlformats.org/drawingml/2006/main">
               <a:ext uri="{FF2B5EF4-FFF2-40B4-BE49-F238E27FC236}">
-                <a16:creationId xmlns:a16="http://schemas.microsoft.com/office/drawing/2014/main" id="{B1D7E23B-6FCE-43FC-A728-A3E176CAF277}"/>
+                <a16:creationId xmlns:a16="http://schemas.microsoft.com/office/drawing/2014/main" id="{D8000DAC-8238-41A5-89D7-0ACA145C9FDE}"/>
               </a:ext>
             </a:extLst>
           </p:cNvPr>
@@ -6117,7 +6117,7 @@
           <p:cNvPr id="31" name="">
             <a:extLst xmlns:a="http://schemas.openxmlformats.org/drawingml/2006/main">
               <a:ext uri="{FF2B5EF4-FFF2-40B4-BE49-F238E27FC236}">
-                <a16:creationId xmlns:a16="http://schemas.microsoft.com/office/drawing/2014/main" id="{7EA8299D-6CB8-45FA-9143-0702BA5C978C}"/>
+                <a16:creationId xmlns:a16="http://schemas.microsoft.com/office/drawing/2014/main" id="{E15137CD-98CE-4DAF-A75A-823150C8305E}"/>
               </a:ext>
             </a:extLst>
           </p:cNvPr>
@@ -6178,7 +6178,7 @@
           <p:cNvPr id="32" name="">
             <a:extLst xmlns:a="http://schemas.openxmlformats.org/drawingml/2006/main">
               <a:ext uri="{FF2B5EF4-FFF2-40B4-BE49-F238E27FC236}">
-                <a16:creationId xmlns:a16="http://schemas.microsoft.com/office/drawing/2014/main" id="{F12C4494-9CB7-4BB6-9A05-45D645CE9FD6}"/>
+                <a16:creationId xmlns:a16="http://schemas.microsoft.com/office/drawing/2014/main" id="{5CB4AE01-085C-4F8B-A2E2-9759048B593D}"/>
               </a:ext>
             </a:extLst>
           </p:cNvPr>
@@ -6239,7 +6239,7 @@
           <p:cNvPr id="33" name="">
             <a:extLst xmlns:a="http://schemas.openxmlformats.org/drawingml/2006/main">
               <a:ext uri="{FF2B5EF4-FFF2-40B4-BE49-F238E27FC236}">
-                <a16:creationId xmlns:a16="http://schemas.microsoft.com/office/drawing/2014/main" id="{8F157332-1AE6-4848-B4E2-8B6F641069AD}"/>
+                <a16:creationId xmlns:a16="http://schemas.microsoft.com/office/drawing/2014/main" id="{09D68673-C09D-4380-BE4F-9A8DEFE4FE21}"/>
               </a:ext>
             </a:extLst>
           </p:cNvPr>
@@ -6300,7 +6300,7 @@
           <p:cNvPr id="34" name="">
             <a:extLst xmlns:a="http://schemas.openxmlformats.org/drawingml/2006/main">
               <a:ext uri="{FF2B5EF4-FFF2-40B4-BE49-F238E27FC236}">
-                <a16:creationId xmlns:a16="http://schemas.microsoft.com/office/drawing/2014/main" id="{EAAD0B02-DDD7-4C6E-8A97-CEBB9187A440}"/>
+                <a16:creationId xmlns:a16="http://schemas.microsoft.com/office/drawing/2014/main" id="{230A22F0-38B9-4F81-AED1-7705B0F5BC8D}"/>
               </a:ext>
             </a:extLst>
           </p:cNvPr>
@@ -6361,7 +6361,7 @@
           <p:cNvPr id="35" name="">
             <a:extLst xmlns:a="http://schemas.openxmlformats.org/drawingml/2006/main">
               <a:ext uri="{FF2B5EF4-FFF2-40B4-BE49-F238E27FC236}">
-                <a16:creationId xmlns:a16="http://schemas.microsoft.com/office/drawing/2014/main" id="{FC60ED5D-7A3C-42BC-ABB2-C4D398F72D2A}"/>
+                <a16:creationId xmlns:a16="http://schemas.microsoft.com/office/drawing/2014/main" id="{595D6B36-7EBC-4BAD-AF76-944C04B65F39}"/>
               </a:ext>
             </a:extLst>
           </p:cNvPr>
@@ -6392,7 +6392,7 @@
           <p:cNvPr id="36" name="">
             <a:extLst xmlns:a="http://schemas.openxmlformats.org/drawingml/2006/main">
               <a:ext uri="{FF2B5EF4-FFF2-40B4-BE49-F238E27FC236}">
-                <a16:creationId xmlns:a16="http://schemas.microsoft.com/office/drawing/2014/main" id="{EF8903BD-6FB9-4085-86A1-22CEE37B452E}"/>
+                <a16:creationId xmlns:a16="http://schemas.microsoft.com/office/drawing/2014/main" id="{E48237D5-F413-48BC-AEED-ACC7CD9045BB}"/>
               </a:ext>
             </a:extLst>
           </p:cNvPr>
@@ -6443,7 +6443,7 @@
                 <a:ea typeface="Arial"/>
                 <a:cs typeface="Arial"/>
               </a:rPr>
-              <a:t>FORMULABENCH  ·  RESEARCH / TRACK 2</a:t>
+              <a:t>FORMULABENCH  ·  RESEARCH: EXCEL FORMULA GENERATION</a:t>
             </a:r>
           </a:p>
         </p:txBody>
@@ -6453,7 +6453,7 @@
           <p:cNvPr id="37" name="">
             <a:extLst xmlns:a="http://schemas.openxmlformats.org/drawingml/2006/main">
               <a:ext uri="{FF2B5EF4-FFF2-40B4-BE49-F238E27FC236}">
-                <a16:creationId xmlns:a16="http://schemas.microsoft.com/office/drawing/2014/main" id="{39664913-30EA-4553-9654-0230C96612B4}"/>
+                <a16:creationId xmlns:a16="http://schemas.microsoft.com/office/drawing/2014/main" id="{1DD9EAAC-0ACA-495E-816A-93EC45B5E67C}"/>
               </a:ext>
             </a:extLst>
           </p:cNvPr>
@@ -6512,7 +6512,7 @@
     </p:spTree>
     <p:extLst>
       <p:ext uri="{BB962C8B-B14F-4D97-AF65-F5344CB8AC3E}">
-        <p14:creationId xmlns:p14="http://schemas.microsoft.com/office/powerpoint/2010/main" val="1362314503"/>
+        <p14:creationId xmlns:p14="http://schemas.microsoft.com/office/powerpoint/2010/main" val="1399336237"/>
       </p:ext>
     </p:extLst>
   </p:cSld>
@@ -6543,7 +6543,7 @@
           <p:cNvPr id="8" name="slide-title">
             <a:extLst xmlns:a="http://schemas.openxmlformats.org/drawingml/2006/main">
               <a:ext uri="{FF2B5EF4-FFF2-40B4-BE49-F238E27FC236}">
-                <a16:creationId xmlns:a16="http://schemas.microsoft.com/office/drawing/2014/main" id="{05EACF2E-8CE8-4C61-8401-85A32F2174DC}"/>
+                <a16:creationId xmlns:a16="http://schemas.microsoft.com/office/drawing/2014/main" id="{934DEE5C-EA7B-49BD-BA8B-FB886F715CC1}"/>
               </a:ext>
             </a:extLst>
           </p:cNvPr>
@@ -6604,7 +6604,7 @@
           <p:cNvPr id="2" name="">
             <a:extLst xmlns:a="http://schemas.openxmlformats.org/drawingml/2006/main">
               <a:ext uri="{FF2B5EF4-FFF2-40B4-BE49-F238E27FC236}">
-                <a16:creationId xmlns:a16="http://schemas.microsoft.com/office/drawing/2014/main" id="{7CE5D7BA-080F-4EA9-B3E3-01C0BAE89666}"/>
+                <a16:creationId xmlns:a16="http://schemas.microsoft.com/office/drawing/2014/main" id="{1BA648A0-2155-4DAB-BC20-4E95F6A573B5}"/>
               </a:ext>
             </a:extLst>
           </p:cNvPr>
@@ -7118,7 +7118,7 @@
           <p:cNvPr id="4" name="">
             <a:extLst xmlns:a="http://schemas.openxmlformats.org/drawingml/2006/main">
               <a:ext uri="{FF2B5EF4-FFF2-40B4-BE49-F238E27FC236}">
-                <a16:creationId xmlns:a16="http://schemas.microsoft.com/office/drawing/2014/main" id="{9DF36416-CAE1-4B08-AD69-8DED034D2240}"/>
+                <a16:creationId xmlns:a16="http://schemas.microsoft.com/office/drawing/2014/main" id="{2B0003E5-CE5C-49BB-87D2-E502D8D40A39}"/>
               </a:ext>
             </a:extLst>
           </p:cNvPr>
@@ -7179,7 +7179,7 @@
           <p:cNvPr id="5" name="">
             <a:extLst xmlns:a="http://schemas.openxmlformats.org/drawingml/2006/main">
               <a:ext uri="{FF2B5EF4-FFF2-40B4-BE49-F238E27FC236}">
-                <a16:creationId xmlns:a16="http://schemas.microsoft.com/office/drawing/2014/main" id="{084CF18C-0618-4405-A1BD-5C49D9C318FB}"/>
+                <a16:creationId xmlns:a16="http://schemas.microsoft.com/office/drawing/2014/main" id="{DE1B28C0-A66D-426D-A731-C468B74DE1A9}"/>
               </a:ext>
             </a:extLst>
           </p:cNvPr>
@@ -7210,7 +7210,7 @@
           <p:cNvPr id="6" name="">
             <a:extLst xmlns:a="http://schemas.openxmlformats.org/drawingml/2006/main">
               <a:ext uri="{FF2B5EF4-FFF2-40B4-BE49-F238E27FC236}">
-                <a16:creationId xmlns:a16="http://schemas.microsoft.com/office/drawing/2014/main" id="{91B9C88E-8783-4EF5-8491-E504FFFB65B0}"/>
+                <a16:creationId xmlns:a16="http://schemas.microsoft.com/office/drawing/2014/main" id="{E9B17D3F-8DD2-4C95-BFD0-A507996C769A}"/>
               </a:ext>
             </a:extLst>
           </p:cNvPr>
@@ -7261,7 +7261,7 @@
                 <a:ea typeface="Arial"/>
                 <a:cs typeface="Arial"/>
               </a:rPr>
-              <a:t>FORMULABENCH  ·  RESEARCH / TRACK 2</a:t>
+              <a:t>FORMULABENCH  ·  RESEARCH: EXCEL FORMULA GENERATION</a:t>
             </a:r>
           </a:p>
         </p:txBody>
@@ -7271,7 +7271,7 @@
           <p:cNvPr id="7" name="">
             <a:extLst xmlns:a="http://schemas.openxmlformats.org/drawingml/2006/main">
               <a:ext uri="{FF2B5EF4-FFF2-40B4-BE49-F238E27FC236}">
-                <a16:creationId xmlns:a16="http://schemas.microsoft.com/office/drawing/2014/main" id="{29093E58-55D0-4F69-ACFF-3BBD3B158314}"/>
+                <a16:creationId xmlns:a16="http://schemas.microsoft.com/office/drawing/2014/main" id="{C60F3EA8-AC59-4676-B447-9D67BEB2E05E}"/>
               </a:ext>
             </a:extLst>
           </p:cNvPr>
@@ -7330,7 +7330,7 @@
     </p:spTree>
     <p:extLst>
       <p:ext uri="{BB962C8B-B14F-4D97-AF65-F5344CB8AC3E}">
-        <p14:creationId xmlns:p14="http://schemas.microsoft.com/office/powerpoint/2010/main" val="1200794271"/>
+        <p14:creationId xmlns:p14="http://schemas.microsoft.com/office/powerpoint/2010/main" val="1619384628"/>
       </p:ext>
     </p:extLst>
   </p:cSld>
@@ -7361,7 +7361,7 @@
           <p:cNvPr id="14" name="slide-title">
             <a:extLst xmlns:a="http://schemas.openxmlformats.org/drawingml/2006/main">
               <a:ext uri="{FF2B5EF4-FFF2-40B4-BE49-F238E27FC236}">
-                <a16:creationId xmlns:a16="http://schemas.microsoft.com/office/drawing/2014/main" id="{689BA516-2213-496F-9363-6208C6577F87}"/>
+                <a16:creationId xmlns:a16="http://schemas.microsoft.com/office/drawing/2014/main" id="{DC6E3B83-E3DB-4FAA-806F-0E6AA7EEF1A7}"/>
               </a:ext>
             </a:extLst>
           </p:cNvPr>
@@ -7422,7 +7422,7 @@
           <p:cNvPr id="2" name="">
             <a:extLst xmlns:a="http://schemas.openxmlformats.org/drawingml/2006/main">
               <a:ext uri="{FF2B5EF4-FFF2-40B4-BE49-F238E27FC236}">
-                <a16:creationId xmlns:a16="http://schemas.microsoft.com/office/drawing/2014/main" id="{5FEECD80-0C79-4710-A7B5-811F4E849C0B}"/>
+                <a16:creationId xmlns:a16="http://schemas.microsoft.com/office/drawing/2014/main" id="{1C7E72CD-5C12-4A6B-BCA2-27972ED9FB81}"/>
               </a:ext>
             </a:extLst>
           </p:cNvPr>
@@ -7490,7 +7490,7 @@
         </p:xfrm>
         <a:graphic xmlns:a="http://schemas.openxmlformats.org/drawingml/2006/main">
           <a:graphicData uri="http://schemas.openxmlformats.org/drawingml/2006/chart">
-            <c:chart xmlns:r="http://schemas.openxmlformats.org/officeDocument/2006/relationships" xmlns:c="http://schemas.openxmlformats.org/drawingml/2006/chart" r:id="Ra6cd158e5f2c4ee8"/>
+            <c:chart xmlns:r="http://schemas.openxmlformats.org/officeDocument/2006/relationships" xmlns:c="http://schemas.openxmlformats.org/drawingml/2006/chart" r:id="R2b47a07c53524778"/>
           </a:graphicData>
         </a:graphic>
       </p:graphicFrame>
@@ -7499,7 +7499,7 @@
           <p:cNvPr id="4" name="">
             <a:extLst xmlns:a="http://schemas.openxmlformats.org/drawingml/2006/main">
               <a:ext uri="{FF2B5EF4-FFF2-40B4-BE49-F238E27FC236}">
-                <a16:creationId xmlns:a16="http://schemas.microsoft.com/office/drawing/2014/main" id="{209E82BD-043A-401B-B844-3F3965E39D1C}"/>
+                <a16:creationId xmlns:a16="http://schemas.microsoft.com/office/drawing/2014/main" id="{A3372F17-8199-49AA-8B13-B91399BB793A}"/>
               </a:ext>
             </a:extLst>
           </p:cNvPr>
@@ -7560,7 +7560,7 @@
           <p:cNvPr id="5" name="">
             <a:extLst xmlns:a="http://schemas.openxmlformats.org/drawingml/2006/main">
               <a:ext uri="{FF2B5EF4-FFF2-40B4-BE49-F238E27FC236}">
-                <a16:creationId xmlns:a16="http://schemas.microsoft.com/office/drawing/2014/main" id="{79E3E75A-695E-4952-83E2-8213916499E9}"/>
+                <a16:creationId xmlns:a16="http://schemas.microsoft.com/office/drawing/2014/main" id="{D421D889-C2DB-4D44-ABDC-FBACC738B478}"/>
               </a:ext>
             </a:extLst>
           </p:cNvPr>
@@ -7621,7 +7621,7 @@
           <p:cNvPr id="6" name="">
             <a:extLst xmlns:a="http://schemas.openxmlformats.org/drawingml/2006/main">
               <a:ext uri="{FF2B5EF4-FFF2-40B4-BE49-F238E27FC236}">
-                <a16:creationId xmlns:a16="http://schemas.microsoft.com/office/drawing/2014/main" id="{8CC4E20E-CCB4-4B7A-9B3E-0CE4FE59CC3E}"/>
+                <a16:creationId xmlns:a16="http://schemas.microsoft.com/office/drawing/2014/main" id="{57315F70-C7F7-4BAA-B1DC-FADDF3F484C9}"/>
               </a:ext>
             </a:extLst>
           </p:cNvPr>
@@ -7652,7 +7652,7 @@
           <p:cNvPr id="7" name="">
             <a:extLst xmlns:a="http://schemas.openxmlformats.org/drawingml/2006/main">
               <a:ext uri="{FF2B5EF4-FFF2-40B4-BE49-F238E27FC236}">
-                <a16:creationId xmlns:a16="http://schemas.microsoft.com/office/drawing/2014/main" id="{C5E53A0A-98C9-476B-B61A-54A9161B6503}"/>
+                <a16:creationId xmlns:a16="http://schemas.microsoft.com/office/drawing/2014/main" id="{A4E65CEF-485B-42AF-9C4C-0D79EF3A0EA8}"/>
               </a:ext>
             </a:extLst>
           </p:cNvPr>
@@ -7713,7 +7713,7 @@
           <p:cNvPr id="8" name="">
             <a:extLst xmlns:a="http://schemas.openxmlformats.org/drawingml/2006/main">
               <a:ext uri="{FF2B5EF4-FFF2-40B4-BE49-F238E27FC236}">
-                <a16:creationId xmlns:a16="http://schemas.microsoft.com/office/drawing/2014/main" id="{336E72AD-7301-400F-B909-8F1E7119B12C}"/>
+                <a16:creationId xmlns:a16="http://schemas.microsoft.com/office/drawing/2014/main" id="{F80BD622-B39D-4D66-8464-CF2AA968D01E}"/>
               </a:ext>
             </a:extLst>
           </p:cNvPr>
@@ -7774,7 +7774,7 @@
           <p:cNvPr id="9" name="">
             <a:extLst xmlns:a="http://schemas.openxmlformats.org/drawingml/2006/main">
               <a:ext uri="{FF2B5EF4-FFF2-40B4-BE49-F238E27FC236}">
-                <a16:creationId xmlns:a16="http://schemas.microsoft.com/office/drawing/2014/main" id="{353405E8-1A0A-4D34-9682-3E07720C9A13}"/>
+                <a16:creationId xmlns:a16="http://schemas.microsoft.com/office/drawing/2014/main" id="{D20203A2-725B-43BF-A61E-F6374AA3AE5E}"/>
               </a:ext>
             </a:extLst>
           </p:cNvPr>
@@ -7862,7 +7862,7 @@
           <p:cNvPr id="10" name="">
             <a:extLst xmlns:a="http://schemas.openxmlformats.org/drawingml/2006/main">
               <a:ext uri="{FF2B5EF4-FFF2-40B4-BE49-F238E27FC236}">
-                <a16:creationId xmlns:a16="http://schemas.microsoft.com/office/drawing/2014/main" id="{41C2428C-7ECF-4E59-B891-DE23AFE30AE2}"/>
+                <a16:creationId xmlns:a16="http://schemas.microsoft.com/office/drawing/2014/main" id="{EA9FEF13-27A2-4740-8025-D7245E4701C4}"/>
               </a:ext>
             </a:extLst>
           </p:cNvPr>
@@ -7923,7 +7923,7 @@
           <p:cNvPr id="11" name="">
             <a:extLst xmlns:a="http://schemas.openxmlformats.org/drawingml/2006/main">
               <a:ext uri="{FF2B5EF4-FFF2-40B4-BE49-F238E27FC236}">
-                <a16:creationId xmlns:a16="http://schemas.microsoft.com/office/drawing/2014/main" id="{29DE7052-49E5-4F2D-B3DE-25645D08F636}"/>
+                <a16:creationId xmlns:a16="http://schemas.microsoft.com/office/drawing/2014/main" id="{B1EFD6A5-ADE2-4E35-9C07-39007C5C7E25}"/>
               </a:ext>
             </a:extLst>
           </p:cNvPr>
@@ -7954,7 +7954,7 @@
           <p:cNvPr id="12" name="">
             <a:extLst xmlns:a="http://schemas.openxmlformats.org/drawingml/2006/main">
               <a:ext uri="{FF2B5EF4-FFF2-40B4-BE49-F238E27FC236}">
-                <a16:creationId xmlns:a16="http://schemas.microsoft.com/office/drawing/2014/main" id="{73E31585-B7D1-481E-909C-B11A7142489A}"/>
+                <a16:creationId xmlns:a16="http://schemas.microsoft.com/office/drawing/2014/main" id="{1E288709-6F7B-44B1-AE89-70DC61AB0F6B}"/>
               </a:ext>
             </a:extLst>
           </p:cNvPr>
@@ -8005,7 +8005,7 @@
                 <a:ea typeface="Arial"/>
                 <a:cs typeface="Arial"/>
               </a:rPr>
-              <a:t>FORMULABENCH  ·  RESEARCH / TRACK 2</a:t>
+              <a:t>FORMULABENCH  ·  RESEARCH: EXCEL FORMULA GENERATION</a:t>
             </a:r>
           </a:p>
         </p:txBody>
@@ -8015,7 +8015,7 @@
           <p:cNvPr id="13" name="">
             <a:extLst xmlns:a="http://schemas.openxmlformats.org/drawingml/2006/main">
               <a:ext uri="{FF2B5EF4-FFF2-40B4-BE49-F238E27FC236}">
-                <a16:creationId xmlns:a16="http://schemas.microsoft.com/office/drawing/2014/main" id="{18DD0D77-DA2C-4FA4-890E-37A12C0A99A2}"/>
+                <a16:creationId xmlns:a16="http://schemas.microsoft.com/office/drawing/2014/main" id="{73057E85-8DA4-471C-9F41-899173D0E632}"/>
               </a:ext>
             </a:extLst>
           </p:cNvPr>
@@ -8074,7 +8074,7 @@
     </p:spTree>
     <p:extLst>
       <p:ext uri="{BB962C8B-B14F-4D97-AF65-F5344CB8AC3E}">
-        <p14:creationId xmlns:p14="http://schemas.microsoft.com/office/powerpoint/2010/main" val="955302236"/>
+        <p14:creationId xmlns:p14="http://schemas.microsoft.com/office/powerpoint/2010/main" val="1249322482"/>
       </p:ext>
     </p:extLst>
   </p:cSld>
@@ -8105,7 +8105,7 @@
           <p:cNvPr id="12" name="slide-title">
             <a:extLst xmlns:a="http://schemas.openxmlformats.org/drawingml/2006/main">
               <a:ext uri="{FF2B5EF4-FFF2-40B4-BE49-F238E27FC236}">
-                <a16:creationId xmlns:a16="http://schemas.microsoft.com/office/drawing/2014/main" id="{597500CD-8E6F-4A7F-B92F-05E0B1D919B9}"/>
+                <a16:creationId xmlns:a16="http://schemas.microsoft.com/office/drawing/2014/main" id="{DFE1E83B-8D21-4930-A3D0-6EEF84CD8C42}"/>
               </a:ext>
             </a:extLst>
           </p:cNvPr>
@@ -8166,7 +8166,7 @@
           <p:cNvPr id="2" name="">
             <a:extLst xmlns:a="http://schemas.openxmlformats.org/drawingml/2006/main">
               <a:ext uri="{FF2B5EF4-FFF2-40B4-BE49-F238E27FC236}">
-                <a16:creationId xmlns:a16="http://schemas.microsoft.com/office/drawing/2014/main" id="{E6F37C66-CB06-42D3-8EB0-C7A3A20567F3}"/>
+                <a16:creationId xmlns:a16="http://schemas.microsoft.com/office/drawing/2014/main" id="{B322269D-9905-40E3-A2B1-74F1F7A18347}"/>
               </a:ext>
             </a:extLst>
           </p:cNvPr>
@@ -8227,7 +8227,7 @@
           <p:cNvPr id="3" name="">
             <a:extLst xmlns:a="http://schemas.openxmlformats.org/drawingml/2006/main">
               <a:ext uri="{FF2B5EF4-FFF2-40B4-BE49-F238E27FC236}">
-                <a16:creationId xmlns:a16="http://schemas.microsoft.com/office/drawing/2014/main" id="{3B1420E9-843E-4DC4-9DAA-D64AA2BC0EAC}"/>
+                <a16:creationId xmlns:a16="http://schemas.microsoft.com/office/drawing/2014/main" id="{89C9DDF3-D769-437C-8367-306F4C7BD2EB}"/>
               </a:ext>
             </a:extLst>
           </p:cNvPr>
@@ -8288,7 +8288,7 @@
           <p:cNvPr id="4" name="">
             <a:extLst xmlns:a="http://schemas.openxmlformats.org/drawingml/2006/main">
               <a:ext uri="{FF2B5EF4-FFF2-40B4-BE49-F238E27FC236}">
-                <a16:creationId xmlns:a16="http://schemas.microsoft.com/office/drawing/2014/main" id="{FE3CA152-2CC8-4FAB-B233-25748452E51D}"/>
+                <a16:creationId xmlns:a16="http://schemas.microsoft.com/office/drawing/2014/main" id="{AE0AB10A-5FA5-4032-81ED-0A5E6626C16C}"/>
               </a:ext>
             </a:extLst>
           </p:cNvPr>
@@ -8349,7 +8349,7 @@
           <p:cNvPr id="5" name="">
             <a:extLst xmlns:a="http://schemas.openxmlformats.org/drawingml/2006/main">
               <a:ext uri="{FF2B5EF4-FFF2-40B4-BE49-F238E27FC236}">
-                <a16:creationId xmlns:a16="http://schemas.microsoft.com/office/drawing/2014/main" id="{E3464BBE-47B7-44EA-988C-4CC771B51850}"/>
+                <a16:creationId xmlns:a16="http://schemas.microsoft.com/office/drawing/2014/main" id="{03EA3DA6-0217-4F2E-BA23-E82E4BEA3500}"/>
               </a:ext>
             </a:extLst>
           </p:cNvPr>
@@ -8410,7 +8410,7 @@
           <p:cNvPr id="6" name="">
             <a:extLst xmlns:a="http://schemas.openxmlformats.org/drawingml/2006/main">
               <a:ext uri="{FF2B5EF4-FFF2-40B4-BE49-F238E27FC236}">
-                <a16:creationId xmlns:a16="http://schemas.microsoft.com/office/drawing/2014/main" id="{872538B5-C26E-464E-904E-E2FE1BD1AEDB}"/>
+                <a16:creationId xmlns:a16="http://schemas.microsoft.com/office/drawing/2014/main" id="{0CE6B10D-ED0F-48C3-A678-C6E9C614D5CB}"/>
               </a:ext>
             </a:extLst>
           </p:cNvPr>
@@ -8813,7 +8813,7 @@
           <p:cNvPr id="8" name="">
             <a:extLst xmlns:a="http://schemas.openxmlformats.org/drawingml/2006/main">
               <a:ext uri="{FF2B5EF4-FFF2-40B4-BE49-F238E27FC236}">
-                <a16:creationId xmlns:a16="http://schemas.microsoft.com/office/drawing/2014/main" id="{5BB1125E-150E-4002-B3B6-A7BD582CE0F4}"/>
+                <a16:creationId xmlns:a16="http://schemas.microsoft.com/office/drawing/2014/main" id="{018592E5-FC3F-4CD4-98ED-AFC5A9F5C172}"/>
               </a:ext>
             </a:extLst>
           </p:cNvPr>
@@ -8874,7 +8874,7 @@
           <p:cNvPr id="9" name="">
             <a:extLst xmlns:a="http://schemas.openxmlformats.org/drawingml/2006/main">
               <a:ext uri="{FF2B5EF4-FFF2-40B4-BE49-F238E27FC236}">
-                <a16:creationId xmlns:a16="http://schemas.microsoft.com/office/drawing/2014/main" id="{8BACCCC3-C59E-4036-A59C-8A16AA3D444E}"/>
+                <a16:creationId xmlns:a16="http://schemas.microsoft.com/office/drawing/2014/main" id="{706E6AC8-7968-4ACB-819A-D0F9FF0312A9}"/>
               </a:ext>
             </a:extLst>
           </p:cNvPr>
@@ -8905,7 +8905,7 @@
           <p:cNvPr id="10" name="">
             <a:extLst xmlns:a="http://schemas.openxmlformats.org/drawingml/2006/main">
               <a:ext uri="{FF2B5EF4-FFF2-40B4-BE49-F238E27FC236}">
-                <a16:creationId xmlns:a16="http://schemas.microsoft.com/office/drawing/2014/main" id="{FC3A2954-9920-4096-8475-AABA6C2C3833}"/>
+                <a16:creationId xmlns:a16="http://schemas.microsoft.com/office/drawing/2014/main" id="{402767B0-9FFF-4422-A227-A297136FB9DF}"/>
               </a:ext>
             </a:extLst>
           </p:cNvPr>
@@ -8956,7 +8956,7 @@
                 <a:ea typeface="Arial"/>
                 <a:cs typeface="Arial"/>
               </a:rPr>
-              <a:t>FORMULABENCH  ·  RESEARCH / TRACK 2</a:t>
+              <a:t>FORMULABENCH  ·  RESEARCH: EXCEL FORMULA GENERATION</a:t>
             </a:r>
           </a:p>
         </p:txBody>
@@ -8966,7 +8966,7 @@
           <p:cNvPr id="11" name="">
             <a:extLst xmlns:a="http://schemas.openxmlformats.org/drawingml/2006/main">
               <a:ext uri="{FF2B5EF4-FFF2-40B4-BE49-F238E27FC236}">
-                <a16:creationId xmlns:a16="http://schemas.microsoft.com/office/drawing/2014/main" id="{E687D580-2801-43EE-8CA5-B529A61982EC}"/>
+                <a16:creationId xmlns:a16="http://schemas.microsoft.com/office/drawing/2014/main" id="{E7CE1994-53C0-46EE-A963-379B83991A12}"/>
               </a:ext>
             </a:extLst>
           </p:cNvPr>
@@ -9025,7 +9025,7 @@
     </p:spTree>
     <p:extLst>
       <p:ext uri="{BB962C8B-B14F-4D97-AF65-F5344CB8AC3E}">
-        <p14:creationId xmlns:p14="http://schemas.microsoft.com/office/powerpoint/2010/main" val="711276457"/>
+        <p14:creationId xmlns:p14="http://schemas.microsoft.com/office/powerpoint/2010/main" val="354737023"/>
       </p:ext>
     </p:extLst>
   </p:cSld>
@@ -9056,7 +9056,7 @@
           <p:cNvPr id="19" name="slide-title">
             <a:extLst xmlns:a="http://schemas.openxmlformats.org/drawingml/2006/main">
               <a:ext uri="{FF2B5EF4-FFF2-40B4-BE49-F238E27FC236}">
-                <a16:creationId xmlns:a16="http://schemas.microsoft.com/office/drawing/2014/main" id="{8F379733-936C-4C7A-B21E-0F7E09899666}"/>
+                <a16:creationId xmlns:a16="http://schemas.microsoft.com/office/drawing/2014/main" id="{B85F2B5B-2F92-444C-9059-DD30139634C1}"/>
               </a:ext>
             </a:extLst>
           </p:cNvPr>
@@ -9117,7 +9117,7 @@
           <p:cNvPr id="2" name="">
             <a:extLst xmlns:a="http://schemas.openxmlformats.org/drawingml/2006/main">
               <a:ext uri="{FF2B5EF4-FFF2-40B4-BE49-F238E27FC236}">
-                <a16:creationId xmlns:a16="http://schemas.microsoft.com/office/drawing/2014/main" id="{030F87F3-D799-4653-BBA6-5B8FBC642992}"/>
+                <a16:creationId xmlns:a16="http://schemas.microsoft.com/office/drawing/2014/main" id="{A1B9B555-8C3B-40B2-AFC8-BB74EBB127F6}"/>
               </a:ext>
             </a:extLst>
           </p:cNvPr>
@@ -9178,7 +9178,7 @@
           <p:cNvPr id="3" name="">
             <a:extLst xmlns:a="http://schemas.openxmlformats.org/drawingml/2006/main">
               <a:ext uri="{FF2B5EF4-FFF2-40B4-BE49-F238E27FC236}">
-                <a16:creationId xmlns:a16="http://schemas.microsoft.com/office/drawing/2014/main" id="{F49B6104-A240-41A3-BCE3-AA5E0AB1F0A4}"/>
+                <a16:creationId xmlns:a16="http://schemas.microsoft.com/office/drawing/2014/main" id="{5D52CE17-52EF-4F05-A714-1DC55B7B2D80}"/>
               </a:ext>
             </a:extLst>
           </p:cNvPr>
@@ -9239,7 +9239,7 @@
           <p:cNvPr id="4" name="">
             <a:extLst xmlns:a="http://schemas.openxmlformats.org/drawingml/2006/main">
               <a:ext uri="{FF2B5EF4-FFF2-40B4-BE49-F238E27FC236}">
-                <a16:creationId xmlns:a16="http://schemas.microsoft.com/office/drawing/2014/main" id="{F2E19647-36B0-4F81-8918-8339A756DC80}"/>
+                <a16:creationId xmlns:a16="http://schemas.microsoft.com/office/drawing/2014/main" id="{1412B786-E45E-435A-B244-1BB31E44AAF8}"/>
               </a:ext>
             </a:extLst>
           </p:cNvPr>
@@ -9300,7 +9300,7 @@
           <p:cNvPr id="5" name="">
             <a:extLst xmlns:a="http://schemas.openxmlformats.org/drawingml/2006/main">
               <a:ext uri="{FF2B5EF4-FFF2-40B4-BE49-F238E27FC236}">
-                <a16:creationId xmlns:a16="http://schemas.microsoft.com/office/drawing/2014/main" id="{E3B93FE1-1945-44E5-8931-0B83E9D50D23}"/>
+                <a16:creationId xmlns:a16="http://schemas.microsoft.com/office/drawing/2014/main" id="{DC6F234E-086B-4E8C-A5FC-3A6C46BBF626}"/>
               </a:ext>
             </a:extLst>
           </p:cNvPr>
@@ -9361,7 +9361,7 @@
           <p:cNvPr id="6" name="">
             <a:extLst xmlns:a="http://schemas.openxmlformats.org/drawingml/2006/main">
               <a:ext uri="{FF2B5EF4-FFF2-40B4-BE49-F238E27FC236}">
-                <a16:creationId xmlns:a16="http://schemas.microsoft.com/office/drawing/2014/main" id="{059D2ACE-591E-481D-84E3-5651E4356D31}"/>
+                <a16:creationId xmlns:a16="http://schemas.microsoft.com/office/drawing/2014/main" id="{A0EB96B4-7D0A-4B4A-89AE-A2EFAA74A3E7}"/>
               </a:ext>
             </a:extLst>
           </p:cNvPr>
@@ -9422,7 +9422,7 @@
           <p:cNvPr id="7" name="">
             <a:extLst xmlns:a="http://schemas.openxmlformats.org/drawingml/2006/main">
               <a:ext uri="{FF2B5EF4-FFF2-40B4-BE49-F238E27FC236}">
-                <a16:creationId xmlns:a16="http://schemas.microsoft.com/office/drawing/2014/main" id="{C70D5C2F-3F89-46BB-9D6E-955EA5AC81E9}"/>
+                <a16:creationId xmlns:a16="http://schemas.microsoft.com/office/drawing/2014/main" id="{19454D9E-0F26-48E2-B297-692A646E4951}"/>
               </a:ext>
             </a:extLst>
           </p:cNvPr>
@@ -9483,7 +9483,7 @@
           <p:cNvPr id="8" name="">
             <a:extLst xmlns:a="http://schemas.openxmlformats.org/drawingml/2006/main">
               <a:ext uri="{FF2B5EF4-FFF2-40B4-BE49-F238E27FC236}">
-                <a16:creationId xmlns:a16="http://schemas.microsoft.com/office/drawing/2014/main" id="{0051F5E8-BF56-424D-8354-EAB1697B7E4B}"/>
+                <a16:creationId xmlns:a16="http://schemas.microsoft.com/office/drawing/2014/main" id="{AF69C495-F4E2-4C48-99B2-ECB3A19938A0}"/>
               </a:ext>
             </a:extLst>
           </p:cNvPr>
@@ -9544,7 +9544,7 @@
           <p:cNvPr id="9" name="">
             <a:extLst xmlns:a="http://schemas.openxmlformats.org/drawingml/2006/main">
               <a:ext uri="{FF2B5EF4-FFF2-40B4-BE49-F238E27FC236}">
-                <a16:creationId xmlns:a16="http://schemas.microsoft.com/office/drawing/2014/main" id="{20E36F81-BCFF-4112-B514-BB775E37D4F2}"/>
+                <a16:creationId xmlns:a16="http://schemas.microsoft.com/office/drawing/2014/main" id="{FA6A3CD3-9B02-4B97-B286-6B94626DB036}"/>
               </a:ext>
             </a:extLst>
           </p:cNvPr>
@@ -9575,7 +9575,7 @@
           <p:cNvPr id="10" name="">
             <a:extLst xmlns:a="http://schemas.openxmlformats.org/drawingml/2006/main">
               <a:ext uri="{FF2B5EF4-FFF2-40B4-BE49-F238E27FC236}">
-                <a16:creationId xmlns:a16="http://schemas.microsoft.com/office/drawing/2014/main" id="{2DF08957-8803-4C9B-8899-C74AC72A3157}"/>
+                <a16:creationId xmlns:a16="http://schemas.microsoft.com/office/drawing/2014/main" id="{CB851B38-55DE-469A-BB1C-F3A6B1B6C832}"/>
               </a:ext>
             </a:extLst>
           </p:cNvPr>
@@ -9608,7 +9608,7 @@
           <p:cNvPr id="11" name="">
             <a:extLst xmlns:a="http://schemas.openxmlformats.org/drawingml/2006/main">
               <a:ext uri="{FF2B5EF4-FFF2-40B4-BE49-F238E27FC236}">
-                <a16:creationId xmlns:a16="http://schemas.microsoft.com/office/drawing/2014/main" id="{EA7807D1-FAAF-4CB6-BE5E-DCFD07414099}"/>
+                <a16:creationId xmlns:a16="http://schemas.microsoft.com/office/drawing/2014/main" id="{BD8D9F8C-5547-4FB6-8A0E-E03F45C8E7F1}"/>
               </a:ext>
             </a:extLst>
           </p:cNvPr>
@@ -9669,7 +9669,7 @@
           <p:cNvPr id="12" name="">
             <a:extLst xmlns:a="http://schemas.openxmlformats.org/drawingml/2006/main">
               <a:ext uri="{FF2B5EF4-FFF2-40B4-BE49-F238E27FC236}">
-                <a16:creationId xmlns:a16="http://schemas.microsoft.com/office/drawing/2014/main" id="{7D77B95C-22FC-487B-8029-11F0B78C8CEE}"/>
+                <a16:creationId xmlns:a16="http://schemas.microsoft.com/office/drawing/2014/main" id="{8A78137C-4D72-453E-A4DB-1A1B189F36D9}"/>
               </a:ext>
             </a:extLst>
           </p:cNvPr>
@@ -9719,7 +9719,7 @@
                 <a:latin typeface="Arial"/>
                 <a:ea typeface="Arial"/>
                 <a:cs typeface="Arial"/>
-                <a:hlinkClick xmlns:r="http://schemas.openxmlformats.org/officeDocument/2006/relationships" r:id="R5e29216e7cd24a5e"/>
+                <a:hlinkClick xmlns:r="http://schemas.openxmlformats.org/officeDocument/2006/relationships" r:id="R5577c945197f498f"/>
               </a:rPr>
               <a:t>masterasnackin.github.io/FormulaBench/</a:t>
             </a:r>
@@ -9731,7 +9731,7 @@
           <p:cNvPr id="13" name="">
             <a:extLst xmlns:a="http://schemas.openxmlformats.org/drawingml/2006/main">
               <a:ext uri="{FF2B5EF4-FFF2-40B4-BE49-F238E27FC236}">
-                <a16:creationId xmlns:a16="http://schemas.microsoft.com/office/drawing/2014/main" id="{FADD9EE3-DD2C-4BD7-B95A-FA90A8ADE9F5}"/>
+                <a16:creationId xmlns:a16="http://schemas.microsoft.com/office/drawing/2014/main" id="{2045F149-FA9A-4396-B4C6-9EE3D9D6E718}"/>
               </a:ext>
             </a:extLst>
           </p:cNvPr>
@@ -9792,7 +9792,7 @@
           <p:cNvPr id="14" name="">
             <a:extLst xmlns:a="http://schemas.openxmlformats.org/drawingml/2006/main">
               <a:ext uri="{FF2B5EF4-FFF2-40B4-BE49-F238E27FC236}">
-                <a16:creationId xmlns:a16="http://schemas.microsoft.com/office/drawing/2014/main" id="{ADC0AD02-F850-4C95-A5F3-FC47A8C5BD58}"/>
+                <a16:creationId xmlns:a16="http://schemas.microsoft.com/office/drawing/2014/main" id="{01BE25ED-5DCD-40C0-A36B-C0AB99FED33A}"/>
               </a:ext>
             </a:extLst>
           </p:cNvPr>
@@ -9842,7 +9842,7 @@
                 <a:latin typeface="Arial"/>
                 <a:ea typeface="Arial"/>
                 <a:cs typeface="Arial"/>
-                <a:hlinkClick xmlns:r="http://schemas.openxmlformats.org/officeDocument/2006/relationships" r:id="Redafb4700ee547f3"/>
+                <a:hlinkClick xmlns:r="http://schemas.openxmlformats.org/officeDocument/2006/relationships" r:id="R59c6d52320114778"/>
               </a:rPr>
               <a:t>github.com/MasteraSnackin/FormulaBench</a:t>
             </a:r>
@@ -9854,7 +9854,7 @@
           <p:cNvPr id="15" name="">
             <a:extLst xmlns:a="http://schemas.openxmlformats.org/drawingml/2006/main">
               <a:ext uri="{FF2B5EF4-FFF2-40B4-BE49-F238E27FC236}">
-                <a16:creationId xmlns:a16="http://schemas.microsoft.com/office/drawing/2014/main" id="{4C7A43E5-DFDC-4CEC-B65E-BF2F327C5A32}"/>
+                <a16:creationId xmlns:a16="http://schemas.microsoft.com/office/drawing/2014/main" id="{EEB8171D-727A-435E-9B77-B44B5E700A22}"/>
               </a:ext>
             </a:extLst>
           </p:cNvPr>
@@ -9915,7 +9915,7 @@
           <p:cNvPr id="16" name="">
             <a:extLst xmlns:a="http://schemas.openxmlformats.org/drawingml/2006/main">
               <a:ext uri="{FF2B5EF4-FFF2-40B4-BE49-F238E27FC236}">
-                <a16:creationId xmlns:a16="http://schemas.microsoft.com/office/drawing/2014/main" id="{6FBE43A1-0EF5-48CB-AF53-B2F10700A415}"/>
+                <a16:creationId xmlns:a16="http://schemas.microsoft.com/office/drawing/2014/main" id="{860CDF5C-FAB4-4570-AC7A-239ABCAA7514}"/>
               </a:ext>
             </a:extLst>
           </p:cNvPr>
@@ -9946,7 +9946,7 @@
           <p:cNvPr id="17" name="">
             <a:extLst xmlns:a="http://schemas.openxmlformats.org/drawingml/2006/main">
               <a:ext uri="{FF2B5EF4-FFF2-40B4-BE49-F238E27FC236}">
-                <a16:creationId xmlns:a16="http://schemas.microsoft.com/office/drawing/2014/main" id="{B650E814-66AE-4CBD-980C-73FF1339D4F4}"/>
+                <a16:creationId xmlns:a16="http://schemas.microsoft.com/office/drawing/2014/main" id="{7411D65B-2D1B-42DC-BEFB-DABDC02F01F5}"/>
               </a:ext>
             </a:extLst>
           </p:cNvPr>
@@ -9997,7 +9997,7 @@
                 <a:ea typeface="Arial"/>
                 <a:cs typeface="Arial"/>
               </a:rPr>
-              <a:t>FORMULABENCH  ·  RESEARCH / TRACK 2</a:t>
+              <a:t>FORMULABENCH  ·  RESEARCH: EXCEL FORMULA GENERATION</a:t>
             </a:r>
           </a:p>
         </p:txBody>
@@ -10007,7 +10007,7 @@
           <p:cNvPr id="18" name="">
             <a:extLst xmlns:a="http://schemas.openxmlformats.org/drawingml/2006/main">
               <a:ext uri="{FF2B5EF4-FFF2-40B4-BE49-F238E27FC236}">
-                <a16:creationId xmlns:a16="http://schemas.microsoft.com/office/drawing/2014/main" id="{70078E2A-1CFF-491E-BEEE-D7C1C9241062}"/>
+                <a16:creationId xmlns:a16="http://schemas.microsoft.com/office/drawing/2014/main" id="{AE48A1B2-6F53-46C6-9931-A1792C35A024}"/>
               </a:ext>
             </a:extLst>
           </p:cNvPr>
@@ -10066,7 +10066,7 @@
     </p:spTree>
     <p:extLst>
       <p:ext uri="{BB962C8B-B14F-4D97-AF65-F5344CB8AC3E}">
-        <p14:creationId xmlns:p14="http://schemas.microsoft.com/office/powerpoint/2010/main" val="1142395564"/>
+        <p14:creationId xmlns:p14="http://schemas.microsoft.com/office/powerpoint/2010/main" val="364689557"/>
       </p:ext>
     </p:extLst>
   </p:cSld>

--- a/docs/assets/FormulaBench-Hackathon-Deck.pptx
+++ b/docs/assets/FormulaBench-Hackathon-Deck.pptx
@@ -2,20 +2,21 @@
 <file path=ppt/presentation.xml><?xml version="1.0" encoding="utf-8"?>
 <p:presentation xmlns:p="http://schemas.openxmlformats.org/presentationml/2006/main">
   <p:sldMasterIdLst>
-    <p:sldMasterId xmlns:r="http://schemas.openxmlformats.org/officeDocument/2006/relationships" id="2147483648" r:id="R471e2744b4d84d1d"/>
+    <p:sldMasterId xmlns:r="http://schemas.openxmlformats.org/officeDocument/2006/relationships" id="2147483648" r:id="R60848d6e66464db1"/>
   </p:sldMasterIdLst>
   <p:notesMasterIdLst>
-    <p:notesMasterId xmlns:r="http://schemas.openxmlformats.org/officeDocument/2006/relationships" r:id="Rd3680a0bd82b4574"/>
+    <p:notesMasterId xmlns:r="http://schemas.openxmlformats.org/officeDocument/2006/relationships" r:id="R6ef1be90408e4596"/>
   </p:notesMasterIdLst>
   <p:sldIdLst>
-    <p:sldId xmlns:r="http://schemas.openxmlformats.org/officeDocument/2006/relationships" id="256" r:id="R447368ac096e453d"/>
-    <p:sldId xmlns:r="http://schemas.openxmlformats.org/officeDocument/2006/relationships" id="257" r:id="Rfa6453711fb544e2"/>
-    <p:sldId xmlns:r="http://schemas.openxmlformats.org/officeDocument/2006/relationships" id="258" r:id="R96502637e6b541a9"/>
-    <p:sldId xmlns:r="http://schemas.openxmlformats.org/officeDocument/2006/relationships" id="259" r:id="R6450c43eeef14111"/>
-    <p:sldId xmlns:r="http://schemas.openxmlformats.org/officeDocument/2006/relationships" id="260" r:id="R64a3ed262a254dde"/>
-    <p:sldId xmlns:r="http://schemas.openxmlformats.org/officeDocument/2006/relationships" id="261" r:id="Rc6fd4c1350994cc4"/>
-    <p:sldId xmlns:r="http://schemas.openxmlformats.org/officeDocument/2006/relationships" id="262" r:id="Rf113d718002e4e6d"/>
-    <p:sldId xmlns:r="http://schemas.openxmlformats.org/officeDocument/2006/relationships" id="263" r:id="Raa89fb6967bb4faf"/>
+    <p:sldId xmlns:r="http://schemas.openxmlformats.org/officeDocument/2006/relationships" id="256" r:id="Rb31a972dd3124a7c"/>
+    <p:sldId xmlns:r="http://schemas.openxmlformats.org/officeDocument/2006/relationships" id="257" r:id="Ra8fc8fdbd7dc4597"/>
+    <p:sldId xmlns:r="http://schemas.openxmlformats.org/officeDocument/2006/relationships" id="258" r:id="R57162401946647da"/>
+    <p:sldId xmlns:r="http://schemas.openxmlformats.org/officeDocument/2006/relationships" id="259" r:id="Reb2f85c0803f4eae"/>
+    <p:sldId xmlns:r="http://schemas.openxmlformats.org/officeDocument/2006/relationships" id="260" r:id="R23b0bf1cca194d03"/>
+    <p:sldId xmlns:r="http://schemas.openxmlformats.org/officeDocument/2006/relationships" id="261" r:id="R094d4ca0ebb14c5a"/>
+    <p:sldId xmlns:r="http://schemas.openxmlformats.org/officeDocument/2006/relationships" id="262" r:id="R1e59e1bcd9bd4908"/>
+    <p:sldId xmlns:r="http://schemas.openxmlformats.org/officeDocument/2006/relationships" id="263" r:id="R76a82655c90f4ed9"/>
+    <p:sldId xmlns:r="http://schemas.openxmlformats.org/officeDocument/2006/relationships" id="264" r:id="R2a4c50aa42f74c7b"/>
   </p:sldIdLst>
   <p:sldSz cx="12192000" cy="6858000"/>
   <p:notesSz cx="6858000" cy="9144000"/>
@@ -639,12 +640,32 @@
           </a:p>
           <a:p xmlns:a="http://schemas.openxmlformats.org/drawingml/2006/main">
             <a:r>
-              <a:t>README.md sections Description and Features</a:t>
-            </a:r>
-          </a:p>
-          <a:p xmlns:a="http://schemas.openxmlformats.org/drawingml/2006/main">
-            <a:r>
-              <a:t>SUBMISSION.md section What we built and why</a:t>
+              <a:t>submissions/formulabench/results.json</a:t>
+            </a:r>
+          </a:p>
+          <a:p xmlns:a="http://schemas.openxmlformats.org/drawingml/2006/main">
+            <a:r>
+              <a:t>submissions/formulabench/traces/54513.jsonl</a:t>
+            </a:r>
+          </a:p>
+          <a:p xmlns:a="http://schemas.openxmlformats.org/drawingml/2006/main">
+            <a:r>
+              <a:t>submissions/formulabench/traces/13-1.jsonl</a:t>
+            </a:r>
+          </a:p>
+          <a:p xmlns:a="http://schemas.openxmlformats.org/drawingml/2006/main">
+            <a:r>
+              <a:t>SUBMISSION.md section Verified evaluation</a:t>
+            </a:r>
+          </a:p>
+          <a:p xmlns:a="http://schemas.openxmlformats.org/drawingml/2006/main">
+            <a:r>
+              <a:t>Task 54513: one of one target cells correct. FormulaBench wrote =C8*(1-E8) to Sheet1!F8. The exact value was 15.7455 and the workbook displayed 15.75.</a:t>
+            </a:r>
+          </a:p>
+          <a:p xmlns:a="http://schemas.openxmlformats.org/drawingml/2006/main">
+            <a:r>
+              <a:t>Task 13-1: 116 of 120 target cells correct. The evaluator reported mismatches in LISTS!D25, LISTS!D30, LISTS!D31 and LISTS!D32.</a:t>
             </a:r>
           </a:p>
         </p:txBody>
@@ -719,32 +740,12 @@
           </a:p>
           <a:p xmlns:a="http://schemas.openxmlformats.org/drawingml/2006/main">
             <a:r>
-              <a:t>README.md Architecture Overview, Features and Tech Stack</a:t>
-            </a:r>
-          </a:p>
-          <a:p xmlns:a="http://schemas.openxmlformats.org/drawingml/2006/main">
-            <a:r>
-              <a:t>SUBMISSION.md What we built and why</a:t>
-            </a:r>
-          </a:p>
-          <a:p xmlns:a="http://schemas.openxmlformats.org/drawingml/2006/main">
-            <a:r>
-              <a:t>formulabench/context.py</a:t>
-            </a:r>
-          </a:p>
-          <a:p xmlns:a="http://schemas.openxmlformats.org/drawingml/2006/main">
-            <a:r>
-              <a:t>formulabench/provider.py</a:t>
-            </a:r>
-          </a:p>
-          <a:p xmlns:a="http://schemas.openxmlformats.org/drawingml/2006/main">
-            <a:r>
-              <a:t>formulabench/contract.py</a:t>
-            </a:r>
-          </a:p>
-          <a:p xmlns:a="http://schemas.openxmlformats.org/drawingml/2006/main">
-            <a:r>
-              <a:t>formulabench/artifacts.py</a:t>
+              <a:t>README.md sections Description and Features</a:t>
+            </a:r>
+          </a:p>
+          <a:p xmlns:a="http://schemas.openxmlformats.org/drawingml/2006/main">
+            <a:r>
+              <a:t>SUBMISSION.md section What we built and why</a:t>
             </a:r>
           </a:p>
         </p:txBody>
@@ -819,7 +820,7 @@
           </a:p>
           <a:p xmlns:a="http://schemas.openxmlformats.org/drawingml/2006/main">
             <a:r>
-              <a:t>README.md Features</a:t>
+              <a:t>README.md Architecture Overview, Features and Tech Stack</a:t>
             </a:r>
           </a:p>
           <a:p xmlns:a="http://schemas.openxmlformats.org/drawingml/2006/main">
@@ -829,17 +830,22 @@
           </a:p>
           <a:p xmlns:a="http://schemas.openxmlformats.org/drawingml/2006/main">
             <a:r>
+              <a:t>formulabench/context.py</a:t>
+            </a:r>
+          </a:p>
+          <a:p xmlns:a="http://schemas.openxmlformats.org/drawingml/2006/main">
+            <a:r>
+              <a:t>formulabench/provider.py</a:t>
+            </a:r>
+          </a:p>
+          <a:p xmlns:a="http://schemas.openxmlformats.org/drawingml/2006/main">
+            <a:r>
               <a:t>formulabench/contract.py</a:t>
             </a:r>
           </a:p>
           <a:p xmlns:a="http://schemas.openxmlformats.org/drawingml/2006/main">
             <a:r>
               <a:t>formulabench/artifacts.py</a:t>
-            </a:r>
-          </a:p>
-          <a:p xmlns:a="http://schemas.openxmlformats.org/drawingml/2006/main">
-            <a:r>
-              <a:t>experiments/public_benchmark_audit.json</a:t>
             </a:r>
           </a:p>
         </p:txBody>
@@ -914,32 +920,27 @@
           </a:p>
           <a:p xmlns:a="http://schemas.openxmlformats.org/drawingml/2006/main">
             <a:r>
-              <a:t>experiments/README.md section Failure analysis</a:t>
-            </a:r>
-          </a:p>
-          <a:p xmlns:a="http://schemas.openxmlformats.org/drawingml/2006/main">
-            <a:r>
-              <a:t>submissions/formulabench/results.json</a:t>
-            </a:r>
-          </a:p>
-          <a:p xmlns:a="http://schemas.openxmlformats.org/drawingml/2006/main">
-            <a:r>
-              <a:t>submissions/formulabench/predictions.jsonl</a:t>
-            </a:r>
-          </a:p>
-          <a:p xmlns:a="http://schemas.openxmlformats.org/drawingml/2006/main">
-            <a:r>
-              <a:t>submissions/formulabench/traces/</a:t>
-            </a:r>
-          </a:p>
-          <a:p xmlns:a="http://schemas.openxmlformats.org/drawingml/2006/main">
-            <a:r>
-              <a:t>Wrong cells total: 177,058. Fail-closed fallbacks: 9,143. Contract-valid but semantically wrong workbooks: 167,915.</a:t>
-            </a:r>
-          </a:p>
-          <a:p xmlns:a="http://schemas.openxmlformats.org/drawingml/2006/main">
-            <a:r>
-              <a:t>The difference in pass rate by context truncation is an association, not a causal result.</a:t>
+              <a:t>README.md Features</a:t>
+            </a:r>
+          </a:p>
+          <a:p xmlns:a="http://schemas.openxmlformats.org/drawingml/2006/main">
+            <a:r>
+              <a:t>SUBMISSION.md What we built and why</a:t>
+            </a:r>
+          </a:p>
+          <a:p xmlns:a="http://schemas.openxmlformats.org/drawingml/2006/main">
+            <a:r>
+              <a:t>formulabench/contract.py</a:t>
+            </a:r>
+          </a:p>
+          <a:p xmlns:a="http://schemas.openxmlformats.org/drawingml/2006/main">
+            <a:r>
+              <a:t>formulabench/artifacts.py</a:t>
+            </a:r>
+          </a:p>
+          <a:p xmlns:a="http://schemas.openxmlformats.org/drawingml/2006/main">
+            <a:r>
+              <a:t>experiments/public_benchmark_audit.json</a:t>
             </a:r>
           </a:p>
         </p:txBody>
@@ -1014,32 +1015,32 @@
           </a:p>
           <a:p xmlns:a="http://schemas.openxmlformats.org/drawingml/2006/main">
             <a:r>
-              <a:t>README.md Public benchmark result</a:t>
-            </a:r>
-          </a:p>
-          <a:p xmlns:a="http://schemas.openxmlformats.org/drawingml/2006/main">
-            <a:r>
-              <a:t>SUBMISSION.md Our run on the 400</a:t>
-            </a:r>
-          </a:p>
-          <a:p xmlns:a="http://schemas.openxmlformats.org/drawingml/2006/main">
-            <a:r>
-              <a:t>experiments/README.md Complete public run</a:t>
-            </a:r>
-          </a:p>
-          <a:p xmlns:a="http://schemas.openxmlformats.org/drawingml/2006/main">
-            <a:r>
-              <a:t>https://github.com/ylookup/encode-hackathon/tree/37d9016264762a25cae49e077cd0893055bd9093/research</a:t>
-            </a:r>
-          </a:p>
-          <a:p xmlns:a="http://schemas.openxmlformats.org/drawingml/2006/main">
-            <a:r>
-              <a:t>https://github.com/thinking-machines-lab/tinker-cookbook/blob/main/tinker_cookbook/renderers/qwen3_8.py</a:t>
-            </a:r>
-          </a:p>
-          <a:p xmlns:a="http://schemas.openxmlformats.org/drawingml/2006/main">
-            <a:r>
-              <a:t>The organiser reference renderer is inferred from published code and cookbook behaviour because the organisers did not publish run traces or explicit renderer metadata.</a:t>
+              <a:t>experiments/README.md section Failure analysis</a:t>
+            </a:r>
+          </a:p>
+          <a:p xmlns:a="http://schemas.openxmlformats.org/drawingml/2006/main">
+            <a:r>
+              <a:t>submissions/formulabench/results.json</a:t>
+            </a:r>
+          </a:p>
+          <a:p xmlns:a="http://schemas.openxmlformats.org/drawingml/2006/main">
+            <a:r>
+              <a:t>submissions/formulabench/predictions.jsonl</a:t>
+            </a:r>
+          </a:p>
+          <a:p xmlns:a="http://schemas.openxmlformats.org/drawingml/2006/main">
+            <a:r>
+              <a:t>submissions/formulabench/traces/</a:t>
+            </a:r>
+          </a:p>
+          <a:p xmlns:a="http://schemas.openxmlformats.org/drawingml/2006/main">
+            <a:r>
+              <a:t>Wrong cells total: 177,058. Fail-closed fallbacks: 9,143. Contract-valid but semantically wrong workbooks: 167,915.</a:t>
+            </a:r>
+          </a:p>
+          <a:p xmlns:a="http://schemas.openxmlformats.org/drawingml/2006/main">
+            <a:r>
+              <a:t>The difference in pass rate by context truncation is an association, not a causal result.</a:t>
             </a:r>
           </a:p>
         </p:txBody>
@@ -1070,6 +1071,106 @@
 </file>
 
 <file path=ppt/notesSlides/notesSlide8.xml><?xml version="1.0" encoding="utf-8"?>
+<p:notes xmlns:p="http://schemas.openxmlformats.org/presentationml/2006/main">
+  <p:cSld>
+    <p:spTree>
+      <p:nvGrpSpPr>
+        <p:cNvPr id="1" name=""/>
+        <p:cNvGrpSpPr/>
+        <p:nvPr/>
+      </p:nvGrpSpPr>
+      <p:grpSpPr>
+        <a:xfrm xmlns:a="http://schemas.openxmlformats.org/drawingml/2006/main"/>
+      </p:grpSpPr>
+      <p:sp>
+        <p:nvSpPr>
+          <p:cNvPr id="2" name="Slide Image Placeholder 1"/>
+          <p:cNvSpPr>
+            <a:spLocks xmlns:a="http://schemas.openxmlformats.org/drawingml/2006/main" noGrp="1"/>
+          </p:cNvSpPr>
+          <p:nvPr>
+            <p:ph type="sldImg" idx="0"/>
+          </p:nvPr>
+        </p:nvSpPr>
+        <p:spPr/>
+      </p:sp>
+      <p:sp>
+        <p:nvSpPr>
+          <p:cNvPr id="3" name="Notes Placeholder 2"/>
+          <p:cNvSpPr>
+            <a:spLocks xmlns:a="http://schemas.openxmlformats.org/drawingml/2006/main" noGrp="1"/>
+          </p:cNvSpPr>
+          <p:nvPr>
+            <p:ph type="body" idx="1"/>
+          </p:nvPr>
+        </p:nvSpPr>
+        <p:spPr/>
+        <p:txBody>
+          <a:bodyPr xmlns:a="http://schemas.openxmlformats.org/drawingml/2006/main"/>
+          <a:lstStyle xmlns:a="http://schemas.openxmlformats.org/drawingml/2006/main"/>
+          <a:p xmlns:a="http://schemas.openxmlformats.org/drawingml/2006/main">
+            <a:r>
+              <a:t>Sources:</a:t>
+            </a:r>
+          </a:p>
+          <a:p xmlns:a="http://schemas.openxmlformats.org/drawingml/2006/main">
+            <a:r>
+              <a:t>README.md Public benchmark result</a:t>
+            </a:r>
+          </a:p>
+          <a:p xmlns:a="http://schemas.openxmlformats.org/drawingml/2006/main">
+            <a:r>
+              <a:t>SUBMISSION.md Our run on the 400</a:t>
+            </a:r>
+          </a:p>
+          <a:p xmlns:a="http://schemas.openxmlformats.org/drawingml/2006/main">
+            <a:r>
+              <a:t>experiments/README.md Complete public run</a:t>
+            </a:r>
+          </a:p>
+          <a:p xmlns:a="http://schemas.openxmlformats.org/drawingml/2006/main">
+            <a:r>
+              <a:t>https://github.com/ylookup/encode-hackathon/tree/37d9016264762a25cae49e077cd0893055bd9093/research</a:t>
+            </a:r>
+          </a:p>
+          <a:p xmlns:a="http://schemas.openxmlformats.org/drawingml/2006/main">
+            <a:r>
+              <a:t>https://github.com/thinking-machines-lab/tinker-cookbook/blob/main/tinker_cookbook/renderers/qwen3_8.py</a:t>
+            </a:r>
+          </a:p>
+          <a:p xmlns:a="http://schemas.openxmlformats.org/drawingml/2006/main">
+            <a:r>
+              <a:t>The organiser reference renderer is inferred from published code and cookbook behaviour because the organisers did not publish run traces or explicit renderer metadata.</a:t>
+            </a:r>
+          </a:p>
+        </p:txBody>
+      </p:sp>
+      <p:sp>
+        <p:nvSpPr>
+          <p:cNvPr id="4" name="Slide Number Placeholder 3"/>
+          <p:cNvSpPr>
+            <a:spLocks xmlns:a="http://schemas.openxmlformats.org/drawingml/2006/main" noGrp="1"/>
+          </p:cNvSpPr>
+          <p:nvPr>
+            <p:ph type="sldNum" idx="5"/>
+          </p:nvPr>
+        </p:nvSpPr>
+        <p:spPr/>
+        <p:txBody>
+          <a:bodyPr xmlns:a="http://schemas.openxmlformats.org/drawingml/2006/main"/>
+          <a:lstStyle xmlns:a="http://schemas.openxmlformats.org/drawingml/2006/main"/>
+          <a:p xmlns:a="http://schemas.openxmlformats.org/drawingml/2006/main"/>
+        </p:txBody>
+      </p:sp>
+    </p:spTree>
+  </p:cSld>
+  <p:clrMapOvr>
+    <a:masterClrMapping xmlns:a="http://schemas.openxmlformats.org/drawingml/2006/main"/>
+  </p:clrMapOvr>
+</p:notes>
+</file>
+
+<file path=ppt/notesSlides/notesSlide9.xml><?xml version="1.0" encoding="utf-8"?>
 <p:notes xmlns:p="http://schemas.openxmlformats.org/presentationml/2006/main">
   <p:cSld>
     <p:spTree>
@@ -1202,7 +1303,7 @@
   </p:cSld>
   <p:clrMap bg1="lt1" tx1="dk1" bg2="lt2" tx2="dk2" accent1="accent1" accent2="accent2" accent3="accent3" accent4="accent4" accent5="accent5" accent6="accent6" hlink="hlink" folHlink="folHlink"/>
   <p:sldLayoutIdLst>
-    <p:sldLayoutId xmlns:r="http://schemas.openxmlformats.org/officeDocument/2006/relationships" id="2147483649" r:id="Re9f51bc1e1e24617"/>
+    <p:sldLayoutId xmlns:r="http://schemas.openxmlformats.org/officeDocument/2006/relationships" id="2147483649" r:id="R0ae21f67db764b42"/>
   </p:sldLayoutIdLst>
   <p:txStyles>
     <p:titleStyle>
@@ -2046,7 +2147,7 @@
           <p:cNvPr id="9" name="">
             <a:extLst xmlns:a="http://schemas.openxmlformats.org/drawingml/2006/main">
               <a:ext uri="{FF2B5EF4-FFF2-40B4-BE49-F238E27FC236}">
-                <a16:creationId xmlns:a16="http://schemas.microsoft.com/office/drawing/2014/main" id="{D39C05EF-3558-418F-961F-CCBDB1DB0094}"/>
+                <a16:creationId xmlns:a16="http://schemas.microsoft.com/office/drawing/2014/main" id="{EB1A2CA0-ADC7-473E-8B6B-802938CA49E1}"/>
               </a:ext>
             </a:extLst>
           </p:cNvPr>
@@ -2107,7 +2208,7 @@
           <p:cNvPr id="2" name="">
             <a:extLst xmlns:a="http://schemas.openxmlformats.org/drawingml/2006/main">
               <a:ext uri="{FF2B5EF4-FFF2-40B4-BE49-F238E27FC236}">
-                <a16:creationId xmlns:a16="http://schemas.microsoft.com/office/drawing/2014/main" id="{5D684BFA-5DF8-4287-9353-CDB24724AA24}"/>
+                <a16:creationId xmlns:a16="http://schemas.microsoft.com/office/drawing/2014/main" id="{5A76302C-A3DB-4700-B9C2-95F41FE40E97}"/>
               </a:ext>
             </a:extLst>
           </p:cNvPr>
@@ -2168,7 +2269,7 @@
           <p:cNvPr id="3" name="">
             <a:extLst xmlns:a="http://schemas.openxmlformats.org/drawingml/2006/main">
               <a:ext uri="{FF2B5EF4-FFF2-40B4-BE49-F238E27FC236}">
-                <a16:creationId xmlns:a16="http://schemas.microsoft.com/office/drawing/2014/main" id="{B1407B73-C460-4479-B307-142C5C4C6943}"/>
+                <a16:creationId xmlns:a16="http://schemas.microsoft.com/office/drawing/2014/main" id="{E2852A53-9C50-4A49-AC87-B76A1ED0202C}"/>
               </a:ext>
             </a:extLst>
           </p:cNvPr>
@@ -2229,7 +2330,7 @@
           <p:cNvPr id="4" name="">
             <a:extLst xmlns:a="http://schemas.openxmlformats.org/drawingml/2006/main">
               <a:ext uri="{FF2B5EF4-FFF2-40B4-BE49-F238E27FC236}">
-                <a16:creationId xmlns:a16="http://schemas.microsoft.com/office/drawing/2014/main" id="{82734427-D76A-47EE-BC66-2E48B2F2B7AB}"/>
+                <a16:creationId xmlns:a16="http://schemas.microsoft.com/office/drawing/2014/main" id="{AF22B656-D8B9-4B70-8217-E0F8A3553D52}"/>
               </a:ext>
             </a:extLst>
           </p:cNvPr>
@@ -2260,7 +2361,7 @@
           <p:cNvPr id="5" name="">
             <a:extLst xmlns:a="http://schemas.openxmlformats.org/drawingml/2006/main">
               <a:ext uri="{FF2B5EF4-FFF2-40B4-BE49-F238E27FC236}">
-                <a16:creationId xmlns:a16="http://schemas.microsoft.com/office/drawing/2014/main" id="{2F62FF7D-6CE4-4A2B-A7F1-399EFCBBDCD4}"/>
+                <a16:creationId xmlns:a16="http://schemas.microsoft.com/office/drawing/2014/main" id="{9779BD7F-DE47-4B08-93B7-57E21C5CF443}"/>
               </a:ext>
             </a:extLst>
           </p:cNvPr>
@@ -2348,7 +2449,7 @@
           <p:cNvPr id="6" name="">
             <a:extLst xmlns:a="http://schemas.openxmlformats.org/drawingml/2006/main">
               <a:ext uri="{FF2B5EF4-FFF2-40B4-BE49-F238E27FC236}">
-                <a16:creationId xmlns:a16="http://schemas.microsoft.com/office/drawing/2014/main" id="{6BB6B4BC-AF62-4DC0-A044-5205F39B589A}"/>
+                <a16:creationId xmlns:a16="http://schemas.microsoft.com/office/drawing/2014/main" id="{4EC4BE60-8957-41EF-BC28-381829D198F0}"/>
               </a:ext>
             </a:extLst>
           </p:cNvPr>
@@ -2517,7 +2618,7 @@
           <p:cNvPr id="7" name="">
             <a:extLst xmlns:a="http://schemas.openxmlformats.org/drawingml/2006/main">
               <a:ext uri="{FF2B5EF4-FFF2-40B4-BE49-F238E27FC236}">
-                <a16:creationId xmlns:a16="http://schemas.microsoft.com/office/drawing/2014/main" id="{74C44928-222D-4242-B52B-A15A3A02C839}"/>
+                <a16:creationId xmlns:a16="http://schemas.microsoft.com/office/drawing/2014/main" id="{8DA8EFEE-780B-4028-94F9-01AADE582689}"/>
               </a:ext>
             </a:extLst>
           </p:cNvPr>
@@ -2578,7 +2679,7 @@
           <p:cNvPr id="8" name="">
             <a:extLst xmlns:a="http://schemas.openxmlformats.org/drawingml/2006/main">
               <a:ext uri="{FF2B5EF4-FFF2-40B4-BE49-F238E27FC236}">
-                <a16:creationId xmlns:a16="http://schemas.microsoft.com/office/drawing/2014/main" id="{A317AD4D-4BF1-48E5-9F80-70485077EB32}"/>
+                <a16:creationId xmlns:a16="http://schemas.microsoft.com/office/drawing/2014/main" id="{5F980016-2289-4EA8-A681-994CBEDA0285}"/>
               </a:ext>
             </a:extLst>
           </p:cNvPr>
@@ -2637,7 +2738,7 @@
     </p:spTree>
     <p:extLst>
       <p:ext uri="{BB962C8B-B14F-4D97-AF65-F5344CB8AC3E}">
-        <p14:creationId xmlns:p14="http://schemas.microsoft.com/office/powerpoint/2010/main" val="1282237158"/>
+        <p14:creationId xmlns:p14="http://schemas.microsoft.com/office/powerpoint/2010/main" val="982781736"/>
       </p:ext>
     </p:extLst>
   </p:cSld>
@@ -2668,7 +2769,7 @@
           <p:cNvPr id="14" name="slide-title">
             <a:extLst xmlns:a="http://schemas.openxmlformats.org/drawingml/2006/main">
               <a:ext uri="{FF2B5EF4-FFF2-40B4-BE49-F238E27FC236}">
-                <a16:creationId xmlns:a16="http://schemas.microsoft.com/office/drawing/2014/main" id="{C332DD45-E2B0-4B59-81B5-A2AD48DD0DAE}"/>
+                <a16:creationId xmlns:a16="http://schemas.microsoft.com/office/drawing/2014/main" id="{611FD147-FF70-423E-BA3B-51FD9F56A046}"/>
               </a:ext>
             </a:extLst>
           </p:cNvPr>
@@ -2729,7 +2830,7 @@
           <p:cNvPr id="2" name="">
             <a:extLst xmlns:a="http://schemas.openxmlformats.org/drawingml/2006/main">
               <a:ext uri="{FF2B5EF4-FFF2-40B4-BE49-F238E27FC236}">
-                <a16:creationId xmlns:a16="http://schemas.microsoft.com/office/drawing/2014/main" id="{B3A6B431-0514-4C88-BFB2-F1400C9436BA}"/>
+                <a16:creationId xmlns:a16="http://schemas.microsoft.com/office/drawing/2014/main" id="{7D9B5CFB-7F05-45E7-9F3B-C7086A631EDC}"/>
               </a:ext>
             </a:extLst>
           </p:cNvPr>
@@ -2790,7 +2891,7 @@
           <p:cNvPr id="3" name="">
             <a:extLst xmlns:a="http://schemas.openxmlformats.org/drawingml/2006/main">
               <a:ext uri="{FF2B5EF4-FFF2-40B4-BE49-F238E27FC236}">
-                <a16:creationId xmlns:a16="http://schemas.microsoft.com/office/drawing/2014/main" id="{1D1514B2-C9B9-46CC-A57F-4960CE74B1D4}"/>
+                <a16:creationId xmlns:a16="http://schemas.microsoft.com/office/drawing/2014/main" id="{DAA5778F-1002-4E01-BE2D-F7852457B9A9}"/>
               </a:ext>
             </a:extLst>
           </p:cNvPr>
@@ -2851,7 +2952,7 @@
           <p:cNvPr id="4" name="">
             <a:extLst xmlns:a="http://schemas.openxmlformats.org/drawingml/2006/main">
               <a:ext uri="{FF2B5EF4-FFF2-40B4-BE49-F238E27FC236}">
-                <a16:creationId xmlns:a16="http://schemas.microsoft.com/office/drawing/2014/main" id="{F3C357DA-FE73-4B1A-9325-CEC7AF5BDA72}"/>
+                <a16:creationId xmlns:a16="http://schemas.microsoft.com/office/drawing/2014/main" id="{E43100AF-9FE7-4865-8C0D-809DB40854C2}"/>
               </a:ext>
             </a:extLst>
           </p:cNvPr>
@@ -2912,7 +3013,7 @@
           <p:cNvPr id="5" name="">
             <a:extLst xmlns:a="http://schemas.openxmlformats.org/drawingml/2006/main">
               <a:ext uri="{FF2B5EF4-FFF2-40B4-BE49-F238E27FC236}">
-                <a16:creationId xmlns:a16="http://schemas.microsoft.com/office/drawing/2014/main" id="{6621569C-42E7-4334-B269-E0F136F68BCD}"/>
+                <a16:creationId xmlns:a16="http://schemas.microsoft.com/office/drawing/2014/main" id="{F3ECD7CE-2E1C-4104-8B19-712C8F182BCA}"/>
               </a:ext>
             </a:extLst>
           </p:cNvPr>
@@ -2973,7 +3074,7 @@
           <p:cNvPr id="6" name="">
             <a:extLst xmlns:a="http://schemas.openxmlformats.org/drawingml/2006/main">
               <a:ext uri="{FF2B5EF4-FFF2-40B4-BE49-F238E27FC236}">
-                <a16:creationId xmlns:a16="http://schemas.microsoft.com/office/drawing/2014/main" id="{967ACCBF-8B54-453F-8DB8-F673738400EF}"/>
+                <a16:creationId xmlns:a16="http://schemas.microsoft.com/office/drawing/2014/main" id="{A82ADD72-2100-4E73-9205-E0CA3F65BF26}"/>
               </a:ext>
             </a:extLst>
           </p:cNvPr>
@@ -3034,7 +3135,7 @@
           <p:cNvPr id="7" name="">
             <a:extLst xmlns:a="http://schemas.openxmlformats.org/drawingml/2006/main">
               <a:ext uri="{FF2B5EF4-FFF2-40B4-BE49-F238E27FC236}">
-                <a16:creationId xmlns:a16="http://schemas.microsoft.com/office/drawing/2014/main" id="{76707E3F-92B4-48FB-A23B-662F67536CC3}"/>
+                <a16:creationId xmlns:a16="http://schemas.microsoft.com/office/drawing/2014/main" id="{304C6E70-D4F1-47DA-B545-245036540CFD}"/>
               </a:ext>
             </a:extLst>
           </p:cNvPr>
@@ -3095,7 +3196,7 @@
           <p:cNvPr id="8" name="">
             <a:extLst xmlns:a="http://schemas.openxmlformats.org/drawingml/2006/main">
               <a:ext uri="{FF2B5EF4-FFF2-40B4-BE49-F238E27FC236}">
-                <a16:creationId xmlns:a16="http://schemas.microsoft.com/office/drawing/2014/main" id="{6F118762-3DA0-409F-83FF-0C01F13E0C66}"/>
+                <a16:creationId xmlns:a16="http://schemas.microsoft.com/office/drawing/2014/main" id="{EC4879FF-5969-47D4-8A79-6916582CC1CF}"/>
               </a:ext>
             </a:extLst>
           </p:cNvPr>
@@ -3163,7 +3264,7 @@
         </p:xfrm>
         <a:graphic xmlns:a="http://schemas.openxmlformats.org/drawingml/2006/main">
           <a:graphicData uri="http://schemas.openxmlformats.org/drawingml/2006/chart">
-            <c:chart xmlns:r="http://schemas.openxmlformats.org/officeDocument/2006/relationships" xmlns:c="http://schemas.openxmlformats.org/drawingml/2006/chart" r:id="Ra3592e46faba462c"/>
+            <c:chart xmlns:r="http://schemas.openxmlformats.org/officeDocument/2006/relationships" xmlns:c="http://schemas.openxmlformats.org/drawingml/2006/chart" r:id="R9f851c1b40b44d4d"/>
           </a:graphicData>
         </a:graphic>
       </p:graphicFrame>
@@ -3172,7 +3273,7 @@
           <p:cNvPr id="10" name="">
             <a:extLst xmlns:a="http://schemas.openxmlformats.org/drawingml/2006/main">
               <a:ext uri="{FF2B5EF4-FFF2-40B4-BE49-F238E27FC236}">
-                <a16:creationId xmlns:a16="http://schemas.microsoft.com/office/drawing/2014/main" id="{A9D35BEA-EAB5-42C7-94D3-AC9868F43BF6}"/>
+                <a16:creationId xmlns:a16="http://schemas.microsoft.com/office/drawing/2014/main" id="{47383E9D-6EAE-4587-86F8-FC107713ECCB}"/>
               </a:ext>
             </a:extLst>
           </p:cNvPr>
@@ -3233,7 +3334,7 @@
           <p:cNvPr id="11" name="">
             <a:extLst xmlns:a="http://schemas.openxmlformats.org/drawingml/2006/main">
               <a:ext uri="{FF2B5EF4-FFF2-40B4-BE49-F238E27FC236}">
-                <a16:creationId xmlns:a16="http://schemas.microsoft.com/office/drawing/2014/main" id="{BAD4151B-AE70-4183-8EE9-0D11640FCBC5}"/>
+                <a16:creationId xmlns:a16="http://schemas.microsoft.com/office/drawing/2014/main" id="{2FDFA147-E92F-4F55-BA1F-43B245B6A111}"/>
               </a:ext>
             </a:extLst>
           </p:cNvPr>
@@ -3264,7 +3365,7 @@
           <p:cNvPr id="12" name="">
             <a:extLst xmlns:a="http://schemas.openxmlformats.org/drawingml/2006/main">
               <a:ext uri="{FF2B5EF4-FFF2-40B4-BE49-F238E27FC236}">
-                <a16:creationId xmlns:a16="http://schemas.microsoft.com/office/drawing/2014/main" id="{7F14F7A6-5D50-44E3-81C0-5CC9B756A717}"/>
+                <a16:creationId xmlns:a16="http://schemas.microsoft.com/office/drawing/2014/main" id="{8AA4F7E7-B9CC-408B-8445-B0CF27E80CF1}"/>
               </a:ext>
             </a:extLst>
           </p:cNvPr>
@@ -3325,7 +3426,7 @@
           <p:cNvPr id="13" name="">
             <a:extLst xmlns:a="http://schemas.openxmlformats.org/drawingml/2006/main">
               <a:ext uri="{FF2B5EF4-FFF2-40B4-BE49-F238E27FC236}">
-                <a16:creationId xmlns:a16="http://schemas.microsoft.com/office/drawing/2014/main" id="{B06E1ED5-C5E5-4E6E-A9C3-9345293CC8C7}"/>
+                <a16:creationId xmlns:a16="http://schemas.microsoft.com/office/drawing/2014/main" id="{156CE0F6-85A3-4004-AEE8-0128B00D3806}"/>
               </a:ext>
             </a:extLst>
           </p:cNvPr>
@@ -3384,7 +3485,7 @@
     </p:spTree>
     <p:extLst>
       <p:ext uri="{BB962C8B-B14F-4D97-AF65-F5344CB8AC3E}">
-        <p14:creationId xmlns:p14="http://schemas.microsoft.com/office/powerpoint/2010/main" val="1836066887"/>
+        <p14:creationId xmlns:p14="http://schemas.microsoft.com/office/powerpoint/2010/main" val="1030178246"/>
       </p:ext>
     </p:extLst>
   </p:cSld>
@@ -3412,10 +3513,10 @@
       </p:grpSpPr>
       <p:sp>
         <p:nvSpPr>
-          <p:cNvPr id="23" name="slide-title">
-            <a:extLst xmlns:a="http://schemas.openxmlformats.org/drawingml/2006/main">
-              <a:ext uri="{FF2B5EF4-FFF2-40B4-BE49-F238E27FC236}">
-                <a16:creationId xmlns:a16="http://schemas.microsoft.com/office/drawing/2014/main" id="{97CA310F-D86A-49B1-89BF-9ACC6236BDAD}"/>
+          <p:cNvPr id="32" name="slide-title">
+            <a:extLst xmlns:a="http://schemas.openxmlformats.org/drawingml/2006/main">
+              <a:ext uri="{FF2B5EF4-FFF2-40B4-BE49-F238E27FC236}">
+                <a16:creationId xmlns:a16="http://schemas.microsoft.com/office/drawing/2014/main" id="{1ABA3F94-EA67-4DD6-85C7-DBB85CCC82C4}"/>
               </a:ext>
             </a:extLst>
           </p:cNvPr>
@@ -3466,7 +3567,7 @@
                 <a:ea typeface="Arial"/>
                 <a:cs typeface="Arial"/>
               </a:rPr>
-              <a:t>Plausible formulas fail in four different ways</a:t>
+              <a:t>116 of 120 correct cells still produced a failed task</a:t>
             </a:r>
           </a:p>
         </p:txBody>
@@ -3476,19 +3577,19 @@
           <p:cNvPr id="2" name="">
             <a:extLst xmlns:a="http://schemas.openxmlformats.org/drawingml/2006/main">
               <a:ext uri="{FF2B5EF4-FFF2-40B4-BE49-F238E27FC236}">
-                <a16:creationId xmlns:a16="http://schemas.microsoft.com/office/drawing/2014/main" id="{AF4C521C-D7B9-4C11-BD5B-BA691C346EEA}"/>
-              </a:ext>
-            </a:extLst>
-          </p:cNvPr>
-          <p:cNvSpPr>
-            <a:spLocks xmlns:a="http://schemas.openxmlformats.org/drawingml/2006/main" noGrp="1"/>
-          </p:cNvSpPr>
-          <p:nvPr/>
-        </p:nvSpPr>
-        <p:spPr>
-          <a:xfrm xmlns:a="http://schemas.openxmlformats.org/drawingml/2006/main">
-            <a:off x="609600" y="1047750"/>
-            <a:ext cx="10287000" cy="400050"/>
+                <a16:creationId xmlns:a16="http://schemas.microsoft.com/office/drawing/2014/main" id="{BAC6E82A-3C95-455F-9F75-DCE200C88410}"/>
+              </a:ext>
+            </a:extLst>
+          </p:cNvPr>
+          <p:cNvSpPr>
+            <a:spLocks xmlns:a="http://schemas.openxmlformats.org/drawingml/2006/main" noGrp="1"/>
+          </p:cNvSpPr>
+          <p:nvPr/>
+        </p:nvSpPr>
+        <p:spPr>
+          <a:xfrm xmlns:a="http://schemas.openxmlformats.org/drawingml/2006/main">
+            <a:off x="609600" y="1028700"/>
+            <a:ext cx="10668000" cy="361950"/>
           </a:xfrm>
           <a:prstGeom xmlns:a="http://schemas.openxmlformats.org/drawingml/2006/main" prst="rect">
             <a:avLst/>
@@ -3527,7 +3628,7 @@
                 <a:ea typeface="Arial"/>
                 <a:cs typeface="Arial"/>
               </a:rPr>
-              <a:t>A workbook can open successfully while still producing the wrong investment result.</a:t>
+              <a:t>Two retained benchmark tasks show the difference between cell accuracy and a complete pass.</a:t>
             </a:r>
           </a:p>
         </p:txBody>
@@ -3537,207 +3638,26 @@
           <p:cNvPr id="3" name="">
             <a:extLst xmlns:a="http://schemas.openxmlformats.org/drawingml/2006/main">
               <a:ext uri="{FF2B5EF4-FFF2-40B4-BE49-F238E27FC236}">
-                <a16:creationId xmlns:a16="http://schemas.microsoft.com/office/drawing/2014/main" id="{E5D85DE6-C57D-4AFC-ADE3-210DC1B150B1}"/>
-              </a:ext>
-            </a:extLst>
-          </p:cNvPr>
-          <p:cNvSpPr>
-            <a:spLocks xmlns:a="http://schemas.openxmlformats.org/drawingml/2006/main" noGrp="1"/>
-          </p:cNvSpPr>
-          <p:nvPr/>
-        </p:nvSpPr>
-        <p:spPr>
-          <a:xfrm xmlns:a="http://schemas.openxmlformats.org/drawingml/2006/main">
-            <a:off x="609600" y="1952625"/>
-            <a:ext cx="857250" cy="495300"/>
-          </a:xfrm>
-          <a:prstGeom xmlns:a="http://schemas.openxmlformats.org/drawingml/2006/main" prst="rect">
-            <a:avLst/>
-          </a:prstGeom>
-          <a:noFill xmlns:a="http://schemas.openxmlformats.org/drawingml/2006/main"/>
-          <a:ln xmlns:a="http://schemas.openxmlformats.org/drawingml/2006/main" w="0">
-            <a:noFill/>
-          </a:ln>
-        </p:spPr>
-        <p:txBody>
-          <a:bodyPr xmlns:a="http://schemas.openxmlformats.org/drawingml/2006/main" wrap="square" lIns="0" tIns="0" rIns="0" bIns="0" anchor="t">
-            <a:normAutofit fontScale="100000"/>
-          </a:bodyPr>
-          <a:lstStyle xmlns:a="http://schemas.openxmlformats.org/drawingml/2006/main"/>
-          <a:p xmlns:a="http://schemas.openxmlformats.org/drawingml/2006/main">
-            <a:pPr algn="l">
-              <a:lnSpc>
-                <a:spcPct val="105000"/>
-              </a:lnSpc>
-              <a:buNone/>
-              <a:defRPr sz="2850" b="1" i="0">
-                <a:solidFill>
-                  <a:srgbClr val="35C47A"/>
-                </a:solidFill>
-                <a:latin typeface="Arial"/>
-                <a:ea typeface="Arial"/>
-                <a:cs typeface="Arial"/>
-              </a:defRPr>
-            </a:pPr>
-            <a:r>
-              <a:rPr sz="2850" b="1" i="0">
-                <a:solidFill>
-                  <a:srgbClr val="35C47A"/>
-                </a:solidFill>
-                <a:latin typeface="Arial"/>
-                <a:ea typeface="Arial"/>
-                <a:cs typeface="Arial"/>
-              </a:rPr>
-              <a:t>01</a:t>
-            </a:r>
-          </a:p>
-        </p:txBody>
-      </p:sp>
-      <p:sp>
-        <p:nvSpPr>
-          <p:cNvPr id="4" name="">
-            <a:extLst xmlns:a="http://schemas.openxmlformats.org/drawingml/2006/main">
-              <a:ext uri="{FF2B5EF4-FFF2-40B4-BE49-F238E27FC236}">
-                <a16:creationId xmlns:a16="http://schemas.microsoft.com/office/drawing/2014/main" id="{3C123DEB-300C-4DE7-8AF2-30B3FFB564DF}"/>
-              </a:ext>
-            </a:extLst>
-          </p:cNvPr>
-          <p:cNvSpPr>
-            <a:spLocks xmlns:a="http://schemas.openxmlformats.org/drawingml/2006/main" noGrp="1"/>
-          </p:cNvSpPr>
-          <p:nvPr/>
-        </p:nvSpPr>
-        <p:spPr>
-          <a:xfrm xmlns:a="http://schemas.openxmlformats.org/drawingml/2006/main">
-            <a:off x="609600" y="2647950"/>
-            <a:ext cx="2381250" cy="400050"/>
-          </a:xfrm>
-          <a:prstGeom xmlns:a="http://schemas.openxmlformats.org/drawingml/2006/main" prst="rect">
-            <a:avLst/>
-          </a:prstGeom>
-          <a:noFill xmlns:a="http://schemas.openxmlformats.org/drawingml/2006/main"/>
-          <a:ln xmlns:a="http://schemas.openxmlformats.org/drawingml/2006/main" w="0">
-            <a:noFill/>
-          </a:ln>
-        </p:spPr>
-        <p:txBody>
-          <a:bodyPr xmlns:a="http://schemas.openxmlformats.org/drawingml/2006/main" wrap="square" lIns="0" tIns="0" rIns="0" bIns="0" anchor="t">
-            <a:normAutofit fontScale="100000"/>
-          </a:bodyPr>
-          <a:lstStyle xmlns:a="http://schemas.openxmlformats.org/drawingml/2006/main"/>
-          <a:p xmlns:a="http://schemas.openxmlformats.org/drawingml/2006/main">
-            <a:pPr algn="l">
-              <a:lnSpc>
-                <a:spcPct val="105000"/>
-              </a:lnSpc>
-              <a:buNone/>
-              <a:defRPr sz="2025" b="1" i="0">
-                <a:solidFill>
-                  <a:srgbClr val="122033"/>
-                </a:solidFill>
-                <a:latin typeface="Arial"/>
-                <a:ea typeface="Arial"/>
-                <a:cs typeface="Arial"/>
-              </a:defRPr>
-            </a:pPr>
-            <a:r>
-              <a:rPr sz="2025" b="1" i="0">
-                <a:solidFill>
-                  <a:srgbClr val="122033"/>
-                </a:solidFill>
-                <a:latin typeface="Arial"/>
-                <a:ea typeface="Arial"/>
-                <a:cs typeface="Arial"/>
-              </a:rPr>
-              <a:t>Context</a:t>
-            </a:r>
-          </a:p>
-        </p:txBody>
-      </p:sp>
-      <p:sp>
-        <p:nvSpPr>
-          <p:cNvPr id="5" name="">
-            <a:extLst xmlns:a="http://schemas.openxmlformats.org/drawingml/2006/main">
-              <a:ext uri="{FF2B5EF4-FFF2-40B4-BE49-F238E27FC236}">
-                <a16:creationId xmlns:a16="http://schemas.microsoft.com/office/drawing/2014/main" id="{572B070C-DD95-4DA6-B3D3-6D1A8E576143}"/>
-              </a:ext>
-            </a:extLst>
-          </p:cNvPr>
-          <p:cNvSpPr>
-            <a:spLocks xmlns:a="http://schemas.openxmlformats.org/drawingml/2006/main" noGrp="1"/>
-          </p:cNvSpPr>
-          <p:nvPr/>
-        </p:nvSpPr>
-        <p:spPr>
-          <a:xfrm xmlns:a="http://schemas.openxmlformats.org/drawingml/2006/main">
-            <a:off x="609600" y="3209925"/>
-            <a:ext cx="2333625" cy="1381125"/>
-          </a:xfrm>
-          <a:prstGeom xmlns:a="http://schemas.openxmlformats.org/drawingml/2006/main" prst="rect">
-            <a:avLst/>
-          </a:prstGeom>
-          <a:noFill xmlns:a="http://schemas.openxmlformats.org/drawingml/2006/main"/>
-          <a:ln xmlns:a="http://schemas.openxmlformats.org/drawingml/2006/main" w="0">
-            <a:noFill/>
-          </a:ln>
-        </p:spPr>
-        <p:txBody>
-          <a:bodyPr xmlns:a="http://schemas.openxmlformats.org/drawingml/2006/main" wrap="square" lIns="0" tIns="0" rIns="0" bIns="0" anchor="t">
-            <a:normAutofit fontScale="100000"/>
-          </a:bodyPr>
-          <a:lstStyle xmlns:a="http://schemas.openxmlformats.org/drawingml/2006/main"/>
-          <a:p xmlns:a="http://schemas.openxmlformats.org/drawingml/2006/main">
-            <a:pPr algn="l">
-              <a:lnSpc>
-                <a:spcPct val="114000"/>
-              </a:lnSpc>
-              <a:buNone/>
-              <a:defRPr sz="1500" b="0" i="0">
-                <a:solidFill>
-                  <a:srgbClr val="667487"/>
-                </a:solidFill>
-                <a:latin typeface="Arial"/>
-                <a:ea typeface="Arial"/>
-                <a:cs typeface="Arial"/>
-              </a:defRPr>
-            </a:pPr>
-            <a:r>
-              <a:rPr sz="1500" b="0" i="0">
-                <a:solidFill>
-                  <a:srgbClr val="667487"/>
-                </a:solidFill>
-                <a:latin typeface="Arial"/>
-                <a:ea typeface="Arial"/>
-                <a:cs typeface="Arial"/>
-              </a:rPr>
-              <a:t>The relevant worksheet, source range or existing formula never reaches the model.</a:t>
-            </a:r>
-          </a:p>
-        </p:txBody>
-      </p:sp>
-      <p:sp>
-        <p:nvSpPr>
-          <p:cNvPr id="6" name="">
-            <a:extLst xmlns:a="http://schemas.openxmlformats.org/drawingml/2006/main">
-              <a:ext uri="{FF2B5EF4-FFF2-40B4-BE49-F238E27FC236}">
-                <a16:creationId xmlns:a16="http://schemas.microsoft.com/office/drawing/2014/main" id="{7A77A824-6A1A-45A8-9F26-34C7BEF0EAC5}"/>
-              </a:ext>
-            </a:extLst>
-          </p:cNvPr>
-          <p:cNvSpPr>
-            <a:spLocks xmlns:a="http://schemas.openxmlformats.org/drawingml/2006/main" noGrp="1"/>
-          </p:cNvSpPr>
-          <p:nvPr/>
-        </p:nvSpPr>
-        <p:spPr>
-          <a:xfrm xmlns:a="http://schemas.openxmlformats.org/drawingml/2006/main">
-            <a:off x="3181350" y="1924050"/>
-            <a:ext cx="0" cy="2809875"/>
-          </a:xfrm>
-          <a:prstGeom xmlns:a="http://schemas.openxmlformats.org/drawingml/2006/main" prst="line">
-            <a:avLst/>
-          </a:prstGeom>
-          <a:noFill xmlns:a="http://schemas.openxmlformats.org/drawingml/2006/main"/>
+                <a16:creationId xmlns:a16="http://schemas.microsoft.com/office/drawing/2014/main" id="{6021C872-5AFF-41F2-959B-3A80C93444EA}"/>
+              </a:ext>
+            </a:extLst>
+          </p:cNvPr>
+          <p:cNvSpPr>
+            <a:spLocks xmlns:a="http://schemas.openxmlformats.org/drawingml/2006/main" noGrp="1"/>
+          </p:cNvSpPr>
+          <p:nvPr/>
+        </p:nvSpPr>
+        <p:spPr>
+          <a:xfrm xmlns:a="http://schemas.openxmlformats.org/drawingml/2006/main">
+            <a:off x="609600" y="1619250"/>
+            <a:ext cx="5143500" cy="3838575"/>
+          </a:xfrm>
+          <a:prstGeom xmlns:a="http://schemas.openxmlformats.org/drawingml/2006/main" prst="rect">
+            <a:avLst/>
+          </a:prstGeom>
+          <a:solidFill xmlns:a="http://schemas.openxmlformats.org/drawingml/2006/main">
+            <a:srgbClr val="FFFDF8"/>
+          </a:solidFill>
           <a:ln xmlns:a="http://schemas.openxmlformats.org/drawingml/2006/main" w="9525">
             <a:solidFill>
               <a:srgbClr val="C9D1D9"/>
@@ -3748,22 +3668,52 @@
       </p:sp>
       <p:sp>
         <p:nvSpPr>
-          <p:cNvPr id="7" name="">
-            <a:extLst xmlns:a="http://schemas.openxmlformats.org/drawingml/2006/main">
-              <a:ext uri="{FF2B5EF4-FFF2-40B4-BE49-F238E27FC236}">
-                <a16:creationId xmlns:a16="http://schemas.microsoft.com/office/drawing/2014/main" id="{CDFDDAB6-A8CF-4ED6-B995-CE42ED65D913}"/>
-              </a:ext>
-            </a:extLst>
-          </p:cNvPr>
-          <p:cNvSpPr>
-            <a:spLocks xmlns:a="http://schemas.openxmlformats.org/drawingml/2006/main" noGrp="1"/>
-          </p:cNvSpPr>
-          <p:nvPr/>
-        </p:nvSpPr>
-        <p:spPr>
-          <a:xfrm xmlns:a="http://schemas.openxmlformats.org/drawingml/2006/main">
-            <a:off x="3390900" y="1952625"/>
-            <a:ext cx="857250" cy="495300"/>
+          <p:cNvPr id="4" name="">
+            <a:extLst xmlns:a="http://schemas.openxmlformats.org/drawingml/2006/main">
+              <a:ext uri="{FF2B5EF4-FFF2-40B4-BE49-F238E27FC236}">
+                <a16:creationId xmlns:a16="http://schemas.microsoft.com/office/drawing/2014/main" id="{9E9EBE45-F0C9-4518-9777-E7F6B232846F}"/>
+              </a:ext>
+            </a:extLst>
+          </p:cNvPr>
+          <p:cNvSpPr>
+            <a:spLocks xmlns:a="http://schemas.openxmlformats.org/drawingml/2006/main" noGrp="1"/>
+          </p:cNvSpPr>
+          <p:nvPr/>
+        </p:nvSpPr>
+        <p:spPr>
+          <a:xfrm xmlns:a="http://schemas.openxmlformats.org/drawingml/2006/main">
+            <a:off x="609600" y="1619250"/>
+            <a:ext cx="5143500" cy="76200"/>
+          </a:xfrm>
+          <a:prstGeom xmlns:a="http://schemas.openxmlformats.org/drawingml/2006/main" prst="rect">
+            <a:avLst/>
+          </a:prstGeom>
+          <a:solidFill xmlns:a="http://schemas.openxmlformats.org/drawingml/2006/main">
+            <a:srgbClr val="35C47A"/>
+          </a:solidFill>
+          <a:ln xmlns:a="http://schemas.openxmlformats.org/drawingml/2006/main" w="0">
+            <a:noFill/>
+          </a:ln>
+        </p:spPr>
+      </p:sp>
+      <p:sp>
+        <p:nvSpPr>
+          <p:cNvPr id="5" name="">
+            <a:extLst xmlns:a="http://schemas.openxmlformats.org/drawingml/2006/main">
+              <a:ext uri="{FF2B5EF4-FFF2-40B4-BE49-F238E27FC236}">
+                <a16:creationId xmlns:a16="http://schemas.microsoft.com/office/drawing/2014/main" id="{1E9738DD-0891-4676-BA41-54BB207B06B1}"/>
+              </a:ext>
+            </a:extLst>
+          </p:cNvPr>
+          <p:cNvSpPr>
+            <a:spLocks xmlns:a="http://schemas.openxmlformats.org/drawingml/2006/main" noGrp="1"/>
+          </p:cNvSpPr>
+          <p:nvPr/>
+        </p:nvSpPr>
+        <p:spPr>
+          <a:xfrm xmlns:a="http://schemas.openxmlformats.org/drawingml/2006/main">
+            <a:off x="876300" y="1885950"/>
+            <a:ext cx="2095500" cy="228600"/>
           </a:xfrm>
           <a:prstGeom xmlns:a="http://schemas.openxmlformats.org/drawingml/2006/main" prst="rect">
             <a:avLst/>
@@ -3784,47 +3734,47 @@
                 <a:spcPct val="105000"/>
               </a:lnSpc>
               <a:buNone/>
-              <a:defRPr sz="2850" b="1" i="0">
-                <a:solidFill>
-                  <a:srgbClr val="35C47A"/>
-                </a:solidFill>
-                <a:latin typeface="Arial"/>
-                <a:ea typeface="Arial"/>
-                <a:cs typeface="Arial"/>
-              </a:defRPr>
-            </a:pPr>
-            <a:r>
-              <a:rPr sz="2850" b="1" i="0">
-                <a:solidFill>
-                  <a:srgbClr val="35C47A"/>
-                </a:solidFill>
-                <a:latin typeface="Arial"/>
-                <a:ea typeface="Arial"/>
-                <a:cs typeface="Arial"/>
-              </a:rPr>
-              <a:t>02</a:t>
-            </a:r>
-          </a:p>
-        </p:txBody>
-      </p:sp>
-      <p:sp>
-        <p:nvSpPr>
-          <p:cNvPr id="8" name="">
-            <a:extLst xmlns:a="http://schemas.openxmlformats.org/drawingml/2006/main">
-              <a:ext uri="{FF2B5EF4-FFF2-40B4-BE49-F238E27FC236}">
-                <a16:creationId xmlns:a16="http://schemas.microsoft.com/office/drawing/2014/main" id="{74111B4A-8A88-4577-A93F-7DFA6EFA79CB}"/>
-              </a:ext>
-            </a:extLst>
-          </p:cNvPr>
-          <p:cNvSpPr>
-            <a:spLocks xmlns:a="http://schemas.openxmlformats.org/drawingml/2006/main" noGrp="1"/>
-          </p:cNvSpPr>
-          <p:nvPr/>
-        </p:nvSpPr>
-        <p:spPr>
-          <a:xfrm xmlns:a="http://schemas.openxmlformats.org/drawingml/2006/main">
-            <a:off x="3390900" y="2647950"/>
-            <a:ext cx="2381250" cy="400050"/>
+              <a:defRPr sz="1050" b="1" i="0">
+                <a:solidFill>
+                  <a:srgbClr val="667487"/>
+                </a:solidFill>
+                <a:latin typeface="Arial"/>
+                <a:ea typeface="Arial"/>
+                <a:cs typeface="Arial"/>
+              </a:defRPr>
+            </a:pPr>
+            <a:r>
+              <a:rPr sz="1050" b="1" i="0">
+                <a:solidFill>
+                  <a:srgbClr val="667487"/>
+                </a:solidFill>
+                <a:latin typeface="Arial"/>
+                <a:ea typeface="Arial"/>
+                <a:cs typeface="Arial"/>
+              </a:rPr>
+              <a:t>TASK 54513</a:t>
+            </a:r>
+          </a:p>
+        </p:txBody>
+      </p:sp>
+      <p:sp>
+        <p:nvSpPr>
+          <p:cNvPr id="6" name="">
+            <a:extLst xmlns:a="http://schemas.openxmlformats.org/drawingml/2006/main">
+              <a:ext uri="{FF2B5EF4-FFF2-40B4-BE49-F238E27FC236}">
+                <a16:creationId xmlns:a16="http://schemas.microsoft.com/office/drawing/2014/main" id="{27C2880A-6552-4438-A6C1-1BDAFB72C1D7}"/>
+              </a:ext>
+            </a:extLst>
+          </p:cNvPr>
+          <p:cNvSpPr>
+            <a:spLocks xmlns:a="http://schemas.openxmlformats.org/drawingml/2006/main" noGrp="1"/>
+          </p:cNvSpPr>
+          <p:nvPr/>
+        </p:nvSpPr>
+        <p:spPr>
+          <a:xfrm xmlns:a="http://schemas.openxmlformats.org/drawingml/2006/main">
+            <a:off x="4000500" y="1885950"/>
+            <a:ext cx="1466850" cy="228600"/>
           </a:xfrm>
           <a:prstGeom xmlns:a="http://schemas.openxmlformats.org/drawingml/2006/main" prst="rect">
             <a:avLst/>
@@ -3840,52 +3790,52 @@
           </a:bodyPr>
           <a:lstStyle xmlns:a="http://schemas.openxmlformats.org/drawingml/2006/main"/>
           <a:p xmlns:a="http://schemas.openxmlformats.org/drawingml/2006/main">
-            <a:pPr algn="l">
+            <a:pPr algn="r">
               <a:lnSpc>
                 <a:spcPct val="105000"/>
               </a:lnSpc>
               <a:buNone/>
-              <a:defRPr sz="2025" b="1" i="0">
-                <a:solidFill>
-                  <a:srgbClr val="122033"/>
-                </a:solidFill>
-                <a:latin typeface="Arial"/>
-                <a:ea typeface="Arial"/>
-                <a:cs typeface="Arial"/>
-              </a:defRPr>
-            </a:pPr>
-            <a:r>
-              <a:rPr sz="2025" b="1" i="0">
-                <a:solidFill>
-                  <a:srgbClr val="122033"/>
-                </a:solidFill>
-                <a:latin typeface="Arial"/>
-                <a:ea typeface="Arial"/>
-                <a:cs typeface="Arial"/>
-              </a:rPr>
-              <a:t>Coverage</a:t>
-            </a:r>
-          </a:p>
-        </p:txBody>
-      </p:sp>
-      <p:sp>
-        <p:nvSpPr>
-          <p:cNvPr id="9" name="">
-            <a:extLst xmlns:a="http://schemas.openxmlformats.org/drawingml/2006/main">
-              <a:ext uri="{FF2B5EF4-FFF2-40B4-BE49-F238E27FC236}">
-                <a16:creationId xmlns:a16="http://schemas.microsoft.com/office/drawing/2014/main" id="{95B92058-C0B7-4DAA-88ED-4BAF7D71BC73}"/>
-              </a:ext>
-            </a:extLst>
-          </p:cNvPr>
-          <p:cNvSpPr>
-            <a:spLocks xmlns:a="http://schemas.openxmlformats.org/drawingml/2006/main" noGrp="1"/>
-          </p:cNvSpPr>
-          <p:nvPr/>
-        </p:nvSpPr>
-        <p:spPr>
-          <a:xfrm xmlns:a="http://schemas.openxmlformats.org/drawingml/2006/main">
-            <a:off x="3390900" y="3209925"/>
-            <a:ext cx="2333625" cy="1381125"/>
+              <a:defRPr sz="1050" b="1" i="0">
+                <a:solidFill>
+                  <a:srgbClr val="176B43"/>
+                </a:solidFill>
+                <a:latin typeface="Arial"/>
+                <a:ea typeface="Arial"/>
+                <a:cs typeface="Arial"/>
+              </a:defRPr>
+            </a:pPr>
+            <a:r>
+              <a:rPr sz="1050" b="1" i="0">
+                <a:solidFill>
+                  <a:srgbClr val="176B43"/>
+                </a:solidFill>
+                <a:latin typeface="Arial"/>
+                <a:ea typeface="Arial"/>
+                <a:cs typeface="Arial"/>
+              </a:rPr>
+              <a:t>FULL PASS</a:t>
+            </a:r>
+          </a:p>
+        </p:txBody>
+      </p:sp>
+      <p:sp>
+        <p:nvSpPr>
+          <p:cNvPr id="7" name="">
+            <a:extLst xmlns:a="http://schemas.openxmlformats.org/drawingml/2006/main">
+              <a:ext uri="{FF2B5EF4-FFF2-40B4-BE49-F238E27FC236}">
+                <a16:creationId xmlns:a16="http://schemas.microsoft.com/office/drawing/2014/main" id="{B2FC8E18-1188-40F3-826A-2010CD5E6811}"/>
+              </a:ext>
+            </a:extLst>
+          </p:cNvPr>
+          <p:cNvSpPr>
+            <a:spLocks xmlns:a="http://schemas.openxmlformats.org/drawingml/2006/main" noGrp="1"/>
+          </p:cNvSpPr>
+          <p:nvPr/>
+        </p:nvSpPr>
+        <p:spPr>
+          <a:xfrm xmlns:a="http://schemas.openxmlformats.org/drawingml/2006/main">
+            <a:off x="876300" y="2171700"/>
+            <a:ext cx="2667000" cy="685800"/>
           </a:xfrm>
           <a:prstGeom xmlns:a="http://schemas.openxmlformats.org/drawingml/2006/main" prst="rect">
             <a:avLst/>
@@ -3903,55 +3853,575 @@
           <a:p xmlns:a="http://schemas.openxmlformats.org/drawingml/2006/main">
             <a:pPr algn="l">
               <a:lnSpc>
-                <a:spcPct val="114000"/>
-              </a:lnSpc>
-              <a:buNone/>
-              <a:defRPr sz="1500" b="0" i="0">
+                <a:spcPct val="105000"/>
+              </a:lnSpc>
+              <a:buNone/>
+              <a:defRPr sz="4200" b="1" i="0">
+                <a:solidFill>
+                  <a:srgbClr val="122033"/>
+                </a:solidFill>
+                <a:latin typeface="Arial"/>
+                <a:ea typeface="Arial"/>
+                <a:cs typeface="Arial"/>
+              </a:defRPr>
+            </a:pPr>
+            <a:r>
+              <a:rPr sz="4200" b="1" i="0">
+                <a:solidFill>
+                  <a:srgbClr val="122033"/>
+                </a:solidFill>
+                <a:latin typeface="Arial"/>
+                <a:ea typeface="Arial"/>
+                <a:cs typeface="Arial"/>
+              </a:rPr>
+              <a:t>1 / 1</a:t>
+            </a:r>
+          </a:p>
+        </p:txBody>
+      </p:sp>
+      <p:sp>
+        <p:nvSpPr>
+          <p:cNvPr id="8" name="">
+            <a:extLst xmlns:a="http://schemas.openxmlformats.org/drawingml/2006/main">
+              <a:ext uri="{FF2B5EF4-FFF2-40B4-BE49-F238E27FC236}">
+                <a16:creationId xmlns:a16="http://schemas.microsoft.com/office/drawing/2014/main" id="{6298B0A7-D748-4F63-893F-00D179DEEC90}"/>
+              </a:ext>
+            </a:extLst>
+          </p:cNvPr>
+          <p:cNvSpPr>
+            <a:spLocks xmlns:a="http://schemas.openxmlformats.org/drawingml/2006/main" noGrp="1"/>
+          </p:cNvSpPr>
+          <p:nvPr/>
+        </p:nvSpPr>
+        <p:spPr>
+          <a:xfrm xmlns:a="http://schemas.openxmlformats.org/drawingml/2006/main">
+            <a:off x="914400" y="2838450"/>
+            <a:ext cx="2857500" cy="266700"/>
+          </a:xfrm>
+          <a:prstGeom xmlns:a="http://schemas.openxmlformats.org/drawingml/2006/main" prst="rect">
+            <a:avLst/>
+          </a:prstGeom>
+          <a:noFill xmlns:a="http://schemas.openxmlformats.org/drawingml/2006/main"/>
+          <a:ln xmlns:a="http://schemas.openxmlformats.org/drawingml/2006/main" w="0">
+            <a:noFill/>
+          </a:ln>
+        </p:spPr>
+        <p:txBody>
+          <a:bodyPr xmlns:a="http://schemas.openxmlformats.org/drawingml/2006/main" wrap="square" lIns="0" tIns="0" rIns="0" bIns="0" anchor="t">
+            <a:normAutofit fontScale="100000"/>
+          </a:bodyPr>
+          <a:lstStyle xmlns:a="http://schemas.openxmlformats.org/drawingml/2006/main"/>
+          <a:p xmlns:a="http://schemas.openxmlformats.org/drawingml/2006/main">
+            <a:pPr algn="l">
+              <a:lnSpc>
+                <a:spcPct val="105000"/>
+              </a:lnSpc>
+              <a:buNone/>
+              <a:defRPr sz="1350" b="1" i="0">
+                <a:solidFill>
+                  <a:srgbClr val="35C47A"/>
+                </a:solidFill>
+                <a:latin typeface="Arial"/>
+                <a:ea typeface="Arial"/>
+                <a:cs typeface="Arial"/>
+              </a:defRPr>
+            </a:pPr>
+            <a:r>
+              <a:rPr sz="1350" b="1" i="0">
+                <a:solidFill>
+                  <a:srgbClr val="35C47A"/>
+                </a:solidFill>
+                <a:latin typeface="Arial"/>
+                <a:ea typeface="Arial"/>
+                <a:cs typeface="Arial"/>
+              </a:rPr>
+              <a:t>target cell correct</a:t>
+            </a:r>
+          </a:p>
+        </p:txBody>
+      </p:sp>
+      <p:sp>
+        <p:nvSpPr>
+          <p:cNvPr id="9" name="">
+            <a:extLst xmlns:a="http://schemas.openxmlformats.org/drawingml/2006/main">
+              <a:ext uri="{FF2B5EF4-FFF2-40B4-BE49-F238E27FC236}">
+                <a16:creationId xmlns:a16="http://schemas.microsoft.com/office/drawing/2014/main" id="{D70A4F1C-B04C-4426-8048-0D053FCA6C39}"/>
+              </a:ext>
+            </a:extLst>
+          </p:cNvPr>
+          <p:cNvSpPr>
+            <a:spLocks xmlns:a="http://schemas.openxmlformats.org/drawingml/2006/main" noGrp="1"/>
+          </p:cNvSpPr>
+          <p:nvPr/>
+        </p:nvSpPr>
+        <p:spPr>
+          <a:xfrm xmlns:a="http://schemas.openxmlformats.org/drawingml/2006/main">
+            <a:off x="876300" y="3276600"/>
+            <a:ext cx="4286250" cy="304800"/>
+          </a:xfrm>
+          <a:prstGeom xmlns:a="http://schemas.openxmlformats.org/drawingml/2006/main" prst="rect">
+            <a:avLst/>
+          </a:prstGeom>
+          <a:noFill xmlns:a="http://schemas.openxmlformats.org/drawingml/2006/main"/>
+          <a:ln xmlns:a="http://schemas.openxmlformats.org/drawingml/2006/main" w="0">
+            <a:noFill/>
+          </a:ln>
+        </p:spPr>
+        <p:txBody>
+          <a:bodyPr xmlns:a="http://schemas.openxmlformats.org/drawingml/2006/main" wrap="square" lIns="0" tIns="0" rIns="0" bIns="0" anchor="t">
+            <a:normAutofit fontScale="100000"/>
+          </a:bodyPr>
+          <a:lstStyle xmlns:a="http://schemas.openxmlformats.org/drawingml/2006/main"/>
+          <a:p xmlns:a="http://schemas.openxmlformats.org/drawingml/2006/main">
+            <a:pPr algn="l">
+              <a:lnSpc>
+                <a:spcPct val="105000"/>
+              </a:lnSpc>
+              <a:buNone/>
+              <a:defRPr sz="1575" b="1" i="0">
+                <a:solidFill>
+                  <a:srgbClr val="122033"/>
+                </a:solidFill>
+                <a:latin typeface="Arial"/>
+                <a:ea typeface="Arial"/>
+                <a:cs typeface="Arial"/>
+              </a:defRPr>
+            </a:pPr>
+            <a:r>
+              <a:rPr sz="1575" b="1" i="0">
+                <a:solidFill>
+                  <a:srgbClr val="122033"/>
+                </a:solidFill>
+                <a:latin typeface="Arial"/>
+                <a:ea typeface="Arial"/>
+                <a:cs typeface="Arial"/>
+              </a:rPr>
+              <a:t>$34.99 with a 55% discount</a:t>
+            </a:r>
+          </a:p>
+        </p:txBody>
+      </p:sp>
+      <p:sp>
+        <p:nvSpPr>
+          <p:cNvPr id="10" name="">
+            <a:extLst xmlns:a="http://schemas.openxmlformats.org/drawingml/2006/main">
+              <a:ext uri="{FF2B5EF4-FFF2-40B4-BE49-F238E27FC236}">
+                <a16:creationId xmlns:a16="http://schemas.microsoft.com/office/drawing/2014/main" id="{5F2C4572-432C-4574-BD42-9B2F4BFF320A}"/>
+              </a:ext>
+            </a:extLst>
+          </p:cNvPr>
+          <p:cNvSpPr>
+            <a:spLocks xmlns:a="http://schemas.openxmlformats.org/drawingml/2006/main" noGrp="1"/>
+          </p:cNvSpPr>
+          <p:nvPr/>
+        </p:nvSpPr>
+        <p:spPr>
+          <a:xfrm xmlns:a="http://schemas.openxmlformats.org/drawingml/2006/main">
+            <a:off x="876300" y="3714750"/>
+            <a:ext cx="1428750" cy="228600"/>
+          </a:xfrm>
+          <a:prstGeom xmlns:a="http://schemas.openxmlformats.org/drawingml/2006/main" prst="rect">
+            <a:avLst/>
+          </a:prstGeom>
+          <a:noFill xmlns:a="http://schemas.openxmlformats.org/drawingml/2006/main"/>
+          <a:ln xmlns:a="http://schemas.openxmlformats.org/drawingml/2006/main" w="0">
+            <a:noFill/>
+          </a:ln>
+        </p:spPr>
+        <p:txBody>
+          <a:bodyPr xmlns:a="http://schemas.openxmlformats.org/drawingml/2006/main" wrap="square" lIns="0" tIns="0" rIns="0" bIns="0" anchor="t">
+            <a:normAutofit fontScale="100000"/>
+          </a:bodyPr>
+          <a:lstStyle xmlns:a="http://schemas.openxmlformats.org/drawingml/2006/main"/>
+          <a:p xmlns:a="http://schemas.openxmlformats.org/drawingml/2006/main">
+            <a:pPr algn="l">
+              <a:lnSpc>
+                <a:spcPct val="105000"/>
+              </a:lnSpc>
+              <a:buNone/>
+              <a:defRPr sz="1125" b="1" i="0">
                 <a:solidFill>
                   <a:srgbClr val="667487"/>
                 </a:solidFill>
-                <a:latin typeface="Arial"/>
-                <a:ea typeface="Arial"/>
-                <a:cs typeface="Arial"/>
-              </a:defRPr>
-            </a:pPr>
-            <a:r>
-              <a:rPr sz="1500" b="0" i="0">
+                <a:latin typeface="Menlo"/>
+                <a:ea typeface="Menlo"/>
+                <a:cs typeface="Menlo"/>
+              </a:defRPr>
+            </a:pPr>
+            <a:r>
+              <a:rPr sz="1125" b="1" i="0">
                 <a:solidFill>
                   <a:srgbClr val="667487"/>
                 </a:solidFill>
-                <a:latin typeface="Arial"/>
-                <a:ea typeface="Arial"/>
-                <a:cs typeface="Arial"/>
-              </a:rPr>
-              <a:t>A response misses required cells, writes to the same cell twice or changes cells outside the target.</a:t>
-            </a:r>
-          </a:p>
-        </p:txBody>
-      </p:sp>
-      <p:sp>
-        <p:nvSpPr>
-          <p:cNvPr id="10" name="">
-            <a:extLst xmlns:a="http://schemas.openxmlformats.org/drawingml/2006/main">
-              <a:ext uri="{FF2B5EF4-FFF2-40B4-BE49-F238E27FC236}">
-                <a16:creationId xmlns:a16="http://schemas.microsoft.com/office/drawing/2014/main" id="{A8FC0EF1-FD3D-4E89-AC6B-0A06797599DE}"/>
-              </a:ext>
-            </a:extLst>
-          </p:cNvPr>
-          <p:cNvSpPr>
-            <a:spLocks xmlns:a="http://schemas.openxmlformats.org/drawingml/2006/main" noGrp="1"/>
-          </p:cNvSpPr>
-          <p:nvPr/>
-        </p:nvSpPr>
-        <p:spPr>
-          <a:xfrm xmlns:a="http://schemas.openxmlformats.org/drawingml/2006/main">
-            <a:off x="5962650" y="1924050"/>
-            <a:ext cx="0" cy="2809875"/>
-          </a:xfrm>
-          <a:prstGeom xmlns:a="http://schemas.openxmlformats.org/drawingml/2006/main" prst="line">
-            <a:avLst/>
-          </a:prstGeom>
-          <a:noFill xmlns:a="http://schemas.openxmlformats.org/drawingml/2006/main"/>
+                <a:latin typeface="Menlo"/>
+                <a:ea typeface="Menlo"/>
+                <a:cs typeface="Menlo"/>
+              </a:rPr>
+              <a:t>Sheet1!F8</a:t>
+            </a:r>
+          </a:p>
+        </p:txBody>
+      </p:sp>
+      <p:sp>
+        <p:nvSpPr>
+          <p:cNvPr id="11" name="">
+            <a:extLst xmlns:a="http://schemas.openxmlformats.org/drawingml/2006/main">
+              <a:ext uri="{FF2B5EF4-FFF2-40B4-BE49-F238E27FC236}">
+                <a16:creationId xmlns:a16="http://schemas.microsoft.com/office/drawing/2014/main" id="{BBFD7431-9F32-4EC9-B583-B40B2684F08E}"/>
+              </a:ext>
+            </a:extLst>
+          </p:cNvPr>
+          <p:cNvSpPr>
+            <a:spLocks xmlns:a="http://schemas.openxmlformats.org/drawingml/2006/main" noGrp="1"/>
+          </p:cNvSpPr>
+          <p:nvPr/>
+        </p:nvSpPr>
+        <p:spPr>
+          <a:xfrm xmlns:a="http://schemas.openxmlformats.org/drawingml/2006/main">
+            <a:off x="876300" y="4000500"/>
+            <a:ext cx="4610100" cy="552450"/>
+          </a:xfrm>
+          <a:prstGeom xmlns:a="http://schemas.openxmlformats.org/drawingml/2006/main" prst="rect">
+            <a:avLst/>
+          </a:prstGeom>
+          <a:solidFill xmlns:a="http://schemas.openxmlformats.org/drawingml/2006/main">
+            <a:srgbClr val="0B172A"/>
+          </a:solidFill>
+          <a:ln xmlns:a="http://schemas.openxmlformats.org/drawingml/2006/main" w="0">
+            <a:noFill/>
+          </a:ln>
+        </p:spPr>
+      </p:sp>
+      <p:sp>
+        <p:nvSpPr>
+          <p:cNvPr id="12" name="">
+            <a:extLst xmlns:a="http://schemas.openxmlformats.org/drawingml/2006/main">
+              <a:ext uri="{FF2B5EF4-FFF2-40B4-BE49-F238E27FC236}">
+                <a16:creationId xmlns:a16="http://schemas.microsoft.com/office/drawing/2014/main" id="{3276BCAE-0044-4E8A-B16F-7F070116C66A}"/>
+              </a:ext>
+            </a:extLst>
+          </p:cNvPr>
+          <p:cNvSpPr>
+            <a:spLocks xmlns:a="http://schemas.openxmlformats.org/drawingml/2006/main" noGrp="1"/>
+          </p:cNvSpPr>
+          <p:nvPr/>
+        </p:nvSpPr>
+        <p:spPr>
+          <a:xfrm xmlns:a="http://schemas.openxmlformats.org/drawingml/2006/main">
+            <a:off x="1066800" y="4114800"/>
+            <a:ext cx="4229100" cy="323850"/>
+          </a:xfrm>
+          <a:prstGeom xmlns:a="http://schemas.openxmlformats.org/drawingml/2006/main" prst="rect">
+            <a:avLst/>
+          </a:prstGeom>
+          <a:noFill xmlns:a="http://schemas.openxmlformats.org/drawingml/2006/main"/>
+          <a:ln xmlns:a="http://schemas.openxmlformats.org/drawingml/2006/main" w="0">
+            <a:noFill/>
+          </a:ln>
+        </p:spPr>
+        <p:txBody>
+          <a:bodyPr xmlns:a="http://schemas.openxmlformats.org/drawingml/2006/main" wrap="square" lIns="0" tIns="0" rIns="0" bIns="0" anchor="ctr">
+            <a:normAutofit fontScale="100000"/>
+          </a:bodyPr>
+          <a:lstStyle xmlns:a="http://schemas.openxmlformats.org/drawingml/2006/main"/>
+          <a:p xmlns:a="http://schemas.openxmlformats.org/drawingml/2006/main">
+            <a:pPr algn="l">
+              <a:lnSpc>
+                <a:spcPct val="105000"/>
+              </a:lnSpc>
+              <a:buNone/>
+              <a:defRPr sz="1875" b="1" i="0">
+                <a:solidFill>
+                  <a:srgbClr val="FFFFFF"/>
+                </a:solidFill>
+                <a:latin typeface="Menlo"/>
+                <a:ea typeface="Menlo"/>
+                <a:cs typeface="Menlo"/>
+              </a:defRPr>
+            </a:pPr>
+            <a:r>
+              <a:rPr sz="1875" b="1" i="0">
+                <a:solidFill>
+                  <a:srgbClr val="FFFFFF"/>
+                </a:solidFill>
+                <a:latin typeface="Menlo"/>
+                <a:ea typeface="Menlo"/>
+                <a:cs typeface="Menlo"/>
+              </a:rPr>
+              <a:t>=C8*(1-E8)</a:t>
+            </a:r>
+          </a:p>
+        </p:txBody>
+      </p:sp>
+      <p:sp>
+        <p:nvSpPr>
+          <p:cNvPr id="13" name="">
+            <a:extLst xmlns:a="http://schemas.openxmlformats.org/drawingml/2006/main">
+              <a:ext uri="{FF2B5EF4-FFF2-40B4-BE49-F238E27FC236}">
+                <a16:creationId xmlns:a16="http://schemas.microsoft.com/office/drawing/2014/main" id="{3F5CE4E8-5779-4CB0-9B8F-479CB32FE717}"/>
+              </a:ext>
+            </a:extLst>
+          </p:cNvPr>
+          <p:cNvSpPr>
+            <a:spLocks xmlns:a="http://schemas.openxmlformats.org/drawingml/2006/main" noGrp="1"/>
+          </p:cNvSpPr>
+          <p:nvPr/>
+        </p:nvSpPr>
+        <p:spPr>
+          <a:xfrm xmlns:a="http://schemas.openxmlformats.org/drawingml/2006/main">
+            <a:off x="876300" y="4762500"/>
+            <a:ext cx="2000250" cy="381000"/>
+          </a:xfrm>
+          <a:prstGeom xmlns:a="http://schemas.openxmlformats.org/drawingml/2006/main" prst="rect">
+            <a:avLst/>
+          </a:prstGeom>
+          <a:noFill xmlns:a="http://schemas.openxmlformats.org/drawingml/2006/main"/>
+          <a:ln xmlns:a="http://schemas.openxmlformats.org/drawingml/2006/main" w="0">
+            <a:noFill/>
+          </a:ln>
+        </p:spPr>
+        <p:txBody>
+          <a:bodyPr xmlns:a="http://schemas.openxmlformats.org/drawingml/2006/main" wrap="square" lIns="0" tIns="0" rIns="0" bIns="0" anchor="t">
+            <a:normAutofit fontScale="100000"/>
+          </a:bodyPr>
+          <a:lstStyle xmlns:a="http://schemas.openxmlformats.org/drawingml/2006/main"/>
+          <a:p xmlns:a="http://schemas.openxmlformats.org/drawingml/2006/main">
+            <a:pPr algn="l">
+              <a:lnSpc>
+                <a:spcPct val="105000"/>
+              </a:lnSpc>
+              <a:buNone/>
+              <a:defRPr sz="2250" b="1" i="0">
+                <a:solidFill>
+                  <a:srgbClr val="122033"/>
+                </a:solidFill>
+                <a:latin typeface="Arial"/>
+                <a:ea typeface="Arial"/>
+                <a:cs typeface="Arial"/>
+              </a:defRPr>
+            </a:pPr>
+            <a:r>
+              <a:rPr sz="2250" b="1" i="0">
+                <a:solidFill>
+                  <a:srgbClr val="122033"/>
+                </a:solidFill>
+                <a:latin typeface="Arial"/>
+                <a:ea typeface="Arial"/>
+                <a:cs typeface="Arial"/>
+              </a:rPr>
+              <a:t>15.7455</a:t>
+            </a:r>
+          </a:p>
+        </p:txBody>
+      </p:sp>
+      <p:sp>
+        <p:nvSpPr>
+          <p:cNvPr id="14" name="">
+            <a:extLst xmlns:a="http://schemas.openxmlformats.org/drawingml/2006/main">
+              <a:ext uri="{FF2B5EF4-FFF2-40B4-BE49-F238E27FC236}">
+                <a16:creationId xmlns:a16="http://schemas.microsoft.com/office/drawing/2014/main" id="{988C085D-5972-4A95-AA01-83961840359D}"/>
+              </a:ext>
+            </a:extLst>
+          </p:cNvPr>
+          <p:cNvSpPr>
+            <a:spLocks xmlns:a="http://schemas.openxmlformats.org/drawingml/2006/main" noGrp="1"/>
+          </p:cNvSpPr>
+          <p:nvPr/>
+        </p:nvSpPr>
+        <p:spPr>
+          <a:xfrm xmlns:a="http://schemas.openxmlformats.org/drawingml/2006/main">
+            <a:off x="895350" y="5153025"/>
+            <a:ext cx="1809750" cy="190500"/>
+          </a:xfrm>
+          <a:prstGeom xmlns:a="http://schemas.openxmlformats.org/drawingml/2006/main" prst="rect">
+            <a:avLst/>
+          </a:prstGeom>
+          <a:noFill xmlns:a="http://schemas.openxmlformats.org/drawingml/2006/main"/>
+          <a:ln xmlns:a="http://schemas.openxmlformats.org/drawingml/2006/main" w="0">
+            <a:noFill/>
+          </a:ln>
+        </p:spPr>
+        <p:txBody>
+          <a:bodyPr xmlns:a="http://schemas.openxmlformats.org/drawingml/2006/main" wrap="square" lIns="0" tIns="0" rIns="0" bIns="0" anchor="t">
+            <a:normAutofit fontScale="100000"/>
+          </a:bodyPr>
+          <a:lstStyle xmlns:a="http://schemas.openxmlformats.org/drawingml/2006/main"/>
+          <a:p xmlns:a="http://schemas.openxmlformats.org/drawingml/2006/main">
+            <a:pPr algn="l">
+              <a:lnSpc>
+                <a:spcPct val="105000"/>
+              </a:lnSpc>
+              <a:buNone/>
+              <a:defRPr sz="1050" b="0" i="0">
+                <a:solidFill>
+                  <a:srgbClr val="667487"/>
+                </a:solidFill>
+                <a:latin typeface="Arial"/>
+                <a:ea typeface="Arial"/>
+                <a:cs typeface="Arial"/>
+              </a:defRPr>
+            </a:pPr>
+            <a:r>
+              <a:rPr sz="1050" b="0" i="0">
+                <a:solidFill>
+                  <a:srgbClr val="667487"/>
+                </a:solidFill>
+                <a:latin typeface="Arial"/>
+                <a:ea typeface="Arial"/>
+                <a:cs typeface="Arial"/>
+              </a:rPr>
+              <a:t>exact value</a:t>
+            </a:r>
+          </a:p>
+        </p:txBody>
+      </p:sp>
+      <p:sp>
+        <p:nvSpPr>
+          <p:cNvPr id="15" name="">
+            <a:extLst xmlns:a="http://schemas.openxmlformats.org/drawingml/2006/main">
+              <a:ext uri="{FF2B5EF4-FFF2-40B4-BE49-F238E27FC236}">
+                <a16:creationId xmlns:a16="http://schemas.microsoft.com/office/drawing/2014/main" id="{0E2EE483-0EA5-4F8F-A5D2-F3287089651F}"/>
+              </a:ext>
+            </a:extLst>
+          </p:cNvPr>
+          <p:cNvSpPr>
+            <a:spLocks xmlns:a="http://schemas.openxmlformats.org/drawingml/2006/main" noGrp="1"/>
+          </p:cNvSpPr>
+          <p:nvPr/>
+        </p:nvSpPr>
+        <p:spPr>
+          <a:xfrm xmlns:a="http://schemas.openxmlformats.org/drawingml/2006/main">
+            <a:off x="3333750" y="4762500"/>
+            <a:ext cx="2133600" cy="381000"/>
+          </a:xfrm>
+          <a:prstGeom xmlns:a="http://schemas.openxmlformats.org/drawingml/2006/main" prst="rect">
+            <a:avLst/>
+          </a:prstGeom>
+          <a:noFill xmlns:a="http://schemas.openxmlformats.org/drawingml/2006/main"/>
+          <a:ln xmlns:a="http://schemas.openxmlformats.org/drawingml/2006/main" w="0">
+            <a:noFill/>
+          </a:ln>
+        </p:spPr>
+        <p:txBody>
+          <a:bodyPr xmlns:a="http://schemas.openxmlformats.org/drawingml/2006/main" wrap="square" lIns="0" tIns="0" rIns="0" bIns="0" anchor="t">
+            <a:normAutofit fontScale="100000"/>
+          </a:bodyPr>
+          <a:lstStyle xmlns:a="http://schemas.openxmlformats.org/drawingml/2006/main"/>
+          <a:p xmlns:a="http://schemas.openxmlformats.org/drawingml/2006/main">
+            <a:pPr algn="r">
+              <a:lnSpc>
+                <a:spcPct val="105000"/>
+              </a:lnSpc>
+              <a:buNone/>
+              <a:defRPr sz="2250" b="1" i="0">
+                <a:solidFill>
+                  <a:srgbClr val="35C47A"/>
+                </a:solidFill>
+                <a:latin typeface="Arial"/>
+                <a:ea typeface="Arial"/>
+                <a:cs typeface="Arial"/>
+              </a:defRPr>
+            </a:pPr>
+            <a:r>
+              <a:rPr sz="2250" b="1" i="0">
+                <a:solidFill>
+                  <a:srgbClr val="35C47A"/>
+                </a:solidFill>
+                <a:latin typeface="Arial"/>
+                <a:ea typeface="Arial"/>
+                <a:cs typeface="Arial"/>
+              </a:rPr>
+              <a:t>15.75</a:t>
+            </a:r>
+          </a:p>
+        </p:txBody>
+      </p:sp>
+      <p:sp>
+        <p:nvSpPr>
+          <p:cNvPr id="16" name="">
+            <a:extLst xmlns:a="http://schemas.openxmlformats.org/drawingml/2006/main">
+              <a:ext uri="{FF2B5EF4-FFF2-40B4-BE49-F238E27FC236}">
+                <a16:creationId xmlns:a16="http://schemas.microsoft.com/office/drawing/2014/main" id="{BA5C2349-B67E-4359-A8D2-AEB6563DC994}"/>
+              </a:ext>
+            </a:extLst>
+          </p:cNvPr>
+          <p:cNvSpPr>
+            <a:spLocks xmlns:a="http://schemas.openxmlformats.org/drawingml/2006/main" noGrp="1"/>
+          </p:cNvSpPr>
+          <p:nvPr/>
+        </p:nvSpPr>
+        <p:spPr>
+          <a:xfrm xmlns:a="http://schemas.openxmlformats.org/drawingml/2006/main">
+            <a:off x="3333750" y="5153025"/>
+            <a:ext cx="2133600" cy="190500"/>
+          </a:xfrm>
+          <a:prstGeom xmlns:a="http://schemas.openxmlformats.org/drawingml/2006/main" prst="rect">
+            <a:avLst/>
+          </a:prstGeom>
+          <a:noFill xmlns:a="http://schemas.openxmlformats.org/drawingml/2006/main"/>
+          <a:ln xmlns:a="http://schemas.openxmlformats.org/drawingml/2006/main" w="0">
+            <a:noFill/>
+          </a:ln>
+        </p:spPr>
+        <p:txBody>
+          <a:bodyPr xmlns:a="http://schemas.openxmlformats.org/drawingml/2006/main" wrap="square" lIns="0" tIns="0" rIns="0" bIns="0" anchor="t">
+            <a:normAutofit fontScale="100000"/>
+          </a:bodyPr>
+          <a:lstStyle xmlns:a="http://schemas.openxmlformats.org/drawingml/2006/main"/>
+          <a:p xmlns:a="http://schemas.openxmlformats.org/drawingml/2006/main">
+            <a:pPr algn="r">
+              <a:lnSpc>
+                <a:spcPct val="105000"/>
+              </a:lnSpc>
+              <a:buNone/>
+              <a:defRPr sz="1050" b="0" i="0">
+                <a:solidFill>
+                  <a:srgbClr val="667487"/>
+                </a:solidFill>
+                <a:latin typeface="Arial"/>
+                <a:ea typeface="Arial"/>
+                <a:cs typeface="Arial"/>
+              </a:defRPr>
+            </a:pPr>
+            <a:r>
+              <a:rPr sz="1050" b="0" i="0">
+                <a:solidFill>
+                  <a:srgbClr val="667487"/>
+                </a:solidFill>
+                <a:latin typeface="Arial"/>
+                <a:ea typeface="Arial"/>
+                <a:cs typeface="Arial"/>
+              </a:rPr>
+              <a:t>displayed value</a:t>
+            </a:r>
+          </a:p>
+        </p:txBody>
+      </p:sp>
+      <p:sp>
+        <p:nvSpPr>
+          <p:cNvPr id="17" name="">
+            <a:extLst xmlns:a="http://schemas.openxmlformats.org/drawingml/2006/main">
+              <a:ext uri="{FF2B5EF4-FFF2-40B4-BE49-F238E27FC236}">
+                <a16:creationId xmlns:a16="http://schemas.microsoft.com/office/drawing/2014/main" id="{B907D063-F923-4A3F-8141-384A4EBDC781}"/>
+              </a:ext>
+            </a:extLst>
+          </p:cNvPr>
+          <p:cNvSpPr>
+            <a:spLocks xmlns:a="http://schemas.openxmlformats.org/drawingml/2006/main" noGrp="1"/>
+          </p:cNvSpPr>
+          <p:nvPr/>
+        </p:nvSpPr>
+        <p:spPr>
+          <a:xfrm xmlns:a="http://schemas.openxmlformats.org/drawingml/2006/main">
+            <a:off x="6438900" y="1619250"/>
+            <a:ext cx="5143500" cy="3838575"/>
+          </a:xfrm>
+          <a:prstGeom xmlns:a="http://schemas.openxmlformats.org/drawingml/2006/main" prst="rect">
+            <a:avLst/>
+          </a:prstGeom>
+          <a:solidFill xmlns:a="http://schemas.openxmlformats.org/drawingml/2006/main">
+            <a:srgbClr val="FFFDF8"/>
+          </a:solidFill>
           <a:ln xmlns:a="http://schemas.openxmlformats.org/drawingml/2006/main" w="9525">
             <a:solidFill>
               <a:srgbClr val="C9D1D9"/>
@@ -3962,22 +4432,52 @@
       </p:sp>
       <p:sp>
         <p:nvSpPr>
-          <p:cNvPr id="11" name="">
-            <a:extLst xmlns:a="http://schemas.openxmlformats.org/drawingml/2006/main">
-              <a:ext uri="{FF2B5EF4-FFF2-40B4-BE49-F238E27FC236}">
-                <a16:creationId xmlns:a16="http://schemas.microsoft.com/office/drawing/2014/main" id="{0932F782-722C-4DC3-A6F1-4F6FAF6FAC50}"/>
-              </a:ext>
-            </a:extLst>
-          </p:cNvPr>
-          <p:cNvSpPr>
-            <a:spLocks xmlns:a="http://schemas.openxmlformats.org/drawingml/2006/main" noGrp="1"/>
-          </p:cNvSpPr>
-          <p:nvPr/>
-        </p:nvSpPr>
-        <p:spPr>
-          <a:xfrm xmlns:a="http://schemas.openxmlformats.org/drawingml/2006/main">
-            <a:off x="6172200" y="1952625"/>
-            <a:ext cx="857250" cy="495300"/>
+          <p:cNvPr id="18" name="">
+            <a:extLst xmlns:a="http://schemas.openxmlformats.org/drawingml/2006/main">
+              <a:ext uri="{FF2B5EF4-FFF2-40B4-BE49-F238E27FC236}">
+                <a16:creationId xmlns:a16="http://schemas.microsoft.com/office/drawing/2014/main" id="{9D08E39C-FCF2-4572-833B-9B58458AE702}"/>
+              </a:ext>
+            </a:extLst>
+          </p:cNvPr>
+          <p:cNvSpPr>
+            <a:spLocks xmlns:a="http://schemas.openxmlformats.org/drawingml/2006/main" noGrp="1"/>
+          </p:cNvSpPr>
+          <p:nvPr/>
+        </p:nvSpPr>
+        <p:spPr>
+          <a:xfrm xmlns:a="http://schemas.openxmlformats.org/drawingml/2006/main">
+            <a:off x="6438900" y="1619250"/>
+            <a:ext cx="5143500" cy="76200"/>
+          </a:xfrm>
+          <a:prstGeom xmlns:a="http://schemas.openxmlformats.org/drawingml/2006/main" prst="rect">
+            <a:avLst/>
+          </a:prstGeom>
+          <a:solidFill xmlns:a="http://schemas.openxmlformats.org/drawingml/2006/main">
+            <a:srgbClr val="E76464"/>
+          </a:solidFill>
+          <a:ln xmlns:a="http://schemas.openxmlformats.org/drawingml/2006/main" w="0">
+            <a:noFill/>
+          </a:ln>
+        </p:spPr>
+      </p:sp>
+      <p:sp>
+        <p:nvSpPr>
+          <p:cNvPr id="19" name="">
+            <a:extLst xmlns:a="http://schemas.openxmlformats.org/drawingml/2006/main">
+              <a:ext uri="{FF2B5EF4-FFF2-40B4-BE49-F238E27FC236}">
+                <a16:creationId xmlns:a16="http://schemas.microsoft.com/office/drawing/2014/main" id="{B73050B0-2CA7-4842-9EE7-F44510D1F0C7}"/>
+              </a:ext>
+            </a:extLst>
+          </p:cNvPr>
+          <p:cNvSpPr>
+            <a:spLocks xmlns:a="http://schemas.openxmlformats.org/drawingml/2006/main" noGrp="1"/>
+          </p:cNvSpPr>
+          <p:nvPr/>
+        </p:nvSpPr>
+        <p:spPr>
+          <a:xfrm xmlns:a="http://schemas.openxmlformats.org/drawingml/2006/main">
+            <a:off x="6705600" y="1885950"/>
+            <a:ext cx="2095500" cy="228600"/>
           </a:xfrm>
           <a:prstGeom xmlns:a="http://schemas.openxmlformats.org/drawingml/2006/main" prst="rect">
             <a:avLst/>
@@ -3998,47 +4498,47 @@
                 <a:spcPct val="105000"/>
               </a:lnSpc>
               <a:buNone/>
-              <a:defRPr sz="2850" b="1" i="0">
-                <a:solidFill>
-                  <a:srgbClr val="35C47A"/>
-                </a:solidFill>
-                <a:latin typeface="Arial"/>
-                <a:ea typeface="Arial"/>
-                <a:cs typeface="Arial"/>
-              </a:defRPr>
-            </a:pPr>
-            <a:r>
-              <a:rPr sz="2850" b="1" i="0">
-                <a:solidFill>
-                  <a:srgbClr val="35C47A"/>
-                </a:solidFill>
-                <a:latin typeface="Arial"/>
-                <a:ea typeface="Arial"/>
-                <a:cs typeface="Arial"/>
-              </a:rPr>
-              <a:t>03</a:t>
-            </a:r>
-          </a:p>
-        </p:txBody>
-      </p:sp>
-      <p:sp>
-        <p:nvSpPr>
-          <p:cNvPr id="12" name="">
-            <a:extLst xmlns:a="http://schemas.openxmlformats.org/drawingml/2006/main">
-              <a:ext uri="{FF2B5EF4-FFF2-40B4-BE49-F238E27FC236}">
-                <a16:creationId xmlns:a16="http://schemas.microsoft.com/office/drawing/2014/main" id="{BDB391CF-D829-4AD9-8C1E-F650630D3FEE}"/>
-              </a:ext>
-            </a:extLst>
-          </p:cNvPr>
-          <p:cNvSpPr>
-            <a:spLocks xmlns:a="http://schemas.openxmlformats.org/drawingml/2006/main" noGrp="1"/>
-          </p:cNvSpPr>
-          <p:nvPr/>
-        </p:nvSpPr>
-        <p:spPr>
-          <a:xfrm xmlns:a="http://schemas.openxmlformats.org/drawingml/2006/main">
-            <a:off x="6172200" y="2647950"/>
-            <a:ext cx="2381250" cy="400050"/>
+              <a:defRPr sz="1050" b="1" i="0">
+                <a:solidFill>
+                  <a:srgbClr val="667487"/>
+                </a:solidFill>
+                <a:latin typeface="Arial"/>
+                <a:ea typeface="Arial"/>
+                <a:cs typeface="Arial"/>
+              </a:defRPr>
+            </a:pPr>
+            <a:r>
+              <a:rPr sz="1050" b="1" i="0">
+                <a:solidFill>
+                  <a:srgbClr val="667487"/>
+                </a:solidFill>
+                <a:latin typeface="Arial"/>
+                <a:ea typeface="Arial"/>
+                <a:cs typeface="Arial"/>
+              </a:rPr>
+              <a:t>TASK 13-1</a:t>
+            </a:r>
+          </a:p>
+        </p:txBody>
+      </p:sp>
+      <p:sp>
+        <p:nvSpPr>
+          <p:cNvPr id="20" name="">
+            <a:extLst xmlns:a="http://schemas.openxmlformats.org/drawingml/2006/main">
+              <a:ext uri="{FF2B5EF4-FFF2-40B4-BE49-F238E27FC236}">
+                <a16:creationId xmlns:a16="http://schemas.microsoft.com/office/drawing/2014/main" id="{BEB05725-CBCD-4BCF-A0AE-8956E77E676D}"/>
+              </a:ext>
+            </a:extLst>
+          </p:cNvPr>
+          <p:cNvSpPr>
+            <a:spLocks xmlns:a="http://schemas.openxmlformats.org/drawingml/2006/main" noGrp="1"/>
+          </p:cNvSpPr>
+          <p:nvPr/>
+        </p:nvSpPr>
+        <p:spPr>
+          <a:xfrm xmlns:a="http://schemas.openxmlformats.org/drawingml/2006/main">
+            <a:off x="9525000" y="1885950"/>
+            <a:ext cx="1790700" cy="228600"/>
           </a:xfrm>
           <a:prstGeom xmlns:a="http://schemas.openxmlformats.org/drawingml/2006/main" prst="rect">
             <a:avLst/>
@@ -4054,52 +4554,52 @@
           </a:bodyPr>
           <a:lstStyle xmlns:a="http://schemas.openxmlformats.org/drawingml/2006/main"/>
           <a:p xmlns:a="http://schemas.openxmlformats.org/drawingml/2006/main">
-            <a:pPr algn="l">
+            <a:pPr algn="r">
               <a:lnSpc>
                 <a:spcPct val="105000"/>
               </a:lnSpc>
               <a:buNone/>
-              <a:defRPr sz="2025" b="1" i="0">
-                <a:solidFill>
-                  <a:srgbClr val="122033"/>
-                </a:solidFill>
-                <a:latin typeface="Arial"/>
-                <a:ea typeface="Arial"/>
-                <a:cs typeface="Arial"/>
-              </a:defRPr>
-            </a:pPr>
-            <a:r>
-              <a:rPr sz="2025" b="1" i="0">
-                <a:solidFill>
-                  <a:srgbClr val="122033"/>
-                </a:solidFill>
-                <a:latin typeface="Arial"/>
-                <a:ea typeface="Arial"/>
-                <a:cs typeface="Arial"/>
-              </a:rPr>
-              <a:t>Workbook</a:t>
-            </a:r>
-          </a:p>
-        </p:txBody>
-      </p:sp>
-      <p:sp>
-        <p:nvSpPr>
-          <p:cNvPr id="13" name="">
-            <a:extLst xmlns:a="http://schemas.openxmlformats.org/drawingml/2006/main">
-              <a:ext uri="{FF2B5EF4-FFF2-40B4-BE49-F238E27FC236}">
-                <a16:creationId xmlns:a16="http://schemas.microsoft.com/office/drawing/2014/main" id="{A5A28442-1A48-4B15-B249-77051951F192}"/>
-              </a:ext>
-            </a:extLst>
-          </p:cNvPr>
-          <p:cNvSpPr>
-            <a:spLocks xmlns:a="http://schemas.openxmlformats.org/drawingml/2006/main" noGrp="1"/>
-          </p:cNvSpPr>
-          <p:nvPr/>
-        </p:nvSpPr>
-        <p:spPr>
-          <a:xfrm xmlns:a="http://schemas.openxmlformats.org/drawingml/2006/main">
-            <a:off x="6172200" y="3209925"/>
-            <a:ext cx="2333625" cy="1381125"/>
+              <a:defRPr sz="1050" b="1" i="0">
+                <a:solidFill>
+                  <a:srgbClr val="E76464"/>
+                </a:solidFill>
+                <a:latin typeface="Arial"/>
+                <a:ea typeface="Arial"/>
+                <a:cs typeface="Arial"/>
+              </a:defRPr>
+            </a:pPr>
+            <a:r>
+              <a:rPr sz="1050" b="1" i="0">
+                <a:solidFill>
+                  <a:srgbClr val="E76464"/>
+                </a:solidFill>
+                <a:latin typeface="Arial"/>
+                <a:ea typeface="Arial"/>
+                <a:cs typeface="Arial"/>
+              </a:rPr>
+              <a:t>FULL TASK FAILED</a:t>
+            </a:r>
+          </a:p>
+        </p:txBody>
+      </p:sp>
+      <p:sp>
+        <p:nvSpPr>
+          <p:cNvPr id="21" name="">
+            <a:extLst xmlns:a="http://schemas.openxmlformats.org/drawingml/2006/main">
+              <a:ext uri="{FF2B5EF4-FFF2-40B4-BE49-F238E27FC236}">
+                <a16:creationId xmlns:a16="http://schemas.microsoft.com/office/drawing/2014/main" id="{7A27CE4A-FB67-4DAF-AD9A-E83272AD855B}"/>
+              </a:ext>
+            </a:extLst>
+          </p:cNvPr>
+          <p:cNvSpPr>
+            <a:spLocks xmlns:a="http://schemas.openxmlformats.org/drawingml/2006/main" noGrp="1"/>
+          </p:cNvSpPr>
+          <p:nvPr/>
+        </p:nvSpPr>
+        <p:spPr>
+          <a:xfrm xmlns:a="http://schemas.openxmlformats.org/drawingml/2006/main">
+            <a:off x="6705600" y="2171700"/>
+            <a:ext cx="3143250" cy="685800"/>
           </a:xfrm>
           <a:prstGeom xmlns:a="http://schemas.openxmlformats.org/drawingml/2006/main" prst="rect">
             <a:avLst/>
@@ -4117,10 +4617,254 @@
           <a:p xmlns:a="http://schemas.openxmlformats.org/drawingml/2006/main">
             <a:pPr algn="l">
               <a:lnSpc>
-                <a:spcPct val="114000"/>
-              </a:lnSpc>
-              <a:buNone/>
-              <a:defRPr sz="1500" b="0" i="0">
+                <a:spcPct val="105000"/>
+              </a:lnSpc>
+              <a:buNone/>
+              <a:defRPr sz="4200" b="1" i="0">
+                <a:solidFill>
+                  <a:srgbClr val="122033"/>
+                </a:solidFill>
+                <a:latin typeface="Arial"/>
+                <a:ea typeface="Arial"/>
+                <a:cs typeface="Arial"/>
+              </a:defRPr>
+            </a:pPr>
+            <a:r>
+              <a:rPr sz="4200" b="1" i="0">
+                <a:solidFill>
+                  <a:srgbClr val="122033"/>
+                </a:solidFill>
+                <a:latin typeface="Arial"/>
+                <a:ea typeface="Arial"/>
+                <a:cs typeface="Arial"/>
+              </a:rPr>
+              <a:t>116 / 120</a:t>
+            </a:r>
+          </a:p>
+        </p:txBody>
+      </p:sp>
+      <p:sp>
+        <p:nvSpPr>
+          <p:cNvPr id="22" name="">
+            <a:extLst xmlns:a="http://schemas.openxmlformats.org/drawingml/2006/main">
+              <a:ext uri="{FF2B5EF4-FFF2-40B4-BE49-F238E27FC236}">
+                <a16:creationId xmlns:a16="http://schemas.microsoft.com/office/drawing/2014/main" id="{612DE798-3AB9-4C18-BE00-5DE3E824C1FF}"/>
+              </a:ext>
+            </a:extLst>
+          </p:cNvPr>
+          <p:cNvSpPr>
+            <a:spLocks xmlns:a="http://schemas.openxmlformats.org/drawingml/2006/main" noGrp="1"/>
+          </p:cNvSpPr>
+          <p:nvPr/>
+        </p:nvSpPr>
+        <p:spPr>
+          <a:xfrm xmlns:a="http://schemas.openxmlformats.org/drawingml/2006/main">
+            <a:off x="6743700" y="2838450"/>
+            <a:ext cx="2381250" cy="266700"/>
+          </a:xfrm>
+          <a:prstGeom xmlns:a="http://schemas.openxmlformats.org/drawingml/2006/main" prst="rect">
+            <a:avLst/>
+          </a:prstGeom>
+          <a:noFill xmlns:a="http://schemas.openxmlformats.org/drawingml/2006/main"/>
+          <a:ln xmlns:a="http://schemas.openxmlformats.org/drawingml/2006/main" w="0">
+            <a:noFill/>
+          </a:ln>
+        </p:spPr>
+        <p:txBody>
+          <a:bodyPr xmlns:a="http://schemas.openxmlformats.org/drawingml/2006/main" wrap="square" lIns="0" tIns="0" rIns="0" bIns="0" anchor="t">
+            <a:normAutofit fontScale="100000"/>
+          </a:bodyPr>
+          <a:lstStyle xmlns:a="http://schemas.openxmlformats.org/drawingml/2006/main"/>
+          <a:p xmlns:a="http://schemas.openxmlformats.org/drawingml/2006/main">
+            <a:pPr algn="l">
+              <a:lnSpc>
+                <a:spcPct val="105000"/>
+              </a:lnSpc>
+              <a:buNone/>
+              <a:defRPr sz="1350" b="1" i="0">
+                <a:solidFill>
+                  <a:srgbClr val="E76464"/>
+                </a:solidFill>
+                <a:latin typeface="Arial"/>
+                <a:ea typeface="Arial"/>
+                <a:cs typeface="Arial"/>
+              </a:defRPr>
+            </a:pPr>
+            <a:r>
+              <a:rPr sz="1350" b="1" i="0">
+                <a:solidFill>
+                  <a:srgbClr val="E76464"/>
+                </a:solidFill>
+                <a:latin typeface="Arial"/>
+                <a:ea typeface="Arial"/>
+                <a:cs typeface="Arial"/>
+              </a:rPr>
+              <a:t>target cells correct</a:t>
+            </a:r>
+          </a:p>
+        </p:txBody>
+      </p:sp>
+      <p:sp>
+        <p:nvSpPr>
+          <p:cNvPr id="23" name="">
+            <a:extLst xmlns:a="http://schemas.openxmlformats.org/drawingml/2006/main">
+              <a:ext uri="{FF2B5EF4-FFF2-40B4-BE49-F238E27FC236}">
+                <a16:creationId xmlns:a16="http://schemas.microsoft.com/office/drawing/2014/main" id="{DFC98C5E-79B6-4767-BC86-EDDE63E12BD0}"/>
+              </a:ext>
+            </a:extLst>
+          </p:cNvPr>
+          <p:cNvSpPr>
+            <a:spLocks xmlns:a="http://schemas.openxmlformats.org/drawingml/2006/main" noGrp="1"/>
+          </p:cNvSpPr>
+          <p:nvPr/>
+        </p:nvSpPr>
+        <p:spPr>
+          <a:xfrm xmlns:a="http://schemas.openxmlformats.org/drawingml/2006/main">
+            <a:off x="9029700" y="2847975"/>
+            <a:ext cx="2286000" cy="247650"/>
+          </a:xfrm>
+          <a:prstGeom xmlns:a="http://schemas.openxmlformats.org/drawingml/2006/main" prst="rect">
+            <a:avLst/>
+          </a:prstGeom>
+          <a:noFill xmlns:a="http://schemas.openxmlformats.org/drawingml/2006/main"/>
+          <a:ln xmlns:a="http://schemas.openxmlformats.org/drawingml/2006/main" w="0">
+            <a:noFill/>
+          </a:ln>
+        </p:spPr>
+        <p:txBody>
+          <a:bodyPr xmlns:a="http://schemas.openxmlformats.org/drawingml/2006/main" wrap="square" lIns="0" tIns="0" rIns="0" bIns="0" anchor="t">
+            <a:normAutofit fontScale="100000"/>
+          </a:bodyPr>
+          <a:lstStyle xmlns:a="http://schemas.openxmlformats.org/drawingml/2006/main"/>
+          <a:p xmlns:a="http://schemas.openxmlformats.org/drawingml/2006/main">
+            <a:pPr algn="r">
+              <a:lnSpc>
+                <a:spcPct val="105000"/>
+              </a:lnSpc>
+              <a:buNone/>
+              <a:defRPr sz="1275" b="1" i="0">
+                <a:solidFill>
+                  <a:srgbClr val="122033"/>
+                </a:solidFill>
+                <a:latin typeface="Arial"/>
+                <a:ea typeface="Arial"/>
+                <a:cs typeface="Arial"/>
+              </a:defRPr>
+            </a:pPr>
+            <a:r>
+              <a:rPr sz="1275" b="1" i="0">
+                <a:solidFill>
+                  <a:srgbClr val="122033"/>
+                </a:solidFill>
+                <a:latin typeface="Arial"/>
+                <a:ea typeface="Arial"/>
+                <a:cs typeface="Arial"/>
+              </a:rPr>
+              <a:t>96.67% cell accuracy</a:t>
+            </a:r>
+          </a:p>
+        </p:txBody>
+      </p:sp>
+      <p:sp>
+        <p:nvSpPr>
+          <p:cNvPr id="24" name="">
+            <a:extLst xmlns:a="http://schemas.openxmlformats.org/drawingml/2006/main">
+              <a:ext uri="{FF2B5EF4-FFF2-40B4-BE49-F238E27FC236}">
+                <a16:creationId xmlns:a16="http://schemas.microsoft.com/office/drawing/2014/main" id="{D3C2660D-C0BC-4E3D-926F-8C5A45C5ACD8}"/>
+              </a:ext>
+            </a:extLst>
+          </p:cNvPr>
+          <p:cNvSpPr>
+            <a:spLocks xmlns:a="http://schemas.openxmlformats.org/drawingml/2006/main" noGrp="1"/>
+          </p:cNvSpPr>
+          <p:nvPr/>
+        </p:nvSpPr>
+        <p:spPr>
+          <a:xfrm xmlns:a="http://schemas.openxmlformats.org/drawingml/2006/main">
+            <a:off x="6705600" y="3276600"/>
+            <a:ext cx="4610100" cy="209550"/>
+          </a:xfrm>
+          <a:prstGeom xmlns:a="http://schemas.openxmlformats.org/drawingml/2006/main" prst="rect">
+            <a:avLst/>
+          </a:prstGeom>
+          <a:noFill xmlns:a="http://schemas.openxmlformats.org/drawingml/2006/main"/>
+          <a:ln xmlns:a="http://schemas.openxmlformats.org/drawingml/2006/main" w="0">
+            <a:noFill/>
+          </a:ln>
+        </p:spPr>
+        <p:txBody>
+          <a:bodyPr xmlns:a="http://schemas.openxmlformats.org/drawingml/2006/main" wrap="square" lIns="0" tIns="0" rIns="0" bIns="0" anchor="t">
+            <a:normAutofit fontScale="100000"/>
+          </a:bodyPr>
+          <a:lstStyle xmlns:a="http://schemas.openxmlformats.org/drawingml/2006/main"/>
+          <a:p xmlns:a="http://schemas.openxmlformats.org/drawingml/2006/main">
+            <a:pPr algn="l">
+              <a:lnSpc>
+                <a:spcPct val="105000"/>
+              </a:lnSpc>
+              <a:buNone/>
+              <a:defRPr sz="1125" b="1" i="0">
+                <a:solidFill>
+                  <a:srgbClr val="122033"/>
+                </a:solidFill>
+                <a:latin typeface="Arial"/>
+                <a:ea typeface="Arial"/>
+                <a:cs typeface="Arial"/>
+              </a:defRPr>
+            </a:pPr>
+            <a:r>
+              <a:rPr sz="1125" b="1" i="0">
+                <a:solidFill>
+                  <a:srgbClr val="122033"/>
+                </a:solidFill>
+                <a:latin typeface="Arial"/>
+                <a:ea typeface="Arial"/>
+                <a:cs typeface="Arial"/>
+              </a:rPr>
+              <a:t>Merged duplicate records, then sorted the output.</a:t>
+            </a:r>
+          </a:p>
+        </p:txBody>
+      </p:sp>
+      <p:sp>
+        <p:nvSpPr>
+          <p:cNvPr id="25" name="">
+            <a:extLst xmlns:a="http://schemas.openxmlformats.org/drawingml/2006/main">
+              <a:ext uri="{FF2B5EF4-FFF2-40B4-BE49-F238E27FC236}">
+                <a16:creationId xmlns:a16="http://schemas.microsoft.com/office/drawing/2014/main" id="{E2CFD134-9FC6-486C-901E-245C9E4F8C05}"/>
+              </a:ext>
+            </a:extLst>
+          </p:cNvPr>
+          <p:cNvSpPr>
+            <a:spLocks xmlns:a="http://schemas.openxmlformats.org/drawingml/2006/main" noGrp="1"/>
+          </p:cNvSpPr>
+          <p:nvPr/>
+        </p:nvSpPr>
+        <p:spPr>
+          <a:xfrm xmlns:a="http://schemas.openxmlformats.org/drawingml/2006/main">
+            <a:off x="6705600" y="3533775"/>
+            <a:ext cx="4610100" cy="190500"/>
+          </a:xfrm>
+          <a:prstGeom xmlns:a="http://schemas.openxmlformats.org/drawingml/2006/main" prst="rect">
+            <a:avLst/>
+          </a:prstGeom>
+          <a:noFill xmlns:a="http://schemas.openxmlformats.org/drawingml/2006/main"/>
+          <a:ln xmlns:a="http://schemas.openxmlformats.org/drawingml/2006/main" w="0">
+            <a:noFill/>
+          </a:ln>
+        </p:spPr>
+        <p:txBody>
+          <a:bodyPr xmlns:a="http://schemas.openxmlformats.org/drawingml/2006/main" wrap="square" lIns="0" tIns="0" rIns="0" bIns="0" anchor="t">
+            <a:normAutofit fontScale="100000"/>
+          </a:bodyPr>
+          <a:lstStyle xmlns:a="http://schemas.openxmlformats.org/drawingml/2006/main"/>
+          <a:p xmlns:a="http://schemas.openxmlformats.org/drawingml/2006/main">
+            <a:pPr algn="l">
+              <a:lnSpc>
+                <a:spcPct val="105000"/>
+              </a:lnSpc>
+              <a:buNone/>
+              <a:defRPr sz="1125" b="0" i="0">
                 <a:solidFill>
                   <a:srgbClr val="667487"/>
                 </a:solidFill>
@@ -4130,7 +4874,7 @@
               </a:defRPr>
             </a:pPr>
             <a:r>
-              <a:rPr sz="1500" b="0" i="0">
+              <a:rPr sz="1125" b="0" i="0">
                 <a:solidFill>
                   <a:srgbClr val="667487"/>
                 </a:solidFill>
@@ -4138,29 +4882,558 @@
                 <a:ea typeface="Arial"/>
                 <a:cs typeface="Arial"/>
               </a:rPr>
-              <a:t>A formula introduces an unsafe reference, invalid type or broken workbook package.</a:t>
-            </a:r>
-          </a:p>
-        </p:txBody>
-      </p:sp>
-      <p:sp>
-        <p:nvSpPr>
-          <p:cNvPr id="14" name="">
-            <a:extLst xmlns:a="http://schemas.openxmlformats.org/drawingml/2006/main">
-              <a:ext uri="{FF2B5EF4-FFF2-40B4-BE49-F238E27FC236}">
-                <a16:creationId xmlns:a16="http://schemas.microsoft.com/office/drawing/2014/main" id="{4ADF4A8C-E2DE-4D3C-A54C-2A5E00C40974}"/>
-              </a:ext>
-            </a:extLst>
-          </p:cNvPr>
-          <p:cNvSpPr>
-            <a:spLocks xmlns:a="http://schemas.openxmlformats.org/drawingml/2006/main" noGrp="1"/>
-          </p:cNvSpPr>
-          <p:nvPr/>
-        </p:nvSpPr>
-        <p:spPr>
-          <a:xfrm xmlns:a="http://schemas.openxmlformats.org/drawingml/2006/main">
-            <a:off x="8743950" y="1924050"/>
-            <a:ext cx="0" cy="2809875"/>
+              <a:t>Four amounts differed. D32 is the final total.</a:t>
+            </a:r>
+          </a:p>
+        </p:txBody>
+      </p:sp>
+      <p:graphicFrame>
+        <p:nvGraphicFramePr>
+          <p:cNvPr id="57" name=""/>
+          <p:cNvGraphicFramePr/>
+          <p:nvPr/>
+        </p:nvGraphicFramePr>
+        <p:xfrm>
+          <a:off xmlns:a="http://schemas.openxmlformats.org/drawingml/2006/main" x="6705600" y="3790950"/>
+          <a:ext xmlns:a="http://schemas.openxmlformats.org/drawingml/2006/main" cx="4610100" cy="1447800"/>
+        </p:xfrm>
+        <a:graphic xmlns:a="http://schemas.openxmlformats.org/drawingml/2006/main">
+          <a:graphicData uri="http://schemas.openxmlformats.org/drawingml/2006/table">
+            <a:tbl>
+              <a:tblPr/>
+              <a:tblGrid>
+                <a:gridCol w="1847850"/>
+                <a:gridCol w="1381125"/>
+                <a:gridCol w="1381125"/>
+              </a:tblGrid>
+              <a:tr h="266700">
+                <a:tc>
+                  <a:txBody>
+                    <a:bodyPr lIns="76200" tIns="38100" rIns="76200" bIns="38100">
+                      <a:normAutofit/>
+                    </a:bodyPr>
+                    <a:lstStyle/>
+                    <a:p>
+                      <a:pPr algn="l"/>
+                      <a:r>
+                        <a:rPr sz="1050" b="1">
+                          <a:solidFill>
+                            <a:srgbClr val="FFFFFF"/>
+                          </a:solidFill>
+                          <a:latin typeface="Arial"/>
+                          <a:ea typeface="Arial"/>
+                          <a:cs typeface="Arial"/>
+                        </a:rPr>
+                        <a:t>Cell</a:t>
+                      </a:r>
+                    </a:p>
+                  </a:txBody>
+                  <a:tcPr marL="91440" marR="91440" marT="45720" marB="45720" anchor="ctr">
+                    <a:solidFill>
+                      <a:srgbClr val="0B172A"/>
+                    </a:solidFill>
+                  </a:tcPr>
+                </a:tc>
+                <a:tc>
+                  <a:txBody>
+                    <a:bodyPr lIns="76200" tIns="38100" rIns="76200" bIns="38100">
+                      <a:normAutofit/>
+                    </a:bodyPr>
+                    <a:lstStyle/>
+                    <a:p>
+                      <a:pPr algn="r"/>
+                      <a:r>
+                        <a:rPr sz="1050" b="1">
+                          <a:solidFill>
+                            <a:srgbClr val="FFFFFF"/>
+                          </a:solidFill>
+                          <a:latin typeface="Arial"/>
+                          <a:ea typeface="Arial"/>
+                          <a:cs typeface="Arial"/>
+                        </a:rPr>
+                        <a:t>Expected</a:t>
+                      </a:r>
+                    </a:p>
+                  </a:txBody>
+                  <a:tcPr marL="91440" marR="91440" marT="45720" marB="45720" anchor="ctr">
+                    <a:solidFill>
+                      <a:srgbClr val="0B172A"/>
+                    </a:solidFill>
+                  </a:tcPr>
+                </a:tc>
+                <a:tc>
+                  <a:txBody>
+                    <a:bodyPr lIns="76200" tIns="38100" rIns="76200" bIns="38100">
+                      <a:normAutofit/>
+                    </a:bodyPr>
+                    <a:lstStyle/>
+                    <a:p>
+                      <a:pPr algn="r"/>
+                      <a:r>
+                        <a:rPr sz="1050" b="1">
+                          <a:solidFill>
+                            <a:srgbClr val="FFFFFF"/>
+                          </a:solidFill>
+                          <a:latin typeface="Arial"/>
+                          <a:ea typeface="Arial"/>
+                          <a:cs typeface="Arial"/>
+                        </a:rPr>
+                        <a:t>Produced</a:t>
+                      </a:r>
+                    </a:p>
+                  </a:txBody>
+                  <a:tcPr marL="91440" marR="91440" marT="45720" marB="45720" anchor="ctr">
+                    <a:solidFill>
+                      <a:srgbClr val="0B172A"/>
+                    </a:solidFill>
+                  </a:tcPr>
+                </a:tc>
+              </a:tr>
+              <a:tr h="295275">
+                <a:tc>
+                  <a:txBody>
+                    <a:bodyPr lIns="76200" tIns="38100" rIns="76200" bIns="38100">
+                      <a:normAutofit/>
+                    </a:bodyPr>
+                    <a:lstStyle/>
+                    <a:p>
+                      <a:pPr algn="l"/>
+                      <a:r>
+                        <a:rPr sz="1125" b="1">
+                          <a:solidFill>
+                            <a:srgbClr val="122033"/>
+                          </a:solidFill>
+                          <a:latin typeface="Menlo"/>
+                          <a:ea typeface="Menlo"/>
+                          <a:cs typeface="Menlo"/>
+                        </a:rPr>
+                        <a:t>LISTS!D25</a:t>
+                      </a:r>
+                    </a:p>
+                  </a:txBody>
+                  <a:tcPr marL="91440" marR="91440" marT="45720" marB="45720" anchor="ctr">
+                    <a:solidFill>
+                      <a:srgbClr val="FFFDF8"/>
+                    </a:solidFill>
+                  </a:tcPr>
+                </a:tc>
+                <a:tc>
+                  <a:txBody>
+                    <a:bodyPr lIns="76200" tIns="38100" rIns="76200" bIns="38100">
+                      <a:normAutofit/>
+                    </a:bodyPr>
+                    <a:lstStyle/>
+                    <a:p>
+                      <a:pPr algn="r"/>
+                      <a:r>
+                        <a:rPr sz="1125" b="0">
+                          <a:solidFill>
+                            <a:srgbClr val="122033"/>
+                          </a:solidFill>
+                          <a:latin typeface="Arial"/>
+                          <a:ea typeface="Arial"/>
+                          <a:cs typeface="Arial"/>
+                        </a:rPr>
+                        <a:t>1,990</a:t>
+                      </a:r>
+                    </a:p>
+                  </a:txBody>
+                  <a:tcPr marL="91440" marR="91440" marT="45720" marB="45720" anchor="ctr">
+                    <a:solidFill>
+                      <a:srgbClr val="FFFDF8"/>
+                    </a:solidFill>
+                  </a:tcPr>
+                </a:tc>
+                <a:tc>
+                  <a:txBody>
+                    <a:bodyPr lIns="76200" tIns="38100" rIns="76200" bIns="38100">
+                      <a:normAutofit/>
+                    </a:bodyPr>
+                    <a:lstStyle/>
+                    <a:p>
+                      <a:pPr algn="r"/>
+                      <a:r>
+                        <a:rPr sz="1125" b="0">
+                          <a:solidFill>
+                            <a:srgbClr val="9B3030"/>
+                          </a:solidFill>
+                          <a:latin typeface="Arial"/>
+                          <a:ea typeface="Arial"/>
+                          <a:cs typeface="Arial"/>
+                        </a:rPr>
+                        <a:t>2,020</a:t>
+                      </a:r>
+                    </a:p>
+                  </a:txBody>
+                  <a:tcPr marL="91440" marR="91440" marT="45720" marB="45720" anchor="ctr">
+                    <a:solidFill>
+                      <a:srgbClr val="FBE6E4"/>
+                    </a:solidFill>
+                  </a:tcPr>
+                </a:tc>
+              </a:tr>
+              <a:tr h="295275">
+                <a:tc>
+                  <a:txBody>
+                    <a:bodyPr lIns="76200" tIns="38100" rIns="76200" bIns="38100">
+                      <a:normAutofit/>
+                    </a:bodyPr>
+                    <a:lstStyle/>
+                    <a:p>
+                      <a:pPr algn="l"/>
+                      <a:r>
+                        <a:rPr sz="1125" b="1">
+                          <a:solidFill>
+                            <a:srgbClr val="122033"/>
+                          </a:solidFill>
+                          <a:latin typeface="Menlo"/>
+                          <a:ea typeface="Menlo"/>
+                          <a:cs typeface="Menlo"/>
+                        </a:rPr>
+                        <a:t>LISTS!D30</a:t>
+                      </a:r>
+                    </a:p>
+                  </a:txBody>
+                  <a:tcPr marL="91440" marR="91440" marT="45720" marB="45720" anchor="ctr">
+                    <a:solidFill>
+                      <a:srgbClr val="FFFDF8"/>
+                    </a:solidFill>
+                  </a:tcPr>
+                </a:tc>
+                <a:tc>
+                  <a:txBody>
+                    <a:bodyPr lIns="76200" tIns="38100" rIns="76200" bIns="38100">
+                      <a:normAutofit/>
+                    </a:bodyPr>
+                    <a:lstStyle/>
+                    <a:p>
+                      <a:pPr algn="r"/>
+                      <a:r>
+                        <a:rPr sz="1125" b="0">
+                          <a:solidFill>
+                            <a:srgbClr val="122033"/>
+                          </a:solidFill>
+                          <a:latin typeface="Arial"/>
+                          <a:ea typeface="Arial"/>
+                          <a:cs typeface="Arial"/>
+                        </a:rPr>
+                        <a:t>534</a:t>
+                      </a:r>
+                    </a:p>
+                  </a:txBody>
+                  <a:tcPr marL="91440" marR="91440" marT="45720" marB="45720" anchor="ctr">
+                    <a:solidFill>
+                      <a:srgbClr val="FFFDF8"/>
+                    </a:solidFill>
+                  </a:tcPr>
+                </a:tc>
+                <a:tc>
+                  <a:txBody>
+                    <a:bodyPr lIns="76200" tIns="38100" rIns="76200" bIns="38100">
+                      <a:normAutofit/>
+                    </a:bodyPr>
+                    <a:lstStyle/>
+                    <a:p>
+                      <a:pPr algn="r"/>
+                      <a:r>
+                        <a:rPr sz="1125" b="0">
+                          <a:solidFill>
+                            <a:srgbClr val="9B3030"/>
+                          </a:solidFill>
+                          <a:latin typeface="Arial"/>
+                          <a:ea typeface="Arial"/>
+                          <a:cs typeface="Arial"/>
+                        </a:rPr>
+                        <a:t>394</a:t>
+                      </a:r>
+                    </a:p>
+                  </a:txBody>
+                  <a:tcPr marL="91440" marR="91440" marT="45720" marB="45720" anchor="ctr">
+                    <a:solidFill>
+                      <a:srgbClr val="FBE6E4"/>
+                    </a:solidFill>
+                  </a:tcPr>
+                </a:tc>
+              </a:tr>
+              <a:tr h="295275">
+                <a:tc>
+                  <a:txBody>
+                    <a:bodyPr lIns="76200" tIns="38100" rIns="76200" bIns="38100">
+                      <a:normAutofit/>
+                    </a:bodyPr>
+                    <a:lstStyle/>
+                    <a:p>
+                      <a:pPr algn="l"/>
+                      <a:r>
+                        <a:rPr sz="1125" b="1">
+                          <a:solidFill>
+                            <a:srgbClr val="122033"/>
+                          </a:solidFill>
+                          <a:latin typeface="Menlo"/>
+                          <a:ea typeface="Menlo"/>
+                          <a:cs typeface="Menlo"/>
+                        </a:rPr>
+                        <a:t>LISTS!D31</a:t>
+                      </a:r>
+                    </a:p>
+                  </a:txBody>
+                  <a:tcPr marL="91440" marR="91440" marT="45720" marB="45720" anchor="ctr">
+                    <a:solidFill>
+                      <a:srgbClr val="FFFDF8"/>
+                    </a:solidFill>
+                  </a:tcPr>
+                </a:tc>
+                <a:tc>
+                  <a:txBody>
+                    <a:bodyPr lIns="76200" tIns="38100" rIns="76200" bIns="38100">
+                      <a:normAutofit/>
+                    </a:bodyPr>
+                    <a:lstStyle/>
+                    <a:p>
+                      <a:pPr algn="r"/>
+                      <a:r>
+                        <a:rPr sz="1125" b="0">
+                          <a:solidFill>
+                            <a:srgbClr val="122033"/>
+                          </a:solidFill>
+                          <a:latin typeface="Arial"/>
+                          <a:ea typeface="Arial"/>
+                          <a:cs typeface="Arial"/>
+                        </a:rPr>
+                        <a:t>401</a:t>
+                      </a:r>
+                    </a:p>
+                  </a:txBody>
+                  <a:tcPr marL="91440" marR="91440" marT="45720" marB="45720" anchor="ctr">
+                    <a:solidFill>
+                      <a:srgbClr val="FFFDF8"/>
+                    </a:solidFill>
+                  </a:tcPr>
+                </a:tc>
+                <a:tc>
+                  <a:txBody>
+                    <a:bodyPr lIns="76200" tIns="38100" rIns="76200" bIns="38100">
+                      <a:normAutofit/>
+                    </a:bodyPr>
+                    <a:lstStyle/>
+                    <a:p>
+                      <a:pPr algn="r"/>
+                      <a:r>
+                        <a:rPr sz="1125" b="0">
+                          <a:solidFill>
+                            <a:srgbClr val="9B3030"/>
+                          </a:solidFill>
+                          <a:latin typeface="Arial"/>
+                          <a:ea typeface="Arial"/>
+                          <a:cs typeface="Arial"/>
+                        </a:rPr>
+                        <a:t>276</a:t>
+                      </a:r>
+                    </a:p>
+                  </a:txBody>
+                  <a:tcPr marL="91440" marR="91440" marT="45720" marB="45720" anchor="ctr">
+                    <a:solidFill>
+                      <a:srgbClr val="FBE6E4"/>
+                    </a:solidFill>
+                  </a:tcPr>
+                </a:tc>
+              </a:tr>
+              <a:tr h="295275">
+                <a:tc>
+                  <a:txBody>
+                    <a:bodyPr lIns="76200" tIns="38100" rIns="76200" bIns="38100">
+                      <a:normAutofit/>
+                    </a:bodyPr>
+                    <a:lstStyle/>
+                    <a:p>
+                      <a:pPr algn="l"/>
+                      <a:r>
+                        <a:rPr sz="1125" b="1">
+                          <a:solidFill>
+                            <a:srgbClr val="122033"/>
+                          </a:solidFill>
+                          <a:latin typeface="Menlo"/>
+                          <a:ea typeface="Menlo"/>
+                          <a:cs typeface="Menlo"/>
+                        </a:rPr>
+                        <a:t>LISTS!D32</a:t>
+                      </a:r>
+                    </a:p>
+                  </a:txBody>
+                  <a:tcPr marL="91440" marR="91440" marT="45720" marB="45720" anchor="ctr">
+                    <a:solidFill>
+                      <a:srgbClr val="FFFDF8"/>
+                    </a:solidFill>
+                  </a:tcPr>
+                </a:tc>
+                <a:tc>
+                  <a:txBody>
+                    <a:bodyPr lIns="76200" tIns="38100" rIns="76200" bIns="38100">
+                      <a:normAutofit/>
+                    </a:bodyPr>
+                    <a:lstStyle/>
+                    <a:p>
+                      <a:pPr algn="r"/>
+                      <a:r>
+                        <a:rPr sz="1125" b="0">
+                          <a:solidFill>
+                            <a:srgbClr val="122033"/>
+                          </a:solidFill>
+                          <a:latin typeface="Arial"/>
+                          <a:ea typeface="Arial"/>
+                          <a:cs typeface="Arial"/>
+                        </a:rPr>
+                        <a:t>6,495</a:t>
+                      </a:r>
+                    </a:p>
+                  </a:txBody>
+                  <a:tcPr marL="91440" marR="91440" marT="45720" marB="45720" anchor="ctr">
+                    <a:solidFill>
+                      <a:srgbClr val="FFFDF8"/>
+                    </a:solidFill>
+                  </a:tcPr>
+                </a:tc>
+                <a:tc>
+                  <a:txBody>
+                    <a:bodyPr lIns="76200" tIns="38100" rIns="76200" bIns="38100">
+                      <a:normAutofit/>
+                    </a:bodyPr>
+                    <a:lstStyle/>
+                    <a:p>
+                      <a:pPr algn="r"/>
+                      <a:r>
+                        <a:rPr sz="1125" b="0">
+                          <a:solidFill>
+                            <a:srgbClr val="9B3030"/>
+                          </a:solidFill>
+                          <a:latin typeface="Arial"/>
+                          <a:ea typeface="Arial"/>
+                          <a:cs typeface="Arial"/>
+                        </a:rPr>
+                        <a:t>6,260</a:t>
+                      </a:r>
+                    </a:p>
+                  </a:txBody>
+                  <a:tcPr marL="91440" marR="91440" marT="45720" marB="45720" anchor="ctr">
+                    <a:solidFill>
+                      <a:srgbClr val="FBE6E4"/>
+                    </a:solidFill>
+                  </a:tcPr>
+                </a:tc>
+              </a:tr>
+            </a:tbl>
+          </a:graphicData>
+        </a:graphic>
+      </p:graphicFrame>
+      <p:sp>
+        <p:nvSpPr>
+          <p:cNvPr id="27" name="">
+            <a:extLst xmlns:a="http://schemas.openxmlformats.org/drawingml/2006/main">
+              <a:ext uri="{FF2B5EF4-FFF2-40B4-BE49-F238E27FC236}">
+                <a16:creationId xmlns:a16="http://schemas.microsoft.com/office/drawing/2014/main" id="{781109A7-D4CB-4507-BF9A-012FC513B962}"/>
+              </a:ext>
+            </a:extLst>
+          </p:cNvPr>
+          <p:cNvSpPr>
+            <a:spLocks xmlns:a="http://schemas.openxmlformats.org/drawingml/2006/main" noGrp="1"/>
+          </p:cNvSpPr>
+          <p:nvPr/>
+        </p:nvSpPr>
+        <p:spPr>
+          <a:xfrm xmlns:a="http://schemas.openxmlformats.org/drawingml/2006/main">
+            <a:off x="609600" y="5743575"/>
+            <a:ext cx="10972800" cy="457200"/>
+          </a:xfrm>
+          <a:prstGeom xmlns:a="http://schemas.openxmlformats.org/drawingml/2006/main" prst="rect">
+            <a:avLst/>
+          </a:prstGeom>
+          <a:solidFill xmlns:a="http://schemas.openxmlformats.org/drawingml/2006/main">
+            <a:srgbClr val="0B172A"/>
+          </a:solidFill>
+          <a:ln xmlns:a="http://schemas.openxmlformats.org/drawingml/2006/main" w="0">
+            <a:noFill/>
+          </a:ln>
+        </p:spPr>
+      </p:sp>
+      <p:sp>
+        <p:nvSpPr>
+          <p:cNvPr id="28" name="">
+            <a:extLst xmlns:a="http://schemas.openxmlformats.org/drawingml/2006/main">
+              <a:ext uri="{FF2B5EF4-FFF2-40B4-BE49-F238E27FC236}">
+                <a16:creationId xmlns:a16="http://schemas.microsoft.com/office/drawing/2014/main" id="{6EF1BDE5-FE97-445C-830A-CEF1B5804B07}"/>
+              </a:ext>
+            </a:extLst>
+          </p:cNvPr>
+          <p:cNvSpPr>
+            <a:spLocks xmlns:a="http://schemas.openxmlformats.org/drawingml/2006/main" noGrp="1"/>
+          </p:cNvSpPr>
+          <p:nvPr/>
+        </p:nvSpPr>
+        <p:spPr>
+          <a:xfrm xmlns:a="http://schemas.openxmlformats.org/drawingml/2006/main">
+            <a:off x="857250" y="5848350"/>
+            <a:ext cx="10477500" cy="266700"/>
+          </a:xfrm>
+          <a:prstGeom xmlns:a="http://schemas.openxmlformats.org/drawingml/2006/main" prst="rect">
+            <a:avLst/>
+          </a:prstGeom>
+          <a:noFill xmlns:a="http://schemas.openxmlformats.org/drawingml/2006/main"/>
+          <a:ln xmlns:a="http://schemas.openxmlformats.org/drawingml/2006/main" w="0">
+            <a:noFill/>
+          </a:ln>
+        </p:spPr>
+        <p:txBody>
+          <a:bodyPr xmlns:a="http://schemas.openxmlformats.org/drawingml/2006/main" wrap="square" lIns="0" tIns="0" rIns="0" bIns="0" anchor="ctr">
+            <a:normAutofit fontScale="100000"/>
+          </a:bodyPr>
+          <a:lstStyle xmlns:a="http://schemas.openxmlformats.org/drawingml/2006/main"/>
+          <a:p xmlns:a="http://schemas.openxmlformats.org/drawingml/2006/main">
+            <a:pPr algn="l">
+              <a:lnSpc>
+                <a:spcPct val="105000"/>
+              </a:lnSpc>
+              <a:buNone/>
+              <a:defRPr sz="1500" b="1" i="0">
+                <a:solidFill>
+                  <a:srgbClr val="FFFFFF"/>
+                </a:solidFill>
+                <a:latin typeface="Arial"/>
+                <a:ea typeface="Arial"/>
+                <a:cs typeface="Arial"/>
+              </a:defRPr>
+            </a:pPr>
+            <a:r>
+              <a:rPr sz="1500" b="1" i="0">
+                <a:solidFill>
+                  <a:srgbClr val="FFFFFF"/>
+                </a:solidFill>
+                <a:latin typeface="Arial"/>
+                <a:ea typeface="Arial"/>
+                <a:cs typeface="Arial"/>
+              </a:rPr>
+              <a:t>The evaluator checks every target cell and grants a task pass only when the complete workbook answer is correct.</a:t>
+            </a:r>
+          </a:p>
+        </p:txBody>
+      </p:sp>
+      <p:sp>
+        <p:nvSpPr>
+          <p:cNvPr id="29" name="">
+            <a:extLst xmlns:a="http://schemas.openxmlformats.org/drawingml/2006/main">
+              <a:ext uri="{FF2B5EF4-FFF2-40B4-BE49-F238E27FC236}">
+                <a16:creationId xmlns:a16="http://schemas.microsoft.com/office/drawing/2014/main" id="{9ED14586-A0FC-43F2-B752-5E1A1EEE95AB}"/>
+              </a:ext>
+            </a:extLst>
+          </p:cNvPr>
+          <p:cNvSpPr>
+            <a:spLocks xmlns:a="http://schemas.openxmlformats.org/drawingml/2006/main" noGrp="1"/>
+          </p:cNvSpPr>
+          <p:nvPr/>
+        </p:nvSpPr>
+        <p:spPr>
+          <a:xfrm xmlns:a="http://schemas.openxmlformats.org/drawingml/2006/main">
+            <a:off x="609600" y="6429375"/>
+            <a:ext cx="10972800" cy="0"/>
           </a:xfrm>
           <a:prstGeom xmlns:a="http://schemas.openxmlformats.org/drawingml/2006/main" prst="line">
             <a:avLst/>
@@ -4176,235 +5449,22 @@
       </p:sp>
       <p:sp>
         <p:nvSpPr>
-          <p:cNvPr id="15" name="">
-            <a:extLst xmlns:a="http://schemas.openxmlformats.org/drawingml/2006/main">
-              <a:ext uri="{FF2B5EF4-FFF2-40B4-BE49-F238E27FC236}">
-                <a16:creationId xmlns:a16="http://schemas.microsoft.com/office/drawing/2014/main" id="{0867A4B3-B502-43DA-AF49-625E390EE3B5}"/>
-              </a:ext>
-            </a:extLst>
-          </p:cNvPr>
-          <p:cNvSpPr>
-            <a:spLocks xmlns:a="http://schemas.openxmlformats.org/drawingml/2006/main" noGrp="1"/>
-          </p:cNvSpPr>
-          <p:nvPr/>
-        </p:nvSpPr>
-        <p:spPr>
-          <a:xfrm xmlns:a="http://schemas.openxmlformats.org/drawingml/2006/main">
-            <a:off x="8953500" y="1952625"/>
-            <a:ext cx="857250" cy="495300"/>
-          </a:xfrm>
-          <a:prstGeom xmlns:a="http://schemas.openxmlformats.org/drawingml/2006/main" prst="rect">
-            <a:avLst/>
-          </a:prstGeom>
-          <a:noFill xmlns:a="http://schemas.openxmlformats.org/drawingml/2006/main"/>
-          <a:ln xmlns:a="http://schemas.openxmlformats.org/drawingml/2006/main" w="0">
-            <a:noFill/>
-          </a:ln>
-        </p:spPr>
-        <p:txBody>
-          <a:bodyPr xmlns:a="http://schemas.openxmlformats.org/drawingml/2006/main" wrap="square" lIns="0" tIns="0" rIns="0" bIns="0" anchor="t">
-            <a:normAutofit fontScale="100000"/>
-          </a:bodyPr>
-          <a:lstStyle xmlns:a="http://schemas.openxmlformats.org/drawingml/2006/main"/>
-          <a:p xmlns:a="http://schemas.openxmlformats.org/drawingml/2006/main">
-            <a:pPr algn="l">
-              <a:lnSpc>
-                <a:spcPct val="105000"/>
-              </a:lnSpc>
-              <a:buNone/>
-              <a:defRPr sz="2850" b="1" i="0">
-                <a:solidFill>
-                  <a:srgbClr val="E76464"/>
-                </a:solidFill>
-                <a:latin typeface="Arial"/>
-                <a:ea typeface="Arial"/>
-                <a:cs typeface="Arial"/>
-              </a:defRPr>
-            </a:pPr>
-            <a:r>
-              <a:rPr sz="2850" b="1" i="0">
-                <a:solidFill>
-                  <a:srgbClr val="E76464"/>
-                </a:solidFill>
-                <a:latin typeface="Arial"/>
-                <a:ea typeface="Arial"/>
-                <a:cs typeface="Arial"/>
-              </a:rPr>
-              <a:t>04</a:t>
-            </a:r>
-          </a:p>
-        </p:txBody>
-      </p:sp>
-      <p:sp>
-        <p:nvSpPr>
-          <p:cNvPr id="16" name="">
-            <a:extLst xmlns:a="http://schemas.openxmlformats.org/drawingml/2006/main">
-              <a:ext uri="{FF2B5EF4-FFF2-40B4-BE49-F238E27FC236}">
-                <a16:creationId xmlns:a16="http://schemas.microsoft.com/office/drawing/2014/main" id="{6B58B03C-40EF-4C1B-86D9-5989E4BF43B1}"/>
-              </a:ext>
-            </a:extLst>
-          </p:cNvPr>
-          <p:cNvSpPr>
-            <a:spLocks xmlns:a="http://schemas.openxmlformats.org/drawingml/2006/main" noGrp="1"/>
-          </p:cNvSpPr>
-          <p:nvPr/>
-        </p:nvSpPr>
-        <p:spPr>
-          <a:xfrm xmlns:a="http://schemas.openxmlformats.org/drawingml/2006/main">
-            <a:off x="8953500" y="2647950"/>
-            <a:ext cx="2381250" cy="400050"/>
-          </a:xfrm>
-          <a:prstGeom xmlns:a="http://schemas.openxmlformats.org/drawingml/2006/main" prst="rect">
-            <a:avLst/>
-          </a:prstGeom>
-          <a:noFill xmlns:a="http://schemas.openxmlformats.org/drawingml/2006/main"/>
-          <a:ln xmlns:a="http://schemas.openxmlformats.org/drawingml/2006/main" w="0">
-            <a:noFill/>
-          </a:ln>
-        </p:spPr>
-        <p:txBody>
-          <a:bodyPr xmlns:a="http://schemas.openxmlformats.org/drawingml/2006/main" wrap="square" lIns="0" tIns="0" rIns="0" bIns="0" anchor="t">
-            <a:normAutofit fontScale="100000"/>
-          </a:bodyPr>
-          <a:lstStyle xmlns:a="http://schemas.openxmlformats.org/drawingml/2006/main"/>
-          <a:p xmlns:a="http://schemas.openxmlformats.org/drawingml/2006/main">
-            <a:pPr algn="l">
-              <a:lnSpc>
-                <a:spcPct val="105000"/>
-              </a:lnSpc>
-              <a:buNone/>
-              <a:defRPr sz="2025" b="1" i="0">
-                <a:solidFill>
-                  <a:srgbClr val="122033"/>
-                </a:solidFill>
-                <a:latin typeface="Arial"/>
-                <a:ea typeface="Arial"/>
-                <a:cs typeface="Arial"/>
-              </a:defRPr>
-            </a:pPr>
-            <a:r>
-              <a:rPr sz="2025" b="1" i="0">
-                <a:solidFill>
-                  <a:srgbClr val="122033"/>
-                </a:solidFill>
-                <a:latin typeface="Arial"/>
-                <a:ea typeface="Arial"/>
-                <a:cs typeface="Arial"/>
-              </a:rPr>
-              <a:t>Semantics</a:t>
-            </a:r>
-          </a:p>
-        </p:txBody>
-      </p:sp>
-      <p:sp>
-        <p:nvSpPr>
-          <p:cNvPr id="17" name="">
-            <a:extLst xmlns:a="http://schemas.openxmlformats.org/drawingml/2006/main">
-              <a:ext uri="{FF2B5EF4-FFF2-40B4-BE49-F238E27FC236}">
-                <a16:creationId xmlns:a16="http://schemas.microsoft.com/office/drawing/2014/main" id="{3385CD1C-64A4-4CA7-BBB6-C9A8ACF98CF5}"/>
-              </a:ext>
-            </a:extLst>
-          </p:cNvPr>
-          <p:cNvSpPr>
-            <a:spLocks xmlns:a="http://schemas.openxmlformats.org/drawingml/2006/main" noGrp="1"/>
-          </p:cNvSpPr>
-          <p:nvPr/>
-        </p:nvSpPr>
-        <p:spPr>
-          <a:xfrm xmlns:a="http://schemas.openxmlformats.org/drawingml/2006/main">
-            <a:off x="8953500" y="3209925"/>
-            <a:ext cx="2333625" cy="1381125"/>
-          </a:xfrm>
-          <a:prstGeom xmlns:a="http://schemas.openxmlformats.org/drawingml/2006/main" prst="rect">
-            <a:avLst/>
-          </a:prstGeom>
-          <a:noFill xmlns:a="http://schemas.openxmlformats.org/drawingml/2006/main"/>
-          <a:ln xmlns:a="http://schemas.openxmlformats.org/drawingml/2006/main" w="0">
-            <a:noFill/>
-          </a:ln>
-        </p:spPr>
-        <p:txBody>
-          <a:bodyPr xmlns:a="http://schemas.openxmlformats.org/drawingml/2006/main" wrap="square" lIns="0" tIns="0" rIns="0" bIns="0" anchor="t">
-            <a:normAutofit fontScale="100000"/>
-          </a:bodyPr>
-          <a:lstStyle xmlns:a="http://schemas.openxmlformats.org/drawingml/2006/main"/>
-          <a:p xmlns:a="http://schemas.openxmlformats.org/drawingml/2006/main">
-            <a:pPr algn="l">
-              <a:lnSpc>
-                <a:spcPct val="114000"/>
-              </a:lnSpc>
-              <a:buNone/>
-              <a:defRPr sz="1500" b="0" i="0">
-                <a:solidFill>
-                  <a:srgbClr val="667487"/>
-                </a:solidFill>
-                <a:latin typeface="Arial"/>
-                <a:ea typeface="Arial"/>
-                <a:cs typeface="Arial"/>
-              </a:defRPr>
-            </a:pPr>
-            <a:r>
-              <a:rPr sz="1500" b="0" i="0">
-                <a:solidFill>
-                  <a:srgbClr val="667487"/>
-                </a:solidFill>
-                <a:latin typeface="Arial"/>
-                <a:ea typeface="Arial"/>
-                <a:cs typeface="Arial"/>
-              </a:rPr>
-              <a:t>The formula runs but returns the wrong value or applies the wrong transformation.</a:t>
-            </a:r>
-          </a:p>
-        </p:txBody>
-      </p:sp>
-      <p:sp>
-        <p:nvSpPr>
-          <p:cNvPr id="18" name="">
-            <a:extLst xmlns:a="http://schemas.openxmlformats.org/drawingml/2006/main">
-              <a:ext uri="{FF2B5EF4-FFF2-40B4-BE49-F238E27FC236}">
-                <a16:creationId xmlns:a16="http://schemas.microsoft.com/office/drawing/2014/main" id="{33C08DA3-6ED6-435F-A416-53752EA30479}"/>
-              </a:ext>
-            </a:extLst>
-          </p:cNvPr>
-          <p:cNvSpPr>
-            <a:spLocks xmlns:a="http://schemas.openxmlformats.org/drawingml/2006/main" noGrp="1"/>
-          </p:cNvSpPr>
-          <p:nvPr/>
-        </p:nvSpPr>
-        <p:spPr>
-          <a:xfrm xmlns:a="http://schemas.openxmlformats.org/drawingml/2006/main">
-            <a:off x="609600" y="5191125"/>
-            <a:ext cx="10972800" cy="781050"/>
-          </a:xfrm>
-          <a:prstGeom xmlns:a="http://schemas.openxmlformats.org/drawingml/2006/main" prst="rect">
-            <a:avLst/>
-          </a:prstGeom>
-          <a:solidFill xmlns:a="http://schemas.openxmlformats.org/drawingml/2006/main">
-            <a:srgbClr val="0B172A"/>
-          </a:solidFill>
-          <a:ln xmlns:a="http://schemas.openxmlformats.org/drawingml/2006/main" w="0">
-            <a:noFill/>
-          </a:ln>
-        </p:spPr>
-      </p:sp>
-      <p:sp>
-        <p:nvSpPr>
-          <p:cNvPr id="19" name="">
-            <a:extLst xmlns:a="http://schemas.openxmlformats.org/drawingml/2006/main">
-              <a:ext uri="{FF2B5EF4-FFF2-40B4-BE49-F238E27FC236}">
-                <a16:creationId xmlns:a16="http://schemas.microsoft.com/office/drawing/2014/main" id="{CB03DD9F-261A-4AC0-8718-6A20A481F41B}"/>
-              </a:ext>
-            </a:extLst>
-          </p:cNvPr>
-          <p:cNvSpPr>
-            <a:spLocks xmlns:a="http://schemas.openxmlformats.org/drawingml/2006/main" noGrp="1"/>
-          </p:cNvSpPr>
-          <p:nvPr/>
-        </p:nvSpPr>
-        <p:spPr>
-          <a:xfrm xmlns:a="http://schemas.openxmlformats.org/drawingml/2006/main">
-            <a:off x="895350" y="5381625"/>
-            <a:ext cx="10401300" cy="400050"/>
+          <p:cNvPr id="30" name="">
+            <a:extLst xmlns:a="http://schemas.openxmlformats.org/drawingml/2006/main">
+              <a:ext uri="{FF2B5EF4-FFF2-40B4-BE49-F238E27FC236}">
+                <a16:creationId xmlns:a16="http://schemas.microsoft.com/office/drawing/2014/main" id="{1CFAEF7D-7E8D-42C0-8FC9-6ED0842A8983}"/>
+              </a:ext>
+            </a:extLst>
+          </p:cNvPr>
+          <p:cNvSpPr>
+            <a:spLocks xmlns:a="http://schemas.openxmlformats.org/drawingml/2006/main" noGrp="1"/>
+          </p:cNvSpPr>
+          <p:nvPr/>
+        </p:nvSpPr>
+        <p:spPr>
+          <a:xfrm xmlns:a="http://schemas.openxmlformats.org/drawingml/2006/main">
+            <a:off x="609600" y="6553200"/>
+            <a:ext cx="6191250" cy="171450"/>
           </a:xfrm>
           <a:prstGeom xmlns:a="http://schemas.openxmlformats.org/drawingml/2006/main" prst="rect">
             <a:avLst/>
@@ -4425,78 +5485,47 @@
                 <a:spcPct val="105000"/>
               </a:lnSpc>
               <a:buNone/>
-              <a:defRPr sz="1875" b="1" i="0">
-                <a:solidFill>
-                  <a:srgbClr val="FFFFFF"/>
-                </a:solidFill>
-                <a:latin typeface="Arial"/>
-                <a:ea typeface="Arial"/>
-                <a:cs typeface="Arial"/>
-              </a:defRPr>
-            </a:pPr>
-            <a:r>
-              <a:rPr sz="1875" b="1" i="0">
-                <a:solidFill>
-                  <a:srgbClr val="FFFFFF"/>
-                </a:solidFill>
-                <a:latin typeface="Arial"/>
-                <a:ea typeface="Arial"/>
-                <a:cs typeface="Arial"/>
-              </a:rPr>
-              <a:t>Execution and correctness require separate checks.</a:t>
-            </a:r>
-          </a:p>
-        </p:txBody>
-      </p:sp>
-      <p:sp>
-        <p:nvSpPr>
-          <p:cNvPr id="20" name="">
-            <a:extLst xmlns:a="http://schemas.openxmlformats.org/drawingml/2006/main">
-              <a:ext uri="{FF2B5EF4-FFF2-40B4-BE49-F238E27FC236}">
-                <a16:creationId xmlns:a16="http://schemas.microsoft.com/office/drawing/2014/main" id="{C5E2D4CF-CD78-4ED6-95B9-505070F9FF20}"/>
-              </a:ext>
-            </a:extLst>
-          </p:cNvPr>
-          <p:cNvSpPr>
-            <a:spLocks xmlns:a="http://schemas.openxmlformats.org/drawingml/2006/main" noGrp="1"/>
-          </p:cNvSpPr>
-          <p:nvPr/>
-        </p:nvSpPr>
-        <p:spPr>
-          <a:xfrm xmlns:a="http://schemas.openxmlformats.org/drawingml/2006/main">
-            <a:off x="609600" y="6429375"/>
-            <a:ext cx="10972800" cy="0"/>
-          </a:xfrm>
-          <a:prstGeom xmlns:a="http://schemas.openxmlformats.org/drawingml/2006/main" prst="line">
-            <a:avLst/>
-          </a:prstGeom>
-          <a:noFill xmlns:a="http://schemas.openxmlformats.org/drawingml/2006/main"/>
-          <a:ln xmlns:a="http://schemas.openxmlformats.org/drawingml/2006/main" w="9525">
-            <a:solidFill>
-              <a:srgbClr val="C9D1D9"/>
-            </a:solidFill>
-            <a:prstDash val="solid"/>
-          </a:ln>
-        </p:spPr>
-      </p:sp>
-      <p:sp>
-        <p:nvSpPr>
-          <p:cNvPr id="21" name="">
-            <a:extLst xmlns:a="http://schemas.openxmlformats.org/drawingml/2006/main">
-              <a:ext uri="{FF2B5EF4-FFF2-40B4-BE49-F238E27FC236}">
-                <a16:creationId xmlns:a16="http://schemas.microsoft.com/office/drawing/2014/main" id="{A9540AF3-BBF2-492B-A52E-A470D37111FC}"/>
-              </a:ext>
-            </a:extLst>
-          </p:cNvPr>
-          <p:cNvSpPr>
-            <a:spLocks xmlns:a="http://schemas.openxmlformats.org/drawingml/2006/main" noGrp="1"/>
-          </p:cNvSpPr>
-          <p:nvPr/>
-        </p:nvSpPr>
-        <p:spPr>
-          <a:xfrm xmlns:a="http://schemas.openxmlformats.org/drawingml/2006/main">
-            <a:off x="609600" y="6553200"/>
-            <a:ext cx="6191250" cy="171450"/>
+              <a:defRPr sz="900" b="1" i="0">
+                <a:solidFill>
+                  <a:srgbClr val="667487"/>
+                </a:solidFill>
+                <a:latin typeface="Arial"/>
+                <a:ea typeface="Arial"/>
+                <a:cs typeface="Arial"/>
+              </a:defRPr>
+            </a:pPr>
+            <a:r>
+              <a:rPr sz="900" b="1" i="0">
+                <a:solidFill>
+                  <a:srgbClr val="667487"/>
+                </a:solidFill>
+                <a:latin typeface="Arial"/>
+                <a:ea typeface="Arial"/>
+                <a:cs typeface="Arial"/>
+              </a:rPr>
+              <a:t>FORMULABENCH  ·  RESEARCH: EXCEL FORMULA GENERATION</a:t>
+            </a:r>
+          </a:p>
+        </p:txBody>
+      </p:sp>
+      <p:sp>
+        <p:nvSpPr>
+          <p:cNvPr id="31" name="">
+            <a:extLst xmlns:a="http://schemas.openxmlformats.org/drawingml/2006/main">
+              <a:ext uri="{FF2B5EF4-FFF2-40B4-BE49-F238E27FC236}">
+                <a16:creationId xmlns:a16="http://schemas.microsoft.com/office/drawing/2014/main" id="{0FD922A0-7758-44CB-A8CC-504BE9692815}"/>
+              </a:ext>
+            </a:extLst>
+          </p:cNvPr>
+          <p:cNvSpPr>
+            <a:spLocks xmlns:a="http://schemas.openxmlformats.org/drawingml/2006/main" noGrp="1"/>
+          </p:cNvSpPr>
+          <p:nvPr/>
+        </p:nvSpPr>
+        <p:spPr>
+          <a:xfrm xmlns:a="http://schemas.openxmlformats.org/drawingml/2006/main">
+            <a:off x="11049000" y="6553200"/>
+            <a:ext cx="533400" cy="171450"/>
           </a:xfrm>
           <a:prstGeom xmlns:a="http://schemas.openxmlformats.org/drawingml/2006/main" prst="rect">
             <a:avLst/>
@@ -4512,67 +5541,6 @@
           </a:bodyPr>
           <a:lstStyle xmlns:a="http://schemas.openxmlformats.org/drawingml/2006/main"/>
           <a:p xmlns:a="http://schemas.openxmlformats.org/drawingml/2006/main">
-            <a:pPr algn="l">
-              <a:lnSpc>
-                <a:spcPct val="105000"/>
-              </a:lnSpc>
-              <a:buNone/>
-              <a:defRPr sz="900" b="1" i="0">
-                <a:solidFill>
-                  <a:srgbClr val="667487"/>
-                </a:solidFill>
-                <a:latin typeface="Arial"/>
-                <a:ea typeface="Arial"/>
-                <a:cs typeface="Arial"/>
-              </a:defRPr>
-            </a:pPr>
-            <a:r>
-              <a:rPr sz="900" b="1" i="0">
-                <a:solidFill>
-                  <a:srgbClr val="667487"/>
-                </a:solidFill>
-                <a:latin typeface="Arial"/>
-                <a:ea typeface="Arial"/>
-                <a:cs typeface="Arial"/>
-              </a:rPr>
-              <a:t>FORMULABENCH  ·  RESEARCH: EXCEL FORMULA GENERATION</a:t>
-            </a:r>
-          </a:p>
-        </p:txBody>
-      </p:sp>
-      <p:sp>
-        <p:nvSpPr>
-          <p:cNvPr id="22" name="">
-            <a:extLst xmlns:a="http://schemas.openxmlformats.org/drawingml/2006/main">
-              <a:ext uri="{FF2B5EF4-FFF2-40B4-BE49-F238E27FC236}">
-                <a16:creationId xmlns:a16="http://schemas.microsoft.com/office/drawing/2014/main" id="{D835E5E5-6136-4CF1-AC2E-12D97193DA36}"/>
-              </a:ext>
-            </a:extLst>
-          </p:cNvPr>
-          <p:cNvSpPr>
-            <a:spLocks xmlns:a="http://schemas.openxmlformats.org/drawingml/2006/main" noGrp="1"/>
-          </p:cNvSpPr>
-          <p:nvPr/>
-        </p:nvSpPr>
-        <p:spPr>
-          <a:xfrm xmlns:a="http://schemas.openxmlformats.org/drawingml/2006/main">
-            <a:off x="11049000" y="6553200"/>
-            <a:ext cx="533400" cy="171450"/>
-          </a:xfrm>
-          <a:prstGeom xmlns:a="http://schemas.openxmlformats.org/drawingml/2006/main" prst="rect">
-            <a:avLst/>
-          </a:prstGeom>
-          <a:noFill xmlns:a="http://schemas.openxmlformats.org/drawingml/2006/main"/>
-          <a:ln xmlns:a="http://schemas.openxmlformats.org/drawingml/2006/main" w="0">
-            <a:noFill/>
-          </a:ln>
-        </p:spPr>
-        <p:txBody>
-          <a:bodyPr xmlns:a="http://schemas.openxmlformats.org/drawingml/2006/main" wrap="square" lIns="0" tIns="0" rIns="0" bIns="0" anchor="ctr">
-            <a:normAutofit fontScale="100000"/>
-          </a:bodyPr>
-          <a:lstStyle xmlns:a="http://schemas.openxmlformats.org/drawingml/2006/main"/>
-          <a:p xmlns:a="http://schemas.openxmlformats.org/drawingml/2006/main">
             <a:pPr algn="r">
               <a:lnSpc>
                 <a:spcPct val="105000"/>
@@ -4604,7 +5572,7 @@
     </p:spTree>
     <p:extLst>
       <p:ext uri="{BB962C8B-B14F-4D97-AF65-F5344CB8AC3E}">
-        <p14:creationId xmlns:p14="http://schemas.microsoft.com/office/powerpoint/2010/main" val="693287952"/>
+        <p14:creationId xmlns:p14="http://schemas.microsoft.com/office/powerpoint/2010/main" val="1076102287"/>
       </p:ext>
     </p:extLst>
   </p:cSld>
@@ -4612,6 +5580,1226 @@
 </file>
 
 <file path=ppt/slides/slide4.xml><?xml version="1.0" encoding="utf-8"?>
+<p:sld xmlns:p="http://schemas.openxmlformats.org/presentationml/2006/main">
+  <p:cSld>
+    <p:bg>
+      <p:bgPr>
+        <a:solidFill xmlns:a="http://schemas.openxmlformats.org/drawingml/2006/main">
+          <a:srgbClr val="F4F0E8"/>
+        </a:solidFill>
+      </p:bgPr>
+    </p:bg>
+    <p:spTree>
+      <p:nvGrpSpPr>
+        <p:cNvPr id="1" name=""/>
+        <p:cNvGrpSpPr/>
+        <p:nvPr/>
+      </p:nvGrpSpPr>
+      <p:grpSpPr>
+        <a:xfrm xmlns:a="http://schemas.openxmlformats.org/drawingml/2006/main"/>
+      </p:grpSpPr>
+      <p:sp>
+        <p:nvSpPr>
+          <p:cNvPr id="23" name="slide-title">
+            <a:extLst xmlns:a="http://schemas.openxmlformats.org/drawingml/2006/main">
+              <a:ext uri="{FF2B5EF4-FFF2-40B4-BE49-F238E27FC236}">
+                <a16:creationId xmlns:a16="http://schemas.microsoft.com/office/drawing/2014/main" id="{BA83AAE2-740D-4299-890F-FB8630039B15}"/>
+              </a:ext>
+            </a:extLst>
+          </p:cNvPr>
+          <p:cNvSpPr>
+            <a:spLocks xmlns:a="http://schemas.openxmlformats.org/drawingml/2006/main" noGrp="1"/>
+          </p:cNvSpPr>
+          <p:nvPr/>
+        </p:nvSpPr>
+        <p:spPr>
+          <a:xfrm xmlns:a="http://schemas.openxmlformats.org/drawingml/2006/main">
+            <a:off x="609600" y="428625"/>
+            <a:ext cx="10972800" cy="590550"/>
+          </a:xfrm>
+          <a:prstGeom xmlns:a="http://schemas.openxmlformats.org/drawingml/2006/main" prst="rect">
+            <a:avLst/>
+          </a:prstGeom>
+          <a:noFill xmlns:a="http://schemas.openxmlformats.org/drawingml/2006/main"/>
+          <a:ln xmlns:a="http://schemas.openxmlformats.org/drawingml/2006/main" w="0">
+            <a:noFill/>
+          </a:ln>
+        </p:spPr>
+        <p:txBody>
+          <a:bodyPr xmlns:a="http://schemas.openxmlformats.org/drawingml/2006/main" wrap="square" lIns="0" tIns="0" rIns="0" bIns="0" anchor="t">
+            <a:normAutofit fontScale="100000"/>
+          </a:bodyPr>
+          <a:lstStyle xmlns:a="http://schemas.openxmlformats.org/drawingml/2006/main"/>
+          <a:p xmlns:a="http://schemas.openxmlformats.org/drawingml/2006/main">
+            <a:pPr algn="l">
+              <a:lnSpc>
+                <a:spcPct val="105000"/>
+              </a:lnSpc>
+              <a:buNone/>
+              <a:defRPr sz="3300" b="1" i="0">
+                <a:solidFill>
+                  <a:srgbClr val="122033"/>
+                </a:solidFill>
+                <a:latin typeface="Arial"/>
+                <a:ea typeface="Arial"/>
+                <a:cs typeface="Arial"/>
+              </a:defRPr>
+            </a:pPr>
+            <a:r>
+              <a:rPr sz="3300" b="1" i="0">
+                <a:solidFill>
+                  <a:srgbClr val="122033"/>
+                </a:solidFill>
+                <a:latin typeface="Arial"/>
+                <a:ea typeface="Arial"/>
+                <a:cs typeface="Arial"/>
+              </a:rPr>
+              <a:t>Plausible formulas fail in four different ways</a:t>
+            </a:r>
+          </a:p>
+        </p:txBody>
+      </p:sp>
+      <p:sp>
+        <p:nvSpPr>
+          <p:cNvPr id="2" name="">
+            <a:extLst xmlns:a="http://schemas.openxmlformats.org/drawingml/2006/main">
+              <a:ext uri="{FF2B5EF4-FFF2-40B4-BE49-F238E27FC236}">
+                <a16:creationId xmlns:a16="http://schemas.microsoft.com/office/drawing/2014/main" id="{9713E6C8-257E-4CD3-BAE5-F9AB471104C5}"/>
+              </a:ext>
+            </a:extLst>
+          </p:cNvPr>
+          <p:cNvSpPr>
+            <a:spLocks xmlns:a="http://schemas.openxmlformats.org/drawingml/2006/main" noGrp="1"/>
+          </p:cNvSpPr>
+          <p:nvPr/>
+        </p:nvSpPr>
+        <p:spPr>
+          <a:xfrm xmlns:a="http://schemas.openxmlformats.org/drawingml/2006/main">
+            <a:off x="609600" y="1047750"/>
+            <a:ext cx="10287000" cy="400050"/>
+          </a:xfrm>
+          <a:prstGeom xmlns:a="http://schemas.openxmlformats.org/drawingml/2006/main" prst="rect">
+            <a:avLst/>
+          </a:prstGeom>
+          <a:noFill xmlns:a="http://schemas.openxmlformats.org/drawingml/2006/main"/>
+          <a:ln xmlns:a="http://schemas.openxmlformats.org/drawingml/2006/main" w="0">
+            <a:noFill/>
+          </a:ln>
+        </p:spPr>
+        <p:txBody>
+          <a:bodyPr xmlns:a="http://schemas.openxmlformats.org/drawingml/2006/main" wrap="square" lIns="0" tIns="0" rIns="0" bIns="0" anchor="t">
+            <a:normAutofit fontScale="100000"/>
+          </a:bodyPr>
+          <a:lstStyle xmlns:a="http://schemas.openxmlformats.org/drawingml/2006/main"/>
+          <a:p xmlns:a="http://schemas.openxmlformats.org/drawingml/2006/main">
+            <a:pPr algn="l">
+              <a:lnSpc>
+                <a:spcPct val="105000"/>
+              </a:lnSpc>
+              <a:buNone/>
+              <a:defRPr sz="1725" b="0" i="0">
+                <a:solidFill>
+                  <a:srgbClr val="667487"/>
+                </a:solidFill>
+                <a:latin typeface="Arial"/>
+                <a:ea typeface="Arial"/>
+                <a:cs typeface="Arial"/>
+              </a:defRPr>
+            </a:pPr>
+            <a:r>
+              <a:rPr sz="1725" b="0" i="0">
+                <a:solidFill>
+                  <a:srgbClr val="667487"/>
+                </a:solidFill>
+                <a:latin typeface="Arial"/>
+                <a:ea typeface="Arial"/>
+                <a:cs typeface="Arial"/>
+              </a:rPr>
+              <a:t>A workbook can open successfully while still producing the wrong investment result.</a:t>
+            </a:r>
+          </a:p>
+        </p:txBody>
+      </p:sp>
+      <p:sp>
+        <p:nvSpPr>
+          <p:cNvPr id="3" name="">
+            <a:extLst xmlns:a="http://schemas.openxmlformats.org/drawingml/2006/main">
+              <a:ext uri="{FF2B5EF4-FFF2-40B4-BE49-F238E27FC236}">
+                <a16:creationId xmlns:a16="http://schemas.microsoft.com/office/drawing/2014/main" id="{EAAC83CC-E0AE-4760-853C-EB8F833D0A54}"/>
+              </a:ext>
+            </a:extLst>
+          </p:cNvPr>
+          <p:cNvSpPr>
+            <a:spLocks xmlns:a="http://schemas.openxmlformats.org/drawingml/2006/main" noGrp="1"/>
+          </p:cNvSpPr>
+          <p:nvPr/>
+        </p:nvSpPr>
+        <p:spPr>
+          <a:xfrm xmlns:a="http://schemas.openxmlformats.org/drawingml/2006/main">
+            <a:off x="609600" y="1952625"/>
+            <a:ext cx="857250" cy="495300"/>
+          </a:xfrm>
+          <a:prstGeom xmlns:a="http://schemas.openxmlformats.org/drawingml/2006/main" prst="rect">
+            <a:avLst/>
+          </a:prstGeom>
+          <a:noFill xmlns:a="http://schemas.openxmlformats.org/drawingml/2006/main"/>
+          <a:ln xmlns:a="http://schemas.openxmlformats.org/drawingml/2006/main" w="0">
+            <a:noFill/>
+          </a:ln>
+        </p:spPr>
+        <p:txBody>
+          <a:bodyPr xmlns:a="http://schemas.openxmlformats.org/drawingml/2006/main" wrap="square" lIns="0" tIns="0" rIns="0" bIns="0" anchor="t">
+            <a:normAutofit fontScale="100000"/>
+          </a:bodyPr>
+          <a:lstStyle xmlns:a="http://schemas.openxmlformats.org/drawingml/2006/main"/>
+          <a:p xmlns:a="http://schemas.openxmlformats.org/drawingml/2006/main">
+            <a:pPr algn="l">
+              <a:lnSpc>
+                <a:spcPct val="105000"/>
+              </a:lnSpc>
+              <a:buNone/>
+              <a:defRPr sz="2850" b="1" i="0">
+                <a:solidFill>
+                  <a:srgbClr val="35C47A"/>
+                </a:solidFill>
+                <a:latin typeface="Arial"/>
+                <a:ea typeface="Arial"/>
+                <a:cs typeface="Arial"/>
+              </a:defRPr>
+            </a:pPr>
+            <a:r>
+              <a:rPr sz="2850" b="1" i="0">
+                <a:solidFill>
+                  <a:srgbClr val="35C47A"/>
+                </a:solidFill>
+                <a:latin typeface="Arial"/>
+                <a:ea typeface="Arial"/>
+                <a:cs typeface="Arial"/>
+              </a:rPr>
+              <a:t>01</a:t>
+            </a:r>
+          </a:p>
+        </p:txBody>
+      </p:sp>
+      <p:sp>
+        <p:nvSpPr>
+          <p:cNvPr id="4" name="">
+            <a:extLst xmlns:a="http://schemas.openxmlformats.org/drawingml/2006/main">
+              <a:ext uri="{FF2B5EF4-FFF2-40B4-BE49-F238E27FC236}">
+                <a16:creationId xmlns:a16="http://schemas.microsoft.com/office/drawing/2014/main" id="{62586E58-79A8-41D3-96CB-91EBB637A569}"/>
+              </a:ext>
+            </a:extLst>
+          </p:cNvPr>
+          <p:cNvSpPr>
+            <a:spLocks xmlns:a="http://schemas.openxmlformats.org/drawingml/2006/main" noGrp="1"/>
+          </p:cNvSpPr>
+          <p:nvPr/>
+        </p:nvSpPr>
+        <p:spPr>
+          <a:xfrm xmlns:a="http://schemas.openxmlformats.org/drawingml/2006/main">
+            <a:off x="609600" y="2647950"/>
+            <a:ext cx="2381250" cy="400050"/>
+          </a:xfrm>
+          <a:prstGeom xmlns:a="http://schemas.openxmlformats.org/drawingml/2006/main" prst="rect">
+            <a:avLst/>
+          </a:prstGeom>
+          <a:noFill xmlns:a="http://schemas.openxmlformats.org/drawingml/2006/main"/>
+          <a:ln xmlns:a="http://schemas.openxmlformats.org/drawingml/2006/main" w="0">
+            <a:noFill/>
+          </a:ln>
+        </p:spPr>
+        <p:txBody>
+          <a:bodyPr xmlns:a="http://schemas.openxmlformats.org/drawingml/2006/main" wrap="square" lIns="0" tIns="0" rIns="0" bIns="0" anchor="t">
+            <a:normAutofit fontScale="100000"/>
+          </a:bodyPr>
+          <a:lstStyle xmlns:a="http://schemas.openxmlformats.org/drawingml/2006/main"/>
+          <a:p xmlns:a="http://schemas.openxmlformats.org/drawingml/2006/main">
+            <a:pPr algn="l">
+              <a:lnSpc>
+                <a:spcPct val="105000"/>
+              </a:lnSpc>
+              <a:buNone/>
+              <a:defRPr sz="2025" b="1" i="0">
+                <a:solidFill>
+                  <a:srgbClr val="122033"/>
+                </a:solidFill>
+                <a:latin typeface="Arial"/>
+                <a:ea typeface="Arial"/>
+                <a:cs typeface="Arial"/>
+              </a:defRPr>
+            </a:pPr>
+            <a:r>
+              <a:rPr sz="2025" b="1" i="0">
+                <a:solidFill>
+                  <a:srgbClr val="122033"/>
+                </a:solidFill>
+                <a:latin typeface="Arial"/>
+                <a:ea typeface="Arial"/>
+                <a:cs typeface="Arial"/>
+              </a:rPr>
+              <a:t>Context</a:t>
+            </a:r>
+          </a:p>
+        </p:txBody>
+      </p:sp>
+      <p:sp>
+        <p:nvSpPr>
+          <p:cNvPr id="5" name="">
+            <a:extLst xmlns:a="http://schemas.openxmlformats.org/drawingml/2006/main">
+              <a:ext uri="{FF2B5EF4-FFF2-40B4-BE49-F238E27FC236}">
+                <a16:creationId xmlns:a16="http://schemas.microsoft.com/office/drawing/2014/main" id="{A5EA0AF2-B14B-4F91-853A-A5302D46686C}"/>
+              </a:ext>
+            </a:extLst>
+          </p:cNvPr>
+          <p:cNvSpPr>
+            <a:spLocks xmlns:a="http://schemas.openxmlformats.org/drawingml/2006/main" noGrp="1"/>
+          </p:cNvSpPr>
+          <p:nvPr/>
+        </p:nvSpPr>
+        <p:spPr>
+          <a:xfrm xmlns:a="http://schemas.openxmlformats.org/drawingml/2006/main">
+            <a:off x="609600" y="3209925"/>
+            <a:ext cx="2333625" cy="1381125"/>
+          </a:xfrm>
+          <a:prstGeom xmlns:a="http://schemas.openxmlformats.org/drawingml/2006/main" prst="rect">
+            <a:avLst/>
+          </a:prstGeom>
+          <a:noFill xmlns:a="http://schemas.openxmlformats.org/drawingml/2006/main"/>
+          <a:ln xmlns:a="http://schemas.openxmlformats.org/drawingml/2006/main" w="0">
+            <a:noFill/>
+          </a:ln>
+        </p:spPr>
+        <p:txBody>
+          <a:bodyPr xmlns:a="http://schemas.openxmlformats.org/drawingml/2006/main" wrap="square" lIns="0" tIns="0" rIns="0" bIns="0" anchor="t">
+            <a:normAutofit fontScale="100000"/>
+          </a:bodyPr>
+          <a:lstStyle xmlns:a="http://schemas.openxmlformats.org/drawingml/2006/main"/>
+          <a:p xmlns:a="http://schemas.openxmlformats.org/drawingml/2006/main">
+            <a:pPr algn="l">
+              <a:lnSpc>
+                <a:spcPct val="114000"/>
+              </a:lnSpc>
+              <a:buNone/>
+              <a:defRPr sz="1500" b="0" i="0">
+                <a:solidFill>
+                  <a:srgbClr val="667487"/>
+                </a:solidFill>
+                <a:latin typeface="Arial"/>
+                <a:ea typeface="Arial"/>
+                <a:cs typeface="Arial"/>
+              </a:defRPr>
+            </a:pPr>
+            <a:r>
+              <a:rPr sz="1500" b="0" i="0">
+                <a:solidFill>
+                  <a:srgbClr val="667487"/>
+                </a:solidFill>
+                <a:latin typeface="Arial"/>
+                <a:ea typeface="Arial"/>
+                <a:cs typeface="Arial"/>
+              </a:rPr>
+              <a:t>The relevant worksheet, source range or existing formula never reaches the model.</a:t>
+            </a:r>
+          </a:p>
+        </p:txBody>
+      </p:sp>
+      <p:sp>
+        <p:nvSpPr>
+          <p:cNvPr id="6" name="">
+            <a:extLst xmlns:a="http://schemas.openxmlformats.org/drawingml/2006/main">
+              <a:ext uri="{FF2B5EF4-FFF2-40B4-BE49-F238E27FC236}">
+                <a16:creationId xmlns:a16="http://schemas.microsoft.com/office/drawing/2014/main" id="{2A11D020-E96D-410D-8058-38CF01E7E0C7}"/>
+              </a:ext>
+            </a:extLst>
+          </p:cNvPr>
+          <p:cNvSpPr>
+            <a:spLocks xmlns:a="http://schemas.openxmlformats.org/drawingml/2006/main" noGrp="1"/>
+          </p:cNvSpPr>
+          <p:nvPr/>
+        </p:nvSpPr>
+        <p:spPr>
+          <a:xfrm xmlns:a="http://schemas.openxmlformats.org/drawingml/2006/main">
+            <a:off x="3181350" y="1924050"/>
+            <a:ext cx="0" cy="2809875"/>
+          </a:xfrm>
+          <a:prstGeom xmlns:a="http://schemas.openxmlformats.org/drawingml/2006/main" prst="line">
+            <a:avLst/>
+          </a:prstGeom>
+          <a:noFill xmlns:a="http://schemas.openxmlformats.org/drawingml/2006/main"/>
+          <a:ln xmlns:a="http://schemas.openxmlformats.org/drawingml/2006/main" w="9525">
+            <a:solidFill>
+              <a:srgbClr val="C9D1D9"/>
+            </a:solidFill>
+            <a:prstDash val="solid"/>
+          </a:ln>
+        </p:spPr>
+      </p:sp>
+      <p:sp>
+        <p:nvSpPr>
+          <p:cNvPr id="7" name="">
+            <a:extLst xmlns:a="http://schemas.openxmlformats.org/drawingml/2006/main">
+              <a:ext uri="{FF2B5EF4-FFF2-40B4-BE49-F238E27FC236}">
+                <a16:creationId xmlns:a16="http://schemas.microsoft.com/office/drawing/2014/main" id="{4C317204-E705-4B94-B5D4-1F6C21FCFD8D}"/>
+              </a:ext>
+            </a:extLst>
+          </p:cNvPr>
+          <p:cNvSpPr>
+            <a:spLocks xmlns:a="http://schemas.openxmlformats.org/drawingml/2006/main" noGrp="1"/>
+          </p:cNvSpPr>
+          <p:nvPr/>
+        </p:nvSpPr>
+        <p:spPr>
+          <a:xfrm xmlns:a="http://schemas.openxmlformats.org/drawingml/2006/main">
+            <a:off x="3390900" y="1952625"/>
+            <a:ext cx="857250" cy="495300"/>
+          </a:xfrm>
+          <a:prstGeom xmlns:a="http://schemas.openxmlformats.org/drawingml/2006/main" prst="rect">
+            <a:avLst/>
+          </a:prstGeom>
+          <a:noFill xmlns:a="http://schemas.openxmlformats.org/drawingml/2006/main"/>
+          <a:ln xmlns:a="http://schemas.openxmlformats.org/drawingml/2006/main" w="0">
+            <a:noFill/>
+          </a:ln>
+        </p:spPr>
+        <p:txBody>
+          <a:bodyPr xmlns:a="http://schemas.openxmlformats.org/drawingml/2006/main" wrap="square" lIns="0" tIns="0" rIns="0" bIns="0" anchor="t">
+            <a:normAutofit fontScale="100000"/>
+          </a:bodyPr>
+          <a:lstStyle xmlns:a="http://schemas.openxmlformats.org/drawingml/2006/main"/>
+          <a:p xmlns:a="http://schemas.openxmlformats.org/drawingml/2006/main">
+            <a:pPr algn="l">
+              <a:lnSpc>
+                <a:spcPct val="105000"/>
+              </a:lnSpc>
+              <a:buNone/>
+              <a:defRPr sz="2850" b="1" i="0">
+                <a:solidFill>
+                  <a:srgbClr val="35C47A"/>
+                </a:solidFill>
+                <a:latin typeface="Arial"/>
+                <a:ea typeface="Arial"/>
+                <a:cs typeface="Arial"/>
+              </a:defRPr>
+            </a:pPr>
+            <a:r>
+              <a:rPr sz="2850" b="1" i="0">
+                <a:solidFill>
+                  <a:srgbClr val="35C47A"/>
+                </a:solidFill>
+                <a:latin typeface="Arial"/>
+                <a:ea typeface="Arial"/>
+                <a:cs typeface="Arial"/>
+              </a:rPr>
+              <a:t>02</a:t>
+            </a:r>
+          </a:p>
+        </p:txBody>
+      </p:sp>
+      <p:sp>
+        <p:nvSpPr>
+          <p:cNvPr id="8" name="">
+            <a:extLst xmlns:a="http://schemas.openxmlformats.org/drawingml/2006/main">
+              <a:ext uri="{FF2B5EF4-FFF2-40B4-BE49-F238E27FC236}">
+                <a16:creationId xmlns:a16="http://schemas.microsoft.com/office/drawing/2014/main" id="{2B5EFF9C-F267-4472-B84E-AC0C7244B8FE}"/>
+              </a:ext>
+            </a:extLst>
+          </p:cNvPr>
+          <p:cNvSpPr>
+            <a:spLocks xmlns:a="http://schemas.openxmlformats.org/drawingml/2006/main" noGrp="1"/>
+          </p:cNvSpPr>
+          <p:nvPr/>
+        </p:nvSpPr>
+        <p:spPr>
+          <a:xfrm xmlns:a="http://schemas.openxmlformats.org/drawingml/2006/main">
+            <a:off x="3390900" y="2647950"/>
+            <a:ext cx="2381250" cy="400050"/>
+          </a:xfrm>
+          <a:prstGeom xmlns:a="http://schemas.openxmlformats.org/drawingml/2006/main" prst="rect">
+            <a:avLst/>
+          </a:prstGeom>
+          <a:noFill xmlns:a="http://schemas.openxmlformats.org/drawingml/2006/main"/>
+          <a:ln xmlns:a="http://schemas.openxmlformats.org/drawingml/2006/main" w="0">
+            <a:noFill/>
+          </a:ln>
+        </p:spPr>
+        <p:txBody>
+          <a:bodyPr xmlns:a="http://schemas.openxmlformats.org/drawingml/2006/main" wrap="square" lIns="0" tIns="0" rIns="0" bIns="0" anchor="t">
+            <a:normAutofit fontScale="100000"/>
+          </a:bodyPr>
+          <a:lstStyle xmlns:a="http://schemas.openxmlformats.org/drawingml/2006/main"/>
+          <a:p xmlns:a="http://schemas.openxmlformats.org/drawingml/2006/main">
+            <a:pPr algn="l">
+              <a:lnSpc>
+                <a:spcPct val="105000"/>
+              </a:lnSpc>
+              <a:buNone/>
+              <a:defRPr sz="2025" b="1" i="0">
+                <a:solidFill>
+                  <a:srgbClr val="122033"/>
+                </a:solidFill>
+                <a:latin typeface="Arial"/>
+                <a:ea typeface="Arial"/>
+                <a:cs typeface="Arial"/>
+              </a:defRPr>
+            </a:pPr>
+            <a:r>
+              <a:rPr sz="2025" b="1" i="0">
+                <a:solidFill>
+                  <a:srgbClr val="122033"/>
+                </a:solidFill>
+                <a:latin typeface="Arial"/>
+                <a:ea typeface="Arial"/>
+                <a:cs typeface="Arial"/>
+              </a:rPr>
+              <a:t>Coverage</a:t>
+            </a:r>
+          </a:p>
+        </p:txBody>
+      </p:sp>
+      <p:sp>
+        <p:nvSpPr>
+          <p:cNvPr id="9" name="">
+            <a:extLst xmlns:a="http://schemas.openxmlformats.org/drawingml/2006/main">
+              <a:ext uri="{FF2B5EF4-FFF2-40B4-BE49-F238E27FC236}">
+                <a16:creationId xmlns:a16="http://schemas.microsoft.com/office/drawing/2014/main" id="{3E366EB3-AAF5-4B60-B455-F0A96238D571}"/>
+              </a:ext>
+            </a:extLst>
+          </p:cNvPr>
+          <p:cNvSpPr>
+            <a:spLocks xmlns:a="http://schemas.openxmlformats.org/drawingml/2006/main" noGrp="1"/>
+          </p:cNvSpPr>
+          <p:nvPr/>
+        </p:nvSpPr>
+        <p:spPr>
+          <a:xfrm xmlns:a="http://schemas.openxmlformats.org/drawingml/2006/main">
+            <a:off x="3390900" y="3209925"/>
+            <a:ext cx="2333625" cy="1381125"/>
+          </a:xfrm>
+          <a:prstGeom xmlns:a="http://schemas.openxmlformats.org/drawingml/2006/main" prst="rect">
+            <a:avLst/>
+          </a:prstGeom>
+          <a:noFill xmlns:a="http://schemas.openxmlformats.org/drawingml/2006/main"/>
+          <a:ln xmlns:a="http://schemas.openxmlformats.org/drawingml/2006/main" w="0">
+            <a:noFill/>
+          </a:ln>
+        </p:spPr>
+        <p:txBody>
+          <a:bodyPr xmlns:a="http://schemas.openxmlformats.org/drawingml/2006/main" wrap="square" lIns="0" tIns="0" rIns="0" bIns="0" anchor="t">
+            <a:normAutofit fontScale="100000"/>
+          </a:bodyPr>
+          <a:lstStyle xmlns:a="http://schemas.openxmlformats.org/drawingml/2006/main"/>
+          <a:p xmlns:a="http://schemas.openxmlformats.org/drawingml/2006/main">
+            <a:pPr algn="l">
+              <a:lnSpc>
+                <a:spcPct val="114000"/>
+              </a:lnSpc>
+              <a:buNone/>
+              <a:defRPr sz="1500" b="0" i="0">
+                <a:solidFill>
+                  <a:srgbClr val="667487"/>
+                </a:solidFill>
+                <a:latin typeface="Arial"/>
+                <a:ea typeface="Arial"/>
+                <a:cs typeface="Arial"/>
+              </a:defRPr>
+            </a:pPr>
+            <a:r>
+              <a:rPr sz="1500" b="0" i="0">
+                <a:solidFill>
+                  <a:srgbClr val="667487"/>
+                </a:solidFill>
+                <a:latin typeface="Arial"/>
+                <a:ea typeface="Arial"/>
+                <a:cs typeface="Arial"/>
+              </a:rPr>
+              <a:t>A response misses required cells, writes to the same cell twice or changes cells outside the target.</a:t>
+            </a:r>
+          </a:p>
+        </p:txBody>
+      </p:sp>
+      <p:sp>
+        <p:nvSpPr>
+          <p:cNvPr id="10" name="">
+            <a:extLst xmlns:a="http://schemas.openxmlformats.org/drawingml/2006/main">
+              <a:ext uri="{FF2B5EF4-FFF2-40B4-BE49-F238E27FC236}">
+                <a16:creationId xmlns:a16="http://schemas.microsoft.com/office/drawing/2014/main" id="{DB6DB6BC-2694-48F7-AD2F-E061B0F0C3AF}"/>
+              </a:ext>
+            </a:extLst>
+          </p:cNvPr>
+          <p:cNvSpPr>
+            <a:spLocks xmlns:a="http://schemas.openxmlformats.org/drawingml/2006/main" noGrp="1"/>
+          </p:cNvSpPr>
+          <p:nvPr/>
+        </p:nvSpPr>
+        <p:spPr>
+          <a:xfrm xmlns:a="http://schemas.openxmlformats.org/drawingml/2006/main">
+            <a:off x="5962650" y="1924050"/>
+            <a:ext cx="0" cy="2809875"/>
+          </a:xfrm>
+          <a:prstGeom xmlns:a="http://schemas.openxmlformats.org/drawingml/2006/main" prst="line">
+            <a:avLst/>
+          </a:prstGeom>
+          <a:noFill xmlns:a="http://schemas.openxmlformats.org/drawingml/2006/main"/>
+          <a:ln xmlns:a="http://schemas.openxmlformats.org/drawingml/2006/main" w="9525">
+            <a:solidFill>
+              <a:srgbClr val="C9D1D9"/>
+            </a:solidFill>
+            <a:prstDash val="solid"/>
+          </a:ln>
+        </p:spPr>
+      </p:sp>
+      <p:sp>
+        <p:nvSpPr>
+          <p:cNvPr id="11" name="">
+            <a:extLst xmlns:a="http://schemas.openxmlformats.org/drawingml/2006/main">
+              <a:ext uri="{FF2B5EF4-FFF2-40B4-BE49-F238E27FC236}">
+                <a16:creationId xmlns:a16="http://schemas.microsoft.com/office/drawing/2014/main" id="{C60D306E-04F3-4C4C-BC45-BD3C4A4B254A}"/>
+              </a:ext>
+            </a:extLst>
+          </p:cNvPr>
+          <p:cNvSpPr>
+            <a:spLocks xmlns:a="http://schemas.openxmlformats.org/drawingml/2006/main" noGrp="1"/>
+          </p:cNvSpPr>
+          <p:nvPr/>
+        </p:nvSpPr>
+        <p:spPr>
+          <a:xfrm xmlns:a="http://schemas.openxmlformats.org/drawingml/2006/main">
+            <a:off x="6172200" y="1952625"/>
+            <a:ext cx="857250" cy="495300"/>
+          </a:xfrm>
+          <a:prstGeom xmlns:a="http://schemas.openxmlformats.org/drawingml/2006/main" prst="rect">
+            <a:avLst/>
+          </a:prstGeom>
+          <a:noFill xmlns:a="http://schemas.openxmlformats.org/drawingml/2006/main"/>
+          <a:ln xmlns:a="http://schemas.openxmlformats.org/drawingml/2006/main" w="0">
+            <a:noFill/>
+          </a:ln>
+        </p:spPr>
+        <p:txBody>
+          <a:bodyPr xmlns:a="http://schemas.openxmlformats.org/drawingml/2006/main" wrap="square" lIns="0" tIns="0" rIns="0" bIns="0" anchor="t">
+            <a:normAutofit fontScale="100000"/>
+          </a:bodyPr>
+          <a:lstStyle xmlns:a="http://schemas.openxmlformats.org/drawingml/2006/main"/>
+          <a:p xmlns:a="http://schemas.openxmlformats.org/drawingml/2006/main">
+            <a:pPr algn="l">
+              <a:lnSpc>
+                <a:spcPct val="105000"/>
+              </a:lnSpc>
+              <a:buNone/>
+              <a:defRPr sz="2850" b="1" i="0">
+                <a:solidFill>
+                  <a:srgbClr val="35C47A"/>
+                </a:solidFill>
+                <a:latin typeface="Arial"/>
+                <a:ea typeface="Arial"/>
+                <a:cs typeface="Arial"/>
+              </a:defRPr>
+            </a:pPr>
+            <a:r>
+              <a:rPr sz="2850" b="1" i="0">
+                <a:solidFill>
+                  <a:srgbClr val="35C47A"/>
+                </a:solidFill>
+                <a:latin typeface="Arial"/>
+                <a:ea typeface="Arial"/>
+                <a:cs typeface="Arial"/>
+              </a:rPr>
+              <a:t>03</a:t>
+            </a:r>
+          </a:p>
+        </p:txBody>
+      </p:sp>
+      <p:sp>
+        <p:nvSpPr>
+          <p:cNvPr id="12" name="">
+            <a:extLst xmlns:a="http://schemas.openxmlformats.org/drawingml/2006/main">
+              <a:ext uri="{FF2B5EF4-FFF2-40B4-BE49-F238E27FC236}">
+                <a16:creationId xmlns:a16="http://schemas.microsoft.com/office/drawing/2014/main" id="{A8B8789A-9726-48A6-96F6-C141362D465A}"/>
+              </a:ext>
+            </a:extLst>
+          </p:cNvPr>
+          <p:cNvSpPr>
+            <a:spLocks xmlns:a="http://schemas.openxmlformats.org/drawingml/2006/main" noGrp="1"/>
+          </p:cNvSpPr>
+          <p:nvPr/>
+        </p:nvSpPr>
+        <p:spPr>
+          <a:xfrm xmlns:a="http://schemas.openxmlformats.org/drawingml/2006/main">
+            <a:off x="6172200" y="2647950"/>
+            <a:ext cx="2381250" cy="400050"/>
+          </a:xfrm>
+          <a:prstGeom xmlns:a="http://schemas.openxmlformats.org/drawingml/2006/main" prst="rect">
+            <a:avLst/>
+          </a:prstGeom>
+          <a:noFill xmlns:a="http://schemas.openxmlformats.org/drawingml/2006/main"/>
+          <a:ln xmlns:a="http://schemas.openxmlformats.org/drawingml/2006/main" w="0">
+            <a:noFill/>
+          </a:ln>
+        </p:spPr>
+        <p:txBody>
+          <a:bodyPr xmlns:a="http://schemas.openxmlformats.org/drawingml/2006/main" wrap="square" lIns="0" tIns="0" rIns="0" bIns="0" anchor="t">
+            <a:normAutofit fontScale="100000"/>
+          </a:bodyPr>
+          <a:lstStyle xmlns:a="http://schemas.openxmlformats.org/drawingml/2006/main"/>
+          <a:p xmlns:a="http://schemas.openxmlformats.org/drawingml/2006/main">
+            <a:pPr algn="l">
+              <a:lnSpc>
+                <a:spcPct val="105000"/>
+              </a:lnSpc>
+              <a:buNone/>
+              <a:defRPr sz="2025" b="1" i="0">
+                <a:solidFill>
+                  <a:srgbClr val="122033"/>
+                </a:solidFill>
+                <a:latin typeface="Arial"/>
+                <a:ea typeface="Arial"/>
+                <a:cs typeface="Arial"/>
+              </a:defRPr>
+            </a:pPr>
+            <a:r>
+              <a:rPr sz="2025" b="1" i="0">
+                <a:solidFill>
+                  <a:srgbClr val="122033"/>
+                </a:solidFill>
+                <a:latin typeface="Arial"/>
+                <a:ea typeface="Arial"/>
+                <a:cs typeface="Arial"/>
+              </a:rPr>
+              <a:t>Workbook</a:t>
+            </a:r>
+          </a:p>
+        </p:txBody>
+      </p:sp>
+      <p:sp>
+        <p:nvSpPr>
+          <p:cNvPr id="13" name="">
+            <a:extLst xmlns:a="http://schemas.openxmlformats.org/drawingml/2006/main">
+              <a:ext uri="{FF2B5EF4-FFF2-40B4-BE49-F238E27FC236}">
+                <a16:creationId xmlns:a16="http://schemas.microsoft.com/office/drawing/2014/main" id="{76881532-5096-4444-9B34-BCFB664757ED}"/>
+              </a:ext>
+            </a:extLst>
+          </p:cNvPr>
+          <p:cNvSpPr>
+            <a:spLocks xmlns:a="http://schemas.openxmlformats.org/drawingml/2006/main" noGrp="1"/>
+          </p:cNvSpPr>
+          <p:nvPr/>
+        </p:nvSpPr>
+        <p:spPr>
+          <a:xfrm xmlns:a="http://schemas.openxmlformats.org/drawingml/2006/main">
+            <a:off x="6172200" y="3209925"/>
+            <a:ext cx="2333625" cy="1381125"/>
+          </a:xfrm>
+          <a:prstGeom xmlns:a="http://schemas.openxmlformats.org/drawingml/2006/main" prst="rect">
+            <a:avLst/>
+          </a:prstGeom>
+          <a:noFill xmlns:a="http://schemas.openxmlformats.org/drawingml/2006/main"/>
+          <a:ln xmlns:a="http://schemas.openxmlformats.org/drawingml/2006/main" w="0">
+            <a:noFill/>
+          </a:ln>
+        </p:spPr>
+        <p:txBody>
+          <a:bodyPr xmlns:a="http://schemas.openxmlformats.org/drawingml/2006/main" wrap="square" lIns="0" tIns="0" rIns="0" bIns="0" anchor="t">
+            <a:normAutofit fontScale="100000"/>
+          </a:bodyPr>
+          <a:lstStyle xmlns:a="http://schemas.openxmlformats.org/drawingml/2006/main"/>
+          <a:p xmlns:a="http://schemas.openxmlformats.org/drawingml/2006/main">
+            <a:pPr algn="l">
+              <a:lnSpc>
+                <a:spcPct val="114000"/>
+              </a:lnSpc>
+              <a:buNone/>
+              <a:defRPr sz="1500" b="0" i="0">
+                <a:solidFill>
+                  <a:srgbClr val="667487"/>
+                </a:solidFill>
+                <a:latin typeface="Arial"/>
+                <a:ea typeface="Arial"/>
+                <a:cs typeface="Arial"/>
+              </a:defRPr>
+            </a:pPr>
+            <a:r>
+              <a:rPr sz="1500" b="0" i="0">
+                <a:solidFill>
+                  <a:srgbClr val="667487"/>
+                </a:solidFill>
+                <a:latin typeface="Arial"/>
+                <a:ea typeface="Arial"/>
+                <a:cs typeface="Arial"/>
+              </a:rPr>
+              <a:t>A formula introduces an unsafe reference, invalid type or broken workbook package.</a:t>
+            </a:r>
+          </a:p>
+        </p:txBody>
+      </p:sp>
+      <p:sp>
+        <p:nvSpPr>
+          <p:cNvPr id="14" name="">
+            <a:extLst xmlns:a="http://schemas.openxmlformats.org/drawingml/2006/main">
+              <a:ext uri="{FF2B5EF4-FFF2-40B4-BE49-F238E27FC236}">
+                <a16:creationId xmlns:a16="http://schemas.microsoft.com/office/drawing/2014/main" id="{6ACFEA42-B047-4483-8422-88539AECB32B}"/>
+              </a:ext>
+            </a:extLst>
+          </p:cNvPr>
+          <p:cNvSpPr>
+            <a:spLocks xmlns:a="http://schemas.openxmlformats.org/drawingml/2006/main" noGrp="1"/>
+          </p:cNvSpPr>
+          <p:nvPr/>
+        </p:nvSpPr>
+        <p:spPr>
+          <a:xfrm xmlns:a="http://schemas.openxmlformats.org/drawingml/2006/main">
+            <a:off x="8743950" y="1924050"/>
+            <a:ext cx="0" cy="2809875"/>
+          </a:xfrm>
+          <a:prstGeom xmlns:a="http://schemas.openxmlformats.org/drawingml/2006/main" prst="line">
+            <a:avLst/>
+          </a:prstGeom>
+          <a:noFill xmlns:a="http://schemas.openxmlformats.org/drawingml/2006/main"/>
+          <a:ln xmlns:a="http://schemas.openxmlformats.org/drawingml/2006/main" w="9525">
+            <a:solidFill>
+              <a:srgbClr val="C9D1D9"/>
+            </a:solidFill>
+            <a:prstDash val="solid"/>
+          </a:ln>
+        </p:spPr>
+      </p:sp>
+      <p:sp>
+        <p:nvSpPr>
+          <p:cNvPr id="15" name="">
+            <a:extLst xmlns:a="http://schemas.openxmlformats.org/drawingml/2006/main">
+              <a:ext uri="{FF2B5EF4-FFF2-40B4-BE49-F238E27FC236}">
+                <a16:creationId xmlns:a16="http://schemas.microsoft.com/office/drawing/2014/main" id="{C89FEA8D-48CD-4A0D-860D-416295135BC6}"/>
+              </a:ext>
+            </a:extLst>
+          </p:cNvPr>
+          <p:cNvSpPr>
+            <a:spLocks xmlns:a="http://schemas.openxmlformats.org/drawingml/2006/main" noGrp="1"/>
+          </p:cNvSpPr>
+          <p:nvPr/>
+        </p:nvSpPr>
+        <p:spPr>
+          <a:xfrm xmlns:a="http://schemas.openxmlformats.org/drawingml/2006/main">
+            <a:off x="8953500" y="1952625"/>
+            <a:ext cx="857250" cy="495300"/>
+          </a:xfrm>
+          <a:prstGeom xmlns:a="http://schemas.openxmlformats.org/drawingml/2006/main" prst="rect">
+            <a:avLst/>
+          </a:prstGeom>
+          <a:noFill xmlns:a="http://schemas.openxmlformats.org/drawingml/2006/main"/>
+          <a:ln xmlns:a="http://schemas.openxmlformats.org/drawingml/2006/main" w="0">
+            <a:noFill/>
+          </a:ln>
+        </p:spPr>
+        <p:txBody>
+          <a:bodyPr xmlns:a="http://schemas.openxmlformats.org/drawingml/2006/main" wrap="square" lIns="0" tIns="0" rIns="0" bIns="0" anchor="t">
+            <a:normAutofit fontScale="100000"/>
+          </a:bodyPr>
+          <a:lstStyle xmlns:a="http://schemas.openxmlformats.org/drawingml/2006/main"/>
+          <a:p xmlns:a="http://schemas.openxmlformats.org/drawingml/2006/main">
+            <a:pPr algn="l">
+              <a:lnSpc>
+                <a:spcPct val="105000"/>
+              </a:lnSpc>
+              <a:buNone/>
+              <a:defRPr sz="2850" b="1" i="0">
+                <a:solidFill>
+                  <a:srgbClr val="E76464"/>
+                </a:solidFill>
+                <a:latin typeface="Arial"/>
+                <a:ea typeface="Arial"/>
+                <a:cs typeface="Arial"/>
+              </a:defRPr>
+            </a:pPr>
+            <a:r>
+              <a:rPr sz="2850" b="1" i="0">
+                <a:solidFill>
+                  <a:srgbClr val="E76464"/>
+                </a:solidFill>
+                <a:latin typeface="Arial"/>
+                <a:ea typeface="Arial"/>
+                <a:cs typeface="Arial"/>
+              </a:rPr>
+              <a:t>04</a:t>
+            </a:r>
+          </a:p>
+        </p:txBody>
+      </p:sp>
+      <p:sp>
+        <p:nvSpPr>
+          <p:cNvPr id="16" name="">
+            <a:extLst xmlns:a="http://schemas.openxmlformats.org/drawingml/2006/main">
+              <a:ext uri="{FF2B5EF4-FFF2-40B4-BE49-F238E27FC236}">
+                <a16:creationId xmlns:a16="http://schemas.microsoft.com/office/drawing/2014/main" id="{05E53923-020B-4669-A6EF-5AD2CA115137}"/>
+              </a:ext>
+            </a:extLst>
+          </p:cNvPr>
+          <p:cNvSpPr>
+            <a:spLocks xmlns:a="http://schemas.openxmlformats.org/drawingml/2006/main" noGrp="1"/>
+          </p:cNvSpPr>
+          <p:nvPr/>
+        </p:nvSpPr>
+        <p:spPr>
+          <a:xfrm xmlns:a="http://schemas.openxmlformats.org/drawingml/2006/main">
+            <a:off x="8953500" y="2647950"/>
+            <a:ext cx="2381250" cy="400050"/>
+          </a:xfrm>
+          <a:prstGeom xmlns:a="http://schemas.openxmlformats.org/drawingml/2006/main" prst="rect">
+            <a:avLst/>
+          </a:prstGeom>
+          <a:noFill xmlns:a="http://schemas.openxmlformats.org/drawingml/2006/main"/>
+          <a:ln xmlns:a="http://schemas.openxmlformats.org/drawingml/2006/main" w="0">
+            <a:noFill/>
+          </a:ln>
+        </p:spPr>
+        <p:txBody>
+          <a:bodyPr xmlns:a="http://schemas.openxmlformats.org/drawingml/2006/main" wrap="square" lIns="0" tIns="0" rIns="0" bIns="0" anchor="t">
+            <a:normAutofit fontScale="100000"/>
+          </a:bodyPr>
+          <a:lstStyle xmlns:a="http://schemas.openxmlformats.org/drawingml/2006/main"/>
+          <a:p xmlns:a="http://schemas.openxmlformats.org/drawingml/2006/main">
+            <a:pPr algn="l">
+              <a:lnSpc>
+                <a:spcPct val="105000"/>
+              </a:lnSpc>
+              <a:buNone/>
+              <a:defRPr sz="2025" b="1" i="0">
+                <a:solidFill>
+                  <a:srgbClr val="122033"/>
+                </a:solidFill>
+                <a:latin typeface="Arial"/>
+                <a:ea typeface="Arial"/>
+                <a:cs typeface="Arial"/>
+              </a:defRPr>
+            </a:pPr>
+            <a:r>
+              <a:rPr sz="2025" b="1" i="0">
+                <a:solidFill>
+                  <a:srgbClr val="122033"/>
+                </a:solidFill>
+                <a:latin typeface="Arial"/>
+                <a:ea typeface="Arial"/>
+                <a:cs typeface="Arial"/>
+              </a:rPr>
+              <a:t>Semantics</a:t>
+            </a:r>
+          </a:p>
+        </p:txBody>
+      </p:sp>
+      <p:sp>
+        <p:nvSpPr>
+          <p:cNvPr id="17" name="">
+            <a:extLst xmlns:a="http://schemas.openxmlformats.org/drawingml/2006/main">
+              <a:ext uri="{FF2B5EF4-FFF2-40B4-BE49-F238E27FC236}">
+                <a16:creationId xmlns:a16="http://schemas.microsoft.com/office/drawing/2014/main" id="{494014A6-B315-418B-8709-457B2423FB3A}"/>
+              </a:ext>
+            </a:extLst>
+          </p:cNvPr>
+          <p:cNvSpPr>
+            <a:spLocks xmlns:a="http://schemas.openxmlformats.org/drawingml/2006/main" noGrp="1"/>
+          </p:cNvSpPr>
+          <p:nvPr/>
+        </p:nvSpPr>
+        <p:spPr>
+          <a:xfrm xmlns:a="http://schemas.openxmlformats.org/drawingml/2006/main">
+            <a:off x="8953500" y="3209925"/>
+            <a:ext cx="2333625" cy="1381125"/>
+          </a:xfrm>
+          <a:prstGeom xmlns:a="http://schemas.openxmlformats.org/drawingml/2006/main" prst="rect">
+            <a:avLst/>
+          </a:prstGeom>
+          <a:noFill xmlns:a="http://schemas.openxmlformats.org/drawingml/2006/main"/>
+          <a:ln xmlns:a="http://schemas.openxmlformats.org/drawingml/2006/main" w="0">
+            <a:noFill/>
+          </a:ln>
+        </p:spPr>
+        <p:txBody>
+          <a:bodyPr xmlns:a="http://schemas.openxmlformats.org/drawingml/2006/main" wrap="square" lIns="0" tIns="0" rIns="0" bIns="0" anchor="t">
+            <a:normAutofit fontScale="100000"/>
+          </a:bodyPr>
+          <a:lstStyle xmlns:a="http://schemas.openxmlformats.org/drawingml/2006/main"/>
+          <a:p xmlns:a="http://schemas.openxmlformats.org/drawingml/2006/main">
+            <a:pPr algn="l">
+              <a:lnSpc>
+                <a:spcPct val="114000"/>
+              </a:lnSpc>
+              <a:buNone/>
+              <a:defRPr sz="1500" b="0" i="0">
+                <a:solidFill>
+                  <a:srgbClr val="667487"/>
+                </a:solidFill>
+                <a:latin typeface="Arial"/>
+                <a:ea typeface="Arial"/>
+                <a:cs typeface="Arial"/>
+              </a:defRPr>
+            </a:pPr>
+            <a:r>
+              <a:rPr sz="1500" b="0" i="0">
+                <a:solidFill>
+                  <a:srgbClr val="667487"/>
+                </a:solidFill>
+                <a:latin typeface="Arial"/>
+                <a:ea typeface="Arial"/>
+                <a:cs typeface="Arial"/>
+              </a:rPr>
+              <a:t>The formula runs but returns the wrong value or applies the wrong transformation.</a:t>
+            </a:r>
+          </a:p>
+        </p:txBody>
+      </p:sp>
+      <p:sp>
+        <p:nvSpPr>
+          <p:cNvPr id="18" name="">
+            <a:extLst xmlns:a="http://schemas.openxmlformats.org/drawingml/2006/main">
+              <a:ext uri="{FF2B5EF4-FFF2-40B4-BE49-F238E27FC236}">
+                <a16:creationId xmlns:a16="http://schemas.microsoft.com/office/drawing/2014/main" id="{3D3025A3-7894-4B06-8839-5D1EDDAC2D7D}"/>
+              </a:ext>
+            </a:extLst>
+          </p:cNvPr>
+          <p:cNvSpPr>
+            <a:spLocks xmlns:a="http://schemas.openxmlformats.org/drawingml/2006/main" noGrp="1"/>
+          </p:cNvSpPr>
+          <p:nvPr/>
+        </p:nvSpPr>
+        <p:spPr>
+          <a:xfrm xmlns:a="http://schemas.openxmlformats.org/drawingml/2006/main">
+            <a:off x="609600" y="5191125"/>
+            <a:ext cx="10972800" cy="781050"/>
+          </a:xfrm>
+          <a:prstGeom xmlns:a="http://schemas.openxmlformats.org/drawingml/2006/main" prst="rect">
+            <a:avLst/>
+          </a:prstGeom>
+          <a:solidFill xmlns:a="http://schemas.openxmlformats.org/drawingml/2006/main">
+            <a:srgbClr val="0B172A"/>
+          </a:solidFill>
+          <a:ln xmlns:a="http://schemas.openxmlformats.org/drawingml/2006/main" w="0">
+            <a:noFill/>
+          </a:ln>
+        </p:spPr>
+      </p:sp>
+      <p:sp>
+        <p:nvSpPr>
+          <p:cNvPr id="19" name="">
+            <a:extLst xmlns:a="http://schemas.openxmlformats.org/drawingml/2006/main">
+              <a:ext uri="{FF2B5EF4-FFF2-40B4-BE49-F238E27FC236}">
+                <a16:creationId xmlns:a16="http://schemas.microsoft.com/office/drawing/2014/main" id="{BE20DAE9-3F7F-46A2-BCBF-21613A5A98EF}"/>
+              </a:ext>
+            </a:extLst>
+          </p:cNvPr>
+          <p:cNvSpPr>
+            <a:spLocks xmlns:a="http://schemas.openxmlformats.org/drawingml/2006/main" noGrp="1"/>
+          </p:cNvSpPr>
+          <p:nvPr/>
+        </p:nvSpPr>
+        <p:spPr>
+          <a:xfrm xmlns:a="http://schemas.openxmlformats.org/drawingml/2006/main">
+            <a:off x="895350" y="5381625"/>
+            <a:ext cx="10401300" cy="400050"/>
+          </a:xfrm>
+          <a:prstGeom xmlns:a="http://schemas.openxmlformats.org/drawingml/2006/main" prst="rect">
+            <a:avLst/>
+          </a:prstGeom>
+          <a:noFill xmlns:a="http://schemas.openxmlformats.org/drawingml/2006/main"/>
+          <a:ln xmlns:a="http://schemas.openxmlformats.org/drawingml/2006/main" w="0">
+            <a:noFill/>
+          </a:ln>
+        </p:spPr>
+        <p:txBody>
+          <a:bodyPr xmlns:a="http://schemas.openxmlformats.org/drawingml/2006/main" wrap="square" lIns="0" tIns="0" rIns="0" bIns="0" anchor="ctr">
+            <a:normAutofit fontScale="100000"/>
+          </a:bodyPr>
+          <a:lstStyle xmlns:a="http://schemas.openxmlformats.org/drawingml/2006/main"/>
+          <a:p xmlns:a="http://schemas.openxmlformats.org/drawingml/2006/main">
+            <a:pPr algn="l">
+              <a:lnSpc>
+                <a:spcPct val="105000"/>
+              </a:lnSpc>
+              <a:buNone/>
+              <a:defRPr sz="1875" b="1" i="0">
+                <a:solidFill>
+                  <a:srgbClr val="FFFFFF"/>
+                </a:solidFill>
+                <a:latin typeface="Arial"/>
+                <a:ea typeface="Arial"/>
+                <a:cs typeface="Arial"/>
+              </a:defRPr>
+            </a:pPr>
+            <a:r>
+              <a:rPr sz="1875" b="1" i="0">
+                <a:solidFill>
+                  <a:srgbClr val="FFFFFF"/>
+                </a:solidFill>
+                <a:latin typeface="Arial"/>
+                <a:ea typeface="Arial"/>
+                <a:cs typeface="Arial"/>
+              </a:rPr>
+              <a:t>Execution and correctness require separate checks.</a:t>
+            </a:r>
+          </a:p>
+        </p:txBody>
+      </p:sp>
+      <p:sp>
+        <p:nvSpPr>
+          <p:cNvPr id="20" name="">
+            <a:extLst xmlns:a="http://schemas.openxmlformats.org/drawingml/2006/main">
+              <a:ext uri="{FF2B5EF4-FFF2-40B4-BE49-F238E27FC236}">
+                <a16:creationId xmlns:a16="http://schemas.microsoft.com/office/drawing/2014/main" id="{1DC22FF3-5838-4ABE-B693-C0B92F8787F1}"/>
+              </a:ext>
+            </a:extLst>
+          </p:cNvPr>
+          <p:cNvSpPr>
+            <a:spLocks xmlns:a="http://schemas.openxmlformats.org/drawingml/2006/main" noGrp="1"/>
+          </p:cNvSpPr>
+          <p:nvPr/>
+        </p:nvSpPr>
+        <p:spPr>
+          <a:xfrm xmlns:a="http://schemas.openxmlformats.org/drawingml/2006/main">
+            <a:off x="609600" y="6429375"/>
+            <a:ext cx="10972800" cy="0"/>
+          </a:xfrm>
+          <a:prstGeom xmlns:a="http://schemas.openxmlformats.org/drawingml/2006/main" prst="line">
+            <a:avLst/>
+          </a:prstGeom>
+          <a:noFill xmlns:a="http://schemas.openxmlformats.org/drawingml/2006/main"/>
+          <a:ln xmlns:a="http://schemas.openxmlformats.org/drawingml/2006/main" w="9525">
+            <a:solidFill>
+              <a:srgbClr val="C9D1D9"/>
+            </a:solidFill>
+            <a:prstDash val="solid"/>
+          </a:ln>
+        </p:spPr>
+      </p:sp>
+      <p:sp>
+        <p:nvSpPr>
+          <p:cNvPr id="21" name="">
+            <a:extLst xmlns:a="http://schemas.openxmlformats.org/drawingml/2006/main">
+              <a:ext uri="{FF2B5EF4-FFF2-40B4-BE49-F238E27FC236}">
+                <a16:creationId xmlns:a16="http://schemas.microsoft.com/office/drawing/2014/main" id="{FD10FD6C-A936-49E1-944A-52A6E088535F}"/>
+              </a:ext>
+            </a:extLst>
+          </p:cNvPr>
+          <p:cNvSpPr>
+            <a:spLocks xmlns:a="http://schemas.openxmlformats.org/drawingml/2006/main" noGrp="1"/>
+          </p:cNvSpPr>
+          <p:nvPr/>
+        </p:nvSpPr>
+        <p:spPr>
+          <a:xfrm xmlns:a="http://schemas.openxmlformats.org/drawingml/2006/main">
+            <a:off x="609600" y="6553200"/>
+            <a:ext cx="6191250" cy="171450"/>
+          </a:xfrm>
+          <a:prstGeom xmlns:a="http://schemas.openxmlformats.org/drawingml/2006/main" prst="rect">
+            <a:avLst/>
+          </a:prstGeom>
+          <a:noFill xmlns:a="http://schemas.openxmlformats.org/drawingml/2006/main"/>
+          <a:ln xmlns:a="http://schemas.openxmlformats.org/drawingml/2006/main" w="0">
+            <a:noFill/>
+          </a:ln>
+        </p:spPr>
+        <p:txBody>
+          <a:bodyPr xmlns:a="http://schemas.openxmlformats.org/drawingml/2006/main" wrap="square" lIns="0" tIns="0" rIns="0" bIns="0" anchor="ctr">
+            <a:normAutofit fontScale="100000"/>
+          </a:bodyPr>
+          <a:lstStyle xmlns:a="http://schemas.openxmlformats.org/drawingml/2006/main"/>
+          <a:p xmlns:a="http://schemas.openxmlformats.org/drawingml/2006/main">
+            <a:pPr algn="l">
+              <a:lnSpc>
+                <a:spcPct val="105000"/>
+              </a:lnSpc>
+              <a:buNone/>
+              <a:defRPr sz="900" b="1" i="0">
+                <a:solidFill>
+                  <a:srgbClr val="667487"/>
+                </a:solidFill>
+                <a:latin typeface="Arial"/>
+                <a:ea typeface="Arial"/>
+                <a:cs typeface="Arial"/>
+              </a:defRPr>
+            </a:pPr>
+            <a:r>
+              <a:rPr sz="900" b="1" i="0">
+                <a:solidFill>
+                  <a:srgbClr val="667487"/>
+                </a:solidFill>
+                <a:latin typeface="Arial"/>
+                <a:ea typeface="Arial"/>
+                <a:cs typeface="Arial"/>
+              </a:rPr>
+              <a:t>FORMULABENCH  ·  RESEARCH: EXCEL FORMULA GENERATION</a:t>
+            </a:r>
+          </a:p>
+        </p:txBody>
+      </p:sp>
+      <p:sp>
+        <p:nvSpPr>
+          <p:cNvPr id="22" name="">
+            <a:extLst xmlns:a="http://schemas.openxmlformats.org/drawingml/2006/main">
+              <a:ext uri="{FF2B5EF4-FFF2-40B4-BE49-F238E27FC236}">
+                <a16:creationId xmlns:a16="http://schemas.microsoft.com/office/drawing/2014/main" id="{86FFBA89-1A4A-4C76-B05C-08C44CDBF4FE}"/>
+              </a:ext>
+            </a:extLst>
+          </p:cNvPr>
+          <p:cNvSpPr>
+            <a:spLocks xmlns:a="http://schemas.openxmlformats.org/drawingml/2006/main" noGrp="1"/>
+          </p:cNvSpPr>
+          <p:nvPr/>
+        </p:nvSpPr>
+        <p:spPr>
+          <a:xfrm xmlns:a="http://schemas.openxmlformats.org/drawingml/2006/main">
+            <a:off x="11049000" y="6553200"/>
+            <a:ext cx="533400" cy="171450"/>
+          </a:xfrm>
+          <a:prstGeom xmlns:a="http://schemas.openxmlformats.org/drawingml/2006/main" prst="rect">
+            <a:avLst/>
+          </a:prstGeom>
+          <a:noFill xmlns:a="http://schemas.openxmlformats.org/drawingml/2006/main"/>
+          <a:ln xmlns:a="http://schemas.openxmlformats.org/drawingml/2006/main" w="0">
+            <a:noFill/>
+          </a:ln>
+        </p:spPr>
+        <p:txBody>
+          <a:bodyPr xmlns:a="http://schemas.openxmlformats.org/drawingml/2006/main" wrap="square" lIns="0" tIns="0" rIns="0" bIns="0" anchor="ctr">
+            <a:normAutofit fontScale="100000"/>
+          </a:bodyPr>
+          <a:lstStyle xmlns:a="http://schemas.openxmlformats.org/drawingml/2006/main"/>
+          <a:p xmlns:a="http://schemas.openxmlformats.org/drawingml/2006/main">
+            <a:pPr algn="r">
+              <a:lnSpc>
+                <a:spcPct val="105000"/>
+              </a:lnSpc>
+              <a:buNone/>
+              <a:defRPr sz="900" b="1" i="0">
+                <a:solidFill>
+                  <a:srgbClr val="667487"/>
+                </a:solidFill>
+                <a:latin typeface="Arial"/>
+                <a:ea typeface="Arial"/>
+                <a:cs typeface="Arial"/>
+              </a:defRPr>
+            </a:pPr>
+            <a:r>
+              <a:rPr sz="900" b="1" i="0">
+                <a:solidFill>
+                  <a:srgbClr val="667487"/>
+                </a:solidFill>
+                <a:latin typeface="Arial"/>
+                <a:ea typeface="Arial"/>
+                <a:cs typeface="Arial"/>
+              </a:rPr>
+              <a:t>04</a:t>
+            </a:r>
+          </a:p>
+        </p:txBody>
+      </p:sp>
+    </p:spTree>
+    <p:extLst>
+      <p:ext uri="{BB962C8B-B14F-4D97-AF65-F5344CB8AC3E}">
+        <p14:creationId xmlns:p14="http://schemas.microsoft.com/office/powerpoint/2010/main" val="609196209"/>
+      </p:ext>
+    </p:extLst>
+  </p:cSld>
+</p:sld>
+</file>
+
+<file path=ppt/slides/slide5.xml><?xml version="1.0" encoding="utf-8"?>
 <p:sld xmlns:p="http://schemas.openxmlformats.org/presentationml/2006/main">
   <p:cSld>
     <p:bg>
@@ -4635,7 +6823,7 @@
           <p:cNvPr id="38" name="slide-title">
             <a:extLst xmlns:a="http://schemas.openxmlformats.org/drawingml/2006/main">
               <a:ext uri="{FF2B5EF4-FFF2-40B4-BE49-F238E27FC236}">
-                <a16:creationId xmlns:a16="http://schemas.microsoft.com/office/drawing/2014/main" id="{36D48C19-F651-434A-9ACA-DE3398088E3D}"/>
+                <a16:creationId xmlns:a16="http://schemas.microsoft.com/office/drawing/2014/main" id="{D3B9A5BB-84EE-4D77-9170-515F5643B881}"/>
               </a:ext>
             </a:extLst>
           </p:cNvPr>
@@ -4696,7 +6884,7 @@
           <p:cNvPr id="2" name="">
             <a:extLst xmlns:a="http://schemas.openxmlformats.org/drawingml/2006/main">
               <a:ext uri="{FF2B5EF4-FFF2-40B4-BE49-F238E27FC236}">
-                <a16:creationId xmlns:a16="http://schemas.microsoft.com/office/drawing/2014/main" id="{A75B172D-06CF-4C11-A5EC-C324DDB3CEA6}"/>
+                <a16:creationId xmlns:a16="http://schemas.microsoft.com/office/drawing/2014/main" id="{BA073F99-10A7-4CC8-AE06-5C51C821014B}"/>
               </a:ext>
             </a:extLst>
           </p:cNvPr>
@@ -4757,7 +6945,7 @@
           <p:cNvPr id="3" name="">
             <a:extLst xmlns:a="http://schemas.openxmlformats.org/drawingml/2006/main">
               <a:ext uri="{FF2B5EF4-FFF2-40B4-BE49-F238E27FC236}">
-                <a16:creationId xmlns:a16="http://schemas.microsoft.com/office/drawing/2014/main" id="{4C0F782E-2A74-4E90-945C-786A4A957DBF}"/>
+                <a16:creationId xmlns:a16="http://schemas.microsoft.com/office/drawing/2014/main" id="{101B6C22-B938-4C8F-8D93-134FB4258DFF}"/>
               </a:ext>
             </a:extLst>
           </p:cNvPr>
@@ -4818,7 +7006,7 @@
           <p:cNvPr id="4" name="">
             <a:extLst xmlns:a="http://schemas.openxmlformats.org/drawingml/2006/main">
               <a:ext uri="{FF2B5EF4-FFF2-40B4-BE49-F238E27FC236}">
-                <a16:creationId xmlns:a16="http://schemas.microsoft.com/office/drawing/2014/main" id="{29CD9124-735D-4D4B-B614-2CD9015D3DE3}"/>
+                <a16:creationId xmlns:a16="http://schemas.microsoft.com/office/drawing/2014/main" id="{F61DF7DD-643F-4E74-9539-AE645D9A806F}"/>
               </a:ext>
             </a:extLst>
           </p:cNvPr>
@@ -4849,7 +7037,7 @@
           <p:cNvPr id="5" name="">
             <a:extLst xmlns:a="http://schemas.openxmlformats.org/drawingml/2006/main">
               <a:ext uri="{FF2B5EF4-FFF2-40B4-BE49-F238E27FC236}">
-                <a16:creationId xmlns:a16="http://schemas.microsoft.com/office/drawing/2014/main" id="{1939C090-CCB8-4099-BCEB-FDADA38D8DF3}"/>
+                <a16:creationId xmlns:a16="http://schemas.microsoft.com/office/drawing/2014/main" id="{ADBE713A-4A6E-4319-AB80-3BD8050D647C}"/>
               </a:ext>
             </a:extLst>
           </p:cNvPr>
@@ -4910,7 +7098,7 @@
           <p:cNvPr id="6" name="">
             <a:extLst xmlns:a="http://schemas.openxmlformats.org/drawingml/2006/main">
               <a:ext uri="{FF2B5EF4-FFF2-40B4-BE49-F238E27FC236}">
-                <a16:creationId xmlns:a16="http://schemas.microsoft.com/office/drawing/2014/main" id="{1D8D54DB-AE53-495D-BE45-91DDB7F1C62A}"/>
+                <a16:creationId xmlns:a16="http://schemas.microsoft.com/office/drawing/2014/main" id="{A5DDA859-7599-4AE9-9505-66AA32262B5E}"/>
               </a:ext>
             </a:extLst>
           </p:cNvPr>
@@ -4941,7 +7129,7 @@
           <p:cNvPr id="7" name="">
             <a:extLst xmlns:a="http://schemas.openxmlformats.org/drawingml/2006/main">
               <a:ext uri="{FF2B5EF4-FFF2-40B4-BE49-F238E27FC236}">
-                <a16:creationId xmlns:a16="http://schemas.microsoft.com/office/drawing/2014/main" id="{0E0D8364-D03F-4634-917D-0E9FD060A08E}"/>
+                <a16:creationId xmlns:a16="http://schemas.microsoft.com/office/drawing/2014/main" id="{80EB59AD-1E9F-4F28-AAD6-5DCE8CD768C0}"/>
               </a:ext>
             </a:extLst>
           </p:cNvPr>
@@ -5002,7 +7190,7 @@
           <p:cNvPr id="8" name="">
             <a:extLst xmlns:a="http://schemas.openxmlformats.org/drawingml/2006/main">
               <a:ext uri="{FF2B5EF4-FFF2-40B4-BE49-F238E27FC236}">
-                <a16:creationId xmlns:a16="http://schemas.microsoft.com/office/drawing/2014/main" id="{A92FC325-A727-44B9-B846-2581FD948F7D}"/>
+                <a16:creationId xmlns:a16="http://schemas.microsoft.com/office/drawing/2014/main" id="{4F654BA4-AD9C-4293-A739-7169049FC874}"/>
               </a:ext>
             </a:extLst>
           </p:cNvPr>
@@ -5033,7 +7221,7 @@
           <p:cNvPr id="9" name="">
             <a:extLst xmlns:a="http://schemas.openxmlformats.org/drawingml/2006/main">
               <a:ext uri="{FF2B5EF4-FFF2-40B4-BE49-F238E27FC236}">
-                <a16:creationId xmlns:a16="http://schemas.microsoft.com/office/drawing/2014/main" id="{7EB73320-A9A0-4341-BF12-44DC8419426C}"/>
+                <a16:creationId xmlns:a16="http://schemas.microsoft.com/office/drawing/2014/main" id="{05D4C335-5A30-44A1-A739-BAE1428F0F59}"/>
               </a:ext>
             </a:extLst>
           </p:cNvPr>
@@ -5064,7 +7252,7 @@
           <p:cNvPr id="10" name="">
             <a:extLst xmlns:a="http://schemas.openxmlformats.org/drawingml/2006/main">
               <a:ext uri="{FF2B5EF4-FFF2-40B4-BE49-F238E27FC236}">
-                <a16:creationId xmlns:a16="http://schemas.microsoft.com/office/drawing/2014/main" id="{431542F5-FBF2-4D21-A322-95DDD55EECD8}"/>
+                <a16:creationId xmlns:a16="http://schemas.microsoft.com/office/drawing/2014/main" id="{3C2A35DF-588E-45EF-BFC2-9437F0E184FD}"/>
               </a:ext>
             </a:extLst>
           </p:cNvPr>
@@ -5125,7 +7313,7 @@
           <p:cNvPr id="11" name="">
             <a:extLst xmlns:a="http://schemas.openxmlformats.org/drawingml/2006/main">
               <a:ext uri="{FF2B5EF4-FFF2-40B4-BE49-F238E27FC236}">
-                <a16:creationId xmlns:a16="http://schemas.microsoft.com/office/drawing/2014/main" id="{C9F449A7-0BE2-4BD7-B96D-8F5B3B42EF3D}"/>
+                <a16:creationId xmlns:a16="http://schemas.microsoft.com/office/drawing/2014/main" id="{B23324FD-D77B-4406-AA14-39ACDE9BF528}"/>
               </a:ext>
             </a:extLst>
           </p:cNvPr>
@@ -5158,7 +7346,7 @@
           <p:cNvPr id="12" name="">
             <a:extLst xmlns:a="http://schemas.openxmlformats.org/drawingml/2006/main">
               <a:ext uri="{FF2B5EF4-FFF2-40B4-BE49-F238E27FC236}">
-                <a16:creationId xmlns:a16="http://schemas.microsoft.com/office/drawing/2014/main" id="{60807C9F-DB7A-4F32-BB79-0699EE8D4104}"/>
+                <a16:creationId xmlns:a16="http://schemas.microsoft.com/office/drawing/2014/main" id="{CC4F959D-6AF9-4BD6-B434-BD0CB502E4CB}"/>
               </a:ext>
             </a:extLst>
           </p:cNvPr>
@@ -5219,7 +7407,7 @@
           <p:cNvPr id="13" name="">
             <a:extLst xmlns:a="http://schemas.openxmlformats.org/drawingml/2006/main">
               <a:ext uri="{FF2B5EF4-FFF2-40B4-BE49-F238E27FC236}">
-                <a16:creationId xmlns:a16="http://schemas.microsoft.com/office/drawing/2014/main" id="{82DBEE2E-B345-4DC2-9A82-B80C4EB1CC4E}"/>
+                <a16:creationId xmlns:a16="http://schemas.microsoft.com/office/drawing/2014/main" id="{5C0D3AA0-6185-4C61-BE86-56A5F5A5D3B4}"/>
               </a:ext>
             </a:extLst>
           </p:cNvPr>
@@ -5280,7 +7468,7 @@
           <p:cNvPr id="14" name="">
             <a:extLst xmlns:a="http://schemas.openxmlformats.org/drawingml/2006/main">
               <a:ext uri="{FF2B5EF4-FFF2-40B4-BE49-F238E27FC236}">
-                <a16:creationId xmlns:a16="http://schemas.microsoft.com/office/drawing/2014/main" id="{62BE1403-4709-45C0-BBB3-E70BD3302BB8}"/>
+                <a16:creationId xmlns:a16="http://schemas.microsoft.com/office/drawing/2014/main" id="{3180DAA5-CF3A-4130-8B49-BDABD568D1AC}"/>
               </a:ext>
             </a:extLst>
           </p:cNvPr>
@@ -5313,7 +7501,7 @@
           <p:cNvPr id="15" name="">
             <a:extLst xmlns:a="http://schemas.openxmlformats.org/drawingml/2006/main">
               <a:ext uri="{FF2B5EF4-FFF2-40B4-BE49-F238E27FC236}">
-                <a16:creationId xmlns:a16="http://schemas.microsoft.com/office/drawing/2014/main" id="{2360E56A-996E-4861-B65B-0B11986E83BA}"/>
+                <a16:creationId xmlns:a16="http://schemas.microsoft.com/office/drawing/2014/main" id="{53968039-0495-4A4E-AEB1-72099E32AC87}"/>
               </a:ext>
             </a:extLst>
           </p:cNvPr>
@@ -5374,7 +7562,7 @@
           <p:cNvPr id="16" name="">
             <a:extLst xmlns:a="http://schemas.openxmlformats.org/drawingml/2006/main">
               <a:ext uri="{FF2B5EF4-FFF2-40B4-BE49-F238E27FC236}">
-                <a16:creationId xmlns:a16="http://schemas.microsoft.com/office/drawing/2014/main" id="{CB5B2108-03D4-4C3E-A62B-803097C5CA40}"/>
+                <a16:creationId xmlns:a16="http://schemas.microsoft.com/office/drawing/2014/main" id="{582D982E-B447-49E6-A1EB-A38E08E82659}"/>
               </a:ext>
             </a:extLst>
           </p:cNvPr>
@@ -5435,7 +7623,7 @@
           <p:cNvPr id="17" name="">
             <a:extLst xmlns:a="http://schemas.openxmlformats.org/drawingml/2006/main">
               <a:ext uri="{FF2B5EF4-FFF2-40B4-BE49-F238E27FC236}">
-                <a16:creationId xmlns:a16="http://schemas.microsoft.com/office/drawing/2014/main" id="{738F2C29-288F-4B27-888D-DEA78F273E82}"/>
+                <a16:creationId xmlns:a16="http://schemas.microsoft.com/office/drawing/2014/main" id="{CEB1229C-0BCC-4F84-9339-E2A466A479AD}"/>
               </a:ext>
             </a:extLst>
           </p:cNvPr>
@@ -5468,7 +7656,7 @@
           <p:cNvPr id="18" name="">
             <a:extLst xmlns:a="http://schemas.openxmlformats.org/drawingml/2006/main">
               <a:ext uri="{FF2B5EF4-FFF2-40B4-BE49-F238E27FC236}">
-                <a16:creationId xmlns:a16="http://schemas.microsoft.com/office/drawing/2014/main" id="{F62EFA87-1721-495C-82B1-5E282941E45F}"/>
+                <a16:creationId xmlns:a16="http://schemas.microsoft.com/office/drawing/2014/main" id="{1621EEC4-78E4-43FC-99F3-1C117DD4666A}"/>
               </a:ext>
             </a:extLst>
           </p:cNvPr>
@@ -5529,7 +7717,7 @@
           <p:cNvPr id="19" name="">
             <a:extLst xmlns:a="http://schemas.openxmlformats.org/drawingml/2006/main">
               <a:ext uri="{FF2B5EF4-FFF2-40B4-BE49-F238E27FC236}">
-                <a16:creationId xmlns:a16="http://schemas.microsoft.com/office/drawing/2014/main" id="{98C60C1B-7A43-4A61-AD10-069BDEE1A71C}"/>
+                <a16:creationId xmlns:a16="http://schemas.microsoft.com/office/drawing/2014/main" id="{9B684BAA-3C73-4332-9A32-3DB9B46E1BCC}"/>
               </a:ext>
             </a:extLst>
           </p:cNvPr>
@@ -5590,7 +7778,7 @@
           <p:cNvPr id="20" name="">
             <a:extLst xmlns:a="http://schemas.openxmlformats.org/drawingml/2006/main">
               <a:ext uri="{FF2B5EF4-FFF2-40B4-BE49-F238E27FC236}">
-                <a16:creationId xmlns:a16="http://schemas.microsoft.com/office/drawing/2014/main" id="{2B5D404B-E837-4B1A-A024-FEA9819F5AF9}"/>
+                <a16:creationId xmlns:a16="http://schemas.microsoft.com/office/drawing/2014/main" id="{8C3A1869-5229-47F5-AD8E-19EA4B648C17}"/>
               </a:ext>
             </a:extLst>
           </p:cNvPr>
@@ -5623,7 +7811,7 @@
           <p:cNvPr id="21" name="">
             <a:extLst xmlns:a="http://schemas.openxmlformats.org/drawingml/2006/main">
               <a:ext uri="{FF2B5EF4-FFF2-40B4-BE49-F238E27FC236}">
-                <a16:creationId xmlns:a16="http://schemas.microsoft.com/office/drawing/2014/main" id="{440E9091-F36E-449F-A066-473CE42B292D}"/>
+                <a16:creationId xmlns:a16="http://schemas.microsoft.com/office/drawing/2014/main" id="{888D304E-CB6B-410D-AC5A-7539C4807EF2}"/>
               </a:ext>
             </a:extLst>
           </p:cNvPr>
@@ -5684,7 +7872,7 @@
           <p:cNvPr id="22" name="">
             <a:extLst xmlns:a="http://schemas.openxmlformats.org/drawingml/2006/main">
               <a:ext uri="{FF2B5EF4-FFF2-40B4-BE49-F238E27FC236}">
-                <a16:creationId xmlns:a16="http://schemas.microsoft.com/office/drawing/2014/main" id="{342E4C87-3994-4504-B2EB-AB8789F598AB}"/>
+                <a16:creationId xmlns:a16="http://schemas.microsoft.com/office/drawing/2014/main" id="{371299F0-1C4A-4BB9-A39A-D0DA97443E56}"/>
               </a:ext>
             </a:extLst>
           </p:cNvPr>
@@ -5745,7 +7933,7 @@
           <p:cNvPr id="23" name="">
             <a:extLst xmlns:a="http://schemas.openxmlformats.org/drawingml/2006/main">
               <a:ext uri="{FF2B5EF4-FFF2-40B4-BE49-F238E27FC236}">
-                <a16:creationId xmlns:a16="http://schemas.microsoft.com/office/drawing/2014/main" id="{24979EC6-3652-477D-B43D-475C17519262}"/>
+                <a16:creationId xmlns:a16="http://schemas.microsoft.com/office/drawing/2014/main" id="{BA938434-F776-4807-9F90-60BC0EDD32EB}"/>
               </a:ext>
             </a:extLst>
           </p:cNvPr>
@@ -5778,7 +7966,7 @@
           <p:cNvPr id="24" name="">
             <a:extLst xmlns:a="http://schemas.openxmlformats.org/drawingml/2006/main">
               <a:ext uri="{FF2B5EF4-FFF2-40B4-BE49-F238E27FC236}">
-                <a16:creationId xmlns:a16="http://schemas.microsoft.com/office/drawing/2014/main" id="{7DD418EE-2B8F-4C6E-9196-A4AAFA5FA57C}"/>
+                <a16:creationId xmlns:a16="http://schemas.microsoft.com/office/drawing/2014/main" id="{86EB3A33-3513-451A-896F-CEEAE6A5DE92}"/>
               </a:ext>
             </a:extLst>
           </p:cNvPr>
@@ -5839,7 +8027,7 @@
           <p:cNvPr id="25" name="">
             <a:extLst xmlns:a="http://schemas.openxmlformats.org/drawingml/2006/main">
               <a:ext uri="{FF2B5EF4-FFF2-40B4-BE49-F238E27FC236}">
-                <a16:creationId xmlns:a16="http://schemas.microsoft.com/office/drawing/2014/main" id="{CA6FD4D4-1AD5-4E6A-A41F-7320B1171EB4}"/>
+                <a16:creationId xmlns:a16="http://schemas.microsoft.com/office/drawing/2014/main" id="{B30015B3-EFFA-49B5-AA6D-D6905BF1BADD}"/>
               </a:ext>
             </a:extLst>
           </p:cNvPr>
@@ -5870,7 +8058,7 @@
           <p:cNvPr id="26" name="">
             <a:extLst xmlns:a="http://schemas.openxmlformats.org/drawingml/2006/main">
               <a:ext uri="{FF2B5EF4-FFF2-40B4-BE49-F238E27FC236}">
-                <a16:creationId xmlns:a16="http://schemas.microsoft.com/office/drawing/2014/main" id="{8FE30956-287D-4473-9467-F58CD486F3DB}"/>
+                <a16:creationId xmlns:a16="http://schemas.microsoft.com/office/drawing/2014/main" id="{C9C9B8E0-4658-45AA-BBCA-36371AC4D0A5}"/>
               </a:ext>
             </a:extLst>
           </p:cNvPr>
@@ -5903,7 +8091,7 @@
           <p:cNvPr id="27" name="">
             <a:extLst xmlns:a="http://schemas.openxmlformats.org/drawingml/2006/main">
               <a:ext uri="{FF2B5EF4-FFF2-40B4-BE49-F238E27FC236}">
-                <a16:creationId xmlns:a16="http://schemas.microsoft.com/office/drawing/2014/main" id="{E96EA64F-ACFA-4453-9F48-6A2B21090821}"/>
+                <a16:creationId xmlns:a16="http://schemas.microsoft.com/office/drawing/2014/main" id="{B7FEF52E-0E20-467D-95BD-B987527A7727}"/>
               </a:ext>
             </a:extLst>
           </p:cNvPr>
@@ -5964,7 +8152,7 @@
           <p:cNvPr id="28" name="">
             <a:extLst xmlns:a="http://schemas.openxmlformats.org/drawingml/2006/main">
               <a:ext uri="{FF2B5EF4-FFF2-40B4-BE49-F238E27FC236}">
-                <a16:creationId xmlns:a16="http://schemas.microsoft.com/office/drawing/2014/main" id="{471710A1-64E1-4329-94C3-D79B370BAD18}"/>
+                <a16:creationId xmlns:a16="http://schemas.microsoft.com/office/drawing/2014/main" id="{A4CB5C76-959E-4283-944F-1D99600AD2BF}"/>
               </a:ext>
             </a:extLst>
           </p:cNvPr>
@@ -6025,7 +8213,7 @@
           <p:cNvPr id="29" name="">
             <a:extLst xmlns:a="http://schemas.openxmlformats.org/drawingml/2006/main">
               <a:ext uri="{FF2B5EF4-FFF2-40B4-BE49-F238E27FC236}">
-                <a16:creationId xmlns:a16="http://schemas.microsoft.com/office/drawing/2014/main" id="{FEC30898-6455-4F51-9BF6-E7AB2967EAE9}"/>
+                <a16:creationId xmlns:a16="http://schemas.microsoft.com/office/drawing/2014/main" id="{5AC9D953-2A9B-400F-BACD-71935BDDBCFB}"/>
               </a:ext>
             </a:extLst>
           </p:cNvPr>
@@ -6086,7 +8274,7 @@
           <p:cNvPr id="30" name="">
             <a:extLst xmlns:a="http://schemas.openxmlformats.org/drawingml/2006/main">
               <a:ext uri="{FF2B5EF4-FFF2-40B4-BE49-F238E27FC236}">
-                <a16:creationId xmlns:a16="http://schemas.microsoft.com/office/drawing/2014/main" id="{D8000DAC-8238-41A5-89D7-0ACA145C9FDE}"/>
+                <a16:creationId xmlns:a16="http://schemas.microsoft.com/office/drawing/2014/main" id="{5EF2CDEC-3D3D-4C12-8CFB-91EC98ABAF97}"/>
               </a:ext>
             </a:extLst>
           </p:cNvPr>
@@ -6117,7 +8305,7 @@
           <p:cNvPr id="31" name="">
             <a:extLst xmlns:a="http://schemas.openxmlformats.org/drawingml/2006/main">
               <a:ext uri="{FF2B5EF4-FFF2-40B4-BE49-F238E27FC236}">
-                <a16:creationId xmlns:a16="http://schemas.microsoft.com/office/drawing/2014/main" id="{E15137CD-98CE-4DAF-A75A-823150C8305E}"/>
+                <a16:creationId xmlns:a16="http://schemas.microsoft.com/office/drawing/2014/main" id="{AD9B9498-102E-4D9C-907F-EE7719017202}"/>
               </a:ext>
             </a:extLst>
           </p:cNvPr>
@@ -6178,7 +8366,7 @@
           <p:cNvPr id="32" name="">
             <a:extLst xmlns:a="http://schemas.openxmlformats.org/drawingml/2006/main">
               <a:ext uri="{FF2B5EF4-FFF2-40B4-BE49-F238E27FC236}">
-                <a16:creationId xmlns:a16="http://schemas.microsoft.com/office/drawing/2014/main" id="{5CB4AE01-085C-4F8B-A2E2-9759048B593D}"/>
+                <a16:creationId xmlns:a16="http://schemas.microsoft.com/office/drawing/2014/main" id="{71E040A4-1E72-46C1-91CE-60F5C103DB44}"/>
               </a:ext>
             </a:extLst>
           </p:cNvPr>
@@ -6239,7 +8427,7 @@
           <p:cNvPr id="33" name="">
             <a:extLst xmlns:a="http://schemas.openxmlformats.org/drawingml/2006/main">
               <a:ext uri="{FF2B5EF4-FFF2-40B4-BE49-F238E27FC236}">
-                <a16:creationId xmlns:a16="http://schemas.microsoft.com/office/drawing/2014/main" id="{09D68673-C09D-4380-BE4F-9A8DEFE4FE21}"/>
+                <a16:creationId xmlns:a16="http://schemas.microsoft.com/office/drawing/2014/main" id="{A399F2E4-9EFD-4413-8133-DE405878580C}"/>
               </a:ext>
             </a:extLst>
           </p:cNvPr>
@@ -6300,7 +8488,7 @@
           <p:cNvPr id="34" name="">
             <a:extLst xmlns:a="http://schemas.openxmlformats.org/drawingml/2006/main">
               <a:ext uri="{FF2B5EF4-FFF2-40B4-BE49-F238E27FC236}">
-                <a16:creationId xmlns:a16="http://schemas.microsoft.com/office/drawing/2014/main" id="{230A22F0-38B9-4F81-AED1-7705B0F5BC8D}"/>
+                <a16:creationId xmlns:a16="http://schemas.microsoft.com/office/drawing/2014/main" id="{2D1783A0-EBB2-45EA-8B83-419468778DAE}"/>
               </a:ext>
             </a:extLst>
           </p:cNvPr>
@@ -6361,7 +8549,7 @@
           <p:cNvPr id="35" name="">
             <a:extLst xmlns:a="http://schemas.openxmlformats.org/drawingml/2006/main">
               <a:ext uri="{FF2B5EF4-FFF2-40B4-BE49-F238E27FC236}">
-                <a16:creationId xmlns:a16="http://schemas.microsoft.com/office/drawing/2014/main" id="{595D6B36-7EBC-4BAD-AF76-944C04B65F39}"/>
+                <a16:creationId xmlns:a16="http://schemas.microsoft.com/office/drawing/2014/main" id="{CB1EA570-33D3-4183-9997-BCD88D5928CA}"/>
               </a:ext>
             </a:extLst>
           </p:cNvPr>
@@ -6392,7 +8580,7 @@
           <p:cNvPr id="36" name="">
             <a:extLst xmlns:a="http://schemas.openxmlformats.org/drawingml/2006/main">
               <a:ext uri="{FF2B5EF4-FFF2-40B4-BE49-F238E27FC236}">
-                <a16:creationId xmlns:a16="http://schemas.microsoft.com/office/drawing/2014/main" id="{E48237D5-F413-48BC-AEED-ACC7CD9045BB}"/>
+                <a16:creationId xmlns:a16="http://schemas.microsoft.com/office/drawing/2014/main" id="{B5B94D33-7ADE-44C0-B4ED-194AABCFD012}"/>
               </a:ext>
             </a:extLst>
           </p:cNvPr>
@@ -6453,7 +8641,7 @@
           <p:cNvPr id="37" name="">
             <a:extLst xmlns:a="http://schemas.openxmlformats.org/drawingml/2006/main">
               <a:ext uri="{FF2B5EF4-FFF2-40B4-BE49-F238E27FC236}">
-                <a16:creationId xmlns:a16="http://schemas.microsoft.com/office/drawing/2014/main" id="{1DD9EAAC-0ACA-495E-816A-93EC45B5E67C}"/>
+                <a16:creationId xmlns:a16="http://schemas.microsoft.com/office/drawing/2014/main" id="{A8B063AD-4857-477F-8657-BF75DD722CA7}"/>
               </a:ext>
             </a:extLst>
           </p:cNvPr>
@@ -6504,7 +8692,7 @@
                 <a:ea typeface="Arial"/>
                 <a:cs typeface="Arial"/>
               </a:rPr>
-              <a:t>04</a:t>
+              <a:t>05</a:t>
             </a:r>
           </a:p>
         </p:txBody>
@@ -6512,14 +8700,14 @@
     </p:spTree>
     <p:extLst>
       <p:ext uri="{BB962C8B-B14F-4D97-AF65-F5344CB8AC3E}">
-        <p14:creationId xmlns:p14="http://schemas.microsoft.com/office/powerpoint/2010/main" val="1399336237"/>
+        <p14:creationId xmlns:p14="http://schemas.microsoft.com/office/powerpoint/2010/main" val="799979415"/>
       </p:ext>
     </p:extLst>
   </p:cSld>
 </p:sld>
 </file>
 
-<file path=ppt/slides/slide5.xml><?xml version="1.0" encoding="utf-8"?>
+<file path=ppt/slides/slide6.xml><?xml version="1.0" encoding="utf-8"?>
 <p:sld xmlns:p="http://schemas.openxmlformats.org/presentationml/2006/main">
   <p:cSld>
     <p:bg>
@@ -6543,7 +8731,7 @@
           <p:cNvPr id="8" name="slide-title">
             <a:extLst xmlns:a="http://schemas.openxmlformats.org/drawingml/2006/main">
               <a:ext uri="{FF2B5EF4-FFF2-40B4-BE49-F238E27FC236}">
-                <a16:creationId xmlns:a16="http://schemas.microsoft.com/office/drawing/2014/main" id="{934DEE5C-EA7B-49BD-BA8B-FB886F715CC1}"/>
+                <a16:creationId xmlns:a16="http://schemas.microsoft.com/office/drawing/2014/main" id="{BA2B4B69-2B14-4010-9173-16AF7FBEFE1F}"/>
               </a:ext>
             </a:extLst>
           </p:cNvPr>
@@ -6604,7 +8792,7 @@
           <p:cNvPr id="2" name="">
             <a:extLst xmlns:a="http://schemas.openxmlformats.org/drawingml/2006/main">
               <a:ext uri="{FF2B5EF4-FFF2-40B4-BE49-F238E27FC236}">
-                <a16:creationId xmlns:a16="http://schemas.microsoft.com/office/drawing/2014/main" id="{1BA648A0-2155-4DAB-BC20-4E95F6A573B5}"/>
+                <a16:creationId xmlns:a16="http://schemas.microsoft.com/office/drawing/2014/main" id="{CBAA3E9A-C9EE-4D83-8A97-DADCC0CCBC39}"/>
               </a:ext>
             </a:extLst>
           </p:cNvPr>
@@ -7118,7 +9306,7 @@
           <p:cNvPr id="4" name="">
             <a:extLst xmlns:a="http://schemas.openxmlformats.org/drawingml/2006/main">
               <a:ext uri="{FF2B5EF4-FFF2-40B4-BE49-F238E27FC236}">
-                <a16:creationId xmlns:a16="http://schemas.microsoft.com/office/drawing/2014/main" id="{2B0003E5-CE5C-49BB-87D2-E502D8D40A39}"/>
+                <a16:creationId xmlns:a16="http://schemas.microsoft.com/office/drawing/2014/main" id="{D249BDD7-7BF2-4361-BA04-566AF0028F64}"/>
               </a:ext>
             </a:extLst>
           </p:cNvPr>
@@ -7179,7 +9367,7 @@
           <p:cNvPr id="5" name="">
             <a:extLst xmlns:a="http://schemas.openxmlformats.org/drawingml/2006/main">
               <a:ext uri="{FF2B5EF4-FFF2-40B4-BE49-F238E27FC236}">
-                <a16:creationId xmlns:a16="http://schemas.microsoft.com/office/drawing/2014/main" id="{DE1B28C0-A66D-426D-A731-C468B74DE1A9}"/>
+                <a16:creationId xmlns:a16="http://schemas.microsoft.com/office/drawing/2014/main" id="{E5D04F5D-F400-41F3-B4F1-9406B4B96CD7}"/>
               </a:ext>
             </a:extLst>
           </p:cNvPr>
@@ -7210,7 +9398,7 @@
           <p:cNvPr id="6" name="">
             <a:extLst xmlns:a="http://schemas.openxmlformats.org/drawingml/2006/main">
               <a:ext uri="{FF2B5EF4-FFF2-40B4-BE49-F238E27FC236}">
-                <a16:creationId xmlns:a16="http://schemas.microsoft.com/office/drawing/2014/main" id="{E9B17D3F-8DD2-4C95-BFD0-A507996C769A}"/>
+                <a16:creationId xmlns:a16="http://schemas.microsoft.com/office/drawing/2014/main" id="{630BF81D-B987-4FAD-9DE2-179BC70A5AC2}"/>
               </a:ext>
             </a:extLst>
           </p:cNvPr>
@@ -7271,7 +9459,7 @@
           <p:cNvPr id="7" name="">
             <a:extLst xmlns:a="http://schemas.openxmlformats.org/drawingml/2006/main">
               <a:ext uri="{FF2B5EF4-FFF2-40B4-BE49-F238E27FC236}">
-                <a16:creationId xmlns:a16="http://schemas.microsoft.com/office/drawing/2014/main" id="{C60F3EA8-AC59-4676-B447-9D67BEB2E05E}"/>
+                <a16:creationId xmlns:a16="http://schemas.microsoft.com/office/drawing/2014/main" id="{0FB5B7FC-A034-4357-8871-A00CBFFDD01A}"/>
               </a:ext>
             </a:extLst>
           </p:cNvPr>
@@ -7322,7 +9510,7 @@
                 <a:ea typeface="Arial"/>
                 <a:cs typeface="Arial"/>
               </a:rPr>
-              <a:t>05</a:t>
+              <a:t>06</a:t>
             </a:r>
           </a:p>
         </p:txBody>
@@ -7330,14 +9518,14 @@
     </p:spTree>
     <p:extLst>
       <p:ext uri="{BB962C8B-B14F-4D97-AF65-F5344CB8AC3E}">
-        <p14:creationId xmlns:p14="http://schemas.microsoft.com/office/powerpoint/2010/main" val="1619384628"/>
+        <p14:creationId xmlns:p14="http://schemas.microsoft.com/office/powerpoint/2010/main" val="783562058"/>
       </p:ext>
     </p:extLst>
   </p:cSld>
 </p:sld>
 </file>
 
-<file path=ppt/slides/slide6.xml><?xml version="1.0" encoding="utf-8"?>
+<file path=ppt/slides/slide7.xml><?xml version="1.0" encoding="utf-8"?>
 <p:sld xmlns:p="http://schemas.openxmlformats.org/presentationml/2006/main">
   <p:cSld>
     <p:bg>
@@ -7361,7 +9549,7 @@
           <p:cNvPr id="14" name="slide-title">
             <a:extLst xmlns:a="http://schemas.openxmlformats.org/drawingml/2006/main">
               <a:ext uri="{FF2B5EF4-FFF2-40B4-BE49-F238E27FC236}">
-                <a16:creationId xmlns:a16="http://schemas.microsoft.com/office/drawing/2014/main" id="{DC6E3B83-E3DB-4FAA-806F-0E6AA7EEF1A7}"/>
+                <a16:creationId xmlns:a16="http://schemas.microsoft.com/office/drawing/2014/main" id="{6BA0E079-20B0-4A0A-A657-62BF5338D093}"/>
               </a:ext>
             </a:extLst>
           </p:cNvPr>
@@ -7422,7 +9610,7 @@
           <p:cNvPr id="2" name="">
             <a:extLst xmlns:a="http://schemas.openxmlformats.org/drawingml/2006/main">
               <a:ext uri="{FF2B5EF4-FFF2-40B4-BE49-F238E27FC236}">
-                <a16:creationId xmlns:a16="http://schemas.microsoft.com/office/drawing/2014/main" id="{1C7E72CD-5C12-4A6B-BCA2-27972ED9FB81}"/>
+                <a16:creationId xmlns:a16="http://schemas.microsoft.com/office/drawing/2014/main" id="{0301302A-5B19-4279-BFB4-99FBD58321D8}"/>
               </a:ext>
             </a:extLst>
           </p:cNvPr>
@@ -7490,7 +9678,7 @@
         </p:xfrm>
         <a:graphic xmlns:a="http://schemas.openxmlformats.org/drawingml/2006/main">
           <a:graphicData uri="http://schemas.openxmlformats.org/drawingml/2006/chart">
-            <c:chart xmlns:r="http://schemas.openxmlformats.org/officeDocument/2006/relationships" xmlns:c="http://schemas.openxmlformats.org/drawingml/2006/chart" r:id="R2b47a07c53524778"/>
+            <c:chart xmlns:r="http://schemas.openxmlformats.org/officeDocument/2006/relationships" xmlns:c="http://schemas.openxmlformats.org/drawingml/2006/chart" r:id="Rd162a2d01d1242bb"/>
           </a:graphicData>
         </a:graphic>
       </p:graphicFrame>
@@ -7499,7 +9687,7 @@
           <p:cNvPr id="4" name="">
             <a:extLst xmlns:a="http://schemas.openxmlformats.org/drawingml/2006/main">
               <a:ext uri="{FF2B5EF4-FFF2-40B4-BE49-F238E27FC236}">
-                <a16:creationId xmlns:a16="http://schemas.microsoft.com/office/drawing/2014/main" id="{A3372F17-8199-49AA-8B13-B91399BB793A}"/>
+                <a16:creationId xmlns:a16="http://schemas.microsoft.com/office/drawing/2014/main" id="{724F25AE-E40C-424A-97F6-618F2C4B40D8}"/>
               </a:ext>
             </a:extLst>
           </p:cNvPr>
@@ -7560,7 +9748,7 @@
           <p:cNvPr id="5" name="">
             <a:extLst xmlns:a="http://schemas.openxmlformats.org/drawingml/2006/main">
               <a:ext uri="{FF2B5EF4-FFF2-40B4-BE49-F238E27FC236}">
-                <a16:creationId xmlns:a16="http://schemas.microsoft.com/office/drawing/2014/main" id="{D421D889-C2DB-4D44-ABDC-FBACC738B478}"/>
+                <a16:creationId xmlns:a16="http://schemas.microsoft.com/office/drawing/2014/main" id="{5C7D75D3-5F30-4128-BAF9-61B4199731FB}"/>
               </a:ext>
             </a:extLst>
           </p:cNvPr>
@@ -7621,7 +9809,7 @@
           <p:cNvPr id="6" name="">
             <a:extLst xmlns:a="http://schemas.openxmlformats.org/drawingml/2006/main">
               <a:ext uri="{FF2B5EF4-FFF2-40B4-BE49-F238E27FC236}">
-                <a16:creationId xmlns:a16="http://schemas.microsoft.com/office/drawing/2014/main" id="{57315F70-C7F7-4BAA-B1DC-FADDF3F484C9}"/>
+                <a16:creationId xmlns:a16="http://schemas.microsoft.com/office/drawing/2014/main" id="{3C253810-270A-4B36-99E8-71F56CC8AFAC}"/>
               </a:ext>
             </a:extLst>
           </p:cNvPr>
@@ -7652,7 +9840,7 @@
           <p:cNvPr id="7" name="">
             <a:extLst xmlns:a="http://schemas.openxmlformats.org/drawingml/2006/main">
               <a:ext uri="{FF2B5EF4-FFF2-40B4-BE49-F238E27FC236}">
-                <a16:creationId xmlns:a16="http://schemas.microsoft.com/office/drawing/2014/main" id="{A4E65CEF-485B-42AF-9C4C-0D79EF3A0EA8}"/>
+                <a16:creationId xmlns:a16="http://schemas.microsoft.com/office/drawing/2014/main" id="{B8B6C8D1-ED23-4309-9D77-8DC619C28B42}"/>
               </a:ext>
             </a:extLst>
           </p:cNvPr>
@@ -7713,7 +9901,7 @@
           <p:cNvPr id="8" name="">
             <a:extLst xmlns:a="http://schemas.openxmlformats.org/drawingml/2006/main">
               <a:ext uri="{FF2B5EF4-FFF2-40B4-BE49-F238E27FC236}">
-                <a16:creationId xmlns:a16="http://schemas.microsoft.com/office/drawing/2014/main" id="{F80BD622-B39D-4D66-8464-CF2AA968D01E}"/>
+                <a16:creationId xmlns:a16="http://schemas.microsoft.com/office/drawing/2014/main" id="{0284628E-E2DA-49D2-9263-90F96BAD57E0}"/>
               </a:ext>
             </a:extLst>
           </p:cNvPr>
@@ -7774,7 +9962,7 @@
           <p:cNvPr id="9" name="">
             <a:extLst xmlns:a="http://schemas.openxmlformats.org/drawingml/2006/main">
               <a:ext uri="{FF2B5EF4-FFF2-40B4-BE49-F238E27FC236}">
-                <a16:creationId xmlns:a16="http://schemas.microsoft.com/office/drawing/2014/main" id="{D20203A2-725B-43BF-A61E-F6374AA3AE5E}"/>
+                <a16:creationId xmlns:a16="http://schemas.microsoft.com/office/drawing/2014/main" id="{88D8A265-179B-419B-A235-2A07042AFF38}"/>
               </a:ext>
             </a:extLst>
           </p:cNvPr>
@@ -7862,7 +10050,7 @@
           <p:cNvPr id="10" name="">
             <a:extLst xmlns:a="http://schemas.openxmlformats.org/drawingml/2006/main">
               <a:ext uri="{FF2B5EF4-FFF2-40B4-BE49-F238E27FC236}">
-                <a16:creationId xmlns:a16="http://schemas.microsoft.com/office/drawing/2014/main" id="{EA9FEF13-27A2-4740-8025-D7245E4701C4}"/>
+                <a16:creationId xmlns:a16="http://schemas.microsoft.com/office/drawing/2014/main" id="{92BEA625-333C-4EC1-B51B-C55978949192}"/>
               </a:ext>
             </a:extLst>
           </p:cNvPr>
@@ -7923,7 +10111,7 @@
           <p:cNvPr id="11" name="">
             <a:extLst xmlns:a="http://schemas.openxmlformats.org/drawingml/2006/main">
               <a:ext uri="{FF2B5EF4-FFF2-40B4-BE49-F238E27FC236}">
-                <a16:creationId xmlns:a16="http://schemas.microsoft.com/office/drawing/2014/main" id="{B1EFD6A5-ADE2-4E35-9C07-39007C5C7E25}"/>
+                <a16:creationId xmlns:a16="http://schemas.microsoft.com/office/drawing/2014/main" id="{C496E950-743A-4575-A810-DC6A75393A8B}"/>
               </a:ext>
             </a:extLst>
           </p:cNvPr>
@@ -7954,7 +10142,7 @@
           <p:cNvPr id="12" name="">
             <a:extLst xmlns:a="http://schemas.openxmlformats.org/drawingml/2006/main">
               <a:ext uri="{FF2B5EF4-FFF2-40B4-BE49-F238E27FC236}">
-                <a16:creationId xmlns:a16="http://schemas.microsoft.com/office/drawing/2014/main" id="{1E288709-6F7B-44B1-AE89-70DC61AB0F6B}"/>
+                <a16:creationId xmlns:a16="http://schemas.microsoft.com/office/drawing/2014/main" id="{BF90E3CB-7011-497B-971A-73FD1E2D783C}"/>
               </a:ext>
             </a:extLst>
           </p:cNvPr>
@@ -8015,7 +10203,7 @@
           <p:cNvPr id="13" name="">
             <a:extLst xmlns:a="http://schemas.openxmlformats.org/drawingml/2006/main">
               <a:ext uri="{FF2B5EF4-FFF2-40B4-BE49-F238E27FC236}">
-                <a16:creationId xmlns:a16="http://schemas.microsoft.com/office/drawing/2014/main" id="{73057E85-8DA4-471C-9F41-899173D0E632}"/>
+                <a16:creationId xmlns:a16="http://schemas.microsoft.com/office/drawing/2014/main" id="{0B597B8B-A1B5-4850-9F16-D0D8627EC7FB}"/>
               </a:ext>
             </a:extLst>
           </p:cNvPr>
@@ -8066,7 +10254,7 @@
                 <a:ea typeface="Arial"/>
                 <a:cs typeface="Arial"/>
               </a:rPr>
-              <a:t>06</a:t>
+              <a:t>07</a:t>
             </a:r>
           </a:p>
         </p:txBody>
@@ -8074,14 +10262,14 @@
     </p:spTree>
     <p:extLst>
       <p:ext uri="{BB962C8B-B14F-4D97-AF65-F5344CB8AC3E}">
-        <p14:creationId xmlns:p14="http://schemas.microsoft.com/office/powerpoint/2010/main" val="1249322482"/>
+        <p14:creationId xmlns:p14="http://schemas.microsoft.com/office/powerpoint/2010/main" val="9237507"/>
       </p:ext>
     </p:extLst>
   </p:cSld>
 </p:sld>
 </file>
 
-<file path=ppt/slides/slide7.xml><?xml version="1.0" encoding="utf-8"?>
+<file path=ppt/slides/slide8.xml><?xml version="1.0" encoding="utf-8"?>
 <p:sld xmlns:p="http://schemas.openxmlformats.org/presentationml/2006/main">
   <p:cSld>
     <p:bg>
@@ -8105,7 +10293,7 @@
           <p:cNvPr id="12" name="slide-title">
             <a:extLst xmlns:a="http://schemas.openxmlformats.org/drawingml/2006/main">
               <a:ext uri="{FF2B5EF4-FFF2-40B4-BE49-F238E27FC236}">
-                <a16:creationId xmlns:a16="http://schemas.microsoft.com/office/drawing/2014/main" id="{DFE1E83B-8D21-4930-A3D0-6EEF84CD8C42}"/>
+                <a16:creationId xmlns:a16="http://schemas.microsoft.com/office/drawing/2014/main" id="{4B35C9B4-3CEB-4A37-B45F-0FA69A39EC73}"/>
               </a:ext>
             </a:extLst>
           </p:cNvPr>
@@ -8166,7 +10354,7 @@
           <p:cNvPr id="2" name="">
             <a:extLst xmlns:a="http://schemas.openxmlformats.org/drawingml/2006/main">
               <a:ext uri="{FF2B5EF4-FFF2-40B4-BE49-F238E27FC236}">
-                <a16:creationId xmlns:a16="http://schemas.microsoft.com/office/drawing/2014/main" id="{B322269D-9905-40E3-A2B1-74F1F7A18347}"/>
+                <a16:creationId xmlns:a16="http://schemas.microsoft.com/office/drawing/2014/main" id="{EB27B178-5AA8-4C1E-BABB-648FED027789}"/>
               </a:ext>
             </a:extLst>
           </p:cNvPr>
@@ -8227,7 +10415,7 @@
           <p:cNvPr id="3" name="">
             <a:extLst xmlns:a="http://schemas.openxmlformats.org/drawingml/2006/main">
               <a:ext uri="{FF2B5EF4-FFF2-40B4-BE49-F238E27FC236}">
-                <a16:creationId xmlns:a16="http://schemas.microsoft.com/office/drawing/2014/main" id="{89C9DDF3-D769-437C-8367-306F4C7BD2EB}"/>
+                <a16:creationId xmlns:a16="http://schemas.microsoft.com/office/drawing/2014/main" id="{611030AB-EDE3-48A5-B0D9-EF75CE5D666D}"/>
               </a:ext>
             </a:extLst>
           </p:cNvPr>
@@ -8288,7 +10476,7 @@
           <p:cNvPr id="4" name="">
             <a:extLst xmlns:a="http://schemas.openxmlformats.org/drawingml/2006/main">
               <a:ext uri="{FF2B5EF4-FFF2-40B4-BE49-F238E27FC236}">
-                <a16:creationId xmlns:a16="http://schemas.microsoft.com/office/drawing/2014/main" id="{AE0AB10A-5FA5-4032-81ED-0A5E6626C16C}"/>
+                <a16:creationId xmlns:a16="http://schemas.microsoft.com/office/drawing/2014/main" id="{7C1C79A5-9215-4F18-9899-FA9464CF711F}"/>
               </a:ext>
             </a:extLst>
           </p:cNvPr>
@@ -8349,7 +10537,7 @@
           <p:cNvPr id="5" name="">
             <a:extLst xmlns:a="http://schemas.openxmlformats.org/drawingml/2006/main">
               <a:ext uri="{FF2B5EF4-FFF2-40B4-BE49-F238E27FC236}">
-                <a16:creationId xmlns:a16="http://schemas.microsoft.com/office/drawing/2014/main" id="{03EA3DA6-0217-4F2E-BA23-E82E4BEA3500}"/>
+                <a16:creationId xmlns:a16="http://schemas.microsoft.com/office/drawing/2014/main" id="{92EE4C25-5B0B-4042-988D-0DEE0C3EFABA}"/>
               </a:ext>
             </a:extLst>
           </p:cNvPr>
@@ -8410,7 +10598,7 @@
           <p:cNvPr id="6" name="">
             <a:extLst xmlns:a="http://schemas.openxmlformats.org/drawingml/2006/main">
               <a:ext uri="{FF2B5EF4-FFF2-40B4-BE49-F238E27FC236}">
-                <a16:creationId xmlns:a16="http://schemas.microsoft.com/office/drawing/2014/main" id="{0CE6B10D-ED0F-48C3-A678-C6E9C614D5CB}"/>
+                <a16:creationId xmlns:a16="http://schemas.microsoft.com/office/drawing/2014/main" id="{D9D32856-885D-48DF-B297-105B0A5EA270}"/>
               </a:ext>
             </a:extLst>
           </p:cNvPr>
@@ -8813,7 +11001,7 @@
           <p:cNvPr id="8" name="">
             <a:extLst xmlns:a="http://schemas.openxmlformats.org/drawingml/2006/main">
               <a:ext uri="{FF2B5EF4-FFF2-40B4-BE49-F238E27FC236}">
-                <a16:creationId xmlns:a16="http://schemas.microsoft.com/office/drawing/2014/main" id="{018592E5-FC3F-4CD4-98ED-AFC5A9F5C172}"/>
+                <a16:creationId xmlns:a16="http://schemas.microsoft.com/office/drawing/2014/main" id="{4CF31E7F-7A1F-4096-8A19-C1D7DCD13DA2}"/>
               </a:ext>
             </a:extLst>
           </p:cNvPr>
@@ -8874,7 +11062,7 @@
           <p:cNvPr id="9" name="">
             <a:extLst xmlns:a="http://schemas.openxmlformats.org/drawingml/2006/main">
               <a:ext uri="{FF2B5EF4-FFF2-40B4-BE49-F238E27FC236}">
-                <a16:creationId xmlns:a16="http://schemas.microsoft.com/office/drawing/2014/main" id="{706E6AC8-7968-4ACB-819A-D0F9FF0312A9}"/>
+                <a16:creationId xmlns:a16="http://schemas.microsoft.com/office/drawing/2014/main" id="{69BDE0DC-4906-411E-AB9C-4B2DC49F777F}"/>
               </a:ext>
             </a:extLst>
           </p:cNvPr>
@@ -8905,7 +11093,7 @@
           <p:cNvPr id="10" name="">
             <a:extLst xmlns:a="http://schemas.openxmlformats.org/drawingml/2006/main">
               <a:ext uri="{FF2B5EF4-FFF2-40B4-BE49-F238E27FC236}">
-                <a16:creationId xmlns:a16="http://schemas.microsoft.com/office/drawing/2014/main" id="{402767B0-9FFF-4422-A227-A297136FB9DF}"/>
+                <a16:creationId xmlns:a16="http://schemas.microsoft.com/office/drawing/2014/main" id="{F72269B2-9D34-4E4F-ADBC-D8EB35AF1247}"/>
               </a:ext>
             </a:extLst>
           </p:cNvPr>
@@ -8966,7 +11154,7 @@
           <p:cNvPr id="11" name="">
             <a:extLst xmlns:a="http://schemas.openxmlformats.org/drawingml/2006/main">
               <a:ext uri="{FF2B5EF4-FFF2-40B4-BE49-F238E27FC236}">
-                <a16:creationId xmlns:a16="http://schemas.microsoft.com/office/drawing/2014/main" id="{E7CE1994-53C0-46EE-A963-379B83991A12}"/>
+                <a16:creationId xmlns:a16="http://schemas.microsoft.com/office/drawing/2014/main" id="{C0C94ABD-966D-4070-9FEB-F5844281093C}"/>
               </a:ext>
             </a:extLst>
           </p:cNvPr>
@@ -9017,7 +11205,7 @@
                 <a:ea typeface="Arial"/>
                 <a:cs typeface="Arial"/>
               </a:rPr>
-              <a:t>07</a:t>
+              <a:t>08</a:t>
             </a:r>
           </a:p>
         </p:txBody>
@@ -9025,14 +11213,14 @@
     </p:spTree>
     <p:extLst>
       <p:ext uri="{BB962C8B-B14F-4D97-AF65-F5344CB8AC3E}">
-        <p14:creationId xmlns:p14="http://schemas.microsoft.com/office/powerpoint/2010/main" val="354737023"/>
+        <p14:creationId xmlns:p14="http://schemas.microsoft.com/office/powerpoint/2010/main" val="459674730"/>
       </p:ext>
     </p:extLst>
   </p:cSld>
 </p:sld>
 </file>
 
-<file path=ppt/slides/slide8.xml><?xml version="1.0" encoding="utf-8"?>
+<file path=ppt/slides/slide9.xml><?xml version="1.0" encoding="utf-8"?>
 <p:sld xmlns:p="http://schemas.openxmlformats.org/presentationml/2006/main">
   <p:cSld>
     <p:bg>
@@ -9056,7 +11244,7 @@
           <p:cNvPr id="19" name="slide-title">
             <a:extLst xmlns:a="http://schemas.openxmlformats.org/drawingml/2006/main">
               <a:ext uri="{FF2B5EF4-FFF2-40B4-BE49-F238E27FC236}">
-                <a16:creationId xmlns:a16="http://schemas.microsoft.com/office/drawing/2014/main" id="{B85F2B5B-2F92-444C-9059-DD30139634C1}"/>
+                <a16:creationId xmlns:a16="http://schemas.microsoft.com/office/drawing/2014/main" id="{452435BA-8D26-4F9F-A637-04F1E844610A}"/>
               </a:ext>
             </a:extLst>
           </p:cNvPr>
@@ -9117,7 +11305,7 @@
           <p:cNvPr id="2" name="">
             <a:extLst xmlns:a="http://schemas.openxmlformats.org/drawingml/2006/main">
               <a:ext uri="{FF2B5EF4-FFF2-40B4-BE49-F238E27FC236}">
-                <a16:creationId xmlns:a16="http://schemas.microsoft.com/office/drawing/2014/main" id="{A1B9B555-8C3B-40B2-AFC8-BB74EBB127F6}"/>
+                <a16:creationId xmlns:a16="http://schemas.microsoft.com/office/drawing/2014/main" id="{3B8EB7C5-05C4-4BE4-9DD0-2FCBC85CB28D}"/>
               </a:ext>
             </a:extLst>
           </p:cNvPr>
@@ -9178,7 +11366,7 @@
           <p:cNvPr id="3" name="">
             <a:extLst xmlns:a="http://schemas.openxmlformats.org/drawingml/2006/main">
               <a:ext uri="{FF2B5EF4-FFF2-40B4-BE49-F238E27FC236}">
-                <a16:creationId xmlns:a16="http://schemas.microsoft.com/office/drawing/2014/main" id="{5D52CE17-52EF-4F05-A714-1DC55B7B2D80}"/>
+                <a16:creationId xmlns:a16="http://schemas.microsoft.com/office/drawing/2014/main" id="{4C6C8621-286A-4792-B277-5B7FAFCCF3D6}"/>
               </a:ext>
             </a:extLst>
           </p:cNvPr>
@@ -9239,7 +11427,7 @@
           <p:cNvPr id="4" name="">
             <a:extLst xmlns:a="http://schemas.openxmlformats.org/drawingml/2006/main">
               <a:ext uri="{FF2B5EF4-FFF2-40B4-BE49-F238E27FC236}">
-                <a16:creationId xmlns:a16="http://schemas.microsoft.com/office/drawing/2014/main" id="{1412B786-E45E-435A-B244-1BB31E44AAF8}"/>
+                <a16:creationId xmlns:a16="http://schemas.microsoft.com/office/drawing/2014/main" id="{B5C18451-9BF4-48D7-B27B-D2BF4CC93AE2}"/>
               </a:ext>
             </a:extLst>
           </p:cNvPr>
@@ -9300,7 +11488,7 @@
           <p:cNvPr id="5" name="">
             <a:extLst xmlns:a="http://schemas.openxmlformats.org/drawingml/2006/main">
               <a:ext uri="{FF2B5EF4-FFF2-40B4-BE49-F238E27FC236}">
-                <a16:creationId xmlns:a16="http://schemas.microsoft.com/office/drawing/2014/main" id="{DC6F234E-086B-4E8C-A5FC-3A6C46BBF626}"/>
+                <a16:creationId xmlns:a16="http://schemas.microsoft.com/office/drawing/2014/main" id="{265FE762-091A-4EF9-A94E-02A9215BF1DF}"/>
               </a:ext>
             </a:extLst>
           </p:cNvPr>
@@ -9361,7 +11549,7 @@
           <p:cNvPr id="6" name="">
             <a:extLst xmlns:a="http://schemas.openxmlformats.org/drawingml/2006/main">
               <a:ext uri="{FF2B5EF4-FFF2-40B4-BE49-F238E27FC236}">
-                <a16:creationId xmlns:a16="http://schemas.microsoft.com/office/drawing/2014/main" id="{A0EB96B4-7D0A-4B4A-89AE-A2EFAA74A3E7}"/>
+                <a16:creationId xmlns:a16="http://schemas.microsoft.com/office/drawing/2014/main" id="{4D3FCC90-8556-40B3-BE26-F2B8791C35CF}"/>
               </a:ext>
             </a:extLst>
           </p:cNvPr>
@@ -9422,7 +11610,7 @@
           <p:cNvPr id="7" name="">
             <a:extLst xmlns:a="http://schemas.openxmlformats.org/drawingml/2006/main">
               <a:ext uri="{FF2B5EF4-FFF2-40B4-BE49-F238E27FC236}">
-                <a16:creationId xmlns:a16="http://schemas.microsoft.com/office/drawing/2014/main" id="{19454D9E-0F26-48E2-B297-692A646E4951}"/>
+                <a16:creationId xmlns:a16="http://schemas.microsoft.com/office/drawing/2014/main" id="{17B08DBD-D05C-4E46-B986-735EEFEF7326}"/>
               </a:ext>
             </a:extLst>
           </p:cNvPr>
@@ -9483,7 +11671,7 @@
           <p:cNvPr id="8" name="">
             <a:extLst xmlns:a="http://schemas.openxmlformats.org/drawingml/2006/main">
               <a:ext uri="{FF2B5EF4-FFF2-40B4-BE49-F238E27FC236}">
-                <a16:creationId xmlns:a16="http://schemas.microsoft.com/office/drawing/2014/main" id="{AF69C495-F4E2-4C48-99B2-ECB3A19938A0}"/>
+                <a16:creationId xmlns:a16="http://schemas.microsoft.com/office/drawing/2014/main" id="{7976EF26-728D-465D-AE61-A9A4790D29B7}"/>
               </a:ext>
             </a:extLst>
           </p:cNvPr>
@@ -9544,7 +11732,7 @@
           <p:cNvPr id="9" name="">
             <a:extLst xmlns:a="http://schemas.openxmlformats.org/drawingml/2006/main">
               <a:ext uri="{FF2B5EF4-FFF2-40B4-BE49-F238E27FC236}">
-                <a16:creationId xmlns:a16="http://schemas.microsoft.com/office/drawing/2014/main" id="{FA6A3CD3-9B02-4B97-B286-6B94626DB036}"/>
+                <a16:creationId xmlns:a16="http://schemas.microsoft.com/office/drawing/2014/main" id="{4A0A6A51-F750-42C1-B30C-30531F55EB9C}"/>
               </a:ext>
             </a:extLst>
           </p:cNvPr>
@@ -9575,7 +11763,7 @@
           <p:cNvPr id="10" name="">
             <a:extLst xmlns:a="http://schemas.openxmlformats.org/drawingml/2006/main">
               <a:ext uri="{FF2B5EF4-FFF2-40B4-BE49-F238E27FC236}">
-                <a16:creationId xmlns:a16="http://schemas.microsoft.com/office/drawing/2014/main" id="{CB851B38-55DE-469A-BB1C-F3A6B1B6C832}"/>
+                <a16:creationId xmlns:a16="http://schemas.microsoft.com/office/drawing/2014/main" id="{C27C803C-05E5-4F6F-99E5-BEA2ABB5F8BA}"/>
               </a:ext>
             </a:extLst>
           </p:cNvPr>
@@ -9608,7 +11796,7 @@
           <p:cNvPr id="11" name="">
             <a:extLst xmlns:a="http://schemas.openxmlformats.org/drawingml/2006/main">
               <a:ext uri="{FF2B5EF4-FFF2-40B4-BE49-F238E27FC236}">
-                <a16:creationId xmlns:a16="http://schemas.microsoft.com/office/drawing/2014/main" id="{BD8D9F8C-5547-4FB6-8A0E-E03F45C8E7F1}"/>
+                <a16:creationId xmlns:a16="http://schemas.microsoft.com/office/drawing/2014/main" id="{CEAEE07B-2893-412F-A923-1EB0B53CA510}"/>
               </a:ext>
             </a:extLst>
           </p:cNvPr>
@@ -9669,7 +11857,7 @@
           <p:cNvPr id="12" name="">
             <a:extLst xmlns:a="http://schemas.openxmlformats.org/drawingml/2006/main">
               <a:ext uri="{FF2B5EF4-FFF2-40B4-BE49-F238E27FC236}">
-                <a16:creationId xmlns:a16="http://schemas.microsoft.com/office/drawing/2014/main" id="{8A78137C-4D72-453E-A4DB-1A1B189F36D9}"/>
+                <a16:creationId xmlns:a16="http://schemas.microsoft.com/office/drawing/2014/main" id="{0FFF0FBF-4B00-4D8A-9F3A-1D607A30B64F}"/>
               </a:ext>
             </a:extLst>
           </p:cNvPr>
@@ -9719,7 +11907,7 @@
                 <a:latin typeface="Arial"/>
                 <a:ea typeface="Arial"/>
                 <a:cs typeface="Arial"/>
-                <a:hlinkClick xmlns:r="http://schemas.openxmlformats.org/officeDocument/2006/relationships" r:id="R5577c945197f498f"/>
+                <a:hlinkClick xmlns:r="http://schemas.openxmlformats.org/officeDocument/2006/relationships" r:id="R5d377faf54854c65"/>
               </a:rPr>
               <a:t>masterasnackin.github.io/FormulaBench/</a:t>
             </a:r>
@@ -9731,7 +11919,7 @@
           <p:cNvPr id="13" name="">
             <a:extLst xmlns:a="http://schemas.openxmlformats.org/drawingml/2006/main">
               <a:ext uri="{FF2B5EF4-FFF2-40B4-BE49-F238E27FC236}">
-                <a16:creationId xmlns:a16="http://schemas.microsoft.com/office/drawing/2014/main" id="{2045F149-FA9A-4396-B4C6-9EE3D9D6E718}"/>
+                <a16:creationId xmlns:a16="http://schemas.microsoft.com/office/drawing/2014/main" id="{13A365F8-1658-4D42-85D7-E12F633B7654}"/>
               </a:ext>
             </a:extLst>
           </p:cNvPr>
@@ -9792,7 +11980,7 @@
           <p:cNvPr id="14" name="">
             <a:extLst xmlns:a="http://schemas.openxmlformats.org/drawingml/2006/main">
               <a:ext uri="{FF2B5EF4-FFF2-40B4-BE49-F238E27FC236}">
-                <a16:creationId xmlns:a16="http://schemas.microsoft.com/office/drawing/2014/main" id="{01BE25ED-5DCD-40C0-A36B-C0AB99FED33A}"/>
+                <a16:creationId xmlns:a16="http://schemas.microsoft.com/office/drawing/2014/main" id="{73E54F95-53FF-44C0-BA28-20C7F943BD98}"/>
               </a:ext>
             </a:extLst>
           </p:cNvPr>
@@ -9842,7 +12030,7 @@
                 <a:latin typeface="Arial"/>
                 <a:ea typeface="Arial"/>
                 <a:cs typeface="Arial"/>
-                <a:hlinkClick xmlns:r="http://schemas.openxmlformats.org/officeDocument/2006/relationships" r:id="R59c6d52320114778"/>
+                <a:hlinkClick xmlns:r="http://schemas.openxmlformats.org/officeDocument/2006/relationships" r:id="R8750e96bf4884b43"/>
               </a:rPr>
               <a:t>github.com/MasteraSnackin/FormulaBench</a:t>
             </a:r>
@@ -9854,7 +12042,7 @@
           <p:cNvPr id="15" name="">
             <a:extLst xmlns:a="http://schemas.openxmlformats.org/drawingml/2006/main">
               <a:ext uri="{FF2B5EF4-FFF2-40B4-BE49-F238E27FC236}">
-                <a16:creationId xmlns:a16="http://schemas.microsoft.com/office/drawing/2014/main" id="{EEB8171D-727A-435E-9B77-B44B5E700A22}"/>
+                <a16:creationId xmlns:a16="http://schemas.microsoft.com/office/drawing/2014/main" id="{EB05174A-A6F9-41A4-92FA-FCD1F41E10EC}"/>
               </a:ext>
             </a:extLst>
           </p:cNvPr>
@@ -9915,7 +12103,7 @@
           <p:cNvPr id="16" name="">
             <a:extLst xmlns:a="http://schemas.openxmlformats.org/drawingml/2006/main">
               <a:ext uri="{FF2B5EF4-FFF2-40B4-BE49-F238E27FC236}">
-                <a16:creationId xmlns:a16="http://schemas.microsoft.com/office/drawing/2014/main" id="{860CDF5C-FAB4-4570-AC7A-239ABCAA7514}"/>
+                <a16:creationId xmlns:a16="http://schemas.microsoft.com/office/drawing/2014/main" id="{0968B974-B0F5-4407-9C64-D6F15BCCD2B2}"/>
               </a:ext>
             </a:extLst>
           </p:cNvPr>
@@ -9946,7 +12134,7 @@
           <p:cNvPr id="17" name="">
             <a:extLst xmlns:a="http://schemas.openxmlformats.org/drawingml/2006/main">
               <a:ext uri="{FF2B5EF4-FFF2-40B4-BE49-F238E27FC236}">
-                <a16:creationId xmlns:a16="http://schemas.microsoft.com/office/drawing/2014/main" id="{7411D65B-2D1B-42DC-BEFB-DABDC02F01F5}"/>
+                <a16:creationId xmlns:a16="http://schemas.microsoft.com/office/drawing/2014/main" id="{94CF7A9D-E580-44A3-8155-0C34EDE680C3}"/>
               </a:ext>
             </a:extLst>
           </p:cNvPr>
@@ -10007,7 +12195,7 @@
           <p:cNvPr id="18" name="">
             <a:extLst xmlns:a="http://schemas.openxmlformats.org/drawingml/2006/main">
               <a:ext uri="{FF2B5EF4-FFF2-40B4-BE49-F238E27FC236}">
-                <a16:creationId xmlns:a16="http://schemas.microsoft.com/office/drawing/2014/main" id="{AE48A1B2-6F53-46C6-9931-A1792C35A024}"/>
+                <a16:creationId xmlns:a16="http://schemas.microsoft.com/office/drawing/2014/main" id="{D9C62D9F-0DE4-459E-8AD8-8E1D7C093A12}"/>
               </a:ext>
             </a:extLst>
           </p:cNvPr>
@@ -10058,7 +12246,7 @@
                 <a:ea typeface="Arial"/>
                 <a:cs typeface="Arial"/>
               </a:rPr>
-              <a:t>08</a:t>
+              <a:t>09</a:t>
             </a:r>
           </a:p>
         </p:txBody>
@@ -10066,7 +12254,7 @@
     </p:spTree>
     <p:extLst>
       <p:ext uri="{BB962C8B-B14F-4D97-AF65-F5344CB8AC3E}">
-        <p14:creationId xmlns:p14="http://schemas.microsoft.com/office/powerpoint/2010/main" val="364689557"/>
+        <p14:creationId xmlns:p14="http://schemas.microsoft.com/office/powerpoint/2010/main" val="1683226110"/>
       </p:ext>
     </p:extLst>
   </p:cSld>

--- a/docs/assets/FormulaBench-Hackathon-Deck.pptx
+++ b/docs/assets/FormulaBench-Hackathon-Deck.pptx
@@ -2,21 +2,23 @@
 <file path=ppt/presentation.xml><?xml version="1.0" encoding="utf-8"?>
 <p:presentation xmlns:p="http://schemas.openxmlformats.org/presentationml/2006/main">
   <p:sldMasterIdLst>
-    <p:sldMasterId xmlns:r="http://schemas.openxmlformats.org/officeDocument/2006/relationships" id="2147483648" r:id="R60848d6e66464db1"/>
+    <p:sldMasterId xmlns:r="http://schemas.openxmlformats.org/officeDocument/2006/relationships" id="2147483648" r:id="Rea4e17ec57aa4aef"/>
   </p:sldMasterIdLst>
   <p:notesMasterIdLst>
-    <p:notesMasterId xmlns:r="http://schemas.openxmlformats.org/officeDocument/2006/relationships" r:id="R6ef1be90408e4596"/>
+    <p:notesMasterId xmlns:r="http://schemas.openxmlformats.org/officeDocument/2006/relationships" r:id="R2b9379f6bb854a7a"/>
   </p:notesMasterIdLst>
   <p:sldIdLst>
-    <p:sldId xmlns:r="http://schemas.openxmlformats.org/officeDocument/2006/relationships" id="256" r:id="Rb31a972dd3124a7c"/>
-    <p:sldId xmlns:r="http://schemas.openxmlformats.org/officeDocument/2006/relationships" id="257" r:id="Ra8fc8fdbd7dc4597"/>
-    <p:sldId xmlns:r="http://schemas.openxmlformats.org/officeDocument/2006/relationships" id="258" r:id="R57162401946647da"/>
-    <p:sldId xmlns:r="http://schemas.openxmlformats.org/officeDocument/2006/relationships" id="259" r:id="Reb2f85c0803f4eae"/>
-    <p:sldId xmlns:r="http://schemas.openxmlformats.org/officeDocument/2006/relationships" id="260" r:id="R23b0bf1cca194d03"/>
-    <p:sldId xmlns:r="http://schemas.openxmlformats.org/officeDocument/2006/relationships" id="261" r:id="R094d4ca0ebb14c5a"/>
-    <p:sldId xmlns:r="http://schemas.openxmlformats.org/officeDocument/2006/relationships" id="262" r:id="R1e59e1bcd9bd4908"/>
-    <p:sldId xmlns:r="http://schemas.openxmlformats.org/officeDocument/2006/relationships" id="263" r:id="R76a82655c90f4ed9"/>
-    <p:sldId xmlns:r="http://schemas.openxmlformats.org/officeDocument/2006/relationships" id="264" r:id="R2a4c50aa42f74c7b"/>
+    <p:sldId xmlns:r="http://schemas.openxmlformats.org/officeDocument/2006/relationships" id="256" r:id="R41fd84988a554578"/>
+    <p:sldId xmlns:r="http://schemas.openxmlformats.org/officeDocument/2006/relationships" id="257" r:id="R3dba0081c83341d1"/>
+    <p:sldId xmlns:r="http://schemas.openxmlformats.org/officeDocument/2006/relationships" id="258" r:id="Rca81b2286c944989"/>
+    <p:sldId xmlns:r="http://schemas.openxmlformats.org/officeDocument/2006/relationships" id="259" r:id="Rc9d884b58d454097"/>
+    <p:sldId xmlns:r="http://schemas.openxmlformats.org/officeDocument/2006/relationships" id="260" r:id="R7127218277134565"/>
+    <p:sldId xmlns:r="http://schemas.openxmlformats.org/officeDocument/2006/relationships" id="261" r:id="R229ed7c731c645c9"/>
+    <p:sldId xmlns:r="http://schemas.openxmlformats.org/officeDocument/2006/relationships" id="262" r:id="R0bdc8bb6f4f045e1"/>
+    <p:sldId xmlns:r="http://schemas.openxmlformats.org/officeDocument/2006/relationships" id="263" r:id="R013a95f7857f4642"/>
+    <p:sldId xmlns:r="http://schemas.openxmlformats.org/officeDocument/2006/relationships" id="264" r:id="Rb7b670394023491d"/>
+    <p:sldId xmlns:r="http://schemas.openxmlformats.org/officeDocument/2006/relationships" id="265" r:id="R12a863c9adca43bc"/>
+    <p:sldId xmlns:r="http://schemas.openxmlformats.org/officeDocument/2006/relationships" id="266" r:id="R7113deacb5f345b7"/>
   </p:sldIdLst>
   <p:sldSz cx="12192000" cy="6858000"/>
   <p:notesSz cx="6858000" cy="9144000"/>
@@ -500,6 +502,201 @@
 </p:notes>
 </file>
 
+<file path=ppt/notesSlides/notesSlide10.xml><?xml version="1.0" encoding="utf-8"?>
+<p:notes xmlns:p="http://schemas.openxmlformats.org/presentationml/2006/main">
+  <p:cSld>
+    <p:spTree>
+      <p:nvGrpSpPr>
+        <p:cNvPr id="1" name=""/>
+        <p:cNvGrpSpPr/>
+        <p:nvPr/>
+      </p:nvGrpSpPr>
+      <p:grpSpPr>
+        <a:xfrm xmlns:a="http://schemas.openxmlformats.org/drawingml/2006/main"/>
+      </p:grpSpPr>
+      <p:sp>
+        <p:nvSpPr>
+          <p:cNvPr id="2" name="Slide Image Placeholder 1"/>
+          <p:cNvSpPr>
+            <a:spLocks xmlns:a="http://schemas.openxmlformats.org/drawingml/2006/main" noGrp="1"/>
+          </p:cNvSpPr>
+          <p:nvPr>
+            <p:ph type="sldImg" idx="0"/>
+          </p:nvPr>
+        </p:nvSpPr>
+        <p:spPr/>
+      </p:sp>
+      <p:sp>
+        <p:nvSpPr>
+          <p:cNvPr id="3" name="Notes Placeholder 2"/>
+          <p:cNvSpPr>
+            <a:spLocks xmlns:a="http://schemas.openxmlformats.org/drawingml/2006/main" noGrp="1"/>
+          </p:cNvSpPr>
+          <p:nvPr>
+            <p:ph type="body" idx="1"/>
+          </p:nvPr>
+        </p:nvSpPr>
+        <p:spPr/>
+        <p:txBody>
+          <a:bodyPr xmlns:a="http://schemas.openxmlformats.org/drawingml/2006/main"/>
+          <a:lstStyle xmlns:a="http://schemas.openxmlformats.org/drawingml/2006/main"/>
+          <a:p xmlns:a="http://schemas.openxmlformats.org/drawingml/2006/main">
+            <a:r>
+              <a:t>Sources:</a:t>
+            </a:r>
+          </a:p>
+          <a:p xmlns:a="http://schemas.openxmlformats.org/drawingml/2006/main">
+            <a:r>
+              <a:t>experiments/tinker_lora_validation.json</a:t>
+            </a:r>
+          </a:p>
+          <a:p xmlns:a="http://schemas.openxmlformats.org/drawingml/2006/main">
+            <a:r>
+              <a:t>https://masterasnackin.github.io/FormulaBench/#tinker</a:t>
+            </a:r>
+          </a:p>
+          <a:p xmlns:a="http://schemas.openxmlformats.org/drawingml/2006/main">
+            <a:r>
+              <a:t>Controlled development-validation result: base 7/15 tasks and 432/582 cells; LoRA 9/15 tasks and 449/582 cells. Pass rate increased by 13.33 percentage points and cell accuracy increased by 2.92 percentage points.</a:t>
+            </a:r>
+          </a:p>
+          <a:p xmlns:a="http://schemas.openxmlformats.org/drawingml/2006/main">
+            <a:r>
+              <a:t>The base arm accepted 14/15 predictions and had one fail-closed workbook-write error whose unchanged fallback remained gradeable. The LoRA arm accepted 15/15. Both arms had zero evaluator errors.</a:t>
+            </a:r>
+          </a:p>
+          <a:p xmlns:a="http://schemas.openxmlformats.org/drawingml/2006/main">
+            <a:r>
+              <a:t>Three tasks changed from fail to pass and one changed from pass to fail. Both arms used one sample per task. Six development examples over 500 target cells were excluded before the split.</a:t>
+            </a:r>
+          </a:p>
+          <a:p xmlns:a="http://schemas.openxmlformats.org/drawingml/2006/main">
+            <a:r>
+              <a:t>This result was used for checkpoint selection. It does not replace the frozen 400-task score and does not prove generalisation.</a:t>
+            </a:r>
+          </a:p>
+        </p:txBody>
+      </p:sp>
+      <p:sp>
+        <p:nvSpPr>
+          <p:cNvPr id="4" name="Slide Number Placeholder 3"/>
+          <p:cNvSpPr>
+            <a:spLocks xmlns:a="http://schemas.openxmlformats.org/drawingml/2006/main" noGrp="1"/>
+          </p:cNvSpPr>
+          <p:nvPr>
+            <p:ph type="sldNum" idx="5"/>
+          </p:nvPr>
+        </p:nvSpPr>
+        <p:spPr/>
+        <p:txBody>
+          <a:bodyPr xmlns:a="http://schemas.openxmlformats.org/drawingml/2006/main"/>
+          <a:lstStyle xmlns:a="http://schemas.openxmlformats.org/drawingml/2006/main"/>
+          <a:p xmlns:a="http://schemas.openxmlformats.org/drawingml/2006/main"/>
+        </p:txBody>
+      </p:sp>
+    </p:spTree>
+  </p:cSld>
+  <p:clrMapOvr>
+    <a:masterClrMapping xmlns:a="http://schemas.openxmlformats.org/drawingml/2006/main"/>
+  </p:clrMapOvr>
+</p:notes>
+</file>
+
+<file path=ppt/notesSlides/notesSlide11.xml><?xml version="1.0" encoding="utf-8"?>
+<p:notes xmlns:p="http://schemas.openxmlformats.org/presentationml/2006/main">
+  <p:cSld>
+    <p:spTree>
+      <p:nvGrpSpPr>
+        <p:cNvPr id="1" name=""/>
+        <p:cNvGrpSpPr/>
+        <p:nvPr/>
+      </p:nvGrpSpPr>
+      <p:grpSpPr>
+        <a:xfrm xmlns:a="http://schemas.openxmlformats.org/drawingml/2006/main"/>
+      </p:grpSpPr>
+      <p:sp>
+        <p:nvSpPr>
+          <p:cNvPr id="2" name="Slide Image Placeholder 1"/>
+          <p:cNvSpPr>
+            <a:spLocks xmlns:a="http://schemas.openxmlformats.org/drawingml/2006/main" noGrp="1"/>
+          </p:cNvSpPr>
+          <p:nvPr>
+            <p:ph type="sldImg" idx="0"/>
+          </p:nvPr>
+        </p:nvSpPr>
+        <p:spPr/>
+      </p:sp>
+      <p:sp>
+        <p:nvSpPr>
+          <p:cNvPr id="3" name="Notes Placeholder 2"/>
+          <p:cNvSpPr>
+            <a:spLocks xmlns:a="http://schemas.openxmlformats.org/drawingml/2006/main" noGrp="1"/>
+          </p:cNvSpPr>
+          <p:nvPr>
+            <p:ph type="body" idx="1"/>
+          </p:nvPr>
+        </p:nvSpPr>
+        <p:spPr/>
+        <p:txBody>
+          <a:bodyPr xmlns:a="http://schemas.openxmlformats.org/drawingml/2006/main"/>
+          <a:lstStyle xmlns:a="http://schemas.openxmlformats.org/drawingml/2006/main"/>
+          <a:p xmlns:a="http://schemas.openxmlformats.org/drawingml/2006/main">
+            <a:r>
+              <a:t>Sources:</a:t>
+            </a:r>
+          </a:p>
+          <a:p xmlns:a="http://schemas.openxmlformats.org/drawingml/2006/main">
+            <a:r>
+              <a:t>experiments/README.md section Failure analysis</a:t>
+            </a:r>
+          </a:p>
+          <a:p xmlns:a="http://schemas.openxmlformats.org/drawingml/2006/main">
+            <a:r>
+              <a:t>https://github.com/MasteraSnackin/FormulaBench</a:t>
+            </a:r>
+          </a:p>
+          <a:p xmlns:a="http://schemas.openxmlformats.org/drawingml/2006/main">
+            <a:r>
+              <a:t>https://masterasnackin.github.io/FormulaBench/</a:t>
+            </a:r>
+          </a:p>
+          <a:p xmlns:a="http://schemas.openxmlformats.org/drawingml/2006/main">
+            <a:r>
+              <a:t>The proposed fixed-operation path is future work and is not part of the frozen public self-evaluation.</a:t>
+            </a:r>
+          </a:p>
+          <a:p xmlns:a="http://schemas.openxmlformats.org/drawingml/2006/main">
+            <a:r>
+              <a:t>Only the organiser private benchmark is described as unseen.</a:t>
+            </a:r>
+          </a:p>
+        </p:txBody>
+      </p:sp>
+      <p:sp>
+        <p:nvSpPr>
+          <p:cNvPr id="4" name="Slide Number Placeholder 3"/>
+          <p:cNvSpPr>
+            <a:spLocks xmlns:a="http://schemas.openxmlformats.org/drawingml/2006/main" noGrp="1"/>
+          </p:cNvSpPr>
+          <p:nvPr>
+            <p:ph type="sldNum" idx="5"/>
+          </p:nvPr>
+        </p:nvSpPr>
+        <p:spPr/>
+        <p:txBody>
+          <a:bodyPr xmlns:a="http://schemas.openxmlformats.org/drawingml/2006/main"/>
+          <a:lstStyle xmlns:a="http://schemas.openxmlformats.org/drawingml/2006/main"/>
+          <a:p xmlns:a="http://schemas.openxmlformats.org/drawingml/2006/main"/>
+        </p:txBody>
+      </p:sp>
+    </p:spTree>
+  </p:cSld>
+  <p:clrMapOvr>
+    <a:masterClrMapping xmlns:a="http://schemas.openxmlformats.org/drawingml/2006/main"/>
+  </p:clrMapOvr>
+</p:notes>
+</file>
+
 <file path=ppt/notesSlides/notesSlide2.xml><?xml version="1.0" encoding="utf-8"?>
 <p:notes xmlns:p="http://schemas.openxmlformats.org/presentationml/2006/main">
   <p:cSld>
@@ -1215,27 +1412,27 @@
           </a:p>
           <a:p xmlns:a="http://schemas.openxmlformats.org/drawingml/2006/main">
             <a:r>
-              <a:t>experiments/README.md section Failure analysis</a:t>
-            </a:r>
-          </a:p>
-          <a:p xmlns:a="http://schemas.openxmlformats.org/drawingml/2006/main">
-            <a:r>
-              <a:t>https://github.com/MasteraSnackin/FormulaBench</a:t>
-            </a:r>
-          </a:p>
-          <a:p xmlns:a="http://schemas.openxmlformats.org/drawingml/2006/main">
-            <a:r>
-              <a:t>https://masterasnackin.github.io/FormulaBench/</a:t>
-            </a:r>
-          </a:p>
-          <a:p xmlns:a="http://schemas.openxmlformats.org/drawingml/2006/main">
-            <a:r>
-              <a:t>The proposed fixed-operation path is future work and is not part of the frozen public self-evaluation.</a:t>
-            </a:r>
-          </a:p>
-          <a:p xmlns:a="http://schemas.openxmlformats.org/drawingml/2006/main">
-            <a:r>
-              <a:t>Only the organiser private benchmark is described as unseen.</a:t>
+              <a:t>https://tinker.thinkingmachines.ai/sessions/b2d89255-3d84-5796-84a8-e35f658e3470</a:t>
+            </a:r>
+          </a:p>
+          <a:p xmlns:a="http://schemas.openxmlformats.org/drawingml/2006/main">
+            <a:r>
+              <a:t>experiments/tinker_lora_validation.json</a:t>
+            </a:r>
+          </a:p>
+          <a:p xmlns:a="http://schemas.openxmlformats.org/drawingml/2006/main">
+            <a:r>
+              <a:t>training/runs/qwen38-sft-v1-20260906T042552Z/run_metadata.json (local, not committed)</a:t>
+            </a:r>
+          </a:p>
+          <a:p xmlns:a="http://schemas.openxmlformats.org/drawingml/2006/main">
+            <a:r>
+              <a:t>Screenshot captured from the authenticated Tinker session on 6 September 2026. It shows Qwen/Qwen3.8-27B, LoRA rank 32, the development-training partition, and non-zero training activity.</a:t>
+            </a:r>
+          </a:p>
+          <a:p xmlns:a="http://schemas.openxmlformats.org/drawingml/2006/main">
+            <a:r>
+              <a:t>The screenshot does not establish workbook correctness. The retained machine-readable metrics do not contain exact average throughput or utilisation values.</a:t>
             </a:r>
           </a:p>
         </p:txBody>
@@ -1303,7 +1500,7 @@
   </p:cSld>
   <p:clrMap bg1="lt1" tx1="dk1" bg2="lt2" tx2="dk2" accent1="accent1" accent2="accent2" accent3="accent3" accent4="accent4" accent5="accent5" accent6="accent6" hlink="hlink" folHlink="folHlink"/>
   <p:sldLayoutIdLst>
-    <p:sldLayoutId xmlns:r="http://schemas.openxmlformats.org/officeDocument/2006/relationships" id="2147483649" r:id="R0ae21f67db764b42"/>
+    <p:sldLayoutId xmlns:r="http://schemas.openxmlformats.org/officeDocument/2006/relationships" id="2147483649" r:id="R11380e0121914543"/>
   </p:sldLayoutIdLst>
   <p:txStyles>
     <p:titleStyle>
@@ -2147,7 +2344,7 @@
           <p:cNvPr id="9" name="">
             <a:extLst xmlns:a="http://schemas.openxmlformats.org/drawingml/2006/main">
               <a:ext uri="{FF2B5EF4-FFF2-40B4-BE49-F238E27FC236}">
-                <a16:creationId xmlns:a16="http://schemas.microsoft.com/office/drawing/2014/main" id="{EB1A2CA0-ADC7-473E-8B6B-802938CA49E1}"/>
+                <a16:creationId xmlns:a16="http://schemas.microsoft.com/office/drawing/2014/main" id="{27329001-B924-4912-B69A-67B66F66AACB}"/>
               </a:ext>
             </a:extLst>
           </p:cNvPr>
@@ -2208,7 +2405,7 @@
           <p:cNvPr id="2" name="">
             <a:extLst xmlns:a="http://schemas.openxmlformats.org/drawingml/2006/main">
               <a:ext uri="{FF2B5EF4-FFF2-40B4-BE49-F238E27FC236}">
-                <a16:creationId xmlns:a16="http://schemas.microsoft.com/office/drawing/2014/main" id="{5A76302C-A3DB-4700-B9C2-95F41FE40E97}"/>
+                <a16:creationId xmlns:a16="http://schemas.microsoft.com/office/drawing/2014/main" id="{0A3C42B1-45CF-433D-A26C-2BB0429D2A2C}"/>
               </a:ext>
             </a:extLst>
           </p:cNvPr>
@@ -2269,7 +2466,7 @@
           <p:cNvPr id="3" name="">
             <a:extLst xmlns:a="http://schemas.openxmlformats.org/drawingml/2006/main">
               <a:ext uri="{FF2B5EF4-FFF2-40B4-BE49-F238E27FC236}">
-                <a16:creationId xmlns:a16="http://schemas.microsoft.com/office/drawing/2014/main" id="{E2852A53-9C50-4A49-AC87-B76A1ED0202C}"/>
+                <a16:creationId xmlns:a16="http://schemas.microsoft.com/office/drawing/2014/main" id="{74A1F09F-C01A-46F7-B50B-7D05791C7EB4}"/>
               </a:ext>
             </a:extLst>
           </p:cNvPr>
@@ -2330,7 +2527,7 @@
           <p:cNvPr id="4" name="">
             <a:extLst xmlns:a="http://schemas.openxmlformats.org/drawingml/2006/main">
               <a:ext uri="{FF2B5EF4-FFF2-40B4-BE49-F238E27FC236}">
-                <a16:creationId xmlns:a16="http://schemas.microsoft.com/office/drawing/2014/main" id="{AF22B656-D8B9-4B70-8217-E0F8A3553D52}"/>
+                <a16:creationId xmlns:a16="http://schemas.microsoft.com/office/drawing/2014/main" id="{680F27FC-D269-4C78-95B0-0F3631E159F9}"/>
               </a:ext>
             </a:extLst>
           </p:cNvPr>
@@ -2361,7 +2558,7 @@
           <p:cNvPr id="5" name="">
             <a:extLst xmlns:a="http://schemas.openxmlformats.org/drawingml/2006/main">
               <a:ext uri="{FF2B5EF4-FFF2-40B4-BE49-F238E27FC236}">
-                <a16:creationId xmlns:a16="http://schemas.microsoft.com/office/drawing/2014/main" id="{9779BD7F-DE47-4B08-93B7-57E21C5CF443}"/>
+                <a16:creationId xmlns:a16="http://schemas.microsoft.com/office/drawing/2014/main" id="{881FEB4E-CD41-44E7-A21E-ED0606A3D3DD}"/>
               </a:ext>
             </a:extLst>
           </p:cNvPr>
@@ -2449,7 +2646,7 @@
           <p:cNvPr id="6" name="">
             <a:extLst xmlns:a="http://schemas.openxmlformats.org/drawingml/2006/main">
               <a:ext uri="{FF2B5EF4-FFF2-40B4-BE49-F238E27FC236}">
-                <a16:creationId xmlns:a16="http://schemas.microsoft.com/office/drawing/2014/main" id="{4EC4BE60-8957-41EF-BC28-381829D198F0}"/>
+                <a16:creationId xmlns:a16="http://schemas.microsoft.com/office/drawing/2014/main" id="{FB3E047E-030A-4027-97AE-2AE37538EF58}"/>
               </a:ext>
             </a:extLst>
           </p:cNvPr>
@@ -2618,7 +2815,7 @@
           <p:cNvPr id="7" name="">
             <a:extLst xmlns:a="http://schemas.openxmlformats.org/drawingml/2006/main">
               <a:ext uri="{FF2B5EF4-FFF2-40B4-BE49-F238E27FC236}">
-                <a16:creationId xmlns:a16="http://schemas.microsoft.com/office/drawing/2014/main" id="{8DA8EFEE-780B-4028-94F9-01AADE582689}"/>
+                <a16:creationId xmlns:a16="http://schemas.microsoft.com/office/drawing/2014/main" id="{8FE3EC80-0913-458B-9A79-34251FC6831F}"/>
               </a:ext>
             </a:extLst>
           </p:cNvPr>
@@ -2679,7 +2876,7 @@
           <p:cNvPr id="8" name="">
             <a:extLst xmlns:a="http://schemas.openxmlformats.org/drawingml/2006/main">
               <a:ext uri="{FF2B5EF4-FFF2-40B4-BE49-F238E27FC236}">
-                <a16:creationId xmlns:a16="http://schemas.microsoft.com/office/drawing/2014/main" id="{5F980016-2289-4EA8-A681-994CBEDA0285}"/>
+                <a16:creationId xmlns:a16="http://schemas.microsoft.com/office/drawing/2014/main" id="{638AB82E-29D2-4054-8F7E-E754A0CF3054}"/>
               </a:ext>
             </a:extLst>
           </p:cNvPr>
@@ -2691,7 +2888,7 @@
         <p:spPr>
           <a:xfrm xmlns:a="http://schemas.openxmlformats.org/drawingml/2006/main">
             <a:off x="628650" y="6115050"/>
-            <a:ext cx="7810500" cy="228600"/>
+            <a:ext cx="8572500" cy="228600"/>
           </a:xfrm>
           <a:prstGeom xmlns:a="http://schemas.openxmlformats.org/drawingml/2006/main" prst="rect">
             <a:avLst/>
@@ -2730,7 +2927,7 @@
                 <a:ea typeface="Arial"/>
                 <a:cs typeface="Arial"/>
               </a:rPr>
-              <a:t>Complete public benchmark: all 400 tasks with retained traces and workbook artefacts</a:t>
+              <a:t>400-task public benchmark plus a controlled 15-task Tinker checkpoint comparison</a:t>
             </a:r>
           </a:p>
         </p:txBody>
@@ -2738,7 +2935,2200 @@
     </p:spTree>
     <p:extLst>
       <p:ext uri="{BB962C8B-B14F-4D97-AF65-F5344CB8AC3E}">
-        <p14:creationId xmlns:p14="http://schemas.microsoft.com/office/powerpoint/2010/main" val="982781736"/>
+        <p14:creationId xmlns:p14="http://schemas.microsoft.com/office/powerpoint/2010/main" val="948403895"/>
+      </p:ext>
+    </p:extLst>
+  </p:cSld>
+</p:sld>
+</file>
+
+<file path=ppt/slides/slide10.xml><?xml version="1.0" encoding="utf-8"?>
+<p:sld xmlns:p="http://schemas.openxmlformats.org/presentationml/2006/main">
+  <p:cSld>
+    <p:bg>
+      <p:bgPr>
+        <a:solidFill xmlns:a="http://schemas.openxmlformats.org/drawingml/2006/main">
+          <a:srgbClr val="FFFDF8"/>
+        </a:solidFill>
+      </p:bgPr>
+    </p:bg>
+    <p:spTree>
+      <p:nvGrpSpPr>
+        <p:cNvPr id="1" name=""/>
+        <p:cNvGrpSpPr/>
+        <p:nvPr/>
+      </p:nvGrpSpPr>
+      <p:grpSpPr>
+        <a:xfrm xmlns:a="http://schemas.openxmlformats.org/drawingml/2006/main"/>
+      </p:grpSpPr>
+      <p:sp>
+        <p:nvSpPr>
+          <p:cNvPr id="22" name="slide-title">
+            <a:extLst xmlns:a="http://schemas.openxmlformats.org/drawingml/2006/main">
+              <a:ext uri="{FF2B5EF4-FFF2-40B4-BE49-F238E27FC236}">
+                <a16:creationId xmlns:a16="http://schemas.microsoft.com/office/drawing/2014/main" id="{40793D80-A367-4001-BC99-6C91E6D588C2}"/>
+              </a:ext>
+            </a:extLst>
+          </p:cNvPr>
+          <p:cNvSpPr>
+            <a:spLocks xmlns:a="http://schemas.openxmlformats.org/drawingml/2006/main" noGrp="1"/>
+          </p:cNvSpPr>
+          <p:nvPr/>
+        </p:nvSpPr>
+        <p:spPr>
+          <a:xfrm xmlns:a="http://schemas.openxmlformats.org/drawingml/2006/main">
+            <a:off x="609600" y="428625"/>
+            <a:ext cx="10972800" cy="590550"/>
+          </a:xfrm>
+          <a:prstGeom xmlns:a="http://schemas.openxmlformats.org/drawingml/2006/main" prst="rect">
+            <a:avLst/>
+          </a:prstGeom>
+          <a:noFill xmlns:a="http://schemas.openxmlformats.org/drawingml/2006/main"/>
+          <a:ln xmlns:a="http://schemas.openxmlformats.org/drawingml/2006/main" w="0">
+            <a:noFill/>
+          </a:ln>
+        </p:spPr>
+        <p:txBody>
+          <a:bodyPr xmlns:a="http://schemas.openxmlformats.org/drawingml/2006/main" wrap="square" lIns="0" tIns="0" rIns="0" bIns="0" anchor="t">
+            <a:normAutofit fontScale="90894"/>
+          </a:bodyPr>
+          <a:lstStyle xmlns:a="http://schemas.openxmlformats.org/drawingml/2006/main"/>
+          <a:p xmlns:a="http://schemas.openxmlformats.org/drawingml/2006/main">
+            <a:pPr algn="l">
+              <a:lnSpc>
+                <a:spcPct val="105000"/>
+              </a:lnSpc>
+              <a:buNone/>
+              <a:defRPr sz="3300" b="1" i="0">
+                <a:solidFill>
+                  <a:srgbClr val="122033"/>
+                </a:solidFill>
+                <a:latin typeface="Arial"/>
+                <a:ea typeface="Arial"/>
+                <a:cs typeface="Arial"/>
+              </a:defRPr>
+            </a:pPr>
+            <a:r>
+              <a:rPr sz="3300" b="1" i="0">
+                <a:solidFill>
+                  <a:srgbClr val="122033"/>
+                </a:solidFill>
+                <a:latin typeface="Arial"/>
+                <a:ea typeface="Arial"/>
+                <a:cs typeface="Arial"/>
+              </a:rPr>
+              <a:t>The LoRA checkpoint passed two more of the same 15 tasks</a:t>
+            </a:r>
+          </a:p>
+        </p:txBody>
+      </p:sp>
+      <p:sp>
+        <p:nvSpPr>
+          <p:cNvPr id="2" name="">
+            <a:extLst xmlns:a="http://schemas.openxmlformats.org/drawingml/2006/main">
+              <a:ext uri="{FF2B5EF4-FFF2-40B4-BE49-F238E27FC236}">
+                <a16:creationId xmlns:a16="http://schemas.microsoft.com/office/drawing/2014/main" id="{3F267CFC-0BF6-4A3D-8D14-3D75D158E12F}"/>
+              </a:ext>
+            </a:extLst>
+          </p:cNvPr>
+          <p:cNvSpPr>
+            <a:spLocks xmlns:a="http://schemas.openxmlformats.org/drawingml/2006/main" noGrp="1"/>
+          </p:cNvSpPr>
+          <p:nvPr/>
+        </p:nvSpPr>
+        <p:spPr>
+          <a:xfrm xmlns:a="http://schemas.openxmlformats.org/drawingml/2006/main">
+            <a:off x="609600" y="1028700"/>
+            <a:ext cx="10572750" cy="361950"/>
+          </a:xfrm>
+          <a:prstGeom xmlns:a="http://schemas.openxmlformats.org/drawingml/2006/main" prst="rect">
+            <a:avLst/>
+          </a:prstGeom>
+          <a:noFill xmlns:a="http://schemas.openxmlformats.org/drawingml/2006/main"/>
+          <a:ln xmlns:a="http://schemas.openxmlformats.org/drawingml/2006/main" w="0">
+            <a:noFill/>
+          </a:ln>
+        </p:spPr>
+        <p:txBody>
+          <a:bodyPr xmlns:a="http://schemas.openxmlformats.org/drawingml/2006/main" wrap="square" lIns="0" tIns="0" rIns="0" bIns="0" anchor="t">
+            <a:normAutofit fontScale="100000"/>
+          </a:bodyPr>
+          <a:lstStyle xmlns:a="http://schemas.openxmlformats.org/drawingml/2006/main"/>
+          <a:p xmlns:a="http://schemas.openxmlformats.org/drawingml/2006/main">
+            <a:pPr algn="l">
+              <a:lnSpc>
+                <a:spcPct val="105000"/>
+              </a:lnSpc>
+              <a:buNone/>
+              <a:defRPr sz="1725" b="0" i="0">
+                <a:solidFill>
+                  <a:srgbClr val="667487"/>
+                </a:solidFill>
+                <a:latin typeface="Arial"/>
+                <a:ea typeface="Arial"/>
+                <a:cs typeface="Arial"/>
+              </a:defRPr>
+            </a:pPr>
+            <a:r>
+              <a:rPr sz="1725" b="0" i="0">
+                <a:solidFill>
+                  <a:srgbClr val="667487"/>
+                </a:solidFill>
+                <a:latin typeface="Arial"/>
+                <a:ea typeface="Arial"/>
+                <a:cs typeface="Arial"/>
+              </a:rPr>
+              <a:t>Base and checkpoint used the same prompts, settings, workbook pipeline and organiser evaluator.</a:t>
+            </a:r>
+          </a:p>
+        </p:txBody>
+      </p:sp>
+      <p:sp>
+        <p:nvSpPr>
+          <p:cNvPr id="3" name="">
+            <a:extLst xmlns:a="http://schemas.openxmlformats.org/drawingml/2006/main">
+              <a:ext uri="{FF2B5EF4-FFF2-40B4-BE49-F238E27FC236}">
+                <a16:creationId xmlns:a16="http://schemas.microsoft.com/office/drawing/2014/main" id="{7E40C298-42B8-4B4A-855B-4E2E5550FF02}"/>
+              </a:ext>
+            </a:extLst>
+          </p:cNvPr>
+          <p:cNvSpPr>
+            <a:spLocks xmlns:a="http://schemas.openxmlformats.org/drawingml/2006/main" noGrp="1"/>
+          </p:cNvSpPr>
+          <p:nvPr/>
+        </p:nvSpPr>
+        <p:spPr>
+          <a:xfrm xmlns:a="http://schemas.openxmlformats.org/drawingml/2006/main">
+            <a:off x="609600" y="1752600"/>
+            <a:ext cx="1809750" cy="628650"/>
+          </a:xfrm>
+          <a:prstGeom xmlns:a="http://schemas.openxmlformats.org/drawingml/2006/main" prst="rect">
+            <a:avLst/>
+          </a:prstGeom>
+          <a:noFill xmlns:a="http://schemas.openxmlformats.org/drawingml/2006/main"/>
+          <a:ln xmlns:a="http://schemas.openxmlformats.org/drawingml/2006/main" w="0">
+            <a:noFill/>
+          </a:ln>
+        </p:spPr>
+        <p:txBody>
+          <a:bodyPr xmlns:a="http://schemas.openxmlformats.org/drawingml/2006/main" wrap="square" lIns="0" tIns="0" rIns="0" bIns="0" anchor="t">
+            <a:normAutofit fontScale="100000"/>
+          </a:bodyPr>
+          <a:lstStyle xmlns:a="http://schemas.openxmlformats.org/drawingml/2006/main"/>
+          <a:p xmlns:a="http://schemas.openxmlformats.org/drawingml/2006/main">
+            <a:pPr algn="l">
+              <a:lnSpc>
+                <a:spcPct val="105000"/>
+              </a:lnSpc>
+              <a:buNone/>
+              <a:defRPr sz="3900" b="1" i="0">
+                <a:solidFill>
+                  <a:srgbClr val="122033"/>
+                </a:solidFill>
+                <a:latin typeface="Arial"/>
+                <a:ea typeface="Arial"/>
+                <a:cs typeface="Arial"/>
+              </a:defRPr>
+            </a:pPr>
+            <a:r>
+              <a:rPr sz="3900" b="1" i="0">
+                <a:solidFill>
+                  <a:srgbClr val="122033"/>
+                </a:solidFill>
+                <a:latin typeface="Arial"/>
+                <a:ea typeface="Arial"/>
+                <a:cs typeface="Arial"/>
+              </a:rPr>
+              <a:t>7 / 15</a:t>
+            </a:r>
+          </a:p>
+        </p:txBody>
+      </p:sp>
+      <p:sp>
+        <p:nvSpPr>
+          <p:cNvPr id="4" name="">
+            <a:extLst xmlns:a="http://schemas.openxmlformats.org/drawingml/2006/main">
+              <a:ext uri="{FF2B5EF4-FFF2-40B4-BE49-F238E27FC236}">
+                <a16:creationId xmlns:a16="http://schemas.microsoft.com/office/drawing/2014/main" id="{383A4856-C9F8-467C-A60E-B3BF3CD99ECC}"/>
+              </a:ext>
+            </a:extLst>
+          </p:cNvPr>
+          <p:cNvSpPr>
+            <a:spLocks xmlns:a="http://schemas.openxmlformats.org/drawingml/2006/main" noGrp="1"/>
+          </p:cNvSpPr>
+          <p:nvPr/>
+        </p:nvSpPr>
+        <p:spPr>
+          <a:xfrm xmlns:a="http://schemas.openxmlformats.org/drawingml/2006/main">
+            <a:off x="647700" y="2343150"/>
+            <a:ext cx="1619250" cy="266700"/>
+          </a:xfrm>
+          <a:prstGeom xmlns:a="http://schemas.openxmlformats.org/drawingml/2006/main" prst="rect">
+            <a:avLst/>
+          </a:prstGeom>
+          <a:noFill xmlns:a="http://schemas.openxmlformats.org/drawingml/2006/main"/>
+          <a:ln xmlns:a="http://schemas.openxmlformats.org/drawingml/2006/main" w="0">
+            <a:noFill/>
+          </a:ln>
+        </p:spPr>
+        <p:txBody>
+          <a:bodyPr xmlns:a="http://schemas.openxmlformats.org/drawingml/2006/main" wrap="square" lIns="0" tIns="0" rIns="0" bIns="0" anchor="t">
+            <a:normAutofit fontScale="100000"/>
+          </a:bodyPr>
+          <a:lstStyle xmlns:a="http://schemas.openxmlformats.org/drawingml/2006/main"/>
+          <a:p xmlns:a="http://schemas.openxmlformats.org/drawingml/2006/main">
+            <a:pPr algn="l">
+              <a:lnSpc>
+                <a:spcPct val="105000"/>
+              </a:lnSpc>
+              <a:buNone/>
+              <a:defRPr sz="1275" b="1" i="0">
+                <a:solidFill>
+                  <a:srgbClr val="667487"/>
+                </a:solidFill>
+                <a:latin typeface="Arial"/>
+                <a:ea typeface="Arial"/>
+                <a:cs typeface="Arial"/>
+              </a:defRPr>
+            </a:pPr>
+            <a:r>
+              <a:rPr sz="1275" b="1" i="0">
+                <a:solidFill>
+                  <a:srgbClr val="667487"/>
+                </a:solidFill>
+                <a:latin typeface="Arial"/>
+                <a:ea typeface="Arial"/>
+                <a:cs typeface="Arial"/>
+              </a:rPr>
+              <a:t>base model</a:t>
+            </a:r>
+          </a:p>
+        </p:txBody>
+      </p:sp>
+      <p:sp>
+        <p:nvSpPr>
+          <p:cNvPr id="5" name="">
+            <a:extLst xmlns:a="http://schemas.openxmlformats.org/drawingml/2006/main">
+              <a:ext uri="{FF2B5EF4-FFF2-40B4-BE49-F238E27FC236}">
+                <a16:creationId xmlns:a16="http://schemas.microsoft.com/office/drawing/2014/main" id="{5A4F1B3E-DC33-4A01-821E-CFB4B756B9E8}"/>
+              </a:ext>
+            </a:extLst>
+          </p:cNvPr>
+          <p:cNvSpPr>
+            <a:spLocks xmlns:a="http://schemas.openxmlformats.org/drawingml/2006/main" noGrp="1"/>
+          </p:cNvSpPr>
+          <p:nvPr/>
+        </p:nvSpPr>
+        <p:spPr>
+          <a:xfrm xmlns:a="http://schemas.openxmlformats.org/drawingml/2006/main">
+            <a:off x="2895600" y="1752600"/>
+            <a:ext cx="1809750" cy="628650"/>
+          </a:xfrm>
+          <a:prstGeom xmlns:a="http://schemas.openxmlformats.org/drawingml/2006/main" prst="rect">
+            <a:avLst/>
+          </a:prstGeom>
+          <a:noFill xmlns:a="http://schemas.openxmlformats.org/drawingml/2006/main"/>
+          <a:ln xmlns:a="http://schemas.openxmlformats.org/drawingml/2006/main" w="0">
+            <a:noFill/>
+          </a:ln>
+        </p:spPr>
+        <p:txBody>
+          <a:bodyPr xmlns:a="http://schemas.openxmlformats.org/drawingml/2006/main" wrap="square" lIns="0" tIns="0" rIns="0" bIns="0" anchor="t">
+            <a:normAutofit fontScale="100000"/>
+          </a:bodyPr>
+          <a:lstStyle xmlns:a="http://schemas.openxmlformats.org/drawingml/2006/main"/>
+          <a:p xmlns:a="http://schemas.openxmlformats.org/drawingml/2006/main">
+            <a:pPr algn="l">
+              <a:lnSpc>
+                <a:spcPct val="105000"/>
+              </a:lnSpc>
+              <a:buNone/>
+              <a:defRPr sz="3900" b="1" i="0">
+                <a:solidFill>
+                  <a:srgbClr val="35C47A"/>
+                </a:solidFill>
+                <a:latin typeface="Arial"/>
+                <a:ea typeface="Arial"/>
+                <a:cs typeface="Arial"/>
+              </a:defRPr>
+            </a:pPr>
+            <a:r>
+              <a:rPr sz="3900" b="1" i="0">
+                <a:solidFill>
+                  <a:srgbClr val="35C47A"/>
+                </a:solidFill>
+                <a:latin typeface="Arial"/>
+                <a:ea typeface="Arial"/>
+                <a:cs typeface="Arial"/>
+              </a:rPr>
+              <a:t>9 / 15</a:t>
+            </a:r>
+          </a:p>
+        </p:txBody>
+      </p:sp>
+      <p:sp>
+        <p:nvSpPr>
+          <p:cNvPr id="6" name="">
+            <a:extLst xmlns:a="http://schemas.openxmlformats.org/drawingml/2006/main">
+              <a:ext uri="{FF2B5EF4-FFF2-40B4-BE49-F238E27FC236}">
+                <a16:creationId xmlns:a16="http://schemas.microsoft.com/office/drawing/2014/main" id="{C6EBB546-54CA-4900-97DC-E68E4F67AD5E}"/>
+              </a:ext>
+            </a:extLst>
+          </p:cNvPr>
+          <p:cNvSpPr>
+            <a:spLocks xmlns:a="http://schemas.openxmlformats.org/drawingml/2006/main" noGrp="1"/>
+          </p:cNvSpPr>
+          <p:nvPr/>
+        </p:nvSpPr>
+        <p:spPr>
+          <a:xfrm xmlns:a="http://schemas.openxmlformats.org/drawingml/2006/main">
+            <a:off x="2933700" y="2343150"/>
+            <a:ext cx="1905000" cy="266700"/>
+          </a:xfrm>
+          <a:prstGeom xmlns:a="http://schemas.openxmlformats.org/drawingml/2006/main" prst="rect">
+            <a:avLst/>
+          </a:prstGeom>
+          <a:noFill xmlns:a="http://schemas.openxmlformats.org/drawingml/2006/main"/>
+          <a:ln xmlns:a="http://schemas.openxmlformats.org/drawingml/2006/main" w="0">
+            <a:noFill/>
+          </a:ln>
+        </p:spPr>
+        <p:txBody>
+          <a:bodyPr xmlns:a="http://schemas.openxmlformats.org/drawingml/2006/main" wrap="square" lIns="0" tIns="0" rIns="0" bIns="0" anchor="t">
+            <a:normAutofit fontScale="100000"/>
+          </a:bodyPr>
+          <a:lstStyle xmlns:a="http://schemas.openxmlformats.org/drawingml/2006/main"/>
+          <a:p xmlns:a="http://schemas.openxmlformats.org/drawingml/2006/main">
+            <a:pPr algn="l">
+              <a:lnSpc>
+                <a:spcPct val="105000"/>
+              </a:lnSpc>
+              <a:buNone/>
+              <a:defRPr sz="1275" b="1" i="0">
+                <a:solidFill>
+                  <a:srgbClr val="35C47A"/>
+                </a:solidFill>
+                <a:latin typeface="Arial"/>
+                <a:ea typeface="Arial"/>
+                <a:cs typeface="Arial"/>
+              </a:defRPr>
+            </a:pPr>
+            <a:r>
+              <a:rPr sz="1275" b="1" i="0">
+                <a:solidFill>
+                  <a:srgbClr val="35C47A"/>
+                </a:solidFill>
+                <a:latin typeface="Arial"/>
+                <a:ea typeface="Arial"/>
+                <a:cs typeface="Arial"/>
+              </a:rPr>
+              <a:t>LoRA checkpoint</a:t>
+            </a:r>
+          </a:p>
+        </p:txBody>
+      </p:sp>
+      <p:sp>
+        <p:nvSpPr>
+          <p:cNvPr id="7" name="">
+            <a:extLst xmlns:a="http://schemas.openxmlformats.org/drawingml/2006/main">
+              <a:ext uri="{FF2B5EF4-FFF2-40B4-BE49-F238E27FC236}">
+                <a16:creationId xmlns:a16="http://schemas.microsoft.com/office/drawing/2014/main" id="{4BFB856A-E88E-43D5-AE98-B89DA3D6159C}"/>
+              </a:ext>
+            </a:extLst>
+          </p:cNvPr>
+          <p:cNvSpPr>
+            <a:spLocks xmlns:a="http://schemas.openxmlformats.org/drawingml/2006/main" noGrp="1"/>
+          </p:cNvSpPr>
+          <p:nvPr/>
+        </p:nvSpPr>
+        <p:spPr>
+          <a:xfrm xmlns:a="http://schemas.openxmlformats.org/drawingml/2006/main">
+            <a:off x="609600" y="2838450"/>
+            <a:ext cx="4171950" cy="0"/>
+          </a:xfrm>
+          <a:prstGeom xmlns:a="http://schemas.openxmlformats.org/drawingml/2006/main" prst="line">
+            <a:avLst/>
+          </a:prstGeom>
+          <a:noFill xmlns:a="http://schemas.openxmlformats.org/drawingml/2006/main"/>
+          <a:ln xmlns:a="http://schemas.openxmlformats.org/drawingml/2006/main" w="9525">
+            <a:solidFill>
+              <a:srgbClr val="C9D1D9"/>
+            </a:solidFill>
+            <a:prstDash val="solid"/>
+          </a:ln>
+        </p:spPr>
+      </p:sp>
+      <p:sp>
+        <p:nvSpPr>
+          <p:cNvPr id="8" name="">
+            <a:extLst xmlns:a="http://schemas.openxmlformats.org/drawingml/2006/main">
+              <a:ext uri="{FF2B5EF4-FFF2-40B4-BE49-F238E27FC236}">
+                <a16:creationId xmlns:a16="http://schemas.microsoft.com/office/drawing/2014/main" id="{1395699C-1BCD-4403-BC1D-4491176CC09B}"/>
+              </a:ext>
+            </a:extLst>
+          </p:cNvPr>
+          <p:cNvSpPr>
+            <a:spLocks xmlns:a="http://schemas.openxmlformats.org/drawingml/2006/main" noGrp="1"/>
+          </p:cNvSpPr>
+          <p:nvPr/>
+        </p:nvSpPr>
+        <p:spPr>
+          <a:xfrm xmlns:a="http://schemas.openxmlformats.org/drawingml/2006/main">
+            <a:off x="609600" y="3057525"/>
+            <a:ext cx="2667000" cy="495300"/>
+          </a:xfrm>
+          <a:prstGeom xmlns:a="http://schemas.openxmlformats.org/drawingml/2006/main" prst="rect">
+            <a:avLst/>
+          </a:prstGeom>
+          <a:noFill xmlns:a="http://schemas.openxmlformats.org/drawingml/2006/main"/>
+          <a:ln xmlns:a="http://schemas.openxmlformats.org/drawingml/2006/main" w="0">
+            <a:noFill/>
+          </a:ln>
+        </p:spPr>
+        <p:txBody>
+          <a:bodyPr xmlns:a="http://schemas.openxmlformats.org/drawingml/2006/main" wrap="square" lIns="0" tIns="0" rIns="0" bIns="0" anchor="t">
+            <a:normAutofit fontScale="100000"/>
+          </a:bodyPr>
+          <a:lstStyle xmlns:a="http://schemas.openxmlformats.org/drawingml/2006/main"/>
+          <a:p xmlns:a="http://schemas.openxmlformats.org/drawingml/2006/main">
+            <a:pPr algn="l">
+              <a:lnSpc>
+                <a:spcPct val="105000"/>
+              </a:lnSpc>
+              <a:buNone/>
+              <a:defRPr sz="2850" b="1" i="0">
+                <a:solidFill>
+                  <a:srgbClr val="122033"/>
+                </a:solidFill>
+                <a:latin typeface="Arial"/>
+                <a:ea typeface="Arial"/>
+                <a:cs typeface="Arial"/>
+              </a:defRPr>
+            </a:pPr>
+            <a:r>
+              <a:rPr sz="2850" b="1" i="0">
+                <a:solidFill>
+                  <a:srgbClr val="122033"/>
+                </a:solidFill>
+                <a:latin typeface="Arial"/>
+                <a:ea typeface="Arial"/>
+                <a:cs typeface="Arial"/>
+              </a:rPr>
+              <a:t>+13.33 pp</a:t>
+            </a:r>
+          </a:p>
+        </p:txBody>
+      </p:sp>
+      <p:sp>
+        <p:nvSpPr>
+          <p:cNvPr id="9" name="">
+            <a:extLst xmlns:a="http://schemas.openxmlformats.org/drawingml/2006/main">
+              <a:ext uri="{FF2B5EF4-FFF2-40B4-BE49-F238E27FC236}">
+                <a16:creationId xmlns:a16="http://schemas.microsoft.com/office/drawing/2014/main" id="{0BCA5D31-5114-4448-877E-ABBF884D57D7}"/>
+              </a:ext>
+            </a:extLst>
+          </p:cNvPr>
+          <p:cNvSpPr>
+            <a:spLocks xmlns:a="http://schemas.openxmlformats.org/drawingml/2006/main" noGrp="1"/>
+          </p:cNvSpPr>
+          <p:nvPr/>
+        </p:nvSpPr>
+        <p:spPr>
+          <a:xfrm xmlns:a="http://schemas.openxmlformats.org/drawingml/2006/main">
+            <a:off x="647700" y="3552825"/>
+            <a:ext cx="4000500" cy="285750"/>
+          </a:xfrm>
+          <a:prstGeom xmlns:a="http://schemas.openxmlformats.org/drawingml/2006/main" prst="rect">
+            <a:avLst/>
+          </a:prstGeom>
+          <a:noFill xmlns:a="http://schemas.openxmlformats.org/drawingml/2006/main"/>
+          <a:ln xmlns:a="http://schemas.openxmlformats.org/drawingml/2006/main" w="0">
+            <a:noFill/>
+          </a:ln>
+        </p:spPr>
+        <p:txBody>
+          <a:bodyPr xmlns:a="http://schemas.openxmlformats.org/drawingml/2006/main" wrap="square" lIns="0" tIns="0" rIns="0" bIns="0" anchor="t">
+            <a:normAutofit fontScale="100000"/>
+          </a:bodyPr>
+          <a:lstStyle xmlns:a="http://schemas.openxmlformats.org/drawingml/2006/main"/>
+          <a:p xmlns:a="http://schemas.openxmlformats.org/drawingml/2006/main">
+            <a:pPr algn="l">
+              <a:lnSpc>
+                <a:spcPct val="105000"/>
+              </a:lnSpc>
+              <a:buNone/>
+              <a:defRPr sz="1350" b="0" i="0">
+                <a:solidFill>
+                  <a:srgbClr val="667487"/>
+                </a:solidFill>
+                <a:latin typeface="Arial"/>
+                <a:ea typeface="Arial"/>
+                <a:cs typeface="Arial"/>
+              </a:defRPr>
+            </a:pPr>
+            <a:r>
+              <a:rPr sz="1350" b="0" i="0">
+                <a:solidFill>
+                  <a:srgbClr val="667487"/>
+                </a:solidFill>
+                <a:latin typeface="Arial"/>
+                <a:ea typeface="Arial"/>
+                <a:cs typeface="Arial"/>
+              </a:rPr>
+              <a:t>task pass rate, 46.67% and 60.00%</a:t>
+            </a:r>
+          </a:p>
+        </p:txBody>
+      </p:sp>
+      <p:sp>
+        <p:nvSpPr>
+          <p:cNvPr id="10" name="">
+            <a:extLst xmlns:a="http://schemas.openxmlformats.org/drawingml/2006/main">
+              <a:ext uri="{FF2B5EF4-FFF2-40B4-BE49-F238E27FC236}">
+                <a16:creationId xmlns:a16="http://schemas.microsoft.com/office/drawing/2014/main" id="{CC877931-58AE-473F-8DB4-04B60B9A4D06}"/>
+              </a:ext>
+            </a:extLst>
+          </p:cNvPr>
+          <p:cNvSpPr>
+            <a:spLocks xmlns:a="http://schemas.openxmlformats.org/drawingml/2006/main" noGrp="1"/>
+          </p:cNvSpPr>
+          <p:nvPr/>
+        </p:nvSpPr>
+        <p:spPr>
+          <a:xfrm xmlns:a="http://schemas.openxmlformats.org/drawingml/2006/main">
+            <a:off x="609600" y="4114800"/>
+            <a:ext cx="2095500" cy="419100"/>
+          </a:xfrm>
+          <a:prstGeom xmlns:a="http://schemas.openxmlformats.org/drawingml/2006/main" prst="rect">
+            <a:avLst/>
+          </a:prstGeom>
+          <a:noFill xmlns:a="http://schemas.openxmlformats.org/drawingml/2006/main"/>
+          <a:ln xmlns:a="http://schemas.openxmlformats.org/drawingml/2006/main" w="0">
+            <a:noFill/>
+          </a:ln>
+        </p:spPr>
+        <p:txBody>
+          <a:bodyPr xmlns:a="http://schemas.openxmlformats.org/drawingml/2006/main" wrap="square" lIns="0" tIns="0" rIns="0" bIns="0" anchor="t">
+            <a:normAutofit fontScale="100000"/>
+          </a:bodyPr>
+          <a:lstStyle xmlns:a="http://schemas.openxmlformats.org/drawingml/2006/main"/>
+          <a:p xmlns:a="http://schemas.openxmlformats.org/drawingml/2006/main">
+            <a:pPr algn="l">
+              <a:lnSpc>
+                <a:spcPct val="105000"/>
+              </a:lnSpc>
+              <a:buNone/>
+              <a:defRPr sz="2325" b="1" i="0">
+                <a:solidFill>
+                  <a:srgbClr val="122033"/>
+                </a:solidFill>
+                <a:latin typeface="Arial"/>
+                <a:ea typeface="Arial"/>
+                <a:cs typeface="Arial"/>
+              </a:defRPr>
+            </a:pPr>
+            <a:r>
+              <a:rPr sz="2325" b="1" i="0">
+                <a:solidFill>
+                  <a:srgbClr val="122033"/>
+                </a:solidFill>
+                <a:latin typeface="Arial"/>
+                <a:ea typeface="Arial"/>
+                <a:cs typeface="Arial"/>
+              </a:rPr>
+              <a:t>432 / 582</a:t>
+            </a:r>
+          </a:p>
+        </p:txBody>
+      </p:sp>
+      <p:sp>
+        <p:nvSpPr>
+          <p:cNvPr id="11" name="">
+            <a:extLst xmlns:a="http://schemas.openxmlformats.org/drawingml/2006/main">
+              <a:ext uri="{FF2B5EF4-FFF2-40B4-BE49-F238E27FC236}">
+                <a16:creationId xmlns:a16="http://schemas.microsoft.com/office/drawing/2014/main" id="{BE6FCE93-1E59-499C-83F6-A31FC6B755E5}"/>
+              </a:ext>
+            </a:extLst>
+          </p:cNvPr>
+          <p:cNvSpPr>
+            <a:spLocks xmlns:a="http://schemas.openxmlformats.org/drawingml/2006/main" noGrp="1"/>
+          </p:cNvSpPr>
+          <p:nvPr/>
+        </p:nvSpPr>
+        <p:spPr>
+          <a:xfrm xmlns:a="http://schemas.openxmlformats.org/drawingml/2006/main">
+            <a:off x="2895600" y="4114800"/>
+            <a:ext cx="2095500" cy="419100"/>
+          </a:xfrm>
+          <a:prstGeom xmlns:a="http://schemas.openxmlformats.org/drawingml/2006/main" prst="rect">
+            <a:avLst/>
+          </a:prstGeom>
+          <a:noFill xmlns:a="http://schemas.openxmlformats.org/drawingml/2006/main"/>
+          <a:ln xmlns:a="http://schemas.openxmlformats.org/drawingml/2006/main" w="0">
+            <a:noFill/>
+          </a:ln>
+        </p:spPr>
+        <p:txBody>
+          <a:bodyPr xmlns:a="http://schemas.openxmlformats.org/drawingml/2006/main" wrap="square" lIns="0" tIns="0" rIns="0" bIns="0" anchor="t">
+            <a:normAutofit fontScale="100000"/>
+          </a:bodyPr>
+          <a:lstStyle xmlns:a="http://schemas.openxmlformats.org/drawingml/2006/main"/>
+          <a:p xmlns:a="http://schemas.openxmlformats.org/drawingml/2006/main">
+            <a:pPr algn="l">
+              <a:lnSpc>
+                <a:spcPct val="105000"/>
+              </a:lnSpc>
+              <a:buNone/>
+              <a:defRPr sz="2325" b="1" i="0">
+                <a:solidFill>
+                  <a:srgbClr val="35C47A"/>
+                </a:solidFill>
+                <a:latin typeface="Arial"/>
+                <a:ea typeface="Arial"/>
+                <a:cs typeface="Arial"/>
+              </a:defRPr>
+            </a:pPr>
+            <a:r>
+              <a:rPr sz="2325" b="1" i="0">
+                <a:solidFill>
+                  <a:srgbClr val="35C47A"/>
+                </a:solidFill>
+                <a:latin typeface="Arial"/>
+                <a:ea typeface="Arial"/>
+                <a:cs typeface="Arial"/>
+              </a:rPr>
+              <a:t>449 / 582</a:t>
+            </a:r>
+          </a:p>
+        </p:txBody>
+      </p:sp>
+      <p:sp>
+        <p:nvSpPr>
+          <p:cNvPr id="12" name="">
+            <a:extLst xmlns:a="http://schemas.openxmlformats.org/drawingml/2006/main">
+              <a:ext uri="{FF2B5EF4-FFF2-40B4-BE49-F238E27FC236}">
+                <a16:creationId xmlns:a16="http://schemas.microsoft.com/office/drawing/2014/main" id="{6BEC8157-5887-454E-98AA-9E6C23C7E7FC}"/>
+              </a:ext>
+            </a:extLst>
+          </p:cNvPr>
+          <p:cNvSpPr>
+            <a:spLocks xmlns:a="http://schemas.openxmlformats.org/drawingml/2006/main" noGrp="1"/>
+          </p:cNvSpPr>
+          <p:nvPr/>
+        </p:nvSpPr>
+        <p:spPr>
+          <a:xfrm xmlns:a="http://schemas.openxmlformats.org/drawingml/2006/main">
+            <a:off x="647700" y="4581525"/>
+            <a:ext cx="3905250" cy="266700"/>
+          </a:xfrm>
+          <a:prstGeom xmlns:a="http://schemas.openxmlformats.org/drawingml/2006/main" prst="rect">
+            <a:avLst/>
+          </a:prstGeom>
+          <a:noFill xmlns:a="http://schemas.openxmlformats.org/drawingml/2006/main"/>
+          <a:ln xmlns:a="http://schemas.openxmlformats.org/drawingml/2006/main" w="0">
+            <a:noFill/>
+          </a:ln>
+        </p:spPr>
+        <p:txBody>
+          <a:bodyPr xmlns:a="http://schemas.openxmlformats.org/drawingml/2006/main" wrap="square" lIns="0" tIns="0" rIns="0" bIns="0" anchor="t">
+            <a:normAutofit fontScale="100000"/>
+          </a:bodyPr>
+          <a:lstStyle xmlns:a="http://schemas.openxmlformats.org/drawingml/2006/main"/>
+          <a:p xmlns:a="http://schemas.openxmlformats.org/drawingml/2006/main">
+            <a:pPr algn="l">
+              <a:lnSpc>
+                <a:spcPct val="105000"/>
+              </a:lnSpc>
+              <a:buNone/>
+              <a:defRPr sz="1350" b="0" i="0">
+                <a:solidFill>
+                  <a:srgbClr val="667487"/>
+                </a:solidFill>
+                <a:latin typeface="Arial"/>
+                <a:ea typeface="Arial"/>
+                <a:cs typeface="Arial"/>
+              </a:defRPr>
+            </a:pPr>
+            <a:r>
+              <a:rPr sz="1350" b="0" i="0">
+                <a:solidFill>
+                  <a:srgbClr val="667487"/>
+                </a:solidFill>
+                <a:latin typeface="Arial"/>
+                <a:ea typeface="Arial"/>
+                <a:cs typeface="Arial"/>
+              </a:rPr>
+              <a:t>correct cells increased by 17</a:t>
+            </a:r>
+          </a:p>
+        </p:txBody>
+      </p:sp>
+      <p:sp>
+        <p:nvSpPr>
+          <p:cNvPr id="13" name="">
+            <a:extLst xmlns:a="http://schemas.openxmlformats.org/drawingml/2006/main">
+              <a:ext uri="{FF2B5EF4-FFF2-40B4-BE49-F238E27FC236}">
+                <a16:creationId xmlns:a16="http://schemas.microsoft.com/office/drawing/2014/main" id="{2CECCD5C-3DFD-48D1-901C-437CA196420F}"/>
+              </a:ext>
+            </a:extLst>
+          </p:cNvPr>
+          <p:cNvSpPr>
+            <a:spLocks xmlns:a="http://schemas.openxmlformats.org/drawingml/2006/main" noGrp="1"/>
+          </p:cNvSpPr>
+          <p:nvPr/>
+        </p:nvSpPr>
+        <p:spPr>
+          <a:xfrm xmlns:a="http://schemas.openxmlformats.org/drawingml/2006/main">
+            <a:off x="609600" y="5048250"/>
+            <a:ext cx="4286250" cy="609600"/>
+          </a:xfrm>
+          <a:prstGeom xmlns:a="http://schemas.openxmlformats.org/drawingml/2006/main" prst="rect">
+            <a:avLst/>
+          </a:prstGeom>
+          <a:noFill xmlns:a="http://schemas.openxmlformats.org/drawingml/2006/main"/>
+          <a:ln xmlns:a="http://schemas.openxmlformats.org/drawingml/2006/main" w="0">
+            <a:noFill/>
+          </a:ln>
+        </p:spPr>
+        <p:txBody>
+          <a:bodyPr xmlns:a="http://schemas.openxmlformats.org/drawingml/2006/main" wrap="square" lIns="0" tIns="0" rIns="0" bIns="0" anchor="t">
+            <a:normAutofit fontScale="91636"/>
+          </a:bodyPr>
+          <a:lstStyle xmlns:a="http://schemas.openxmlformats.org/drawingml/2006/main"/>
+          <a:p xmlns:a="http://schemas.openxmlformats.org/drawingml/2006/main">
+            <a:pPr algn="l">
+              <a:lnSpc>
+                <a:spcPct val="112000"/>
+              </a:lnSpc>
+              <a:buNone/>
+              <a:defRPr sz="1350" b="0" i="0">
+                <a:solidFill>
+                  <a:srgbClr val="122033"/>
+                </a:solidFill>
+                <a:latin typeface="Arial"/>
+                <a:ea typeface="Arial"/>
+                <a:cs typeface="Arial"/>
+              </a:defRPr>
+            </a:pPr>
+            <a:r>
+              <a:rPr sz="1350" b="0" i="0">
+                <a:solidFill>
+                  <a:srgbClr val="122033"/>
+                </a:solidFill>
+                <a:latin typeface="Arial"/>
+                <a:ea typeface="Arial"/>
+                <a:cs typeface="Arial"/>
+              </a:rPr>
+              <a:t>Three failures became passes. One previous pass regressed. Accepted predictions increased from 14/15 to 15/15.</a:t>
+            </a:r>
+          </a:p>
+        </p:txBody>
+      </p:sp>
+      <p:sp>
+        <p:nvSpPr>
+          <p:cNvPr id="14" name="">
+            <a:extLst xmlns:a="http://schemas.openxmlformats.org/drawingml/2006/main">
+              <a:ext uri="{FF2B5EF4-FFF2-40B4-BE49-F238E27FC236}">
+                <a16:creationId xmlns:a16="http://schemas.microsoft.com/office/drawing/2014/main" id="{BEABFF20-51A8-4240-9B8F-99B4CDB70DA9}"/>
+              </a:ext>
+            </a:extLst>
+          </p:cNvPr>
+          <p:cNvSpPr>
+            <a:spLocks xmlns:a="http://schemas.openxmlformats.org/drawingml/2006/main" noGrp="1"/>
+          </p:cNvSpPr>
+          <p:nvPr/>
+        </p:nvSpPr>
+        <p:spPr>
+          <a:xfrm xmlns:a="http://schemas.openxmlformats.org/drawingml/2006/main">
+            <a:off x="5219700" y="1657350"/>
+            <a:ext cx="6362700" cy="3114675"/>
+          </a:xfrm>
+          <a:prstGeom xmlns:a="http://schemas.openxmlformats.org/drawingml/2006/main" prst="rect">
+            <a:avLst/>
+          </a:prstGeom>
+          <a:solidFill xmlns:a="http://schemas.openxmlformats.org/drawingml/2006/main">
+            <a:srgbClr val="F4F0E8"/>
+          </a:solidFill>
+          <a:ln xmlns:a="http://schemas.openxmlformats.org/drawingml/2006/main" w="9525">
+            <a:solidFill>
+              <a:srgbClr val="C9D1D9"/>
+            </a:solidFill>
+            <a:prstDash val="solid"/>
+          </a:ln>
+        </p:spPr>
+      </p:sp>
+      <p:pic>
+        <p:nvPicPr>
+          <p:cNvPr id="36" name=""/>
+          <p:cNvPicPr>
+            <a:picLocks xmlns:a="http://schemas.openxmlformats.org/drawingml/2006/main" noChangeAspect="1"/>
+          </p:cNvPicPr>
+          <p:nvPr/>
+        </p:nvPicPr>
+        <p:blipFill>
+          <a:blip xmlns:r="http://schemas.openxmlformats.org/officeDocument/2006/relationships" xmlns:a="http://schemas.openxmlformats.org/drawingml/2006/main" r:embed="R6e68d26c8e904e0a"/>
+          <a:stretch xmlns:a="http://schemas.openxmlformats.org/drawingml/2006/main"/>
+        </p:blipFill>
+        <p:spPr>
+          <a:xfrm xmlns:a="http://schemas.openxmlformats.org/drawingml/2006/main">
+            <a:off x="5219700" y="1659361"/>
+            <a:ext cx="6362700" cy="3110653"/>
+          </a:xfrm>
+          <a:prstGeom xmlns:a="http://schemas.openxmlformats.org/drawingml/2006/main" prst="rect">
+            <a:avLst/>
+          </a:prstGeom>
+        </p:spPr>
+      </p:pic>
+      <p:sp>
+        <p:nvSpPr>
+          <p:cNvPr id="16" name="">
+            <a:extLst xmlns:a="http://schemas.openxmlformats.org/drawingml/2006/main">
+              <a:ext uri="{FF2B5EF4-FFF2-40B4-BE49-F238E27FC236}">
+                <a16:creationId xmlns:a16="http://schemas.microsoft.com/office/drawing/2014/main" id="{ECAF7B1A-1485-4B4D-A9A0-1D538495C64C}"/>
+              </a:ext>
+            </a:extLst>
+          </p:cNvPr>
+          <p:cNvSpPr>
+            <a:spLocks xmlns:a="http://schemas.openxmlformats.org/drawingml/2006/main" noGrp="1"/>
+          </p:cNvSpPr>
+          <p:nvPr/>
+        </p:nvSpPr>
+        <p:spPr>
+          <a:xfrm xmlns:a="http://schemas.openxmlformats.org/drawingml/2006/main">
+            <a:off x="5238750" y="4895850"/>
+            <a:ext cx="6343650" cy="266700"/>
+          </a:xfrm>
+          <a:prstGeom xmlns:a="http://schemas.openxmlformats.org/drawingml/2006/main" prst="rect">
+            <a:avLst/>
+          </a:prstGeom>
+          <a:noFill xmlns:a="http://schemas.openxmlformats.org/drawingml/2006/main"/>
+          <a:ln xmlns:a="http://schemas.openxmlformats.org/drawingml/2006/main" w="0">
+            <a:noFill/>
+          </a:ln>
+        </p:spPr>
+        <p:txBody>
+          <a:bodyPr xmlns:a="http://schemas.openxmlformats.org/drawingml/2006/main" wrap="square" lIns="0" tIns="0" rIns="0" bIns="0" anchor="t">
+            <a:normAutofit fontScale="100000"/>
+          </a:bodyPr>
+          <a:lstStyle xmlns:a="http://schemas.openxmlformats.org/drawingml/2006/main"/>
+          <a:p xmlns:a="http://schemas.openxmlformats.org/drawingml/2006/main">
+            <a:pPr algn="l">
+              <a:lnSpc>
+                <a:spcPct val="105000"/>
+              </a:lnSpc>
+              <a:buNone/>
+              <a:defRPr sz="1200" b="0" i="0">
+                <a:solidFill>
+                  <a:srgbClr val="667487"/>
+                </a:solidFill>
+                <a:latin typeface="Arial"/>
+                <a:ea typeface="Arial"/>
+                <a:cs typeface="Arial"/>
+              </a:defRPr>
+            </a:pPr>
+            <a:r>
+              <a:rPr sz="1200" b="0" i="0">
+                <a:solidFill>
+                  <a:srgbClr val="667487"/>
+                </a:solidFill>
+                <a:latin typeface="Arial"/>
+                <a:ea typeface="Arial"/>
+                <a:cs typeface="Arial"/>
+              </a:rPr>
+              <a:t>The image is the public result summary, not a separate evaluation.</a:t>
+            </a:r>
+          </a:p>
+        </p:txBody>
+      </p:sp>
+      <p:sp>
+        <p:nvSpPr>
+          <p:cNvPr id="17" name="">
+            <a:extLst xmlns:a="http://schemas.openxmlformats.org/drawingml/2006/main">
+              <a:ext uri="{FF2B5EF4-FFF2-40B4-BE49-F238E27FC236}">
+                <a16:creationId xmlns:a16="http://schemas.microsoft.com/office/drawing/2014/main" id="{C4958116-BEED-4FA0-98FF-3B429BE833DF}"/>
+              </a:ext>
+            </a:extLst>
+          </p:cNvPr>
+          <p:cNvSpPr>
+            <a:spLocks xmlns:a="http://schemas.openxmlformats.org/drawingml/2006/main" noGrp="1"/>
+          </p:cNvSpPr>
+          <p:nvPr/>
+        </p:nvSpPr>
+        <p:spPr>
+          <a:xfrm xmlns:a="http://schemas.openxmlformats.org/drawingml/2006/main">
+            <a:off x="5219700" y="5314950"/>
+            <a:ext cx="6362700" cy="876300"/>
+          </a:xfrm>
+          <a:prstGeom xmlns:a="http://schemas.openxmlformats.org/drawingml/2006/main" prst="rect">
+            <a:avLst/>
+          </a:prstGeom>
+          <a:solidFill xmlns:a="http://schemas.openxmlformats.org/drawingml/2006/main">
+            <a:srgbClr val="0B172A"/>
+          </a:solidFill>
+          <a:ln xmlns:a="http://schemas.openxmlformats.org/drawingml/2006/main" w="0">
+            <a:noFill/>
+          </a:ln>
+        </p:spPr>
+      </p:sp>
+      <p:sp>
+        <p:nvSpPr>
+          <p:cNvPr id="18" name="">
+            <a:extLst xmlns:a="http://schemas.openxmlformats.org/drawingml/2006/main">
+              <a:ext uri="{FF2B5EF4-FFF2-40B4-BE49-F238E27FC236}">
+                <a16:creationId xmlns:a16="http://schemas.microsoft.com/office/drawing/2014/main" id="{32BD3FD5-529C-48AA-AAF4-79FACB31A776}"/>
+              </a:ext>
+            </a:extLst>
+          </p:cNvPr>
+          <p:cNvSpPr>
+            <a:spLocks xmlns:a="http://schemas.openxmlformats.org/drawingml/2006/main" noGrp="1"/>
+          </p:cNvSpPr>
+          <p:nvPr/>
+        </p:nvSpPr>
+        <p:spPr>
+          <a:xfrm xmlns:a="http://schemas.openxmlformats.org/drawingml/2006/main">
+            <a:off x="5476875" y="5495925"/>
+            <a:ext cx="5848350" cy="523875"/>
+          </a:xfrm>
+          <a:prstGeom xmlns:a="http://schemas.openxmlformats.org/drawingml/2006/main" prst="rect">
+            <a:avLst/>
+          </a:prstGeom>
+          <a:noFill xmlns:a="http://schemas.openxmlformats.org/drawingml/2006/main"/>
+          <a:ln xmlns:a="http://schemas.openxmlformats.org/drawingml/2006/main" w="0">
+            <a:noFill/>
+          </a:ln>
+        </p:spPr>
+        <p:txBody>
+          <a:bodyPr xmlns:a="http://schemas.openxmlformats.org/drawingml/2006/main" wrap="square" lIns="0" tIns="0" rIns="0" bIns="0" anchor="t">
+            <a:normAutofit fontScale="86491"/>
+          </a:bodyPr>
+          <a:lstStyle xmlns:a="http://schemas.openxmlformats.org/drawingml/2006/main"/>
+          <a:p xmlns:a="http://schemas.openxmlformats.org/drawingml/2006/main">
+            <a:pPr algn="l">
+              <a:lnSpc>
+                <a:spcPct val="112000"/>
+              </a:lnSpc>
+              <a:buNone/>
+              <a:defRPr sz="1275" b="1" i="0">
+                <a:solidFill>
+                  <a:srgbClr val="FFFFFF"/>
+                </a:solidFill>
+                <a:latin typeface="Arial"/>
+                <a:ea typeface="Arial"/>
+                <a:cs typeface="Arial"/>
+              </a:defRPr>
+            </a:pPr>
+            <a:r>
+              <a:rPr sz="1275" b="1" i="0">
+                <a:solidFill>
+                  <a:srgbClr val="FFFFFF"/>
+                </a:solidFill>
+                <a:latin typeface="Arial"/>
+                <a:ea typeface="Arial"/>
+                <a:cs typeface="Arial"/>
+              </a:rPr>
+              <a:t>Development checkpoint selection only. One sample per task in each arm. Six examples above 500 target cells were excluded. The frozen 400-task pass rate remains 33.25%.</a:t>
+            </a:r>
+          </a:p>
+        </p:txBody>
+      </p:sp>
+      <p:sp>
+        <p:nvSpPr>
+          <p:cNvPr id="19" name="">
+            <a:extLst xmlns:a="http://schemas.openxmlformats.org/drawingml/2006/main">
+              <a:ext uri="{FF2B5EF4-FFF2-40B4-BE49-F238E27FC236}">
+                <a16:creationId xmlns:a16="http://schemas.microsoft.com/office/drawing/2014/main" id="{DA6765D9-BB68-4794-AADF-3DD7FABFF701}"/>
+              </a:ext>
+            </a:extLst>
+          </p:cNvPr>
+          <p:cNvSpPr>
+            <a:spLocks xmlns:a="http://schemas.openxmlformats.org/drawingml/2006/main" noGrp="1"/>
+          </p:cNvSpPr>
+          <p:nvPr/>
+        </p:nvSpPr>
+        <p:spPr>
+          <a:xfrm xmlns:a="http://schemas.openxmlformats.org/drawingml/2006/main">
+            <a:off x="609600" y="6429375"/>
+            <a:ext cx="10972800" cy="0"/>
+          </a:xfrm>
+          <a:prstGeom xmlns:a="http://schemas.openxmlformats.org/drawingml/2006/main" prst="line">
+            <a:avLst/>
+          </a:prstGeom>
+          <a:noFill xmlns:a="http://schemas.openxmlformats.org/drawingml/2006/main"/>
+          <a:ln xmlns:a="http://schemas.openxmlformats.org/drawingml/2006/main" w="9525">
+            <a:solidFill>
+              <a:srgbClr val="C9D1D9"/>
+            </a:solidFill>
+            <a:prstDash val="solid"/>
+          </a:ln>
+        </p:spPr>
+      </p:sp>
+      <p:sp>
+        <p:nvSpPr>
+          <p:cNvPr id="20" name="">
+            <a:extLst xmlns:a="http://schemas.openxmlformats.org/drawingml/2006/main">
+              <a:ext uri="{FF2B5EF4-FFF2-40B4-BE49-F238E27FC236}">
+                <a16:creationId xmlns:a16="http://schemas.microsoft.com/office/drawing/2014/main" id="{AC8D2EF5-486B-4267-8ADF-7E9E561BCCE8}"/>
+              </a:ext>
+            </a:extLst>
+          </p:cNvPr>
+          <p:cNvSpPr>
+            <a:spLocks xmlns:a="http://schemas.openxmlformats.org/drawingml/2006/main" noGrp="1"/>
+          </p:cNvSpPr>
+          <p:nvPr/>
+        </p:nvSpPr>
+        <p:spPr>
+          <a:xfrm xmlns:a="http://schemas.openxmlformats.org/drawingml/2006/main">
+            <a:off x="609600" y="6553200"/>
+            <a:ext cx="6191250" cy="171450"/>
+          </a:xfrm>
+          <a:prstGeom xmlns:a="http://schemas.openxmlformats.org/drawingml/2006/main" prst="rect">
+            <a:avLst/>
+          </a:prstGeom>
+          <a:noFill xmlns:a="http://schemas.openxmlformats.org/drawingml/2006/main"/>
+          <a:ln xmlns:a="http://schemas.openxmlformats.org/drawingml/2006/main" w="0">
+            <a:noFill/>
+          </a:ln>
+        </p:spPr>
+        <p:txBody>
+          <a:bodyPr xmlns:a="http://schemas.openxmlformats.org/drawingml/2006/main" wrap="square" lIns="0" tIns="0" rIns="0" bIns="0" anchor="ctr">
+            <a:normAutofit fontScale="100000"/>
+          </a:bodyPr>
+          <a:lstStyle xmlns:a="http://schemas.openxmlformats.org/drawingml/2006/main"/>
+          <a:p xmlns:a="http://schemas.openxmlformats.org/drawingml/2006/main">
+            <a:pPr algn="l">
+              <a:lnSpc>
+                <a:spcPct val="105000"/>
+              </a:lnSpc>
+              <a:buNone/>
+              <a:defRPr sz="900" b="1" i="0">
+                <a:solidFill>
+                  <a:srgbClr val="667487"/>
+                </a:solidFill>
+                <a:latin typeface="Arial"/>
+                <a:ea typeface="Arial"/>
+                <a:cs typeface="Arial"/>
+              </a:defRPr>
+            </a:pPr>
+            <a:r>
+              <a:rPr sz="900" b="1" i="0">
+                <a:solidFill>
+                  <a:srgbClr val="667487"/>
+                </a:solidFill>
+                <a:latin typeface="Arial"/>
+                <a:ea typeface="Arial"/>
+                <a:cs typeface="Arial"/>
+              </a:rPr>
+              <a:t>FORMULABENCH  ·  RESEARCH: EXCEL FORMULA GENERATION</a:t>
+            </a:r>
+          </a:p>
+        </p:txBody>
+      </p:sp>
+      <p:sp>
+        <p:nvSpPr>
+          <p:cNvPr id="21" name="">
+            <a:extLst xmlns:a="http://schemas.openxmlformats.org/drawingml/2006/main">
+              <a:ext uri="{FF2B5EF4-FFF2-40B4-BE49-F238E27FC236}">
+                <a16:creationId xmlns:a16="http://schemas.microsoft.com/office/drawing/2014/main" id="{ACD0A56F-F6E1-48A0-A295-9FCD392AE9CC}"/>
+              </a:ext>
+            </a:extLst>
+          </p:cNvPr>
+          <p:cNvSpPr>
+            <a:spLocks xmlns:a="http://schemas.openxmlformats.org/drawingml/2006/main" noGrp="1"/>
+          </p:cNvSpPr>
+          <p:nvPr/>
+        </p:nvSpPr>
+        <p:spPr>
+          <a:xfrm xmlns:a="http://schemas.openxmlformats.org/drawingml/2006/main">
+            <a:off x="11049000" y="6553200"/>
+            <a:ext cx="533400" cy="171450"/>
+          </a:xfrm>
+          <a:prstGeom xmlns:a="http://schemas.openxmlformats.org/drawingml/2006/main" prst="rect">
+            <a:avLst/>
+          </a:prstGeom>
+          <a:noFill xmlns:a="http://schemas.openxmlformats.org/drawingml/2006/main"/>
+          <a:ln xmlns:a="http://schemas.openxmlformats.org/drawingml/2006/main" w="0">
+            <a:noFill/>
+          </a:ln>
+        </p:spPr>
+        <p:txBody>
+          <a:bodyPr xmlns:a="http://schemas.openxmlformats.org/drawingml/2006/main" wrap="square" lIns="0" tIns="0" rIns="0" bIns="0" anchor="ctr">
+            <a:normAutofit fontScale="100000"/>
+          </a:bodyPr>
+          <a:lstStyle xmlns:a="http://schemas.openxmlformats.org/drawingml/2006/main"/>
+          <a:p xmlns:a="http://schemas.openxmlformats.org/drawingml/2006/main">
+            <a:pPr algn="r">
+              <a:lnSpc>
+                <a:spcPct val="105000"/>
+              </a:lnSpc>
+              <a:buNone/>
+              <a:defRPr sz="900" b="1" i="0">
+                <a:solidFill>
+                  <a:srgbClr val="667487"/>
+                </a:solidFill>
+                <a:latin typeface="Arial"/>
+                <a:ea typeface="Arial"/>
+                <a:cs typeface="Arial"/>
+              </a:defRPr>
+            </a:pPr>
+            <a:r>
+              <a:rPr sz="900" b="1" i="0">
+                <a:solidFill>
+                  <a:srgbClr val="667487"/>
+                </a:solidFill>
+                <a:latin typeface="Arial"/>
+                <a:ea typeface="Arial"/>
+                <a:cs typeface="Arial"/>
+              </a:rPr>
+              <a:t>10</a:t>
+            </a:r>
+          </a:p>
+        </p:txBody>
+      </p:sp>
+    </p:spTree>
+    <p:extLst>
+      <p:ext uri="{BB962C8B-B14F-4D97-AF65-F5344CB8AC3E}">
+        <p14:creationId xmlns:p14="http://schemas.microsoft.com/office/powerpoint/2010/main" val="1998962102"/>
+      </p:ext>
+    </p:extLst>
+  </p:cSld>
+</p:sld>
+</file>
+
+<file path=ppt/slides/slide11.xml><?xml version="1.0" encoding="utf-8"?>
+<p:sld xmlns:p="http://schemas.openxmlformats.org/presentationml/2006/main">
+  <p:cSld>
+    <p:bg>
+      <p:bgPr>
+        <a:solidFill xmlns:a="http://schemas.openxmlformats.org/drawingml/2006/main">
+          <a:srgbClr val="0B172A"/>
+        </a:solidFill>
+      </p:bgPr>
+    </p:bg>
+    <p:spTree>
+      <p:nvGrpSpPr>
+        <p:cNvPr id="1" name=""/>
+        <p:cNvGrpSpPr/>
+        <p:nvPr/>
+      </p:nvGrpSpPr>
+      <p:grpSpPr>
+        <a:xfrm xmlns:a="http://schemas.openxmlformats.org/drawingml/2006/main"/>
+      </p:grpSpPr>
+      <p:sp>
+        <p:nvSpPr>
+          <p:cNvPr id="19" name="slide-title">
+            <a:extLst xmlns:a="http://schemas.openxmlformats.org/drawingml/2006/main">
+              <a:ext uri="{FF2B5EF4-FFF2-40B4-BE49-F238E27FC236}">
+                <a16:creationId xmlns:a16="http://schemas.microsoft.com/office/drawing/2014/main" id="{FA4C20DA-F415-4D65-8BE5-8D24EDCE9EE6}"/>
+              </a:ext>
+            </a:extLst>
+          </p:cNvPr>
+          <p:cNvSpPr>
+            <a:spLocks xmlns:a="http://schemas.openxmlformats.org/drawingml/2006/main" noGrp="1"/>
+          </p:cNvSpPr>
+          <p:nvPr/>
+        </p:nvSpPr>
+        <p:spPr>
+          <a:xfrm xmlns:a="http://schemas.openxmlformats.org/drawingml/2006/main">
+            <a:off x="609600" y="428625"/>
+            <a:ext cx="10972800" cy="590550"/>
+          </a:xfrm>
+          <a:prstGeom xmlns:a="http://schemas.openxmlformats.org/drawingml/2006/main" prst="rect">
+            <a:avLst/>
+          </a:prstGeom>
+          <a:noFill xmlns:a="http://schemas.openxmlformats.org/drawingml/2006/main"/>
+          <a:ln xmlns:a="http://schemas.openxmlformats.org/drawingml/2006/main" w="0">
+            <a:noFill/>
+          </a:ln>
+        </p:spPr>
+        <p:txBody>
+          <a:bodyPr xmlns:a="http://schemas.openxmlformats.org/drawingml/2006/main" wrap="square" lIns="0" tIns="0" rIns="0" bIns="0" anchor="t">
+            <a:normAutofit fontScale="74317"/>
+          </a:bodyPr>
+          <a:lstStyle xmlns:a="http://schemas.openxmlformats.org/drawingml/2006/main"/>
+          <a:p xmlns:a="http://schemas.openxmlformats.org/drawingml/2006/main">
+            <a:pPr algn="l">
+              <a:lnSpc>
+                <a:spcPct val="105000"/>
+              </a:lnSpc>
+              <a:buNone/>
+              <a:defRPr sz="3300" b="1" i="0">
+                <a:solidFill>
+                  <a:srgbClr val="FFFFFF"/>
+                </a:solidFill>
+                <a:latin typeface="Arial"/>
+                <a:ea typeface="Arial"/>
+                <a:cs typeface="Arial"/>
+              </a:defRPr>
+            </a:pPr>
+            <a:r>
+              <a:rPr sz="3300" b="1" i="0">
+                <a:solidFill>
+                  <a:srgbClr val="FFFFFF"/>
+                </a:solidFill>
+                <a:latin typeface="Arial"/>
+                <a:ea typeface="Arial"/>
+                <a:cs typeface="Arial"/>
+              </a:rPr>
+              <a:t>Next architecture: separate formula generation from large transformations</a:t>
+            </a:r>
+          </a:p>
+        </p:txBody>
+      </p:sp>
+      <p:sp>
+        <p:nvSpPr>
+          <p:cNvPr id="2" name="">
+            <a:extLst xmlns:a="http://schemas.openxmlformats.org/drawingml/2006/main">
+              <a:ext uri="{FF2B5EF4-FFF2-40B4-BE49-F238E27FC236}">
+                <a16:creationId xmlns:a16="http://schemas.microsoft.com/office/drawing/2014/main" id="{B4864103-DA55-41A1-AD99-51990685CA1F}"/>
+              </a:ext>
+            </a:extLst>
+          </p:cNvPr>
+          <p:cNvSpPr>
+            <a:spLocks xmlns:a="http://schemas.openxmlformats.org/drawingml/2006/main" noGrp="1"/>
+          </p:cNvSpPr>
+          <p:nvPr/>
+        </p:nvSpPr>
+        <p:spPr>
+          <a:xfrm xmlns:a="http://schemas.openxmlformats.org/drawingml/2006/main">
+            <a:off x="609600" y="1028700"/>
+            <a:ext cx="9525000" cy="361950"/>
+          </a:xfrm>
+          <a:prstGeom xmlns:a="http://schemas.openxmlformats.org/drawingml/2006/main" prst="rect">
+            <a:avLst/>
+          </a:prstGeom>
+          <a:noFill xmlns:a="http://schemas.openxmlformats.org/drawingml/2006/main"/>
+          <a:ln xmlns:a="http://schemas.openxmlformats.org/drawingml/2006/main" w="0">
+            <a:noFill/>
+          </a:ln>
+        </p:spPr>
+        <p:txBody>
+          <a:bodyPr xmlns:a="http://schemas.openxmlformats.org/drawingml/2006/main" wrap="square" lIns="0" tIns="0" rIns="0" bIns="0" anchor="t">
+            <a:normAutofit fontScale="100000"/>
+          </a:bodyPr>
+          <a:lstStyle xmlns:a="http://schemas.openxmlformats.org/drawingml/2006/main"/>
+          <a:p xmlns:a="http://schemas.openxmlformats.org/drawingml/2006/main">
+            <a:pPr algn="l">
+              <a:lnSpc>
+                <a:spcPct val="105000"/>
+              </a:lnSpc>
+              <a:buNone/>
+              <a:defRPr sz="1725" b="0" i="0">
+                <a:solidFill>
+                  <a:srgbClr val="AAB6C5"/>
+                </a:solidFill>
+                <a:latin typeface="Arial"/>
+                <a:ea typeface="Arial"/>
+                <a:cs typeface="Arial"/>
+              </a:defRPr>
+            </a:pPr>
+            <a:r>
+              <a:rPr sz="1725" b="0" i="0">
+                <a:solidFill>
+                  <a:srgbClr val="AAB6C5"/>
+                </a:solidFill>
+                <a:latin typeface="Arial"/>
+                <a:ea typeface="Arial"/>
+                <a:cs typeface="Arial"/>
+              </a:rPr>
+              <a:t>Formula tasks use the model. Large transformations use fixed operations.</a:t>
+            </a:r>
+          </a:p>
+        </p:txBody>
+      </p:sp>
+      <p:sp>
+        <p:nvSpPr>
+          <p:cNvPr id="3" name="">
+            <a:extLst xmlns:a="http://schemas.openxmlformats.org/drawingml/2006/main">
+              <a:ext uri="{FF2B5EF4-FFF2-40B4-BE49-F238E27FC236}">
+                <a16:creationId xmlns:a16="http://schemas.microsoft.com/office/drawing/2014/main" id="{606C2841-0DCD-4200-9229-1A1870927506}"/>
+              </a:ext>
+            </a:extLst>
+          </p:cNvPr>
+          <p:cNvSpPr>
+            <a:spLocks xmlns:a="http://schemas.openxmlformats.org/drawingml/2006/main" noGrp="1"/>
+          </p:cNvSpPr>
+          <p:nvPr/>
+        </p:nvSpPr>
+        <p:spPr>
+          <a:xfrm xmlns:a="http://schemas.openxmlformats.org/drawingml/2006/main">
+            <a:off x="609600" y="1847850"/>
+            <a:ext cx="2476500" cy="266700"/>
+          </a:xfrm>
+          <a:prstGeom xmlns:a="http://schemas.openxmlformats.org/drawingml/2006/main" prst="rect">
+            <a:avLst/>
+          </a:prstGeom>
+          <a:noFill xmlns:a="http://schemas.openxmlformats.org/drawingml/2006/main"/>
+          <a:ln xmlns:a="http://schemas.openxmlformats.org/drawingml/2006/main" w="0">
+            <a:noFill/>
+          </a:ln>
+        </p:spPr>
+        <p:txBody>
+          <a:bodyPr xmlns:a="http://schemas.openxmlformats.org/drawingml/2006/main" wrap="square" lIns="0" tIns="0" rIns="0" bIns="0" anchor="t">
+            <a:normAutofit fontScale="100000"/>
+          </a:bodyPr>
+          <a:lstStyle xmlns:a="http://schemas.openxmlformats.org/drawingml/2006/main"/>
+          <a:p xmlns:a="http://schemas.openxmlformats.org/drawingml/2006/main">
+            <a:pPr algn="l">
+              <a:lnSpc>
+                <a:spcPct val="105000"/>
+              </a:lnSpc>
+              <a:buNone/>
+              <a:defRPr sz="1125" b="1" i="0">
+                <a:solidFill>
+                  <a:srgbClr val="35C47A"/>
+                </a:solidFill>
+                <a:latin typeface="Arial"/>
+                <a:ea typeface="Arial"/>
+                <a:cs typeface="Arial"/>
+              </a:defRPr>
+            </a:pPr>
+            <a:r>
+              <a:rPr sz="1125" b="1" i="0">
+                <a:solidFill>
+                  <a:srgbClr val="35C47A"/>
+                </a:solidFill>
+                <a:latin typeface="Arial"/>
+                <a:ea typeface="Arial"/>
+                <a:cs typeface="Arial"/>
+              </a:rPr>
+              <a:t>FORMULA TASKS</a:t>
+            </a:r>
+          </a:p>
+        </p:txBody>
+      </p:sp>
+      <p:sp>
+        <p:nvSpPr>
+          <p:cNvPr id="4" name="">
+            <a:extLst xmlns:a="http://schemas.openxmlformats.org/drawingml/2006/main">
+              <a:ext uri="{FF2B5EF4-FFF2-40B4-BE49-F238E27FC236}">
+                <a16:creationId xmlns:a16="http://schemas.microsoft.com/office/drawing/2014/main" id="{C4E7BBAE-4A92-44FF-90F6-42BBD1BB0E36}"/>
+              </a:ext>
+            </a:extLst>
+          </p:cNvPr>
+          <p:cNvSpPr>
+            <a:spLocks xmlns:a="http://schemas.openxmlformats.org/drawingml/2006/main" noGrp="1"/>
+          </p:cNvSpPr>
+          <p:nvPr/>
+        </p:nvSpPr>
+        <p:spPr>
+          <a:xfrm xmlns:a="http://schemas.openxmlformats.org/drawingml/2006/main">
+            <a:off x="609600" y="2247900"/>
+            <a:ext cx="4476750" cy="438150"/>
+          </a:xfrm>
+          <a:prstGeom xmlns:a="http://schemas.openxmlformats.org/drawingml/2006/main" prst="rect">
+            <a:avLst/>
+          </a:prstGeom>
+          <a:noFill xmlns:a="http://schemas.openxmlformats.org/drawingml/2006/main"/>
+          <a:ln xmlns:a="http://schemas.openxmlformats.org/drawingml/2006/main" w="0">
+            <a:noFill/>
+          </a:ln>
+        </p:spPr>
+        <p:txBody>
+          <a:bodyPr xmlns:a="http://schemas.openxmlformats.org/drawingml/2006/main" wrap="square" lIns="0" tIns="0" rIns="0" bIns="0" anchor="t">
+            <a:normAutofit fontScale="100000"/>
+          </a:bodyPr>
+          <a:lstStyle xmlns:a="http://schemas.openxmlformats.org/drawingml/2006/main"/>
+          <a:p xmlns:a="http://schemas.openxmlformats.org/drawingml/2006/main">
+            <a:pPr algn="l">
+              <a:lnSpc>
+                <a:spcPct val="105000"/>
+              </a:lnSpc>
+              <a:buNone/>
+              <a:defRPr sz="2325" b="1" i="0">
+                <a:solidFill>
+                  <a:srgbClr val="FFFFFF"/>
+                </a:solidFill>
+                <a:latin typeface="Arial"/>
+                <a:ea typeface="Arial"/>
+                <a:cs typeface="Arial"/>
+              </a:defRPr>
+            </a:pPr>
+            <a:r>
+              <a:rPr sz="2325" b="1" i="0">
+                <a:solidFill>
+                  <a:srgbClr val="FFFFFF"/>
+                </a:solidFill>
+                <a:latin typeface="Arial"/>
+                <a:ea typeface="Arial"/>
+                <a:cs typeface="Arial"/>
+              </a:rPr>
+              <a:t>Generate a formula</a:t>
+            </a:r>
+          </a:p>
+        </p:txBody>
+      </p:sp>
+      <p:sp>
+        <p:nvSpPr>
+          <p:cNvPr id="5" name="">
+            <a:extLst xmlns:a="http://schemas.openxmlformats.org/drawingml/2006/main">
+              <a:ext uri="{FF2B5EF4-FFF2-40B4-BE49-F238E27FC236}">
+                <a16:creationId xmlns:a16="http://schemas.microsoft.com/office/drawing/2014/main" id="{87B1F82B-F9D9-445B-9CDC-5E63068F8AF9}"/>
+              </a:ext>
+            </a:extLst>
+          </p:cNvPr>
+          <p:cNvSpPr>
+            <a:spLocks xmlns:a="http://schemas.openxmlformats.org/drawingml/2006/main" noGrp="1"/>
+          </p:cNvSpPr>
+          <p:nvPr/>
+        </p:nvSpPr>
+        <p:spPr>
+          <a:xfrm xmlns:a="http://schemas.openxmlformats.org/drawingml/2006/main">
+            <a:off x="609600" y="2819400"/>
+            <a:ext cx="4572000" cy="742950"/>
+          </a:xfrm>
+          <a:prstGeom xmlns:a="http://schemas.openxmlformats.org/drawingml/2006/main" prst="rect">
+            <a:avLst/>
+          </a:prstGeom>
+          <a:noFill xmlns:a="http://schemas.openxmlformats.org/drawingml/2006/main"/>
+          <a:ln xmlns:a="http://schemas.openxmlformats.org/drawingml/2006/main" w="0">
+            <a:noFill/>
+          </a:ln>
+        </p:spPr>
+        <p:txBody>
+          <a:bodyPr xmlns:a="http://schemas.openxmlformats.org/drawingml/2006/main" wrap="square" lIns="0" tIns="0" rIns="0" bIns="0" anchor="t">
+            <a:normAutofit fontScale="100000"/>
+          </a:bodyPr>
+          <a:lstStyle xmlns:a="http://schemas.openxmlformats.org/drawingml/2006/main"/>
+          <a:p xmlns:a="http://schemas.openxmlformats.org/drawingml/2006/main">
+            <a:pPr algn="l">
+              <a:lnSpc>
+                <a:spcPct val="114000"/>
+              </a:lnSpc>
+              <a:buNone/>
+              <a:defRPr sz="1575" b="0" i="0">
+                <a:solidFill>
+                  <a:srgbClr val="C6D2DF"/>
+                </a:solidFill>
+                <a:latin typeface="Arial"/>
+                <a:ea typeface="Arial"/>
+                <a:cs typeface="Arial"/>
+              </a:defRPr>
+            </a:pPr>
+            <a:r>
+              <a:rPr sz="1575" b="0" i="0">
+                <a:solidFill>
+                  <a:srgbClr val="C6D2DF"/>
+                </a:solidFill>
+                <a:latin typeface="Arial"/>
+                <a:ea typeface="Arial"/>
+                <a:cs typeface="Arial"/>
+              </a:rPr>
+              <a:t>Recalculate locally and run task-specific checks before publishing the workbook.</a:t>
+            </a:r>
+          </a:p>
+        </p:txBody>
+      </p:sp>
+      <p:sp>
+        <p:nvSpPr>
+          <p:cNvPr id="6" name="">
+            <a:extLst xmlns:a="http://schemas.openxmlformats.org/drawingml/2006/main">
+              <a:ext uri="{FF2B5EF4-FFF2-40B4-BE49-F238E27FC236}">
+                <a16:creationId xmlns:a16="http://schemas.microsoft.com/office/drawing/2014/main" id="{5B17A3D4-F5EB-423E-B896-0A2C21C1700F}"/>
+              </a:ext>
+            </a:extLst>
+          </p:cNvPr>
+          <p:cNvSpPr>
+            <a:spLocks xmlns:a="http://schemas.openxmlformats.org/drawingml/2006/main" noGrp="1"/>
+          </p:cNvSpPr>
+          <p:nvPr/>
+        </p:nvSpPr>
+        <p:spPr>
+          <a:xfrm xmlns:a="http://schemas.openxmlformats.org/drawingml/2006/main">
+            <a:off x="6343650" y="1847850"/>
+            <a:ext cx="3143250" cy="266700"/>
+          </a:xfrm>
+          <a:prstGeom xmlns:a="http://schemas.openxmlformats.org/drawingml/2006/main" prst="rect">
+            <a:avLst/>
+          </a:prstGeom>
+          <a:noFill xmlns:a="http://schemas.openxmlformats.org/drawingml/2006/main"/>
+          <a:ln xmlns:a="http://schemas.openxmlformats.org/drawingml/2006/main" w="0">
+            <a:noFill/>
+          </a:ln>
+        </p:spPr>
+        <p:txBody>
+          <a:bodyPr xmlns:a="http://schemas.openxmlformats.org/drawingml/2006/main" wrap="square" lIns="0" tIns="0" rIns="0" bIns="0" anchor="t">
+            <a:normAutofit fontScale="100000"/>
+          </a:bodyPr>
+          <a:lstStyle xmlns:a="http://schemas.openxmlformats.org/drawingml/2006/main"/>
+          <a:p xmlns:a="http://schemas.openxmlformats.org/drawingml/2006/main">
+            <a:pPr algn="l">
+              <a:lnSpc>
+                <a:spcPct val="105000"/>
+              </a:lnSpc>
+              <a:buNone/>
+              <a:defRPr sz="1125" b="1" i="0">
+                <a:solidFill>
+                  <a:srgbClr val="35C47A"/>
+                </a:solidFill>
+                <a:latin typeface="Arial"/>
+                <a:ea typeface="Arial"/>
+                <a:cs typeface="Arial"/>
+              </a:defRPr>
+            </a:pPr>
+            <a:r>
+              <a:rPr sz="1125" b="1" i="0">
+                <a:solidFill>
+                  <a:srgbClr val="35C47A"/>
+                </a:solidFill>
+                <a:latin typeface="Arial"/>
+                <a:ea typeface="Arial"/>
+                <a:cs typeface="Arial"/>
+              </a:rPr>
+              <a:t>LARGE TRANSFORMATIONS</a:t>
+            </a:r>
+          </a:p>
+        </p:txBody>
+      </p:sp>
+      <p:sp>
+        <p:nvSpPr>
+          <p:cNvPr id="7" name="">
+            <a:extLst xmlns:a="http://schemas.openxmlformats.org/drawingml/2006/main">
+              <a:ext uri="{FF2B5EF4-FFF2-40B4-BE49-F238E27FC236}">
+                <a16:creationId xmlns:a16="http://schemas.microsoft.com/office/drawing/2014/main" id="{350FDCED-532E-4C9E-9579-1867F7DA6A39}"/>
+              </a:ext>
+            </a:extLst>
+          </p:cNvPr>
+          <p:cNvSpPr>
+            <a:spLocks xmlns:a="http://schemas.openxmlformats.org/drawingml/2006/main" noGrp="1"/>
+          </p:cNvSpPr>
+          <p:nvPr/>
+        </p:nvSpPr>
+        <p:spPr>
+          <a:xfrm xmlns:a="http://schemas.openxmlformats.org/drawingml/2006/main">
+            <a:off x="6343650" y="2247900"/>
+            <a:ext cx="4762500" cy="438150"/>
+          </a:xfrm>
+          <a:prstGeom xmlns:a="http://schemas.openxmlformats.org/drawingml/2006/main" prst="rect">
+            <a:avLst/>
+          </a:prstGeom>
+          <a:noFill xmlns:a="http://schemas.openxmlformats.org/drawingml/2006/main"/>
+          <a:ln xmlns:a="http://schemas.openxmlformats.org/drawingml/2006/main" w="0">
+            <a:noFill/>
+          </a:ln>
+        </p:spPr>
+        <p:txBody>
+          <a:bodyPr xmlns:a="http://schemas.openxmlformats.org/drawingml/2006/main" wrap="square" lIns="0" tIns="0" rIns="0" bIns="0" anchor="t">
+            <a:normAutofit fontScale="100000"/>
+          </a:bodyPr>
+          <a:lstStyle xmlns:a="http://schemas.openxmlformats.org/drawingml/2006/main"/>
+          <a:p xmlns:a="http://schemas.openxmlformats.org/drawingml/2006/main">
+            <a:pPr algn="l">
+              <a:lnSpc>
+                <a:spcPct val="105000"/>
+              </a:lnSpc>
+              <a:buNone/>
+              <a:defRPr sz="2325" b="1" i="0">
+                <a:solidFill>
+                  <a:srgbClr val="FFFFFF"/>
+                </a:solidFill>
+                <a:latin typeface="Arial"/>
+                <a:ea typeface="Arial"/>
+                <a:cs typeface="Arial"/>
+              </a:defRPr>
+            </a:pPr>
+            <a:r>
+              <a:rPr sz="2325" b="1" i="0">
+                <a:solidFill>
+                  <a:srgbClr val="FFFFFF"/>
+                </a:solidFill>
+                <a:latin typeface="Arial"/>
+                <a:ea typeface="Arial"/>
+                <a:cs typeface="Arial"/>
+              </a:rPr>
+              <a:t>Apply a fixed operation</a:t>
+            </a:r>
+          </a:p>
+        </p:txBody>
+      </p:sp>
+      <p:sp>
+        <p:nvSpPr>
+          <p:cNvPr id="8" name="">
+            <a:extLst xmlns:a="http://schemas.openxmlformats.org/drawingml/2006/main">
+              <a:ext uri="{FF2B5EF4-FFF2-40B4-BE49-F238E27FC236}">
+                <a16:creationId xmlns:a16="http://schemas.microsoft.com/office/drawing/2014/main" id="{489CFEDD-80F8-4368-8B3C-58B14C46A5EE}"/>
+              </a:ext>
+            </a:extLst>
+          </p:cNvPr>
+          <p:cNvSpPr>
+            <a:spLocks xmlns:a="http://schemas.openxmlformats.org/drawingml/2006/main" noGrp="1"/>
+          </p:cNvSpPr>
+          <p:nvPr/>
+        </p:nvSpPr>
+        <p:spPr>
+          <a:xfrm xmlns:a="http://schemas.openxmlformats.org/drawingml/2006/main">
+            <a:off x="6343650" y="2819400"/>
+            <a:ext cx="4762500" cy="857250"/>
+          </a:xfrm>
+          <a:prstGeom xmlns:a="http://schemas.openxmlformats.org/drawingml/2006/main" prst="rect">
+            <a:avLst/>
+          </a:prstGeom>
+          <a:noFill xmlns:a="http://schemas.openxmlformats.org/drawingml/2006/main"/>
+          <a:ln xmlns:a="http://schemas.openxmlformats.org/drawingml/2006/main" w="0">
+            <a:noFill/>
+          </a:ln>
+        </p:spPr>
+        <p:txBody>
+          <a:bodyPr xmlns:a="http://schemas.openxmlformats.org/drawingml/2006/main" wrap="square" lIns="0" tIns="0" rIns="0" bIns="0" anchor="t">
+            <a:normAutofit fontScale="100000"/>
+          </a:bodyPr>
+          <a:lstStyle xmlns:a="http://schemas.openxmlformats.org/drawingml/2006/main"/>
+          <a:p xmlns:a="http://schemas.openxmlformats.org/drawingml/2006/main">
+            <a:pPr algn="l">
+              <a:lnSpc>
+                <a:spcPct val="114000"/>
+              </a:lnSpc>
+              <a:buNone/>
+              <a:defRPr sz="1575" b="0" i="0">
+                <a:solidFill>
+                  <a:srgbClr val="C6D2DF"/>
+                </a:solidFill>
+                <a:latin typeface="Arial"/>
+                <a:ea typeface="Arial"/>
+                <a:cs typeface="Arial"/>
+              </a:defRPr>
+            </a:pPr>
+            <a:r>
+              <a:rPr sz="1575" b="0" i="0">
+                <a:solidFill>
+                  <a:srgbClr val="C6D2DF"/>
+                </a:solidFill>
+                <a:latin typeface="Arial"/>
+                <a:ea typeface="Arial"/>
+                <a:cs typeface="Arial"/>
+              </a:rPr>
+              <a:t>Use rule-based code for filtering, sorting, appending, grouping, deduplicating and clearing.</a:t>
+            </a:r>
+          </a:p>
+        </p:txBody>
+      </p:sp>
+      <p:sp>
+        <p:nvSpPr>
+          <p:cNvPr id="9" name="">
+            <a:extLst xmlns:a="http://schemas.openxmlformats.org/drawingml/2006/main">
+              <a:ext uri="{FF2B5EF4-FFF2-40B4-BE49-F238E27FC236}">
+                <a16:creationId xmlns:a16="http://schemas.microsoft.com/office/drawing/2014/main" id="{760EDB80-77DE-4B5D-9A86-3518FC44AA27}"/>
+              </a:ext>
+            </a:extLst>
+          </p:cNvPr>
+          <p:cNvSpPr>
+            <a:spLocks xmlns:a="http://schemas.openxmlformats.org/drawingml/2006/main" noGrp="1"/>
+          </p:cNvSpPr>
+          <p:nvPr/>
+        </p:nvSpPr>
+        <p:spPr>
+          <a:xfrm xmlns:a="http://schemas.openxmlformats.org/drawingml/2006/main">
+            <a:off x="5772150" y="1790700"/>
+            <a:ext cx="0" cy="2000250"/>
+          </a:xfrm>
+          <a:prstGeom xmlns:a="http://schemas.openxmlformats.org/drawingml/2006/main" prst="line">
+            <a:avLst/>
+          </a:prstGeom>
+          <a:noFill xmlns:a="http://schemas.openxmlformats.org/drawingml/2006/main"/>
+          <a:ln xmlns:a="http://schemas.openxmlformats.org/drawingml/2006/main" w="9525">
+            <a:solidFill>
+              <a:srgbClr val="344257"/>
+            </a:solidFill>
+            <a:prstDash val="solid"/>
+          </a:ln>
+        </p:spPr>
+      </p:sp>
+      <p:sp>
+        <p:nvSpPr>
+          <p:cNvPr id="10" name="">
+            <a:extLst xmlns:a="http://schemas.openxmlformats.org/drawingml/2006/main">
+              <a:ext uri="{FF2B5EF4-FFF2-40B4-BE49-F238E27FC236}">
+                <a16:creationId xmlns:a16="http://schemas.microsoft.com/office/drawing/2014/main" id="{74D887C8-8311-4D53-ADBE-FAC4F631696F}"/>
+              </a:ext>
+            </a:extLst>
+          </p:cNvPr>
+          <p:cNvSpPr>
+            <a:spLocks xmlns:a="http://schemas.openxmlformats.org/drawingml/2006/main" noGrp="1"/>
+          </p:cNvSpPr>
+          <p:nvPr/>
+        </p:nvSpPr>
+        <p:spPr>
+          <a:xfrm xmlns:a="http://schemas.openxmlformats.org/drawingml/2006/main">
+            <a:off x="609600" y="4238625"/>
+            <a:ext cx="10972800" cy="1409700"/>
+          </a:xfrm>
+          <a:prstGeom xmlns:a="http://schemas.openxmlformats.org/drawingml/2006/main" prst="rect">
+            <a:avLst/>
+          </a:prstGeom>
+          <a:solidFill xmlns:a="http://schemas.openxmlformats.org/drawingml/2006/main">
+            <a:srgbClr val="13243B"/>
+          </a:solidFill>
+          <a:ln xmlns:a="http://schemas.openxmlformats.org/drawingml/2006/main" w="9525">
+            <a:solidFill>
+              <a:srgbClr val="344257"/>
+            </a:solidFill>
+            <a:prstDash val="solid"/>
+          </a:ln>
+        </p:spPr>
+      </p:sp>
+      <p:sp>
+        <p:nvSpPr>
+          <p:cNvPr id="11" name="">
+            <a:extLst xmlns:a="http://schemas.openxmlformats.org/drawingml/2006/main">
+              <a:ext uri="{FF2B5EF4-FFF2-40B4-BE49-F238E27FC236}">
+                <a16:creationId xmlns:a16="http://schemas.microsoft.com/office/drawing/2014/main" id="{8FFAE56F-FE1E-49D1-BB1B-2FA93A2DB8AA}"/>
+              </a:ext>
+            </a:extLst>
+          </p:cNvPr>
+          <p:cNvSpPr>
+            <a:spLocks xmlns:a="http://schemas.openxmlformats.org/drawingml/2006/main" noGrp="1"/>
+          </p:cNvSpPr>
+          <p:nvPr/>
+        </p:nvSpPr>
+        <p:spPr>
+          <a:xfrm xmlns:a="http://schemas.openxmlformats.org/drawingml/2006/main">
+            <a:off x="876300" y="4476750"/>
+            <a:ext cx="2476500" cy="247650"/>
+          </a:xfrm>
+          <a:prstGeom xmlns:a="http://schemas.openxmlformats.org/drawingml/2006/main" prst="rect">
+            <a:avLst/>
+          </a:prstGeom>
+          <a:noFill xmlns:a="http://schemas.openxmlformats.org/drawingml/2006/main"/>
+          <a:ln xmlns:a="http://schemas.openxmlformats.org/drawingml/2006/main" w="0">
+            <a:noFill/>
+          </a:ln>
+        </p:spPr>
+        <p:txBody>
+          <a:bodyPr xmlns:a="http://schemas.openxmlformats.org/drawingml/2006/main" wrap="square" lIns="0" tIns="0" rIns="0" bIns="0" anchor="t">
+            <a:normAutofit fontScale="100000"/>
+          </a:bodyPr>
+          <a:lstStyle xmlns:a="http://schemas.openxmlformats.org/drawingml/2006/main"/>
+          <a:p xmlns:a="http://schemas.openxmlformats.org/drawingml/2006/main">
+            <a:pPr algn="l">
+              <a:lnSpc>
+                <a:spcPct val="105000"/>
+              </a:lnSpc>
+              <a:buNone/>
+              <a:defRPr sz="1050" b="1" i="0">
+                <a:solidFill>
+                  <a:srgbClr val="35C47A"/>
+                </a:solidFill>
+                <a:latin typeface="Arial"/>
+                <a:ea typeface="Arial"/>
+                <a:cs typeface="Arial"/>
+              </a:defRPr>
+            </a:pPr>
+            <a:r>
+              <a:rPr sz="1050" b="1" i="0">
+                <a:solidFill>
+                  <a:srgbClr val="35C47A"/>
+                </a:solidFill>
+                <a:latin typeface="Arial"/>
+                <a:ea typeface="Arial"/>
+                <a:cs typeface="Arial"/>
+              </a:rPr>
+              <a:t>LIVE RESEARCH DEMO</a:t>
+            </a:r>
+          </a:p>
+        </p:txBody>
+      </p:sp>
+      <p:sp>
+        <p:nvSpPr>
+          <p:cNvPr id="12" name="">
+            <a:extLst xmlns:a="http://schemas.openxmlformats.org/drawingml/2006/main">
+              <a:ext uri="{FF2B5EF4-FFF2-40B4-BE49-F238E27FC236}">
+                <a16:creationId xmlns:a16="http://schemas.microsoft.com/office/drawing/2014/main" id="{7E00ED1F-D770-41D0-810B-5A25AF149396}"/>
+              </a:ext>
+            </a:extLst>
+          </p:cNvPr>
+          <p:cNvSpPr>
+            <a:spLocks xmlns:a="http://schemas.openxmlformats.org/drawingml/2006/main" noGrp="1"/>
+          </p:cNvSpPr>
+          <p:nvPr/>
+        </p:nvSpPr>
+        <p:spPr>
+          <a:xfrm xmlns:a="http://schemas.openxmlformats.org/drawingml/2006/main">
+            <a:off x="876300" y="4810125"/>
+            <a:ext cx="5715000" cy="342900"/>
+          </a:xfrm>
+          <a:prstGeom xmlns:a="http://schemas.openxmlformats.org/drawingml/2006/main" prst="rect">
+            <a:avLst/>
+          </a:prstGeom>
+          <a:noFill xmlns:a="http://schemas.openxmlformats.org/drawingml/2006/main"/>
+          <a:ln xmlns:a="http://schemas.openxmlformats.org/drawingml/2006/main" w="0">
+            <a:noFill/>
+          </a:ln>
+        </p:spPr>
+        <p:txBody>
+          <a:bodyPr xmlns:a="http://schemas.openxmlformats.org/drawingml/2006/main" wrap="square" lIns="0" tIns="0" rIns="0" bIns="0" anchor="t">
+            <a:normAutofit fontScale="100000"/>
+          </a:bodyPr>
+          <a:lstStyle xmlns:a="http://schemas.openxmlformats.org/drawingml/2006/main"/>
+          <a:p xmlns:a="http://schemas.openxmlformats.org/drawingml/2006/main">
+            <a:pPr algn="l">
+              <a:lnSpc>
+                <a:spcPct val="105000"/>
+              </a:lnSpc>
+              <a:buNone/>
+              <a:defRPr sz="1725" b="1" i="0">
+                <a:solidFill>
+                  <a:srgbClr val="FFFFFF"/>
+                </a:solidFill>
+                <a:latin typeface="Arial"/>
+                <a:ea typeface="Arial"/>
+                <a:cs typeface="Arial"/>
+              </a:defRPr>
+            </a:pPr>
+            <a:r>
+              <a:rPr sz="1725" b="1" i="0">
+                <a:solidFill>
+                  <a:srgbClr val="FFFFFF"/>
+                </a:solidFill>
+                <a:latin typeface="Arial"/>
+                <a:ea typeface="Arial"/>
+                <a:cs typeface="Arial"/>
+                <a:hlinkClick xmlns:r="http://schemas.openxmlformats.org/officeDocument/2006/relationships" r:id="Rba486f294a474caf"/>
+              </a:rPr>
+              <a:t>masterasnackin.github.io/FormulaBench/</a:t>
+            </a:r>
+          </a:p>
+        </p:txBody>
+      </p:sp>
+      <p:sp>
+        <p:nvSpPr>
+          <p:cNvPr id="13" name="">
+            <a:extLst xmlns:a="http://schemas.openxmlformats.org/drawingml/2006/main">
+              <a:ext uri="{FF2B5EF4-FFF2-40B4-BE49-F238E27FC236}">
+                <a16:creationId xmlns:a16="http://schemas.microsoft.com/office/drawing/2014/main" id="{C7129F43-6B1D-4993-9E98-40FB58A94850}"/>
+              </a:ext>
+            </a:extLst>
+          </p:cNvPr>
+          <p:cNvSpPr>
+            <a:spLocks xmlns:a="http://schemas.openxmlformats.org/drawingml/2006/main" noGrp="1"/>
+          </p:cNvSpPr>
+          <p:nvPr/>
+        </p:nvSpPr>
+        <p:spPr>
+          <a:xfrm xmlns:a="http://schemas.openxmlformats.org/drawingml/2006/main">
+            <a:off x="7239000" y="4476750"/>
+            <a:ext cx="2667000" cy="247650"/>
+          </a:xfrm>
+          <a:prstGeom xmlns:a="http://schemas.openxmlformats.org/drawingml/2006/main" prst="rect">
+            <a:avLst/>
+          </a:prstGeom>
+          <a:noFill xmlns:a="http://schemas.openxmlformats.org/drawingml/2006/main"/>
+          <a:ln xmlns:a="http://schemas.openxmlformats.org/drawingml/2006/main" w="0">
+            <a:noFill/>
+          </a:ln>
+        </p:spPr>
+        <p:txBody>
+          <a:bodyPr xmlns:a="http://schemas.openxmlformats.org/drawingml/2006/main" wrap="square" lIns="0" tIns="0" rIns="0" bIns="0" anchor="t">
+            <a:normAutofit fontScale="100000"/>
+          </a:bodyPr>
+          <a:lstStyle xmlns:a="http://schemas.openxmlformats.org/drawingml/2006/main"/>
+          <a:p xmlns:a="http://schemas.openxmlformats.org/drawingml/2006/main">
+            <a:pPr algn="l">
+              <a:lnSpc>
+                <a:spcPct val="105000"/>
+              </a:lnSpc>
+              <a:buNone/>
+              <a:defRPr sz="1050" b="1" i="0">
+                <a:solidFill>
+                  <a:srgbClr val="35C47A"/>
+                </a:solidFill>
+                <a:latin typeface="Arial"/>
+                <a:ea typeface="Arial"/>
+                <a:cs typeface="Arial"/>
+              </a:defRPr>
+            </a:pPr>
+            <a:r>
+              <a:rPr sz="1050" b="1" i="0">
+                <a:solidFill>
+                  <a:srgbClr val="35C47A"/>
+                </a:solidFill>
+                <a:latin typeface="Arial"/>
+                <a:ea typeface="Arial"/>
+                <a:cs typeface="Arial"/>
+              </a:rPr>
+              <a:t>PUBLIC REPOSITORY</a:t>
+            </a:r>
+          </a:p>
+        </p:txBody>
+      </p:sp>
+      <p:sp>
+        <p:nvSpPr>
+          <p:cNvPr id="14" name="">
+            <a:extLst xmlns:a="http://schemas.openxmlformats.org/drawingml/2006/main">
+              <a:ext uri="{FF2B5EF4-FFF2-40B4-BE49-F238E27FC236}">
+                <a16:creationId xmlns:a16="http://schemas.microsoft.com/office/drawing/2014/main" id="{90450E14-48DB-4B1D-954D-BA25B5004995}"/>
+              </a:ext>
+            </a:extLst>
+          </p:cNvPr>
+          <p:cNvSpPr>
+            <a:spLocks xmlns:a="http://schemas.openxmlformats.org/drawingml/2006/main" noGrp="1"/>
+          </p:cNvSpPr>
+          <p:nvPr/>
+        </p:nvSpPr>
+        <p:spPr>
+          <a:xfrm xmlns:a="http://schemas.openxmlformats.org/drawingml/2006/main">
+            <a:off x="7239000" y="4810125"/>
+            <a:ext cx="4095750" cy="342900"/>
+          </a:xfrm>
+          <a:prstGeom xmlns:a="http://schemas.openxmlformats.org/drawingml/2006/main" prst="rect">
+            <a:avLst/>
+          </a:prstGeom>
+          <a:noFill xmlns:a="http://schemas.openxmlformats.org/drawingml/2006/main"/>
+          <a:ln xmlns:a="http://schemas.openxmlformats.org/drawingml/2006/main" w="0">
+            <a:noFill/>
+          </a:ln>
+        </p:spPr>
+        <p:txBody>
+          <a:bodyPr xmlns:a="http://schemas.openxmlformats.org/drawingml/2006/main" wrap="square" lIns="0" tIns="0" rIns="0" bIns="0" anchor="t">
+            <a:normAutofit fontScale="100000"/>
+          </a:bodyPr>
+          <a:lstStyle xmlns:a="http://schemas.openxmlformats.org/drawingml/2006/main"/>
+          <a:p xmlns:a="http://schemas.openxmlformats.org/drawingml/2006/main">
+            <a:pPr algn="l">
+              <a:lnSpc>
+                <a:spcPct val="105000"/>
+              </a:lnSpc>
+              <a:buNone/>
+              <a:defRPr sz="1350" b="1" i="0">
+                <a:solidFill>
+                  <a:srgbClr val="FFFFFF"/>
+                </a:solidFill>
+                <a:latin typeface="Arial"/>
+                <a:ea typeface="Arial"/>
+                <a:cs typeface="Arial"/>
+              </a:defRPr>
+            </a:pPr>
+            <a:r>
+              <a:rPr sz="1350" b="1" i="0">
+                <a:solidFill>
+                  <a:srgbClr val="FFFFFF"/>
+                </a:solidFill>
+                <a:latin typeface="Arial"/>
+                <a:ea typeface="Arial"/>
+                <a:cs typeface="Arial"/>
+                <a:hlinkClick xmlns:r="http://schemas.openxmlformats.org/officeDocument/2006/relationships" r:id="R86d384fec8fd49da"/>
+              </a:rPr>
+              <a:t>github.com/MasteraSnackin/FormulaBench</a:t>
+            </a:r>
+          </a:p>
+        </p:txBody>
+      </p:sp>
+      <p:sp>
+        <p:nvSpPr>
+          <p:cNvPr id="15" name="">
+            <a:extLst xmlns:a="http://schemas.openxmlformats.org/drawingml/2006/main">
+              <a:ext uri="{FF2B5EF4-FFF2-40B4-BE49-F238E27FC236}">
+                <a16:creationId xmlns:a16="http://schemas.microsoft.com/office/drawing/2014/main" id="{18C7BE28-6CB0-4655-A0FB-A04BBF37EC26}"/>
+              </a:ext>
+            </a:extLst>
+          </p:cNvPr>
+          <p:cNvSpPr>
+            <a:spLocks xmlns:a="http://schemas.openxmlformats.org/drawingml/2006/main" noGrp="1"/>
+          </p:cNvSpPr>
+          <p:nvPr/>
+        </p:nvSpPr>
+        <p:spPr>
+          <a:xfrm xmlns:a="http://schemas.openxmlformats.org/drawingml/2006/main">
+            <a:off x="609600" y="5962650"/>
+            <a:ext cx="9048750" cy="285750"/>
+          </a:xfrm>
+          <a:prstGeom xmlns:a="http://schemas.openxmlformats.org/drawingml/2006/main" prst="rect">
+            <a:avLst/>
+          </a:prstGeom>
+          <a:noFill xmlns:a="http://schemas.openxmlformats.org/drawingml/2006/main"/>
+          <a:ln xmlns:a="http://schemas.openxmlformats.org/drawingml/2006/main" w="0">
+            <a:noFill/>
+          </a:ln>
+        </p:spPr>
+        <p:txBody>
+          <a:bodyPr xmlns:a="http://schemas.openxmlformats.org/drawingml/2006/main" wrap="square" lIns="0" tIns="0" rIns="0" bIns="0" anchor="t">
+            <a:normAutofit fontScale="100000"/>
+          </a:bodyPr>
+          <a:lstStyle xmlns:a="http://schemas.openxmlformats.org/drawingml/2006/main"/>
+          <a:p xmlns:a="http://schemas.openxmlformats.org/drawingml/2006/main">
+            <a:pPr algn="l">
+              <a:lnSpc>
+                <a:spcPct val="105000"/>
+              </a:lnSpc>
+              <a:buNone/>
+              <a:defRPr sz="1425" b="0" i="0">
+                <a:solidFill>
+                  <a:srgbClr val="AAB6C5"/>
+                </a:solidFill>
+                <a:latin typeface="Arial"/>
+                <a:ea typeface="Arial"/>
+                <a:cs typeface="Arial"/>
+              </a:defRPr>
+            </a:pPr>
+            <a:r>
+              <a:rPr sz="1425" b="0" i="0">
+                <a:solidFill>
+                  <a:srgbClr val="AAB6C5"/>
+                </a:solidFill>
+                <a:latin typeface="Arial"/>
+                <a:ea typeface="Arial"/>
+                <a:cs typeface="Arial"/>
+              </a:rPr>
+              <a:t>The organiser's private benchmark is the unseen evaluation.</a:t>
+            </a:r>
+          </a:p>
+        </p:txBody>
+      </p:sp>
+      <p:sp>
+        <p:nvSpPr>
+          <p:cNvPr id="16" name="">
+            <a:extLst xmlns:a="http://schemas.openxmlformats.org/drawingml/2006/main">
+              <a:ext uri="{FF2B5EF4-FFF2-40B4-BE49-F238E27FC236}">
+                <a16:creationId xmlns:a16="http://schemas.microsoft.com/office/drawing/2014/main" id="{D5340E2C-45F5-4471-824C-07AD6A8F3877}"/>
+              </a:ext>
+            </a:extLst>
+          </p:cNvPr>
+          <p:cNvSpPr>
+            <a:spLocks xmlns:a="http://schemas.openxmlformats.org/drawingml/2006/main" noGrp="1"/>
+          </p:cNvSpPr>
+          <p:nvPr/>
+        </p:nvSpPr>
+        <p:spPr>
+          <a:xfrm xmlns:a="http://schemas.openxmlformats.org/drawingml/2006/main">
+            <a:off x="609600" y="6429375"/>
+            <a:ext cx="10972800" cy="0"/>
+          </a:xfrm>
+          <a:prstGeom xmlns:a="http://schemas.openxmlformats.org/drawingml/2006/main" prst="line">
+            <a:avLst/>
+          </a:prstGeom>
+          <a:noFill xmlns:a="http://schemas.openxmlformats.org/drawingml/2006/main"/>
+          <a:ln xmlns:a="http://schemas.openxmlformats.org/drawingml/2006/main" w="9525">
+            <a:solidFill>
+              <a:srgbClr val="344257"/>
+            </a:solidFill>
+            <a:prstDash val="solid"/>
+          </a:ln>
+        </p:spPr>
+      </p:sp>
+      <p:sp>
+        <p:nvSpPr>
+          <p:cNvPr id="17" name="">
+            <a:extLst xmlns:a="http://schemas.openxmlformats.org/drawingml/2006/main">
+              <a:ext uri="{FF2B5EF4-FFF2-40B4-BE49-F238E27FC236}">
+                <a16:creationId xmlns:a16="http://schemas.microsoft.com/office/drawing/2014/main" id="{198DF912-0D27-448E-9A1E-F3406CAC15A9}"/>
+              </a:ext>
+            </a:extLst>
+          </p:cNvPr>
+          <p:cNvSpPr>
+            <a:spLocks xmlns:a="http://schemas.openxmlformats.org/drawingml/2006/main" noGrp="1"/>
+          </p:cNvSpPr>
+          <p:nvPr/>
+        </p:nvSpPr>
+        <p:spPr>
+          <a:xfrm xmlns:a="http://schemas.openxmlformats.org/drawingml/2006/main">
+            <a:off x="609600" y="6553200"/>
+            <a:ext cx="6191250" cy="171450"/>
+          </a:xfrm>
+          <a:prstGeom xmlns:a="http://schemas.openxmlformats.org/drawingml/2006/main" prst="rect">
+            <a:avLst/>
+          </a:prstGeom>
+          <a:noFill xmlns:a="http://schemas.openxmlformats.org/drawingml/2006/main"/>
+          <a:ln xmlns:a="http://schemas.openxmlformats.org/drawingml/2006/main" w="0">
+            <a:noFill/>
+          </a:ln>
+        </p:spPr>
+        <p:txBody>
+          <a:bodyPr xmlns:a="http://schemas.openxmlformats.org/drawingml/2006/main" wrap="square" lIns="0" tIns="0" rIns="0" bIns="0" anchor="ctr">
+            <a:normAutofit fontScale="100000"/>
+          </a:bodyPr>
+          <a:lstStyle xmlns:a="http://schemas.openxmlformats.org/drawingml/2006/main"/>
+          <a:p xmlns:a="http://schemas.openxmlformats.org/drawingml/2006/main">
+            <a:pPr algn="l">
+              <a:lnSpc>
+                <a:spcPct val="105000"/>
+              </a:lnSpc>
+              <a:buNone/>
+              <a:defRPr sz="900" b="1" i="0">
+                <a:solidFill>
+                  <a:srgbClr val="AAB6C5"/>
+                </a:solidFill>
+                <a:latin typeface="Arial"/>
+                <a:ea typeface="Arial"/>
+                <a:cs typeface="Arial"/>
+              </a:defRPr>
+            </a:pPr>
+            <a:r>
+              <a:rPr sz="900" b="1" i="0">
+                <a:solidFill>
+                  <a:srgbClr val="AAB6C5"/>
+                </a:solidFill>
+                <a:latin typeface="Arial"/>
+                <a:ea typeface="Arial"/>
+                <a:cs typeface="Arial"/>
+              </a:rPr>
+              <a:t>FORMULABENCH  ·  RESEARCH: EXCEL FORMULA GENERATION</a:t>
+            </a:r>
+          </a:p>
+        </p:txBody>
+      </p:sp>
+      <p:sp>
+        <p:nvSpPr>
+          <p:cNvPr id="18" name="">
+            <a:extLst xmlns:a="http://schemas.openxmlformats.org/drawingml/2006/main">
+              <a:ext uri="{FF2B5EF4-FFF2-40B4-BE49-F238E27FC236}">
+                <a16:creationId xmlns:a16="http://schemas.microsoft.com/office/drawing/2014/main" id="{FFFB0801-FD2E-4EAC-905B-0BAFDF20B4D7}"/>
+              </a:ext>
+            </a:extLst>
+          </p:cNvPr>
+          <p:cNvSpPr>
+            <a:spLocks xmlns:a="http://schemas.openxmlformats.org/drawingml/2006/main" noGrp="1"/>
+          </p:cNvSpPr>
+          <p:nvPr/>
+        </p:nvSpPr>
+        <p:spPr>
+          <a:xfrm xmlns:a="http://schemas.openxmlformats.org/drawingml/2006/main">
+            <a:off x="11049000" y="6553200"/>
+            <a:ext cx="533400" cy="171450"/>
+          </a:xfrm>
+          <a:prstGeom xmlns:a="http://schemas.openxmlformats.org/drawingml/2006/main" prst="rect">
+            <a:avLst/>
+          </a:prstGeom>
+          <a:noFill xmlns:a="http://schemas.openxmlformats.org/drawingml/2006/main"/>
+          <a:ln xmlns:a="http://schemas.openxmlformats.org/drawingml/2006/main" w="0">
+            <a:noFill/>
+          </a:ln>
+        </p:spPr>
+        <p:txBody>
+          <a:bodyPr xmlns:a="http://schemas.openxmlformats.org/drawingml/2006/main" wrap="square" lIns="0" tIns="0" rIns="0" bIns="0" anchor="ctr">
+            <a:normAutofit fontScale="100000"/>
+          </a:bodyPr>
+          <a:lstStyle xmlns:a="http://schemas.openxmlformats.org/drawingml/2006/main"/>
+          <a:p xmlns:a="http://schemas.openxmlformats.org/drawingml/2006/main">
+            <a:pPr algn="r">
+              <a:lnSpc>
+                <a:spcPct val="105000"/>
+              </a:lnSpc>
+              <a:buNone/>
+              <a:defRPr sz="900" b="1" i="0">
+                <a:solidFill>
+                  <a:srgbClr val="AAB6C5"/>
+                </a:solidFill>
+                <a:latin typeface="Arial"/>
+                <a:ea typeface="Arial"/>
+                <a:cs typeface="Arial"/>
+              </a:defRPr>
+            </a:pPr>
+            <a:r>
+              <a:rPr sz="900" b="1" i="0">
+                <a:solidFill>
+                  <a:srgbClr val="AAB6C5"/>
+                </a:solidFill>
+                <a:latin typeface="Arial"/>
+                <a:ea typeface="Arial"/>
+                <a:cs typeface="Arial"/>
+              </a:rPr>
+              <a:t>11</a:t>
+            </a:r>
+          </a:p>
+        </p:txBody>
+      </p:sp>
+    </p:spTree>
+    <p:extLst>
+      <p:ext uri="{BB962C8B-B14F-4D97-AF65-F5344CB8AC3E}">
+        <p14:creationId xmlns:p14="http://schemas.microsoft.com/office/powerpoint/2010/main" val="1535364646"/>
       </p:ext>
     </p:extLst>
   </p:cSld>
@@ -2769,7 +5159,7 @@
           <p:cNvPr id="14" name="slide-title">
             <a:extLst xmlns:a="http://schemas.openxmlformats.org/drawingml/2006/main">
               <a:ext uri="{FF2B5EF4-FFF2-40B4-BE49-F238E27FC236}">
-                <a16:creationId xmlns:a16="http://schemas.microsoft.com/office/drawing/2014/main" id="{611FD147-FF70-423E-BA3B-51FD9F56A046}"/>
+                <a16:creationId xmlns:a16="http://schemas.microsoft.com/office/drawing/2014/main" id="{0BA2D859-3DA0-4664-A769-7B927FFBFAA6}"/>
               </a:ext>
             </a:extLst>
           </p:cNvPr>
@@ -2830,7 +5220,7 @@
           <p:cNvPr id="2" name="">
             <a:extLst xmlns:a="http://schemas.openxmlformats.org/drawingml/2006/main">
               <a:ext uri="{FF2B5EF4-FFF2-40B4-BE49-F238E27FC236}">
-                <a16:creationId xmlns:a16="http://schemas.microsoft.com/office/drawing/2014/main" id="{7D9B5CFB-7F05-45E7-9F3B-C7086A631EDC}"/>
+                <a16:creationId xmlns:a16="http://schemas.microsoft.com/office/drawing/2014/main" id="{2C7526FE-B230-4F31-9991-8AF5E0EF4821}"/>
               </a:ext>
             </a:extLst>
           </p:cNvPr>
@@ -2891,7 +5281,7 @@
           <p:cNvPr id="3" name="">
             <a:extLst xmlns:a="http://schemas.openxmlformats.org/drawingml/2006/main">
               <a:ext uri="{FF2B5EF4-FFF2-40B4-BE49-F238E27FC236}">
-                <a16:creationId xmlns:a16="http://schemas.microsoft.com/office/drawing/2014/main" id="{DAA5778F-1002-4E01-BE2D-F7852457B9A9}"/>
+                <a16:creationId xmlns:a16="http://schemas.microsoft.com/office/drawing/2014/main" id="{BB5A9FD6-F359-4280-83B9-2D110AF31DCD}"/>
               </a:ext>
             </a:extLst>
           </p:cNvPr>
@@ -2952,7 +5342,7 @@
           <p:cNvPr id="4" name="">
             <a:extLst xmlns:a="http://schemas.openxmlformats.org/drawingml/2006/main">
               <a:ext uri="{FF2B5EF4-FFF2-40B4-BE49-F238E27FC236}">
-                <a16:creationId xmlns:a16="http://schemas.microsoft.com/office/drawing/2014/main" id="{E43100AF-9FE7-4865-8C0D-809DB40854C2}"/>
+                <a16:creationId xmlns:a16="http://schemas.microsoft.com/office/drawing/2014/main" id="{13C53ECE-1E50-4720-84F6-13AE2654B13B}"/>
               </a:ext>
             </a:extLst>
           </p:cNvPr>
@@ -3013,7 +5403,7 @@
           <p:cNvPr id="5" name="">
             <a:extLst xmlns:a="http://schemas.openxmlformats.org/drawingml/2006/main">
               <a:ext uri="{FF2B5EF4-FFF2-40B4-BE49-F238E27FC236}">
-                <a16:creationId xmlns:a16="http://schemas.microsoft.com/office/drawing/2014/main" id="{F3ECD7CE-2E1C-4104-8B19-712C8F182BCA}"/>
+                <a16:creationId xmlns:a16="http://schemas.microsoft.com/office/drawing/2014/main" id="{652A2479-8A28-40AE-8226-C78A34596037}"/>
               </a:ext>
             </a:extLst>
           </p:cNvPr>
@@ -3074,7 +5464,7 @@
           <p:cNvPr id="6" name="">
             <a:extLst xmlns:a="http://schemas.openxmlformats.org/drawingml/2006/main">
               <a:ext uri="{FF2B5EF4-FFF2-40B4-BE49-F238E27FC236}">
-                <a16:creationId xmlns:a16="http://schemas.microsoft.com/office/drawing/2014/main" id="{A82ADD72-2100-4E73-9205-E0CA3F65BF26}"/>
+                <a16:creationId xmlns:a16="http://schemas.microsoft.com/office/drawing/2014/main" id="{595A835E-EF07-42C3-AABD-5E2498360190}"/>
               </a:ext>
             </a:extLst>
           </p:cNvPr>
@@ -3135,7 +5525,7 @@
           <p:cNvPr id="7" name="">
             <a:extLst xmlns:a="http://schemas.openxmlformats.org/drawingml/2006/main">
               <a:ext uri="{FF2B5EF4-FFF2-40B4-BE49-F238E27FC236}">
-                <a16:creationId xmlns:a16="http://schemas.microsoft.com/office/drawing/2014/main" id="{304C6E70-D4F1-47DA-B545-245036540CFD}"/>
+                <a16:creationId xmlns:a16="http://schemas.microsoft.com/office/drawing/2014/main" id="{059DAF4F-DC84-467C-8FEA-2FD552ACB8DA}"/>
               </a:ext>
             </a:extLst>
           </p:cNvPr>
@@ -3196,7 +5586,7 @@
           <p:cNvPr id="8" name="">
             <a:extLst xmlns:a="http://schemas.openxmlformats.org/drawingml/2006/main">
               <a:ext uri="{FF2B5EF4-FFF2-40B4-BE49-F238E27FC236}">
-                <a16:creationId xmlns:a16="http://schemas.microsoft.com/office/drawing/2014/main" id="{EC4879FF-5969-47D4-8A79-6916582CC1CF}"/>
+                <a16:creationId xmlns:a16="http://schemas.microsoft.com/office/drawing/2014/main" id="{E84B23E8-68C4-4E74-B7F2-0CDD798D1553}"/>
               </a:ext>
             </a:extLst>
           </p:cNvPr>
@@ -3264,7 +5654,7 @@
         </p:xfrm>
         <a:graphic xmlns:a="http://schemas.openxmlformats.org/drawingml/2006/main">
           <a:graphicData uri="http://schemas.openxmlformats.org/drawingml/2006/chart">
-            <c:chart xmlns:r="http://schemas.openxmlformats.org/officeDocument/2006/relationships" xmlns:c="http://schemas.openxmlformats.org/drawingml/2006/chart" r:id="R9f851c1b40b44d4d"/>
+            <c:chart xmlns:r="http://schemas.openxmlformats.org/officeDocument/2006/relationships" xmlns:c="http://schemas.openxmlformats.org/drawingml/2006/chart" r:id="R4d627c54cb564690"/>
           </a:graphicData>
         </a:graphic>
       </p:graphicFrame>
@@ -3273,7 +5663,7 @@
           <p:cNvPr id="10" name="">
             <a:extLst xmlns:a="http://schemas.openxmlformats.org/drawingml/2006/main">
               <a:ext uri="{FF2B5EF4-FFF2-40B4-BE49-F238E27FC236}">
-                <a16:creationId xmlns:a16="http://schemas.microsoft.com/office/drawing/2014/main" id="{47383E9D-6EAE-4587-86F8-FC107713ECCB}"/>
+                <a16:creationId xmlns:a16="http://schemas.microsoft.com/office/drawing/2014/main" id="{684F03D8-738F-4F81-BF6B-16B36C254786}"/>
               </a:ext>
             </a:extLst>
           </p:cNvPr>
@@ -3334,7 +5724,7 @@
           <p:cNvPr id="11" name="">
             <a:extLst xmlns:a="http://schemas.openxmlformats.org/drawingml/2006/main">
               <a:ext uri="{FF2B5EF4-FFF2-40B4-BE49-F238E27FC236}">
-                <a16:creationId xmlns:a16="http://schemas.microsoft.com/office/drawing/2014/main" id="{2FDFA147-E92F-4F55-BA1F-43B245B6A111}"/>
+                <a16:creationId xmlns:a16="http://schemas.microsoft.com/office/drawing/2014/main" id="{73286A4D-68A2-4E90-8DCD-B284C7C31C91}"/>
               </a:ext>
             </a:extLst>
           </p:cNvPr>
@@ -3365,7 +5755,7 @@
           <p:cNvPr id="12" name="">
             <a:extLst xmlns:a="http://schemas.openxmlformats.org/drawingml/2006/main">
               <a:ext uri="{FF2B5EF4-FFF2-40B4-BE49-F238E27FC236}">
-                <a16:creationId xmlns:a16="http://schemas.microsoft.com/office/drawing/2014/main" id="{8AA4F7E7-B9CC-408B-8445-B0CF27E80CF1}"/>
+                <a16:creationId xmlns:a16="http://schemas.microsoft.com/office/drawing/2014/main" id="{FD25B531-CDE9-43AF-859B-16704DB78B56}"/>
               </a:ext>
             </a:extLst>
           </p:cNvPr>
@@ -3426,7 +5816,7 @@
           <p:cNvPr id="13" name="">
             <a:extLst xmlns:a="http://schemas.openxmlformats.org/drawingml/2006/main">
               <a:ext uri="{FF2B5EF4-FFF2-40B4-BE49-F238E27FC236}">
-                <a16:creationId xmlns:a16="http://schemas.microsoft.com/office/drawing/2014/main" id="{156CE0F6-85A3-4004-AEE8-0128B00D3806}"/>
+                <a16:creationId xmlns:a16="http://schemas.microsoft.com/office/drawing/2014/main" id="{BF2EFA9A-1572-444E-88BB-867754F0CE25}"/>
               </a:ext>
             </a:extLst>
           </p:cNvPr>
@@ -3485,7 +5875,7 @@
     </p:spTree>
     <p:extLst>
       <p:ext uri="{BB962C8B-B14F-4D97-AF65-F5344CB8AC3E}">
-        <p14:creationId xmlns:p14="http://schemas.microsoft.com/office/powerpoint/2010/main" val="1030178246"/>
+        <p14:creationId xmlns:p14="http://schemas.microsoft.com/office/powerpoint/2010/main" val="1599440613"/>
       </p:ext>
     </p:extLst>
   </p:cSld>
@@ -3516,7 +5906,7 @@
           <p:cNvPr id="32" name="slide-title">
             <a:extLst xmlns:a="http://schemas.openxmlformats.org/drawingml/2006/main">
               <a:ext uri="{FF2B5EF4-FFF2-40B4-BE49-F238E27FC236}">
-                <a16:creationId xmlns:a16="http://schemas.microsoft.com/office/drawing/2014/main" id="{1ABA3F94-EA67-4DD6-85C7-DBB85CCC82C4}"/>
+                <a16:creationId xmlns:a16="http://schemas.microsoft.com/office/drawing/2014/main" id="{88AA8BCF-0F5B-49D6-8DE0-91A9E1398180}"/>
               </a:ext>
             </a:extLst>
           </p:cNvPr>
@@ -3577,7 +5967,7 @@
           <p:cNvPr id="2" name="">
             <a:extLst xmlns:a="http://schemas.openxmlformats.org/drawingml/2006/main">
               <a:ext uri="{FF2B5EF4-FFF2-40B4-BE49-F238E27FC236}">
-                <a16:creationId xmlns:a16="http://schemas.microsoft.com/office/drawing/2014/main" id="{BAC6E82A-3C95-455F-9F75-DCE200C88410}"/>
+                <a16:creationId xmlns:a16="http://schemas.microsoft.com/office/drawing/2014/main" id="{AA7C5634-C637-45C3-A787-A293A5CCDFD2}"/>
               </a:ext>
             </a:extLst>
           </p:cNvPr>
@@ -3638,7 +6028,7 @@
           <p:cNvPr id="3" name="">
             <a:extLst xmlns:a="http://schemas.openxmlformats.org/drawingml/2006/main">
               <a:ext uri="{FF2B5EF4-FFF2-40B4-BE49-F238E27FC236}">
-                <a16:creationId xmlns:a16="http://schemas.microsoft.com/office/drawing/2014/main" id="{6021C872-5AFF-41F2-959B-3A80C93444EA}"/>
+                <a16:creationId xmlns:a16="http://schemas.microsoft.com/office/drawing/2014/main" id="{AB9A588B-959F-4DD2-AE79-8730BA832AB6}"/>
               </a:ext>
             </a:extLst>
           </p:cNvPr>
@@ -3671,7 +6061,7 @@
           <p:cNvPr id="4" name="">
             <a:extLst xmlns:a="http://schemas.openxmlformats.org/drawingml/2006/main">
               <a:ext uri="{FF2B5EF4-FFF2-40B4-BE49-F238E27FC236}">
-                <a16:creationId xmlns:a16="http://schemas.microsoft.com/office/drawing/2014/main" id="{9E9EBE45-F0C9-4518-9777-E7F6B232846F}"/>
+                <a16:creationId xmlns:a16="http://schemas.microsoft.com/office/drawing/2014/main" id="{6441867C-E644-4FDB-966F-D59A40E8B747}"/>
               </a:ext>
             </a:extLst>
           </p:cNvPr>
@@ -3701,7 +6091,7 @@
           <p:cNvPr id="5" name="">
             <a:extLst xmlns:a="http://schemas.openxmlformats.org/drawingml/2006/main">
               <a:ext uri="{FF2B5EF4-FFF2-40B4-BE49-F238E27FC236}">
-                <a16:creationId xmlns:a16="http://schemas.microsoft.com/office/drawing/2014/main" id="{1E9738DD-0891-4676-BA41-54BB207B06B1}"/>
+                <a16:creationId xmlns:a16="http://schemas.microsoft.com/office/drawing/2014/main" id="{CFF1D343-4C49-4661-8962-1164C0D28029}"/>
               </a:ext>
             </a:extLst>
           </p:cNvPr>
@@ -3762,7 +6152,7 @@
           <p:cNvPr id="6" name="">
             <a:extLst xmlns:a="http://schemas.openxmlformats.org/drawingml/2006/main">
               <a:ext uri="{FF2B5EF4-FFF2-40B4-BE49-F238E27FC236}">
-                <a16:creationId xmlns:a16="http://schemas.microsoft.com/office/drawing/2014/main" id="{27C2880A-6552-4438-A6C1-1BDAFB72C1D7}"/>
+                <a16:creationId xmlns:a16="http://schemas.microsoft.com/office/drawing/2014/main" id="{5F7C9A35-EC86-461F-96F0-0DD393D57412}"/>
               </a:ext>
             </a:extLst>
           </p:cNvPr>
@@ -3823,7 +6213,7 @@
           <p:cNvPr id="7" name="">
             <a:extLst xmlns:a="http://schemas.openxmlformats.org/drawingml/2006/main">
               <a:ext uri="{FF2B5EF4-FFF2-40B4-BE49-F238E27FC236}">
-                <a16:creationId xmlns:a16="http://schemas.microsoft.com/office/drawing/2014/main" id="{B2FC8E18-1188-40F3-826A-2010CD5E6811}"/>
+                <a16:creationId xmlns:a16="http://schemas.microsoft.com/office/drawing/2014/main" id="{E5476147-1F1D-4732-9244-05CE8EA29499}"/>
               </a:ext>
             </a:extLst>
           </p:cNvPr>
@@ -3884,7 +6274,7 @@
           <p:cNvPr id="8" name="">
             <a:extLst xmlns:a="http://schemas.openxmlformats.org/drawingml/2006/main">
               <a:ext uri="{FF2B5EF4-FFF2-40B4-BE49-F238E27FC236}">
-                <a16:creationId xmlns:a16="http://schemas.microsoft.com/office/drawing/2014/main" id="{6298B0A7-D748-4F63-893F-00D179DEEC90}"/>
+                <a16:creationId xmlns:a16="http://schemas.microsoft.com/office/drawing/2014/main" id="{FE24A0A6-8F51-45A1-86F1-429F42263B00}"/>
               </a:ext>
             </a:extLst>
           </p:cNvPr>
@@ -3945,7 +6335,7 @@
           <p:cNvPr id="9" name="">
             <a:extLst xmlns:a="http://schemas.openxmlformats.org/drawingml/2006/main">
               <a:ext uri="{FF2B5EF4-FFF2-40B4-BE49-F238E27FC236}">
-                <a16:creationId xmlns:a16="http://schemas.microsoft.com/office/drawing/2014/main" id="{D70A4F1C-B04C-4426-8048-0D053FCA6C39}"/>
+                <a16:creationId xmlns:a16="http://schemas.microsoft.com/office/drawing/2014/main" id="{0C569286-2B5F-4B03-B029-5701B98EDBAB}"/>
               </a:ext>
             </a:extLst>
           </p:cNvPr>
@@ -4006,7 +6396,7 @@
           <p:cNvPr id="10" name="">
             <a:extLst xmlns:a="http://schemas.openxmlformats.org/drawingml/2006/main">
               <a:ext uri="{FF2B5EF4-FFF2-40B4-BE49-F238E27FC236}">
-                <a16:creationId xmlns:a16="http://schemas.microsoft.com/office/drawing/2014/main" id="{5F2C4572-432C-4574-BD42-9B2F4BFF320A}"/>
+                <a16:creationId xmlns:a16="http://schemas.microsoft.com/office/drawing/2014/main" id="{0BDA4759-A03B-439C-A5F4-821EB53BA79B}"/>
               </a:ext>
             </a:extLst>
           </p:cNvPr>
@@ -4067,7 +6457,7 @@
           <p:cNvPr id="11" name="">
             <a:extLst xmlns:a="http://schemas.openxmlformats.org/drawingml/2006/main">
               <a:ext uri="{FF2B5EF4-FFF2-40B4-BE49-F238E27FC236}">
-                <a16:creationId xmlns:a16="http://schemas.microsoft.com/office/drawing/2014/main" id="{BBFD7431-9F32-4EC9-B583-B40B2684F08E}"/>
+                <a16:creationId xmlns:a16="http://schemas.microsoft.com/office/drawing/2014/main" id="{EAFC11CB-1EF1-4D38-826A-9833E3E4642C}"/>
               </a:ext>
             </a:extLst>
           </p:cNvPr>
@@ -4097,7 +6487,7 @@
           <p:cNvPr id="12" name="">
             <a:extLst xmlns:a="http://schemas.openxmlformats.org/drawingml/2006/main">
               <a:ext uri="{FF2B5EF4-FFF2-40B4-BE49-F238E27FC236}">
-                <a16:creationId xmlns:a16="http://schemas.microsoft.com/office/drawing/2014/main" id="{3276BCAE-0044-4E8A-B16F-7F070116C66A}"/>
+                <a16:creationId xmlns:a16="http://schemas.microsoft.com/office/drawing/2014/main" id="{0142DF45-DEC3-49EB-B756-BD6DE9720492}"/>
               </a:ext>
             </a:extLst>
           </p:cNvPr>
@@ -4158,7 +6548,7 @@
           <p:cNvPr id="13" name="">
             <a:extLst xmlns:a="http://schemas.openxmlformats.org/drawingml/2006/main">
               <a:ext uri="{FF2B5EF4-FFF2-40B4-BE49-F238E27FC236}">
-                <a16:creationId xmlns:a16="http://schemas.microsoft.com/office/drawing/2014/main" id="{3F5CE4E8-5779-4CB0-9B8F-479CB32FE717}"/>
+                <a16:creationId xmlns:a16="http://schemas.microsoft.com/office/drawing/2014/main" id="{03BA59E5-76E5-446A-B14D-B0CCA77F8BD5}"/>
               </a:ext>
             </a:extLst>
           </p:cNvPr>
@@ -4219,7 +6609,7 @@
           <p:cNvPr id="14" name="">
             <a:extLst xmlns:a="http://schemas.openxmlformats.org/drawingml/2006/main">
               <a:ext uri="{FF2B5EF4-FFF2-40B4-BE49-F238E27FC236}">
-                <a16:creationId xmlns:a16="http://schemas.microsoft.com/office/drawing/2014/main" id="{988C085D-5972-4A95-AA01-83961840359D}"/>
+                <a16:creationId xmlns:a16="http://schemas.microsoft.com/office/drawing/2014/main" id="{81E5B98E-BA31-4C18-9872-B37C6179E24E}"/>
               </a:ext>
             </a:extLst>
           </p:cNvPr>
@@ -4280,7 +6670,7 @@
           <p:cNvPr id="15" name="">
             <a:extLst xmlns:a="http://schemas.openxmlformats.org/drawingml/2006/main">
               <a:ext uri="{FF2B5EF4-FFF2-40B4-BE49-F238E27FC236}">
-                <a16:creationId xmlns:a16="http://schemas.microsoft.com/office/drawing/2014/main" id="{0E2EE483-0EA5-4F8F-A5D2-F3287089651F}"/>
+                <a16:creationId xmlns:a16="http://schemas.microsoft.com/office/drawing/2014/main" id="{D76C6F0C-92E6-47AB-A27C-885470AE2EAA}"/>
               </a:ext>
             </a:extLst>
           </p:cNvPr>
@@ -4341,7 +6731,7 @@
           <p:cNvPr id="16" name="">
             <a:extLst xmlns:a="http://schemas.openxmlformats.org/drawingml/2006/main">
               <a:ext uri="{FF2B5EF4-FFF2-40B4-BE49-F238E27FC236}">
-                <a16:creationId xmlns:a16="http://schemas.microsoft.com/office/drawing/2014/main" id="{BA5C2349-B67E-4359-A8D2-AEB6563DC994}"/>
+                <a16:creationId xmlns:a16="http://schemas.microsoft.com/office/drawing/2014/main" id="{B6E97D94-7A10-4CFE-A81A-6135212387E6}"/>
               </a:ext>
             </a:extLst>
           </p:cNvPr>
@@ -4402,7 +6792,7 @@
           <p:cNvPr id="17" name="">
             <a:extLst xmlns:a="http://schemas.openxmlformats.org/drawingml/2006/main">
               <a:ext uri="{FF2B5EF4-FFF2-40B4-BE49-F238E27FC236}">
-                <a16:creationId xmlns:a16="http://schemas.microsoft.com/office/drawing/2014/main" id="{B907D063-F923-4A3F-8141-384A4EBDC781}"/>
+                <a16:creationId xmlns:a16="http://schemas.microsoft.com/office/drawing/2014/main" id="{B52686C6-22B6-4B0E-91F7-F4D2FFEC040B}"/>
               </a:ext>
             </a:extLst>
           </p:cNvPr>
@@ -4435,7 +6825,7 @@
           <p:cNvPr id="18" name="">
             <a:extLst xmlns:a="http://schemas.openxmlformats.org/drawingml/2006/main">
               <a:ext uri="{FF2B5EF4-FFF2-40B4-BE49-F238E27FC236}">
-                <a16:creationId xmlns:a16="http://schemas.microsoft.com/office/drawing/2014/main" id="{9D08E39C-FCF2-4572-833B-9B58458AE702}"/>
+                <a16:creationId xmlns:a16="http://schemas.microsoft.com/office/drawing/2014/main" id="{05D8A367-1A9B-44C1-86E8-D8B37D3CA0B3}"/>
               </a:ext>
             </a:extLst>
           </p:cNvPr>
@@ -4465,7 +6855,7 @@
           <p:cNvPr id="19" name="">
             <a:extLst xmlns:a="http://schemas.openxmlformats.org/drawingml/2006/main">
               <a:ext uri="{FF2B5EF4-FFF2-40B4-BE49-F238E27FC236}">
-                <a16:creationId xmlns:a16="http://schemas.microsoft.com/office/drawing/2014/main" id="{B73050B0-2CA7-4842-9EE7-F44510D1F0C7}"/>
+                <a16:creationId xmlns:a16="http://schemas.microsoft.com/office/drawing/2014/main" id="{B3170B09-A416-416E-9CF4-B33225C97941}"/>
               </a:ext>
             </a:extLst>
           </p:cNvPr>
@@ -4526,7 +6916,7 @@
           <p:cNvPr id="20" name="">
             <a:extLst xmlns:a="http://schemas.openxmlformats.org/drawingml/2006/main">
               <a:ext uri="{FF2B5EF4-FFF2-40B4-BE49-F238E27FC236}">
-                <a16:creationId xmlns:a16="http://schemas.microsoft.com/office/drawing/2014/main" id="{BEB05725-CBCD-4BCF-A0AE-8956E77E676D}"/>
+                <a16:creationId xmlns:a16="http://schemas.microsoft.com/office/drawing/2014/main" id="{6746A751-15A7-4D6F-87DE-E2F360029109}"/>
               </a:ext>
             </a:extLst>
           </p:cNvPr>
@@ -4587,7 +6977,7 @@
           <p:cNvPr id="21" name="">
             <a:extLst xmlns:a="http://schemas.openxmlformats.org/drawingml/2006/main">
               <a:ext uri="{FF2B5EF4-FFF2-40B4-BE49-F238E27FC236}">
-                <a16:creationId xmlns:a16="http://schemas.microsoft.com/office/drawing/2014/main" id="{7A27CE4A-FB67-4DAF-AD9A-E83272AD855B}"/>
+                <a16:creationId xmlns:a16="http://schemas.microsoft.com/office/drawing/2014/main" id="{EED5E5DD-8A03-44FF-92BD-1A501DA51288}"/>
               </a:ext>
             </a:extLst>
           </p:cNvPr>
@@ -4648,7 +7038,7 @@
           <p:cNvPr id="22" name="">
             <a:extLst xmlns:a="http://schemas.openxmlformats.org/drawingml/2006/main">
               <a:ext uri="{FF2B5EF4-FFF2-40B4-BE49-F238E27FC236}">
-                <a16:creationId xmlns:a16="http://schemas.microsoft.com/office/drawing/2014/main" id="{612DE798-3AB9-4C18-BE00-5DE3E824C1FF}"/>
+                <a16:creationId xmlns:a16="http://schemas.microsoft.com/office/drawing/2014/main" id="{2E902D8A-C634-4BA4-9B9A-354BEB961037}"/>
               </a:ext>
             </a:extLst>
           </p:cNvPr>
@@ -4709,7 +7099,7 @@
           <p:cNvPr id="23" name="">
             <a:extLst xmlns:a="http://schemas.openxmlformats.org/drawingml/2006/main">
               <a:ext uri="{FF2B5EF4-FFF2-40B4-BE49-F238E27FC236}">
-                <a16:creationId xmlns:a16="http://schemas.microsoft.com/office/drawing/2014/main" id="{DFC98C5E-79B6-4767-BC86-EDDE63E12BD0}"/>
+                <a16:creationId xmlns:a16="http://schemas.microsoft.com/office/drawing/2014/main" id="{6E868709-AABB-48DF-A0A1-EFBE6B19C5F4}"/>
               </a:ext>
             </a:extLst>
           </p:cNvPr>
@@ -4770,7 +7160,7 @@
           <p:cNvPr id="24" name="">
             <a:extLst xmlns:a="http://schemas.openxmlformats.org/drawingml/2006/main">
               <a:ext uri="{FF2B5EF4-FFF2-40B4-BE49-F238E27FC236}">
-                <a16:creationId xmlns:a16="http://schemas.microsoft.com/office/drawing/2014/main" id="{D3C2660D-C0BC-4E3D-926F-8C5A45C5ACD8}"/>
+                <a16:creationId xmlns:a16="http://schemas.microsoft.com/office/drawing/2014/main" id="{B25EC9EE-B382-437D-AA69-D4DF5E8A5203}"/>
               </a:ext>
             </a:extLst>
           </p:cNvPr>
@@ -4831,7 +7221,7 @@
           <p:cNvPr id="25" name="">
             <a:extLst xmlns:a="http://schemas.openxmlformats.org/drawingml/2006/main">
               <a:ext uri="{FF2B5EF4-FFF2-40B4-BE49-F238E27FC236}">
-                <a16:creationId xmlns:a16="http://schemas.microsoft.com/office/drawing/2014/main" id="{E2CFD134-9FC6-486C-901E-245C9E4F8C05}"/>
+                <a16:creationId xmlns:a16="http://schemas.microsoft.com/office/drawing/2014/main" id="{EE038565-5CFC-4932-A4A1-BDA2973A2C6A}"/>
               </a:ext>
             </a:extLst>
           </p:cNvPr>
@@ -5330,7 +7720,7 @@
           <p:cNvPr id="27" name="">
             <a:extLst xmlns:a="http://schemas.openxmlformats.org/drawingml/2006/main">
               <a:ext uri="{FF2B5EF4-FFF2-40B4-BE49-F238E27FC236}">
-                <a16:creationId xmlns:a16="http://schemas.microsoft.com/office/drawing/2014/main" id="{781109A7-D4CB-4507-BF9A-012FC513B962}"/>
+                <a16:creationId xmlns:a16="http://schemas.microsoft.com/office/drawing/2014/main" id="{0464A48B-7F2C-42AC-895B-A83F35AD6D38}"/>
               </a:ext>
             </a:extLst>
           </p:cNvPr>
@@ -5360,7 +7750,7 @@
           <p:cNvPr id="28" name="">
             <a:extLst xmlns:a="http://schemas.openxmlformats.org/drawingml/2006/main">
               <a:ext uri="{FF2B5EF4-FFF2-40B4-BE49-F238E27FC236}">
-                <a16:creationId xmlns:a16="http://schemas.microsoft.com/office/drawing/2014/main" id="{6EF1BDE5-FE97-445C-830A-CEF1B5804B07}"/>
+                <a16:creationId xmlns:a16="http://schemas.microsoft.com/office/drawing/2014/main" id="{830BC10A-40F8-4CEE-B414-631C16A68D3E}"/>
               </a:ext>
             </a:extLst>
           </p:cNvPr>
@@ -5421,7 +7811,7 @@
           <p:cNvPr id="29" name="">
             <a:extLst xmlns:a="http://schemas.openxmlformats.org/drawingml/2006/main">
               <a:ext uri="{FF2B5EF4-FFF2-40B4-BE49-F238E27FC236}">
-                <a16:creationId xmlns:a16="http://schemas.microsoft.com/office/drawing/2014/main" id="{9ED14586-A0FC-43F2-B752-5E1A1EEE95AB}"/>
+                <a16:creationId xmlns:a16="http://schemas.microsoft.com/office/drawing/2014/main" id="{715C4173-2188-4B6A-9F3D-44F2A11F38CE}"/>
               </a:ext>
             </a:extLst>
           </p:cNvPr>
@@ -5452,7 +7842,7 @@
           <p:cNvPr id="30" name="">
             <a:extLst xmlns:a="http://schemas.openxmlformats.org/drawingml/2006/main">
               <a:ext uri="{FF2B5EF4-FFF2-40B4-BE49-F238E27FC236}">
-                <a16:creationId xmlns:a16="http://schemas.microsoft.com/office/drawing/2014/main" id="{1CFAEF7D-7E8D-42C0-8FC9-6ED0842A8983}"/>
+                <a16:creationId xmlns:a16="http://schemas.microsoft.com/office/drawing/2014/main" id="{3DFA3E4A-62BE-4D56-8AD7-3040DCAD4602}"/>
               </a:ext>
             </a:extLst>
           </p:cNvPr>
@@ -5513,7 +7903,7 @@
           <p:cNvPr id="31" name="">
             <a:extLst xmlns:a="http://schemas.openxmlformats.org/drawingml/2006/main">
               <a:ext uri="{FF2B5EF4-FFF2-40B4-BE49-F238E27FC236}">
-                <a16:creationId xmlns:a16="http://schemas.microsoft.com/office/drawing/2014/main" id="{0FD922A0-7758-44CB-A8CC-504BE9692815}"/>
+                <a16:creationId xmlns:a16="http://schemas.microsoft.com/office/drawing/2014/main" id="{B62E8A85-9BA4-4C8B-8FB5-0B6EE58C2AD3}"/>
               </a:ext>
             </a:extLst>
           </p:cNvPr>
@@ -5572,7 +7962,7 @@
     </p:spTree>
     <p:extLst>
       <p:ext uri="{BB962C8B-B14F-4D97-AF65-F5344CB8AC3E}">
-        <p14:creationId xmlns:p14="http://schemas.microsoft.com/office/powerpoint/2010/main" val="1076102287"/>
+        <p14:creationId xmlns:p14="http://schemas.microsoft.com/office/powerpoint/2010/main" val="635968132"/>
       </p:ext>
     </p:extLst>
   </p:cSld>
@@ -5603,7 +7993,7 @@
           <p:cNvPr id="23" name="slide-title">
             <a:extLst xmlns:a="http://schemas.openxmlformats.org/drawingml/2006/main">
               <a:ext uri="{FF2B5EF4-FFF2-40B4-BE49-F238E27FC236}">
-                <a16:creationId xmlns:a16="http://schemas.microsoft.com/office/drawing/2014/main" id="{BA83AAE2-740D-4299-890F-FB8630039B15}"/>
+                <a16:creationId xmlns:a16="http://schemas.microsoft.com/office/drawing/2014/main" id="{D194F67A-7AFA-4C5F-BC03-CEEDDF89C447}"/>
               </a:ext>
             </a:extLst>
           </p:cNvPr>
@@ -5664,7 +8054,7 @@
           <p:cNvPr id="2" name="">
             <a:extLst xmlns:a="http://schemas.openxmlformats.org/drawingml/2006/main">
               <a:ext uri="{FF2B5EF4-FFF2-40B4-BE49-F238E27FC236}">
-                <a16:creationId xmlns:a16="http://schemas.microsoft.com/office/drawing/2014/main" id="{9713E6C8-257E-4CD3-BAE5-F9AB471104C5}"/>
+                <a16:creationId xmlns:a16="http://schemas.microsoft.com/office/drawing/2014/main" id="{385EB7E7-6B02-4BD6-84C7-AB25202F6AC0}"/>
               </a:ext>
             </a:extLst>
           </p:cNvPr>
@@ -5725,7 +8115,7 @@
           <p:cNvPr id="3" name="">
             <a:extLst xmlns:a="http://schemas.openxmlformats.org/drawingml/2006/main">
               <a:ext uri="{FF2B5EF4-FFF2-40B4-BE49-F238E27FC236}">
-                <a16:creationId xmlns:a16="http://schemas.microsoft.com/office/drawing/2014/main" id="{EAAC83CC-E0AE-4760-853C-EB8F833D0A54}"/>
+                <a16:creationId xmlns:a16="http://schemas.microsoft.com/office/drawing/2014/main" id="{BB2A99C6-C2E5-467D-9D1F-DA21117109D4}"/>
               </a:ext>
             </a:extLst>
           </p:cNvPr>
@@ -5786,7 +8176,7 @@
           <p:cNvPr id="4" name="">
             <a:extLst xmlns:a="http://schemas.openxmlformats.org/drawingml/2006/main">
               <a:ext uri="{FF2B5EF4-FFF2-40B4-BE49-F238E27FC236}">
-                <a16:creationId xmlns:a16="http://schemas.microsoft.com/office/drawing/2014/main" id="{62586E58-79A8-41D3-96CB-91EBB637A569}"/>
+                <a16:creationId xmlns:a16="http://schemas.microsoft.com/office/drawing/2014/main" id="{2C2A6A65-1798-44A0-B161-E5D9A69A56AA}"/>
               </a:ext>
             </a:extLst>
           </p:cNvPr>
@@ -5847,7 +8237,7 @@
           <p:cNvPr id="5" name="">
             <a:extLst xmlns:a="http://schemas.openxmlformats.org/drawingml/2006/main">
               <a:ext uri="{FF2B5EF4-FFF2-40B4-BE49-F238E27FC236}">
-                <a16:creationId xmlns:a16="http://schemas.microsoft.com/office/drawing/2014/main" id="{A5EA0AF2-B14B-4F91-853A-A5302D46686C}"/>
+                <a16:creationId xmlns:a16="http://schemas.microsoft.com/office/drawing/2014/main" id="{821A4E72-C129-4482-8A90-0F157874FC6E}"/>
               </a:ext>
             </a:extLst>
           </p:cNvPr>
@@ -5908,7 +8298,7 @@
           <p:cNvPr id="6" name="">
             <a:extLst xmlns:a="http://schemas.openxmlformats.org/drawingml/2006/main">
               <a:ext uri="{FF2B5EF4-FFF2-40B4-BE49-F238E27FC236}">
-                <a16:creationId xmlns:a16="http://schemas.microsoft.com/office/drawing/2014/main" id="{2A11D020-E96D-410D-8058-38CF01E7E0C7}"/>
+                <a16:creationId xmlns:a16="http://schemas.microsoft.com/office/drawing/2014/main" id="{4FBF8DB7-2891-4474-A039-FBFD3A447183}"/>
               </a:ext>
             </a:extLst>
           </p:cNvPr>
@@ -5939,7 +8329,7 @@
           <p:cNvPr id="7" name="">
             <a:extLst xmlns:a="http://schemas.openxmlformats.org/drawingml/2006/main">
               <a:ext uri="{FF2B5EF4-FFF2-40B4-BE49-F238E27FC236}">
-                <a16:creationId xmlns:a16="http://schemas.microsoft.com/office/drawing/2014/main" id="{4C317204-E705-4B94-B5D4-1F6C21FCFD8D}"/>
+                <a16:creationId xmlns:a16="http://schemas.microsoft.com/office/drawing/2014/main" id="{692B09C4-35F8-48EC-B130-E487A0A46B74}"/>
               </a:ext>
             </a:extLst>
           </p:cNvPr>
@@ -6000,7 +8390,7 @@
           <p:cNvPr id="8" name="">
             <a:extLst xmlns:a="http://schemas.openxmlformats.org/drawingml/2006/main">
               <a:ext uri="{FF2B5EF4-FFF2-40B4-BE49-F238E27FC236}">
-                <a16:creationId xmlns:a16="http://schemas.microsoft.com/office/drawing/2014/main" id="{2B5EFF9C-F267-4472-B84E-AC0C7244B8FE}"/>
+                <a16:creationId xmlns:a16="http://schemas.microsoft.com/office/drawing/2014/main" id="{0884B598-0822-4010-BF38-965D7FDCA453}"/>
               </a:ext>
             </a:extLst>
           </p:cNvPr>
@@ -6061,7 +8451,7 @@
           <p:cNvPr id="9" name="">
             <a:extLst xmlns:a="http://schemas.openxmlformats.org/drawingml/2006/main">
               <a:ext uri="{FF2B5EF4-FFF2-40B4-BE49-F238E27FC236}">
-                <a16:creationId xmlns:a16="http://schemas.microsoft.com/office/drawing/2014/main" id="{3E366EB3-AAF5-4B60-B455-F0A96238D571}"/>
+                <a16:creationId xmlns:a16="http://schemas.microsoft.com/office/drawing/2014/main" id="{F1AF9061-B29E-450E-9419-E121C5426AA9}"/>
               </a:ext>
             </a:extLst>
           </p:cNvPr>
@@ -6122,7 +8512,7 @@
           <p:cNvPr id="10" name="">
             <a:extLst xmlns:a="http://schemas.openxmlformats.org/drawingml/2006/main">
               <a:ext uri="{FF2B5EF4-FFF2-40B4-BE49-F238E27FC236}">
-                <a16:creationId xmlns:a16="http://schemas.microsoft.com/office/drawing/2014/main" id="{DB6DB6BC-2694-48F7-AD2F-E061B0F0C3AF}"/>
+                <a16:creationId xmlns:a16="http://schemas.microsoft.com/office/drawing/2014/main" id="{81AA899A-9697-4E62-9D9D-61478637F08B}"/>
               </a:ext>
             </a:extLst>
           </p:cNvPr>
@@ -6153,7 +8543,7 @@
           <p:cNvPr id="11" name="">
             <a:extLst xmlns:a="http://schemas.openxmlformats.org/drawingml/2006/main">
               <a:ext uri="{FF2B5EF4-FFF2-40B4-BE49-F238E27FC236}">
-                <a16:creationId xmlns:a16="http://schemas.microsoft.com/office/drawing/2014/main" id="{C60D306E-04F3-4C4C-BC45-BD3C4A4B254A}"/>
+                <a16:creationId xmlns:a16="http://schemas.microsoft.com/office/drawing/2014/main" id="{A502617A-DED3-49FC-B1B5-F2E3B7280CB9}"/>
               </a:ext>
             </a:extLst>
           </p:cNvPr>
@@ -6214,7 +8604,7 @@
           <p:cNvPr id="12" name="">
             <a:extLst xmlns:a="http://schemas.openxmlformats.org/drawingml/2006/main">
               <a:ext uri="{FF2B5EF4-FFF2-40B4-BE49-F238E27FC236}">
-                <a16:creationId xmlns:a16="http://schemas.microsoft.com/office/drawing/2014/main" id="{A8B8789A-9726-48A6-96F6-C141362D465A}"/>
+                <a16:creationId xmlns:a16="http://schemas.microsoft.com/office/drawing/2014/main" id="{65FB493F-44DA-4F1A-AE99-E43C83C16D7B}"/>
               </a:ext>
             </a:extLst>
           </p:cNvPr>
@@ -6275,7 +8665,7 @@
           <p:cNvPr id="13" name="">
             <a:extLst xmlns:a="http://schemas.openxmlformats.org/drawingml/2006/main">
               <a:ext uri="{FF2B5EF4-FFF2-40B4-BE49-F238E27FC236}">
-                <a16:creationId xmlns:a16="http://schemas.microsoft.com/office/drawing/2014/main" id="{76881532-5096-4444-9B34-BCFB664757ED}"/>
+                <a16:creationId xmlns:a16="http://schemas.microsoft.com/office/drawing/2014/main" id="{5B3A7962-8000-4222-91AC-3F3AD5ACAED7}"/>
               </a:ext>
             </a:extLst>
           </p:cNvPr>
@@ -6336,7 +8726,7 @@
           <p:cNvPr id="14" name="">
             <a:extLst xmlns:a="http://schemas.openxmlformats.org/drawingml/2006/main">
               <a:ext uri="{FF2B5EF4-FFF2-40B4-BE49-F238E27FC236}">
-                <a16:creationId xmlns:a16="http://schemas.microsoft.com/office/drawing/2014/main" id="{6ACFEA42-B047-4483-8422-88539AECB32B}"/>
+                <a16:creationId xmlns:a16="http://schemas.microsoft.com/office/drawing/2014/main" id="{5CF40C9C-66AE-4317-9EBA-75160989D102}"/>
               </a:ext>
             </a:extLst>
           </p:cNvPr>
@@ -6367,7 +8757,7 @@
           <p:cNvPr id="15" name="">
             <a:extLst xmlns:a="http://schemas.openxmlformats.org/drawingml/2006/main">
               <a:ext uri="{FF2B5EF4-FFF2-40B4-BE49-F238E27FC236}">
-                <a16:creationId xmlns:a16="http://schemas.microsoft.com/office/drawing/2014/main" id="{C89FEA8D-48CD-4A0D-860D-416295135BC6}"/>
+                <a16:creationId xmlns:a16="http://schemas.microsoft.com/office/drawing/2014/main" id="{224AF7CD-8B26-49DD-AE2A-6CA6589075C1}"/>
               </a:ext>
             </a:extLst>
           </p:cNvPr>
@@ -6428,7 +8818,7 @@
           <p:cNvPr id="16" name="">
             <a:extLst xmlns:a="http://schemas.openxmlformats.org/drawingml/2006/main">
               <a:ext uri="{FF2B5EF4-FFF2-40B4-BE49-F238E27FC236}">
-                <a16:creationId xmlns:a16="http://schemas.microsoft.com/office/drawing/2014/main" id="{05E53923-020B-4669-A6EF-5AD2CA115137}"/>
+                <a16:creationId xmlns:a16="http://schemas.microsoft.com/office/drawing/2014/main" id="{4F59830C-C426-4F3F-B9A6-06A0CBE325B4}"/>
               </a:ext>
             </a:extLst>
           </p:cNvPr>
@@ -6489,7 +8879,7 @@
           <p:cNvPr id="17" name="">
             <a:extLst xmlns:a="http://schemas.openxmlformats.org/drawingml/2006/main">
               <a:ext uri="{FF2B5EF4-FFF2-40B4-BE49-F238E27FC236}">
-                <a16:creationId xmlns:a16="http://schemas.microsoft.com/office/drawing/2014/main" id="{494014A6-B315-418B-8709-457B2423FB3A}"/>
+                <a16:creationId xmlns:a16="http://schemas.microsoft.com/office/drawing/2014/main" id="{764C0B26-71BF-4898-9A44-DD4F819D264D}"/>
               </a:ext>
             </a:extLst>
           </p:cNvPr>
@@ -6550,7 +8940,7 @@
           <p:cNvPr id="18" name="">
             <a:extLst xmlns:a="http://schemas.openxmlformats.org/drawingml/2006/main">
               <a:ext uri="{FF2B5EF4-FFF2-40B4-BE49-F238E27FC236}">
-                <a16:creationId xmlns:a16="http://schemas.microsoft.com/office/drawing/2014/main" id="{3D3025A3-7894-4B06-8839-5D1EDDAC2D7D}"/>
+                <a16:creationId xmlns:a16="http://schemas.microsoft.com/office/drawing/2014/main" id="{69CC9A79-C260-459B-A1EE-1EA74A8B82F9}"/>
               </a:ext>
             </a:extLst>
           </p:cNvPr>
@@ -6580,7 +8970,7 @@
           <p:cNvPr id="19" name="">
             <a:extLst xmlns:a="http://schemas.openxmlformats.org/drawingml/2006/main">
               <a:ext uri="{FF2B5EF4-FFF2-40B4-BE49-F238E27FC236}">
-                <a16:creationId xmlns:a16="http://schemas.microsoft.com/office/drawing/2014/main" id="{BE20DAE9-3F7F-46A2-BCBF-21613A5A98EF}"/>
+                <a16:creationId xmlns:a16="http://schemas.microsoft.com/office/drawing/2014/main" id="{127739A6-938F-4B9B-93CD-CD4B558B20F8}"/>
               </a:ext>
             </a:extLst>
           </p:cNvPr>
@@ -6641,7 +9031,7 @@
           <p:cNvPr id="20" name="">
             <a:extLst xmlns:a="http://schemas.openxmlformats.org/drawingml/2006/main">
               <a:ext uri="{FF2B5EF4-FFF2-40B4-BE49-F238E27FC236}">
-                <a16:creationId xmlns:a16="http://schemas.microsoft.com/office/drawing/2014/main" id="{1DC22FF3-5838-4ABE-B693-C0B92F8787F1}"/>
+                <a16:creationId xmlns:a16="http://schemas.microsoft.com/office/drawing/2014/main" id="{28F97E17-D90A-4C4E-B399-296C4BF8E5C5}"/>
               </a:ext>
             </a:extLst>
           </p:cNvPr>
@@ -6672,7 +9062,7 @@
           <p:cNvPr id="21" name="">
             <a:extLst xmlns:a="http://schemas.openxmlformats.org/drawingml/2006/main">
               <a:ext uri="{FF2B5EF4-FFF2-40B4-BE49-F238E27FC236}">
-                <a16:creationId xmlns:a16="http://schemas.microsoft.com/office/drawing/2014/main" id="{FD10FD6C-A936-49E1-944A-52A6E088535F}"/>
+                <a16:creationId xmlns:a16="http://schemas.microsoft.com/office/drawing/2014/main" id="{9282B528-D41C-45F0-97B8-CEC2C69F3F7D}"/>
               </a:ext>
             </a:extLst>
           </p:cNvPr>
@@ -6733,7 +9123,7 @@
           <p:cNvPr id="22" name="">
             <a:extLst xmlns:a="http://schemas.openxmlformats.org/drawingml/2006/main">
               <a:ext uri="{FF2B5EF4-FFF2-40B4-BE49-F238E27FC236}">
-                <a16:creationId xmlns:a16="http://schemas.microsoft.com/office/drawing/2014/main" id="{86FFBA89-1A4A-4C76-B05C-08C44CDBF4FE}"/>
+                <a16:creationId xmlns:a16="http://schemas.microsoft.com/office/drawing/2014/main" id="{B8D78F98-7EC3-4204-90BF-5A77D9617D76}"/>
               </a:ext>
             </a:extLst>
           </p:cNvPr>
@@ -6792,7 +9182,7 @@
     </p:spTree>
     <p:extLst>
       <p:ext uri="{BB962C8B-B14F-4D97-AF65-F5344CB8AC3E}">
-        <p14:creationId xmlns:p14="http://schemas.microsoft.com/office/powerpoint/2010/main" val="609196209"/>
+        <p14:creationId xmlns:p14="http://schemas.microsoft.com/office/powerpoint/2010/main" val="1787606047"/>
       </p:ext>
     </p:extLst>
   </p:cSld>
@@ -6823,7 +9213,7 @@
           <p:cNvPr id="38" name="slide-title">
             <a:extLst xmlns:a="http://schemas.openxmlformats.org/drawingml/2006/main">
               <a:ext uri="{FF2B5EF4-FFF2-40B4-BE49-F238E27FC236}">
-                <a16:creationId xmlns:a16="http://schemas.microsoft.com/office/drawing/2014/main" id="{D3B9A5BB-84EE-4D77-9170-515F5643B881}"/>
+                <a16:creationId xmlns:a16="http://schemas.microsoft.com/office/drawing/2014/main" id="{00E00439-BA1D-4F50-8F76-78FA3FE42305}"/>
               </a:ext>
             </a:extLst>
           </p:cNvPr>
@@ -6884,7 +9274,7 @@
           <p:cNvPr id="2" name="">
             <a:extLst xmlns:a="http://schemas.openxmlformats.org/drawingml/2006/main">
               <a:ext uri="{FF2B5EF4-FFF2-40B4-BE49-F238E27FC236}">
-                <a16:creationId xmlns:a16="http://schemas.microsoft.com/office/drawing/2014/main" id="{BA073F99-10A7-4CC8-AE06-5C51C821014B}"/>
+                <a16:creationId xmlns:a16="http://schemas.microsoft.com/office/drawing/2014/main" id="{43825EF8-E39A-46BC-AF8B-21F360BA5E2C}"/>
               </a:ext>
             </a:extLst>
           </p:cNvPr>
@@ -6945,7 +9335,7 @@
           <p:cNvPr id="3" name="">
             <a:extLst xmlns:a="http://schemas.openxmlformats.org/drawingml/2006/main">
               <a:ext uri="{FF2B5EF4-FFF2-40B4-BE49-F238E27FC236}">
-                <a16:creationId xmlns:a16="http://schemas.microsoft.com/office/drawing/2014/main" id="{101B6C22-B938-4C8F-8D93-134FB4258DFF}"/>
+                <a16:creationId xmlns:a16="http://schemas.microsoft.com/office/drawing/2014/main" id="{D4B92FEB-88B5-4312-BFC7-E5A475C2AB74}"/>
               </a:ext>
             </a:extLst>
           </p:cNvPr>
@@ -7006,7 +9396,7 @@
           <p:cNvPr id="4" name="">
             <a:extLst xmlns:a="http://schemas.openxmlformats.org/drawingml/2006/main">
               <a:ext uri="{FF2B5EF4-FFF2-40B4-BE49-F238E27FC236}">
-                <a16:creationId xmlns:a16="http://schemas.microsoft.com/office/drawing/2014/main" id="{F61DF7DD-643F-4E74-9539-AE645D9A806F}"/>
+                <a16:creationId xmlns:a16="http://schemas.microsoft.com/office/drawing/2014/main" id="{A9350DDF-CBB8-4E34-8E2D-8B39DD3C93AF}"/>
               </a:ext>
             </a:extLst>
           </p:cNvPr>
@@ -7037,7 +9427,7 @@
           <p:cNvPr id="5" name="">
             <a:extLst xmlns:a="http://schemas.openxmlformats.org/drawingml/2006/main">
               <a:ext uri="{FF2B5EF4-FFF2-40B4-BE49-F238E27FC236}">
-                <a16:creationId xmlns:a16="http://schemas.microsoft.com/office/drawing/2014/main" id="{ADBE713A-4A6E-4319-AB80-3BD8050D647C}"/>
+                <a16:creationId xmlns:a16="http://schemas.microsoft.com/office/drawing/2014/main" id="{F34C8521-3B70-4F77-B86E-292EE74134E6}"/>
               </a:ext>
             </a:extLst>
           </p:cNvPr>
@@ -7098,7 +9488,7 @@
           <p:cNvPr id="6" name="">
             <a:extLst xmlns:a="http://schemas.openxmlformats.org/drawingml/2006/main">
               <a:ext uri="{FF2B5EF4-FFF2-40B4-BE49-F238E27FC236}">
-                <a16:creationId xmlns:a16="http://schemas.microsoft.com/office/drawing/2014/main" id="{A5DDA859-7599-4AE9-9505-66AA32262B5E}"/>
+                <a16:creationId xmlns:a16="http://schemas.microsoft.com/office/drawing/2014/main" id="{9B267E16-1676-41AF-BEA1-5FE48B7ADEC2}"/>
               </a:ext>
             </a:extLst>
           </p:cNvPr>
@@ -7129,7 +9519,7 @@
           <p:cNvPr id="7" name="">
             <a:extLst xmlns:a="http://schemas.openxmlformats.org/drawingml/2006/main">
               <a:ext uri="{FF2B5EF4-FFF2-40B4-BE49-F238E27FC236}">
-                <a16:creationId xmlns:a16="http://schemas.microsoft.com/office/drawing/2014/main" id="{80EB59AD-1E9F-4F28-AAD6-5DCE8CD768C0}"/>
+                <a16:creationId xmlns:a16="http://schemas.microsoft.com/office/drawing/2014/main" id="{ED175688-65A0-4421-B1F7-940BAA8B0063}"/>
               </a:ext>
             </a:extLst>
           </p:cNvPr>
@@ -7190,7 +9580,7 @@
           <p:cNvPr id="8" name="">
             <a:extLst xmlns:a="http://schemas.openxmlformats.org/drawingml/2006/main">
               <a:ext uri="{FF2B5EF4-FFF2-40B4-BE49-F238E27FC236}">
-                <a16:creationId xmlns:a16="http://schemas.microsoft.com/office/drawing/2014/main" id="{4F654BA4-AD9C-4293-A739-7169049FC874}"/>
+                <a16:creationId xmlns:a16="http://schemas.microsoft.com/office/drawing/2014/main" id="{F1E30A14-D0C4-40F5-B926-541936849629}"/>
               </a:ext>
             </a:extLst>
           </p:cNvPr>
@@ -7221,7 +9611,7 @@
           <p:cNvPr id="9" name="">
             <a:extLst xmlns:a="http://schemas.openxmlformats.org/drawingml/2006/main">
               <a:ext uri="{FF2B5EF4-FFF2-40B4-BE49-F238E27FC236}">
-                <a16:creationId xmlns:a16="http://schemas.microsoft.com/office/drawing/2014/main" id="{05D4C335-5A30-44A1-A739-BAE1428F0F59}"/>
+                <a16:creationId xmlns:a16="http://schemas.microsoft.com/office/drawing/2014/main" id="{A27269F5-EC30-41D6-A154-76E07785892C}"/>
               </a:ext>
             </a:extLst>
           </p:cNvPr>
@@ -7252,7 +9642,7 @@
           <p:cNvPr id="10" name="">
             <a:extLst xmlns:a="http://schemas.openxmlformats.org/drawingml/2006/main">
               <a:ext uri="{FF2B5EF4-FFF2-40B4-BE49-F238E27FC236}">
-                <a16:creationId xmlns:a16="http://schemas.microsoft.com/office/drawing/2014/main" id="{3C2A35DF-588E-45EF-BFC2-9437F0E184FD}"/>
+                <a16:creationId xmlns:a16="http://schemas.microsoft.com/office/drawing/2014/main" id="{563D7CD6-167C-4978-8CB4-14CF06D3AC89}"/>
               </a:ext>
             </a:extLst>
           </p:cNvPr>
@@ -7313,7 +9703,7 @@
           <p:cNvPr id="11" name="">
             <a:extLst xmlns:a="http://schemas.openxmlformats.org/drawingml/2006/main">
               <a:ext uri="{FF2B5EF4-FFF2-40B4-BE49-F238E27FC236}">
-                <a16:creationId xmlns:a16="http://schemas.microsoft.com/office/drawing/2014/main" id="{B23324FD-D77B-4406-AA14-39ACDE9BF528}"/>
+                <a16:creationId xmlns:a16="http://schemas.microsoft.com/office/drawing/2014/main" id="{B32EF677-073D-4229-A630-C2D1787CC738}"/>
               </a:ext>
             </a:extLst>
           </p:cNvPr>
@@ -7346,7 +9736,7 @@
           <p:cNvPr id="12" name="">
             <a:extLst xmlns:a="http://schemas.openxmlformats.org/drawingml/2006/main">
               <a:ext uri="{FF2B5EF4-FFF2-40B4-BE49-F238E27FC236}">
-                <a16:creationId xmlns:a16="http://schemas.microsoft.com/office/drawing/2014/main" id="{CC4F959D-6AF9-4BD6-B434-BD0CB502E4CB}"/>
+                <a16:creationId xmlns:a16="http://schemas.microsoft.com/office/drawing/2014/main" id="{97FD95FB-3EF6-4898-90F4-FC2CDFA922EE}"/>
               </a:ext>
             </a:extLst>
           </p:cNvPr>
@@ -7407,7 +9797,7 @@
           <p:cNvPr id="13" name="">
             <a:extLst xmlns:a="http://schemas.openxmlformats.org/drawingml/2006/main">
               <a:ext uri="{FF2B5EF4-FFF2-40B4-BE49-F238E27FC236}">
-                <a16:creationId xmlns:a16="http://schemas.microsoft.com/office/drawing/2014/main" id="{5C0D3AA0-6185-4C61-BE86-56A5F5A5D3B4}"/>
+                <a16:creationId xmlns:a16="http://schemas.microsoft.com/office/drawing/2014/main" id="{32C5BDAE-71E9-4BCB-ADBE-37863762E851}"/>
               </a:ext>
             </a:extLst>
           </p:cNvPr>
@@ -7468,7 +9858,7 @@
           <p:cNvPr id="14" name="">
             <a:extLst xmlns:a="http://schemas.openxmlformats.org/drawingml/2006/main">
               <a:ext uri="{FF2B5EF4-FFF2-40B4-BE49-F238E27FC236}">
-                <a16:creationId xmlns:a16="http://schemas.microsoft.com/office/drawing/2014/main" id="{3180DAA5-CF3A-4130-8B49-BDABD568D1AC}"/>
+                <a16:creationId xmlns:a16="http://schemas.microsoft.com/office/drawing/2014/main" id="{DEDCFB37-8366-4A28-9963-30E664949F34}"/>
               </a:ext>
             </a:extLst>
           </p:cNvPr>
@@ -7501,7 +9891,7 @@
           <p:cNvPr id="15" name="">
             <a:extLst xmlns:a="http://schemas.openxmlformats.org/drawingml/2006/main">
               <a:ext uri="{FF2B5EF4-FFF2-40B4-BE49-F238E27FC236}">
-                <a16:creationId xmlns:a16="http://schemas.microsoft.com/office/drawing/2014/main" id="{53968039-0495-4A4E-AEB1-72099E32AC87}"/>
+                <a16:creationId xmlns:a16="http://schemas.microsoft.com/office/drawing/2014/main" id="{2E46B91F-F3EA-4B6F-ACC5-5CBB9EF407BB}"/>
               </a:ext>
             </a:extLst>
           </p:cNvPr>
@@ -7562,7 +9952,7 @@
           <p:cNvPr id="16" name="">
             <a:extLst xmlns:a="http://schemas.openxmlformats.org/drawingml/2006/main">
               <a:ext uri="{FF2B5EF4-FFF2-40B4-BE49-F238E27FC236}">
-                <a16:creationId xmlns:a16="http://schemas.microsoft.com/office/drawing/2014/main" id="{582D982E-B447-49E6-A1EB-A38E08E82659}"/>
+                <a16:creationId xmlns:a16="http://schemas.microsoft.com/office/drawing/2014/main" id="{A49DAE87-A50D-4146-BF3E-BFA8F8180FB9}"/>
               </a:ext>
             </a:extLst>
           </p:cNvPr>
@@ -7623,7 +10013,7 @@
           <p:cNvPr id="17" name="">
             <a:extLst xmlns:a="http://schemas.openxmlformats.org/drawingml/2006/main">
               <a:ext uri="{FF2B5EF4-FFF2-40B4-BE49-F238E27FC236}">
-                <a16:creationId xmlns:a16="http://schemas.microsoft.com/office/drawing/2014/main" id="{CEB1229C-0BCC-4F84-9339-E2A466A479AD}"/>
+                <a16:creationId xmlns:a16="http://schemas.microsoft.com/office/drawing/2014/main" id="{C918A066-D9D7-4BBB-BA9C-140ABF885CC9}"/>
               </a:ext>
             </a:extLst>
           </p:cNvPr>
@@ -7656,7 +10046,7 @@
           <p:cNvPr id="18" name="">
             <a:extLst xmlns:a="http://schemas.openxmlformats.org/drawingml/2006/main">
               <a:ext uri="{FF2B5EF4-FFF2-40B4-BE49-F238E27FC236}">
-                <a16:creationId xmlns:a16="http://schemas.microsoft.com/office/drawing/2014/main" id="{1621EEC4-78E4-43FC-99F3-1C117DD4666A}"/>
+                <a16:creationId xmlns:a16="http://schemas.microsoft.com/office/drawing/2014/main" id="{BFA0C774-F0E2-4A02-95D1-16F32561DB5B}"/>
               </a:ext>
             </a:extLst>
           </p:cNvPr>
@@ -7717,7 +10107,7 @@
           <p:cNvPr id="19" name="">
             <a:extLst xmlns:a="http://schemas.openxmlformats.org/drawingml/2006/main">
               <a:ext uri="{FF2B5EF4-FFF2-40B4-BE49-F238E27FC236}">
-                <a16:creationId xmlns:a16="http://schemas.microsoft.com/office/drawing/2014/main" id="{9B684BAA-3C73-4332-9A32-3DB9B46E1BCC}"/>
+                <a16:creationId xmlns:a16="http://schemas.microsoft.com/office/drawing/2014/main" id="{32113E36-722F-44C5-944D-982B0D07DBAF}"/>
               </a:ext>
             </a:extLst>
           </p:cNvPr>
@@ -7778,7 +10168,7 @@
           <p:cNvPr id="20" name="">
             <a:extLst xmlns:a="http://schemas.openxmlformats.org/drawingml/2006/main">
               <a:ext uri="{FF2B5EF4-FFF2-40B4-BE49-F238E27FC236}">
-                <a16:creationId xmlns:a16="http://schemas.microsoft.com/office/drawing/2014/main" id="{8C3A1869-5229-47F5-AD8E-19EA4B648C17}"/>
+                <a16:creationId xmlns:a16="http://schemas.microsoft.com/office/drawing/2014/main" id="{E308222C-00B6-4AC9-851F-F0EFD893AFAB}"/>
               </a:ext>
             </a:extLst>
           </p:cNvPr>
@@ -7811,7 +10201,7 @@
           <p:cNvPr id="21" name="">
             <a:extLst xmlns:a="http://schemas.openxmlformats.org/drawingml/2006/main">
               <a:ext uri="{FF2B5EF4-FFF2-40B4-BE49-F238E27FC236}">
-                <a16:creationId xmlns:a16="http://schemas.microsoft.com/office/drawing/2014/main" id="{888D304E-CB6B-410D-AC5A-7539C4807EF2}"/>
+                <a16:creationId xmlns:a16="http://schemas.microsoft.com/office/drawing/2014/main" id="{9A918AE3-4ADB-484C-A013-770E70813F77}"/>
               </a:ext>
             </a:extLst>
           </p:cNvPr>
@@ -7872,7 +10262,7 @@
           <p:cNvPr id="22" name="">
             <a:extLst xmlns:a="http://schemas.openxmlformats.org/drawingml/2006/main">
               <a:ext uri="{FF2B5EF4-FFF2-40B4-BE49-F238E27FC236}">
-                <a16:creationId xmlns:a16="http://schemas.microsoft.com/office/drawing/2014/main" id="{371299F0-1C4A-4BB9-A39A-D0DA97443E56}"/>
+                <a16:creationId xmlns:a16="http://schemas.microsoft.com/office/drawing/2014/main" id="{952A83EE-6A5F-4FCC-827C-AE7F6B9E0862}"/>
               </a:ext>
             </a:extLst>
           </p:cNvPr>
@@ -7933,7 +10323,7 @@
           <p:cNvPr id="23" name="">
             <a:extLst xmlns:a="http://schemas.openxmlformats.org/drawingml/2006/main">
               <a:ext uri="{FF2B5EF4-FFF2-40B4-BE49-F238E27FC236}">
-                <a16:creationId xmlns:a16="http://schemas.microsoft.com/office/drawing/2014/main" id="{BA938434-F776-4807-9F90-60BC0EDD32EB}"/>
+                <a16:creationId xmlns:a16="http://schemas.microsoft.com/office/drawing/2014/main" id="{5D65E1FE-04DC-4235-A62C-31F22BEC38B9}"/>
               </a:ext>
             </a:extLst>
           </p:cNvPr>
@@ -7966,7 +10356,7 @@
           <p:cNvPr id="24" name="">
             <a:extLst xmlns:a="http://schemas.openxmlformats.org/drawingml/2006/main">
               <a:ext uri="{FF2B5EF4-FFF2-40B4-BE49-F238E27FC236}">
-                <a16:creationId xmlns:a16="http://schemas.microsoft.com/office/drawing/2014/main" id="{86EB3A33-3513-451A-896F-CEEAE6A5DE92}"/>
+                <a16:creationId xmlns:a16="http://schemas.microsoft.com/office/drawing/2014/main" id="{C302DA7A-A303-4D35-8564-85A976C26A4B}"/>
               </a:ext>
             </a:extLst>
           </p:cNvPr>
@@ -8027,7 +10417,7 @@
           <p:cNvPr id="25" name="">
             <a:extLst xmlns:a="http://schemas.openxmlformats.org/drawingml/2006/main">
               <a:ext uri="{FF2B5EF4-FFF2-40B4-BE49-F238E27FC236}">
-                <a16:creationId xmlns:a16="http://schemas.microsoft.com/office/drawing/2014/main" id="{B30015B3-EFFA-49B5-AA6D-D6905BF1BADD}"/>
+                <a16:creationId xmlns:a16="http://schemas.microsoft.com/office/drawing/2014/main" id="{5FB6BB13-8DA7-497A-9518-4D6768549C8B}"/>
               </a:ext>
             </a:extLst>
           </p:cNvPr>
@@ -8058,7 +10448,7 @@
           <p:cNvPr id="26" name="">
             <a:extLst xmlns:a="http://schemas.openxmlformats.org/drawingml/2006/main">
               <a:ext uri="{FF2B5EF4-FFF2-40B4-BE49-F238E27FC236}">
-                <a16:creationId xmlns:a16="http://schemas.microsoft.com/office/drawing/2014/main" id="{C9C9B8E0-4658-45AA-BBCA-36371AC4D0A5}"/>
+                <a16:creationId xmlns:a16="http://schemas.microsoft.com/office/drawing/2014/main" id="{27475AEC-5A19-4843-9442-D815FCE7DA85}"/>
               </a:ext>
             </a:extLst>
           </p:cNvPr>
@@ -8091,7 +10481,7 @@
           <p:cNvPr id="27" name="">
             <a:extLst xmlns:a="http://schemas.openxmlformats.org/drawingml/2006/main">
               <a:ext uri="{FF2B5EF4-FFF2-40B4-BE49-F238E27FC236}">
-                <a16:creationId xmlns:a16="http://schemas.microsoft.com/office/drawing/2014/main" id="{B7FEF52E-0E20-467D-95BD-B987527A7727}"/>
+                <a16:creationId xmlns:a16="http://schemas.microsoft.com/office/drawing/2014/main" id="{1C0F5326-9BE3-48E6-84C5-7AA617B308AB}"/>
               </a:ext>
             </a:extLst>
           </p:cNvPr>
@@ -8152,7 +10542,7 @@
           <p:cNvPr id="28" name="">
             <a:extLst xmlns:a="http://schemas.openxmlformats.org/drawingml/2006/main">
               <a:ext uri="{FF2B5EF4-FFF2-40B4-BE49-F238E27FC236}">
-                <a16:creationId xmlns:a16="http://schemas.microsoft.com/office/drawing/2014/main" id="{A4CB5C76-959E-4283-944F-1D99600AD2BF}"/>
+                <a16:creationId xmlns:a16="http://schemas.microsoft.com/office/drawing/2014/main" id="{85B66A86-E907-4994-8585-3A3CA76BD43A}"/>
               </a:ext>
             </a:extLst>
           </p:cNvPr>
@@ -8213,7 +10603,7 @@
           <p:cNvPr id="29" name="">
             <a:extLst xmlns:a="http://schemas.openxmlformats.org/drawingml/2006/main">
               <a:ext uri="{FF2B5EF4-FFF2-40B4-BE49-F238E27FC236}">
-                <a16:creationId xmlns:a16="http://schemas.microsoft.com/office/drawing/2014/main" id="{5AC9D953-2A9B-400F-BACD-71935BDDBCFB}"/>
+                <a16:creationId xmlns:a16="http://schemas.microsoft.com/office/drawing/2014/main" id="{9D5B3337-235A-4377-AE9D-226270BD7E81}"/>
               </a:ext>
             </a:extLst>
           </p:cNvPr>
@@ -8274,7 +10664,7 @@
           <p:cNvPr id="30" name="">
             <a:extLst xmlns:a="http://schemas.openxmlformats.org/drawingml/2006/main">
               <a:ext uri="{FF2B5EF4-FFF2-40B4-BE49-F238E27FC236}">
-                <a16:creationId xmlns:a16="http://schemas.microsoft.com/office/drawing/2014/main" id="{5EF2CDEC-3D3D-4C12-8CFB-91EC98ABAF97}"/>
+                <a16:creationId xmlns:a16="http://schemas.microsoft.com/office/drawing/2014/main" id="{49853053-AC82-4FFA-A698-CCF90D375C43}"/>
               </a:ext>
             </a:extLst>
           </p:cNvPr>
@@ -8305,7 +10695,7 @@
           <p:cNvPr id="31" name="">
             <a:extLst xmlns:a="http://schemas.openxmlformats.org/drawingml/2006/main">
               <a:ext uri="{FF2B5EF4-FFF2-40B4-BE49-F238E27FC236}">
-                <a16:creationId xmlns:a16="http://schemas.microsoft.com/office/drawing/2014/main" id="{AD9B9498-102E-4D9C-907F-EE7719017202}"/>
+                <a16:creationId xmlns:a16="http://schemas.microsoft.com/office/drawing/2014/main" id="{91CDE8DB-549A-4227-B7F2-E6C27D2FDC71}"/>
               </a:ext>
             </a:extLst>
           </p:cNvPr>
@@ -8366,7 +10756,7 @@
           <p:cNvPr id="32" name="">
             <a:extLst xmlns:a="http://schemas.openxmlformats.org/drawingml/2006/main">
               <a:ext uri="{FF2B5EF4-FFF2-40B4-BE49-F238E27FC236}">
-                <a16:creationId xmlns:a16="http://schemas.microsoft.com/office/drawing/2014/main" id="{71E040A4-1E72-46C1-91CE-60F5C103DB44}"/>
+                <a16:creationId xmlns:a16="http://schemas.microsoft.com/office/drawing/2014/main" id="{3A266011-4416-44C8-867B-0B46C9EE820F}"/>
               </a:ext>
             </a:extLst>
           </p:cNvPr>
@@ -8427,7 +10817,7 @@
           <p:cNvPr id="33" name="">
             <a:extLst xmlns:a="http://schemas.openxmlformats.org/drawingml/2006/main">
               <a:ext uri="{FF2B5EF4-FFF2-40B4-BE49-F238E27FC236}">
-                <a16:creationId xmlns:a16="http://schemas.microsoft.com/office/drawing/2014/main" id="{A399F2E4-9EFD-4413-8133-DE405878580C}"/>
+                <a16:creationId xmlns:a16="http://schemas.microsoft.com/office/drawing/2014/main" id="{E98051BB-E614-4E36-92D4-54949D85658B}"/>
               </a:ext>
             </a:extLst>
           </p:cNvPr>
@@ -8488,7 +10878,7 @@
           <p:cNvPr id="34" name="">
             <a:extLst xmlns:a="http://schemas.openxmlformats.org/drawingml/2006/main">
               <a:ext uri="{FF2B5EF4-FFF2-40B4-BE49-F238E27FC236}">
-                <a16:creationId xmlns:a16="http://schemas.microsoft.com/office/drawing/2014/main" id="{2D1783A0-EBB2-45EA-8B83-419468778DAE}"/>
+                <a16:creationId xmlns:a16="http://schemas.microsoft.com/office/drawing/2014/main" id="{71992063-3B7D-4956-BF12-898D356E37EB}"/>
               </a:ext>
             </a:extLst>
           </p:cNvPr>
@@ -8549,7 +10939,7 @@
           <p:cNvPr id="35" name="">
             <a:extLst xmlns:a="http://schemas.openxmlformats.org/drawingml/2006/main">
               <a:ext uri="{FF2B5EF4-FFF2-40B4-BE49-F238E27FC236}">
-                <a16:creationId xmlns:a16="http://schemas.microsoft.com/office/drawing/2014/main" id="{CB1EA570-33D3-4183-9997-BCD88D5928CA}"/>
+                <a16:creationId xmlns:a16="http://schemas.microsoft.com/office/drawing/2014/main" id="{F8E270E9-4AF5-42E2-B71A-EE284C967305}"/>
               </a:ext>
             </a:extLst>
           </p:cNvPr>
@@ -8580,7 +10970,7 @@
           <p:cNvPr id="36" name="">
             <a:extLst xmlns:a="http://schemas.openxmlformats.org/drawingml/2006/main">
               <a:ext uri="{FF2B5EF4-FFF2-40B4-BE49-F238E27FC236}">
-                <a16:creationId xmlns:a16="http://schemas.microsoft.com/office/drawing/2014/main" id="{B5B94D33-7ADE-44C0-B4ED-194AABCFD012}"/>
+                <a16:creationId xmlns:a16="http://schemas.microsoft.com/office/drawing/2014/main" id="{6264A624-AAF6-4EF1-AF11-7FB64C4339A6}"/>
               </a:ext>
             </a:extLst>
           </p:cNvPr>
@@ -8641,7 +11031,7 @@
           <p:cNvPr id="37" name="">
             <a:extLst xmlns:a="http://schemas.openxmlformats.org/drawingml/2006/main">
               <a:ext uri="{FF2B5EF4-FFF2-40B4-BE49-F238E27FC236}">
-                <a16:creationId xmlns:a16="http://schemas.microsoft.com/office/drawing/2014/main" id="{A8B063AD-4857-477F-8657-BF75DD722CA7}"/>
+                <a16:creationId xmlns:a16="http://schemas.microsoft.com/office/drawing/2014/main" id="{BB55BB77-BB84-483D-84ED-856EC88B39DB}"/>
               </a:ext>
             </a:extLst>
           </p:cNvPr>
@@ -8700,7 +11090,7 @@
     </p:spTree>
     <p:extLst>
       <p:ext uri="{BB962C8B-B14F-4D97-AF65-F5344CB8AC3E}">
-        <p14:creationId xmlns:p14="http://schemas.microsoft.com/office/powerpoint/2010/main" val="799979415"/>
+        <p14:creationId xmlns:p14="http://schemas.microsoft.com/office/powerpoint/2010/main" val="175470730"/>
       </p:ext>
     </p:extLst>
   </p:cSld>
@@ -8731,7 +11121,7 @@
           <p:cNvPr id="8" name="slide-title">
             <a:extLst xmlns:a="http://schemas.openxmlformats.org/drawingml/2006/main">
               <a:ext uri="{FF2B5EF4-FFF2-40B4-BE49-F238E27FC236}">
-                <a16:creationId xmlns:a16="http://schemas.microsoft.com/office/drawing/2014/main" id="{BA2B4B69-2B14-4010-9173-16AF7FBEFE1F}"/>
+                <a16:creationId xmlns:a16="http://schemas.microsoft.com/office/drawing/2014/main" id="{D5F67725-FC31-431B-B016-4B6CA89C6604}"/>
               </a:ext>
             </a:extLst>
           </p:cNvPr>
@@ -8792,7 +11182,7 @@
           <p:cNvPr id="2" name="">
             <a:extLst xmlns:a="http://schemas.openxmlformats.org/drawingml/2006/main">
               <a:ext uri="{FF2B5EF4-FFF2-40B4-BE49-F238E27FC236}">
-                <a16:creationId xmlns:a16="http://schemas.microsoft.com/office/drawing/2014/main" id="{CBAA3E9A-C9EE-4D83-8A97-DADCC0CCBC39}"/>
+                <a16:creationId xmlns:a16="http://schemas.microsoft.com/office/drawing/2014/main" id="{355E3B45-AB08-4B53-8E46-041F1532EFB0}"/>
               </a:ext>
             </a:extLst>
           </p:cNvPr>
@@ -9306,7 +11696,7 @@
           <p:cNvPr id="4" name="">
             <a:extLst xmlns:a="http://schemas.openxmlformats.org/drawingml/2006/main">
               <a:ext uri="{FF2B5EF4-FFF2-40B4-BE49-F238E27FC236}">
-                <a16:creationId xmlns:a16="http://schemas.microsoft.com/office/drawing/2014/main" id="{D249BDD7-7BF2-4361-BA04-566AF0028F64}"/>
+                <a16:creationId xmlns:a16="http://schemas.microsoft.com/office/drawing/2014/main" id="{B7303F93-78B3-464C-8549-30BDC42D1BC7}"/>
               </a:ext>
             </a:extLst>
           </p:cNvPr>
@@ -9367,7 +11757,7 @@
           <p:cNvPr id="5" name="">
             <a:extLst xmlns:a="http://schemas.openxmlformats.org/drawingml/2006/main">
               <a:ext uri="{FF2B5EF4-FFF2-40B4-BE49-F238E27FC236}">
-                <a16:creationId xmlns:a16="http://schemas.microsoft.com/office/drawing/2014/main" id="{E5D04F5D-F400-41F3-B4F1-9406B4B96CD7}"/>
+                <a16:creationId xmlns:a16="http://schemas.microsoft.com/office/drawing/2014/main" id="{14CAC2AA-0AE4-4EA7-BF04-65A6F1880820}"/>
               </a:ext>
             </a:extLst>
           </p:cNvPr>
@@ -9398,7 +11788,7 @@
           <p:cNvPr id="6" name="">
             <a:extLst xmlns:a="http://schemas.openxmlformats.org/drawingml/2006/main">
               <a:ext uri="{FF2B5EF4-FFF2-40B4-BE49-F238E27FC236}">
-                <a16:creationId xmlns:a16="http://schemas.microsoft.com/office/drawing/2014/main" id="{630BF81D-B987-4FAD-9DE2-179BC70A5AC2}"/>
+                <a16:creationId xmlns:a16="http://schemas.microsoft.com/office/drawing/2014/main" id="{B2C81DBB-D331-46CB-AE16-753C0EAA728E}"/>
               </a:ext>
             </a:extLst>
           </p:cNvPr>
@@ -9459,7 +11849,7 @@
           <p:cNvPr id="7" name="">
             <a:extLst xmlns:a="http://schemas.openxmlformats.org/drawingml/2006/main">
               <a:ext uri="{FF2B5EF4-FFF2-40B4-BE49-F238E27FC236}">
-                <a16:creationId xmlns:a16="http://schemas.microsoft.com/office/drawing/2014/main" id="{0FB5B7FC-A034-4357-8871-A00CBFFDD01A}"/>
+                <a16:creationId xmlns:a16="http://schemas.microsoft.com/office/drawing/2014/main" id="{1DC73467-FEA3-4DCA-8DE0-BB40FC96EF0D}"/>
               </a:ext>
             </a:extLst>
           </p:cNvPr>
@@ -9518,7 +11908,7 @@
     </p:spTree>
     <p:extLst>
       <p:ext uri="{BB962C8B-B14F-4D97-AF65-F5344CB8AC3E}">
-        <p14:creationId xmlns:p14="http://schemas.microsoft.com/office/powerpoint/2010/main" val="783562058"/>
+        <p14:creationId xmlns:p14="http://schemas.microsoft.com/office/powerpoint/2010/main" val="1334526558"/>
       </p:ext>
     </p:extLst>
   </p:cSld>
@@ -9549,7 +11939,7 @@
           <p:cNvPr id="14" name="slide-title">
             <a:extLst xmlns:a="http://schemas.openxmlformats.org/drawingml/2006/main">
               <a:ext uri="{FF2B5EF4-FFF2-40B4-BE49-F238E27FC236}">
-                <a16:creationId xmlns:a16="http://schemas.microsoft.com/office/drawing/2014/main" id="{6BA0E079-20B0-4A0A-A657-62BF5338D093}"/>
+                <a16:creationId xmlns:a16="http://schemas.microsoft.com/office/drawing/2014/main" id="{704E61C5-1211-4FEB-901D-5CB5DE8B036A}"/>
               </a:ext>
             </a:extLst>
           </p:cNvPr>
@@ -9610,7 +12000,7 @@
           <p:cNvPr id="2" name="">
             <a:extLst xmlns:a="http://schemas.openxmlformats.org/drawingml/2006/main">
               <a:ext uri="{FF2B5EF4-FFF2-40B4-BE49-F238E27FC236}">
-                <a16:creationId xmlns:a16="http://schemas.microsoft.com/office/drawing/2014/main" id="{0301302A-5B19-4279-BFB4-99FBD58321D8}"/>
+                <a16:creationId xmlns:a16="http://schemas.microsoft.com/office/drawing/2014/main" id="{A131167F-A08E-43D6-AD5C-378693439BC9}"/>
               </a:ext>
             </a:extLst>
           </p:cNvPr>
@@ -9678,7 +12068,7 @@
         </p:xfrm>
         <a:graphic xmlns:a="http://schemas.openxmlformats.org/drawingml/2006/main">
           <a:graphicData uri="http://schemas.openxmlformats.org/drawingml/2006/chart">
-            <c:chart xmlns:r="http://schemas.openxmlformats.org/officeDocument/2006/relationships" xmlns:c="http://schemas.openxmlformats.org/drawingml/2006/chart" r:id="Rd162a2d01d1242bb"/>
+            <c:chart xmlns:r="http://schemas.openxmlformats.org/officeDocument/2006/relationships" xmlns:c="http://schemas.openxmlformats.org/drawingml/2006/chart" r:id="R1c9b869482df41ca"/>
           </a:graphicData>
         </a:graphic>
       </p:graphicFrame>
@@ -9687,7 +12077,7 @@
           <p:cNvPr id="4" name="">
             <a:extLst xmlns:a="http://schemas.openxmlformats.org/drawingml/2006/main">
               <a:ext uri="{FF2B5EF4-FFF2-40B4-BE49-F238E27FC236}">
-                <a16:creationId xmlns:a16="http://schemas.microsoft.com/office/drawing/2014/main" id="{724F25AE-E40C-424A-97F6-618F2C4B40D8}"/>
+                <a16:creationId xmlns:a16="http://schemas.microsoft.com/office/drawing/2014/main" id="{B89BA99A-4366-439A-ABC4-8001C56600B2}"/>
               </a:ext>
             </a:extLst>
           </p:cNvPr>
@@ -9748,7 +12138,7 @@
           <p:cNvPr id="5" name="">
             <a:extLst xmlns:a="http://schemas.openxmlformats.org/drawingml/2006/main">
               <a:ext uri="{FF2B5EF4-FFF2-40B4-BE49-F238E27FC236}">
-                <a16:creationId xmlns:a16="http://schemas.microsoft.com/office/drawing/2014/main" id="{5C7D75D3-5F30-4128-BAF9-61B4199731FB}"/>
+                <a16:creationId xmlns:a16="http://schemas.microsoft.com/office/drawing/2014/main" id="{822A63B8-C0DC-419C-B09B-CE85516B74C1}"/>
               </a:ext>
             </a:extLst>
           </p:cNvPr>
@@ -9809,7 +12199,7 @@
           <p:cNvPr id="6" name="">
             <a:extLst xmlns:a="http://schemas.openxmlformats.org/drawingml/2006/main">
               <a:ext uri="{FF2B5EF4-FFF2-40B4-BE49-F238E27FC236}">
-                <a16:creationId xmlns:a16="http://schemas.microsoft.com/office/drawing/2014/main" id="{3C253810-270A-4B36-99E8-71F56CC8AFAC}"/>
+                <a16:creationId xmlns:a16="http://schemas.microsoft.com/office/drawing/2014/main" id="{EA187D65-05BE-4462-AA89-BE12EA47F9A4}"/>
               </a:ext>
             </a:extLst>
           </p:cNvPr>
@@ -9840,7 +12230,7 @@
           <p:cNvPr id="7" name="">
             <a:extLst xmlns:a="http://schemas.openxmlformats.org/drawingml/2006/main">
               <a:ext uri="{FF2B5EF4-FFF2-40B4-BE49-F238E27FC236}">
-                <a16:creationId xmlns:a16="http://schemas.microsoft.com/office/drawing/2014/main" id="{B8B6C8D1-ED23-4309-9D77-8DC619C28B42}"/>
+                <a16:creationId xmlns:a16="http://schemas.microsoft.com/office/drawing/2014/main" id="{46218CAD-6F42-4B87-87E5-8084BCA95B01}"/>
               </a:ext>
             </a:extLst>
           </p:cNvPr>
@@ -9901,7 +12291,7 @@
           <p:cNvPr id="8" name="">
             <a:extLst xmlns:a="http://schemas.openxmlformats.org/drawingml/2006/main">
               <a:ext uri="{FF2B5EF4-FFF2-40B4-BE49-F238E27FC236}">
-                <a16:creationId xmlns:a16="http://schemas.microsoft.com/office/drawing/2014/main" id="{0284628E-E2DA-49D2-9263-90F96BAD57E0}"/>
+                <a16:creationId xmlns:a16="http://schemas.microsoft.com/office/drawing/2014/main" id="{C702C957-9DE7-424C-A076-ECC2F96342DD}"/>
               </a:ext>
             </a:extLst>
           </p:cNvPr>
@@ -9962,7 +12352,7 @@
           <p:cNvPr id="9" name="">
             <a:extLst xmlns:a="http://schemas.openxmlformats.org/drawingml/2006/main">
               <a:ext uri="{FF2B5EF4-FFF2-40B4-BE49-F238E27FC236}">
-                <a16:creationId xmlns:a16="http://schemas.microsoft.com/office/drawing/2014/main" id="{88D8A265-179B-419B-A235-2A07042AFF38}"/>
+                <a16:creationId xmlns:a16="http://schemas.microsoft.com/office/drawing/2014/main" id="{2BC21A05-A16A-4216-8A7E-63CE2B29FB41}"/>
               </a:ext>
             </a:extLst>
           </p:cNvPr>
@@ -10050,7 +12440,7 @@
           <p:cNvPr id="10" name="">
             <a:extLst xmlns:a="http://schemas.openxmlformats.org/drawingml/2006/main">
               <a:ext uri="{FF2B5EF4-FFF2-40B4-BE49-F238E27FC236}">
-                <a16:creationId xmlns:a16="http://schemas.microsoft.com/office/drawing/2014/main" id="{92BEA625-333C-4EC1-B51B-C55978949192}"/>
+                <a16:creationId xmlns:a16="http://schemas.microsoft.com/office/drawing/2014/main" id="{E01F044B-2549-4DC3-BA09-374E04AA1328}"/>
               </a:ext>
             </a:extLst>
           </p:cNvPr>
@@ -10111,7 +12501,7 @@
           <p:cNvPr id="11" name="">
             <a:extLst xmlns:a="http://schemas.openxmlformats.org/drawingml/2006/main">
               <a:ext uri="{FF2B5EF4-FFF2-40B4-BE49-F238E27FC236}">
-                <a16:creationId xmlns:a16="http://schemas.microsoft.com/office/drawing/2014/main" id="{C496E950-743A-4575-A810-DC6A75393A8B}"/>
+                <a16:creationId xmlns:a16="http://schemas.microsoft.com/office/drawing/2014/main" id="{CA27E7BD-55C7-46BB-8648-CA1D7FE16249}"/>
               </a:ext>
             </a:extLst>
           </p:cNvPr>
@@ -10142,7 +12532,7 @@
           <p:cNvPr id="12" name="">
             <a:extLst xmlns:a="http://schemas.openxmlformats.org/drawingml/2006/main">
               <a:ext uri="{FF2B5EF4-FFF2-40B4-BE49-F238E27FC236}">
-                <a16:creationId xmlns:a16="http://schemas.microsoft.com/office/drawing/2014/main" id="{BF90E3CB-7011-497B-971A-73FD1E2D783C}"/>
+                <a16:creationId xmlns:a16="http://schemas.microsoft.com/office/drawing/2014/main" id="{8375EBDC-AA2D-4B3D-A969-4136FC70FE55}"/>
               </a:ext>
             </a:extLst>
           </p:cNvPr>
@@ -10203,7 +12593,7 @@
           <p:cNvPr id="13" name="">
             <a:extLst xmlns:a="http://schemas.openxmlformats.org/drawingml/2006/main">
               <a:ext uri="{FF2B5EF4-FFF2-40B4-BE49-F238E27FC236}">
-                <a16:creationId xmlns:a16="http://schemas.microsoft.com/office/drawing/2014/main" id="{0B597B8B-A1B5-4850-9F16-D0D8627EC7FB}"/>
+                <a16:creationId xmlns:a16="http://schemas.microsoft.com/office/drawing/2014/main" id="{355FC8EA-005B-4D85-8716-ECCAF8BD4AFE}"/>
               </a:ext>
             </a:extLst>
           </p:cNvPr>
@@ -10262,7 +12652,7 @@
     </p:spTree>
     <p:extLst>
       <p:ext uri="{BB962C8B-B14F-4D97-AF65-F5344CB8AC3E}">
-        <p14:creationId xmlns:p14="http://schemas.microsoft.com/office/powerpoint/2010/main" val="9237507"/>
+        <p14:creationId xmlns:p14="http://schemas.microsoft.com/office/powerpoint/2010/main" val="2130973044"/>
       </p:ext>
     </p:extLst>
   </p:cSld>
@@ -10293,7 +12683,7 @@
           <p:cNvPr id="12" name="slide-title">
             <a:extLst xmlns:a="http://schemas.openxmlformats.org/drawingml/2006/main">
               <a:ext uri="{FF2B5EF4-FFF2-40B4-BE49-F238E27FC236}">
-                <a16:creationId xmlns:a16="http://schemas.microsoft.com/office/drawing/2014/main" id="{4B35C9B4-3CEB-4A37-B45F-0FA69A39EC73}"/>
+                <a16:creationId xmlns:a16="http://schemas.microsoft.com/office/drawing/2014/main" id="{1DE016D5-161E-43AB-92EB-A4D6D45388C4}"/>
               </a:ext>
             </a:extLst>
           </p:cNvPr>
@@ -10354,7 +12744,7 @@
           <p:cNvPr id="2" name="">
             <a:extLst xmlns:a="http://schemas.openxmlformats.org/drawingml/2006/main">
               <a:ext uri="{FF2B5EF4-FFF2-40B4-BE49-F238E27FC236}">
-                <a16:creationId xmlns:a16="http://schemas.microsoft.com/office/drawing/2014/main" id="{EB27B178-5AA8-4C1E-BABB-648FED027789}"/>
+                <a16:creationId xmlns:a16="http://schemas.microsoft.com/office/drawing/2014/main" id="{6FFECA48-31F7-4318-B694-96C4DCAABA87}"/>
               </a:ext>
             </a:extLst>
           </p:cNvPr>
@@ -10415,7 +12805,7 @@
           <p:cNvPr id="3" name="">
             <a:extLst xmlns:a="http://schemas.openxmlformats.org/drawingml/2006/main">
               <a:ext uri="{FF2B5EF4-FFF2-40B4-BE49-F238E27FC236}">
-                <a16:creationId xmlns:a16="http://schemas.microsoft.com/office/drawing/2014/main" id="{611030AB-EDE3-48A5-B0D9-EF75CE5D666D}"/>
+                <a16:creationId xmlns:a16="http://schemas.microsoft.com/office/drawing/2014/main" id="{E57E45BE-436E-417C-9D6F-325E194D4898}"/>
               </a:ext>
             </a:extLst>
           </p:cNvPr>
@@ -10476,7 +12866,7 @@
           <p:cNvPr id="4" name="">
             <a:extLst xmlns:a="http://schemas.openxmlformats.org/drawingml/2006/main">
               <a:ext uri="{FF2B5EF4-FFF2-40B4-BE49-F238E27FC236}">
-                <a16:creationId xmlns:a16="http://schemas.microsoft.com/office/drawing/2014/main" id="{7C1C79A5-9215-4F18-9899-FA9464CF711F}"/>
+                <a16:creationId xmlns:a16="http://schemas.microsoft.com/office/drawing/2014/main" id="{7C559A7D-AC5D-4663-AFB2-A07C2B9911BE}"/>
               </a:ext>
             </a:extLst>
           </p:cNvPr>
@@ -10537,7 +12927,7 @@
           <p:cNvPr id="5" name="">
             <a:extLst xmlns:a="http://schemas.openxmlformats.org/drawingml/2006/main">
               <a:ext uri="{FF2B5EF4-FFF2-40B4-BE49-F238E27FC236}">
-                <a16:creationId xmlns:a16="http://schemas.microsoft.com/office/drawing/2014/main" id="{92EE4C25-5B0B-4042-988D-0DEE0C3EFABA}"/>
+                <a16:creationId xmlns:a16="http://schemas.microsoft.com/office/drawing/2014/main" id="{4CB07FA5-C005-4BC8-912C-A63E3547655A}"/>
               </a:ext>
             </a:extLst>
           </p:cNvPr>
@@ -10598,7 +12988,7 @@
           <p:cNvPr id="6" name="">
             <a:extLst xmlns:a="http://schemas.openxmlformats.org/drawingml/2006/main">
               <a:ext uri="{FF2B5EF4-FFF2-40B4-BE49-F238E27FC236}">
-                <a16:creationId xmlns:a16="http://schemas.microsoft.com/office/drawing/2014/main" id="{D9D32856-885D-48DF-B297-105B0A5EA270}"/>
+                <a16:creationId xmlns:a16="http://schemas.microsoft.com/office/drawing/2014/main" id="{FAF5D0D3-0FB1-41E1-8E80-4A5C80A64D7F}"/>
               </a:ext>
             </a:extLst>
           </p:cNvPr>
@@ -11001,7 +13391,7 @@
           <p:cNvPr id="8" name="">
             <a:extLst xmlns:a="http://schemas.openxmlformats.org/drawingml/2006/main">
               <a:ext uri="{FF2B5EF4-FFF2-40B4-BE49-F238E27FC236}">
-                <a16:creationId xmlns:a16="http://schemas.microsoft.com/office/drawing/2014/main" id="{4CF31E7F-7A1F-4096-8A19-C1D7DCD13DA2}"/>
+                <a16:creationId xmlns:a16="http://schemas.microsoft.com/office/drawing/2014/main" id="{2E453589-2329-4EAF-BF82-D71F79345FBE}"/>
               </a:ext>
             </a:extLst>
           </p:cNvPr>
@@ -11062,7 +13452,7 @@
           <p:cNvPr id="9" name="">
             <a:extLst xmlns:a="http://schemas.openxmlformats.org/drawingml/2006/main">
               <a:ext uri="{FF2B5EF4-FFF2-40B4-BE49-F238E27FC236}">
-                <a16:creationId xmlns:a16="http://schemas.microsoft.com/office/drawing/2014/main" id="{69BDE0DC-4906-411E-AB9C-4B2DC49F777F}"/>
+                <a16:creationId xmlns:a16="http://schemas.microsoft.com/office/drawing/2014/main" id="{2D4B3A54-FF2B-4A86-9FB3-35BC03B6CD07}"/>
               </a:ext>
             </a:extLst>
           </p:cNvPr>
@@ -11093,7 +13483,7 @@
           <p:cNvPr id="10" name="">
             <a:extLst xmlns:a="http://schemas.openxmlformats.org/drawingml/2006/main">
               <a:ext uri="{FF2B5EF4-FFF2-40B4-BE49-F238E27FC236}">
-                <a16:creationId xmlns:a16="http://schemas.microsoft.com/office/drawing/2014/main" id="{F72269B2-9D34-4E4F-ADBC-D8EB35AF1247}"/>
+                <a16:creationId xmlns:a16="http://schemas.microsoft.com/office/drawing/2014/main" id="{84238108-8721-4CD8-86FC-4DCB6AD2B7E1}"/>
               </a:ext>
             </a:extLst>
           </p:cNvPr>
@@ -11154,7 +13544,7 @@
           <p:cNvPr id="11" name="">
             <a:extLst xmlns:a="http://schemas.openxmlformats.org/drawingml/2006/main">
               <a:ext uri="{FF2B5EF4-FFF2-40B4-BE49-F238E27FC236}">
-                <a16:creationId xmlns:a16="http://schemas.microsoft.com/office/drawing/2014/main" id="{C0C94ABD-966D-4070-9FEB-F5844281093C}"/>
+                <a16:creationId xmlns:a16="http://schemas.microsoft.com/office/drawing/2014/main" id="{F685B69B-0CE8-4F6D-924C-D4E673EA632E}"/>
               </a:ext>
             </a:extLst>
           </p:cNvPr>
@@ -11213,7 +13603,7 @@
     </p:spTree>
     <p:extLst>
       <p:ext uri="{BB962C8B-B14F-4D97-AF65-F5344CB8AC3E}">
-        <p14:creationId xmlns:p14="http://schemas.microsoft.com/office/powerpoint/2010/main" val="459674730"/>
+        <p14:creationId xmlns:p14="http://schemas.microsoft.com/office/powerpoint/2010/main" val="324878919"/>
       </p:ext>
     </p:extLst>
   </p:cSld>
@@ -11226,7 +13616,7 @@
     <p:bg>
       <p:bgPr>
         <a:solidFill xmlns:a="http://schemas.openxmlformats.org/drawingml/2006/main">
-          <a:srgbClr val="0B172A"/>
+          <a:srgbClr val="F4F0E8"/>
         </a:solidFill>
       </p:bgPr>
     </p:bg>
@@ -11241,10 +13631,10 @@
       </p:grpSpPr>
       <p:sp>
         <p:nvSpPr>
-          <p:cNvPr id="19" name="slide-title">
-            <a:extLst xmlns:a="http://schemas.openxmlformats.org/drawingml/2006/main">
-              <a:ext uri="{FF2B5EF4-FFF2-40B4-BE49-F238E27FC236}">
-                <a16:creationId xmlns:a16="http://schemas.microsoft.com/office/drawing/2014/main" id="{452435BA-8D26-4F9F-A637-04F1E844610A}"/>
+          <p:cNvPr id="18" name="slide-title">
+            <a:extLst xmlns:a="http://schemas.openxmlformats.org/drawingml/2006/main">
+              <a:ext uri="{FF2B5EF4-FFF2-40B4-BE49-F238E27FC236}">
+                <a16:creationId xmlns:a16="http://schemas.microsoft.com/office/drawing/2014/main" id="{70D43567-66B2-4D46-8831-689D1F8D3E5D}"/>
               </a:ext>
             </a:extLst>
           </p:cNvPr>
@@ -11268,7 +13658,7 @@
         </p:spPr>
         <p:txBody>
           <a:bodyPr xmlns:a="http://schemas.openxmlformats.org/drawingml/2006/main" wrap="square" lIns="0" tIns="0" rIns="0" bIns="0" anchor="t">
-            <a:normAutofit fontScale="74317"/>
+            <a:normAutofit fontScale="100000"/>
           </a:bodyPr>
           <a:lstStyle xmlns:a="http://schemas.openxmlformats.org/drawingml/2006/main"/>
           <a:p xmlns:a="http://schemas.openxmlformats.org/drawingml/2006/main">
@@ -11279,7 +13669,7 @@
               <a:buNone/>
               <a:defRPr sz="3300" b="1" i="0">
                 <a:solidFill>
-                  <a:srgbClr val="FFFFFF"/>
+                  <a:srgbClr val="122033"/>
                 </a:solidFill>
                 <a:latin typeface="Arial"/>
                 <a:ea typeface="Arial"/>
@@ -11289,13 +13679,13 @@
             <a:r>
               <a:rPr sz="3300" b="1" i="0">
                 <a:solidFill>
-                  <a:srgbClr val="FFFFFF"/>
-                </a:solidFill>
-                <a:latin typeface="Arial"/>
-                <a:ea typeface="Arial"/>
-                <a:cs typeface="Arial"/>
-              </a:rPr>
-              <a:t>Next architecture: separate formula generation from large transformations</a:t>
+                  <a:srgbClr val="122033"/>
+                </a:solidFill>
+                <a:latin typeface="Arial"/>
+                <a:ea typeface="Arial"/>
+                <a:cs typeface="Arial"/>
+              </a:rPr>
+              <a:t>Tinker LoRA training session</a:t>
             </a:r>
           </a:p>
         </p:txBody>
@@ -11305,7 +13695,7 @@
           <p:cNvPr id="2" name="">
             <a:extLst xmlns:a="http://schemas.openxmlformats.org/drawingml/2006/main">
               <a:ext uri="{FF2B5EF4-FFF2-40B4-BE49-F238E27FC236}">
-                <a16:creationId xmlns:a16="http://schemas.microsoft.com/office/drawing/2014/main" id="{3B8EB7C5-05C4-4BE4-9DD0-2FCBC85CB28D}"/>
+                <a16:creationId xmlns:a16="http://schemas.microsoft.com/office/drawing/2014/main" id="{784C8E43-9FF0-48CA-9B03-F01866818578}"/>
               </a:ext>
             </a:extLst>
           </p:cNvPr>
@@ -11317,7 +13707,7 @@
         <p:spPr>
           <a:xfrm xmlns:a="http://schemas.openxmlformats.org/drawingml/2006/main">
             <a:off x="609600" y="1028700"/>
-            <a:ext cx="9525000" cy="361950"/>
+            <a:ext cx="9715500" cy="361950"/>
           </a:xfrm>
           <a:prstGeom xmlns:a="http://schemas.openxmlformats.org/drawingml/2006/main" prst="rect">
             <a:avLst/>
@@ -11340,7 +13730,7 @@
               <a:buNone/>
               <a:defRPr sz="1725" b="0" i="0">
                 <a:solidFill>
-                  <a:srgbClr val="AAB6C5"/>
+                  <a:srgbClr val="667487"/>
                 </a:solidFill>
                 <a:latin typeface="Arial"/>
                 <a:ea typeface="Arial"/>
@@ -11350,13 +13740,13 @@
             <a:r>
               <a:rPr sz="1725" b="0" i="0">
                 <a:solidFill>
-                  <a:srgbClr val="AAB6C5"/>
-                </a:solidFill>
-                <a:latin typeface="Arial"/>
-                <a:ea typeface="Arial"/>
-                <a:cs typeface="Arial"/>
-              </a:rPr>
-              <a:t>Formula tasks use the model. Large transformations use fixed operations.</a:t>
+                  <a:srgbClr val="667487"/>
+                </a:solidFill>
+                <a:latin typeface="Arial"/>
+                <a:ea typeface="Arial"/>
+                <a:cs typeface="Arial"/>
+              </a:rPr>
+              <a:t>Provider evidence for the completed development run on Qwen3.8-27B.</a:t>
             </a:r>
           </a:p>
         </p:txBody>
@@ -11366,449 +13756,74 @@
           <p:cNvPr id="3" name="">
             <a:extLst xmlns:a="http://schemas.openxmlformats.org/drawingml/2006/main">
               <a:ext uri="{FF2B5EF4-FFF2-40B4-BE49-F238E27FC236}">
-                <a16:creationId xmlns:a16="http://schemas.microsoft.com/office/drawing/2014/main" id="{4C6C8621-286A-4792-B277-5B7FAFCCF3D6}"/>
-              </a:ext>
-            </a:extLst>
-          </p:cNvPr>
-          <p:cNvSpPr>
-            <a:spLocks xmlns:a="http://schemas.openxmlformats.org/drawingml/2006/main" noGrp="1"/>
-          </p:cNvSpPr>
-          <p:nvPr/>
-        </p:nvSpPr>
-        <p:spPr>
-          <a:xfrm xmlns:a="http://schemas.openxmlformats.org/drawingml/2006/main">
-            <a:off x="609600" y="1847850"/>
-            <a:ext cx="2476500" cy="266700"/>
-          </a:xfrm>
-          <a:prstGeom xmlns:a="http://schemas.openxmlformats.org/drawingml/2006/main" prst="rect">
-            <a:avLst/>
-          </a:prstGeom>
-          <a:noFill xmlns:a="http://schemas.openxmlformats.org/drawingml/2006/main"/>
-          <a:ln xmlns:a="http://schemas.openxmlformats.org/drawingml/2006/main" w="0">
-            <a:noFill/>
-          </a:ln>
-        </p:spPr>
-        <p:txBody>
-          <a:bodyPr xmlns:a="http://schemas.openxmlformats.org/drawingml/2006/main" wrap="square" lIns="0" tIns="0" rIns="0" bIns="0" anchor="t">
-            <a:normAutofit fontScale="100000"/>
-          </a:bodyPr>
-          <a:lstStyle xmlns:a="http://schemas.openxmlformats.org/drawingml/2006/main"/>
-          <a:p xmlns:a="http://schemas.openxmlformats.org/drawingml/2006/main">
-            <a:pPr algn="l">
-              <a:lnSpc>
-                <a:spcPct val="105000"/>
-              </a:lnSpc>
-              <a:buNone/>
-              <a:defRPr sz="1125" b="1" i="0">
-                <a:solidFill>
-                  <a:srgbClr val="35C47A"/>
-                </a:solidFill>
-                <a:latin typeface="Arial"/>
-                <a:ea typeface="Arial"/>
-                <a:cs typeface="Arial"/>
-              </a:defRPr>
-            </a:pPr>
-            <a:r>
-              <a:rPr sz="1125" b="1" i="0">
-                <a:solidFill>
-                  <a:srgbClr val="35C47A"/>
-                </a:solidFill>
-                <a:latin typeface="Arial"/>
-                <a:ea typeface="Arial"/>
-                <a:cs typeface="Arial"/>
-              </a:rPr>
-              <a:t>FORMULA TASKS</a:t>
-            </a:r>
-          </a:p>
-        </p:txBody>
-      </p:sp>
-      <p:sp>
-        <p:nvSpPr>
-          <p:cNvPr id="4" name="">
-            <a:extLst xmlns:a="http://schemas.openxmlformats.org/drawingml/2006/main">
-              <a:ext uri="{FF2B5EF4-FFF2-40B4-BE49-F238E27FC236}">
-                <a16:creationId xmlns:a16="http://schemas.microsoft.com/office/drawing/2014/main" id="{B5C18451-9BF4-48D7-B27B-D2BF4CC93AE2}"/>
-              </a:ext>
-            </a:extLst>
-          </p:cNvPr>
-          <p:cNvSpPr>
-            <a:spLocks xmlns:a="http://schemas.openxmlformats.org/drawingml/2006/main" noGrp="1"/>
-          </p:cNvSpPr>
-          <p:nvPr/>
-        </p:nvSpPr>
-        <p:spPr>
-          <a:xfrm xmlns:a="http://schemas.openxmlformats.org/drawingml/2006/main">
-            <a:off x="609600" y="2247900"/>
-            <a:ext cx="4476750" cy="438150"/>
-          </a:xfrm>
-          <a:prstGeom xmlns:a="http://schemas.openxmlformats.org/drawingml/2006/main" prst="rect">
-            <a:avLst/>
-          </a:prstGeom>
-          <a:noFill xmlns:a="http://schemas.openxmlformats.org/drawingml/2006/main"/>
-          <a:ln xmlns:a="http://schemas.openxmlformats.org/drawingml/2006/main" w="0">
-            <a:noFill/>
-          </a:ln>
-        </p:spPr>
-        <p:txBody>
-          <a:bodyPr xmlns:a="http://schemas.openxmlformats.org/drawingml/2006/main" wrap="square" lIns="0" tIns="0" rIns="0" bIns="0" anchor="t">
-            <a:normAutofit fontScale="100000"/>
-          </a:bodyPr>
-          <a:lstStyle xmlns:a="http://schemas.openxmlformats.org/drawingml/2006/main"/>
-          <a:p xmlns:a="http://schemas.openxmlformats.org/drawingml/2006/main">
-            <a:pPr algn="l">
-              <a:lnSpc>
-                <a:spcPct val="105000"/>
-              </a:lnSpc>
-              <a:buNone/>
-              <a:defRPr sz="2325" b="1" i="0">
-                <a:solidFill>
-                  <a:srgbClr val="FFFFFF"/>
-                </a:solidFill>
-                <a:latin typeface="Arial"/>
-                <a:ea typeface="Arial"/>
-                <a:cs typeface="Arial"/>
-              </a:defRPr>
-            </a:pPr>
-            <a:r>
-              <a:rPr sz="2325" b="1" i="0">
-                <a:solidFill>
-                  <a:srgbClr val="FFFFFF"/>
-                </a:solidFill>
-                <a:latin typeface="Arial"/>
-                <a:ea typeface="Arial"/>
-                <a:cs typeface="Arial"/>
-              </a:rPr>
-              <a:t>Generate a formula</a:t>
-            </a:r>
-          </a:p>
-        </p:txBody>
-      </p:sp>
-      <p:sp>
-        <p:nvSpPr>
-          <p:cNvPr id="5" name="">
-            <a:extLst xmlns:a="http://schemas.openxmlformats.org/drawingml/2006/main">
-              <a:ext uri="{FF2B5EF4-FFF2-40B4-BE49-F238E27FC236}">
-                <a16:creationId xmlns:a16="http://schemas.microsoft.com/office/drawing/2014/main" id="{265FE762-091A-4EF9-A94E-02A9215BF1DF}"/>
-              </a:ext>
-            </a:extLst>
-          </p:cNvPr>
-          <p:cNvSpPr>
-            <a:spLocks xmlns:a="http://schemas.openxmlformats.org/drawingml/2006/main" noGrp="1"/>
-          </p:cNvSpPr>
-          <p:nvPr/>
-        </p:nvSpPr>
-        <p:spPr>
-          <a:xfrm xmlns:a="http://schemas.openxmlformats.org/drawingml/2006/main">
-            <a:off x="609600" y="2819400"/>
-            <a:ext cx="4572000" cy="742950"/>
-          </a:xfrm>
-          <a:prstGeom xmlns:a="http://schemas.openxmlformats.org/drawingml/2006/main" prst="rect">
-            <a:avLst/>
-          </a:prstGeom>
-          <a:noFill xmlns:a="http://schemas.openxmlformats.org/drawingml/2006/main"/>
-          <a:ln xmlns:a="http://schemas.openxmlformats.org/drawingml/2006/main" w="0">
-            <a:noFill/>
-          </a:ln>
-        </p:spPr>
-        <p:txBody>
-          <a:bodyPr xmlns:a="http://schemas.openxmlformats.org/drawingml/2006/main" wrap="square" lIns="0" tIns="0" rIns="0" bIns="0" anchor="t">
-            <a:normAutofit fontScale="100000"/>
-          </a:bodyPr>
-          <a:lstStyle xmlns:a="http://schemas.openxmlformats.org/drawingml/2006/main"/>
-          <a:p xmlns:a="http://schemas.openxmlformats.org/drawingml/2006/main">
-            <a:pPr algn="l">
-              <a:lnSpc>
-                <a:spcPct val="114000"/>
-              </a:lnSpc>
-              <a:buNone/>
-              <a:defRPr sz="1575" b="0" i="0">
-                <a:solidFill>
-                  <a:srgbClr val="C6D2DF"/>
-                </a:solidFill>
-                <a:latin typeface="Arial"/>
-                <a:ea typeface="Arial"/>
-                <a:cs typeface="Arial"/>
-              </a:defRPr>
-            </a:pPr>
-            <a:r>
-              <a:rPr sz="1575" b="0" i="0">
-                <a:solidFill>
-                  <a:srgbClr val="C6D2DF"/>
-                </a:solidFill>
-                <a:latin typeface="Arial"/>
-                <a:ea typeface="Arial"/>
-                <a:cs typeface="Arial"/>
-              </a:rPr>
-              <a:t>Recalculate locally and run task-specific checks before publishing the workbook.</a:t>
-            </a:r>
-          </a:p>
-        </p:txBody>
-      </p:sp>
-      <p:sp>
-        <p:nvSpPr>
-          <p:cNvPr id="6" name="">
-            <a:extLst xmlns:a="http://schemas.openxmlformats.org/drawingml/2006/main">
-              <a:ext uri="{FF2B5EF4-FFF2-40B4-BE49-F238E27FC236}">
-                <a16:creationId xmlns:a16="http://schemas.microsoft.com/office/drawing/2014/main" id="{4D3FCC90-8556-40B3-BE26-F2B8791C35CF}"/>
-              </a:ext>
-            </a:extLst>
-          </p:cNvPr>
-          <p:cNvSpPr>
-            <a:spLocks xmlns:a="http://schemas.openxmlformats.org/drawingml/2006/main" noGrp="1"/>
-          </p:cNvSpPr>
-          <p:nvPr/>
-        </p:nvSpPr>
-        <p:spPr>
-          <a:xfrm xmlns:a="http://schemas.openxmlformats.org/drawingml/2006/main">
-            <a:off x="6343650" y="1847850"/>
-            <a:ext cx="3143250" cy="266700"/>
-          </a:xfrm>
-          <a:prstGeom xmlns:a="http://schemas.openxmlformats.org/drawingml/2006/main" prst="rect">
-            <a:avLst/>
-          </a:prstGeom>
-          <a:noFill xmlns:a="http://schemas.openxmlformats.org/drawingml/2006/main"/>
-          <a:ln xmlns:a="http://schemas.openxmlformats.org/drawingml/2006/main" w="0">
-            <a:noFill/>
-          </a:ln>
-        </p:spPr>
-        <p:txBody>
-          <a:bodyPr xmlns:a="http://schemas.openxmlformats.org/drawingml/2006/main" wrap="square" lIns="0" tIns="0" rIns="0" bIns="0" anchor="t">
-            <a:normAutofit fontScale="100000"/>
-          </a:bodyPr>
-          <a:lstStyle xmlns:a="http://schemas.openxmlformats.org/drawingml/2006/main"/>
-          <a:p xmlns:a="http://schemas.openxmlformats.org/drawingml/2006/main">
-            <a:pPr algn="l">
-              <a:lnSpc>
-                <a:spcPct val="105000"/>
-              </a:lnSpc>
-              <a:buNone/>
-              <a:defRPr sz="1125" b="1" i="0">
-                <a:solidFill>
-                  <a:srgbClr val="35C47A"/>
-                </a:solidFill>
-                <a:latin typeface="Arial"/>
-                <a:ea typeface="Arial"/>
-                <a:cs typeface="Arial"/>
-              </a:defRPr>
-            </a:pPr>
-            <a:r>
-              <a:rPr sz="1125" b="1" i="0">
-                <a:solidFill>
-                  <a:srgbClr val="35C47A"/>
-                </a:solidFill>
-                <a:latin typeface="Arial"/>
-                <a:ea typeface="Arial"/>
-                <a:cs typeface="Arial"/>
-              </a:rPr>
-              <a:t>LARGE TRANSFORMATIONS</a:t>
-            </a:r>
-          </a:p>
-        </p:txBody>
-      </p:sp>
-      <p:sp>
-        <p:nvSpPr>
-          <p:cNvPr id="7" name="">
-            <a:extLst xmlns:a="http://schemas.openxmlformats.org/drawingml/2006/main">
-              <a:ext uri="{FF2B5EF4-FFF2-40B4-BE49-F238E27FC236}">
-                <a16:creationId xmlns:a16="http://schemas.microsoft.com/office/drawing/2014/main" id="{17B08DBD-D05C-4E46-B986-735EEFEF7326}"/>
-              </a:ext>
-            </a:extLst>
-          </p:cNvPr>
-          <p:cNvSpPr>
-            <a:spLocks xmlns:a="http://schemas.openxmlformats.org/drawingml/2006/main" noGrp="1"/>
-          </p:cNvSpPr>
-          <p:nvPr/>
-        </p:nvSpPr>
-        <p:spPr>
-          <a:xfrm xmlns:a="http://schemas.openxmlformats.org/drawingml/2006/main">
-            <a:off x="6343650" y="2247900"/>
-            <a:ext cx="4762500" cy="438150"/>
-          </a:xfrm>
-          <a:prstGeom xmlns:a="http://schemas.openxmlformats.org/drawingml/2006/main" prst="rect">
-            <a:avLst/>
-          </a:prstGeom>
-          <a:noFill xmlns:a="http://schemas.openxmlformats.org/drawingml/2006/main"/>
-          <a:ln xmlns:a="http://schemas.openxmlformats.org/drawingml/2006/main" w="0">
-            <a:noFill/>
-          </a:ln>
-        </p:spPr>
-        <p:txBody>
-          <a:bodyPr xmlns:a="http://schemas.openxmlformats.org/drawingml/2006/main" wrap="square" lIns="0" tIns="0" rIns="0" bIns="0" anchor="t">
-            <a:normAutofit fontScale="100000"/>
-          </a:bodyPr>
-          <a:lstStyle xmlns:a="http://schemas.openxmlformats.org/drawingml/2006/main"/>
-          <a:p xmlns:a="http://schemas.openxmlformats.org/drawingml/2006/main">
-            <a:pPr algn="l">
-              <a:lnSpc>
-                <a:spcPct val="105000"/>
-              </a:lnSpc>
-              <a:buNone/>
-              <a:defRPr sz="2325" b="1" i="0">
-                <a:solidFill>
-                  <a:srgbClr val="FFFFFF"/>
-                </a:solidFill>
-                <a:latin typeface="Arial"/>
-                <a:ea typeface="Arial"/>
-                <a:cs typeface="Arial"/>
-              </a:defRPr>
-            </a:pPr>
-            <a:r>
-              <a:rPr sz="2325" b="1" i="0">
-                <a:solidFill>
-                  <a:srgbClr val="FFFFFF"/>
-                </a:solidFill>
-                <a:latin typeface="Arial"/>
-                <a:ea typeface="Arial"/>
-                <a:cs typeface="Arial"/>
-              </a:rPr>
-              <a:t>Apply a fixed operation</a:t>
-            </a:r>
-          </a:p>
-        </p:txBody>
-      </p:sp>
-      <p:sp>
-        <p:nvSpPr>
-          <p:cNvPr id="8" name="">
-            <a:extLst xmlns:a="http://schemas.openxmlformats.org/drawingml/2006/main">
-              <a:ext uri="{FF2B5EF4-FFF2-40B4-BE49-F238E27FC236}">
-                <a16:creationId xmlns:a16="http://schemas.microsoft.com/office/drawing/2014/main" id="{7976EF26-728D-465D-AE61-A9A4790D29B7}"/>
-              </a:ext>
-            </a:extLst>
-          </p:cNvPr>
-          <p:cNvSpPr>
-            <a:spLocks xmlns:a="http://schemas.openxmlformats.org/drawingml/2006/main" noGrp="1"/>
-          </p:cNvSpPr>
-          <p:nvPr/>
-        </p:nvSpPr>
-        <p:spPr>
-          <a:xfrm xmlns:a="http://schemas.openxmlformats.org/drawingml/2006/main">
-            <a:off x="6343650" y="2819400"/>
-            <a:ext cx="4762500" cy="857250"/>
-          </a:xfrm>
-          <a:prstGeom xmlns:a="http://schemas.openxmlformats.org/drawingml/2006/main" prst="rect">
-            <a:avLst/>
-          </a:prstGeom>
-          <a:noFill xmlns:a="http://schemas.openxmlformats.org/drawingml/2006/main"/>
-          <a:ln xmlns:a="http://schemas.openxmlformats.org/drawingml/2006/main" w="0">
-            <a:noFill/>
-          </a:ln>
-        </p:spPr>
-        <p:txBody>
-          <a:bodyPr xmlns:a="http://schemas.openxmlformats.org/drawingml/2006/main" wrap="square" lIns="0" tIns="0" rIns="0" bIns="0" anchor="t">
-            <a:normAutofit fontScale="100000"/>
-          </a:bodyPr>
-          <a:lstStyle xmlns:a="http://schemas.openxmlformats.org/drawingml/2006/main"/>
-          <a:p xmlns:a="http://schemas.openxmlformats.org/drawingml/2006/main">
-            <a:pPr algn="l">
-              <a:lnSpc>
-                <a:spcPct val="114000"/>
-              </a:lnSpc>
-              <a:buNone/>
-              <a:defRPr sz="1575" b="0" i="0">
-                <a:solidFill>
-                  <a:srgbClr val="C6D2DF"/>
-                </a:solidFill>
-                <a:latin typeface="Arial"/>
-                <a:ea typeface="Arial"/>
-                <a:cs typeface="Arial"/>
-              </a:defRPr>
-            </a:pPr>
-            <a:r>
-              <a:rPr sz="1575" b="0" i="0">
-                <a:solidFill>
-                  <a:srgbClr val="C6D2DF"/>
-                </a:solidFill>
-                <a:latin typeface="Arial"/>
-                <a:ea typeface="Arial"/>
-                <a:cs typeface="Arial"/>
-              </a:rPr>
-              <a:t>Use rule-based code for filtering, sorting, appending, grouping, deduplicating and clearing.</a:t>
-            </a:r>
-          </a:p>
-        </p:txBody>
-      </p:sp>
-      <p:sp>
-        <p:nvSpPr>
-          <p:cNvPr id="9" name="">
-            <a:extLst xmlns:a="http://schemas.openxmlformats.org/drawingml/2006/main">
-              <a:ext uri="{FF2B5EF4-FFF2-40B4-BE49-F238E27FC236}">
-                <a16:creationId xmlns:a16="http://schemas.microsoft.com/office/drawing/2014/main" id="{4A0A6A51-F750-42C1-B30C-30531F55EB9C}"/>
-              </a:ext>
-            </a:extLst>
-          </p:cNvPr>
-          <p:cNvSpPr>
-            <a:spLocks xmlns:a="http://schemas.openxmlformats.org/drawingml/2006/main" noGrp="1"/>
-          </p:cNvSpPr>
-          <p:nvPr/>
-        </p:nvSpPr>
-        <p:spPr>
-          <a:xfrm xmlns:a="http://schemas.openxmlformats.org/drawingml/2006/main">
-            <a:off x="5772150" y="1790700"/>
-            <a:ext cx="0" cy="2000250"/>
-          </a:xfrm>
-          <a:prstGeom xmlns:a="http://schemas.openxmlformats.org/drawingml/2006/main" prst="line">
-            <a:avLst/>
-          </a:prstGeom>
-          <a:noFill xmlns:a="http://schemas.openxmlformats.org/drawingml/2006/main"/>
-          <a:ln xmlns:a="http://schemas.openxmlformats.org/drawingml/2006/main" w="9525">
-            <a:solidFill>
-              <a:srgbClr val="344257"/>
-            </a:solidFill>
-            <a:prstDash val="solid"/>
-          </a:ln>
-        </p:spPr>
-      </p:sp>
-      <p:sp>
-        <p:nvSpPr>
-          <p:cNvPr id="10" name="">
-            <a:extLst xmlns:a="http://schemas.openxmlformats.org/drawingml/2006/main">
-              <a:ext uri="{FF2B5EF4-FFF2-40B4-BE49-F238E27FC236}">
-                <a16:creationId xmlns:a16="http://schemas.microsoft.com/office/drawing/2014/main" id="{C27C803C-05E5-4F6F-99E5-BEA2ABB5F8BA}"/>
-              </a:ext>
-            </a:extLst>
-          </p:cNvPr>
-          <p:cNvSpPr>
-            <a:spLocks xmlns:a="http://schemas.openxmlformats.org/drawingml/2006/main" noGrp="1"/>
-          </p:cNvSpPr>
-          <p:nvPr/>
-        </p:nvSpPr>
-        <p:spPr>
-          <a:xfrm xmlns:a="http://schemas.openxmlformats.org/drawingml/2006/main">
-            <a:off x="609600" y="4238625"/>
-            <a:ext cx="10972800" cy="1409700"/>
+                <a16:creationId xmlns:a16="http://schemas.microsoft.com/office/drawing/2014/main" id="{D6E18D3D-C025-4CC9-A746-ED30716F759D}"/>
+              </a:ext>
+            </a:extLst>
+          </p:cNvPr>
+          <p:cNvSpPr>
+            <a:spLocks xmlns:a="http://schemas.openxmlformats.org/drawingml/2006/main" noGrp="1"/>
+          </p:cNvSpPr>
+          <p:nvPr/>
+        </p:nvSpPr>
+        <p:spPr>
+          <a:xfrm xmlns:a="http://schemas.openxmlformats.org/drawingml/2006/main">
+            <a:off x="609600" y="1638300"/>
+            <a:ext cx="8096250" cy="3314700"/>
           </a:xfrm>
           <a:prstGeom xmlns:a="http://schemas.openxmlformats.org/drawingml/2006/main" prst="rect">
             <a:avLst/>
           </a:prstGeom>
           <a:solidFill xmlns:a="http://schemas.openxmlformats.org/drawingml/2006/main">
-            <a:srgbClr val="13243B"/>
+            <a:srgbClr val="FFFFFF"/>
           </a:solidFill>
           <a:ln xmlns:a="http://schemas.openxmlformats.org/drawingml/2006/main" w="9525">
             <a:solidFill>
-              <a:srgbClr val="344257"/>
+              <a:srgbClr val="C9D1D9"/>
             </a:solidFill>
             <a:prstDash val="solid"/>
           </a:ln>
         </p:spPr>
       </p:sp>
-      <p:sp>
-        <p:nvSpPr>
-          <p:cNvPr id="11" name="">
-            <a:extLst xmlns:a="http://schemas.openxmlformats.org/drawingml/2006/main">
-              <a:ext uri="{FF2B5EF4-FFF2-40B4-BE49-F238E27FC236}">
-                <a16:creationId xmlns:a16="http://schemas.microsoft.com/office/drawing/2014/main" id="{CEAEE07B-2893-412F-A923-1EB0B53CA510}"/>
-              </a:ext>
-            </a:extLst>
-          </p:cNvPr>
-          <p:cNvSpPr>
-            <a:spLocks xmlns:a="http://schemas.openxmlformats.org/drawingml/2006/main" noGrp="1"/>
-          </p:cNvSpPr>
-          <p:nvPr/>
-        </p:nvSpPr>
-        <p:spPr>
-          <a:xfrm xmlns:a="http://schemas.openxmlformats.org/drawingml/2006/main">
-            <a:off x="876300" y="4476750"/>
-            <a:ext cx="2476500" cy="247650"/>
+      <p:pic>
+        <p:nvPicPr>
+          <p:cNvPr id="21" name=""/>
+          <p:cNvPicPr>
+            <a:picLocks xmlns:a="http://schemas.openxmlformats.org/drawingml/2006/main" noChangeAspect="1"/>
+          </p:cNvPicPr>
+          <p:nvPr/>
+        </p:nvPicPr>
+        <p:blipFill>
+          <a:blip xmlns:r="http://schemas.openxmlformats.org/officeDocument/2006/relationships" xmlns:a="http://schemas.openxmlformats.org/drawingml/2006/main" r:embed="Rd57a5f40dcbc4b30"/>
+          <a:stretch xmlns:a="http://schemas.openxmlformats.org/drawingml/2006/main"/>
+        </p:blipFill>
+        <p:spPr>
+          <a:xfrm xmlns:a="http://schemas.openxmlformats.org/drawingml/2006/main">
+            <a:off x="609600" y="1639599"/>
+            <a:ext cx="8096250" cy="3312102"/>
+          </a:xfrm>
+          <a:prstGeom xmlns:a="http://schemas.openxmlformats.org/drawingml/2006/main" prst="rect">
+            <a:avLst/>
+          </a:prstGeom>
+        </p:spPr>
+      </p:pic>
+      <p:sp>
+        <p:nvSpPr>
+          <p:cNvPr id="5" name="">
+            <a:extLst xmlns:a="http://schemas.openxmlformats.org/drawingml/2006/main">
+              <a:ext uri="{FF2B5EF4-FFF2-40B4-BE49-F238E27FC236}">
+                <a16:creationId xmlns:a16="http://schemas.microsoft.com/office/drawing/2014/main" id="{7CF99DC3-46DA-4C50-A7AB-F7F9121931B6}"/>
+              </a:ext>
+            </a:extLst>
+          </p:cNvPr>
+          <p:cNvSpPr>
+            <a:spLocks xmlns:a="http://schemas.openxmlformats.org/drawingml/2006/main" noGrp="1"/>
+          </p:cNvSpPr>
+          <p:nvPr/>
+        </p:nvSpPr>
+        <p:spPr>
+          <a:xfrm xmlns:a="http://schemas.openxmlformats.org/drawingml/2006/main">
+            <a:off x="9124950" y="1743075"/>
+            <a:ext cx="1905000" cy="590550"/>
           </a:xfrm>
           <a:prstGeom xmlns:a="http://schemas.openxmlformats.org/drawingml/2006/main" prst="rect">
             <a:avLst/>
@@ -11829,47 +13844,47 @@
                 <a:spcPct val="105000"/>
               </a:lnSpc>
               <a:buNone/>
-              <a:defRPr sz="1050" b="1" i="0">
-                <a:solidFill>
-                  <a:srgbClr val="35C47A"/>
-                </a:solidFill>
-                <a:latin typeface="Arial"/>
-                <a:ea typeface="Arial"/>
-                <a:cs typeface="Arial"/>
-              </a:defRPr>
-            </a:pPr>
-            <a:r>
-              <a:rPr sz="1050" b="1" i="0">
-                <a:solidFill>
-                  <a:srgbClr val="35C47A"/>
-                </a:solidFill>
-                <a:latin typeface="Arial"/>
-                <a:ea typeface="Arial"/>
-                <a:cs typeface="Arial"/>
-              </a:rPr>
-              <a:t>LIVE RESEARCH DEMO</a:t>
-            </a:r>
-          </a:p>
-        </p:txBody>
-      </p:sp>
-      <p:sp>
-        <p:nvSpPr>
-          <p:cNvPr id="12" name="">
-            <a:extLst xmlns:a="http://schemas.openxmlformats.org/drawingml/2006/main">
-              <a:ext uri="{FF2B5EF4-FFF2-40B4-BE49-F238E27FC236}">
-                <a16:creationId xmlns:a16="http://schemas.microsoft.com/office/drawing/2014/main" id="{0FFF0FBF-4B00-4D8A-9F3A-1D607A30B64F}"/>
-              </a:ext>
-            </a:extLst>
-          </p:cNvPr>
-          <p:cNvSpPr>
-            <a:spLocks xmlns:a="http://schemas.openxmlformats.org/drawingml/2006/main" noGrp="1"/>
-          </p:cNvSpPr>
-          <p:nvPr/>
-        </p:nvSpPr>
-        <p:spPr>
-          <a:xfrm xmlns:a="http://schemas.openxmlformats.org/drawingml/2006/main">
-            <a:off x="876300" y="4810125"/>
-            <a:ext cx="5715000" cy="342900"/>
+              <a:defRPr sz="3600" b="1" i="0">
+                <a:solidFill>
+                  <a:srgbClr val="122033"/>
+                </a:solidFill>
+                <a:latin typeface="Arial"/>
+                <a:ea typeface="Arial"/>
+                <a:cs typeface="Arial"/>
+              </a:defRPr>
+            </a:pPr>
+            <a:r>
+              <a:rPr sz="3600" b="1" i="0">
+                <a:solidFill>
+                  <a:srgbClr val="122033"/>
+                </a:solidFill>
+                <a:latin typeface="Arial"/>
+                <a:ea typeface="Arial"/>
+                <a:cs typeface="Arial"/>
+              </a:rPr>
+              <a:t>59</a:t>
+            </a:r>
+          </a:p>
+        </p:txBody>
+      </p:sp>
+      <p:sp>
+        <p:nvSpPr>
+          <p:cNvPr id="6" name="">
+            <a:extLst xmlns:a="http://schemas.openxmlformats.org/drawingml/2006/main">
+              <a:ext uri="{FF2B5EF4-FFF2-40B4-BE49-F238E27FC236}">
+                <a16:creationId xmlns:a16="http://schemas.microsoft.com/office/drawing/2014/main" id="{4980EC7F-0C01-4620-806B-2A55C530F0D7}"/>
+              </a:ext>
+            </a:extLst>
+          </p:cNvPr>
+          <p:cNvSpPr>
+            <a:spLocks xmlns:a="http://schemas.openxmlformats.org/drawingml/2006/main" noGrp="1"/>
+          </p:cNvSpPr>
+          <p:nvPr/>
+        </p:nvSpPr>
+        <p:spPr>
+          <a:xfrm xmlns:a="http://schemas.openxmlformats.org/drawingml/2006/main">
+            <a:off x="9144000" y="2276475"/>
+            <a:ext cx="2190750" cy="266700"/>
           </a:xfrm>
           <a:prstGeom xmlns:a="http://schemas.openxmlformats.org/drawingml/2006/main" prst="rect">
             <a:avLst/>
@@ -11890,48 +13905,78 @@
                 <a:spcPct val="105000"/>
               </a:lnSpc>
               <a:buNone/>
-              <a:defRPr sz="1725" b="1" i="0">
-                <a:solidFill>
-                  <a:srgbClr val="FFFFFF"/>
-                </a:solidFill>
-                <a:latin typeface="Arial"/>
-                <a:ea typeface="Arial"/>
-                <a:cs typeface="Arial"/>
-              </a:defRPr>
-            </a:pPr>
-            <a:r>
-              <a:rPr sz="1725" b="1" i="0">
-                <a:solidFill>
-                  <a:srgbClr val="FFFFFF"/>
-                </a:solidFill>
-                <a:latin typeface="Arial"/>
-                <a:ea typeface="Arial"/>
-                <a:cs typeface="Arial"/>
-                <a:hlinkClick xmlns:r="http://schemas.openxmlformats.org/officeDocument/2006/relationships" r:id="R5d377faf54854c65"/>
-              </a:rPr>
-              <a:t>masterasnackin.github.io/FormulaBench/</a:t>
-            </a:r>
-          </a:p>
-        </p:txBody>
-      </p:sp>
-      <p:sp>
-        <p:nvSpPr>
-          <p:cNvPr id="13" name="">
-            <a:extLst xmlns:a="http://schemas.openxmlformats.org/drawingml/2006/main">
-              <a:ext uri="{FF2B5EF4-FFF2-40B4-BE49-F238E27FC236}">
-                <a16:creationId xmlns:a16="http://schemas.microsoft.com/office/drawing/2014/main" id="{13A365F8-1658-4D42-85D7-E12F633B7654}"/>
-              </a:ext>
-            </a:extLst>
-          </p:cNvPr>
-          <p:cNvSpPr>
-            <a:spLocks xmlns:a="http://schemas.openxmlformats.org/drawingml/2006/main" noGrp="1"/>
-          </p:cNvSpPr>
-          <p:nvPr/>
-        </p:nvSpPr>
-        <p:spPr>
-          <a:xfrm xmlns:a="http://schemas.openxmlformats.org/drawingml/2006/main">
-            <a:off x="7239000" y="4476750"/>
-            <a:ext cx="2667000" cy="247650"/>
+              <a:defRPr sz="1275" b="1" i="0">
+                <a:solidFill>
+                  <a:srgbClr val="35C47A"/>
+                </a:solidFill>
+                <a:latin typeface="Arial"/>
+                <a:ea typeface="Arial"/>
+                <a:cs typeface="Arial"/>
+              </a:defRPr>
+            </a:pPr>
+            <a:r>
+              <a:rPr sz="1275" b="1" i="0">
+                <a:solidFill>
+                  <a:srgbClr val="35C47A"/>
+                </a:solidFill>
+                <a:latin typeface="Arial"/>
+                <a:ea typeface="Arial"/>
+                <a:cs typeface="Arial"/>
+              </a:rPr>
+              <a:t>training examples</a:t>
+            </a:r>
+          </a:p>
+        </p:txBody>
+      </p:sp>
+      <p:sp>
+        <p:nvSpPr>
+          <p:cNvPr id="7" name="">
+            <a:extLst xmlns:a="http://schemas.openxmlformats.org/drawingml/2006/main">
+              <a:ext uri="{FF2B5EF4-FFF2-40B4-BE49-F238E27FC236}">
+                <a16:creationId xmlns:a16="http://schemas.microsoft.com/office/drawing/2014/main" id="{DE0F24E6-C695-46E8-8815-EB789FD19E74}"/>
+              </a:ext>
+            </a:extLst>
+          </p:cNvPr>
+          <p:cNvSpPr>
+            <a:spLocks xmlns:a="http://schemas.openxmlformats.org/drawingml/2006/main" noGrp="1"/>
+          </p:cNvSpPr>
+          <p:nvPr/>
+        </p:nvSpPr>
+        <p:spPr>
+          <a:xfrm xmlns:a="http://schemas.openxmlformats.org/drawingml/2006/main">
+            <a:off x="9124950" y="2724150"/>
+            <a:ext cx="2457450" cy="0"/>
+          </a:xfrm>
+          <a:prstGeom xmlns:a="http://schemas.openxmlformats.org/drawingml/2006/main" prst="line">
+            <a:avLst/>
+          </a:prstGeom>
+          <a:noFill xmlns:a="http://schemas.openxmlformats.org/drawingml/2006/main"/>
+          <a:ln xmlns:a="http://schemas.openxmlformats.org/drawingml/2006/main" w="9525">
+            <a:solidFill>
+              <a:srgbClr val="C9D1D9"/>
+            </a:solidFill>
+            <a:prstDash val="solid"/>
+          </a:ln>
+        </p:spPr>
+      </p:sp>
+      <p:sp>
+        <p:nvSpPr>
+          <p:cNvPr id="8" name="">
+            <a:extLst xmlns:a="http://schemas.openxmlformats.org/drawingml/2006/main">
+              <a:ext uri="{FF2B5EF4-FFF2-40B4-BE49-F238E27FC236}">
+                <a16:creationId xmlns:a16="http://schemas.microsoft.com/office/drawing/2014/main" id="{A55667C7-4F09-4108-A7FE-E9D98BD2CACC}"/>
+              </a:ext>
+            </a:extLst>
+          </p:cNvPr>
+          <p:cNvSpPr>
+            <a:spLocks xmlns:a="http://schemas.openxmlformats.org/drawingml/2006/main" noGrp="1"/>
+          </p:cNvSpPr>
+          <p:nvPr/>
+        </p:nvSpPr>
+        <p:spPr>
+          <a:xfrm xmlns:a="http://schemas.openxmlformats.org/drawingml/2006/main">
+            <a:off x="9124950" y="2914650"/>
+            <a:ext cx="2095500" cy="514350"/>
           </a:xfrm>
           <a:prstGeom xmlns:a="http://schemas.openxmlformats.org/drawingml/2006/main" prst="rect">
             <a:avLst/>
@@ -11952,47 +13997,47 @@
                 <a:spcPct val="105000"/>
               </a:lnSpc>
               <a:buNone/>
-              <a:defRPr sz="1050" b="1" i="0">
-                <a:solidFill>
-                  <a:srgbClr val="35C47A"/>
-                </a:solidFill>
-                <a:latin typeface="Arial"/>
-                <a:ea typeface="Arial"/>
-                <a:cs typeface="Arial"/>
-              </a:defRPr>
-            </a:pPr>
-            <a:r>
-              <a:rPr sz="1050" b="1" i="0">
-                <a:solidFill>
-                  <a:srgbClr val="35C47A"/>
-                </a:solidFill>
-                <a:latin typeface="Arial"/>
-                <a:ea typeface="Arial"/>
-                <a:cs typeface="Arial"/>
-              </a:rPr>
-              <a:t>PUBLIC REPOSITORY</a:t>
-            </a:r>
-          </a:p>
-        </p:txBody>
-      </p:sp>
-      <p:sp>
-        <p:nvSpPr>
-          <p:cNvPr id="14" name="">
-            <a:extLst xmlns:a="http://schemas.openxmlformats.org/drawingml/2006/main">
-              <a:ext uri="{FF2B5EF4-FFF2-40B4-BE49-F238E27FC236}">
-                <a16:creationId xmlns:a16="http://schemas.microsoft.com/office/drawing/2014/main" id="{73E54F95-53FF-44C0-BA28-20C7F943BD98}"/>
-              </a:ext>
-            </a:extLst>
-          </p:cNvPr>
-          <p:cNvSpPr>
-            <a:spLocks xmlns:a="http://schemas.openxmlformats.org/drawingml/2006/main" noGrp="1"/>
-          </p:cNvSpPr>
-          <p:nvPr/>
-        </p:nvSpPr>
-        <p:spPr>
-          <a:xfrm xmlns:a="http://schemas.openxmlformats.org/drawingml/2006/main">
-            <a:off x="7239000" y="4810125"/>
-            <a:ext cx="4095750" cy="342900"/>
+              <a:defRPr sz="2925" b="1" i="0">
+                <a:solidFill>
+                  <a:srgbClr val="122033"/>
+                </a:solidFill>
+                <a:latin typeface="Arial"/>
+                <a:ea typeface="Arial"/>
+                <a:cs typeface="Arial"/>
+              </a:defRPr>
+            </a:pPr>
+            <a:r>
+              <a:rPr sz="2925" b="1" i="0">
+                <a:solidFill>
+                  <a:srgbClr val="122033"/>
+                </a:solidFill>
+                <a:latin typeface="Arial"/>
+                <a:ea typeface="Arial"/>
+                <a:cs typeface="Arial"/>
+              </a:rPr>
+              <a:t>15 / 15</a:t>
+            </a:r>
+          </a:p>
+        </p:txBody>
+      </p:sp>
+      <p:sp>
+        <p:nvSpPr>
+          <p:cNvPr id="9" name="">
+            <a:extLst xmlns:a="http://schemas.openxmlformats.org/drawingml/2006/main">
+              <a:ext uri="{FF2B5EF4-FFF2-40B4-BE49-F238E27FC236}">
+                <a16:creationId xmlns:a16="http://schemas.microsoft.com/office/drawing/2014/main" id="{0187C9B4-4416-477A-9AB1-767C148A09EB}"/>
+              </a:ext>
+            </a:extLst>
+          </p:cNvPr>
+          <p:cNvSpPr>
+            <a:spLocks xmlns:a="http://schemas.openxmlformats.org/drawingml/2006/main" noGrp="1"/>
+          </p:cNvSpPr>
+          <p:nvPr/>
+        </p:nvSpPr>
+        <p:spPr>
+          <a:xfrm xmlns:a="http://schemas.openxmlformats.org/drawingml/2006/main">
+            <a:off x="9144000" y="3429000"/>
+            <a:ext cx="2381250" cy="285750"/>
           </a:xfrm>
           <a:prstGeom xmlns:a="http://schemas.openxmlformats.org/drawingml/2006/main" prst="rect">
             <a:avLst/>
@@ -12013,48 +14058,78 @@
                 <a:spcPct val="105000"/>
               </a:lnSpc>
               <a:buNone/>
-              <a:defRPr sz="1350" b="1" i="0">
-                <a:solidFill>
-                  <a:srgbClr val="FFFFFF"/>
-                </a:solidFill>
-                <a:latin typeface="Arial"/>
-                <a:ea typeface="Arial"/>
-                <a:cs typeface="Arial"/>
-              </a:defRPr>
-            </a:pPr>
-            <a:r>
-              <a:rPr sz="1350" b="1" i="0">
-                <a:solidFill>
-                  <a:srgbClr val="FFFFFF"/>
-                </a:solidFill>
-                <a:latin typeface="Arial"/>
-                <a:ea typeface="Arial"/>
-                <a:cs typeface="Arial"/>
-                <a:hlinkClick xmlns:r="http://schemas.openxmlformats.org/officeDocument/2006/relationships" r:id="R8750e96bf4884b43"/>
-              </a:rPr>
-              <a:t>github.com/MasteraSnackin/FormulaBench</a:t>
-            </a:r>
-          </a:p>
-        </p:txBody>
-      </p:sp>
-      <p:sp>
-        <p:nvSpPr>
-          <p:cNvPr id="15" name="">
-            <a:extLst xmlns:a="http://schemas.openxmlformats.org/drawingml/2006/main">
-              <a:ext uri="{FF2B5EF4-FFF2-40B4-BE49-F238E27FC236}">
-                <a16:creationId xmlns:a16="http://schemas.microsoft.com/office/drawing/2014/main" id="{EB05174A-A6F9-41A4-92FA-FCD1F41E10EC}"/>
-              </a:ext>
-            </a:extLst>
-          </p:cNvPr>
-          <p:cNvSpPr>
-            <a:spLocks xmlns:a="http://schemas.openxmlformats.org/drawingml/2006/main" noGrp="1"/>
-          </p:cNvSpPr>
-          <p:nvPr/>
-        </p:nvSpPr>
-        <p:spPr>
-          <a:xfrm xmlns:a="http://schemas.openxmlformats.org/drawingml/2006/main">
-            <a:off x="609600" y="5962650"/>
-            <a:ext cx="9048750" cy="285750"/>
+              <a:defRPr sz="1275" b="1" i="0">
+                <a:solidFill>
+                  <a:srgbClr val="35C47A"/>
+                </a:solidFill>
+                <a:latin typeface="Arial"/>
+                <a:ea typeface="Arial"/>
+                <a:cs typeface="Arial"/>
+              </a:defRPr>
+            </a:pPr>
+            <a:r>
+              <a:rPr sz="1275" b="1" i="0">
+                <a:solidFill>
+                  <a:srgbClr val="35C47A"/>
+                </a:solidFill>
+                <a:latin typeface="Arial"/>
+                <a:ea typeface="Arial"/>
+                <a:cs typeface="Arial"/>
+              </a:rPr>
+              <a:t>optimiser steps completed</a:t>
+            </a:r>
+          </a:p>
+        </p:txBody>
+      </p:sp>
+      <p:sp>
+        <p:nvSpPr>
+          <p:cNvPr id="10" name="">
+            <a:extLst xmlns:a="http://schemas.openxmlformats.org/drawingml/2006/main">
+              <a:ext uri="{FF2B5EF4-FFF2-40B4-BE49-F238E27FC236}">
+                <a16:creationId xmlns:a16="http://schemas.microsoft.com/office/drawing/2014/main" id="{1AE34F8F-5210-4EAD-A70E-AC973D9D45CF}"/>
+              </a:ext>
+            </a:extLst>
+          </p:cNvPr>
+          <p:cNvSpPr>
+            <a:spLocks xmlns:a="http://schemas.openxmlformats.org/drawingml/2006/main" noGrp="1"/>
+          </p:cNvSpPr>
+          <p:nvPr/>
+        </p:nvSpPr>
+        <p:spPr>
+          <a:xfrm xmlns:a="http://schemas.openxmlformats.org/drawingml/2006/main">
+            <a:off x="9124950" y="3886200"/>
+            <a:ext cx="2457450" cy="0"/>
+          </a:xfrm>
+          <a:prstGeom xmlns:a="http://schemas.openxmlformats.org/drawingml/2006/main" prst="line">
+            <a:avLst/>
+          </a:prstGeom>
+          <a:noFill xmlns:a="http://schemas.openxmlformats.org/drawingml/2006/main"/>
+          <a:ln xmlns:a="http://schemas.openxmlformats.org/drawingml/2006/main" w="9525">
+            <a:solidFill>
+              <a:srgbClr val="C9D1D9"/>
+            </a:solidFill>
+            <a:prstDash val="solid"/>
+          </a:ln>
+        </p:spPr>
+      </p:sp>
+      <p:sp>
+        <p:nvSpPr>
+          <p:cNvPr id="11" name="">
+            <a:extLst xmlns:a="http://schemas.openxmlformats.org/drawingml/2006/main">
+              <a:ext uri="{FF2B5EF4-FFF2-40B4-BE49-F238E27FC236}">
+                <a16:creationId xmlns:a16="http://schemas.microsoft.com/office/drawing/2014/main" id="{E02FAA2E-B0E0-4287-B4B0-57A315BCA8A5}"/>
+              </a:ext>
+            </a:extLst>
+          </p:cNvPr>
+          <p:cNvSpPr>
+            <a:spLocks xmlns:a="http://schemas.openxmlformats.org/drawingml/2006/main" noGrp="1"/>
+          </p:cNvSpPr>
+          <p:nvPr/>
+        </p:nvSpPr>
+        <p:spPr>
+          <a:xfrm xmlns:a="http://schemas.openxmlformats.org/drawingml/2006/main">
+            <a:off x="9124950" y="4076700"/>
+            <a:ext cx="2381250" cy="457200"/>
           </a:xfrm>
           <a:prstGeom xmlns:a="http://schemas.openxmlformats.org/drawingml/2006/main" prst="rect">
             <a:avLst/>
@@ -12075,35 +14150,218 @@
                 <a:spcPct val="105000"/>
               </a:lnSpc>
               <a:buNone/>
-              <a:defRPr sz="1425" b="0" i="0">
-                <a:solidFill>
-                  <a:srgbClr val="AAB6C5"/>
-                </a:solidFill>
-                <a:latin typeface="Arial"/>
-                <a:ea typeface="Arial"/>
-                <a:cs typeface="Arial"/>
-              </a:defRPr>
-            </a:pPr>
-            <a:r>
-              <a:rPr sz="1425" b="0" i="0">
-                <a:solidFill>
-                  <a:srgbClr val="AAB6C5"/>
-                </a:solidFill>
-                <a:latin typeface="Arial"/>
-                <a:ea typeface="Arial"/>
-                <a:cs typeface="Arial"/>
-              </a:rPr>
-              <a:t>The organiser's private benchmark is the unseen evaluation.</a:t>
-            </a:r>
-          </a:p>
-        </p:txBody>
-      </p:sp>
-      <p:sp>
-        <p:nvSpPr>
-          <p:cNvPr id="16" name="">
-            <a:extLst xmlns:a="http://schemas.openxmlformats.org/drawingml/2006/main">
-              <a:ext uri="{FF2B5EF4-FFF2-40B4-BE49-F238E27FC236}">
-                <a16:creationId xmlns:a16="http://schemas.microsoft.com/office/drawing/2014/main" id="{0968B974-B0F5-4407-9C64-D6F15BCCD2B2}"/>
+              <a:defRPr sz="2550" b="1" i="0">
+                <a:solidFill>
+                  <a:srgbClr val="122033"/>
+                </a:solidFill>
+                <a:latin typeface="Arial"/>
+                <a:ea typeface="Arial"/>
+                <a:cs typeface="Arial"/>
+              </a:defRPr>
+            </a:pPr>
+            <a:r>
+              <a:rPr sz="2550" b="1" i="0">
+                <a:solidFill>
+                  <a:srgbClr val="122033"/>
+                </a:solidFill>
+                <a:latin typeface="Arial"/>
+                <a:ea typeface="Arial"/>
+                <a:cs typeface="Arial"/>
+              </a:rPr>
+              <a:t>468,690</a:t>
+            </a:r>
+          </a:p>
+        </p:txBody>
+      </p:sp>
+      <p:sp>
+        <p:nvSpPr>
+          <p:cNvPr id="12" name="">
+            <a:extLst xmlns:a="http://schemas.openxmlformats.org/drawingml/2006/main">
+              <a:ext uri="{FF2B5EF4-FFF2-40B4-BE49-F238E27FC236}">
+                <a16:creationId xmlns:a16="http://schemas.microsoft.com/office/drawing/2014/main" id="{8097AE53-A6D2-40F8-9C16-668D8A7BE0A4}"/>
+              </a:ext>
+            </a:extLst>
+          </p:cNvPr>
+          <p:cNvSpPr>
+            <a:spLocks xmlns:a="http://schemas.openxmlformats.org/drawingml/2006/main" noGrp="1"/>
+          </p:cNvSpPr>
+          <p:nvPr/>
+        </p:nvSpPr>
+        <p:spPr>
+          <a:xfrm xmlns:a="http://schemas.openxmlformats.org/drawingml/2006/main">
+            <a:off x="9144000" y="4533900"/>
+            <a:ext cx="2190750" cy="266700"/>
+          </a:xfrm>
+          <a:prstGeom xmlns:a="http://schemas.openxmlformats.org/drawingml/2006/main" prst="rect">
+            <a:avLst/>
+          </a:prstGeom>
+          <a:noFill xmlns:a="http://schemas.openxmlformats.org/drawingml/2006/main"/>
+          <a:ln xmlns:a="http://schemas.openxmlformats.org/drawingml/2006/main" w="0">
+            <a:noFill/>
+          </a:ln>
+        </p:spPr>
+        <p:txBody>
+          <a:bodyPr xmlns:a="http://schemas.openxmlformats.org/drawingml/2006/main" wrap="square" lIns="0" tIns="0" rIns="0" bIns="0" anchor="t">
+            <a:normAutofit fontScale="100000"/>
+          </a:bodyPr>
+          <a:lstStyle xmlns:a="http://schemas.openxmlformats.org/drawingml/2006/main"/>
+          <a:p xmlns:a="http://schemas.openxmlformats.org/drawingml/2006/main">
+            <a:pPr algn="l">
+              <a:lnSpc>
+                <a:spcPct val="105000"/>
+              </a:lnSpc>
+              <a:buNone/>
+              <a:defRPr sz="1275" b="1" i="0">
+                <a:solidFill>
+                  <a:srgbClr val="35C47A"/>
+                </a:solidFill>
+                <a:latin typeface="Arial"/>
+                <a:ea typeface="Arial"/>
+                <a:cs typeface="Arial"/>
+              </a:defRPr>
+            </a:pPr>
+            <a:r>
+              <a:rPr sz="1275" b="1" i="0">
+                <a:solidFill>
+                  <a:srgbClr val="35C47A"/>
+                </a:solidFill>
+                <a:latin typeface="Arial"/>
+                <a:ea typeface="Arial"/>
+                <a:cs typeface="Arial"/>
+              </a:rPr>
+              <a:t>training tokens</a:t>
+            </a:r>
+          </a:p>
+        </p:txBody>
+      </p:sp>
+      <p:sp>
+        <p:nvSpPr>
+          <p:cNvPr id="13" name="">
+            <a:extLst xmlns:a="http://schemas.openxmlformats.org/drawingml/2006/main">
+              <a:ext uri="{FF2B5EF4-FFF2-40B4-BE49-F238E27FC236}">
+                <a16:creationId xmlns:a16="http://schemas.microsoft.com/office/drawing/2014/main" id="{2C6813A2-6D3B-41A2-89EA-222165F35FD6}"/>
+              </a:ext>
+            </a:extLst>
+          </p:cNvPr>
+          <p:cNvSpPr>
+            <a:spLocks xmlns:a="http://schemas.openxmlformats.org/drawingml/2006/main" noGrp="1"/>
+          </p:cNvSpPr>
+          <p:nvPr/>
+        </p:nvSpPr>
+        <p:spPr>
+          <a:xfrm xmlns:a="http://schemas.openxmlformats.org/drawingml/2006/main">
+            <a:off x="609600" y="5267325"/>
+            <a:ext cx="10972800" cy="666750"/>
+          </a:xfrm>
+          <a:prstGeom xmlns:a="http://schemas.openxmlformats.org/drawingml/2006/main" prst="rect">
+            <a:avLst/>
+          </a:prstGeom>
+          <a:noFill xmlns:a="http://schemas.openxmlformats.org/drawingml/2006/main"/>
+          <a:ln xmlns:a="http://schemas.openxmlformats.org/drawingml/2006/main" w="0">
+            <a:noFill/>
+          </a:ln>
+        </p:spPr>
+        <p:txBody>
+          <a:bodyPr xmlns:a="http://schemas.openxmlformats.org/drawingml/2006/main" wrap="square" lIns="0" tIns="0" rIns="0" bIns="0" anchor="t">
+            <a:normAutofit fontScale="100000"/>
+          </a:bodyPr>
+          <a:lstStyle xmlns:a="http://schemas.openxmlformats.org/drawingml/2006/main"/>
+          <a:p xmlns:a="http://schemas.openxmlformats.org/drawingml/2006/main">
+            <a:pPr algn="l">
+              <a:lnSpc>
+                <a:spcPct val="115000"/>
+              </a:lnSpc>
+              <a:buNone/>
+              <a:defRPr sz="1500" b="0" i="0">
+                <a:solidFill>
+                  <a:srgbClr val="122033"/>
+                </a:solidFill>
+                <a:latin typeface="Arial"/>
+                <a:ea typeface="Arial"/>
+                <a:cs typeface="Arial"/>
+              </a:defRPr>
+            </a:pPr>
+            <a:r>
+              <a:rPr sz="1500" b="0" i="0">
+                <a:solidFill>
+                  <a:srgbClr val="122033"/>
+                </a:solidFill>
+                <a:latin typeface="Arial"/>
+                <a:ea typeface="Arial"/>
+                <a:cs typeface="Arial"/>
+              </a:rPr>
+              <a:t>The charts record training activity. Tinker did not export one exact average throughput or utilisation figure, and neither metric measures workbook correctness.</a:t>
+            </a:r>
+          </a:p>
+        </p:txBody>
+      </p:sp>
+      <p:sp>
+        <p:nvSpPr>
+          <p:cNvPr id="14" name="">
+            <a:extLst xmlns:a="http://schemas.openxmlformats.org/drawingml/2006/main">
+              <a:ext uri="{FF2B5EF4-FFF2-40B4-BE49-F238E27FC236}">
+                <a16:creationId xmlns:a16="http://schemas.microsoft.com/office/drawing/2014/main" id="{B277C840-D7DA-4D9F-BF62-B7839AF31253}"/>
+              </a:ext>
+            </a:extLst>
+          </p:cNvPr>
+          <p:cNvSpPr>
+            <a:spLocks xmlns:a="http://schemas.openxmlformats.org/drawingml/2006/main" noGrp="1"/>
+          </p:cNvSpPr>
+          <p:nvPr/>
+        </p:nvSpPr>
+        <p:spPr>
+          <a:xfrm xmlns:a="http://schemas.openxmlformats.org/drawingml/2006/main">
+            <a:off x="609600" y="5962650"/>
+            <a:ext cx="10572750" cy="285750"/>
+          </a:xfrm>
+          <a:prstGeom xmlns:a="http://schemas.openxmlformats.org/drawingml/2006/main" prst="rect">
+            <a:avLst/>
+          </a:prstGeom>
+          <a:noFill xmlns:a="http://schemas.openxmlformats.org/drawingml/2006/main"/>
+          <a:ln xmlns:a="http://schemas.openxmlformats.org/drawingml/2006/main" w="0">
+            <a:noFill/>
+          </a:ln>
+        </p:spPr>
+        <p:txBody>
+          <a:bodyPr xmlns:a="http://schemas.openxmlformats.org/drawingml/2006/main" wrap="square" lIns="0" tIns="0" rIns="0" bIns="0" anchor="t">
+            <a:normAutofit fontScale="100000"/>
+          </a:bodyPr>
+          <a:lstStyle xmlns:a="http://schemas.openxmlformats.org/drawingml/2006/main"/>
+          <a:p xmlns:a="http://schemas.openxmlformats.org/drawingml/2006/main">
+            <a:pPr algn="l">
+              <a:lnSpc>
+                <a:spcPct val="105000"/>
+              </a:lnSpc>
+              <a:buNone/>
+              <a:defRPr sz="1275" b="0" i="0">
+                <a:solidFill>
+                  <a:srgbClr val="667487"/>
+                </a:solidFill>
+                <a:latin typeface="Arial"/>
+                <a:ea typeface="Arial"/>
+                <a:cs typeface="Arial"/>
+              </a:defRPr>
+            </a:pPr>
+            <a:r>
+              <a:rPr sz="1275" b="0" i="0">
+                <a:solidFill>
+                  <a:srgbClr val="667487"/>
+                </a:solidFill>
+                <a:latin typeface="Arial"/>
+                <a:ea typeface="Arial"/>
+                <a:cs typeface="Arial"/>
+              </a:rPr>
+              <a:t>Validation NLL decreased from 0.060939 to 0.015557. This measures label prediction, not spreadsheet accuracy.</a:t>
+            </a:r>
+          </a:p>
+        </p:txBody>
+      </p:sp>
+      <p:sp>
+        <p:nvSpPr>
+          <p:cNvPr id="15" name="">
+            <a:extLst xmlns:a="http://schemas.openxmlformats.org/drawingml/2006/main">
+              <a:ext uri="{FF2B5EF4-FFF2-40B4-BE49-F238E27FC236}">
+                <a16:creationId xmlns:a16="http://schemas.microsoft.com/office/drawing/2014/main" id="{61A4DA2E-3DFC-4F8B-A9C0-00323BE225B4}"/>
               </a:ext>
             </a:extLst>
           </p:cNvPr>
@@ -12123,7 +14381,7 @@
           <a:noFill xmlns:a="http://schemas.openxmlformats.org/drawingml/2006/main"/>
           <a:ln xmlns:a="http://schemas.openxmlformats.org/drawingml/2006/main" w="9525">
             <a:solidFill>
-              <a:srgbClr val="344257"/>
+              <a:srgbClr val="C9D1D9"/>
             </a:solidFill>
             <a:prstDash val="solid"/>
           </a:ln>
@@ -12131,10 +14389,10 @@
       </p:sp>
       <p:sp>
         <p:nvSpPr>
-          <p:cNvPr id="17" name="">
-            <a:extLst xmlns:a="http://schemas.openxmlformats.org/drawingml/2006/main">
-              <a:ext uri="{FF2B5EF4-FFF2-40B4-BE49-F238E27FC236}">
-                <a16:creationId xmlns:a16="http://schemas.microsoft.com/office/drawing/2014/main" id="{94CF7A9D-E580-44A3-8155-0C34EDE680C3}"/>
+          <p:cNvPr id="16" name="">
+            <a:extLst xmlns:a="http://schemas.openxmlformats.org/drawingml/2006/main">
+              <a:ext uri="{FF2B5EF4-FFF2-40B4-BE49-F238E27FC236}">
+                <a16:creationId xmlns:a16="http://schemas.microsoft.com/office/drawing/2014/main" id="{26E89899-954A-4D84-8EF0-9C5BCCAF9653}"/>
               </a:ext>
             </a:extLst>
           </p:cNvPr>
@@ -12169,7 +14427,7 @@
               <a:buNone/>
               <a:defRPr sz="900" b="1" i="0">
                 <a:solidFill>
-                  <a:srgbClr val="AAB6C5"/>
+                  <a:srgbClr val="667487"/>
                 </a:solidFill>
                 <a:latin typeface="Arial"/>
                 <a:ea typeface="Arial"/>
@@ -12179,7 +14437,7 @@
             <a:r>
               <a:rPr sz="900" b="1" i="0">
                 <a:solidFill>
-                  <a:srgbClr val="AAB6C5"/>
+                  <a:srgbClr val="667487"/>
                 </a:solidFill>
                 <a:latin typeface="Arial"/>
                 <a:ea typeface="Arial"/>
@@ -12192,10 +14450,10 @@
       </p:sp>
       <p:sp>
         <p:nvSpPr>
-          <p:cNvPr id="18" name="">
-            <a:extLst xmlns:a="http://schemas.openxmlformats.org/drawingml/2006/main">
-              <a:ext uri="{FF2B5EF4-FFF2-40B4-BE49-F238E27FC236}">
-                <a16:creationId xmlns:a16="http://schemas.microsoft.com/office/drawing/2014/main" id="{D9C62D9F-0DE4-459E-8AD8-8E1D7C093A12}"/>
+          <p:cNvPr id="17" name="">
+            <a:extLst xmlns:a="http://schemas.openxmlformats.org/drawingml/2006/main">
+              <a:ext uri="{FF2B5EF4-FFF2-40B4-BE49-F238E27FC236}">
+                <a16:creationId xmlns:a16="http://schemas.microsoft.com/office/drawing/2014/main" id="{2E3A49E9-A918-4980-88D9-3017A2D75C49}"/>
               </a:ext>
             </a:extLst>
           </p:cNvPr>
@@ -12230,7 +14488,7 @@
               <a:buNone/>
               <a:defRPr sz="900" b="1" i="0">
                 <a:solidFill>
-                  <a:srgbClr val="AAB6C5"/>
+                  <a:srgbClr val="667487"/>
                 </a:solidFill>
                 <a:latin typeface="Arial"/>
                 <a:ea typeface="Arial"/>
@@ -12240,7 +14498,7 @@
             <a:r>
               <a:rPr sz="900" b="1" i="0">
                 <a:solidFill>
-                  <a:srgbClr val="AAB6C5"/>
+                  <a:srgbClr val="667487"/>
                 </a:solidFill>
                 <a:latin typeface="Arial"/>
                 <a:ea typeface="Arial"/>
@@ -12254,7 +14512,7 @@
     </p:spTree>
     <p:extLst>
       <p:ext uri="{BB962C8B-B14F-4D97-AF65-F5344CB8AC3E}">
-        <p14:creationId xmlns:p14="http://schemas.microsoft.com/office/powerpoint/2010/main" val="1683226110"/>
+        <p14:creationId xmlns:p14="http://schemas.microsoft.com/office/powerpoint/2010/main" val="1057270694"/>
       </p:ext>
     </p:extLst>
   </p:cSld>
